--- a/presentations/what-is-the-second-pair-of-eyes-for.pptx
+++ b/presentations/what-is-the-second-pair-of-eyes-for.pptx
@@ -33,6 +33,11 @@
     <p:sldId id="281" r:id="rId33"/>
     <p:sldId id="282" r:id="rId34"/>
     <p:sldId id="283" r:id="rId35"/>
+    <p:sldId id="284" r:id="rId36"/>
+    <p:sldId id="285" r:id="rId37"/>
+    <p:sldId id="286" r:id="rId38"/>
+    <p:sldId id="287" r:id="rId39"/>
+    <p:sldId id="288" r:id="rId40"/>
   </p:sldIdLst>
   <p:sldSz cx="12191695" cy="6858000" type="screen4x3"/>
   <p:notesSz cx="6858000" cy="9144000"/>
@@ -1509,7 +1514,7 @@
           <a:lstStyle/>
           <a:p>
             <a:r>
-              <a:t>Two slides. The first is the answer to the title question. The second is where I hand it back to you.</a:t>
+              <a:t>Everything so far has been a decision somebody else makes. This chapter is for the developer who agrees with the argument and wants to do something on Monday. Nothing in it needs a platform team, a budget, or a vendor. Every item is a file in the repository or a setting on it.</a:t>
             </a:r>
           </a:p>
         </p:txBody>
@@ -1579,7 +1584,7 @@
           <a:lstStyle/>
           <a:p>
             <a:r>
-              <a:t>The queue gets shorter by turning on what is already there, centralizing everything mechanical, giving that machinery its own log of approved, rejected and why, the way secret scanning already logs it, and tiering by what the repository touches with a logged break-glass rather than an org-wide switch nobody downstream can turn off. Quality goes up with real evidence in exactly one place: a different model family reviews the change. It might go up in two more, the author's half of four eyes and Adyen's periodic look at already-approved changes to catch the gate going stale, but both are design problems here, not results. Restricting how much AI our engineers may use is set aside, not rejected: Godot, Rust and curl defend against low-trust external contributors, which is a different problem from employed engineers using a tool they were given. The approval itself stays with a human who is independent of whoever implemented the change, including when the change was written by an AI. Two honest notes. The rules are silent on AI approval, not against it, so this is the cautious reading of that silence and not the only one allowed. And whether same-team approval is independent enough is a question this deck raised on slide 7 and never answered.</a:t>
+              <a:t>This is chapter 03's dividing line applied to one repository. Everything mechanically verifiable runs before a person looks at the change. Formatting, linting, the test suite and a static analysis pass go in a workflow file under .github/workflows. Dependency scanning is a dependabot.yml. Secret scanning is a toggle in the repository settings. Google's reason is the one from chapter 03: static analysis exists so that human review can focus on what is not mechanically verifiable. The second step is the one people skip. A check that merely runs is advice. In branch protection or a ruleset, require those status checks by name, require a pull request before merging, and stop direct pushes to the default branch. Then dismiss stale approvals when new commits land. That last setting is the cheapest defence in this whole deck against the third failure, where the record says approved and nobody read the version that shipped.</a:t>
             </a:r>
           </a:p>
         </p:txBody>
@@ -1605,6 +1610,356 @@
 </file>
 
 <file path=ppt/notesSlides/notesSlide24.xml><?xml version="1.0" encoding="utf-8"?>
+<p:notes xmlns:a="http://schemas.openxmlformats.org/drawingml/2006/main" xmlns:p="http://schemas.openxmlformats.org/presentationml/2006/main" xmlns:r="http://schemas.openxmlformats.org/officeDocument/2006/relationships">
+  <p:cSld>
+    <p:spTree>
+      <p:nvGrpSpPr>
+        <p:cNvPr id="1" name=""/>
+        <p:cNvGrpSpPr/>
+        <p:nvPr/>
+      </p:nvGrpSpPr>
+      <p:grpSpPr>
+        <a:xfrm>
+          <a:off x="0" y="0"/>
+          <a:ext cx="0" cy="0"/>
+          <a:chOff x="0" y="0"/>
+          <a:chExt cx="0" cy="0"/>
+        </a:xfrm>
+      </p:grpSpPr>
+      <p:sp>
+        <p:nvSpPr>
+          <p:cNvPr id="2" name="Slide Image Placeholder 1"/>
+          <p:cNvSpPr>
+            <a:spLocks noGrp="1"/>
+          </p:cNvSpPr>
+          <p:nvPr>
+            <p:ph type="sldImg" idx="2"/>
+          </p:nvPr>
+        </p:nvSpPr>
+        <p:spPr/>
+      </p:sp>
+      <p:sp>
+        <p:nvSpPr>
+          <p:cNvPr id="3" name="Notes Placeholder 2"/>
+          <p:cNvSpPr>
+            <a:spLocks noGrp="1"/>
+          </p:cNvSpPr>
+          <p:nvPr>
+            <p:ph type="body" idx="3" sz="quarter"/>
+          </p:nvPr>
+        </p:nvSpPr>
+        <p:spPr/>
+        <p:txBody>
+          <a:bodyPr/>
+          <a:lstStyle/>
+          <a:p>
+            <a:r>
+              <a:t>Chapter 04 tiered whole repositories by what they touch. Inside one repository the same idea fits in a file. A CODEOWNERS file requires a named reviewer for the paths that move money or hold customer data, and leaves the rest on the lighter default. That is the risk-based approach the regulation asks for, written as a file rather than a policy nobody reads. It also answers something the approval rule leaves open: not just that someone approved, but that someone who knows this code did. The second decision comes from chapter 02. Whether Copilot's review counts toward this repository's required approvals is a per-repository choice, currently off by default. Write the answer down where the next person will find it, with the reason. Both repositories are allowed to answer differently. What neither should do is answer by accident, which is what happens when nobody decides.</a:t>
+            </a:r>
+          </a:p>
+        </p:txBody>
+      </p:sp>
+      <p:sp>
+        <p:nvSpPr>
+          <p:cNvPr id="4" name="Slide Number Placeholder 3"/>
+          <p:cNvSpPr>
+            <a:spLocks noGrp="1"/>
+          </p:cNvSpPr>
+          <p:nvPr>
+            <p:ph type="sldNum" idx="5" sz="quarter"/>
+          </p:nvPr>
+        </p:nvSpPr>
+        <p:spPr/>
+      </p:sp>
+    </p:spTree>
+  </p:cSld>
+  <p:clrMapOvr>
+    <a:masterClrMapping/>
+  </p:clrMapOvr>
+</p:notes>
+</file>
+
+<file path=ppt/notesSlides/notesSlide25.xml><?xml version="1.0" encoding="utf-8"?>
+<p:notes xmlns:a="http://schemas.openxmlformats.org/drawingml/2006/main" xmlns:p="http://schemas.openxmlformats.org/presentationml/2006/main" xmlns:r="http://schemas.openxmlformats.org/officeDocument/2006/relationships">
+  <p:cSld>
+    <p:spTree>
+      <p:nvGrpSpPr>
+        <p:cNvPr id="1" name=""/>
+        <p:cNvGrpSpPr/>
+        <p:nvPr/>
+      </p:nvGrpSpPr>
+      <p:grpSpPr>
+        <a:xfrm>
+          <a:off x="0" y="0"/>
+          <a:ext cx="0" cy="0"/>
+          <a:chOff x="0" y="0"/>
+          <a:chExt cx="0" cy="0"/>
+        </a:xfrm>
+      </p:grpSpPr>
+      <p:sp>
+        <p:nvSpPr>
+          <p:cNvPr id="2" name="Slide Image Placeholder 1"/>
+          <p:cNvSpPr>
+            <a:spLocks noGrp="1"/>
+          </p:cNvSpPr>
+          <p:nvPr>
+            <p:ph type="sldImg" idx="2"/>
+          </p:nvPr>
+        </p:nvSpPr>
+        <p:spPr/>
+      </p:sp>
+      <p:sp>
+        <p:nvSpPr>
+          <p:cNvPr id="3" name="Notes Placeholder 2"/>
+          <p:cNvSpPr>
+            <a:spLocks noGrp="1"/>
+          </p:cNvSpPr>
+          <p:nvPr>
+            <p:ph type="body" idx="3" sz="quarter"/>
+          </p:nvPr>
+        </p:nvSpPr>
+        <p:spPr/>
+        <p:txBody>
+          <a:bodyPr/>
+          <a:lstStyle/>
+          <a:p>
+            <a:r>
+              <a:t>This is the author's half of four eyes, in the one place a repository can host it. A pull_request_template.md in the .github folder puts the same questions in front of every pull request. The wording matters more than the existence. Chapter 04 cited a 2026 study of 80.000 pull requests across 156 projects where description elements made largely negligible difference to review outcomes, with one exception: a description that explains the code and asks for a specific kind of feedback. So the template asks for both. A template that only asks for a summary is asking for the thing the study found does not matter. One honest limit: a template is a prompt, not a control. GitHub prefills it and nothing stops someone deleting it. Enforcing it takes a CI check, and an enforced field is exactly where N/A appears.</a:t>
+            </a:r>
+          </a:p>
+        </p:txBody>
+      </p:sp>
+      <p:sp>
+        <p:nvSpPr>
+          <p:cNvPr id="4" name="Slide Number Placeholder 3"/>
+          <p:cNvSpPr>
+            <a:spLocks noGrp="1"/>
+          </p:cNvSpPr>
+          <p:nvPr>
+            <p:ph type="sldNum" idx="5" sz="quarter"/>
+          </p:nvPr>
+        </p:nvSpPr>
+        <p:spPr/>
+      </p:sp>
+    </p:spTree>
+  </p:cSld>
+  <p:clrMapOvr>
+    <a:masterClrMapping/>
+  </p:clrMapOvr>
+</p:notes>
+</file>
+
+<file path=ppt/notesSlides/notesSlide26.xml><?xml version="1.0" encoding="utf-8"?>
+<p:notes xmlns:a="http://schemas.openxmlformats.org/drawingml/2006/main" xmlns:p="http://schemas.openxmlformats.org/presentationml/2006/main" xmlns:r="http://schemas.openxmlformats.org/officeDocument/2006/relationships">
+  <p:cSld>
+    <p:spTree>
+      <p:nvGrpSpPr>
+        <p:cNvPr id="1" name=""/>
+        <p:cNvGrpSpPr/>
+        <p:nvPr/>
+      </p:nvGrpSpPr>
+      <p:grpSpPr>
+        <a:xfrm>
+          <a:off x="0" y="0"/>
+          <a:ext cx="0" cy="0"/>
+          <a:chOff x="0" y="0"/>
+          <a:chExt cx="0" cy="0"/>
+        </a:xfrm>
+      </p:grpSpPr>
+      <p:sp>
+        <p:nvSpPr>
+          <p:cNvPr id="2" name="Slide Image Placeholder 1"/>
+          <p:cNvSpPr>
+            <a:spLocks noGrp="1"/>
+          </p:cNvSpPr>
+          <p:nvPr>
+            <p:ph type="sldImg" idx="2"/>
+          </p:nvPr>
+        </p:nvSpPr>
+        <p:spPr/>
+      </p:sp>
+      <p:sp>
+        <p:nvSpPr>
+          <p:cNvPr id="3" name="Notes Placeholder 2"/>
+          <p:cNvSpPr>
+            <a:spLocks noGrp="1"/>
+          </p:cNvSpPr>
+          <p:nvPr>
+            <p:ph type="body" idx="3" sz="quarter"/>
+          </p:nvPr>
+        </p:nvSpPr>
+        <p:spPr/>
+        <p:txBody>
+          <a:bodyPr/>
+          <a:lstStyle/>
+          <a:p>
+            <a:r>
+              <a:t>The last row is the one nothing else covers. Everything above it decays quietly, and only a person re-reading approved changes notices. That is Adyen's fix from chapter 02, the one regulated payment company in this deck, whose reviewers said they had started to pattern-match after a dozen near-identical changes. At one-repository scale it is a recurring calendar entry rather than a tool: read a sample of merged pull requests and ask whether the approvals on them meant anything. On leverage and freedom: the workflow file and the template are copied to the next repository in minutes, so the second repository costs a fraction of the first. Each item is reverted by deleting a line, with no vendor to ask. What the list cannot do is the job chapter 01 found underneath all three: decide whether the change is wanted. Days 1 to 3 make that decision cheaper to reach, day 4 gives the decider something to read, and the last row checks that the decision is still being made. None of them makes it. And I owe this argument the check in the last line: I do not know how many of these settings are already on in our repositories.</a:t>
+            </a:r>
+          </a:p>
+        </p:txBody>
+      </p:sp>
+      <p:sp>
+        <p:nvSpPr>
+          <p:cNvPr id="4" name="Slide Number Placeholder 3"/>
+          <p:cNvSpPr>
+            <a:spLocks noGrp="1"/>
+          </p:cNvSpPr>
+          <p:nvPr>
+            <p:ph type="sldNum" idx="5" sz="quarter"/>
+          </p:nvPr>
+        </p:nvSpPr>
+        <p:spPr/>
+      </p:sp>
+    </p:spTree>
+  </p:cSld>
+  <p:clrMapOvr>
+    <a:masterClrMapping/>
+  </p:clrMapOvr>
+</p:notes>
+</file>
+
+<file path=ppt/notesSlides/notesSlide27.xml><?xml version="1.0" encoding="utf-8"?>
+<p:notes xmlns:a="http://schemas.openxmlformats.org/drawingml/2006/main" xmlns:p="http://schemas.openxmlformats.org/presentationml/2006/main" xmlns:r="http://schemas.openxmlformats.org/officeDocument/2006/relationships">
+  <p:cSld>
+    <p:spTree>
+      <p:nvGrpSpPr>
+        <p:cNvPr id="1" name=""/>
+        <p:cNvGrpSpPr/>
+        <p:nvPr/>
+      </p:nvGrpSpPr>
+      <p:grpSpPr>
+        <a:xfrm>
+          <a:off x="0" y="0"/>
+          <a:ext cx="0" cy="0"/>
+          <a:chOff x="0" y="0"/>
+          <a:chExt cx="0" cy="0"/>
+        </a:xfrm>
+      </p:grpSpPr>
+      <p:sp>
+        <p:nvSpPr>
+          <p:cNvPr id="2" name="Slide Image Placeholder 1"/>
+          <p:cNvSpPr>
+            <a:spLocks noGrp="1"/>
+          </p:cNvSpPr>
+          <p:nvPr>
+            <p:ph type="sldImg" idx="2"/>
+          </p:nvPr>
+        </p:nvSpPr>
+        <p:spPr/>
+      </p:sp>
+      <p:sp>
+        <p:nvSpPr>
+          <p:cNvPr id="3" name="Notes Placeholder 2"/>
+          <p:cNvSpPr>
+            <a:spLocks noGrp="1"/>
+          </p:cNvSpPr>
+          <p:nvPr>
+            <p:ph type="body" idx="3" sz="quarter"/>
+          </p:nvPr>
+        </p:nvSpPr>
+        <p:spPr/>
+        <p:txBody>
+          <a:bodyPr/>
+          <a:lstStyle/>
+          <a:p>
+            <a:r>
+              <a:t>Two slides. The first is the answer to the title question. The second is where I hand it back to you.</a:t>
+            </a:r>
+          </a:p>
+        </p:txBody>
+      </p:sp>
+      <p:sp>
+        <p:nvSpPr>
+          <p:cNvPr id="4" name="Slide Number Placeholder 3"/>
+          <p:cNvSpPr>
+            <a:spLocks noGrp="1"/>
+          </p:cNvSpPr>
+          <p:nvPr>
+            <p:ph type="sldNum" idx="5" sz="quarter"/>
+          </p:nvPr>
+        </p:nvSpPr>
+        <p:spPr/>
+      </p:sp>
+    </p:spTree>
+  </p:cSld>
+  <p:clrMapOvr>
+    <a:masterClrMapping/>
+  </p:clrMapOvr>
+</p:notes>
+</file>
+
+<file path=ppt/notesSlides/notesSlide28.xml><?xml version="1.0" encoding="utf-8"?>
+<p:notes xmlns:a="http://schemas.openxmlformats.org/drawingml/2006/main" xmlns:p="http://schemas.openxmlformats.org/presentationml/2006/main" xmlns:r="http://schemas.openxmlformats.org/officeDocument/2006/relationships">
+  <p:cSld>
+    <p:spTree>
+      <p:nvGrpSpPr>
+        <p:cNvPr id="1" name=""/>
+        <p:cNvGrpSpPr/>
+        <p:nvPr/>
+      </p:nvGrpSpPr>
+      <p:grpSpPr>
+        <a:xfrm>
+          <a:off x="0" y="0"/>
+          <a:ext cx="0" cy="0"/>
+          <a:chOff x="0" y="0"/>
+          <a:chExt cx="0" cy="0"/>
+        </a:xfrm>
+      </p:grpSpPr>
+      <p:sp>
+        <p:nvSpPr>
+          <p:cNvPr id="2" name="Slide Image Placeholder 1"/>
+          <p:cNvSpPr>
+            <a:spLocks noGrp="1"/>
+          </p:cNvSpPr>
+          <p:nvPr>
+            <p:ph type="sldImg" idx="2"/>
+          </p:nvPr>
+        </p:nvSpPr>
+        <p:spPr/>
+      </p:sp>
+      <p:sp>
+        <p:nvSpPr>
+          <p:cNvPr id="3" name="Notes Placeholder 2"/>
+          <p:cNvSpPr>
+            <a:spLocks noGrp="1"/>
+          </p:cNvSpPr>
+          <p:nvPr>
+            <p:ph type="body" idx="3" sz="quarter"/>
+          </p:nvPr>
+        </p:nvSpPr>
+        <p:spPr/>
+        <p:txBody>
+          <a:bodyPr/>
+          <a:lstStyle/>
+          <a:p>
+            <a:r>
+              <a:t>The queue gets shorter by turning on what is already there, centralizing everything mechanical, giving that machinery its own log of approved, rejected and why, the way secret scanning already logs it, and tiering by what the repository touches with a logged break-glass rather than an org-wide switch nobody downstream can turn off. Quality goes up with real evidence in exactly one place: a different model family reviews the change. It might go up in two more, the author's half of four eyes and Adyen's periodic look at already-approved changes to catch the gate going stale, but both are design problems here, not results. Restricting how much AI our engineers may use is set aside, not rejected: Godot, Rust and curl defend against low-trust external contributors, which is a different problem from employed engineers using a tool they were given. The approval itself stays with a human who is independent of whoever implemented the change, including when the change was written by an AI. Two honest notes. The rules are silent on AI approval, not against it, so this is the cautious reading of that silence and not the only one allowed. And whether same-team approval is independent enough is a question this deck raised on slide 7 and never answered.</a:t>
+            </a:r>
+          </a:p>
+        </p:txBody>
+      </p:sp>
+      <p:sp>
+        <p:nvSpPr>
+          <p:cNvPr id="4" name="Slide Number Placeholder 3"/>
+          <p:cNvSpPr>
+            <a:spLocks noGrp="1"/>
+          </p:cNvSpPr>
+          <p:nvPr>
+            <p:ph type="sldNum" idx="5" sz="quarter"/>
+          </p:nvPr>
+        </p:nvSpPr>
+        <p:spPr/>
+      </p:sp>
+    </p:spTree>
+  </p:cSld>
+  <p:clrMapOvr>
+    <a:masterClrMapping/>
+  </p:clrMapOvr>
+</p:notes>
+</file>
+
+<file path=ppt/notesSlides/notesSlide29.xml><?xml version="1.0" encoding="utf-8"?>
 <p:notes xmlns:a="http://schemas.openxmlformats.org/drawingml/2006/main" xmlns:p="http://schemas.openxmlformats.org/presentationml/2006/main" xmlns:r="http://schemas.openxmlformats.org/officeDocument/2006/relationships">
   <p:cSld>
     <p:spTree>
@@ -16502,45 +16857,43 @@
       </p:sp>
       <p:sp>
         <p:nvSpPr>
-          <p:cNvPr id="6" name="Rectangle 5"/>
-          <p:cNvSpPr/>
-          <p:nvPr/>
-        </p:nvSpPr>
-        <p:spPr>
-          <a:xfrm>
-            <a:off x="548640" y="2555240"/>
-            <a:ext cx="822960" cy="54864"/>
-          </a:xfrm>
-          <a:prstGeom prst="rect">
-            <a:avLst/>
-          </a:prstGeom>
-          <a:solidFill>
-            <a:srgbClr val="29D3E0"/>
-          </a:solidFill>
-          <a:ln>
-            <a:noFill/>
-          </a:ln>
-          <a:effectLst/>
-        </p:spPr>
-        <p:style>
-          <a:lnRef idx="1">
-            <a:schemeClr val="accent1"/>
-          </a:lnRef>
-          <a:fillRef idx="3">
-            <a:schemeClr val="accent1"/>
-          </a:fillRef>
-          <a:effectRef idx="2">
-            <a:schemeClr val="accent1"/>
-          </a:effectRef>
-          <a:fontRef idx="minor">
-            <a:schemeClr val="lt1"/>
-          </a:fontRef>
-        </p:style>
-        <p:txBody>
-          <a:bodyPr rtlCol="0" anchor="ctr"/>
-          <a:lstStyle/>
-          <a:p>
-            <a:pPr algn="ctr"/>
+          <p:cNvPr id="6" name="TextBox 5"/>
+          <p:cNvSpPr txBox="1"/>
+          <p:nvPr/>
+        </p:nvSpPr>
+        <p:spPr>
+          <a:xfrm>
+            <a:off x="548640" y="1417320"/>
+            <a:ext cx="2377440" cy="1371600"/>
+          </a:xfrm>
+          <a:prstGeom prst="rect">
+            <a:avLst/>
+          </a:prstGeom>
+          <a:noFill/>
+        </p:spPr>
+        <p:txBody>
+          <a:bodyPr wrap="square" lIns="0" rIns="0" tIns="0" bIns="0" anchor="t">
+            <a:spAutoFit/>
+          </a:bodyPr>
+          <a:lstStyle/>
+          <a:p>
+            <a:pPr algn="l">
+              <a:lnSpc>
+                <a:spcPct val="100000"/>
+              </a:lnSpc>
+              <a:spcAft>
+                <a:spcPts val="0"/>
+              </a:spcAft>
+            </a:pPr>
+            <a:r>
+              <a:rPr b="1" sz="9600" i="0">
+                <a:solidFill>
+                  <a:srgbClr val="29D3E0"/>
+                </a:solidFill>
+                <a:latin typeface="Georgia"/>
+              </a:rPr>
+              <a:t>05</a:t>
+            </a:r>
           </a:p>
         </p:txBody>
       </p:sp>
@@ -16552,8 +16905,8 @@
         </p:nvSpPr>
         <p:spPr>
           <a:xfrm>
-            <a:off x="1783080" y="1874519"/>
-            <a:ext cx="9859975" cy="991615"/>
+            <a:off x="2697480" y="1874519"/>
+            <a:ext cx="8945575" cy="991615"/>
           </a:xfrm>
           <a:prstGeom prst="rect">
             <a:avLst/>
@@ -16581,7 +16934,7 @@
                 </a:solidFill>
                 <a:latin typeface="Georgia"/>
               </a:rPr>
-              <a:t>Conclusion</a:t>
+              <a:t>What would I do in one repository?</a:t>
             </a:r>
           </a:p>
         </p:txBody>
@@ -16594,8 +16947,8 @@
         </p:nvSpPr>
         <p:spPr>
           <a:xfrm>
-            <a:off x="1783080" y="3140455"/>
-            <a:ext cx="9859975" cy="247649"/>
+            <a:off x="2697480" y="3140455"/>
+            <a:ext cx="8945575" cy="495299"/>
           </a:xfrm>
           <a:prstGeom prst="rect">
             <a:avLst/>
@@ -16623,23 +16976,23 @@
                 </a:solidFill>
                 <a:latin typeface="Arial"/>
               </a:rPr>
-              <a:t>What moves, what doesn't, and what I still don't know.</a:t>
-            </a:r>
-          </a:p>
-        </p:txBody>
-      </p:sp>
-      <p:sp>
-        <p:nvSpPr>
-          <p:cNvPr id="9" name="Oval 8"/>
+              <a:t>Chapter 04 was the order for the company. This is the same order in one repository, with the file each step lives in.</a:t>
+            </a:r>
+          </a:p>
+        </p:txBody>
+      </p:sp>
+      <p:sp>
+        <p:nvSpPr>
+          <p:cNvPr id="9" name="Rectangle 8"/>
           <p:cNvSpPr/>
           <p:nvPr/>
         </p:nvSpPr>
         <p:spPr>
           <a:xfrm>
-            <a:off x="10332720" y="5394960"/>
-            <a:ext cx="457200" cy="457200"/>
-          </a:xfrm>
-          <a:prstGeom prst="ellipse">
+            <a:off x="2697480" y="4083812"/>
+            <a:ext cx="146304" cy="18288"/>
+          </a:xfrm>
+          <a:prstGeom prst="rect">
             <a:avLst/>
           </a:prstGeom>
           <a:solidFill>
@@ -16674,7 +17027,351 @@
       </p:sp>
       <p:sp>
         <p:nvSpPr>
-          <p:cNvPr id="10" name="Rounded Rectangle 9"/>
+          <p:cNvPr id="10" name="TextBox 9"/>
+          <p:cNvSpPr txBox="1"/>
+          <p:nvPr/>
+        </p:nvSpPr>
+        <p:spPr>
+          <a:xfrm>
+            <a:off x="2971800" y="4019804"/>
+            <a:ext cx="8671255" cy="219456"/>
+          </a:xfrm>
+          <a:prstGeom prst="rect">
+            <a:avLst/>
+          </a:prstGeom>
+          <a:noFill/>
+        </p:spPr>
+        <p:txBody>
+          <a:bodyPr wrap="square" lIns="0" rIns="0" tIns="0" bIns="0" anchor="t">
+            <a:spAutoFit/>
+          </a:bodyPr>
+          <a:lstStyle/>
+          <a:p>
+            <a:pPr algn="l">
+              <a:lnSpc>
+                <a:spcPct val="115000"/>
+              </a:lnSpc>
+              <a:spcAft>
+                <a:spcPts val="0"/>
+              </a:spcAft>
+            </a:pPr>
+            <a:r>
+              <a:rPr b="0" sz="1200" i="0">
+                <a:solidFill>
+                  <a:srgbClr val="98A4BC"/>
+                </a:solidFill>
+                <a:latin typeface="Arial"/>
+              </a:rPr>
+              <a:t>Make the mechanical checks unskippable</a:t>
+            </a:r>
+          </a:p>
+        </p:txBody>
+      </p:sp>
+      <p:sp>
+        <p:nvSpPr>
+          <p:cNvPr id="11" name="Rectangle 10"/>
+          <p:cNvSpPr/>
+          <p:nvPr/>
+        </p:nvSpPr>
+        <p:spPr>
+          <a:xfrm>
+            <a:off x="2697480" y="4358132"/>
+            <a:ext cx="146304" cy="18288"/>
+          </a:xfrm>
+          <a:prstGeom prst="rect">
+            <a:avLst/>
+          </a:prstGeom>
+          <a:solidFill>
+            <a:srgbClr val="E8A33D"/>
+          </a:solidFill>
+          <a:ln>
+            <a:noFill/>
+          </a:ln>
+          <a:effectLst/>
+        </p:spPr>
+        <p:style>
+          <a:lnRef idx="1">
+            <a:schemeClr val="accent1"/>
+          </a:lnRef>
+          <a:fillRef idx="3">
+            <a:schemeClr val="accent1"/>
+          </a:fillRef>
+          <a:effectRef idx="2">
+            <a:schemeClr val="accent1"/>
+          </a:effectRef>
+          <a:fontRef idx="minor">
+            <a:schemeClr val="lt1"/>
+          </a:fontRef>
+        </p:style>
+        <p:txBody>
+          <a:bodyPr rtlCol="0" anchor="ctr"/>
+          <a:lstStyle/>
+          <a:p>
+            <a:pPr algn="ctr"/>
+          </a:p>
+        </p:txBody>
+      </p:sp>
+      <p:sp>
+        <p:nvSpPr>
+          <p:cNvPr id="12" name="TextBox 11"/>
+          <p:cNvSpPr txBox="1"/>
+          <p:nvPr/>
+        </p:nvSpPr>
+        <p:spPr>
+          <a:xfrm>
+            <a:off x="2971800" y="4294124"/>
+            <a:ext cx="8671255" cy="219456"/>
+          </a:xfrm>
+          <a:prstGeom prst="rect">
+            <a:avLst/>
+          </a:prstGeom>
+          <a:noFill/>
+        </p:spPr>
+        <p:txBody>
+          <a:bodyPr wrap="square" lIns="0" rIns="0" tIns="0" bIns="0" anchor="t">
+            <a:spAutoFit/>
+          </a:bodyPr>
+          <a:lstStyle/>
+          <a:p>
+            <a:pPr algn="l">
+              <a:lnSpc>
+                <a:spcPct val="115000"/>
+              </a:lnSpc>
+              <a:spcAft>
+                <a:spcPts val="0"/>
+              </a:spcAft>
+            </a:pPr>
+            <a:r>
+              <a:rPr b="0" sz="1200" i="0">
+                <a:solidFill>
+                  <a:srgbClr val="98A4BC"/>
+                </a:solidFill>
+                <a:latin typeface="Arial"/>
+              </a:rPr>
+              <a:t>Two decisions the repository owner makes</a:t>
+            </a:r>
+          </a:p>
+        </p:txBody>
+      </p:sp>
+      <p:sp>
+        <p:nvSpPr>
+          <p:cNvPr id="13" name="Rectangle 12"/>
+          <p:cNvSpPr/>
+          <p:nvPr/>
+        </p:nvSpPr>
+        <p:spPr>
+          <a:xfrm>
+            <a:off x="2697480" y="4632452"/>
+            <a:ext cx="146304" cy="18288"/>
+          </a:xfrm>
+          <a:prstGeom prst="rect">
+            <a:avLst/>
+          </a:prstGeom>
+          <a:solidFill>
+            <a:srgbClr val="29D3E0"/>
+          </a:solidFill>
+          <a:ln>
+            <a:noFill/>
+          </a:ln>
+          <a:effectLst/>
+        </p:spPr>
+        <p:style>
+          <a:lnRef idx="1">
+            <a:schemeClr val="accent1"/>
+          </a:lnRef>
+          <a:fillRef idx="3">
+            <a:schemeClr val="accent1"/>
+          </a:fillRef>
+          <a:effectRef idx="2">
+            <a:schemeClr val="accent1"/>
+          </a:effectRef>
+          <a:fontRef idx="minor">
+            <a:schemeClr val="lt1"/>
+          </a:fontRef>
+        </p:style>
+        <p:txBody>
+          <a:bodyPr rtlCol="0" anchor="ctr"/>
+          <a:lstStyle/>
+          <a:p>
+            <a:pPr algn="ctr"/>
+          </a:p>
+        </p:txBody>
+      </p:sp>
+      <p:sp>
+        <p:nvSpPr>
+          <p:cNvPr id="14" name="TextBox 13"/>
+          <p:cNvSpPr txBox="1"/>
+          <p:nvPr/>
+        </p:nvSpPr>
+        <p:spPr>
+          <a:xfrm>
+            <a:off x="2971800" y="4568443"/>
+            <a:ext cx="8671255" cy="219456"/>
+          </a:xfrm>
+          <a:prstGeom prst="rect">
+            <a:avLst/>
+          </a:prstGeom>
+          <a:noFill/>
+        </p:spPr>
+        <p:txBody>
+          <a:bodyPr wrap="square" lIns="0" rIns="0" tIns="0" bIns="0" anchor="t">
+            <a:spAutoFit/>
+          </a:bodyPr>
+          <a:lstStyle/>
+          <a:p>
+            <a:pPr algn="l">
+              <a:lnSpc>
+                <a:spcPct val="115000"/>
+              </a:lnSpc>
+              <a:spcAft>
+                <a:spcPts val="0"/>
+              </a:spcAft>
+            </a:pPr>
+            <a:r>
+              <a:rPr b="0" sz="1200" i="0">
+                <a:solidFill>
+                  <a:srgbClr val="98A4BC"/>
+                </a:solidFill>
+                <a:latin typeface="Arial"/>
+              </a:rPr>
+              <a:t>Ask the author for what no check can see</a:t>
+            </a:r>
+          </a:p>
+        </p:txBody>
+      </p:sp>
+      <p:sp>
+        <p:nvSpPr>
+          <p:cNvPr id="15" name="Rectangle 14"/>
+          <p:cNvSpPr/>
+          <p:nvPr/>
+        </p:nvSpPr>
+        <p:spPr>
+          <a:xfrm>
+            <a:off x="2697480" y="4906772"/>
+            <a:ext cx="146304" cy="18288"/>
+          </a:xfrm>
+          <a:prstGeom prst="rect">
+            <a:avLst/>
+          </a:prstGeom>
+          <a:solidFill>
+            <a:srgbClr val="E8A33D"/>
+          </a:solidFill>
+          <a:ln>
+            <a:noFill/>
+          </a:ln>
+          <a:effectLst/>
+        </p:spPr>
+        <p:style>
+          <a:lnRef idx="1">
+            <a:schemeClr val="accent1"/>
+          </a:lnRef>
+          <a:fillRef idx="3">
+            <a:schemeClr val="accent1"/>
+          </a:fillRef>
+          <a:effectRef idx="2">
+            <a:schemeClr val="accent1"/>
+          </a:effectRef>
+          <a:fontRef idx="minor">
+            <a:schemeClr val="lt1"/>
+          </a:fontRef>
+        </p:style>
+        <p:txBody>
+          <a:bodyPr rtlCol="0" anchor="ctr"/>
+          <a:lstStyle/>
+          <a:p>
+            <a:pPr algn="ctr"/>
+          </a:p>
+        </p:txBody>
+      </p:sp>
+      <p:sp>
+        <p:nvSpPr>
+          <p:cNvPr id="16" name="TextBox 15"/>
+          <p:cNvSpPr txBox="1"/>
+          <p:nvPr/>
+        </p:nvSpPr>
+        <p:spPr>
+          <a:xfrm>
+            <a:off x="2971800" y="4842763"/>
+            <a:ext cx="8671255" cy="219456"/>
+          </a:xfrm>
+          <a:prstGeom prst="rect">
+            <a:avLst/>
+          </a:prstGeom>
+          <a:noFill/>
+        </p:spPr>
+        <p:txBody>
+          <a:bodyPr wrap="square" lIns="0" rIns="0" tIns="0" bIns="0" anchor="t">
+            <a:spAutoFit/>
+          </a:bodyPr>
+          <a:lstStyle/>
+          <a:p>
+            <a:pPr algn="l">
+              <a:lnSpc>
+                <a:spcPct val="115000"/>
+              </a:lnSpc>
+              <a:spcAft>
+                <a:spcPts val="0"/>
+              </a:spcAft>
+            </a:pPr>
+            <a:r>
+              <a:rPr b="0" sz="1200" i="0">
+                <a:solidFill>
+                  <a:srgbClr val="98A4BC"/>
+                </a:solidFill>
+                <a:latin typeface="Arial"/>
+              </a:rPr>
+              <a:t>The first week</a:t>
+            </a:r>
+          </a:p>
+        </p:txBody>
+      </p:sp>
+      <p:sp>
+        <p:nvSpPr>
+          <p:cNvPr id="17" name="Oval 16"/>
+          <p:cNvSpPr/>
+          <p:nvPr/>
+        </p:nvSpPr>
+        <p:spPr>
+          <a:xfrm>
+            <a:off x="10332720" y="5394960"/>
+            <a:ext cx="457200" cy="457200"/>
+          </a:xfrm>
+          <a:prstGeom prst="ellipse">
+            <a:avLst/>
+          </a:prstGeom>
+          <a:solidFill>
+            <a:srgbClr val="29D3E0"/>
+          </a:solidFill>
+          <a:ln>
+            <a:noFill/>
+          </a:ln>
+          <a:effectLst/>
+        </p:spPr>
+        <p:style>
+          <a:lnRef idx="1">
+            <a:schemeClr val="accent1"/>
+          </a:lnRef>
+          <a:fillRef idx="3">
+            <a:schemeClr val="accent1"/>
+          </a:fillRef>
+          <a:effectRef idx="2">
+            <a:schemeClr val="accent1"/>
+          </a:effectRef>
+          <a:fontRef idx="minor">
+            <a:schemeClr val="lt1"/>
+          </a:fontRef>
+        </p:style>
+        <p:txBody>
+          <a:bodyPr rtlCol="0" anchor="ctr"/>
+          <a:lstStyle/>
+          <a:p>
+            <a:pPr algn="ctr"/>
+          </a:p>
+        </p:txBody>
+      </p:sp>
+      <p:sp>
+        <p:nvSpPr>
+          <p:cNvPr id="18" name="Rounded Rectangle 17"/>
           <p:cNvSpPr/>
           <p:nvPr/>
         </p:nvSpPr>
@@ -16817,7 +17514,7 @@
                 </a:solidFill>
                 <a:latin typeface="Arial"/>
               </a:rPr>
-              <a:t>SLIDE 23 · CONCLUSION</a:t>
+              <a:t>SLIDE 23 · 05 · IN ONE REPOSITORY</a:t>
             </a:r>
           </a:p>
         </p:txBody>
@@ -16859,7 +17556,7 @@
                 </a:solidFill>
                 <a:latin typeface="Georgia"/>
               </a:rPr>
-              <a:t>What moves, and what doesn't</a:t>
+              <a:t>Make the mechanical checks unskippable</a:t>
             </a:r>
           </a:p>
         </p:txBody>
@@ -17000,8 +17697,8 @@
         </p:nvSpPr>
         <p:spPr>
           <a:xfrm>
-            <a:off x="548640" y="2014037"/>
-            <a:ext cx="3576218" cy="1733232"/>
+            <a:off x="548640" y="2103120"/>
+            <a:ext cx="3576218" cy="1708467"/>
           </a:xfrm>
           <a:prstGeom prst="roundRect">
             <a:avLst>
@@ -17048,8 +17745,8 @@
         </p:nvSpPr>
         <p:spPr>
           <a:xfrm>
-            <a:off x="548640" y="2123765"/>
-            <a:ext cx="45720" cy="1513776"/>
+            <a:off x="548640" y="2212848"/>
+            <a:ext cx="45720" cy="1489011"/>
           </a:xfrm>
           <a:prstGeom prst="rect">
             <a:avLst/>
@@ -17092,8 +17789,8 @@
         </p:nvSpPr>
         <p:spPr>
           <a:xfrm>
-            <a:off x="749808" y="2142053"/>
-            <a:ext cx="3210458" cy="540131"/>
+            <a:off x="749808" y="2231136"/>
+            <a:ext cx="3210458" cy="288353"/>
           </a:xfrm>
           <a:prstGeom prst="rect">
             <a:avLst/>
@@ -17121,7 +17818,7 @@
                 </a:solidFill>
                 <a:latin typeface="Arial"/>
               </a:rPr>
-              <a:t>Shorter queue</a:t>
+              <a:t>Run them</a:t>
             </a:r>
           </a:p>
         </p:txBody>
@@ -17134,8 +17831,8 @@
         </p:nvSpPr>
         <p:spPr>
           <a:xfrm>
-            <a:off x="749808" y="2755336"/>
-            <a:ext cx="3210458" cy="809053"/>
+            <a:off x="749808" y="2592641"/>
+            <a:ext cx="3210458" cy="1036065"/>
           </a:xfrm>
           <a:prstGeom prst="rect">
             <a:avLst/>
@@ -17163,7 +17860,7 @@
                 </a:solidFill>
                 <a:latin typeface="Arial"/>
               </a:rPr>
-              <a:t>Turn on what is there. Centralize the mechanical. Log it. Tier by risk.</a:t>
+              <a:t>Format, lint, test and static analysis in a workflow file. Dependency and secret scanning switched on.</a:t>
             </a:r>
           </a:p>
         </p:txBody>
@@ -17176,8 +17873,8 @@
         </p:nvSpPr>
         <p:spPr>
           <a:xfrm>
-            <a:off x="4307738" y="2014037"/>
-            <a:ext cx="3576218" cy="1733232"/>
+            <a:off x="4307738" y="2103120"/>
+            <a:ext cx="3576218" cy="1708467"/>
           </a:xfrm>
           <a:prstGeom prst="roundRect">
             <a:avLst>
@@ -17224,8 +17921,8 @@
         </p:nvSpPr>
         <p:spPr>
           <a:xfrm>
-            <a:off x="4307738" y="2123765"/>
-            <a:ext cx="45720" cy="1513776"/>
+            <a:off x="4307738" y="2212848"/>
+            <a:ext cx="45720" cy="1489011"/>
           </a:xfrm>
           <a:prstGeom prst="rect">
             <a:avLst/>
@@ -17268,8 +17965,8 @@
         </p:nvSpPr>
         <p:spPr>
           <a:xfrm>
-            <a:off x="4508906" y="2142053"/>
-            <a:ext cx="3210458" cy="540131"/>
+            <a:off x="4508906" y="2231136"/>
+            <a:ext cx="3210458" cy="288353"/>
           </a:xfrm>
           <a:prstGeom prst="rect">
             <a:avLst/>
@@ -17297,7 +17994,7 @@
                 </a:solidFill>
                 <a:latin typeface="Arial"/>
               </a:rPr>
-              <a:t>Higher quality, with evidence</a:t>
+              <a:t>Require them</a:t>
             </a:r>
           </a:p>
         </p:txBody>
@@ -17310,8 +18007,8 @@
         </p:nvSpPr>
         <p:spPr>
           <a:xfrm>
-            <a:off x="4508906" y="2755336"/>
-            <a:ext cx="3210458" cy="809053"/>
+            <a:off x="4508906" y="2592641"/>
+            <a:ext cx="3210458" cy="1036065"/>
           </a:xfrm>
           <a:prstGeom prst="rect">
             <a:avLst/>
@@ -17339,7 +18036,7 @@
                 </a:solidFill>
                 <a:latin typeface="Arial"/>
               </a:rPr>
-              <a:t>A different model family reviews the change. Two more are design problems, not results.</a:t>
+              <a:t>Require those checks by name. Require a pull request. Stop direct pushes to the default branch.</a:t>
             </a:r>
           </a:p>
         </p:txBody>
@@ -17352,8 +18049,8 @@
         </p:nvSpPr>
         <p:spPr>
           <a:xfrm>
-            <a:off x="8066836" y="2014037"/>
-            <a:ext cx="3576218" cy="1733232"/>
+            <a:off x="8066836" y="2103120"/>
+            <a:ext cx="3576218" cy="1708467"/>
           </a:xfrm>
           <a:prstGeom prst="roundRect">
             <a:avLst>
@@ -17400,8 +18097,8 @@
         </p:nvSpPr>
         <p:spPr>
           <a:xfrm>
-            <a:off x="8066836" y="2123765"/>
-            <a:ext cx="45720" cy="1513776"/>
+            <a:off x="8066836" y="2212848"/>
+            <a:ext cx="45720" cy="1489011"/>
           </a:xfrm>
           <a:prstGeom prst="rect">
             <a:avLst/>
@@ -17444,8 +18141,8 @@
         </p:nvSpPr>
         <p:spPr>
           <a:xfrm>
-            <a:off x="8268004" y="2142053"/>
-            <a:ext cx="3210458" cy="540131"/>
+            <a:off x="8268004" y="2231136"/>
+            <a:ext cx="3210458" cy="288353"/>
           </a:xfrm>
           <a:prstGeom prst="rect">
             <a:avLst/>
@@ -17473,7 +18170,7 @@
                 </a:solidFill>
                 <a:latin typeface="Arial"/>
               </a:rPr>
-              <a:t>Set aside</a:t>
+              <a:t>Keep them honest</a:t>
             </a:r>
           </a:p>
         </p:txBody>
@@ -17486,8 +18183,8 @@
         </p:nvSpPr>
         <p:spPr>
           <a:xfrm>
-            <a:off x="8268004" y="2755336"/>
-            <a:ext cx="3210458" cy="809053"/>
+            <a:off x="8268004" y="2592641"/>
+            <a:ext cx="3210458" cy="1036065"/>
           </a:xfrm>
           <a:prstGeom prst="rect">
             <a:avLst/>
@@ -17515,7 +18212,7 @@
                 </a:solidFill>
                 <a:latin typeface="Arial"/>
               </a:rPr>
-              <a:t>Restricting AI use. Open source defends against strangers. We employ our authors.</a:t>
+              <a:t>Dismiss stale approvals when new commits land, so the approval refers to the code that actually merges.</a:t>
             </a:r>
           </a:p>
         </p:txBody>
@@ -17528,8 +18225,8 @@
         </p:nvSpPr>
         <p:spPr>
           <a:xfrm>
-            <a:off x="548640" y="4231902"/>
-            <a:ext cx="54864" cy="746861"/>
+            <a:off x="548640" y="4296219"/>
+            <a:ext cx="54864" cy="464870"/>
           </a:xfrm>
           <a:prstGeom prst="rect">
             <a:avLst/>
@@ -17572,8 +18269,8 @@
         </p:nvSpPr>
         <p:spPr>
           <a:xfrm>
-            <a:off x="822959" y="4323342"/>
-            <a:ext cx="10682935" cy="563981"/>
+            <a:off x="822959" y="4387659"/>
+            <a:ext cx="10682935" cy="281990"/>
           </a:xfrm>
           <a:prstGeom prst="rect">
             <a:avLst/>
@@ -17601,7 +18298,7 @@
                 </a:solidFill>
                 <a:latin typeface="Arial"/>
               </a:rPr>
-              <a:t>The approval stays with a human who is independent of whoever implemented the change. That is the one line that does not move.</a:t>
+              <a:t>A check that runs is a suggestion. A check that blocks a merge is a control.</a:t>
             </a:r>
           </a:p>
         </p:txBody>
@@ -17705,7 +18402,7 @@
                 </a:solidFill>
                 <a:latin typeface="Arial"/>
               </a:rPr>
-              <a:t>SLIDE 24 · WHAT I DON'T KNOW YET</a:t>
+              <a:t>SLIDE 24 · 05 · IN ONE REPOSITORY</a:t>
             </a:r>
           </a:p>
         </p:txBody>
@@ -17747,7 +18444,7 @@
                 </a:solidFill>
                 <a:latin typeface="Georgia"/>
               </a:rPr>
-              <a:t>What I don't know yet</a:t>
+              <a:t>Two decisions the repository owner makes</a:t>
             </a:r>
           </a:p>
         </p:txBody>
@@ -17888,8 +18585,8 @@
         </p:nvSpPr>
         <p:spPr>
           <a:xfrm>
-            <a:off x="548640" y="1811803"/>
-            <a:ext cx="2636443" cy="2212022"/>
+            <a:off x="548640" y="2097963"/>
+            <a:ext cx="5455767" cy="1481455"/>
           </a:xfrm>
           <a:prstGeom prst="roundRect">
             <a:avLst>
@@ -17936,8 +18633,8 @@
         </p:nvSpPr>
         <p:spPr>
           <a:xfrm>
-            <a:off x="548640" y="1921531"/>
-            <a:ext cx="45720" cy="1992566"/>
+            <a:off x="548640" y="2207691"/>
+            <a:ext cx="45720" cy="1261999"/>
           </a:xfrm>
           <a:prstGeom prst="rect">
             <a:avLst/>
@@ -17980,8 +18677,8 @@
         </p:nvSpPr>
         <p:spPr>
           <a:xfrm>
-            <a:off x="749808" y="1939819"/>
-            <a:ext cx="2270683" cy="791908"/>
+            <a:off x="749808" y="2225979"/>
+            <a:ext cx="5090007" cy="288353"/>
           </a:xfrm>
           <a:prstGeom prst="rect">
             <a:avLst/>
@@ -18009,7 +18706,7 @@
                 </a:solidFill>
                 <a:latin typeface="Arial"/>
               </a:rPr>
-              <a:t>Same team, or outside it?</a:t>
+              <a:t>Who reviews the paths that carry risk</a:t>
             </a:r>
           </a:p>
         </p:txBody>
@@ -18022,8 +18719,8 @@
         </p:nvSpPr>
         <p:spPr>
           <a:xfrm>
-            <a:off x="749808" y="2804879"/>
-            <a:ext cx="2270683" cy="1036065"/>
+            <a:off x="749808" y="2587485"/>
+            <a:ext cx="5090007" cy="809053"/>
           </a:xfrm>
           <a:prstGeom prst="rect">
             <a:avLst/>
@@ -18051,7 +18748,7 @@
                 </a:solidFill>
                 <a:latin typeface="Arial"/>
               </a:rPr>
-              <a:t>Everything here assumes same-team approval is enough. The regulation does not say.</a:t>
+              <a:t>A CODEOWNERS file requires a named reviewer for the code that moves money or touches customer data. The rest of the repository stays on the lighter default.</a:t>
             </a:r>
           </a:p>
         </p:txBody>
@@ -18064,8 +18761,8 @@
         </p:nvSpPr>
         <p:spPr>
           <a:xfrm>
-            <a:off x="3367963" y="1811803"/>
-            <a:ext cx="2636443" cy="2212022"/>
+            <a:off x="6187287" y="2097963"/>
+            <a:ext cx="5455767" cy="1481455"/>
           </a:xfrm>
           <a:prstGeom prst="roundRect">
             <a:avLst>
@@ -18112,8 +18809,8 @@
         </p:nvSpPr>
         <p:spPr>
           <a:xfrm>
-            <a:off x="3367963" y="1921531"/>
-            <a:ext cx="45720" cy="1992566"/>
+            <a:off x="6187287" y="2207691"/>
+            <a:ext cx="45720" cy="1261999"/>
           </a:xfrm>
           <a:prstGeom prst="rect">
             <a:avLst/>
@@ -18156,8 +18853,8 @@
         </p:nvSpPr>
         <p:spPr>
           <a:xfrm>
-            <a:off x="3569131" y="1939819"/>
-            <a:ext cx="2270683" cy="791908"/>
+            <a:off x="6388455" y="2225979"/>
+            <a:ext cx="5090007" cy="288353"/>
           </a:xfrm>
           <a:prstGeom prst="rect">
             <a:avLst/>
@@ -18185,7 +18882,7 @@
                 </a:solidFill>
                 <a:latin typeface="Arial"/>
               </a:rPr>
-              <a:t>Does a classifier count as a function?</a:t>
+              <a:t>Whether a machine may approve here</a:t>
             </a:r>
           </a:p>
         </p:txBody>
@@ -18198,8 +18895,8 @@
         </p:nvSpPr>
         <p:spPr>
           <a:xfrm>
-            <a:off x="3569131" y="2804879"/>
-            <a:ext cx="2270683" cy="1036065"/>
+            <a:off x="6388455" y="2587485"/>
+            <a:ext cx="5090007" cy="809053"/>
           </a:xfrm>
           <a:prstGeom prst="rect">
             <a:avLst/>
@@ -18227,69 +18924,21 @@
                 </a:solidFill>
                 <a:latin typeface="Arial"/>
               </a:rPr>
-              <a:t>Meta and Zalando auto-approve. Nobody has written down whether DORA allows it.</a:t>
-            </a:r>
-          </a:p>
-        </p:txBody>
-      </p:sp>
-      <p:sp>
-        <p:nvSpPr>
-          <p:cNvPr id="16" name="Rounded Rectangle 15"/>
+              <a:t>Off by default today. A payment repository and an internal dashboard may answer differently. Neither should answer by accident.</a:t>
+            </a:r>
+          </a:p>
+        </p:txBody>
+      </p:sp>
+      <p:sp>
+        <p:nvSpPr>
+          <p:cNvPr id="16" name="Rectangle 15"/>
           <p:cNvSpPr/>
           <p:nvPr/>
         </p:nvSpPr>
         <p:spPr>
           <a:xfrm>
-            <a:off x="6187287" y="1811803"/>
-            <a:ext cx="2636443" cy="2212022"/>
-          </a:xfrm>
-          <a:prstGeom prst="roundRect">
-            <a:avLst>
-              <a:gd name="adj" fmla="val 4000"/>
-            </a:avLst>
-          </a:prstGeom>
-          <a:solidFill>
-            <a:srgbClr val="151D2E"/>
-          </a:solidFill>
-          <a:ln w="9525">
-            <a:solidFill>
-              <a:srgbClr val="35415A"/>
-            </a:solidFill>
-          </a:ln>
-          <a:effectLst/>
-        </p:spPr>
-        <p:style>
-          <a:lnRef idx="1">
-            <a:schemeClr val="accent1"/>
-          </a:lnRef>
-          <a:fillRef idx="3">
-            <a:schemeClr val="accent1"/>
-          </a:fillRef>
-          <a:effectRef idx="2">
-            <a:schemeClr val="accent1"/>
-          </a:effectRef>
-          <a:fontRef idx="minor">
-            <a:schemeClr val="lt1"/>
-          </a:fontRef>
-        </p:style>
-        <p:txBody>
-          <a:bodyPr rtlCol="0" anchor="ctr"/>
-          <a:lstStyle/>
-          <a:p>
-            <a:pPr algn="ctr"/>
-          </a:p>
-        </p:txBody>
-      </p:sp>
-      <p:sp>
-        <p:nvSpPr>
-          <p:cNvPr id="17" name="Rectangle 16"/>
-          <p:cNvSpPr/>
-          <p:nvPr/>
-        </p:nvSpPr>
-        <p:spPr>
-          <a:xfrm>
-            <a:off x="6187287" y="1921531"/>
-            <a:ext cx="45720" cy="1992566"/>
+            <a:off x="548640" y="4064050"/>
+            <a:ext cx="54864" cy="746861"/>
           </a:xfrm>
           <a:prstGeom prst="rect">
             <a:avLst/>
@@ -18326,14 +18975,14 @@
       </p:sp>
       <p:sp>
         <p:nvSpPr>
-          <p:cNvPr id="18" name="TextBox 17"/>
+          <p:cNvPr id="17" name="TextBox 16"/>
           <p:cNvSpPr txBox="1"/>
           <p:nvPr/>
         </p:nvSpPr>
         <p:spPr>
           <a:xfrm>
-            <a:off x="6388455" y="1939819"/>
-            <a:ext cx="2270683" cy="791908"/>
+            <a:off x="822959" y="4155490"/>
+            <a:ext cx="10682935" cy="563981"/>
           </a:xfrm>
           <a:prstGeom prst="rect">
             <a:avLst/>
@@ -18341,7 +18990,7 @@
           <a:noFill/>
         </p:spPr>
         <p:txBody>
-          <a:bodyPr wrap="square" lIns="0" rIns="0" tIns="0" bIns="0" anchor="t">
+          <a:bodyPr wrap="square" lIns="0" rIns="0" tIns="0" bIns="0" anchor="ctr">
             <a:spAutoFit/>
           </a:bodyPr>
           <a:lstStyle/>
@@ -18355,579 +19004,13 @@
               </a:spcAft>
             </a:pPr>
             <a:r>
-              <a:rPr b="1" sz="1625" i="0">
+              <a:rPr b="1" sz="1820" i="0">
                 <a:solidFill>
                   <a:srgbClr val="E6ECF7"/>
                 </a:solidFill>
                 <a:latin typeface="Arial"/>
               </a:rPr>
-              <a:t>What is switched on today?</a:t>
-            </a:r>
-          </a:p>
-        </p:txBody>
-      </p:sp>
-      <p:sp>
-        <p:nvSpPr>
-          <p:cNvPr id="19" name="TextBox 18"/>
-          <p:cNvSpPr txBox="1"/>
-          <p:nvPr/>
-        </p:nvSpPr>
-        <p:spPr>
-          <a:xfrm>
-            <a:off x="6388455" y="2804879"/>
-            <a:ext cx="2270683" cy="1036065"/>
-          </a:xfrm>
-          <a:prstGeom prst="rect">
-            <a:avLst/>
-          </a:prstGeom>
-          <a:noFill/>
-        </p:spPr>
-        <p:txBody>
-          <a:bodyPr wrap="square" lIns="0" rIns="0" tIns="0" bIns="0" anchor="t">
-            <a:spAutoFit/>
-          </a:bodyPr>
-          <a:lstStyle/>
-          <a:p>
-            <a:pPr algn="l">
-              <a:lnSpc>
-                <a:spcPct val="125000"/>
-              </a:lnSpc>
-              <a:spcAft>
-                <a:spcPts val="0"/>
-              </a:spcAft>
-            </a:pPr>
-            <a:r>
-              <a:rPr b="0" sz="1430" i="0">
-                <a:solidFill>
-                  <a:srgbClr val="E6ECF7"/>
-                </a:solidFill>
-                <a:latin typeface="Arial"/>
-              </a:rPr>
-              <a:t>A day of checking I have not done.</a:t>
-            </a:r>
-          </a:p>
-        </p:txBody>
-      </p:sp>
-      <p:sp>
-        <p:nvSpPr>
-          <p:cNvPr id="20" name="Rounded Rectangle 19"/>
-          <p:cNvSpPr/>
-          <p:nvPr/>
-        </p:nvSpPr>
-        <p:spPr>
-          <a:xfrm>
-            <a:off x="9006611" y="1811803"/>
-            <a:ext cx="2636443" cy="2212022"/>
-          </a:xfrm>
-          <a:prstGeom prst="roundRect">
-            <a:avLst>
-              <a:gd name="adj" fmla="val 4000"/>
-            </a:avLst>
-          </a:prstGeom>
-          <a:solidFill>
-            <a:srgbClr val="151D2E"/>
-          </a:solidFill>
-          <a:ln w="9525">
-            <a:solidFill>
-              <a:srgbClr val="35415A"/>
-            </a:solidFill>
-          </a:ln>
-          <a:effectLst/>
-        </p:spPr>
-        <p:style>
-          <a:lnRef idx="1">
-            <a:schemeClr val="accent1"/>
-          </a:lnRef>
-          <a:fillRef idx="3">
-            <a:schemeClr val="accent1"/>
-          </a:fillRef>
-          <a:effectRef idx="2">
-            <a:schemeClr val="accent1"/>
-          </a:effectRef>
-          <a:fontRef idx="minor">
-            <a:schemeClr val="lt1"/>
-          </a:fontRef>
-        </p:style>
-        <p:txBody>
-          <a:bodyPr rtlCol="0" anchor="ctr"/>
-          <a:lstStyle/>
-          <a:p>
-            <a:pPr algn="ctr"/>
-          </a:p>
-        </p:txBody>
-      </p:sp>
-      <p:sp>
-        <p:nvSpPr>
-          <p:cNvPr id="21" name="Rectangle 20"/>
-          <p:cNvSpPr/>
-          <p:nvPr/>
-        </p:nvSpPr>
-        <p:spPr>
-          <a:xfrm>
-            <a:off x="9006611" y="1921531"/>
-            <a:ext cx="45720" cy="1992566"/>
-          </a:xfrm>
-          <a:prstGeom prst="rect">
-            <a:avLst/>
-          </a:prstGeom>
-          <a:solidFill>
-            <a:srgbClr val="E8A33D"/>
-          </a:solidFill>
-          <a:ln>
-            <a:noFill/>
-          </a:ln>
-          <a:effectLst/>
-        </p:spPr>
-        <p:style>
-          <a:lnRef idx="1">
-            <a:schemeClr val="accent1"/>
-          </a:lnRef>
-          <a:fillRef idx="3">
-            <a:schemeClr val="accent1"/>
-          </a:fillRef>
-          <a:effectRef idx="2">
-            <a:schemeClr val="accent1"/>
-          </a:effectRef>
-          <a:fontRef idx="minor">
-            <a:schemeClr val="lt1"/>
-          </a:fontRef>
-        </p:style>
-        <p:txBody>
-          <a:bodyPr rtlCol="0" anchor="ctr"/>
-          <a:lstStyle/>
-          <a:p>
-            <a:pPr algn="ctr"/>
-          </a:p>
-        </p:txBody>
-      </p:sp>
-      <p:sp>
-        <p:nvSpPr>
-          <p:cNvPr id="22" name="TextBox 21"/>
-          <p:cNvSpPr txBox="1"/>
-          <p:nvPr/>
-        </p:nvSpPr>
-        <p:spPr>
-          <a:xfrm>
-            <a:off x="9207779" y="1939819"/>
-            <a:ext cx="2270683" cy="791908"/>
-          </a:xfrm>
-          <a:prstGeom prst="rect">
-            <a:avLst/>
-          </a:prstGeom>
-          <a:noFill/>
-        </p:spPr>
-        <p:txBody>
-          <a:bodyPr wrap="square" lIns="0" rIns="0" tIns="0" bIns="0" anchor="t">
-            <a:spAutoFit/>
-          </a:bodyPr>
-          <a:lstStyle/>
-          <a:p>
-            <a:pPr algn="l">
-              <a:lnSpc>
-                <a:spcPct val="115000"/>
-              </a:lnSpc>
-              <a:spcAft>
-                <a:spcPts val="0"/>
-              </a:spcAft>
-            </a:pPr>
-            <a:r>
-              <a:rPr b="1" sz="1625" i="0">
-                <a:solidFill>
-                  <a:srgbClr val="E6ECF7"/>
-                </a:solidFill>
-                <a:latin typeface="Arial"/>
-              </a:rPr>
-              <a:t>Does the author's check survive a team?</a:t>
-            </a:r>
-          </a:p>
-        </p:txBody>
-      </p:sp>
-      <p:sp>
-        <p:nvSpPr>
-          <p:cNvPr id="23" name="TextBox 22"/>
-          <p:cNvSpPr txBox="1"/>
-          <p:nvPr/>
-        </p:nvSpPr>
-        <p:spPr>
-          <a:xfrm>
-            <a:off x="9207779" y="2804879"/>
-            <a:ext cx="2270683" cy="1036065"/>
-          </a:xfrm>
-          <a:prstGeom prst="rect">
-            <a:avLst/>
-          </a:prstGeom>
-          <a:noFill/>
-        </p:spPr>
-        <p:txBody>
-          <a:bodyPr wrap="square" lIns="0" rIns="0" tIns="0" bIns="0" anchor="t">
-            <a:spAutoFit/>
-          </a:bodyPr>
-          <a:lstStyle/>
-          <a:p>
-            <a:pPr algn="l">
-              <a:lnSpc>
-                <a:spcPct val="125000"/>
-              </a:lnSpc>
-              <a:spcAft>
-                <a:spcPts val="0"/>
-              </a:spcAft>
-            </a:pPr>
-            <a:r>
-              <a:rPr b="0" sz="1430" i="0">
-                <a:solidFill>
-                  <a:srgbClr val="E6ECF7"/>
-                </a:solidFill>
-                <a:latin typeface="Arial"/>
-              </a:rPr>
-              <a:t>Nobody has used it.</a:t>
-            </a:r>
-          </a:p>
-        </p:txBody>
-      </p:sp>
-      <p:sp>
-        <p:nvSpPr>
-          <p:cNvPr id="24" name="Rectangle 23"/>
-          <p:cNvSpPr/>
-          <p:nvPr/>
-        </p:nvSpPr>
-        <p:spPr>
-          <a:xfrm>
-            <a:off x="548640" y="4508457"/>
-            <a:ext cx="5455767" cy="911352"/>
-          </a:xfrm>
-          <a:prstGeom prst="rect">
-            <a:avLst/>
-          </a:prstGeom>
-          <a:solidFill>
-            <a:srgbClr val="151D2E"/>
-          </a:solidFill>
-          <a:ln w="9525">
-            <a:solidFill>
-              <a:srgbClr val="35415A"/>
-            </a:solidFill>
-          </a:ln>
-          <a:effectLst/>
-        </p:spPr>
-        <p:style>
-          <a:lnRef idx="1">
-            <a:schemeClr val="accent1"/>
-          </a:lnRef>
-          <a:fillRef idx="3">
-            <a:schemeClr val="accent1"/>
-          </a:fillRef>
-          <a:effectRef idx="2">
-            <a:schemeClr val="accent1"/>
-          </a:effectRef>
-          <a:fontRef idx="minor">
-            <a:schemeClr val="lt1"/>
-          </a:fontRef>
-        </p:style>
-        <p:txBody>
-          <a:bodyPr rtlCol="0" anchor="ctr"/>
-          <a:lstStyle/>
-          <a:p>
-            <a:pPr algn="ctr"/>
-          </a:p>
-        </p:txBody>
-      </p:sp>
-      <p:sp>
-        <p:nvSpPr>
-          <p:cNvPr id="25" name="Rectangle 24"/>
-          <p:cNvSpPr/>
-          <p:nvPr/>
-        </p:nvSpPr>
-        <p:spPr>
-          <a:xfrm>
-            <a:off x="548640" y="4508457"/>
-            <a:ext cx="45720" cy="911352"/>
-          </a:xfrm>
-          <a:prstGeom prst="rect">
-            <a:avLst/>
-          </a:prstGeom>
-          <a:solidFill>
-            <a:srgbClr val="E8A33D"/>
-          </a:solidFill>
-          <a:ln>
-            <a:noFill/>
-          </a:ln>
-          <a:effectLst/>
-        </p:spPr>
-        <p:style>
-          <a:lnRef idx="1">
-            <a:schemeClr val="accent1"/>
-          </a:lnRef>
-          <a:fillRef idx="3">
-            <a:schemeClr val="accent1"/>
-          </a:fillRef>
-          <a:effectRef idx="2">
-            <a:schemeClr val="accent1"/>
-          </a:effectRef>
-          <a:fontRef idx="minor">
-            <a:schemeClr val="lt1"/>
-          </a:fontRef>
-        </p:style>
-        <p:txBody>
-          <a:bodyPr rtlCol="0" anchor="ctr"/>
-          <a:lstStyle/>
-          <a:p>
-            <a:pPr algn="ctr"/>
-          </a:p>
-        </p:txBody>
-      </p:sp>
-      <p:sp>
-        <p:nvSpPr>
-          <p:cNvPr id="26" name="TextBox 25"/>
-          <p:cNvSpPr txBox="1"/>
-          <p:nvPr/>
-        </p:nvSpPr>
-        <p:spPr>
-          <a:xfrm>
-            <a:off x="749808" y="4618185"/>
-            <a:ext cx="5090007" cy="228600"/>
-          </a:xfrm>
-          <a:prstGeom prst="rect">
-            <a:avLst/>
-          </a:prstGeom>
-          <a:noFill/>
-        </p:spPr>
-        <p:txBody>
-          <a:bodyPr wrap="square" lIns="0" rIns="0" tIns="0" bIns="0" anchor="t">
-            <a:spAutoFit/>
-          </a:bodyPr>
-          <a:lstStyle/>
-          <a:p>
-            <a:pPr algn="l">
-              <a:lnSpc>
-                <a:spcPct val="115000"/>
-              </a:lnSpc>
-              <a:spcAft>
-                <a:spcPts val="0"/>
-              </a:spcAft>
-            </a:pPr>
-            <a:r>
-              <a:rPr b="1" sz="1495" i="0">
-                <a:solidFill>
-                  <a:srgbClr val="E6ECF7"/>
-                </a:solidFill>
-                <a:latin typeface="Arial"/>
-              </a:rPr>
-              <a:t>What would help me most</a:t>
-            </a:r>
-          </a:p>
-        </p:txBody>
-      </p:sp>
-      <p:sp>
-        <p:nvSpPr>
-          <p:cNvPr id="27" name="TextBox 26"/>
-          <p:cNvSpPr txBox="1"/>
-          <p:nvPr/>
-        </p:nvSpPr>
-        <p:spPr>
-          <a:xfrm>
-            <a:off x="749808" y="4855929"/>
-            <a:ext cx="5090007" cy="435864"/>
-          </a:xfrm>
-          <a:prstGeom prst="rect">
-            <a:avLst/>
-          </a:prstGeom>
-          <a:noFill/>
-        </p:spPr>
-        <p:txBody>
-          <a:bodyPr wrap="square" lIns="0" rIns="0" tIns="0" bIns="0" anchor="t">
-            <a:spAutoFit/>
-          </a:bodyPr>
-          <a:lstStyle/>
-          <a:p>
-            <a:pPr algn="l">
-              <a:lnSpc>
-                <a:spcPct val="120000"/>
-              </a:lnSpc>
-              <a:spcAft>
-                <a:spcPts val="0"/>
-              </a:spcAft>
-            </a:pPr>
-            <a:r>
-              <a:rPr b="0" sz="1430" i="0">
-                <a:solidFill>
-                  <a:srgbClr val="E6ECF7"/>
-                </a:solidFill>
-                <a:latin typeface="Arial"/>
-              </a:rPr>
-              <a:t>A review decision you made and had to undo. What did it cost?</a:t>
-            </a:r>
-          </a:p>
-        </p:txBody>
-      </p:sp>
-      <p:sp>
-        <p:nvSpPr>
-          <p:cNvPr id="28" name="Rectangle 27"/>
-          <p:cNvSpPr/>
-          <p:nvPr/>
-        </p:nvSpPr>
-        <p:spPr>
-          <a:xfrm>
-            <a:off x="6187287" y="4508457"/>
-            <a:ext cx="5455767" cy="911352"/>
-          </a:xfrm>
-          <a:prstGeom prst="rect">
-            <a:avLst/>
-          </a:prstGeom>
-          <a:solidFill>
-            <a:srgbClr val="151D2E"/>
-          </a:solidFill>
-          <a:ln w="9525">
-            <a:solidFill>
-              <a:srgbClr val="35415A"/>
-            </a:solidFill>
-          </a:ln>
-          <a:effectLst/>
-        </p:spPr>
-        <p:style>
-          <a:lnRef idx="1">
-            <a:schemeClr val="accent1"/>
-          </a:lnRef>
-          <a:fillRef idx="3">
-            <a:schemeClr val="accent1"/>
-          </a:fillRef>
-          <a:effectRef idx="2">
-            <a:schemeClr val="accent1"/>
-          </a:effectRef>
-          <a:fontRef idx="minor">
-            <a:schemeClr val="lt1"/>
-          </a:fontRef>
-        </p:style>
-        <p:txBody>
-          <a:bodyPr rtlCol="0" anchor="ctr"/>
-          <a:lstStyle/>
-          <a:p>
-            <a:pPr algn="ctr"/>
-          </a:p>
-        </p:txBody>
-      </p:sp>
-      <p:sp>
-        <p:nvSpPr>
-          <p:cNvPr id="29" name="Rectangle 28"/>
-          <p:cNvSpPr/>
-          <p:nvPr/>
-        </p:nvSpPr>
-        <p:spPr>
-          <a:xfrm>
-            <a:off x="6187287" y="4508457"/>
-            <a:ext cx="45720" cy="911352"/>
-          </a:xfrm>
-          <a:prstGeom prst="rect">
-            <a:avLst/>
-          </a:prstGeom>
-          <a:solidFill>
-            <a:srgbClr val="29D3E0"/>
-          </a:solidFill>
-          <a:ln>
-            <a:noFill/>
-          </a:ln>
-          <a:effectLst/>
-        </p:spPr>
-        <p:style>
-          <a:lnRef idx="1">
-            <a:schemeClr val="accent1"/>
-          </a:lnRef>
-          <a:fillRef idx="3">
-            <a:schemeClr val="accent1"/>
-          </a:fillRef>
-          <a:effectRef idx="2">
-            <a:schemeClr val="accent1"/>
-          </a:effectRef>
-          <a:fontRef idx="minor">
-            <a:schemeClr val="lt1"/>
-          </a:fontRef>
-        </p:style>
-        <p:txBody>
-          <a:bodyPr rtlCol="0" anchor="ctr"/>
-          <a:lstStyle/>
-          <a:p>
-            <a:pPr algn="ctr"/>
-          </a:p>
-        </p:txBody>
-      </p:sp>
-      <p:sp>
-        <p:nvSpPr>
-          <p:cNvPr id="30" name="TextBox 29"/>
-          <p:cNvSpPr txBox="1"/>
-          <p:nvPr/>
-        </p:nvSpPr>
-        <p:spPr>
-          <a:xfrm>
-            <a:off x="6388455" y="4618185"/>
-            <a:ext cx="5090007" cy="228600"/>
-          </a:xfrm>
-          <a:prstGeom prst="rect">
-            <a:avLst/>
-          </a:prstGeom>
-          <a:noFill/>
-        </p:spPr>
-        <p:txBody>
-          <a:bodyPr wrap="square" lIns="0" rIns="0" tIns="0" bIns="0" anchor="t">
-            <a:spAutoFit/>
-          </a:bodyPr>
-          <a:lstStyle/>
-          <a:p>
-            <a:pPr algn="l">
-              <a:lnSpc>
-                <a:spcPct val="115000"/>
-              </a:lnSpc>
-              <a:spcAft>
-                <a:spcPts val="0"/>
-              </a:spcAft>
-            </a:pPr>
-            <a:r>
-              <a:rPr b="1" sz="1495" i="0">
-                <a:solidFill>
-                  <a:srgbClr val="E6ECF7"/>
-                </a:solidFill>
-                <a:latin typeface="Arial"/>
-              </a:rPr>
-              <a:t>What would change my mind</a:t>
-            </a:r>
-          </a:p>
-        </p:txBody>
-      </p:sp>
-      <p:sp>
-        <p:nvSpPr>
-          <p:cNvPr id="31" name="TextBox 30"/>
-          <p:cNvSpPr txBox="1"/>
-          <p:nvPr/>
-        </p:nvSpPr>
-        <p:spPr>
-          <a:xfrm>
-            <a:off x="6388455" y="4855929"/>
-            <a:ext cx="5090007" cy="435864"/>
-          </a:xfrm>
-          <a:prstGeom prst="rect">
-            <a:avLst/>
-          </a:prstGeom>
-          <a:noFill/>
-        </p:spPr>
-        <p:txBody>
-          <a:bodyPr wrap="square" lIns="0" rIns="0" tIns="0" bIns="0" anchor="t">
-            <a:spAutoFit/>
-          </a:bodyPr>
-          <a:lstStyle/>
-          <a:p>
-            <a:pPr algn="l">
-              <a:lnSpc>
-                <a:spcPct val="120000"/>
-              </a:lnSpc>
-              <a:spcAft>
-                <a:spcPts val="0"/>
-              </a:spcAft>
-            </a:pPr>
-            <a:r>
-              <a:rPr b="0" sz="1430" i="0">
-                <a:solidFill>
-                  <a:srgbClr val="E6ECF7"/>
-                </a:solidFill>
-                <a:latin typeface="Arial"/>
-              </a:rPr>
-              <a:t>A regulated company whose auditor accepted a machine's approval.</a:t>
+              <a:t>Write the second answer down, with the reason. A setting with no owner is a decision nobody made.</a:t>
             </a:r>
           </a:p>
         </p:txBody>
@@ -19031,7 +19114,7 @@
                 </a:solidFill>
                 <a:latin typeface="Arial"/>
               </a:rPr>
-              <a:t>SLIDE 25 · APPENDIX A1</a:t>
+              <a:t>SLIDE 25 · 05 · IN ONE REPOSITORY</a:t>
             </a:r>
           </a:p>
         </p:txBody>
@@ -19073,7 +19156,7 @@
                 </a:solidFill>
                 <a:latin typeface="Georgia"/>
               </a:rPr>
-              <a:t>A1 — Who did what about the queue</a:t>
+              <a:t>Ask the author for what no check can see</a:t>
             </a:r>
           </a:p>
         </p:txBody>
@@ -19202,6 +19285,5178 @@
                 <a:latin typeface="Arial"/>
               </a:rPr>
               <a:t>25</a:t>
+            </a:r>
+          </a:p>
+        </p:txBody>
+      </p:sp>
+      <p:sp>
+        <p:nvSpPr>
+          <p:cNvPr id="8" name="TextBox 7"/>
+          <p:cNvSpPr txBox="1"/>
+          <p:nvPr/>
+        </p:nvSpPr>
+        <p:spPr>
+          <a:xfrm>
+            <a:off x="548640" y="1946588"/>
+            <a:ext cx="11094415" cy="261848"/>
+          </a:xfrm>
+          <a:prstGeom prst="rect">
+            <a:avLst/>
+          </a:prstGeom>
+          <a:noFill/>
+        </p:spPr>
+        <p:txBody>
+          <a:bodyPr wrap="square" lIns="0" rIns="0" tIns="0" bIns="0" anchor="t">
+            <a:spAutoFit/>
+          </a:bodyPr>
+          <a:lstStyle/>
+          <a:p>
+            <a:pPr algn="l">
+              <a:lnSpc>
+                <a:spcPct val="115000"/>
+              </a:lnSpc>
+              <a:spcAft>
+                <a:spcPts val="0"/>
+              </a:spcAft>
+            </a:pPr>
+            <a:r>
+              <a:rPr b="0" sz="1690" i="0">
+                <a:solidFill>
+                  <a:srgbClr val="E6ECF7"/>
+                </a:solidFill>
+                <a:latin typeface="Arial"/>
+              </a:rPr>
+              <a:t>One pull request template. The same questions in front of every change.</a:t>
+            </a:r>
+          </a:p>
+        </p:txBody>
+      </p:sp>
+      <p:sp>
+        <p:nvSpPr>
+          <p:cNvPr id="9" name="TextBox 8"/>
+          <p:cNvSpPr txBox="1"/>
+          <p:nvPr/>
+        </p:nvSpPr>
+        <p:spPr>
+          <a:xfrm>
+            <a:off x="548640" y="2729644"/>
+            <a:ext cx="11094415" cy="1152524"/>
+          </a:xfrm>
+          <a:prstGeom prst="rect">
+            <a:avLst/>
+          </a:prstGeom>
+          <a:noFill/>
+        </p:spPr>
+        <p:txBody>
+          <a:bodyPr wrap="square" lIns="0" rIns="0" tIns="0" bIns="0">
+            <a:spAutoFit/>
+          </a:bodyPr>
+          <a:lstStyle/>
+          <a:p>
+            <a:pPr>
+              <a:lnSpc>
+                <a:spcPct val="115000"/>
+              </a:lnSpc>
+              <a:spcAft>
+                <a:spcPts val="400"/>
+              </a:spcAft>
+            </a:pPr>
+            <a:r>
+              <a:rPr sz="1625" b="1">
+                <a:solidFill>
+                  <a:srgbClr val="E8A33D"/>
+                </a:solidFill>
+                <a:latin typeface="Arial"/>
+              </a:rPr>
+              <a:t>—  </a:t>
+            </a:r>
+            <a:r>
+              <a:rPr b="0" sz="1625" i="0">
+                <a:solidFill>
+                  <a:srgbClr val="E6ECF7"/>
+                </a:solidFill>
+                <a:latin typeface="Arial"/>
+              </a:rPr>
+              <a:t>What changed, and why it belongs here</a:t>
+            </a:r>
+          </a:p>
+          <a:p>
+            <a:pPr>
+              <a:lnSpc>
+                <a:spcPct val="115000"/>
+              </a:lnSpc>
+              <a:spcAft>
+                <a:spcPts val="400"/>
+              </a:spcAft>
+            </a:pPr>
+            <a:r>
+              <a:rPr sz="1625" b="1">
+                <a:solidFill>
+                  <a:srgbClr val="E8A33D"/>
+                </a:solidFill>
+                <a:latin typeface="Arial"/>
+              </a:rPr>
+              <a:t>—  </a:t>
+            </a:r>
+            <a:r>
+              <a:rPr b="0" sz="1625" i="0">
+                <a:solidFill>
+                  <a:srgbClr val="E6ECF7"/>
+                </a:solidFill>
+                <a:latin typeface="Arial"/>
+              </a:rPr>
+              <a:t>What you want looked at, specifically</a:t>
+            </a:r>
+          </a:p>
+          <a:p>
+            <a:pPr>
+              <a:lnSpc>
+                <a:spcPct val="115000"/>
+              </a:lnSpc>
+              <a:spcAft>
+                <a:spcPts val="400"/>
+              </a:spcAft>
+            </a:pPr>
+            <a:r>
+              <a:rPr sz="1625" b="1">
+                <a:solidFill>
+                  <a:srgbClr val="E8A33D"/>
+                </a:solidFill>
+                <a:latin typeface="Arial"/>
+              </a:rPr>
+              <a:t>—  </a:t>
+            </a:r>
+            <a:r>
+              <a:rPr b="0" sz="1625" i="0">
+                <a:solidFill>
+                  <a:srgbClr val="E6ECF7"/>
+                </a:solidFill>
+                <a:latin typeface="Arial"/>
+              </a:rPr>
+              <a:t>How to undo it</a:t>
+            </a:r>
+          </a:p>
+          <a:p>
+            <a:pPr>
+              <a:lnSpc>
+                <a:spcPct val="115000"/>
+              </a:lnSpc>
+              <a:spcAft>
+                <a:spcPts val="400"/>
+              </a:spcAft>
+            </a:pPr>
+            <a:r>
+              <a:rPr sz="1625" b="1">
+                <a:solidFill>
+                  <a:srgbClr val="E8A33D"/>
+                </a:solidFill>
+                <a:latin typeface="Arial"/>
+              </a:rPr>
+              <a:t>—  </a:t>
+            </a:r>
+            <a:r>
+              <a:rPr b="0" sz="1625" i="0">
+                <a:solidFill>
+                  <a:srgbClr val="E6ECF7"/>
+                </a:solidFill>
+                <a:latin typeface="Arial"/>
+              </a:rPr>
+              <a:t>Which parts an agent wrote</a:t>
+            </a:r>
+          </a:p>
+        </p:txBody>
+      </p:sp>
+      <p:sp>
+        <p:nvSpPr>
+          <p:cNvPr id="10" name="Rectangle 9"/>
+          <p:cNvSpPr/>
+          <p:nvPr/>
+        </p:nvSpPr>
+        <p:spPr>
+          <a:xfrm>
+            <a:off x="548640" y="4366801"/>
+            <a:ext cx="54864" cy="746861"/>
+          </a:xfrm>
+          <a:prstGeom prst="rect">
+            <a:avLst/>
+          </a:prstGeom>
+          <a:solidFill>
+            <a:srgbClr val="29D3E0"/>
+          </a:solidFill>
+          <a:ln>
+            <a:noFill/>
+          </a:ln>
+          <a:effectLst/>
+        </p:spPr>
+        <p:style>
+          <a:lnRef idx="1">
+            <a:schemeClr val="accent1"/>
+          </a:lnRef>
+          <a:fillRef idx="3">
+            <a:schemeClr val="accent1"/>
+          </a:fillRef>
+          <a:effectRef idx="2">
+            <a:schemeClr val="accent1"/>
+          </a:effectRef>
+          <a:fontRef idx="minor">
+            <a:schemeClr val="lt1"/>
+          </a:fontRef>
+        </p:style>
+        <p:txBody>
+          <a:bodyPr rtlCol="0" anchor="ctr"/>
+          <a:lstStyle/>
+          <a:p>
+            <a:pPr algn="ctr"/>
+          </a:p>
+        </p:txBody>
+      </p:sp>
+      <p:sp>
+        <p:nvSpPr>
+          <p:cNvPr id="11" name="TextBox 10"/>
+          <p:cNvSpPr txBox="1"/>
+          <p:nvPr/>
+        </p:nvSpPr>
+        <p:spPr>
+          <a:xfrm>
+            <a:off x="822959" y="4458241"/>
+            <a:ext cx="10682935" cy="563981"/>
+          </a:xfrm>
+          <a:prstGeom prst="rect">
+            <a:avLst/>
+          </a:prstGeom>
+          <a:noFill/>
+        </p:spPr>
+        <p:txBody>
+          <a:bodyPr wrap="square" lIns="0" rIns="0" tIns="0" bIns="0" anchor="ctr">
+            <a:spAutoFit/>
+          </a:bodyPr>
+          <a:lstStyle/>
+          <a:p>
+            <a:pPr algn="l">
+              <a:lnSpc>
+                <a:spcPct val="115000"/>
+              </a:lnSpc>
+              <a:spcAft>
+                <a:spcPts val="0"/>
+              </a:spcAft>
+            </a:pPr>
+            <a:r>
+              <a:rPr b="1" sz="1820" i="0">
+                <a:solidFill>
+                  <a:srgbClr val="E6ECF7"/>
+                </a:solidFill>
+                <a:latin typeface="Arial"/>
+              </a:rPr>
+              <a:t>Across 80.000 pull requests, descriptions rarely changed the review. The exception was one that explains the code and asks for a specific kind of feedback. So ask for both.</a:t>
+            </a:r>
+          </a:p>
+        </p:txBody>
+      </p:sp>
+    </p:spTree>
+  </p:cSld>
+  <p:clrMapOvr>
+    <a:masterClrMapping/>
+  </p:clrMapOvr>
+</p:sld>
+</file>
+
+<file path=ppt/slides/slide26.xml><?xml version="1.0" encoding="utf-8"?>
+<p:sld xmlns:a="http://schemas.openxmlformats.org/drawingml/2006/main" xmlns:p="http://schemas.openxmlformats.org/presentationml/2006/main" xmlns:r="http://schemas.openxmlformats.org/officeDocument/2006/relationships">
+  <p:cSld>
+    <p:spTree>
+      <p:nvGrpSpPr>
+        <p:cNvPr id="1" name=""/>
+        <p:cNvGrpSpPr/>
+        <p:nvPr/>
+      </p:nvGrpSpPr>
+      <p:grpSpPr/>
+      <p:sp>
+        <p:nvSpPr>
+          <p:cNvPr id="2" name="Rectangle 1"/>
+          <p:cNvSpPr/>
+          <p:nvPr/>
+        </p:nvSpPr>
+        <p:spPr>
+          <a:xfrm>
+            <a:off x="0" y="0"/>
+            <a:ext cx="12191695" cy="6858000"/>
+          </a:xfrm>
+          <a:prstGeom prst="rect">
+            <a:avLst/>
+          </a:prstGeom>
+          <a:solidFill>
+            <a:srgbClr val="0E1420"/>
+          </a:solidFill>
+          <a:ln>
+            <a:noFill/>
+          </a:ln>
+          <a:effectLst/>
+        </p:spPr>
+        <p:style>
+          <a:lnRef idx="1">
+            <a:schemeClr val="accent1"/>
+          </a:lnRef>
+          <a:fillRef idx="3">
+            <a:schemeClr val="accent1"/>
+          </a:fillRef>
+          <a:effectRef idx="2">
+            <a:schemeClr val="accent1"/>
+          </a:effectRef>
+          <a:fontRef idx="minor">
+            <a:schemeClr val="lt1"/>
+          </a:fontRef>
+        </p:style>
+        <p:txBody>
+          <a:bodyPr rtlCol="0" anchor="ctr"/>
+          <a:lstStyle/>
+          <a:p>
+            <a:pPr algn="ctr"/>
+          </a:p>
+        </p:txBody>
+      </p:sp>
+      <p:sp>
+        <p:nvSpPr>
+          <p:cNvPr id="3" name="TextBox 2"/>
+          <p:cNvSpPr txBox="1"/>
+          <p:nvPr/>
+        </p:nvSpPr>
+        <p:spPr>
+          <a:xfrm>
+            <a:off x="548640" y="292608"/>
+            <a:ext cx="11094415" cy="228600"/>
+          </a:xfrm>
+          <a:prstGeom prst="rect">
+            <a:avLst/>
+          </a:prstGeom>
+          <a:noFill/>
+        </p:spPr>
+        <p:txBody>
+          <a:bodyPr wrap="square" lIns="0" rIns="0" tIns="0" bIns="0" anchor="t">
+            <a:spAutoFit/>
+          </a:bodyPr>
+          <a:lstStyle/>
+          <a:p>
+            <a:pPr algn="l">
+              <a:lnSpc>
+                <a:spcPct val="115000"/>
+              </a:lnSpc>
+              <a:spcAft>
+                <a:spcPts val="0"/>
+              </a:spcAft>
+            </a:pPr>
+            <a:r>
+              <a:rPr b="1" sz="950" i="0">
+                <a:solidFill>
+                  <a:srgbClr val="29D3E0"/>
+                </a:solidFill>
+                <a:latin typeface="Arial"/>
+              </a:rPr>
+              <a:t>SLIDE 26 · 05 · IN ONE REPOSITORY</a:t>
+            </a:r>
+          </a:p>
+        </p:txBody>
+      </p:sp>
+      <p:sp>
+        <p:nvSpPr>
+          <p:cNvPr id="4" name="TextBox 3"/>
+          <p:cNvSpPr txBox="1"/>
+          <p:nvPr/>
+        </p:nvSpPr>
+        <p:spPr>
+          <a:xfrm>
+            <a:off x="548640" y="530352"/>
+            <a:ext cx="11094415" cy="548640"/>
+          </a:xfrm>
+          <a:prstGeom prst="rect">
+            <a:avLst/>
+          </a:prstGeom>
+          <a:noFill/>
+        </p:spPr>
+        <p:txBody>
+          <a:bodyPr wrap="square" lIns="0" rIns="0" tIns="0" bIns="0" anchor="t">
+            <a:spAutoFit/>
+          </a:bodyPr>
+          <a:lstStyle/>
+          <a:p>
+            <a:pPr algn="l">
+              <a:lnSpc>
+                <a:spcPct val="115000"/>
+              </a:lnSpc>
+              <a:spcAft>
+                <a:spcPts val="0"/>
+              </a:spcAft>
+            </a:pPr>
+            <a:r>
+              <a:rPr b="1" sz="2800" i="0">
+                <a:solidFill>
+                  <a:srgbClr val="E6ECF7"/>
+                </a:solidFill>
+                <a:latin typeface="Georgia"/>
+              </a:rPr>
+              <a:t>The first week</a:t>
+            </a:r>
+          </a:p>
+        </p:txBody>
+      </p:sp>
+      <p:sp>
+        <p:nvSpPr>
+          <p:cNvPr id="5" name="Rectangle 4"/>
+          <p:cNvSpPr/>
+          <p:nvPr/>
+        </p:nvSpPr>
+        <p:spPr>
+          <a:xfrm>
+            <a:off x="548640" y="1115568"/>
+            <a:ext cx="1097280" cy="41148"/>
+          </a:xfrm>
+          <a:prstGeom prst="rect">
+            <a:avLst/>
+          </a:prstGeom>
+          <a:solidFill>
+            <a:srgbClr val="29D3E0"/>
+          </a:solidFill>
+          <a:ln>
+            <a:noFill/>
+          </a:ln>
+          <a:effectLst/>
+        </p:spPr>
+        <p:style>
+          <a:lnRef idx="1">
+            <a:schemeClr val="accent1"/>
+          </a:lnRef>
+          <a:fillRef idx="3">
+            <a:schemeClr val="accent1"/>
+          </a:fillRef>
+          <a:effectRef idx="2">
+            <a:schemeClr val="accent1"/>
+          </a:effectRef>
+          <a:fontRef idx="minor">
+            <a:schemeClr val="lt1"/>
+          </a:fontRef>
+        </p:style>
+        <p:txBody>
+          <a:bodyPr rtlCol="0" anchor="ctr"/>
+          <a:lstStyle/>
+          <a:p>
+            <a:pPr algn="ctr"/>
+          </a:p>
+        </p:txBody>
+      </p:sp>
+      <p:sp>
+        <p:nvSpPr>
+          <p:cNvPr id="6" name="TextBox 5"/>
+          <p:cNvSpPr txBox="1"/>
+          <p:nvPr/>
+        </p:nvSpPr>
+        <p:spPr>
+          <a:xfrm>
+            <a:off x="548640" y="6473952"/>
+            <a:ext cx="3657600" cy="228600"/>
+          </a:xfrm>
+          <a:prstGeom prst="rect">
+            <a:avLst/>
+          </a:prstGeom>
+          <a:noFill/>
+        </p:spPr>
+        <p:txBody>
+          <a:bodyPr wrap="square" lIns="0" rIns="0" tIns="0" bIns="0" anchor="t">
+            <a:spAutoFit/>
+          </a:bodyPr>
+          <a:lstStyle/>
+          <a:p>
+            <a:pPr algn="l">
+              <a:lnSpc>
+                <a:spcPct val="115000"/>
+              </a:lnSpc>
+              <a:spcAft>
+                <a:spcPts val="0"/>
+              </a:spcAft>
+            </a:pPr>
+            <a:r>
+              <a:rPr b="1" sz="950" i="0">
+                <a:solidFill>
+                  <a:srgbClr val="E6ECF7"/>
+                </a:solidFill>
+                <a:latin typeface="Arial"/>
+              </a:rPr>
+              <a:t>Build to Understand</a:t>
+            </a:r>
+          </a:p>
+        </p:txBody>
+      </p:sp>
+      <p:sp>
+        <p:nvSpPr>
+          <p:cNvPr id="7" name="TextBox 6"/>
+          <p:cNvSpPr txBox="1"/>
+          <p:nvPr/>
+        </p:nvSpPr>
+        <p:spPr>
+          <a:xfrm>
+            <a:off x="10728655" y="6473952"/>
+            <a:ext cx="914400" cy="228600"/>
+          </a:xfrm>
+          <a:prstGeom prst="rect">
+            <a:avLst/>
+          </a:prstGeom>
+          <a:noFill/>
+        </p:spPr>
+        <p:txBody>
+          <a:bodyPr wrap="square" lIns="0" rIns="0" tIns="0" bIns="0" anchor="t">
+            <a:spAutoFit/>
+          </a:bodyPr>
+          <a:lstStyle/>
+          <a:p>
+            <a:pPr algn="r">
+              <a:lnSpc>
+                <a:spcPct val="115000"/>
+              </a:lnSpc>
+              <a:spcAft>
+                <a:spcPts val="0"/>
+              </a:spcAft>
+            </a:pPr>
+            <a:r>
+              <a:rPr b="0" sz="950" i="0">
+                <a:solidFill>
+                  <a:srgbClr val="98A4BC"/>
+                </a:solidFill>
+                <a:latin typeface="Arial"/>
+              </a:rPr>
+              <a:t>26</a:t>
+            </a:r>
+          </a:p>
+        </p:txBody>
+      </p:sp>
+      <p:graphicFrame>
+        <p:nvGraphicFramePr>
+          <p:cNvPr id="8" name="Table 7"/>
+          <p:cNvGraphicFramePr>
+            <a:graphicFrameLocks noGrp="1"/>
+          </p:cNvGraphicFramePr>
+          <p:nvPr/>
+        </p:nvGraphicFramePr>
+        <p:xfrm>
+          <a:off x="548640" y="1371600"/>
+          <a:ext cx="11094413" cy="3952494"/>
+        </p:xfrm>
+        <a:graphic>
+          <a:graphicData uri="http://schemas.openxmlformats.org/drawingml/2006/table">
+            <a:tbl>
+              <a:tblPr firstRow="0" bandRow="0">
+                <a:tableStyleId>{5C22544A-7EE6-4342-B048-85BDC9FD1C3A}</a:tableStyleId>
+              </a:tblPr>
+              <a:tblGrid>
+                <a:gridCol w="1892070"/>
+                <a:gridCol w="5504205"/>
+                <a:gridCol w="3698138"/>
+              </a:tblGrid>
+              <a:tr h="347472">
+                <a:tc>
+                  <a:txBody>
+                    <a:bodyPr wrap="square"/>
+                    <a:lstStyle/>
+                    <a:p>
+                      <a:pPr>
+                        <a:lnSpc>
+                          <a:spcPct val="110000"/>
+                        </a:lnSpc>
+                      </a:pPr>
+                      <a:r>
+                        <a:rPr b="1" sz="1365" i="0">
+                          <a:solidFill>
+                            <a:srgbClr val="E6ECF7"/>
+                          </a:solidFill>
+                          <a:latin typeface="Arial"/>
+                        </a:rPr>
+                        <a:t>When</a:t>
+                      </a:r>
+                    </a:p>
+                  </a:txBody>
+                  <a:tcPr marL="73152" marR="73152" marT="45720" marB="45720" anchor="t">
+                    <a:solidFill>
+                      <a:srgbClr val="1C2740"/>
+                    </a:solidFill>
+                  </a:tcPr>
+                </a:tc>
+                <a:tc>
+                  <a:txBody>
+                    <a:bodyPr wrap="square"/>
+                    <a:lstStyle/>
+                    <a:p>
+                      <a:pPr>
+                        <a:lnSpc>
+                          <a:spcPct val="110000"/>
+                        </a:lnSpc>
+                      </a:pPr>
+                      <a:r>
+                        <a:rPr b="1" sz="1365" i="0">
+                          <a:solidFill>
+                            <a:srgbClr val="E6ECF7"/>
+                          </a:solidFill>
+                          <a:latin typeface="Arial"/>
+                        </a:rPr>
+                        <a:t>Do</a:t>
+                      </a:r>
+                    </a:p>
+                  </a:txBody>
+                  <a:tcPr marL="73152" marR="73152" marT="45720" marB="45720" anchor="t">
+                    <a:solidFill>
+                      <a:srgbClr val="1C2740"/>
+                    </a:solidFill>
+                  </a:tcPr>
+                </a:tc>
+                <a:tc>
+                  <a:txBody>
+                    <a:bodyPr wrap="square"/>
+                    <a:lstStyle/>
+                    <a:p>
+                      <a:pPr>
+                        <a:lnSpc>
+                          <a:spcPct val="110000"/>
+                        </a:lnSpc>
+                      </a:pPr>
+                      <a:r>
+                        <a:rPr b="1" sz="1365" i="0">
+                          <a:solidFill>
+                            <a:srgbClr val="E6ECF7"/>
+                          </a:solidFill>
+                          <a:latin typeface="Arial"/>
+                        </a:rPr>
+                        <a:t>Where it lives</a:t>
+                      </a:r>
+                    </a:p>
+                  </a:txBody>
+                  <a:tcPr marL="73152" marR="73152" marT="45720" marB="45720" anchor="t">
+                    <a:solidFill>
+                      <a:srgbClr val="1C2740"/>
+                    </a:solidFill>
+                  </a:tcPr>
+                </a:tc>
+              </a:tr>
+              <a:tr h="372618">
+                <a:tc>
+                  <a:txBody>
+                    <a:bodyPr wrap="square"/>
+                    <a:lstStyle/>
+                    <a:p>
+                      <a:pPr>
+                        <a:lnSpc>
+                          <a:spcPct val="110000"/>
+                        </a:lnSpc>
+                      </a:pPr>
+                      <a:r>
+                        <a:rPr b="1" sz="1365" i="0">
+                          <a:solidFill>
+                            <a:srgbClr val="E6ECF7"/>
+                          </a:solidFill>
+                          <a:latin typeface="Arial"/>
+                        </a:rPr>
+                        <a:t>Day 1</a:t>
+                      </a:r>
+                    </a:p>
+                  </a:txBody>
+                  <a:tcPr marL="73152" marR="73152" marT="45720" marB="45720" anchor="t">
+                    <a:solidFill>
+                      <a:srgbClr val="151D2E"/>
+                    </a:solidFill>
+                  </a:tcPr>
+                </a:tc>
+                <a:tc>
+                  <a:txBody>
+                    <a:bodyPr wrap="square"/>
+                    <a:lstStyle/>
+                    <a:p>
+                      <a:pPr>
+                        <a:lnSpc>
+                          <a:spcPct val="110000"/>
+                        </a:lnSpc>
+                      </a:pPr>
+                      <a:r>
+                        <a:rPr b="0" sz="1365" i="0">
+                          <a:solidFill>
+                            <a:srgbClr val="E6ECF7"/>
+                          </a:solidFill>
+                          <a:latin typeface="Arial"/>
+                        </a:rPr>
+                        <a:t>Format, lint, test, static analysis on every change</a:t>
+                      </a:r>
+                    </a:p>
+                  </a:txBody>
+                  <a:tcPr marL="73152" marR="73152" marT="45720" marB="45720" anchor="t">
+                    <a:solidFill>
+                      <a:srgbClr val="151D2E"/>
+                    </a:solidFill>
+                  </a:tcPr>
+                </a:tc>
+                <a:tc>
+                  <a:txBody>
+                    <a:bodyPr wrap="square"/>
+                    <a:lstStyle/>
+                    <a:p>
+                      <a:pPr>
+                        <a:lnSpc>
+                          <a:spcPct val="110000"/>
+                        </a:lnSpc>
+                      </a:pPr>
+                      <a:r>
+                        <a:rPr b="0" sz="1365" i="0">
+                          <a:solidFill>
+                            <a:srgbClr val="E6ECF7"/>
+                          </a:solidFill>
+                          <a:latin typeface="Arial"/>
+                        </a:rPr>
+                        <a:t>.github/workflows/</a:t>
+                      </a:r>
+                    </a:p>
+                  </a:txBody>
+                  <a:tcPr marL="73152" marR="73152" marT="45720" marB="45720" anchor="t">
+                    <a:solidFill>
+                      <a:srgbClr val="151D2E"/>
+                    </a:solidFill>
+                  </a:tcPr>
+                </a:tc>
+              </a:tr>
+              <a:tr h="580644">
+                <a:tc>
+                  <a:txBody>
+                    <a:bodyPr wrap="square"/>
+                    <a:lstStyle/>
+                    <a:p>
+                      <a:pPr>
+                        <a:lnSpc>
+                          <a:spcPct val="110000"/>
+                        </a:lnSpc>
+                      </a:pPr>
+                      <a:r>
+                        <a:rPr b="1" sz="1365" i="0">
+                          <a:solidFill>
+                            <a:srgbClr val="E6ECF7"/>
+                          </a:solidFill>
+                          <a:latin typeface="Arial"/>
+                        </a:rPr>
+                        <a:t>Day 1</a:t>
+                      </a:r>
+                    </a:p>
+                  </a:txBody>
+                  <a:tcPr marL="73152" marR="73152" marT="45720" marB="45720" anchor="t">
+                    <a:solidFill>
+                      <a:srgbClr val="121A2A"/>
+                    </a:solidFill>
+                  </a:tcPr>
+                </a:tc>
+                <a:tc>
+                  <a:txBody>
+                    <a:bodyPr wrap="square"/>
+                    <a:lstStyle/>
+                    <a:p>
+                      <a:pPr>
+                        <a:lnSpc>
+                          <a:spcPct val="110000"/>
+                        </a:lnSpc>
+                      </a:pPr>
+                      <a:r>
+                        <a:rPr b="0" sz="1365" i="0">
+                          <a:solidFill>
+                            <a:srgbClr val="E6ECF7"/>
+                          </a:solidFill>
+                          <a:latin typeface="Arial"/>
+                        </a:rPr>
+                        <a:t>Dependency and secret scanning</a:t>
+                      </a:r>
+                    </a:p>
+                  </a:txBody>
+                  <a:tcPr marL="73152" marR="73152" marT="45720" marB="45720" anchor="t">
+                    <a:solidFill>
+                      <a:srgbClr val="121A2A"/>
+                    </a:solidFill>
+                  </a:tcPr>
+                </a:tc>
+                <a:tc>
+                  <a:txBody>
+                    <a:bodyPr wrap="square"/>
+                    <a:lstStyle/>
+                    <a:p>
+                      <a:pPr>
+                        <a:lnSpc>
+                          <a:spcPct val="110000"/>
+                        </a:lnSpc>
+                      </a:pPr>
+                      <a:r>
+                        <a:rPr b="0" sz="1365" i="0">
+                          <a:solidFill>
+                            <a:srgbClr val="E6ECF7"/>
+                          </a:solidFill>
+                          <a:latin typeface="Arial"/>
+                        </a:rPr>
+                        <a:t>.github/dependabot.yml, repository settings</a:t>
+                      </a:r>
+                    </a:p>
+                  </a:txBody>
+                  <a:tcPr marL="73152" marR="73152" marT="45720" marB="45720" anchor="t">
+                    <a:solidFill>
+                      <a:srgbClr val="121A2A"/>
+                    </a:solidFill>
+                  </a:tcPr>
+                </a:tc>
+              </a:tr>
+              <a:tr h="580644">
+                <a:tc>
+                  <a:txBody>
+                    <a:bodyPr wrap="square"/>
+                    <a:lstStyle/>
+                    <a:p>
+                      <a:pPr>
+                        <a:lnSpc>
+                          <a:spcPct val="110000"/>
+                        </a:lnSpc>
+                      </a:pPr>
+                      <a:r>
+                        <a:rPr b="1" sz="1365" i="0">
+                          <a:solidFill>
+                            <a:srgbClr val="E6ECF7"/>
+                          </a:solidFill>
+                          <a:latin typeface="Arial"/>
+                        </a:rPr>
+                        <a:t>Day 2</a:t>
+                      </a:r>
+                    </a:p>
+                  </a:txBody>
+                  <a:tcPr marL="73152" marR="73152" marT="45720" marB="45720" anchor="t">
+                    <a:solidFill>
+                      <a:srgbClr val="151D2E"/>
+                    </a:solidFill>
+                  </a:tcPr>
+                </a:tc>
+                <a:tc>
+                  <a:txBody>
+                    <a:bodyPr wrap="square"/>
+                    <a:lstStyle/>
+                    <a:p>
+                      <a:pPr>
+                        <a:lnSpc>
+                          <a:spcPct val="110000"/>
+                        </a:lnSpc>
+                      </a:pPr>
+                      <a:r>
+                        <a:rPr b="0" sz="1365" i="0">
+                          <a:solidFill>
+                            <a:srgbClr val="E6ECF7"/>
+                          </a:solidFill>
+                          <a:latin typeface="Arial"/>
+                        </a:rPr>
+                        <a:t>Require those checks, require a pull request, stop direct pushes</a:t>
+                      </a:r>
+                    </a:p>
+                  </a:txBody>
+                  <a:tcPr marL="73152" marR="73152" marT="45720" marB="45720" anchor="t">
+                    <a:solidFill>
+                      <a:srgbClr val="151D2E"/>
+                    </a:solidFill>
+                  </a:tcPr>
+                </a:tc>
+                <a:tc>
+                  <a:txBody>
+                    <a:bodyPr wrap="square"/>
+                    <a:lstStyle/>
+                    <a:p>
+                      <a:pPr>
+                        <a:lnSpc>
+                          <a:spcPct val="110000"/>
+                        </a:lnSpc>
+                      </a:pPr>
+                      <a:r>
+                        <a:rPr b="0" sz="1365" i="0">
+                          <a:solidFill>
+                            <a:srgbClr val="E6ECF7"/>
+                          </a:solidFill>
+                          <a:latin typeface="Arial"/>
+                        </a:rPr>
+                        <a:t>Branch protection, or a ruleset</a:t>
+                      </a:r>
+                    </a:p>
+                  </a:txBody>
+                  <a:tcPr marL="73152" marR="73152" marT="45720" marB="45720" anchor="t">
+                    <a:solidFill>
+                      <a:srgbClr val="151D2E"/>
+                    </a:solidFill>
+                  </a:tcPr>
+                </a:tc>
+              </a:tr>
+              <a:tr h="372618">
+                <a:tc>
+                  <a:txBody>
+                    <a:bodyPr wrap="square"/>
+                    <a:lstStyle/>
+                    <a:p>
+                      <a:pPr>
+                        <a:lnSpc>
+                          <a:spcPct val="110000"/>
+                        </a:lnSpc>
+                      </a:pPr>
+                      <a:r>
+                        <a:rPr b="1" sz="1365" i="0">
+                          <a:solidFill>
+                            <a:srgbClr val="E6ECF7"/>
+                          </a:solidFill>
+                          <a:latin typeface="Arial"/>
+                        </a:rPr>
+                        <a:t>Day 2</a:t>
+                      </a:r>
+                    </a:p>
+                  </a:txBody>
+                  <a:tcPr marL="73152" marR="73152" marT="45720" marB="45720" anchor="t">
+                    <a:solidFill>
+                      <a:srgbClr val="121A2A"/>
+                    </a:solidFill>
+                  </a:tcPr>
+                </a:tc>
+                <a:tc>
+                  <a:txBody>
+                    <a:bodyPr wrap="square"/>
+                    <a:lstStyle/>
+                    <a:p>
+                      <a:pPr>
+                        <a:lnSpc>
+                          <a:spcPct val="110000"/>
+                        </a:lnSpc>
+                      </a:pPr>
+                      <a:r>
+                        <a:rPr b="0" sz="1365" i="0">
+                          <a:solidFill>
+                            <a:srgbClr val="E6ECF7"/>
+                          </a:solidFill>
+                          <a:latin typeface="Arial"/>
+                        </a:rPr>
+                        <a:t>Dismiss stale approvals when new commits land</a:t>
+                      </a:r>
+                    </a:p>
+                  </a:txBody>
+                  <a:tcPr marL="73152" marR="73152" marT="45720" marB="45720" anchor="t">
+                    <a:solidFill>
+                      <a:srgbClr val="121A2A"/>
+                    </a:solidFill>
+                  </a:tcPr>
+                </a:tc>
+                <a:tc>
+                  <a:txBody>
+                    <a:bodyPr wrap="square"/>
+                    <a:lstStyle/>
+                    <a:p>
+                      <a:pPr>
+                        <a:lnSpc>
+                          <a:spcPct val="110000"/>
+                        </a:lnSpc>
+                      </a:pPr>
+                      <a:r>
+                        <a:rPr b="0" sz="1365" i="0">
+                          <a:solidFill>
+                            <a:srgbClr val="E6ECF7"/>
+                          </a:solidFill>
+                          <a:latin typeface="Arial"/>
+                        </a:rPr>
+                        <a:t>The same place</a:t>
+                      </a:r>
+                    </a:p>
+                  </a:txBody>
+                  <a:tcPr marL="73152" marR="73152" marT="45720" marB="45720" anchor="t">
+                    <a:solidFill>
+                      <a:srgbClr val="121A2A"/>
+                    </a:solidFill>
+                  </a:tcPr>
+                </a:tc>
+              </a:tr>
+              <a:tr h="372618">
+                <a:tc>
+                  <a:txBody>
+                    <a:bodyPr wrap="square"/>
+                    <a:lstStyle/>
+                    <a:p>
+                      <a:pPr>
+                        <a:lnSpc>
+                          <a:spcPct val="110000"/>
+                        </a:lnSpc>
+                      </a:pPr>
+                      <a:r>
+                        <a:rPr b="1" sz="1365" i="0">
+                          <a:solidFill>
+                            <a:srgbClr val="E6ECF7"/>
+                          </a:solidFill>
+                          <a:latin typeface="Arial"/>
+                        </a:rPr>
+                        <a:t>Day 3</a:t>
+                      </a:r>
+                    </a:p>
+                  </a:txBody>
+                  <a:tcPr marL="73152" marR="73152" marT="45720" marB="45720" anchor="t">
+                    <a:solidFill>
+                      <a:srgbClr val="151D2E"/>
+                    </a:solidFill>
+                  </a:tcPr>
+                </a:tc>
+                <a:tc>
+                  <a:txBody>
+                    <a:bodyPr wrap="square"/>
+                    <a:lstStyle/>
+                    <a:p>
+                      <a:pPr>
+                        <a:lnSpc>
+                          <a:spcPct val="110000"/>
+                        </a:lnSpc>
+                      </a:pPr>
+                      <a:r>
+                        <a:rPr b="0" sz="1365" i="0">
+                          <a:solidFill>
+                            <a:srgbClr val="E6ECF7"/>
+                          </a:solidFill>
+                          <a:latin typeface="Arial"/>
+                        </a:rPr>
+                        <a:t>A named reviewer for the paths that carry risk</a:t>
+                      </a:r>
+                    </a:p>
+                  </a:txBody>
+                  <a:tcPr marL="73152" marR="73152" marT="45720" marB="45720" anchor="t">
+                    <a:solidFill>
+                      <a:srgbClr val="151D2E"/>
+                    </a:solidFill>
+                  </a:tcPr>
+                </a:tc>
+                <a:tc>
+                  <a:txBody>
+                    <a:bodyPr wrap="square"/>
+                    <a:lstStyle/>
+                    <a:p>
+                      <a:pPr>
+                        <a:lnSpc>
+                          <a:spcPct val="110000"/>
+                        </a:lnSpc>
+                      </a:pPr>
+                      <a:r>
+                        <a:rPr b="0" sz="1365" i="0">
+                          <a:solidFill>
+                            <a:srgbClr val="E6ECF7"/>
+                          </a:solidFill>
+                          <a:latin typeface="Arial"/>
+                        </a:rPr>
+                        <a:t>.github/CODEOWNERS</a:t>
+                      </a:r>
+                    </a:p>
+                  </a:txBody>
+                  <a:tcPr marL="73152" marR="73152" marT="45720" marB="45720" anchor="t">
+                    <a:solidFill>
+                      <a:srgbClr val="151D2E"/>
+                    </a:solidFill>
+                  </a:tcPr>
+                </a:tc>
+              </a:tr>
+              <a:tr h="580644">
+                <a:tc>
+                  <a:txBody>
+                    <a:bodyPr wrap="square"/>
+                    <a:lstStyle/>
+                    <a:p>
+                      <a:pPr>
+                        <a:lnSpc>
+                          <a:spcPct val="110000"/>
+                        </a:lnSpc>
+                      </a:pPr>
+                      <a:r>
+                        <a:rPr b="1" sz="1365" i="0">
+                          <a:solidFill>
+                            <a:srgbClr val="E6ECF7"/>
+                          </a:solidFill>
+                          <a:latin typeface="Arial"/>
+                        </a:rPr>
+                        <a:t>Day 3</a:t>
+                      </a:r>
+                    </a:p>
+                  </a:txBody>
+                  <a:tcPr marL="73152" marR="73152" marT="45720" marB="45720" anchor="t">
+                    <a:solidFill>
+                      <a:srgbClr val="121A2A"/>
+                    </a:solidFill>
+                  </a:tcPr>
+                </a:tc>
+                <a:tc>
+                  <a:txBody>
+                    <a:bodyPr wrap="square"/>
+                    <a:lstStyle/>
+                    <a:p>
+                      <a:pPr>
+                        <a:lnSpc>
+                          <a:spcPct val="110000"/>
+                        </a:lnSpc>
+                      </a:pPr>
+                      <a:r>
+                        <a:rPr b="0" sz="1365" i="0">
+                          <a:solidFill>
+                            <a:srgbClr val="E6ECF7"/>
+                          </a:solidFill>
+                          <a:latin typeface="Arial"/>
+                        </a:rPr>
+                        <a:t>Whether a machine may approve here, and why</a:t>
+                      </a:r>
+                    </a:p>
+                  </a:txBody>
+                  <a:tcPr marL="73152" marR="73152" marT="45720" marB="45720" anchor="t">
+                    <a:solidFill>
+                      <a:srgbClr val="121A2A"/>
+                    </a:solidFill>
+                  </a:tcPr>
+                </a:tc>
+                <a:tc>
+                  <a:txBody>
+                    <a:bodyPr wrap="square"/>
+                    <a:lstStyle/>
+                    <a:p>
+                      <a:pPr>
+                        <a:lnSpc>
+                          <a:spcPct val="110000"/>
+                        </a:lnSpc>
+                      </a:pPr>
+                      <a:r>
+                        <a:rPr b="0" sz="1365" i="0">
+                          <a:solidFill>
+                            <a:srgbClr val="E6ECF7"/>
+                          </a:solidFill>
+                          <a:latin typeface="Arial"/>
+                        </a:rPr>
+                        <a:t>Written down where the next person looks</a:t>
+                      </a:r>
+                    </a:p>
+                  </a:txBody>
+                  <a:tcPr marL="73152" marR="73152" marT="45720" marB="45720" anchor="t">
+                    <a:solidFill>
+                      <a:srgbClr val="121A2A"/>
+                    </a:solidFill>
+                  </a:tcPr>
+                </a:tc>
+              </a:tr>
+              <a:tr h="372618">
+                <a:tc>
+                  <a:txBody>
+                    <a:bodyPr wrap="square"/>
+                    <a:lstStyle/>
+                    <a:p>
+                      <a:pPr>
+                        <a:lnSpc>
+                          <a:spcPct val="110000"/>
+                        </a:lnSpc>
+                      </a:pPr>
+                      <a:r>
+                        <a:rPr b="1" sz="1365" i="0">
+                          <a:solidFill>
+                            <a:srgbClr val="E6ECF7"/>
+                          </a:solidFill>
+                          <a:latin typeface="Arial"/>
+                        </a:rPr>
+                        <a:t>Day 4</a:t>
+                      </a:r>
+                    </a:p>
+                  </a:txBody>
+                  <a:tcPr marL="73152" marR="73152" marT="45720" marB="45720" anchor="t">
+                    <a:solidFill>
+                      <a:srgbClr val="151D2E"/>
+                    </a:solidFill>
+                  </a:tcPr>
+                </a:tc>
+                <a:tc>
+                  <a:txBody>
+                    <a:bodyPr wrap="square"/>
+                    <a:lstStyle/>
+                    <a:p>
+                      <a:pPr>
+                        <a:lnSpc>
+                          <a:spcPct val="110000"/>
+                        </a:lnSpc>
+                      </a:pPr>
+                      <a:r>
+                        <a:rPr b="0" sz="1365" i="0">
+                          <a:solidFill>
+                            <a:srgbClr val="E6ECF7"/>
+                          </a:solidFill>
+                          <a:latin typeface="Arial"/>
+                        </a:rPr>
+                        <a:t>The template that explains and asks</a:t>
+                      </a:r>
+                    </a:p>
+                  </a:txBody>
+                  <a:tcPr marL="73152" marR="73152" marT="45720" marB="45720" anchor="t">
+                    <a:solidFill>
+                      <a:srgbClr val="151D2E"/>
+                    </a:solidFill>
+                  </a:tcPr>
+                </a:tc>
+                <a:tc>
+                  <a:txBody>
+                    <a:bodyPr wrap="square"/>
+                    <a:lstStyle/>
+                    <a:p>
+                      <a:pPr>
+                        <a:lnSpc>
+                          <a:spcPct val="110000"/>
+                        </a:lnSpc>
+                      </a:pPr>
+                      <a:r>
+                        <a:rPr b="0" sz="1365" i="0">
+                          <a:solidFill>
+                            <a:srgbClr val="E6ECF7"/>
+                          </a:solidFill>
+                          <a:latin typeface="Arial"/>
+                        </a:rPr>
+                        <a:t>.github/pull_request_template.md</a:t>
+                      </a:r>
+                    </a:p>
+                  </a:txBody>
+                  <a:tcPr marL="73152" marR="73152" marT="45720" marB="45720" anchor="t">
+                    <a:solidFill>
+                      <a:srgbClr val="151D2E"/>
+                    </a:solidFill>
+                  </a:tcPr>
+                </a:tc>
+              </a:tr>
+              <a:tr h="372618">
+                <a:tc>
+                  <a:txBody>
+                    <a:bodyPr wrap="square"/>
+                    <a:lstStyle/>
+                    <a:p>
+                      <a:pPr>
+                        <a:lnSpc>
+                          <a:spcPct val="110000"/>
+                        </a:lnSpc>
+                      </a:pPr>
+                      <a:r>
+                        <a:rPr b="1" sz="1365" i="0">
+                          <a:solidFill>
+                            <a:srgbClr val="E6ECF7"/>
+                          </a:solidFill>
+                          <a:latin typeface="Arial"/>
+                        </a:rPr>
+                        <a:t>Ongoing</a:t>
+                      </a:r>
+                    </a:p>
+                  </a:txBody>
+                  <a:tcPr marL="73152" marR="73152" marT="45720" marB="45720" anchor="t">
+                    <a:solidFill>
+                      <a:srgbClr val="121A2A"/>
+                    </a:solidFill>
+                  </a:tcPr>
+                </a:tc>
+                <a:tc>
+                  <a:txBody>
+                    <a:bodyPr wrap="square"/>
+                    <a:lstStyle/>
+                    <a:p>
+                      <a:pPr>
+                        <a:lnSpc>
+                          <a:spcPct val="110000"/>
+                        </a:lnSpc>
+                      </a:pPr>
+                      <a:r>
+                        <a:rPr b="0" sz="1365" i="0">
+                          <a:solidFill>
+                            <a:srgbClr val="E6ECF7"/>
+                          </a:solidFill>
+                          <a:latin typeface="Arial"/>
+                        </a:rPr>
+                        <a:t>Read a sample of already-approved changes</a:t>
+                      </a:r>
+                    </a:p>
+                  </a:txBody>
+                  <a:tcPr marL="73152" marR="73152" marT="45720" marB="45720" anchor="t">
+                    <a:solidFill>
+                      <a:srgbClr val="121A2A"/>
+                    </a:solidFill>
+                  </a:tcPr>
+                </a:tc>
+                <a:tc>
+                  <a:txBody>
+                    <a:bodyPr wrap="square"/>
+                    <a:lstStyle/>
+                    <a:p>
+                      <a:pPr>
+                        <a:lnSpc>
+                          <a:spcPct val="110000"/>
+                        </a:lnSpc>
+                      </a:pPr>
+                      <a:r>
+                        <a:rPr b="0" sz="1365" i="0">
+                          <a:solidFill>
+                            <a:srgbClr val="E6ECF7"/>
+                          </a:solidFill>
+                          <a:latin typeface="Arial"/>
+                        </a:rPr>
+                        <a:t>A calendar entry, not a tool</a:t>
+                      </a:r>
+                    </a:p>
+                  </a:txBody>
+                  <a:tcPr marL="73152" marR="73152" marT="45720" marB="45720" anchor="t">
+                    <a:solidFill>
+                      <a:srgbClr val="121A2A"/>
+                    </a:solidFill>
+                  </a:tcPr>
+                </a:tc>
+              </a:tr>
+            </a:tbl>
+          </a:graphicData>
+        </a:graphic>
+      </p:graphicFrame>
+      <p:sp>
+        <p:nvSpPr>
+          <p:cNvPr id="9" name="TextBox 8"/>
+          <p:cNvSpPr txBox="1"/>
+          <p:nvPr/>
+        </p:nvSpPr>
+        <p:spPr>
+          <a:xfrm>
+            <a:off x="548640" y="5721654"/>
+            <a:ext cx="11094415" cy="523697"/>
+          </a:xfrm>
+          <a:prstGeom prst="rect">
+            <a:avLst/>
+          </a:prstGeom>
+          <a:noFill/>
+        </p:spPr>
+        <p:txBody>
+          <a:bodyPr wrap="square" lIns="0" rIns="0" tIns="0" bIns="0" anchor="t">
+            <a:spAutoFit/>
+          </a:bodyPr>
+          <a:lstStyle/>
+          <a:p>
+            <a:pPr algn="l">
+              <a:lnSpc>
+                <a:spcPct val="115000"/>
+              </a:lnSpc>
+              <a:spcAft>
+                <a:spcPts val="0"/>
+              </a:spcAft>
+            </a:pPr>
+            <a:r>
+              <a:rPr b="0" sz="1690" i="0">
+                <a:solidFill>
+                  <a:srgbClr val="E6ECF7"/>
+                </a:solidFill>
+                <a:latin typeface="Arial"/>
+              </a:rPr>
+              <a:t>Every line is a file or a setting, copied to the next repository in minutes and reverted by deleting a line. </a:t>
+            </a:r>
+            <a:r>
+              <a:rPr b="1" sz="1690" i="0">
+                <a:solidFill>
+                  <a:srgbClr val="E6ECF7"/>
+                </a:solidFill>
+                <a:latin typeface="Arial"/>
+              </a:rPr>
+              <a:t>I have not checked which of these are already on in ours.</a:t>
+            </a:r>
+          </a:p>
+        </p:txBody>
+      </p:sp>
+    </p:spTree>
+  </p:cSld>
+  <p:clrMapOvr>
+    <a:masterClrMapping/>
+  </p:clrMapOvr>
+</p:sld>
+</file>
+
+<file path=ppt/slides/slide27.xml><?xml version="1.0" encoding="utf-8"?>
+<p:sld xmlns:a="http://schemas.openxmlformats.org/drawingml/2006/main" xmlns:p="http://schemas.openxmlformats.org/presentationml/2006/main" xmlns:r="http://schemas.openxmlformats.org/officeDocument/2006/relationships">
+  <p:cSld>
+    <p:spTree>
+      <p:nvGrpSpPr>
+        <p:cNvPr id="1" name=""/>
+        <p:cNvGrpSpPr/>
+        <p:nvPr/>
+      </p:nvGrpSpPr>
+      <p:grpSpPr/>
+      <p:sp>
+        <p:nvSpPr>
+          <p:cNvPr id="2" name="Rectangle 1"/>
+          <p:cNvSpPr/>
+          <p:nvPr/>
+        </p:nvSpPr>
+        <p:spPr>
+          <a:xfrm>
+            <a:off x="0" y="0"/>
+            <a:ext cx="12191695" cy="6858000"/>
+          </a:xfrm>
+          <a:prstGeom prst="rect">
+            <a:avLst/>
+          </a:prstGeom>
+          <a:solidFill>
+            <a:srgbClr val="070B14"/>
+          </a:solidFill>
+          <a:ln>
+            <a:noFill/>
+          </a:ln>
+          <a:effectLst/>
+        </p:spPr>
+        <p:style>
+          <a:lnRef idx="1">
+            <a:schemeClr val="accent1"/>
+          </a:lnRef>
+          <a:fillRef idx="3">
+            <a:schemeClr val="accent1"/>
+          </a:fillRef>
+          <a:effectRef idx="2">
+            <a:schemeClr val="accent1"/>
+          </a:effectRef>
+          <a:fontRef idx="minor">
+            <a:schemeClr val="lt1"/>
+          </a:fontRef>
+        </p:style>
+        <p:txBody>
+          <a:bodyPr rtlCol="0" anchor="ctr"/>
+          <a:lstStyle/>
+          <a:p>
+            <a:pPr algn="ctr"/>
+          </a:p>
+        </p:txBody>
+      </p:sp>
+      <p:sp>
+        <p:nvSpPr>
+          <p:cNvPr id="3" name="TextBox 2"/>
+          <p:cNvSpPr txBox="1"/>
+          <p:nvPr/>
+        </p:nvSpPr>
+        <p:spPr>
+          <a:xfrm>
+            <a:off x="548640" y="6473952"/>
+            <a:ext cx="3657600" cy="228600"/>
+          </a:xfrm>
+          <a:prstGeom prst="rect">
+            <a:avLst/>
+          </a:prstGeom>
+          <a:noFill/>
+        </p:spPr>
+        <p:txBody>
+          <a:bodyPr wrap="square" lIns="0" rIns="0" tIns="0" bIns="0" anchor="t">
+            <a:spAutoFit/>
+          </a:bodyPr>
+          <a:lstStyle/>
+          <a:p>
+            <a:pPr algn="l">
+              <a:lnSpc>
+                <a:spcPct val="115000"/>
+              </a:lnSpc>
+              <a:spcAft>
+                <a:spcPts val="0"/>
+              </a:spcAft>
+            </a:pPr>
+            <a:r>
+              <a:rPr b="1" sz="950" i="0">
+                <a:solidFill>
+                  <a:srgbClr val="E6ECF7"/>
+                </a:solidFill>
+                <a:latin typeface="Arial"/>
+              </a:rPr>
+              <a:t>Build to Understand</a:t>
+            </a:r>
+          </a:p>
+        </p:txBody>
+      </p:sp>
+      <p:sp>
+        <p:nvSpPr>
+          <p:cNvPr id="4" name="TextBox 3"/>
+          <p:cNvSpPr txBox="1"/>
+          <p:nvPr/>
+        </p:nvSpPr>
+        <p:spPr>
+          <a:xfrm>
+            <a:off x="10728655" y="6473952"/>
+            <a:ext cx="914400" cy="228600"/>
+          </a:xfrm>
+          <a:prstGeom prst="rect">
+            <a:avLst/>
+          </a:prstGeom>
+          <a:noFill/>
+        </p:spPr>
+        <p:txBody>
+          <a:bodyPr wrap="square" lIns="0" rIns="0" tIns="0" bIns="0" anchor="t">
+            <a:spAutoFit/>
+          </a:bodyPr>
+          <a:lstStyle/>
+          <a:p>
+            <a:pPr algn="r">
+              <a:lnSpc>
+                <a:spcPct val="115000"/>
+              </a:lnSpc>
+              <a:spcAft>
+                <a:spcPts val="0"/>
+              </a:spcAft>
+            </a:pPr>
+            <a:r>
+              <a:rPr b="0" sz="950" i="0">
+                <a:solidFill>
+                  <a:srgbClr val="98A4BC"/>
+                </a:solidFill>
+                <a:latin typeface="Arial"/>
+              </a:rPr>
+              <a:t>27</a:t>
+            </a:r>
+          </a:p>
+        </p:txBody>
+      </p:sp>
+      <p:sp>
+        <p:nvSpPr>
+          <p:cNvPr id="5" name="TextBox 4"/>
+          <p:cNvSpPr txBox="1"/>
+          <p:nvPr/>
+        </p:nvSpPr>
+        <p:spPr>
+          <a:xfrm>
+            <a:off x="548640" y="292608"/>
+            <a:ext cx="11094415" cy="274320"/>
+          </a:xfrm>
+          <a:prstGeom prst="rect">
+            <a:avLst/>
+          </a:prstGeom>
+          <a:noFill/>
+        </p:spPr>
+        <p:txBody>
+          <a:bodyPr wrap="square" lIns="0" rIns="0" tIns="0" bIns="0" anchor="t">
+            <a:spAutoFit/>
+          </a:bodyPr>
+          <a:lstStyle/>
+          <a:p>
+            <a:pPr algn="l">
+              <a:lnSpc>
+                <a:spcPct val="115000"/>
+              </a:lnSpc>
+              <a:spcAft>
+                <a:spcPts val="0"/>
+              </a:spcAft>
+            </a:pPr>
+            <a:r>
+              <a:rPr b="1" sz="1100" i="0">
+                <a:solidFill>
+                  <a:srgbClr val="E6ECF7"/>
+                </a:solidFill>
+                <a:latin typeface="Arial"/>
+              </a:rPr>
+              <a:t>Build to Understand</a:t>
+            </a:r>
+          </a:p>
+        </p:txBody>
+      </p:sp>
+      <p:sp>
+        <p:nvSpPr>
+          <p:cNvPr id="6" name="Rectangle 5"/>
+          <p:cNvSpPr/>
+          <p:nvPr/>
+        </p:nvSpPr>
+        <p:spPr>
+          <a:xfrm>
+            <a:off x="548640" y="2555240"/>
+            <a:ext cx="822960" cy="54864"/>
+          </a:xfrm>
+          <a:prstGeom prst="rect">
+            <a:avLst/>
+          </a:prstGeom>
+          <a:solidFill>
+            <a:srgbClr val="29D3E0"/>
+          </a:solidFill>
+          <a:ln>
+            <a:noFill/>
+          </a:ln>
+          <a:effectLst/>
+        </p:spPr>
+        <p:style>
+          <a:lnRef idx="1">
+            <a:schemeClr val="accent1"/>
+          </a:lnRef>
+          <a:fillRef idx="3">
+            <a:schemeClr val="accent1"/>
+          </a:fillRef>
+          <a:effectRef idx="2">
+            <a:schemeClr val="accent1"/>
+          </a:effectRef>
+          <a:fontRef idx="minor">
+            <a:schemeClr val="lt1"/>
+          </a:fontRef>
+        </p:style>
+        <p:txBody>
+          <a:bodyPr rtlCol="0" anchor="ctr"/>
+          <a:lstStyle/>
+          <a:p>
+            <a:pPr algn="ctr"/>
+          </a:p>
+        </p:txBody>
+      </p:sp>
+      <p:sp>
+        <p:nvSpPr>
+          <p:cNvPr id="7" name="TextBox 6"/>
+          <p:cNvSpPr txBox="1"/>
+          <p:nvPr/>
+        </p:nvSpPr>
+        <p:spPr>
+          <a:xfrm>
+            <a:off x="1783080" y="1874519"/>
+            <a:ext cx="9859975" cy="991615"/>
+          </a:xfrm>
+          <a:prstGeom prst="rect">
+            <a:avLst/>
+          </a:prstGeom>
+          <a:noFill/>
+        </p:spPr>
+        <p:txBody>
+          <a:bodyPr wrap="square" lIns="0" rIns="0" tIns="0" bIns="0" anchor="b">
+            <a:spAutoFit/>
+          </a:bodyPr>
+          <a:lstStyle/>
+          <a:p>
+            <a:pPr algn="l">
+              <a:lnSpc>
+                <a:spcPct val="122000"/>
+              </a:lnSpc>
+              <a:spcAft>
+                <a:spcPts val="0"/>
+              </a:spcAft>
+            </a:pPr>
+            <a:r>
+              <a:rPr b="1" sz="3200" i="0">
+                <a:solidFill>
+                  <a:srgbClr val="E6ECF7"/>
+                </a:solidFill>
+                <a:latin typeface="Georgia"/>
+              </a:rPr>
+              <a:t>Conclusion</a:t>
+            </a:r>
+          </a:p>
+        </p:txBody>
+      </p:sp>
+      <p:sp>
+        <p:nvSpPr>
+          <p:cNvPr id="8" name="TextBox 7"/>
+          <p:cNvSpPr txBox="1"/>
+          <p:nvPr/>
+        </p:nvSpPr>
+        <p:spPr>
+          <a:xfrm>
+            <a:off x="1783080" y="3140455"/>
+            <a:ext cx="9859975" cy="247649"/>
+          </a:xfrm>
+          <a:prstGeom prst="rect">
+            <a:avLst/>
+          </a:prstGeom>
+          <a:noFill/>
+        </p:spPr>
+        <p:txBody>
+          <a:bodyPr wrap="square" lIns="0" rIns="0" tIns="0" bIns="0" anchor="t">
+            <a:spAutoFit/>
+          </a:bodyPr>
+          <a:lstStyle/>
+          <a:p>
+            <a:pPr algn="l">
+              <a:lnSpc>
+                <a:spcPct val="130000"/>
+              </a:lnSpc>
+              <a:spcAft>
+                <a:spcPts val="0"/>
+              </a:spcAft>
+            </a:pPr>
+            <a:r>
+              <a:rPr b="0" sz="1500" i="0">
+                <a:solidFill>
+                  <a:srgbClr val="E6ECF7"/>
+                </a:solidFill>
+                <a:latin typeface="Arial"/>
+              </a:rPr>
+              <a:t>What moves, what doesn't, and what I still don't know.</a:t>
+            </a:r>
+          </a:p>
+        </p:txBody>
+      </p:sp>
+      <p:sp>
+        <p:nvSpPr>
+          <p:cNvPr id="9" name="Oval 8"/>
+          <p:cNvSpPr/>
+          <p:nvPr/>
+        </p:nvSpPr>
+        <p:spPr>
+          <a:xfrm>
+            <a:off x="10332720" y="5394960"/>
+            <a:ext cx="457200" cy="457200"/>
+          </a:xfrm>
+          <a:prstGeom prst="ellipse">
+            <a:avLst/>
+          </a:prstGeom>
+          <a:solidFill>
+            <a:srgbClr val="29D3E0"/>
+          </a:solidFill>
+          <a:ln>
+            <a:noFill/>
+          </a:ln>
+          <a:effectLst/>
+        </p:spPr>
+        <p:style>
+          <a:lnRef idx="1">
+            <a:schemeClr val="accent1"/>
+          </a:lnRef>
+          <a:fillRef idx="3">
+            <a:schemeClr val="accent1"/>
+          </a:fillRef>
+          <a:effectRef idx="2">
+            <a:schemeClr val="accent1"/>
+          </a:effectRef>
+          <a:fontRef idx="minor">
+            <a:schemeClr val="lt1"/>
+          </a:fontRef>
+        </p:style>
+        <p:txBody>
+          <a:bodyPr rtlCol="0" anchor="ctr"/>
+          <a:lstStyle/>
+          <a:p>
+            <a:pPr algn="ctr"/>
+          </a:p>
+        </p:txBody>
+      </p:sp>
+      <p:sp>
+        <p:nvSpPr>
+          <p:cNvPr id="10" name="Rounded Rectangle 9"/>
+          <p:cNvSpPr/>
+          <p:nvPr/>
+        </p:nvSpPr>
+        <p:spPr>
+          <a:xfrm>
+            <a:off x="10927080" y="5532120"/>
+            <a:ext cx="310896" cy="310896"/>
+          </a:xfrm>
+          <a:prstGeom prst="roundRect">
+            <a:avLst>
+              <a:gd name="adj" fmla="val 4000"/>
+            </a:avLst>
+          </a:prstGeom>
+          <a:noFill/>
+          <a:ln w="19050">
+            <a:solidFill>
+              <a:srgbClr val="E8A33D"/>
+            </a:solidFill>
+          </a:ln>
+          <a:effectLst/>
+        </p:spPr>
+        <p:style>
+          <a:lnRef idx="1">
+            <a:schemeClr val="accent1"/>
+          </a:lnRef>
+          <a:fillRef idx="3">
+            <a:schemeClr val="accent1"/>
+          </a:fillRef>
+          <a:effectRef idx="2">
+            <a:schemeClr val="accent1"/>
+          </a:effectRef>
+          <a:fontRef idx="minor">
+            <a:schemeClr val="lt1"/>
+          </a:fontRef>
+        </p:style>
+        <p:txBody>
+          <a:bodyPr rtlCol="0" anchor="ctr"/>
+          <a:lstStyle/>
+          <a:p>
+            <a:pPr algn="ctr"/>
+          </a:p>
+        </p:txBody>
+      </p:sp>
+    </p:spTree>
+  </p:cSld>
+  <p:clrMapOvr>
+    <a:masterClrMapping/>
+  </p:clrMapOvr>
+</p:sld>
+</file>
+
+<file path=ppt/slides/slide28.xml><?xml version="1.0" encoding="utf-8"?>
+<p:sld xmlns:a="http://schemas.openxmlformats.org/drawingml/2006/main" xmlns:p="http://schemas.openxmlformats.org/presentationml/2006/main" xmlns:r="http://schemas.openxmlformats.org/officeDocument/2006/relationships">
+  <p:cSld>
+    <p:spTree>
+      <p:nvGrpSpPr>
+        <p:cNvPr id="1" name=""/>
+        <p:cNvGrpSpPr/>
+        <p:nvPr/>
+      </p:nvGrpSpPr>
+      <p:grpSpPr/>
+      <p:sp>
+        <p:nvSpPr>
+          <p:cNvPr id="2" name="Rectangle 1"/>
+          <p:cNvSpPr/>
+          <p:nvPr/>
+        </p:nvSpPr>
+        <p:spPr>
+          <a:xfrm>
+            <a:off x="0" y="0"/>
+            <a:ext cx="12191695" cy="6858000"/>
+          </a:xfrm>
+          <a:prstGeom prst="rect">
+            <a:avLst/>
+          </a:prstGeom>
+          <a:solidFill>
+            <a:srgbClr val="0E1420"/>
+          </a:solidFill>
+          <a:ln>
+            <a:noFill/>
+          </a:ln>
+          <a:effectLst/>
+        </p:spPr>
+        <p:style>
+          <a:lnRef idx="1">
+            <a:schemeClr val="accent1"/>
+          </a:lnRef>
+          <a:fillRef idx="3">
+            <a:schemeClr val="accent1"/>
+          </a:fillRef>
+          <a:effectRef idx="2">
+            <a:schemeClr val="accent1"/>
+          </a:effectRef>
+          <a:fontRef idx="minor">
+            <a:schemeClr val="lt1"/>
+          </a:fontRef>
+        </p:style>
+        <p:txBody>
+          <a:bodyPr rtlCol="0" anchor="ctr"/>
+          <a:lstStyle/>
+          <a:p>
+            <a:pPr algn="ctr"/>
+          </a:p>
+        </p:txBody>
+      </p:sp>
+      <p:sp>
+        <p:nvSpPr>
+          <p:cNvPr id="3" name="TextBox 2"/>
+          <p:cNvSpPr txBox="1"/>
+          <p:nvPr/>
+        </p:nvSpPr>
+        <p:spPr>
+          <a:xfrm>
+            <a:off x="548640" y="292608"/>
+            <a:ext cx="11094415" cy="228600"/>
+          </a:xfrm>
+          <a:prstGeom prst="rect">
+            <a:avLst/>
+          </a:prstGeom>
+          <a:noFill/>
+        </p:spPr>
+        <p:txBody>
+          <a:bodyPr wrap="square" lIns="0" rIns="0" tIns="0" bIns="0" anchor="t">
+            <a:spAutoFit/>
+          </a:bodyPr>
+          <a:lstStyle/>
+          <a:p>
+            <a:pPr algn="l">
+              <a:lnSpc>
+                <a:spcPct val="115000"/>
+              </a:lnSpc>
+              <a:spcAft>
+                <a:spcPts val="0"/>
+              </a:spcAft>
+            </a:pPr>
+            <a:r>
+              <a:rPr b="1" sz="950" i="0">
+                <a:solidFill>
+                  <a:srgbClr val="29D3E0"/>
+                </a:solidFill>
+                <a:latin typeface="Arial"/>
+              </a:rPr>
+              <a:t>SLIDE 28 · CONCLUSION</a:t>
+            </a:r>
+          </a:p>
+        </p:txBody>
+      </p:sp>
+      <p:sp>
+        <p:nvSpPr>
+          <p:cNvPr id="4" name="TextBox 3"/>
+          <p:cNvSpPr txBox="1"/>
+          <p:nvPr/>
+        </p:nvSpPr>
+        <p:spPr>
+          <a:xfrm>
+            <a:off x="548640" y="530352"/>
+            <a:ext cx="11094415" cy="548640"/>
+          </a:xfrm>
+          <a:prstGeom prst="rect">
+            <a:avLst/>
+          </a:prstGeom>
+          <a:noFill/>
+        </p:spPr>
+        <p:txBody>
+          <a:bodyPr wrap="square" lIns="0" rIns="0" tIns="0" bIns="0" anchor="t">
+            <a:spAutoFit/>
+          </a:bodyPr>
+          <a:lstStyle/>
+          <a:p>
+            <a:pPr algn="l">
+              <a:lnSpc>
+                <a:spcPct val="115000"/>
+              </a:lnSpc>
+              <a:spcAft>
+                <a:spcPts val="0"/>
+              </a:spcAft>
+            </a:pPr>
+            <a:r>
+              <a:rPr b="1" sz="2800" i="0">
+                <a:solidFill>
+                  <a:srgbClr val="E6ECF7"/>
+                </a:solidFill>
+                <a:latin typeface="Georgia"/>
+              </a:rPr>
+              <a:t>What moves, and what doesn't</a:t>
+            </a:r>
+          </a:p>
+        </p:txBody>
+      </p:sp>
+      <p:sp>
+        <p:nvSpPr>
+          <p:cNvPr id="5" name="Rectangle 4"/>
+          <p:cNvSpPr/>
+          <p:nvPr/>
+        </p:nvSpPr>
+        <p:spPr>
+          <a:xfrm>
+            <a:off x="548640" y="1115568"/>
+            <a:ext cx="1097280" cy="41148"/>
+          </a:xfrm>
+          <a:prstGeom prst="rect">
+            <a:avLst/>
+          </a:prstGeom>
+          <a:solidFill>
+            <a:srgbClr val="29D3E0"/>
+          </a:solidFill>
+          <a:ln>
+            <a:noFill/>
+          </a:ln>
+          <a:effectLst/>
+        </p:spPr>
+        <p:style>
+          <a:lnRef idx="1">
+            <a:schemeClr val="accent1"/>
+          </a:lnRef>
+          <a:fillRef idx="3">
+            <a:schemeClr val="accent1"/>
+          </a:fillRef>
+          <a:effectRef idx="2">
+            <a:schemeClr val="accent1"/>
+          </a:effectRef>
+          <a:fontRef idx="minor">
+            <a:schemeClr val="lt1"/>
+          </a:fontRef>
+        </p:style>
+        <p:txBody>
+          <a:bodyPr rtlCol="0" anchor="ctr"/>
+          <a:lstStyle/>
+          <a:p>
+            <a:pPr algn="ctr"/>
+          </a:p>
+        </p:txBody>
+      </p:sp>
+      <p:sp>
+        <p:nvSpPr>
+          <p:cNvPr id="6" name="TextBox 5"/>
+          <p:cNvSpPr txBox="1"/>
+          <p:nvPr/>
+        </p:nvSpPr>
+        <p:spPr>
+          <a:xfrm>
+            <a:off x="548640" y="6473952"/>
+            <a:ext cx="3657600" cy="228600"/>
+          </a:xfrm>
+          <a:prstGeom prst="rect">
+            <a:avLst/>
+          </a:prstGeom>
+          <a:noFill/>
+        </p:spPr>
+        <p:txBody>
+          <a:bodyPr wrap="square" lIns="0" rIns="0" tIns="0" bIns="0" anchor="t">
+            <a:spAutoFit/>
+          </a:bodyPr>
+          <a:lstStyle/>
+          <a:p>
+            <a:pPr algn="l">
+              <a:lnSpc>
+                <a:spcPct val="115000"/>
+              </a:lnSpc>
+              <a:spcAft>
+                <a:spcPts val="0"/>
+              </a:spcAft>
+            </a:pPr>
+            <a:r>
+              <a:rPr b="1" sz="950" i="0">
+                <a:solidFill>
+                  <a:srgbClr val="E6ECF7"/>
+                </a:solidFill>
+                <a:latin typeface="Arial"/>
+              </a:rPr>
+              <a:t>Build to Understand</a:t>
+            </a:r>
+          </a:p>
+        </p:txBody>
+      </p:sp>
+      <p:sp>
+        <p:nvSpPr>
+          <p:cNvPr id="7" name="TextBox 6"/>
+          <p:cNvSpPr txBox="1"/>
+          <p:nvPr/>
+        </p:nvSpPr>
+        <p:spPr>
+          <a:xfrm>
+            <a:off x="10728655" y="6473952"/>
+            <a:ext cx="914400" cy="228600"/>
+          </a:xfrm>
+          <a:prstGeom prst="rect">
+            <a:avLst/>
+          </a:prstGeom>
+          <a:noFill/>
+        </p:spPr>
+        <p:txBody>
+          <a:bodyPr wrap="square" lIns="0" rIns="0" tIns="0" bIns="0" anchor="t">
+            <a:spAutoFit/>
+          </a:bodyPr>
+          <a:lstStyle/>
+          <a:p>
+            <a:pPr algn="r">
+              <a:lnSpc>
+                <a:spcPct val="115000"/>
+              </a:lnSpc>
+              <a:spcAft>
+                <a:spcPts val="0"/>
+              </a:spcAft>
+            </a:pPr>
+            <a:r>
+              <a:rPr b="0" sz="950" i="0">
+                <a:solidFill>
+                  <a:srgbClr val="98A4BC"/>
+                </a:solidFill>
+                <a:latin typeface="Arial"/>
+              </a:rPr>
+              <a:t>28</a:t>
+            </a:r>
+          </a:p>
+        </p:txBody>
+      </p:sp>
+      <p:sp>
+        <p:nvSpPr>
+          <p:cNvPr id="8" name="Rounded Rectangle 7"/>
+          <p:cNvSpPr/>
+          <p:nvPr/>
+        </p:nvSpPr>
+        <p:spPr>
+          <a:xfrm>
+            <a:off x="548640" y="2014037"/>
+            <a:ext cx="3576218" cy="1733232"/>
+          </a:xfrm>
+          <a:prstGeom prst="roundRect">
+            <a:avLst>
+              <a:gd name="adj" fmla="val 4000"/>
+            </a:avLst>
+          </a:prstGeom>
+          <a:solidFill>
+            <a:srgbClr val="151D2E"/>
+          </a:solidFill>
+          <a:ln w="9525">
+            <a:solidFill>
+              <a:srgbClr val="35415A"/>
+            </a:solidFill>
+          </a:ln>
+          <a:effectLst/>
+        </p:spPr>
+        <p:style>
+          <a:lnRef idx="1">
+            <a:schemeClr val="accent1"/>
+          </a:lnRef>
+          <a:fillRef idx="3">
+            <a:schemeClr val="accent1"/>
+          </a:fillRef>
+          <a:effectRef idx="2">
+            <a:schemeClr val="accent1"/>
+          </a:effectRef>
+          <a:fontRef idx="minor">
+            <a:schemeClr val="lt1"/>
+          </a:fontRef>
+        </p:style>
+        <p:txBody>
+          <a:bodyPr rtlCol="0" anchor="ctr"/>
+          <a:lstStyle/>
+          <a:p>
+            <a:pPr algn="ctr"/>
+          </a:p>
+        </p:txBody>
+      </p:sp>
+      <p:sp>
+        <p:nvSpPr>
+          <p:cNvPr id="9" name="Rectangle 8"/>
+          <p:cNvSpPr/>
+          <p:nvPr/>
+        </p:nvSpPr>
+        <p:spPr>
+          <a:xfrm>
+            <a:off x="548640" y="2123765"/>
+            <a:ext cx="45720" cy="1513776"/>
+          </a:xfrm>
+          <a:prstGeom prst="rect">
+            <a:avLst/>
+          </a:prstGeom>
+          <a:solidFill>
+            <a:srgbClr val="29D3E0"/>
+          </a:solidFill>
+          <a:ln>
+            <a:noFill/>
+          </a:ln>
+          <a:effectLst/>
+        </p:spPr>
+        <p:style>
+          <a:lnRef idx="1">
+            <a:schemeClr val="accent1"/>
+          </a:lnRef>
+          <a:fillRef idx="3">
+            <a:schemeClr val="accent1"/>
+          </a:fillRef>
+          <a:effectRef idx="2">
+            <a:schemeClr val="accent1"/>
+          </a:effectRef>
+          <a:fontRef idx="minor">
+            <a:schemeClr val="lt1"/>
+          </a:fontRef>
+        </p:style>
+        <p:txBody>
+          <a:bodyPr rtlCol="0" anchor="ctr"/>
+          <a:lstStyle/>
+          <a:p>
+            <a:pPr algn="ctr"/>
+          </a:p>
+        </p:txBody>
+      </p:sp>
+      <p:sp>
+        <p:nvSpPr>
+          <p:cNvPr id="10" name="TextBox 9"/>
+          <p:cNvSpPr txBox="1"/>
+          <p:nvPr/>
+        </p:nvSpPr>
+        <p:spPr>
+          <a:xfrm>
+            <a:off x="749808" y="2142053"/>
+            <a:ext cx="3210458" cy="540131"/>
+          </a:xfrm>
+          <a:prstGeom prst="rect">
+            <a:avLst/>
+          </a:prstGeom>
+          <a:noFill/>
+        </p:spPr>
+        <p:txBody>
+          <a:bodyPr wrap="square" lIns="0" rIns="0" tIns="0" bIns="0" anchor="t">
+            <a:spAutoFit/>
+          </a:bodyPr>
+          <a:lstStyle/>
+          <a:p>
+            <a:pPr algn="l">
+              <a:lnSpc>
+                <a:spcPct val="115000"/>
+              </a:lnSpc>
+              <a:spcAft>
+                <a:spcPts val="0"/>
+              </a:spcAft>
+            </a:pPr>
+            <a:r>
+              <a:rPr b="1" sz="1625" i="0">
+                <a:solidFill>
+                  <a:srgbClr val="E6ECF7"/>
+                </a:solidFill>
+                <a:latin typeface="Arial"/>
+              </a:rPr>
+              <a:t>Shorter queue</a:t>
+            </a:r>
+          </a:p>
+        </p:txBody>
+      </p:sp>
+      <p:sp>
+        <p:nvSpPr>
+          <p:cNvPr id="11" name="TextBox 10"/>
+          <p:cNvSpPr txBox="1"/>
+          <p:nvPr/>
+        </p:nvSpPr>
+        <p:spPr>
+          <a:xfrm>
+            <a:off x="749808" y="2755336"/>
+            <a:ext cx="3210458" cy="809053"/>
+          </a:xfrm>
+          <a:prstGeom prst="rect">
+            <a:avLst/>
+          </a:prstGeom>
+          <a:noFill/>
+        </p:spPr>
+        <p:txBody>
+          <a:bodyPr wrap="square" lIns="0" rIns="0" tIns="0" bIns="0" anchor="t">
+            <a:spAutoFit/>
+          </a:bodyPr>
+          <a:lstStyle/>
+          <a:p>
+            <a:pPr algn="l">
+              <a:lnSpc>
+                <a:spcPct val="125000"/>
+              </a:lnSpc>
+              <a:spcAft>
+                <a:spcPts val="0"/>
+              </a:spcAft>
+            </a:pPr>
+            <a:r>
+              <a:rPr b="0" sz="1430" i="0">
+                <a:solidFill>
+                  <a:srgbClr val="E6ECF7"/>
+                </a:solidFill>
+                <a:latin typeface="Arial"/>
+              </a:rPr>
+              <a:t>Turn on what is there. Centralize the mechanical. Log it. Tier by risk.</a:t>
+            </a:r>
+          </a:p>
+        </p:txBody>
+      </p:sp>
+      <p:sp>
+        <p:nvSpPr>
+          <p:cNvPr id="12" name="Rounded Rectangle 11"/>
+          <p:cNvSpPr/>
+          <p:nvPr/>
+        </p:nvSpPr>
+        <p:spPr>
+          <a:xfrm>
+            <a:off x="4307738" y="2014037"/>
+            <a:ext cx="3576218" cy="1733232"/>
+          </a:xfrm>
+          <a:prstGeom prst="roundRect">
+            <a:avLst>
+              <a:gd name="adj" fmla="val 4000"/>
+            </a:avLst>
+          </a:prstGeom>
+          <a:solidFill>
+            <a:srgbClr val="151D2E"/>
+          </a:solidFill>
+          <a:ln w="9525">
+            <a:solidFill>
+              <a:srgbClr val="35415A"/>
+            </a:solidFill>
+          </a:ln>
+          <a:effectLst/>
+        </p:spPr>
+        <p:style>
+          <a:lnRef idx="1">
+            <a:schemeClr val="accent1"/>
+          </a:lnRef>
+          <a:fillRef idx="3">
+            <a:schemeClr val="accent1"/>
+          </a:fillRef>
+          <a:effectRef idx="2">
+            <a:schemeClr val="accent1"/>
+          </a:effectRef>
+          <a:fontRef idx="minor">
+            <a:schemeClr val="lt1"/>
+          </a:fontRef>
+        </p:style>
+        <p:txBody>
+          <a:bodyPr rtlCol="0" anchor="ctr"/>
+          <a:lstStyle/>
+          <a:p>
+            <a:pPr algn="ctr"/>
+          </a:p>
+        </p:txBody>
+      </p:sp>
+      <p:sp>
+        <p:nvSpPr>
+          <p:cNvPr id="13" name="Rectangle 12"/>
+          <p:cNvSpPr/>
+          <p:nvPr/>
+        </p:nvSpPr>
+        <p:spPr>
+          <a:xfrm>
+            <a:off x="4307738" y="2123765"/>
+            <a:ext cx="45720" cy="1513776"/>
+          </a:xfrm>
+          <a:prstGeom prst="rect">
+            <a:avLst/>
+          </a:prstGeom>
+          <a:solidFill>
+            <a:srgbClr val="E8A33D"/>
+          </a:solidFill>
+          <a:ln>
+            <a:noFill/>
+          </a:ln>
+          <a:effectLst/>
+        </p:spPr>
+        <p:style>
+          <a:lnRef idx="1">
+            <a:schemeClr val="accent1"/>
+          </a:lnRef>
+          <a:fillRef idx="3">
+            <a:schemeClr val="accent1"/>
+          </a:fillRef>
+          <a:effectRef idx="2">
+            <a:schemeClr val="accent1"/>
+          </a:effectRef>
+          <a:fontRef idx="minor">
+            <a:schemeClr val="lt1"/>
+          </a:fontRef>
+        </p:style>
+        <p:txBody>
+          <a:bodyPr rtlCol="0" anchor="ctr"/>
+          <a:lstStyle/>
+          <a:p>
+            <a:pPr algn="ctr"/>
+          </a:p>
+        </p:txBody>
+      </p:sp>
+      <p:sp>
+        <p:nvSpPr>
+          <p:cNvPr id="14" name="TextBox 13"/>
+          <p:cNvSpPr txBox="1"/>
+          <p:nvPr/>
+        </p:nvSpPr>
+        <p:spPr>
+          <a:xfrm>
+            <a:off x="4508906" y="2142053"/>
+            <a:ext cx="3210458" cy="540131"/>
+          </a:xfrm>
+          <a:prstGeom prst="rect">
+            <a:avLst/>
+          </a:prstGeom>
+          <a:noFill/>
+        </p:spPr>
+        <p:txBody>
+          <a:bodyPr wrap="square" lIns="0" rIns="0" tIns="0" bIns="0" anchor="t">
+            <a:spAutoFit/>
+          </a:bodyPr>
+          <a:lstStyle/>
+          <a:p>
+            <a:pPr algn="l">
+              <a:lnSpc>
+                <a:spcPct val="115000"/>
+              </a:lnSpc>
+              <a:spcAft>
+                <a:spcPts val="0"/>
+              </a:spcAft>
+            </a:pPr>
+            <a:r>
+              <a:rPr b="1" sz="1625" i="0">
+                <a:solidFill>
+                  <a:srgbClr val="E6ECF7"/>
+                </a:solidFill>
+                <a:latin typeface="Arial"/>
+              </a:rPr>
+              <a:t>Higher quality, with evidence</a:t>
+            </a:r>
+          </a:p>
+        </p:txBody>
+      </p:sp>
+      <p:sp>
+        <p:nvSpPr>
+          <p:cNvPr id="15" name="TextBox 14"/>
+          <p:cNvSpPr txBox="1"/>
+          <p:nvPr/>
+        </p:nvSpPr>
+        <p:spPr>
+          <a:xfrm>
+            <a:off x="4508906" y="2755336"/>
+            <a:ext cx="3210458" cy="809053"/>
+          </a:xfrm>
+          <a:prstGeom prst="rect">
+            <a:avLst/>
+          </a:prstGeom>
+          <a:noFill/>
+        </p:spPr>
+        <p:txBody>
+          <a:bodyPr wrap="square" lIns="0" rIns="0" tIns="0" bIns="0" anchor="t">
+            <a:spAutoFit/>
+          </a:bodyPr>
+          <a:lstStyle/>
+          <a:p>
+            <a:pPr algn="l">
+              <a:lnSpc>
+                <a:spcPct val="125000"/>
+              </a:lnSpc>
+              <a:spcAft>
+                <a:spcPts val="0"/>
+              </a:spcAft>
+            </a:pPr>
+            <a:r>
+              <a:rPr b="0" sz="1430" i="0">
+                <a:solidFill>
+                  <a:srgbClr val="E6ECF7"/>
+                </a:solidFill>
+                <a:latin typeface="Arial"/>
+              </a:rPr>
+              <a:t>A different model family reviews the change. Two more are design problems, not results.</a:t>
+            </a:r>
+          </a:p>
+        </p:txBody>
+      </p:sp>
+      <p:sp>
+        <p:nvSpPr>
+          <p:cNvPr id="16" name="Rounded Rectangle 15"/>
+          <p:cNvSpPr/>
+          <p:nvPr/>
+        </p:nvSpPr>
+        <p:spPr>
+          <a:xfrm>
+            <a:off x="8066836" y="2014037"/>
+            <a:ext cx="3576218" cy="1733232"/>
+          </a:xfrm>
+          <a:prstGeom prst="roundRect">
+            <a:avLst>
+              <a:gd name="adj" fmla="val 4000"/>
+            </a:avLst>
+          </a:prstGeom>
+          <a:solidFill>
+            <a:srgbClr val="151D2E"/>
+          </a:solidFill>
+          <a:ln w="9525">
+            <a:solidFill>
+              <a:srgbClr val="35415A"/>
+            </a:solidFill>
+          </a:ln>
+          <a:effectLst/>
+        </p:spPr>
+        <p:style>
+          <a:lnRef idx="1">
+            <a:schemeClr val="accent1"/>
+          </a:lnRef>
+          <a:fillRef idx="3">
+            <a:schemeClr val="accent1"/>
+          </a:fillRef>
+          <a:effectRef idx="2">
+            <a:schemeClr val="accent1"/>
+          </a:effectRef>
+          <a:fontRef idx="minor">
+            <a:schemeClr val="lt1"/>
+          </a:fontRef>
+        </p:style>
+        <p:txBody>
+          <a:bodyPr rtlCol="0" anchor="ctr"/>
+          <a:lstStyle/>
+          <a:p>
+            <a:pPr algn="ctr"/>
+          </a:p>
+        </p:txBody>
+      </p:sp>
+      <p:sp>
+        <p:nvSpPr>
+          <p:cNvPr id="17" name="Rectangle 16"/>
+          <p:cNvSpPr/>
+          <p:nvPr/>
+        </p:nvSpPr>
+        <p:spPr>
+          <a:xfrm>
+            <a:off x="8066836" y="2123765"/>
+            <a:ext cx="45720" cy="1513776"/>
+          </a:xfrm>
+          <a:prstGeom prst="rect">
+            <a:avLst/>
+          </a:prstGeom>
+          <a:solidFill>
+            <a:srgbClr val="29D3E0"/>
+          </a:solidFill>
+          <a:ln>
+            <a:noFill/>
+          </a:ln>
+          <a:effectLst/>
+        </p:spPr>
+        <p:style>
+          <a:lnRef idx="1">
+            <a:schemeClr val="accent1"/>
+          </a:lnRef>
+          <a:fillRef idx="3">
+            <a:schemeClr val="accent1"/>
+          </a:fillRef>
+          <a:effectRef idx="2">
+            <a:schemeClr val="accent1"/>
+          </a:effectRef>
+          <a:fontRef idx="minor">
+            <a:schemeClr val="lt1"/>
+          </a:fontRef>
+        </p:style>
+        <p:txBody>
+          <a:bodyPr rtlCol="0" anchor="ctr"/>
+          <a:lstStyle/>
+          <a:p>
+            <a:pPr algn="ctr"/>
+          </a:p>
+        </p:txBody>
+      </p:sp>
+      <p:sp>
+        <p:nvSpPr>
+          <p:cNvPr id="18" name="TextBox 17"/>
+          <p:cNvSpPr txBox="1"/>
+          <p:nvPr/>
+        </p:nvSpPr>
+        <p:spPr>
+          <a:xfrm>
+            <a:off x="8268004" y="2142053"/>
+            <a:ext cx="3210458" cy="540131"/>
+          </a:xfrm>
+          <a:prstGeom prst="rect">
+            <a:avLst/>
+          </a:prstGeom>
+          <a:noFill/>
+        </p:spPr>
+        <p:txBody>
+          <a:bodyPr wrap="square" lIns="0" rIns="0" tIns="0" bIns="0" anchor="t">
+            <a:spAutoFit/>
+          </a:bodyPr>
+          <a:lstStyle/>
+          <a:p>
+            <a:pPr algn="l">
+              <a:lnSpc>
+                <a:spcPct val="115000"/>
+              </a:lnSpc>
+              <a:spcAft>
+                <a:spcPts val="0"/>
+              </a:spcAft>
+            </a:pPr>
+            <a:r>
+              <a:rPr b="1" sz="1625" i="0">
+                <a:solidFill>
+                  <a:srgbClr val="E6ECF7"/>
+                </a:solidFill>
+                <a:latin typeface="Arial"/>
+              </a:rPr>
+              <a:t>Set aside</a:t>
+            </a:r>
+          </a:p>
+        </p:txBody>
+      </p:sp>
+      <p:sp>
+        <p:nvSpPr>
+          <p:cNvPr id="19" name="TextBox 18"/>
+          <p:cNvSpPr txBox="1"/>
+          <p:nvPr/>
+        </p:nvSpPr>
+        <p:spPr>
+          <a:xfrm>
+            <a:off x="8268004" y="2755336"/>
+            <a:ext cx="3210458" cy="809053"/>
+          </a:xfrm>
+          <a:prstGeom prst="rect">
+            <a:avLst/>
+          </a:prstGeom>
+          <a:noFill/>
+        </p:spPr>
+        <p:txBody>
+          <a:bodyPr wrap="square" lIns="0" rIns="0" tIns="0" bIns="0" anchor="t">
+            <a:spAutoFit/>
+          </a:bodyPr>
+          <a:lstStyle/>
+          <a:p>
+            <a:pPr algn="l">
+              <a:lnSpc>
+                <a:spcPct val="125000"/>
+              </a:lnSpc>
+              <a:spcAft>
+                <a:spcPts val="0"/>
+              </a:spcAft>
+            </a:pPr>
+            <a:r>
+              <a:rPr b="0" sz="1430" i="0">
+                <a:solidFill>
+                  <a:srgbClr val="E6ECF7"/>
+                </a:solidFill>
+                <a:latin typeface="Arial"/>
+              </a:rPr>
+              <a:t>Restricting AI use. Open source defends against strangers. We employ our authors.</a:t>
+            </a:r>
+          </a:p>
+        </p:txBody>
+      </p:sp>
+      <p:sp>
+        <p:nvSpPr>
+          <p:cNvPr id="20" name="Rectangle 19"/>
+          <p:cNvSpPr/>
+          <p:nvPr/>
+        </p:nvSpPr>
+        <p:spPr>
+          <a:xfrm>
+            <a:off x="548640" y="4231902"/>
+            <a:ext cx="54864" cy="746861"/>
+          </a:xfrm>
+          <a:prstGeom prst="rect">
+            <a:avLst/>
+          </a:prstGeom>
+          <a:solidFill>
+            <a:srgbClr val="29D3E0"/>
+          </a:solidFill>
+          <a:ln>
+            <a:noFill/>
+          </a:ln>
+          <a:effectLst/>
+        </p:spPr>
+        <p:style>
+          <a:lnRef idx="1">
+            <a:schemeClr val="accent1"/>
+          </a:lnRef>
+          <a:fillRef idx="3">
+            <a:schemeClr val="accent1"/>
+          </a:fillRef>
+          <a:effectRef idx="2">
+            <a:schemeClr val="accent1"/>
+          </a:effectRef>
+          <a:fontRef idx="minor">
+            <a:schemeClr val="lt1"/>
+          </a:fontRef>
+        </p:style>
+        <p:txBody>
+          <a:bodyPr rtlCol="0" anchor="ctr"/>
+          <a:lstStyle/>
+          <a:p>
+            <a:pPr algn="ctr"/>
+          </a:p>
+        </p:txBody>
+      </p:sp>
+      <p:sp>
+        <p:nvSpPr>
+          <p:cNvPr id="21" name="TextBox 20"/>
+          <p:cNvSpPr txBox="1"/>
+          <p:nvPr/>
+        </p:nvSpPr>
+        <p:spPr>
+          <a:xfrm>
+            <a:off x="822959" y="4323342"/>
+            <a:ext cx="10682935" cy="563981"/>
+          </a:xfrm>
+          <a:prstGeom prst="rect">
+            <a:avLst/>
+          </a:prstGeom>
+          <a:noFill/>
+        </p:spPr>
+        <p:txBody>
+          <a:bodyPr wrap="square" lIns="0" rIns="0" tIns="0" bIns="0" anchor="ctr">
+            <a:spAutoFit/>
+          </a:bodyPr>
+          <a:lstStyle/>
+          <a:p>
+            <a:pPr algn="l">
+              <a:lnSpc>
+                <a:spcPct val="115000"/>
+              </a:lnSpc>
+              <a:spcAft>
+                <a:spcPts val="0"/>
+              </a:spcAft>
+            </a:pPr>
+            <a:r>
+              <a:rPr b="1" sz="1820" i="0">
+                <a:solidFill>
+                  <a:srgbClr val="E6ECF7"/>
+                </a:solidFill>
+                <a:latin typeface="Arial"/>
+              </a:rPr>
+              <a:t>The approval stays with a human who is independent of whoever implemented the change. That is the one line that does not move.</a:t>
+            </a:r>
+          </a:p>
+        </p:txBody>
+      </p:sp>
+    </p:spTree>
+  </p:cSld>
+  <p:clrMapOvr>
+    <a:masterClrMapping/>
+  </p:clrMapOvr>
+</p:sld>
+</file>
+
+<file path=ppt/slides/slide29.xml><?xml version="1.0" encoding="utf-8"?>
+<p:sld xmlns:a="http://schemas.openxmlformats.org/drawingml/2006/main" xmlns:p="http://schemas.openxmlformats.org/presentationml/2006/main" xmlns:r="http://schemas.openxmlformats.org/officeDocument/2006/relationships">
+  <p:cSld>
+    <p:spTree>
+      <p:nvGrpSpPr>
+        <p:cNvPr id="1" name=""/>
+        <p:cNvGrpSpPr/>
+        <p:nvPr/>
+      </p:nvGrpSpPr>
+      <p:grpSpPr/>
+      <p:sp>
+        <p:nvSpPr>
+          <p:cNvPr id="2" name="Rectangle 1"/>
+          <p:cNvSpPr/>
+          <p:nvPr/>
+        </p:nvSpPr>
+        <p:spPr>
+          <a:xfrm>
+            <a:off x="0" y="0"/>
+            <a:ext cx="12191695" cy="6858000"/>
+          </a:xfrm>
+          <a:prstGeom prst="rect">
+            <a:avLst/>
+          </a:prstGeom>
+          <a:solidFill>
+            <a:srgbClr val="0E1420"/>
+          </a:solidFill>
+          <a:ln>
+            <a:noFill/>
+          </a:ln>
+          <a:effectLst/>
+        </p:spPr>
+        <p:style>
+          <a:lnRef idx="1">
+            <a:schemeClr val="accent1"/>
+          </a:lnRef>
+          <a:fillRef idx="3">
+            <a:schemeClr val="accent1"/>
+          </a:fillRef>
+          <a:effectRef idx="2">
+            <a:schemeClr val="accent1"/>
+          </a:effectRef>
+          <a:fontRef idx="minor">
+            <a:schemeClr val="lt1"/>
+          </a:fontRef>
+        </p:style>
+        <p:txBody>
+          <a:bodyPr rtlCol="0" anchor="ctr"/>
+          <a:lstStyle/>
+          <a:p>
+            <a:pPr algn="ctr"/>
+          </a:p>
+        </p:txBody>
+      </p:sp>
+      <p:sp>
+        <p:nvSpPr>
+          <p:cNvPr id="3" name="TextBox 2"/>
+          <p:cNvSpPr txBox="1"/>
+          <p:nvPr/>
+        </p:nvSpPr>
+        <p:spPr>
+          <a:xfrm>
+            <a:off x="548640" y="292608"/>
+            <a:ext cx="11094415" cy="228600"/>
+          </a:xfrm>
+          <a:prstGeom prst="rect">
+            <a:avLst/>
+          </a:prstGeom>
+          <a:noFill/>
+        </p:spPr>
+        <p:txBody>
+          <a:bodyPr wrap="square" lIns="0" rIns="0" tIns="0" bIns="0" anchor="t">
+            <a:spAutoFit/>
+          </a:bodyPr>
+          <a:lstStyle/>
+          <a:p>
+            <a:pPr algn="l">
+              <a:lnSpc>
+                <a:spcPct val="115000"/>
+              </a:lnSpc>
+              <a:spcAft>
+                <a:spcPts val="0"/>
+              </a:spcAft>
+            </a:pPr>
+            <a:r>
+              <a:rPr b="1" sz="950" i="0">
+                <a:solidFill>
+                  <a:srgbClr val="E8A33D"/>
+                </a:solidFill>
+                <a:latin typeface="Arial"/>
+              </a:rPr>
+              <a:t>SLIDE 29 · WHAT I DON'T KNOW YET</a:t>
+            </a:r>
+          </a:p>
+        </p:txBody>
+      </p:sp>
+      <p:sp>
+        <p:nvSpPr>
+          <p:cNvPr id="4" name="TextBox 3"/>
+          <p:cNvSpPr txBox="1"/>
+          <p:nvPr/>
+        </p:nvSpPr>
+        <p:spPr>
+          <a:xfrm>
+            <a:off x="548640" y="530352"/>
+            <a:ext cx="11094415" cy="548640"/>
+          </a:xfrm>
+          <a:prstGeom prst="rect">
+            <a:avLst/>
+          </a:prstGeom>
+          <a:noFill/>
+        </p:spPr>
+        <p:txBody>
+          <a:bodyPr wrap="square" lIns="0" rIns="0" tIns="0" bIns="0" anchor="t">
+            <a:spAutoFit/>
+          </a:bodyPr>
+          <a:lstStyle/>
+          <a:p>
+            <a:pPr algn="l">
+              <a:lnSpc>
+                <a:spcPct val="115000"/>
+              </a:lnSpc>
+              <a:spcAft>
+                <a:spcPts val="0"/>
+              </a:spcAft>
+            </a:pPr>
+            <a:r>
+              <a:rPr b="1" sz="2800" i="0">
+                <a:solidFill>
+                  <a:srgbClr val="E6ECF7"/>
+                </a:solidFill>
+                <a:latin typeface="Georgia"/>
+              </a:rPr>
+              <a:t>What I don't know yet</a:t>
+            </a:r>
+          </a:p>
+        </p:txBody>
+      </p:sp>
+      <p:sp>
+        <p:nvSpPr>
+          <p:cNvPr id="5" name="Rectangle 4"/>
+          <p:cNvSpPr/>
+          <p:nvPr/>
+        </p:nvSpPr>
+        <p:spPr>
+          <a:xfrm>
+            <a:off x="548640" y="1115568"/>
+            <a:ext cx="1097280" cy="41148"/>
+          </a:xfrm>
+          <a:prstGeom prst="rect">
+            <a:avLst/>
+          </a:prstGeom>
+          <a:solidFill>
+            <a:srgbClr val="29D3E0"/>
+          </a:solidFill>
+          <a:ln>
+            <a:noFill/>
+          </a:ln>
+          <a:effectLst/>
+        </p:spPr>
+        <p:style>
+          <a:lnRef idx="1">
+            <a:schemeClr val="accent1"/>
+          </a:lnRef>
+          <a:fillRef idx="3">
+            <a:schemeClr val="accent1"/>
+          </a:fillRef>
+          <a:effectRef idx="2">
+            <a:schemeClr val="accent1"/>
+          </a:effectRef>
+          <a:fontRef idx="minor">
+            <a:schemeClr val="lt1"/>
+          </a:fontRef>
+        </p:style>
+        <p:txBody>
+          <a:bodyPr rtlCol="0" anchor="ctr"/>
+          <a:lstStyle/>
+          <a:p>
+            <a:pPr algn="ctr"/>
+          </a:p>
+        </p:txBody>
+      </p:sp>
+      <p:sp>
+        <p:nvSpPr>
+          <p:cNvPr id="6" name="TextBox 5"/>
+          <p:cNvSpPr txBox="1"/>
+          <p:nvPr/>
+        </p:nvSpPr>
+        <p:spPr>
+          <a:xfrm>
+            <a:off x="548640" y="6473952"/>
+            <a:ext cx="3657600" cy="228600"/>
+          </a:xfrm>
+          <a:prstGeom prst="rect">
+            <a:avLst/>
+          </a:prstGeom>
+          <a:noFill/>
+        </p:spPr>
+        <p:txBody>
+          <a:bodyPr wrap="square" lIns="0" rIns="0" tIns="0" bIns="0" anchor="t">
+            <a:spAutoFit/>
+          </a:bodyPr>
+          <a:lstStyle/>
+          <a:p>
+            <a:pPr algn="l">
+              <a:lnSpc>
+                <a:spcPct val="115000"/>
+              </a:lnSpc>
+              <a:spcAft>
+                <a:spcPts val="0"/>
+              </a:spcAft>
+            </a:pPr>
+            <a:r>
+              <a:rPr b="1" sz="950" i="0">
+                <a:solidFill>
+                  <a:srgbClr val="E6ECF7"/>
+                </a:solidFill>
+                <a:latin typeface="Arial"/>
+              </a:rPr>
+              <a:t>Build to Understand</a:t>
+            </a:r>
+          </a:p>
+        </p:txBody>
+      </p:sp>
+      <p:sp>
+        <p:nvSpPr>
+          <p:cNvPr id="7" name="TextBox 6"/>
+          <p:cNvSpPr txBox="1"/>
+          <p:nvPr/>
+        </p:nvSpPr>
+        <p:spPr>
+          <a:xfrm>
+            <a:off x="10728655" y="6473952"/>
+            <a:ext cx="914400" cy="228600"/>
+          </a:xfrm>
+          <a:prstGeom prst="rect">
+            <a:avLst/>
+          </a:prstGeom>
+          <a:noFill/>
+        </p:spPr>
+        <p:txBody>
+          <a:bodyPr wrap="square" lIns="0" rIns="0" tIns="0" bIns="0" anchor="t">
+            <a:spAutoFit/>
+          </a:bodyPr>
+          <a:lstStyle/>
+          <a:p>
+            <a:pPr algn="r">
+              <a:lnSpc>
+                <a:spcPct val="115000"/>
+              </a:lnSpc>
+              <a:spcAft>
+                <a:spcPts val="0"/>
+              </a:spcAft>
+            </a:pPr>
+            <a:r>
+              <a:rPr b="0" sz="950" i="0">
+                <a:solidFill>
+                  <a:srgbClr val="98A4BC"/>
+                </a:solidFill>
+                <a:latin typeface="Arial"/>
+              </a:rPr>
+              <a:t>29</a:t>
+            </a:r>
+          </a:p>
+        </p:txBody>
+      </p:sp>
+      <p:sp>
+        <p:nvSpPr>
+          <p:cNvPr id="8" name="Rounded Rectangle 7"/>
+          <p:cNvSpPr/>
+          <p:nvPr/>
+        </p:nvSpPr>
+        <p:spPr>
+          <a:xfrm>
+            <a:off x="548640" y="1811803"/>
+            <a:ext cx="2636443" cy="2212022"/>
+          </a:xfrm>
+          <a:prstGeom prst="roundRect">
+            <a:avLst>
+              <a:gd name="adj" fmla="val 4000"/>
+            </a:avLst>
+          </a:prstGeom>
+          <a:solidFill>
+            <a:srgbClr val="151D2E"/>
+          </a:solidFill>
+          <a:ln w="9525">
+            <a:solidFill>
+              <a:srgbClr val="35415A"/>
+            </a:solidFill>
+          </a:ln>
+          <a:effectLst/>
+        </p:spPr>
+        <p:style>
+          <a:lnRef idx="1">
+            <a:schemeClr val="accent1"/>
+          </a:lnRef>
+          <a:fillRef idx="3">
+            <a:schemeClr val="accent1"/>
+          </a:fillRef>
+          <a:effectRef idx="2">
+            <a:schemeClr val="accent1"/>
+          </a:effectRef>
+          <a:fontRef idx="minor">
+            <a:schemeClr val="lt1"/>
+          </a:fontRef>
+        </p:style>
+        <p:txBody>
+          <a:bodyPr rtlCol="0" anchor="ctr"/>
+          <a:lstStyle/>
+          <a:p>
+            <a:pPr algn="ctr"/>
+          </a:p>
+        </p:txBody>
+      </p:sp>
+      <p:sp>
+        <p:nvSpPr>
+          <p:cNvPr id="9" name="Rectangle 8"/>
+          <p:cNvSpPr/>
+          <p:nvPr/>
+        </p:nvSpPr>
+        <p:spPr>
+          <a:xfrm>
+            <a:off x="548640" y="1921531"/>
+            <a:ext cx="45720" cy="1992566"/>
+          </a:xfrm>
+          <a:prstGeom prst="rect">
+            <a:avLst/>
+          </a:prstGeom>
+          <a:solidFill>
+            <a:srgbClr val="29D3E0"/>
+          </a:solidFill>
+          <a:ln>
+            <a:noFill/>
+          </a:ln>
+          <a:effectLst/>
+        </p:spPr>
+        <p:style>
+          <a:lnRef idx="1">
+            <a:schemeClr val="accent1"/>
+          </a:lnRef>
+          <a:fillRef idx="3">
+            <a:schemeClr val="accent1"/>
+          </a:fillRef>
+          <a:effectRef idx="2">
+            <a:schemeClr val="accent1"/>
+          </a:effectRef>
+          <a:fontRef idx="minor">
+            <a:schemeClr val="lt1"/>
+          </a:fontRef>
+        </p:style>
+        <p:txBody>
+          <a:bodyPr rtlCol="0" anchor="ctr"/>
+          <a:lstStyle/>
+          <a:p>
+            <a:pPr algn="ctr"/>
+          </a:p>
+        </p:txBody>
+      </p:sp>
+      <p:sp>
+        <p:nvSpPr>
+          <p:cNvPr id="10" name="TextBox 9"/>
+          <p:cNvSpPr txBox="1"/>
+          <p:nvPr/>
+        </p:nvSpPr>
+        <p:spPr>
+          <a:xfrm>
+            <a:off x="749808" y="1939819"/>
+            <a:ext cx="2270683" cy="791908"/>
+          </a:xfrm>
+          <a:prstGeom prst="rect">
+            <a:avLst/>
+          </a:prstGeom>
+          <a:noFill/>
+        </p:spPr>
+        <p:txBody>
+          <a:bodyPr wrap="square" lIns="0" rIns="0" tIns="0" bIns="0" anchor="t">
+            <a:spAutoFit/>
+          </a:bodyPr>
+          <a:lstStyle/>
+          <a:p>
+            <a:pPr algn="l">
+              <a:lnSpc>
+                <a:spcPct val="115000"/>
+              </a:lnSpc>
+              <a:spcAft>
+                <a:spcPts val="0"/>
+              </a:spcAft>
+            </a:pPr>
+            <a:r>
+              <a:rPr b="1" sz="1625" i="0">
+                <a:solidFill>
+                  <a:srgbClr val="E6ECF7"/>
+                </a:solidFill>
+                <a:latin typeface="Arial"/>
+              </a:rPr>
+              <a:t>Same team, or outside it?</a:t>
+            </a:r>
+          </a:p>
+        </p:txBody>
+      </p:sp>
+      <p:sp>
+        <p:nvSpPr>
+          <p:cNvPr id="11" name="TextBox 10"/>
+          <p:cNvSpPr txBox="1"/>
+          <p:nvPr/>
+        </p:nvSpPr>
+        <p:spPr>
+          <a:xfrm>
+            <a:off x="749808" y="2804879"/>
+            <a:ext cx="2270683" cy="1036065"/>
+          </a:xfrm>
+          <a:prstGeom prst="rect">
+            <a:avLst/>
+          </a:prstGeom>
+          <a:noFill/>
+        </p:spPr>
+        <p:txBody>
+          <a:bodyPr wrap="square" lIns="0" rIns="0" tIns="0" bIns="0" anchor="t">
+            <a:spAutoFit/>
+          </a:bodyPr>
+          <a:lstStyle/>
+          <a:p>
+            <a:pPr algn="l">
+              <a:lnSpc>
+                <a:spcPct val="125000"/>
+              </a:lnSpc>
+              <a:spcAft>
+                <a:spcPts val="0"/>
+              </a:spcAft>
+            </a:pPr>
+            <a:r>
+              <a:rPr b="0" sz="1430" i="0">
+                <a:solidFill>
+                  <a:srgbClr val="E6ECF7"/>
+                </a:solidFill>
+                <a:latin typeface="Arial"/>
+              </a:rPr>
+              <a:t>Everything here assumes same-team approval is enough. The regulation does not say.</a:t>
+            </a:r>
+          </a:p>
+        </p:txBody>
+      </p:sp>
+      <p:sp>
+        <p:nvSpPr>
+          <p:cNvPr id="12" name="Rounded Rectangle 11"/>
+          <p:cNvSpPr/>
+          <p:nvPr/>
+        </p:nvSpPr>
+        <p:spPr>
+          <a:xfrm>
+            <a:off x="3367963" y="1811803"/>
+            <a:ext cx="2636443" cy="2212022"/>
+          </a:xfrm>
+          <a:prstGeom prst="roundRect">
+            <a:avLst>
+              <a:gd name="adj" fmla="val 4000"/>
+            </a:avLst>
+          </a:prstGeom>
+          <a:solidFill>
+            <a:srgbClr val="151D2E"/>
+          </a:solidFill>
+          <a:ln w="9525">
+            <a:solidFill>
+              <a:srgbClr val="35415A"/>
+            </a:solidFill>
+          </a:ln>
+          <a:effectLst/>
+        </p:spPr>
+        <p:style>
+          <a:lnRef idx="1">
+            <a:schemeClr val="accent1"/>
+          </a:lnRef>
+          <a:fillRef idx="3">
+            <a:schemeClr val="accent1"/>
+          </a:fillRef>
+          <a:effectRef idx="2">
+            <a:schemeClr val="accent1"/>
+          </a:effectRef>
+          <a:fontRef idx="minor">
+            <a:schemeClr val="lt1"/>
+          </a:fontRef>
+        </p:style>
+        <p:txBody>
+          <a:bodyPr rtlCol="0" anchor="ctr"/>
+          <a:lstStyle/>
+          <a:p>
+            <a:pPr algn="ctr"/>
+          </a:p>
+        </p:txBody>
+      </p:sp>
+      <p:sp>
+        <p:nvSpPr>
+          <p:cNvPr id="13" name="Rectangle 12"/>
+          <p:cNvSpPr/>
+          <p:nvPr/>
+        </p:nvSpPr>
+        <p:spPr>
+          <a:xfrm>
+            <a:off x="3367963" y="1921531"/>
+            <a:ext cx="45720" cy="1992566"/>
+          </a:xfrm>
+          <a:prstGeom prst="rect">
+            <a:avLst/>
+          </a:prstGeom>
+          <a:solidFill>
+            <a:srgbClr val="E8A33D"/>
+          </a:solidFill>
+          <a:ln>
+            <a:noFill/>
+          </a:ln>
+          <a:effectLst/>
+        </p:spPr>
+        <p:style>
+          <a:lnRef idx="1">
+            <a:schemeClr val="accent1"/>
+          </a:lnRef>
+          <a:fillRef idx="3">
+            <a:schemeClr val="accent1"/>
+          </a:fillRef>
+          <a:effectRef idx="2">
+            <a:schemeClr val="accent1"/>
+          </a:effectRef>
+          <a:fontRef idx="minor">
+            <a:schemeClr val="lt1"/>
+          </a:fontRef>
+        </p:style>
+        <p:txBody>
+          <a:bodyPr rtlCol="0" anchor="ctr"/>
+          <a:lstStyle/>
+          <a:p>
+            <a:pPr algn="ctr"/>
+          </a:p>
+        </p:txBody>
+      </p:sp>
+      <p:sp>
+        <p:nvSpPr>
+          <p:cNvPr id="14" name="TextBox 13"/>
+          <p:cNvSpPr txBox="1"/>
+          <p:nvPr/>
+        </p:nvSpPr>
+        <p:spPr>
+          <a:xfrm>
+            <a:off x="3569131" y="1939819"/>
+            <a:ext cx="2270683" cy="791908"/>
+          </a:xfrm>
+          <a:prstGeom prst="rect">
+            <a:avLst/>
+          </a:prstGeom>
+          <a:noFill/>
+        </p:spPr>
+        <p:txBody>
+          <a:bodyPr wrap="square" lIns="0" rIns="0" tIns="0" bIns="0" anchor="t">
+            <a:spAutoFit/>
+          </a:bodyPr>
+          <a:lstStyle/>
+          <a:p>
+            <a:pPr algn="l">
+              <a:lnSpc>
+                <a:spcPct val="115000"/>
+              </a:lnSpc>
+              <a:spcAft>
+                <a:spcPts val="0"/>
+              </a:spcAft>
+            </a:pPr>
+            <a:r>
+              <a:rPr b="1" sz="1625" i="0">
+                <a:solidFill>
+                  <a:srgbClr val="E6ECF7"/>
+                </a:solidFill>
+                <a:latin typeface="Arial"/>
+              </a:rPr>
+              <a:t>Does a classifier count as a function?</a:t>
+            </a:r>
+          </a:p>
+        </p:txBody>
+      </p:sp>
+      <p:sp>
+        <p:nvSpPr>
+          <p:cNvPr id="15" name="TextBox 14"/>
+          <p:cNvSpPr txBox="1"/>
+          <p:nvPr/>
+        </p:nvSpPr>
+        <p:spPr>
+          <a:xfrm>
+            <a:off x="3569131" y="2804879"/>
+            <a:ext cx="2270683" cy="1036065"/>
+          </a:xfrm>
+          <a:prstGeom prst="rect">
+            <a:avLst/>
+          </a:prstGeom>
+          <a:noFill/>
+        </p:spPr>
+        <p:txBody>
+          <a:bodyPr wrap="square" lIns="0" rIns="0" tIns="0" bIns="0" anchor="t">
+            <a:spAutoFit/>
+          </a:bodyPr>
+          <a:lstStyle/>
+          <a:p>
+            <a:pPr algn="l">
+              <a:lnSpc>
+                <a:spcPct val="125000"/>
+              </a:lnSpc>
+              <a:spcAft>
+                <a:spcPts val="0"/>
+              </a:spcAft>
+            </a:pPr>
+            <a:r>
+              <a:rPr b="0" sz="1430" i="0">
+                <a:solidFill>
+                  <a:srgbClr val="E6ECF7"/>
+                </a:solidFill>
+                <a:latin typeface="Arial"/>
+              </a:rPr>
+              <a:t>Meta and Zalando auto-approve. Nobody has written down whether DORA allows it.</a:t>
+            </a:r>
+          </a:p>
+        </p:txBody>
+      </p:sp>
+      <p:sp>
+        <p:nvSpPr>
+          <p:cNvPr id="16" name="Rounded Rectangle 15"/>
+          <p:cNvSpPr/>
+          <p:nvPr/>
+        </p:nvSpPr>
+        <p:spPr>
+          <a:xfrm>
+            <a:off x="6187287" y="1811803"/>
+            <a:ext cx="2636443" cy="2212022"/>
+          </a:xfrm>
+          <a:prstGeom prst="roundRect">
+            <a:avLst>
+              <a:gd name="adj" fmla="val 4000"/>
+            </a:avLst>
+          </a:prstGeom>
+          <a:solidFill>
+            <a:srgbClr val="151D2E"/>
+          </a:solidFill>
+          <a:ln w="9525">
+            <a:solidFill>
+              <a:srgbClr val="35415A"/>
+            </a:solidFill>
+          </a:ln>
+          <a:effectLst/>
+        </p:spPr>
+        <p:style>
+          <a:lnRef idx="1">
+            <a:schemeClr val="accent1"/>
+          </a:lnRef>
+          <a:fillRef idx="3">
+            <a:schemeClr val="accent1"/>
+          </a:fillRef>
+          <a:effectRef idx="2">
+            <a:schemeClr val="accent1"/>
+          </a:effectRef>
+          <a:fontRef idx="minor">
+            <a:schemeClr val="lt1"/>
+          </a:fontRef>
+        </p:style>
+        <p:txBody>
+          <a:bodyPr rtlCol="0" anchor="ctr"/>
+          <a:lstStyle/>
+          <a:p>
+            <a:pPr algn="ctr"/>
+          </a:p>
+        </p:txBody>
+      </p:sp>
+      <p:sp>
+        <p:nvSpPr>
+          <p:cNvPr id="17" name="Rectangle 16"/>
+          <p:cNvSpPr/>
+          <p:nvPr/>
+        </p:nvSpPr>
+        <p:spPr>
+          <a:xfrm>
+            <a:off x="6187287" y="1921531"/>
+            <a:ext cx="45720" cy="1992566"/>
+          </a:xfrm>
+          <a:prstGeom prst="rect">
+            <a:avLst/>
+          </a:prstGeom>
+          <a:solidFill>
+            <a:srgbClr val="29D3E0"/>
+          </a:solidFill>
+          <a:ln>
+            <a:noFill/>
+          </a:ln>
+          <a:effectLst/>
+        </p:spPr>
+        <p:style>
+          <a:lnRef idx="1">
+            <a:schemeClr val="accent1"/>
+          </a:lnRef>
+          <a:fillRef idx="3">
+            <a:schemeClr val="accent1"/>
+          </a:fillRef>
+          <a:effectRef idx="2">
+            <a:schemeClr val="accent1"/>
+          </a:effectRef>
+          <a:fontRef idx="minor">
+            <a:schemeClr val="lt1"/>
+          </a:fontRef>
+        </p:style>
+        <p:txBody>
+          <a:bodyPr rtlCol="0" anchor="ctr"/>
+          <a:lstStyle/>
+          <a:p>
+            <a:pPr algn="ctr"/>
+          </a:p>
+        </p:txBody>
+      </p:sp>
+      <p:sp>
+        <p:nvSpPr>
+          <p:cNvPr id="18" name="TextBox 17"/>
+          <p:cNvSpPr txBox="1"/>
+          <p:nvPr/>
+        </p:nvSpPr>
+        <p:spPr>
+          <a:xfrm>
+            <a:off x="6388455" y="1939819"/>
+            <a:ext cx="2270683" cy="791908"/>
+          </a:xfrm>
+          <a:prstGeom prst="rect">
+            <a:avLst/>
+          </a:prstGeom>
+          <a:noFill/>
+        </p:spPr>
+        <p:txBody>
+          <a:bodyPr wrap="square" lIns="0" rIns="0" tIns="0" bIns="0" anchor="t">
+            <a:spAutoFit/>
+          </a:bodyPr>
+          <a:lstStyle/>
+          <a:p>
+            <a:pPr algn="l">
+              <a:lnSpc>
+                <a:spcPct val="115000"/>
+              </a:lnSpc>
+              <a:spcAft>
+                <a:spcPts val="0"/>
+              </a:spcAft>
+            </a:pPr>
+            <a:r>
+              <a:rPr b="1" sz="1625" i="0">
+                <a:solidFill>
+                  <a:srgbClr val="E6ECF7"/>
+                </a:solidFill>
+                <a:latin typeface="Arial"/>
+              </a:rPr>
+              <a:t>What is switched on today?</a:t>
+            </a:r>
+          </a:p>
+        </p:txBody>
+      </p:sp>
+      <p:sp>
+        <p:nvSpPr>
+          <p:cNvPr id="19" name="TextBox 18"/>
+          <p:cNvSpPr txBox="1"/>
+          <p:nvPr/>
+        </p:nvSpPr>
+        <p:spPr>
+          <a:xfrm>
+            <a:off x="6388455" y="2804879"/>
+            <a:ext cx="2270683" cy="1036065"/>
+          </a:xfrm>
+          <a:prstGeom prst="rect">
+            <a:avLst/>
+          </a:prstGeom>
+          <a:noFill/>
+        </p:spPr>
+        <p:txBody>
+          <a:bodyPr wrap="square" lIns="0" rIns="0" tIns="0" bIns="0" anchor="t">
+            <a:spAutoFit/>
+          </a:bodyPr>
+          <a:lstStyle/>
+          <a:p>
+            <a:pPr algn="l">
+              <a:lnSpc>
+                <a:spcPct val="125000"/>
+              </a:lnSpc>
+              <a:spcAft>
+                <a:spcPts val="0"/>
+              </a:spcAft>
+            </a:pPr>
+            <a:r>
+              <a:rPr b="0" sz="1430" i="0">
+                <a:solidFill>
+                  <a:srgbClr val="E6ECF7"/>
+                </a:solidFill>
+                <a:latin typeface="Arial"/>
+              </a:rPr>
+              <a:t>A day of checking I have not done.</a:t>
+            </a:r>
+          </a:p>
+        </p:txBody>
+      </p:sp>
+      <p:sp>
+        <p:nvSpPr>
+          <p:cNvPr id="20" name="Rounded Rectangle 19"/>
+          <p:cNvSpPr/>
+          <p:nvPr/>
+        </p:nvSpPr>
+        <p:spPr>
+          <a:xfrm>
+            <a:off x="9006611" y="1811803"/>
+            <a:ext cx="2636443" cy="2212022"/>
+          </a:xfrm>
+          <a:prstGeom prst="roundRect">
+            <a:avLst>
+              <a:gd name="adj" fmla="val 4000"/>
+            </a:avLst>
+          </a:prstGeom>
+          <a:solidFill>
+            <a:srgbClr val="151D2E"/>
+          </a:solidFill>
+          <a:ln w="9525">
+            <a:solidFill>
+              <a:srgbClr val="35415A"/>
+            </a:solidFill>
+          </a:ln>
+          <a:effectLst/>
+        </p:spPr>
+        <p:style>
+          <a:lnRef idx="1">
+            <a:schemeClr val="accent1"/>
+          </a:lnRef>
+          <a:fillRef idx="3">
+            <a:schemeClr val="accent1"/>
+          </a:fillRef>
+          <a:effectRef idx="2">
+            <a:schemeClr val="accent1"/>
+          </a:effectRef>
+          <a:fontRef idx="minor">
+            <a:schemeClr val="lt1"/>
+          </a:fontRef>
+        </p:style>
+        <p:txBody>
+          <a:bodyPr rtlCol="0" anchor="ctr"/>
+          <a:lstStyle/>
+          <a:p>
+            <a:pPr algn="ctr"/>
+          </a:p>
+        </p:txBody>
+      </p:sp>
+      <p:sp>
+        <p:nvSpPr>
+          <p:cNvPr id="21" name="Rectangle 20"/>
+          <p:cNvSpPr/>
+          <p:nvPr/>
+        </p:nvSpPr>
+        <p:spPr>
+          <a:xfrm>
+            <a:off x="9006611" y="1921531"/>
+            <a:ext cx="45720" cy="1992566"/>
+          </a:xfrm>
+          <a:prstGeom prst="rect">
+            <a:avLst/>
+          </a:prstGeom>
+          <a:solidFill>
+            <a:srgbClr val="E8A33D"/>
+          </a:solidFill>
+          <a:ln>
+            <a:noFill/>
+          </a:ln>
+          <a:effectLst/>
+        </p:spPr>
+        <p:style>
+          <a:lnRef idx="1">
+            <a:schemeClr val="accent1"/>
+          </a:lnRef>
+          <a:fillRef idx="3">
+            <a:schemeClr val="accent1"/>
+          </a:fillRef>
+          <a:effectRef idx="2">
+            <a:schemeClr val="accent1"/>
+          </a:effectRef>
+          <a:fontRef idx="minor">
+            <a:schemeClr val="lt1"/>
+          </a:fontRef>
+        </p:style>
+        <p:txBody>
+          <a:bodyPr rtlCol="0" anchor="ctr"/>
+          <a:lstStyle/>
+          <a:p>
+            <a:pPr algn="ctr"/>
+          </a:p>
+        </p:txBody>
+      </p:sp>
+      <p:sp>
+        <p:nvSpPr>
+          <p:cNvPr id="22" name="TextBox 21"/>
+          <p:cNvSpPr txBox="1"/>
+          <p:nvPr/>
+        </p:nvSpPr>
+        <p:spPr>
+          <a:xfrm>
+            <a:off x="9207779" y="1939819"/>
+            <a:ext cx="2270683" cy="791908"/>
+          </a:xfrm>
+          <a:prstGeom prst="rect">
+            <a:avLst/>
+          </a:prstGeom>
+          <a:noFill/>
+        </p:spPr>
+        <p:txBody>
+          <a:bodyPr wrap="square" lIns="0" rIns="0" tIns="0" bIns="0" anchor="t">
+            <a:spAutoFit/>
+          </a:bodyPr>
+          <a:lstStyle/>
+          <a:p>
+            <a:pPr algn="l">
+              <a:lnSpc>
+                <a:spcPct val="115000"/>
+              </a:lnSpc>
+              <a:spcAft>
+                <a:spcPts val="0"/>
+              </a:spcAft>
+            </a:pPr>
+            <a:r>
+              <a:rPr b="1" sz="1625" i="0">
+                <a:solidFill>
+                  <a:srgbClr val="E6ECF7"/>
+                </a:solidFill>
+                <a:latin typeface="Arial"/>
+              </a:rPr>
+              <a:t>Does the author's check survive a team?</a:t>
+            </a:r>
+          </a:p>
+        </p:txBody>
+      </p:sp>
+      <p:sp>
+        <p:nvSpPr>
+          <p:cNvPr id="23" name="TextBox 22"/>
+          <p:cNvSpPr txBox="1"/>
+          <p:nvPr/>
+        </p:nvSpPr>
+        <p:spPr>
+          <a:xfrm>
+            <a:off x="9207779" y="2804879"/>
+            <a:ext cx="2270683" cy="1036065"/>
+          </a:xfrm>
+          <a:prstGeom prst="rect">
+            <a:avLst/>
+          </a:prstGeom>
+          <a:noFill/>
+        </p:spPr>
+        <p:txBody>
+          <a:bodyPr wrap="square" lIns="0" rIns="0" tIns="0" bIns="0" anchor="t">
+            <a:spAutoFit/>
+          </a:bodyPr>
+          <a:lstStyle/>
+          <a:p>
+            <a:pPr algn="l">
+              <a:lnSpc>
+                <a:spcPct val="125000"/>
+              </a:lnSpc>
+              <a:spcAft>
+                <a:spcPts val="0"/>
+              </a:spcAft>
+            </a:pPr>
+            <a:r>
+              <a:rPr b="0" sz="1430" i="0">
+                <a:solidFill>
+                  <a:srgbClr val="E6ECF7"/>
+                </a:solidFill>
+                <a:latin typeface="Arial"/>
+              </a:rPr>
+              <a:t>Nobody has used it.</a:t>
+            </a:r>
+          </a:p>
+        </p:txBody>
+      </p:sp>
+      <p:sp>
+        <p:nvSpPr>
+          <p:cNvPr id="24" name="Rectangle 23"/>
+          <p:cNvSpPr/>
+          <p:nvPr/>
+        </p:nvSpPr>
+        <p:spPr>
+          <a:xfrm>
+            <a:off x="548640" y="4508457"/>
+            <a:ext cx="5455767" cy="911352"/>
+          </a:xfrm>
+          <a:prstGeom prst="rect">
+            <a:avLst/>
+          </a:prstGeom>
+          <a:solidFill>
+            <a:srgbClr val="151D2E"/>
+          </a:solidFill>
+          <a:ln w="9525">
+            <a:solidFill>
+              <a:srgbClr val="35415A"/>
+            </a:solidFill>
+          </a:ln>
+          <a:effectLst/>
+        </p:spPr>
+        <p:style>
+          <a:lnRef idx="1">
+            <a:schemeClr val="accent1"/>
+          </a:lnRef>
+          <a:fillRef idx="3">
+            <a:schemeClr val="accent1"/>
+          </a:fillRef>
+          <a:effectRef idx="2">
+            <a:schemeClr val="accent1"/>
+          </a:effectRef>
+          <a:fontRef idx="minor">
+            <a:schemeClr val="lt1"/>
+          </a:fontRef>
+        </p:style>
+        <p:txBody>
+          <a:bodyPr rtlCol="0" anchor="ctr"/>
+          <a:lstStyle/>
+          <a:p>
+            <a:pPr algn="ctr"/>
+          </a:p>
+        </p:txBody>
+      </p:sp>
+      <p:sp>
+        <p:nvSpPr>
+          <p:cNvPr id="25" name="Rectangle 24"/>
+          <p:cNvSpPr/>
+          <p:nvPr/>
+        </p:nvSpPr>
+        <p:spPr>
+          <a:xfrm>
+            <a:off x="548640" y="4508457"/>
+            <a:ext cx="45720" cy="911352"/>
+          </a:xfrm>
+          <a:prstGeom prst="rect">
+            <a:avLst/>
+          </a:prstGeom>
+          <a:solidFill>
+            <a:srgbClr val="E8A33D"/>
+          </a:solidFill>
+          <a:ln>
+            <a:noFill/>
+          </a:ln>
+          <a:effectLst/>
+        </p:spPr>
+        <p:style>
+          <a:lnRef idx="1">
+            <a:schemeClr val="accent1"/>
+          </a:lnRef>
+          <a:fillRef idx="3">
+            <a:schemeClr val="accent1"/>
+          </a:fillRef>
+          <a:effectRef idx="2">
+            <a:schemeClr val="accent1"/>
+          </a:effectRef>
+          <a:fontRef idx="minor">
+            <a:schemeClr val="lt1"/>
+          </a:fontRef>
+        </p:style>
+        <p:txBody>
+          <a:bodyPr rtlCol="0" anchor="ctr"/>
+          <a:lstStyle/>
+          <a:p>
+            <a:pPr algn="ctr"/>
+          </a:p>
+        </p:txBody>
+      </p:sp>
+      <p:sp>
+        <p:nvSpPr>
+          <p:cNvPr id="26" name="TextBox 25"/>
+          <p:cNvSpPr txBox="1"/>
+          <p:nvPr/>
+        </p:nvSpPr>
+        <p:spPr>
+          <a:xfrm>
+            <a:off x="749808" y="4618185"/>
+            <a:ext cx="5090007" cy="228600"/>
+          </a:xfrm>
+          <a:prstGeom prst="rect">
+            <a:avLst/>
+          </a:prstGeom>
+          <a:noFill/>
+        </p:spPr>
+        <p:txBody>
+          <a:bodyPr wrap="square" lIns="0" rIns="0" tIns="0" bIns="0" anchor="t">
+            <a:spAutoFit/>
+          </a:bodyPr>
+          <a:lstStyle/>
+          <a:p>
+            <a:pPr algn="l">
+              <a:lnSpc>
+                <a:spcPct val="115000"/>
+              </a:lnSpc>
+              <a:spcAft>
+                <a:spcPts val="0"/>
+              </a:spcAft>
+            </a:pPr>
+            <a:r>
+              <a:rPr b="1" sz="1495" i="0">
+                <a:solidFill>
+                  <a:srgbClr val="E6ECF7"/>
+                </a:solidFill>
+                <a:latin typeface="Arial"/>
+              </a:rPr>
+              <a:t>What would help me most</a:t>
+            </a:r>
+          </a:p>
+        </p:txBody>
+      </p:sp>
+      <p:sp>
+        <p:nvSpPr>
+          <p:cNvPr id="27" name="TextBox 26"/>
+          <p:cNvSpPr txBox="1"/>
+          <p:nvPr/>
+        </p:nvSpPr>
+        <p:spPr>
+          <a:xfrm>
+            <a:off x="749808" y="4855929"/>
+            <a:ext cx="5090007" cy="435864"/>
+          </a:xfrm>
+          <a:prstGeom prst="rect">
+            <a:avLst/>
+          </a:prstGeom>
+          <a:noFill/>
+        </p:spPr>
+        <p:txBody>
+          <a:bodyPr wrap="square" lIns="0" rIns="0" tIns="0" bIns="0" anchor="t">
+            <a:spAutoFit/>
+          </a:bodyPr>
+          <a:lstStyle/>
+          <a:p>
+            <a:pPr algn="l">
+              <a:lnSpc>
+                <a:spcPct val="120000"/>
+              </a:lnSpc>
+              <a:spcAft>
+                <a:spcPts val="0"/>
+              </a:spcAft>
+            </a:pPr>
+            <a:r>
+              <a:rPr b="0" sz="1430" i="0">
+                <a:solidFill>
+                  <a:srgbClr val="E6ECF7"/>
+                </a:solidFill>
+                <a:latin typeface="Arial"/>
+              </a:rPr>
+              <a:t>A review decision you made and had to undo. What did it cost?</a:t>
+            </a:r>
+          </a:p>
+        </p:txBody>
+      </p:sp>
+      <p:sp>
+        <p:nvSpPr>
+          <p:cNvPr id="28" name="Rectangle 27"/>
+          <p:cNvSpPr/>
+          <p:nvPr/>
+        </p:nvSpPr>
+        <p:spPr>
+          <a:xfrm>
+            <a:off x="6187287" y="4508457"/>
+            <a:ext cx="5455767" cy="911352"/>
+          </a:xfrm>
+          <a:prstGeom prst="rect">
+            <a:avLst/>
+          </a:prstGeom>
+          <a:solidFill>
+            <a:srgbClr val="151D2E"/>
+          </a:solidFill>
+          <a:ln w="9525">
+            <a:solidFill>
+              <a:srgbClr val="35415A"/>
+            </a:solidFill>
+          </a:ln>
+          <a:effectLst/>
+        </p:spPr>
+        <p:style>
+          <a:lnRef idx="1">
+            <a:schemeClr val="accent1"/>
+          </a:lnRef>
+          <a:fillRef idx="3">
+            <a:schemeClr val="accent1"/>
+          </a:fillRef>
+          <a:effectRef idx="2">
+            <a:schemeClr val="accent1"/>
+          </a:effectRef>
+          <a:fontRef idx="minor">
+            <a:schemeClr val="lt1"/>
+          </a:fontRef>
+        </p:style>
+        <p:txBody>
+          <a:bodyPr rtlCol="0" anchor="ctr"/>
+          <a:lstStyle/>
+          <a:p>
+            <a:pPr algn="ctr"/>
+          </a:p>
+        </p:txBody>
+      </p:sp>
+      <p:sp>
+        <p:nvSpPr>
+          <p:cNvPr id="29" name="Rectangle 28"/>
+          <p:cNvSpPr/>
+          <p:nvPr/>
+        </p:nvSpPr>
+        <p:spPr>
+          <a:xfrm>
+            <a:off x="6187287" y="4508457"/>
+            <a:ext cx="45720" cy="911352"/>
+          </a:xfrm>
+          <a:prstGeom prst="rect">
+            <a:avLst/>
+          </a:prstGeom>
+          <a:solidFill>
+            <a:srgbClr val="29D3E0"/>
+          </a:solidFill>
+          <a:ln>
+            <a:noFill/>
+          </a:ln>
+          <a:effectLst/>
+        </p:spPr>
+        <p:style>
+          <a:lnRef idx="1">
+            <a:schemeClr val="accent1"/>
+          </a:lnRef>
+          <a:fillRef idx="3">
+            <a:schemeClr val="accent1"/>
+          </a:fillRef>
+          <a:effectRef idx="2">
+            <a:schemeClr val="accent1"/>
+          </a:effectRef>
+          <a:fontRef idx="minor">
+            <a:schemeClr val="lt1"/>
+          </a:fontRef>
+        </p:style>
+        <p:txBody>
+          <a:bodyPr rtlCol="0" anchor="ctr"/>
+          <a:lstStyle/>
+          <a:p>
+            <a:pPr algn="ctr"/>
+          </a:p>
+        </p:txBody>
+      </p:sp>
+      <p:sp>
+        <p:nvSpPr>
+          <p:cNvPr id="30" name="TextBox 29"/>
+          <p:cNvSpPr txBox="1"/>
+          <p:nvPr/>
+        </p:nvSpPr>
+        <p:spPr>
+          <a:xfrm>
+            <a:off x="6388455" y="4618185"/>
+            <a:ext cx="5090007" cy="228600"/>
+          </a:xfrm>
+          <a:prstGeom prst="rect">
+            <a:avLst/>
+          </a:prstGeom>
+          <a:noFill/>
+        </p:spPr>
+        <p:txBody>
+          <a:bodyPr wrap="square" lIns="0" rIns="0" tIns="0" bIns="0" anchor="t">
+            <a:spAutoFit/>
+          </a:bodyPr>
+          <a:lstStyle/>
+          <a:p>
+            <a:pPr algn="l">
+              <a:lnSpc>
+                <a:spcPct val="115000"/>
+              </a:lnSpc>
+              <a:spcAft>
+                <a:spcPts val="0"/>
+              </a:spcAft>
+            </a:pPr>
+            <a:r>
+              <a:rPr b="1" sz="1495" i="0">
+                <a:solidFill>
+                  <a:srgbClr val="E6ECF7"/>
+                </a:solidFill>
+                <a:latin typeface="Arial"/>
+              </a:rPr>
+              <a:t>What would change my mind</a:t>
+            </a:r>
+          </a:p>
+        </p:txBody>
+      </p:sp>
+      <p:sp>
+        <p:nvSpPr>
+          <p:cNvPr id="31" name="TextBox 30"/>
+          <p:cNvSpPr txBox="1"/>
+          <p:nvPr/>
+        </p:nvSpPr>
+        <p:spPr>
+          <a:xfrm>
+            <a:off x="6388455" y="4855929"/>
+            <a:ext cx="5090007" cy="435864"/>
+          </a:xfrm>
+          <a:prstGeom prst="rect">
+            <a:avLst/>
+          </a:prstGeom>
+          <a:noFill/>
+        </p:spPr>
+        <p:txBody>
+          <a:bodyPr wrap="square" lIns="0" rIns="0" tIns="0" bIns="0" anchor="t">
+            <a:spAutoFit/>
+          </a:bodyPr>
+          <a:lstStyle/>
+          <a:p>
+            <a:pPr algn="l">
+              <a:lnSpc>
+                <a:spcPct val="120000"/>
+              </a:lnSpc>
+              <a:spcAft>
+                <a:spcPts val="0"/>
+              </a:spcAft>
+            </a:pPr>
+            <a:r>
+              <a:rPr b="0" sz="1430" i="0">
+                <a:solidFill>
+                  <a:srgbClr val="E6ECF7"/>
+                </a:solidFill>
+                <a:latin typeface="Arial"/>
+              </a:rPr>
+              <a:t>A regulated company whose auditor accepted a machine's approval.</a:t>
+            </a:r>
+          </a:p>
+        </p:txBody>
+      </p:sp>
+    </p:spTree>
+  </p:cSld>
+  <p:clrMapOvr>
+    <a:masterClrMapping/>
+  </p:clrMapOvr>
+</p:sld>
+</file>
+
+<file path=ppt/slides/slide3.xml><?xml version="1.0" encoding="utf-8"?>
+<p:sld xmlns:a="http://schemas.openxmlformats.org/drawingml/2006/main" xmlns:p="http://schemas.openxmlformats.org/presentationml/2006/main" xmlns:r="http://schemas.openxmlformats.org/officeDocument/2006/relationships">
+  <p:cSld>
+    <p:spTree>
+      <p:nvGrpSpPr>
+        <p:cNvPr id="1" name=""/>
+        <p:cNvGrpSpPr/>
+        <p:nvPr/>
+      </p:nvGrpSpPr>
+      <p:grpSpPr/>
+      <p:sp>
+        <p:nvSpPr>
+          <p:cNvPr id="2" name="Rectangle 1"/>
+          <p:cNvSpPr/>
+          <p:nvPr/>
+        </p:nvSpPr>
+        <p:spPr>
+          <a:xfrm>
+            <a:off x="0" y="0"/>
+            <a:ext cx="12191695" cy="6858000"/>
+          </a:xfrm>
+          <a:prstGeom prst="rect">
+            <a:avLst/>
+          </a:prstGeom>
+          <a:solidFill>
+            <a:srgbClr val="0E1420"/>
+          </a:solidFill>
+          <a:ln>
+            <a:noFill/>
+          </a:ln>
+          <a:effectLst/>
+        </p:spPr>
+        <p:style>
+          <a:lnRef idx="1">
+            <a:schemeClr val="accent1"/>
+          </a:lnRef>
+          <a:fillRef idx="3">
+            <a:schemeClr val="accent1"/>
+          </a:fillRef>
+          <a:effectRef idx="2">
+            <a:schemeClr val="accent1"/>
+          </a:effectRef>
+          <a:fontRef idx="minor">
+            <a:schemeClr val="lt1"/>
+          </a:fontRef>
+        </p:style>
+        <p:txBody>
+          <a:bodyPr rtlCol="0" anchor="ctr"/>
+          <a:lstStyle/>
+          <a:p>
+            <a:pPr algn="ctr"/>
+          </a:p>
+        </p:txBody>
+      </p:sp>
+      <p:sp>
+        <p:nvSpPr>
+          <p:cNvPr id="3" name="TextBox 2"/>
+          <p:cNvSpPr txBox="1"/>
+          <p:nvPr/>
+        </p:nvSpPr>
+        <p:spPr>
+          <a:xfrm>
+            <a:off x="548640" y="292608"/>
+            <a:ext cx="11094415" cy="228600"/>
+          </a:xfrm>
+          <a:prstGeom prst="rect">
+            <a:avLst/>
+          </a:prstGeom>
+          <a:noFill/>
+        </p:spPr>
+        <p:txBody>
+          <a:bodyPr wrap="square" lIns="0" rIns="0" tIns="0" bIns="0" anchor="t">
+            <a:spAutoFit/>
+          </a:bodyPr>
+          <a:lstStyle/>
+          <a:p>
+            <a:pPr algn="l">
+              <a:lnSpc>
+                <a:spcPct val="115000"/>
+              </a:lnSpc>
+              <a:spcAft>
+                <a:spcPts val="0"/>
+              </a:spcAft>
+            </a:pPr>
+            <a:r>
+              <a:rPr b="1" sz="950" i="0">
+                <a:solidFill>
+                  <a:srgbClr val="E8A33D"/>
+                </a:solidFill>
+                <a:latin typeface="Arial"/>
+              </a:rPr>
+              <a:t>SLIDE 3 · 01 · WHERE IT CAME FROM</a:t>
+            </a:r>
+          </a:p>
+        </p:txBody>
+      </p:sp>
+      <p:sp>
+        <p:nvSpPr>
+          <p:cNvPr id="4" name="TextBox 3"/>
+          <p:cNvSpPr txBox="1"/>
+          <p:nvPr/>
+        </p:nvSpPr>
+        <p:spPr>
+          <a:xfrm>
+            <a:off x="548640" y="530352"/>
+            <a:ext cx="11094415" cy="548640"/>
+          </a:xfrm>
+          <a:prstGeom prst="rect">
+            <a:avLst/>
+          </a:prstGeom>
+          <a:noFill/>
+        </p:spPr>
+        <p:txBody>
+          <a:bodyPr wrap="square" lIns="0" rIns="0" tIns="0" bIns="0" anchor="t">
+            <a:spAutoFit/>
+          </a:bodyPr>
+          <a:lstStyle/>
+          <a:p>
+            <a:pPr algn="l">
+              <a:lnSpc>
+                <a:spcPct val="115000"/>
+              </a:lnSpc>
+              <a:spcAft>
+                <a:spcPts val="0"/>
+              </a:spcAft>
+            </a:pPr>
+            <a:r>
+              <a:rPr b="1" sz="2800" i="0">
+                <a:solidFill>
+                  <a:srgbClr val="E6ECF7"/>
+                </a:solidFill>
+                <a:latin typeface="Georgia"/>
+              </a:rPr>
+              <a:t>The pull request was a request to integrate</a:t>
+            </a:r>
+          </a:p>
+        </p:txBody>
+      </p:sp>
+      <p:sp>
+        <p:nvSpPr>
+          <p:cNvPr id="5" name="Rectangle 4"/>
+          <p:cNvSpPr/>
+          <p:nvPr/>
+        </p:nvSpPr>
+        <p:spPr>
+          <a:xfrm>
+            <a:off x="548640" y="1115568"/>
+            <a:ext cx="1097280" cy="41148"/>
+          </a:xfrm>
+          <a:prstGeom prst="rect">
+            <a:avLst/>
+          </a:prstGeom>
+          <a:solidFill>
+            <a:srgbClr val="29D3E0"/>
+          </a:solidFill>
+          <a:ln>
+            <a:noFill/>
+          </a:ln>
+          <a:effectLst/>
+        </p:spPr>
+        <p:style>
+          <a:lnRef idx="1">
+            <a:schemeClr val="accent1"/>
+          </a:lnRef>
+          <a:fillRef idx="3">
+            <a:schemeClr val="accent1"/>
+          </a:fillRef>
+          <a:effectRef idx="2">
+            <a:schemeClr val="accent1"/>
+          </a:effectRef>
+          <a:fontRef idx="minor">
+            <a:schemeClr val="lt1"/>
+          </a:fontRef>
+        </p:style>
+        <p:txBody>
+          <a:bodyPr rtlCol="0" anchor="ctr"/>
+          <a:lstStyle/>
+          <a:p>
+            <a:pPr algn="ctr"/>
+          </a:p>
+        </p:txBody>
+      </p:sp>
+      <p:sp>
+        <p:nvSpPr>
+          <p:cNvPr id="6" name="TextBox 5"/>
+          <p:cNvSpPr txBox="1"/>
+          <p:nvPr/>
+        </p:nvSpPr>
+        <p:spPr>
+          <a:xfrm>
+            <a:off x="548640" y="6473952"/>
+            <a:ext cx="3657600" cy="228600"/>
+          </a:xfrm>
+          <a:prstGeom prst="rect">
+            <a:avLst/>
+          </a:prstGeom>
+          <a:noFill/>
+        </p:spPr>
+        <p:txBody>
+          <a:bodyPr wrap="square" lIns="0" rIns="0" tIns="0" bIns="0" anchor="t">
+            <a:spAutoFit/>
+          </a:bodyPr>
+          <a:lstStyle/>
+          <a:p>
+            <a:pPr algn="l">
+              <a:lnSpc>
+                <a:spcPct val="115000"/>
+              </a:lnSpc>
+              <a:spcAft>
+                <a:spcPts val="0"/>
+              </a:spcAft>
+            </a:pPr>
+            <a:r>
+              <a:rPr b="1" sz="950" i="0">
+                <a:solidFill>
+                  <a:srgbClr val="E6ECF7"/>
+                </a:solidFill>
+                <a:latin typeface="Arial"/>
+              </a:rPr>
+              <a:t>Build to Understand</a:t>
+            </a:r>
+          </a:p>
+        </p:txBody>
+      </p:sp>
+      <p:sp>
+        <p:nvSpPr>
+          <p:cNvPr id="7" name="TextBox 6"/>
+          <p:cNvSpPr txBox="1"/>
+          <p:nvPr/>
+        </p:nvSpPr>
+        <p:spPr>
+          <a:xfrm>
+            <a:off x="10728655" y="6473952"/>
+            <a:ext cx="914400" cy="228600"/>
+          </a:xfrm>
+          <a:prstGeom prst="rect">
+            <a:avLst/>
+          </a:prstGeom>
+          <a:noFill/>
+        </p:spPr>
+        <p:txBody>
+          <a:bodyPr wrap="square" lIns="0" rIns="0" tIns="0" bIns="0" anchor="t">
+            <a:spAutoFit/>
+          </a:bodyPr>
+          <a:lstStyle/>
+          <a:p>
+            <a:pPr algn="r">
+              <a:lnSpc>
+                <a:spcPct val="115000"/>
+              </a:lnSpc>
+              <a:spcAft>
+                <a:spcPts val="0"/>
+              </a:spcAft>
+            </a:pPr>
+            <a:r>
+              <a:rPr b="0" sz="950" i="0">
+                <a:solidFill>
+                  <a:srgbClr val="98A4BC"/>
+                </a:solidFill>
+                <a:latin typeface="Arial"/>
+              </a:rPr>
+              <a:t>3</a:t>
+            </a:r>
+          </a:p>
+        </p:txBody>
+      </p:sp>
+      <p:sp>
+        <p:nvSpPr>
+          <p:cNvPr id="8" name="Rectangle 7"/>
+          <p:cNvSpPr/>
+          <p:nvPr/>
+        </p:nvSpPr>
+        <p:spPr>
+          <a:xfrm>
+            <a:off x="548640" y="2286000"/>
+            <a:ext cx="11094415" cy="18288"/>
+          </a:xfrm>
+          <a:prstGeom prst="rect">
+            <a:avLst/>
+          </a:prstGeom>
+          <a:solidFill>
+            <a:srgbClr val="35415A"/>
+          </a:solidFill>
+          <a:ln>
+            <a:noFill/>
+          </a:ln>
+          <a:effectLst/>
+        </p:spPr>
+        <p:style>
+          <a:lnRef idx="1">
+            <a:schemeClr val="accent1"/>
+          </a:lnRef>
+          <a:fillRef idx="3">
+            <a:schemeClr val="accent1"/>
+          </a:fillRef>
+          <a:effectRef idx="2">
+            <a:schemeClr val="accent1"/>
+          </a:effectRef>
+          <a:fontRef idx="minor">
+            <a:schemeClr val="lt1"/>
+          </a:fontRef>
+        </p:style>
+        <p:txBody>
+          <a:bodyPr rtlCol="0" anchor="ctr"/>
+          <a:lstStyle/>
+          <a:p>
+            <a:pPr algn="ctr"/>
+          </a:p>
+        </p:txBody>
+      </p:sp>
+      <p:sp>
+        <p:nvSpPr>
+          <p:cNvPr id="9" name="Oval 8"/>
+          <p:cNvSpPr/>
+          <p:nvPr/>
+        </p:nvSpPr>
+        <p:spPr>
+          <a:xfrm>
+            <a:off x="548640" y="2212848"/>
+            <a:ext cx="164592" cy="164592"/>
+          </a:xfrm>
+          <a:prstGeom prst="ellipse">
+            <a:avLst/>
+          </a:prstGeom>
+          <a:solidFill>
+            <a:srgbClr val="29D3E0"/>
+          </a:solidFill>
+          <a:ln>
+            <a:noFill/>
+          </a:ln>
+          <a:effectLst/>
+        </p:spPr>
+        <p:style>
+          <a:lnRef idx="1">
+            <a:schemeClr val="accent1"/>
+          </a:lnRef>
+          <a:fillRef idx="3">
+            <a:schemeClr val="accent1"/>
+          </a:fillRef>
+          <a:effectRef idx="2">
+            <a:schemeClr val="accent1"/>
+          </a:effectRef>
+          <a:fontRef idx="minor">
+            <a:schemeClr val="lt1"/>
+          </a:fontRef>
+        </p:style>
+        <p:txBody>
+          <a:bodyPr rtlCol="0" anchor="ctr"/>
+          <a:lstStyle/>
+          <a:p>
+            <a:pPr algn="ctr"/>
+          </a:p>
+        </p:txBody>
+      </p:sp>
+      <p:sp>
+        <p:nvSpPr>
+          <p:cNvPr id="10" name="TextBox 9"/>
+          <p:cNvSpPr txBox="1"/>
+          <p:nvPr/>
+        </p:nvSpPr>
+        <p:spPr>
+          <a:xfrm>
+            <a:off x="804672" y="2176272"/>
+            <a:ext cx="2362123" cy="274320"/>
+          </a:xfrm>
+          <a:prstGeom prst="rect">
+            <a:avLst/>
+          </a:prstGeom>
+          <a:noFill/>
+        </p:spPr>
+        <p:txBody>
+          <a:bodyPr wrap="square" lIns="0" rIns="0" tIns="0" bIns="0" anchor="t">
+            <a:spAutoFit/>
+          </a:bodyPr>
+          <a:lstStyle/>
+          <a:p>
+            <a:pPr algn="l">
+              <a:lnSpc>
+                <a:spcPct val="115000"/>
+              </a:lnSpc>
+              <a:spcAft>
+                <a:spcPts val="0"/>
+              </a:spcAft>
+            </a:pPr>
+            <a:r>
+              <a:rPr b="1" sz="1560" i="0">
+                <a:solidFill>
+                  <a:srgbClr val="29D3E0"/>
+                </a:solidFill>
+                <a:latin typeface="Arial"/>
+              </a:rPr>
+              <a:t>2002</a:t>
+            </a:r>
+          </a:p>
+        </p:txBody>
+      </p:sp>
+      <p:sp>
+        <p:nvSpPr>
+          <p:cNvPr id="11" name="TextBox 10"/>
+          <p:cNvSpPr txBox="1"/>
+          <p:nvPr/>
+        </p:nvSpPr>
+        <p:spPr>
+          <a:xfrm>
+            <a:off x="548640" y="2560320"/>
+            <a:ext cx="2499283" cy="653796"/>
+          </a:xfrm>
+          <a:prstGeom prst="rect">
+            <a:avLst/>
+          </a:prstGeom>
+          <a:noFill/>
+        </p:spPr>
+        <p:txBody>
+          <a:bodyPr wrap="square" lIns="0" rIns="0" tIns="0" bIns="0" anchor="t">
+            <a:spAutoFit/>
+          </a:bodyPr>
+          <a:lstStyle/>
+          <a:p>
+            <a:pPr algn="l">
+              <a:lnSpc>
+                <a:spcPct val="120000"/>
+              </a:lnSpc>
+              <a:spcAft>
+                <a:spcPts val="0"/>
+              </a:spcAft>
+            </a:pPr>
+            <a:r>
+              <a:rPr b="0" sz="1430" i="0">
+                <a:solidFill>
+                  <a:srgbClr val="E6ECF7"/>
+                </a:solidFill>
+                <a:latin typeface="Arial"/>
+              </a:rPr>
+              <a:t>Kernel contributors publish a change and ask Linus to pull it</a:t>
+            </a:r>
+          </a:p>
+        </p:txBody>
+      </p:sp>
+      <p:sp>
+        <p:nvSpPr>
+          <p:cNvPr id="12" name="Oval 11"/>
+          <p:cNvSpPr/>
+          <p:nvPr/>
+        </p:nvSpPr>
+        <p:spPr>
+          <a:xfrm>
+            <a:off x="3367963" y="2212848"/>
+            <a:ext cx="164592" cy="164592"/>
+          </a:xfrm>
+          <a:prstGeom prst="ellipse">
+            <a:avLst/>
+          </a:prstGeom>
+          <a:solidFill>
+            <a:srgbClr val="E8A33D"/>
+          </a:solidFill>
+          <a:ln>
+            <a:noFill/>
+          </a:ln>
+          <a:effectLst/>
+        </p:spPr>
+        <p:style>
+          <a:lnRef idx="1">
+            <a:schemeClr val="accent1"/>
+          </a:lnRef>
+          <a:fillRef idx="3">
+            <a:schemeClr val="accent1"/>
+          </a:fillRef>
+          <a:effectRef idx="2">
+            <a:schemeClr val="accent1"/>
+          </a:effectRef>
+          <a:fontRef idx="minor">
+            <a:schemeClr val="lt1"/>
+          </a:fontRef>
+        </p:style>
+        <p:txBody>
+          <a:bodyPr rtlCol="0" anchor="ctr"/>
+          <a:lstStyle/>
+          <a:p>
+            <a:pPr algn="ctr"/>
+          </a:p>
+        </p:txBody>
+      </p:sp>
+      <p:sp>
+        <p:nvSpPr>
+          <p:cNvPr id="13" name="TextBox 12"/>
+          <p:cNvSpPr txBox="1"/>
+          <p:nvPr/>
+        </p:nvSpPr>
+        <p:spPr>
+          <a:xfrm>
+            <a:off x="3623995" y="2176272"/>
+            <a:ext cx="2362123" cy="274320"/>
+          </a:xfrm>
+          <a:prstGeom prst="rect">
+            <a:avLst/>
+          </a:prstGeom>
+          <a:noFill/>
+        </p:spPr>
+        <p:txBody>
+          <a:bodyPr wrap="square" lIns="0" rIns="0" tIns="0" bIns="0" anchor="t">
+            <a:spAutoFit/>
+          </a:bodyPr>
+          <a:lstStyle/>
+          <a:p>
+            <a:pPr algn="l">
+              <a:lnSpc>
+                <a:spcPct val="115000"/>
+              </a:lnSpc>
+              <a:spcAft>
+                <a:spcPts val="0"/>
+              </a:spcAft>
+            </a:pPr>
+            <a:r>
+              <a:rPr b="1" sz="1560" i="0">
+                <a:solidFill>
+                  <a:srgbClr val="E8A33D"/>
+                </a:solidFill>
+                <a:latin typeface="Arial"/>
+              </a:rPr>
+              <a:t>2008</a:t>
+            </a:r>
+          </a:p>
+        </p:txBody>
+      </p:sp>
+      <p:sp>
+        <p:nvSpPr>
+          <p:cNvPr id="14" name="TextBox 13"/>
+          <p:cNvSpPr txBox="1"/>
+          <p:nvPr/>
+        </p:nvSpPr>
+        <p:spPr>
+          <a:xfrm>
+            <a:off x="3367963" y="2560320"/>
+            <a:ext cx="2499283" cy="653796"/>
+          </a:xfrm>
+          <a:prstGeom prst="rect">
+            <a:avLst/>
+          </a:prstGeom>
+          <a:noFill/>
+        </p:spPr>
+        <p:txBody>
+          <a:bodyPr wrap="square" lIns="0" rIns="0" tIns="0" bIns="0" anchor="t">
+            <a:spAutoFit/>
+          </a:bodyPr>
+          <a:lstStyle/>
+          <a:p>
+            <a:pPr algn="l">
+              <a:lnSpc>
+                <a:spcPct val="120000"/>
+              </a:lnSpc>
+              <a:spcAft>
+                <a:spcPts val="0"/>
+              </a:spcAft>
+            </a:pPr>
+            <a:r>
+              <a:rPr b="0" sz="1430" i="0">
+                <a:solidFill>
+                  <a:srgbClr val="E6ECF7"/>
+                </a:solidFill>
+                <a:latin typeface="Arial"/>
+              </a:rPr>
+              <a:t>GitHub makes the pull request a feature</a:t>
+            </a:r>
+          </a:p>
+        </p:txBody>
+      </p:sp>
+      <p:sp>
+        <p:nvSpPr>
+          <p:cNvPr id="15" name="Oval 14"/>
+          <p:cNvSpPr/>
+          <p:nvPr/>
+        </p:nvSpPr>
+        <p:spPr>
+          <a:xfrm>
+            <a:off x="6187287" y="2212848"/>
+            <a:ext cx="164592" cy="164592"/>
+          </a:xfrm>
+          <a:prstGeom prst="ellipse">
+            <a:avLst/>
+          </a:prstGeom>
+          <a:solidFill>
+            <a:srgbClr val="29D3E0"/>
+          </a:solidFill>
+          <a:ln>
+            <a:noFill/>
+          </a:ln>
+          <a:effectLst/>
+        </p:spPr>
+        <p:style>
+          <a:lnRef idx="1">
+            <a:schemeClr val="accent1"/>
+          </a:lnRef>
+          <a:fillRef idx="3">
+            <a:schemeClr val="accent1"/>
+          </a:fillRef>
+          <a:effectRef idx="2">
+            <a:schemeClr val="accent1"/>
+          </a:effectRef>
+          <a:fontRef idx="minor">
+            <a:schemeClr val="lt1"/>
+          </a:fontRef>
+        </p:style>
+        <p:txBody>
+          <a:bodyPr rtlCol="0" anchor="ctr"/>
+          <a:lstStyle/>
+          <a:p>
+            <a:pPr algn="ctr"/>
+          </a:p>
+        </p:txBody>
+      </p:sp>
+      <p:sp>
+        <p:nvSpPr>
+          <p:cNvPr id="16" name="TextBox 15"/>
+          <p:cNvSpPr txBox="1"/>
+          <p:nvPr/>
+        </p:nvSpPr>
+        <p:spPr>
+          <a:xfrm>
+            <a:off x="6443319" y="2176272"/>
+            <a:ext cx="2362123" cy="274320"/>
+          </a:xfrm>
+          <a:prstGeom prst="rect">
+            <a:avLst/>
+          </a:prstGeom>
+          <a:noFill/>
+        </p:spPr>
+        <p:txBody>
+          <a:bodyPr wrap="square" lIns="0" rIns="0" tIns="0" bIns="0" anchor="t">
+            <a:spAutoFit/>
+          </a:bodyPr>
+          <a:lstStyle/>
+          <a:p>
+            <a:pPr algn="l">
+              <a:lnSpc>
+                <a:spcPct val="115000"/>
+              </a:lnSpc>
+              <a:spcAft>
+                <a:spcPts val="0"/>
+              </a:spcAft>
+            </a:pPr>
+            <a:r>
+              <a:rPr b="1" sz="1560" i="0">
+                <a:solidFill>
+                  <a:srgbClr val="29D3E0"/>
+                </a:solidFill>
+                <a:latin typeface="Arial"/>
+              </a:rPr>
+              <a:t>2010</a:t>
+            </a:r>
+          </a:p>
+        </p:txBody>
+      </p:sp>
+      <p:sp>
+        <p:nvSpPr>
+          <p:cNvPr id="17" name="TextBox 16"/>
+          <p:cNvSpPr txBox="1"/>
+          <p:nvPr/>
+        </p:nvSpPr>
+        <p:spPr>
+          <a:xfrm>
+            <a:off x="6187287" y="2560320"/>
+            <a:ext cx="2499283" cy="653796"/>
+          </a:xfrm>
+          <a:prstGeom prst="rect">
+            <a:avLst/>
+          </a:prstGeom>
+          <a:noFill/>
+        </p:spPr>
+        <p:txBody>
+          <a:bodyPr wrap="square" lIns="0" rIns="0" tIns="0" bIns="0" anchor="t">
+            <a:spAutoFit/>
+          </a:bodyPr>
+          <a:lstStyle/>
+          <a:p>
+            <a:pPr algn="l">
+              <a:lnSpc>
+                <a:spcPct val="120000"/>
+              </a:lnSpc>
+              <a:spcAft>
+                <a:spcPts val="0"/>
+              </a:spcAft>
+            </a:pPr>
+            <a:r>
+              <a:rPr b="0" sz="1430" i="0">
+                <a:solidFill>
+                  <a:srgbClr val="E6ECF7"/>
+                </a:solidFill>
+                <a:latin typeface="Arial"/>
+              </a:rPr>
+              <a:t>Pull requests between branches of one repository</a:t>
+            </a:r>
+          </a:p>
+        </p:txBody>
+      </p:sp>
+      <p:sp>
+        <p:nvSpPr>
+          <p:cNvPr id="18" name="Oval 17"/>
+          <p:cNvSpPr/>
+          <p:nvPr/>
+        </p:nvSpPr>
+        <p:spPr>
+          <a:xfrm>
+            <a:off x="9006611" y="2212848"/>
+            <a:ext cx="164592" cy="164592"/>
+          </a:xfrm>
+          <a:prstGeom prst="ellipse">
+            <a:avLst/>
+          </a:prstGeom>
+          <a:solidFill>
+            <a:srgbClr val="E8A33D"/>
+          </a:solidFill>
+          <a:ln>
+            <a:noFill/>
+          </a:ln>
+          <a:effectLst/>
+        </p:spPr>
+        <p:style>
+          <a:lnRef idx="1">
+            <a:schemeClr val="accent1"/>
+          </a:lnRef>
+          <a:fillRef idx="3">
+            <a:schemeClr val="accent1"/>
+          </a:fillRef>
+          <a:effectRef idx="2">
+            <a:schemeClr val="accent1"/>
+          </a:effectRef>
+          <a:fontRef idx="minor">
+            <a:schemeClr val="lt1"/>
+          </a:fontRef>
+        </p:style>
+        <p:txBody>
+          <a:bodyPr rtlCol="0" anchor="ctr"/>
+          <a:lstStyle/>
+          <a:p>
+            <a:pPr algn="ctr"/>
+          </a:p>
+        </p:txBody>
+      </p:sp>
+      <p:sp>
+        <p:nvSpPr>
+          <p:cNvPr id="19" name="TextBox 18"/>
+          <p:cNvSpPr txBox="1"/>
+          <p:nvPr/>
+        </p:nvSpPr>
+        <p:spPr>
+          <a:xfrm>
+            <a:off x="9262643" y="2176272"/>
+            <a:ext cx="2362123" cy="274320"/>
+          </a:xfrm>
+          <a:prstGeom prst="rect">
+            <a:avLst/>
+          </a:prstGeom>
+          <a:noFill/>
+        </p:spPr>
+        <p:txBody>
+          <a:bodyPr wrap="square" lIns="0" rIns="0" tIns="0" bIns="0" anchor="t">
+            <a:spAutoFit/>
+          </a:bodyPr>
+          <a:lstStyle/>
+          <a:p>
+            <a:pPr algn="l">
+              <a:lnSpc>
+                <a:spcPct val="115000"/>
+              </a:lnSpc>
+              <a:spcAft>
+                <a:spcPts val="0"/>
+              </a:spcAft>
+            </a:pPr>
+            <a:r>
+              <a:rPr b="1" sz="1560" i="0">
+                <a:solidFill>
+                  <a:srgbClr val="E8A33D"/>
+                </a:solidFill>
+                <a:latin typeface="Arial"/>
+              </a:rPr>
+              <a:t>2011–2017</a:t>
+            </a:r>
+          </a:p>
+        </p:txBody>
+      </p:sp>
+      <p:sp>
+        <p:nvSpPr>
+          <p:cNvPr id="20" name="TextBox 19"/>
+          <p:cNvSpPr txBox="1"/>
+          <p:nvPr/>
+        </p:nvSpPr>
+        <p:spPr>
+          <a:xfrm>
+            <a:off x="9006611" y="2560320"/>
+            <a:ext cx="2499283" cy="653796"/>
+          </a:xfrm>
+          <a:prstGeom prst="rect">
+            <a:avLst/>
+          </a:prstGeom>
+          <a:noFill/>
+        </p:spPr>
+        <p:txBody>
+          <a:bodyPr wrap="square" lIns="0" rIns="0" tIns="0" bIns="0" anchor="t">
+            <a:spAutoFit/>
+          </a:bodyPr>
+          <a:lstStyle/>
+          <a:p>
+            <a:pPr algn="l">
+              <a:lnSpc>
+                <a:spcPct val="120000"/>
+              </a:lnSpc>
+              <a:spcAft>
+                <a:spcPts val="0"/>
+              </a:spcAft>
+            </a:pPr>
+            <a:r>
+              <a:rPr b="0" sz="1430" i="0">
+                <a:solidFill>
+                  <a:srgbClr val="E6ECF7"/>
+                </a:solidFill>
+                <a:latin typeface="Arial"/>
+              </a:rPr>
+              <a:t>Merge button, protected branches, required reviews, code owners</a:t>
+            </a:r>
+          </a:p>
+        </p:txBody>
+      </p:sp>
+      <p:sp>
+        <p:nvSpPr>
+          <p:cNvPr id="21" name="Rectangle 20"/>
+          <p:cNvSpPr/>
+          <p:nvPr/>
+        </p:nvSpPr>
+        <p:spPr>
+          <a:xfrm>
+            <a:off x="548640" y="3899915"/>
+            <a:ext cx="54864" cy="746861"/>
+          </a:xfrm>
+          <a:prstGeom prst="rect">
+            <a:avLst/>
+          </a:prstGeom>
+          <a:solidFill>
+            <a:srgbClr val="29D3E0"/>
+          </a:solidFill>
+          <a:ln>
+            <a:noFill/>
+          </a:ln>
+          <a:effectLst/>
+        </p:spPr>
+        <p:style>
+          <a:lnRef idx="1">
+            <a:schemeClr val="accent1"/>
+          </a:lnRef>
+          <a:fillRef idx="3">
+            <a:schemeClr val="accent1"/>
+          </a:fillRef>
+          <a:effectRef idx="2">
+            <a:schemeClr val="accent1"/>
+          </a:effectRef>
+          <a:fontRef idx="minor">
+            <a:schemeClr val="lt1"/>
+          </a:fontRef>
+        </p:style>
+        <p:txBody>
+          <a:bodyPr rtlCol="0" anchor="ctr"/>
+          <a:lstStyle/>
+          <a:p>
+            <a:pPr algn="ctr"/>
+          </a:p>
+        </p:txBody>
+      </p:sp>
+      <p:sp>
+        <p:nvSpPr>
+          <p:cNvPr id="22" name="TextBox 21"/>
+          <p:cNvSpPr txBox="1"/>
+          <p:nvPr/>
+        </p:nvSpPr>
+        <p:spPr>
+          <a:xfrm>
+            <a:off x="822959" y="3991355"/>
+            <a:ext cx="10682935" cy="563981"/>
+          </a:xfrm>
+          <a:prstGeom prst="rect">
+            <a:avLst/>
+          </a:prstGeom>
+          <a:noFill/>
+        </p:spPr>
+        <p:txBody>
+          <a:bodyPr wrap="square" lIns="0" rIns="0" tIns="0" bIns="0" anchor="ctr">
+            <a:spAutoFit/>
+          </a:bodyPr>
+          <a:lstStyle/>
+          <a:p>
+            <a:pPr algn="l">
+              <a:lnSpc>
+                <a:spcPct val="115000"/>
+              </a:lnSpc>
+              <a:spcAft>
+                <a:spcPts val="0"/>
+              </a:spcAft>
+            </a:pPr>
+            <a:r>
+              <a:rPr b="1" sz="1820" i="0">
+                <a:solidFill>
+                  <a:srgbClr val="E6ECF7"/>
+                </a:solidFill>
+                <a:latin typeface="Arial"/>
+              </a:rPr>
+              <a:t>Writing a change and accepting it were separate acts from the start. That was how the work was divided, not a control. The approval rules came later, on top.</a:t>
+            </a:r>
+          </a:p>
+        </p:txBody>
+      </p:sp>
+    </p:spTree>
+  </p:cSld>
+  <p:clrMapOvr>
+    <a:masterClrMapping/>
+  </p:clrMapOvr>
+</p:sld>
+</file>
+
+<file path=ppt/slides/slide30.xml><?xml version="1.0" encoding="utf-8"?>
+<p:sld xmlns:a="http://schemas.openxmlformats.org/drawingml/2006/main" xmlns:p="http://schemas.openxmlformats.org/presentationml/2006/main" xmlns:r="http://schemas.openxmlformats.org/officeDocument/2006/relationships">
+  <p:cSld>
+    <p:spTree>
+      <p:nvGrpSpPr>
+        <p:cNvPr id="1" name=""/>
+        <p:cNvGrpSpPr/>
+        <p:nvPr/>
+      </p:nvGrpSpPr>
+      <p:grpSpPr/>
+      <p:sp>
+        <p:nvSpPr>
+          <p:cNvPr id="2" name="Rectangle 1"/>
+          <p:cNvSpPr/>
+          <p:nvPr/>
+        </p:nvSpPr>
+        <p:spPr>
+          <a:xfrm>
+            <a:off x="0" y="0"/>
+            <a:ext cx="12191695" cy="6858000"/>
+          </a:xfrm>
+          <a:prstGeom prst="rect">
+            <a:avLst/>
+          </a:prstGeom>
+          <a:solidFill>
+            <a:srgbClr val="0E1420"/>
+          </a:solidFill>
+          <a:ln>
+            <a:noFill/>
+          </a:ln>
+          <a:effectLst/>
+        </p:spPr>
+        <p:style>
+          <a:lnRef idx="1">
+            <a:schemeClr val="accent1"/>
+          </a:lnRef>
+          <a:fillRef idx="3">
+            <a:schemeClr val="accent1"/>
+          </a:fillRef>
+          <a:effectRef idx="2">
+            <a:schemeClr val="accent1"/>
+          </a:effectRef>
+          <a:fontRef idx="minor">
+            <a:schemeClr val="lt1"/>
+          </a:fontRef>
+        </p:style>
+        <p:txBody>
+          <a:bodyPr rtlCol="0" anchor="ctr"/>
+          <a:lstStyle/>
+          <a:p>
+            <a:pPr algn="ctr"/>
+          </a:p>
+        </p:txBody>
+      </p:sp>
+      <p:sp>
+        <p:nvSpPr>
+          <p:cNvPr id="3" name="TextBox 2"/>
+          <p:cNvSpPr txBox="1"/>
+          <p:nvPr/>
+        </p:nvSpPr>
+        <p:spPr>
+          <a:xfrm>
+            <a:off x="548640" y="292608"/>
+            <a:ext cx="11094415" cy="228600"/>
+          </a:xfrm>
+          <a:prstGeom prst="rect">
+            <a:avLst/>
+          </a:prstGeom>
+          <a:noFill/>
+        </p:spPr>
+        <p:txBody>
+          <a:bodyPr wrap="square" lIns="0" rIns="0" tIns="0" bIns="0" anchor="t">
+            <a:spAutoFit/>
+          </a:bodyPr>
+          <a:lstStyle/>
+          <a:p>
+            <a:pPr algn="l">
+              <a:lnSpc>
+                <a:spcPct val="115000"/>
+              </a:lnSpc>
+              <a:spcAft>
+                <a:spcPts val="0"/>
+              </a:spcAft>
+            </a:pPr>
+            <a:r>
+              <a:rPr b="1" sz="950" i="0">
+                <a:solidFill>
+                  <a:srgbClr val="29D3E0"/>
+                </a:solidFill>
+                <a:latin typeface="Arial"/>
+              </a:rPr>
+              <a:t>SLIDE 30 · APPENDIX A1</a:t>
+            </a:r>
+          </a:p>
+        </p:txBody>
+      </p:sp>
+      <p:sp>
+        <p:nvSpPr>
+          <p:cNvPr id="4" name="TextBox 3"/>
+          <p:cNvSpPr txBox="1"/>
+          <p:nvPr/>
+        </p:nvSpPr>
+        <p:spPr>
+          <a:xfrm>
+            <a:off x="548640" y="530352"/>
+            <a:ext cx="11094415" cy="548640"/>
+          </a:xfrm>
+          <a:prstGeom prst="rect">
+            <a:avLst/>
+          </a:prstGeom>
+          <a:noFill/>
+        </p:spPr>
+        <p:txBody>
+          <a:bodyPr wrap="square" lIns="0" rIns="0" tIns="0" bIns="0" anchor="t">
+            <a:spAutoFit/>
+          </a:bodyPr>
+          <a:lstStyle/>
+          <a:p>
+            <a:pPr algn="l">
+              <a:lnSpc>
+                <a:spcPct val="115000"/>
+              </a:lnSpc>
+              <a:spcAft>
+                <a:spcPts val="0"/>
+              </a:spcAft>
+            </a:pPr>
+            <a:r>
+              <a:rPr b="1" sz="2800" i="0">
+                <a:solidFill>
+                  <a:srgbClr val="E6ECF7"/>
+                </a:solidFill>
+                <a:latin typeface="Georgia"/>
+              </a:rPr>
+              <a:t>A1 — Who did what about the queue</a:t>
+            </a:r>
+          </a:p>
+        </p:txBody>
+      </p:sp>
+      <p:sp>
+        <p:nvSpPr>
+          <p:cNvPr id="5" name="Rectangle 4"/>
+          <p:cNvSpPr/>
+          <p:nvPr/>
+        </p:nvSpPr>
+        <p:spPr>
+          <a:xfrm>
+            <a:off x="548640" y="1115568"/>
+            <a:ext cx="1097280" cy="41148"/>
+          </a:xfrm>
+          <a:prstGeom prst="rect">
+            <a:avLst/>
+          </a:prstGeom>
+          <a:solidFill>
+            <a:srgbClr val="29D3E0"/>
+          </a:solidFill>
+          <a:ln>
+            <a:noFill/>
+          </a:ln>
+          <a:effectLst/>
+        </p:spPr>
+        <p:style>
+          <a:lnRef idx="1">
+            <a:schemeClr val="accent1"/>
+          </a:lnRef>
+          <a:fillRef idx="3">
+            <a:schemeClr val="accent1"/>
+          </a:fillRef>
+          <a:effectRef idx="2">
+            <a:schemeClr val="accent1"/>
+          </a:effectRef>
+          <a:fontRef idx="minor">
+            <a:schemeClr val="lt1"/>
+          </a:fontRef>
+        </p:style>
+        <p:txBody>
+          <a:bodyPr rtlCol="0" anchor="ctr"/>
+          <a:lstStyle/>
+          <a:p>
+            <a:pPr algn="ctr"/>
+          </a:p>
+        </p:txBody>
+      </p:sp>
+      <p:sp>
+        <p:nvSpPr>
+          <p:cNvPr id="6" name="TextBox 5"/>
+          <p:cNvSpPr txBox="1"/>
+          <p:nvPr/>
+        </p:nvSpPr>
+        <p:spPr>
+          <a:xfrm>
+            <a:off x="548640" y="6473952"/>
+            <a:ext cx="3657600" cy="228600"/>
+          </a:xfrm>
+          <a:prstGeom prst="rect">
+            <a:avLst/>
+          </a:prstGeom>
+          <a:noFill/>
+        </p:spPr>
+        <p:txBody>
+          <a:bodyPr wrap="square" lIns="0" rIns="0" tIns="0" bIns="0" anchor="t">
+            <a:spAutoFit/>
+          </a:bodyPr>
+          <a:lstStyle/>
+          <a:p>
+            <a:pPr algn="l">
+              <a:lnSpc>
+                <a:spcPct val="115000"/>
+              </a:lnSpc>
+              <a:spcAft>
+                <a:spcPts val="0"/>
+              </a:spcAft>
+            </a:pPr>
+            <a:r>
+              <a:rPr b="1" sz="950" i="0">
+                <a:solidFill>
+                  <a:srgbClr val="E6ECF7"/>
+                </a:solidFill>
+                <a:latin typeface="Arial"/>
+              </a:rPr>
+              <a:t>Build to Understand</a:t>
+            </a:r>
+          </a:p>
+        </p:txBody>
+      </p:sp>
+      <p:sp>
+        <p:nvSpPr>
+          <p:cNvPr id="7" name="TextBox 6"/>
+          <p:cNvSpPr txBox="1"/>
+          <p:nvPr/>
+        </p:nvSpPr>
+        <p:spPr>
+          <a:xfrm>
+            <a:off x="10728655" y="6473952"/>
+            <a:ext cx="914400" cy="228600"/>
+          </a:xfrm>
+          <a:prstGeom prst="rect">
+            <a:avLst/>
+          </a:prstGeom>
+          <a:noFill/>
+        </p:spPr>
+        <p:txBody>
+          <a:bodyPr wrap="square" lIns="0" rIns="0" tIns="0" bIns="0" anchor="t">
+            <a:spAutoFit/>
+          </a:bodyPr>
+          <a:lstStyle/>
+          <a:p>
+            <a:pPr algn="r">
+              <a:lnSpc>
+                <a:spcPct val="115000"/>
+              </a:lnSpc>
+              <a:spcAft>
+                <a:spcPts val="0"/>
+              </a:spcAft>
+            </a:pPr>
+            <a:r>
+              <a:rPr b="0" sz="950" i="0">
+                <a:solidFill>
+                  <a:srgbClr val="98A4BC"/>
+                </a:solidFill>
+                <a:latin typeface="Arial"/>
+              </a:rPr>
+              <a:t>30</a:t>
             </a:r>
           </a:p>
         </p:txBody>
@@ -20604,7 +25859,7 @@
 </p:sld>
 </file>
 
-<file path=ppt/slides/slide26.xml><?xml version="1.0" encoding="utf-8"?>
+<file path=ppt/slides/slide31.xml><?xml version="1.0" encoding="utf-8"?>
 <p:sld xmlns:a="http://schemas.openxmlformats.org/drawingml/2006/main" xmlns:p="http://schemas.openxmlformats.org/presentationml/2006/main" xmlns:r="http://schemas.openxmlformats.org/officeDocument/2006/relationships">
   <p:cSld>
     <p:spTree>
@@ -20691,11 +25946,11 @@
             <a:r>
               <a:rPr b="1" sz="950" i="0">
                 <a:solidFill>
-                  <a:srgbClr val="29D3E0"/>
+                  <a:srgbClr val="E8A33D"/>
                 </a:solidFill>
                 <a:latin typeface="Arial"/>
               </a:rPr>
-              <a:t>SLIDE 26 · APPENDIX A2</a:t>
+              <a:t>SLIDE 31 · APPENDIX A2</a:t>
             </a:r>
           </a:p>
         </p:txBody>
@@ -20865,7 +26120,7 @@
                 </a:solidFill>
                 <a:latin typeface="Arial"/>
               </a:rPr>
-              <a:t>26</a:t>
+              <a:t>31</a:t>
             </a:r>
           </a:p>
         </p:txBody>
@@ -21170,7 +26425,7 @@
 </p:sld>
 </file>
 
-<file path=ppt/slides/slide27.xml><?xml version="1.0" encoding="utf-8"?>
+<file path=ppt/slides/slide32.xml><?xml version="1.0" encoding="utf-8"?>
 <p:sld xmlns:a="http://schemas.openxmlformats.org/drawingml/2006/main" xmlns:p="http://schemas.openxmlformats.org/presentationml/2006/main" xmlns:r="http://schemas.openxmlformats.org/officeDocument/2006/relationships">
   <p:cSld>
     <p:spTree>
@@ -21257,11 +26512,11 @@
             <a:r>
               <a:rPr b="1" sz="950" i="0">
                 <a:solidFill>
-                  <a:srgbClr val="E8A33D"/>
+                  <a:srgbClr val="29D3E0"/>
                 </a:solidFill>
                 <a:latin typeface="Arial"/>
               </a:rPr>
-              <a:t>SLIDE 27 · APPENDIX A3</a:t>
+              <a:t>SLIDE 32 · APPENDIX A3</a:t>
             </a:r>
           </a:p>
         </p:txBody>
@@ -21431,7 +26686,7 @@
                 </a:solidFill>
                 <a:latin typeface="Arial"/>
               </a:rPr>
-              <a:t>27</a:t>
+              <a:t>32</a:t>
             </a:r>
           </a:p>
         </p:txBody>
@@ -22592,7 +27847,7 @@
 </p:sld>
 </file>
 
-<file path=ppt/slides/slide28.xml><?xml version="1.0" encoding="utf-8"?>
+<file path=ppt/slides/slide33.xml><?xml version="1.0" encoding="utf-8"?>
 <p:sld xmlns:a="http://schemas.openxmlformats.org/drawingml/2006/main" xmlns:p="http://schemas.openxmlformats.org/presentationml/2006/main" xmlns:r="http://schemas.openxmlformats.org/officeDocument/2006/relationships">
   <p:cSld>
     <p:spTree>
@@ -22679,11 +27934,11 @@
             <a:r>
               <a:rPr b="1" sz="950" i="0">
                 <a:solidFill>
-                  <a:srgbClr val="29D3E0"/>
+                  <a:srgbClr val="E8A33D"/>
                 </a:solidFill>
                 <a:latin typeface="Arial"/>
               </a:rPr>
-              <a:t>SLIDE 28 · APPENDIX A4</a:t>
+              <a:t>SLIDE 33 · APPENDIX A4</a:t>
             </a:r>
           </a:p>
         </p:txBody>
@@ -22853,7 +28108,7 @@
                 </a:solidFill>
                 <a:latin typeface="Arial"/>
               </a:rPr>
-              <a:t>28</a:t>
+              <a:t>33</a:t>
             </a:r>
           </a:p>
         </p:txBody>
@@ -23542,922 +28797,6 @@
           </a:graphicData>
         </a:graphic>
       </p:graphicFrame>
-    </p:spTree>
-  </p:cSld>
-  <p:clrMapOvr>
-    <a:masterClrMapping/>
-  </p:clrMapOvr>
-</p:sld>
-</file>
-
-<file path=ppt/slides/slide3.xml><?xml version="1.0" encoding="utf-8"?>
-<p:sld xmlns:a="http://schemas.openxmlformats.org/drawingml/2006/main" xmlns:p="http://schemas.openxmlformats.org/presentationml/2006/main" xmlns:r="http://schemas.openxmlformats.org/officeDocument/2006/relationships">
-  <p:cSld>
-    <p:spTree>
-      <p:nvGrpSpPr>
-        <p:cNvPr id="1" name=""/>
-        <p:cNvGrpSpPr/>
-        <p:nvPr/>
-      </p:nvGrpSpPr>
-      <p:grpSpPr/>
-      <p:sp>
-        <p:nvSpPr>
-          <p:cNvPr id="2" name="Rectangle 1"/>
-          <p:cNvSpPr/>
-          <p:nvPr/>
-        </p:nvSpPr>
-        <p:spPr>
-          <a:xfrm>
-            <a:off x="0" y="0"/>
-            <a:ext cx="12191695" cy="6858000"/>
-          </a:xfrm>
-          <a:prstGeom prst="rect">
-            <a:avLst/>
-          </a:prstGeom>
-          <a:solidFill>
-            <a:srgbClr val="0E1420"/>
-          </a:solidFill>
-          <a:ln>
-            <a:noFill/>
-          </a:ln>
-          <a:effectLst/>
-        </p:spPr>
-        <p:style>
-          <a:lnRef idx="1">
-            <a:schemeClr val="accent1"/>
-          </a:lnRef>
-          <a:fillRef idx="3">
-            <a:schemeClr val="accent1"/>
-          </a:fillRef>
-          <a:effectRef idx="2">
-            <a:schemeClr val="accent1"/>
-          </a:effectRef>
-          <a:fontRef idx="minor">
-            <a:schemeClr val="lt1"/>
-          </a:fontRef>
-        </p:style>
-        <p:txBody>
-          <a:bodyPr rtlCol="0" anchor="ctr"/>
-          <a:lstStyle/>
-          <a:p>
-            <a:pPr algn="ctr"/>
-          </a:p>
-        </p:txBody>
-      </p:sp>
-      <p:sp>
-        <p:nvSpPr>
-          <p:cNvPr id="3" name="TextBox 2"/>
-          <p:cNvSpPr txBox="1"/>
-          <p:nvPr/>
-        </p:nvSpPr>
-        <p:spPr>
-          <a:xfrm>
-            <a:off x="548640" y="292608"/>
-            <a:ext cx="11094415" cy="228600"/>
-          </a:xfrm>
-          <a:prstGeom prst="rect">
-            <a:avLst/>
-          </a:prstGeom>
-          <a:noFill/>
-        </p:spPr>
-        <p:txBody>
-          <a:bodyPr wrap="square" lIns="0" rIns="0" tIns="0" bIns="0" anchor="t">
-            <a:spAutoFit/>
-          </a:bodyPr>
-          <a:lstStyle/>
-          <a:p>
-            <a:pPr algn="l">
-              <a:lnSpc>
-                <a:spcPct val="115000"/>
-              </a:lnSpc>
-              <a:spcAft>
-                <a:spcPts val="0"/>
-              </a:spcAft>
-            </a:pPr>
-            <a:r>
-              <a:rPr b="1" sz="950" i="0">
-                <a:solidFill>
-                  <a:srgbClr val="E8A33D"/>
-                </a:solidFill>
-                <a:latin typeface="Arial"/>
-              </a:rPr>
-              <a:t>SLIDE 3 · 01 · WHERE IT CAME FROM</a:t>
-            </a:r>
-          </a:p>
-        </p:txBody>
-      </p:sp>
-      <p:sp>
-        <p:nvSpPr>
-          <p:cNvPr id="4" name="TextBox 3"/>
-          <p:cNvSpPr txBox="1"/>
-          <p:nvPr/>
-        </p:nvSpPr>
-        <p:spPr>
-          <a:xfrm>
-            <a:off x="548640" y="530352"/>
-            <a:ext cx="11094415" cy="548640"/>
-          </a:xfrm>
-          <a:prstGeom prst="rect">
-            <a:avLst/>
-          </a:prstGeom>
-          <a:noFill/>
-        </p:spPr>
-        <p:txBody>
-          <a:bodyPr wrap="square" lIns="0" rIns="0" tIns="0" bIns="0" anchor="t">
-            <a:spAutoFit/>
-          </a:bodyPr>
-          <a:lstStyle/>
-          <a:p>
-            <a:pPr algn="l">
-              <a:lnSpc>
-                <a:spcPct val="115000"/>
-              </a:lnSpc>
-              <a:spcAft>
-                <a:spcPts val="0"/>
-              </a:spcAft>
-            </a:pPr>
-            <a:r>
-              <a:rPr b="1" sz="2800" i="0">
-                <a:solidFill>
-                  <a:srgbClr val="E6ECF7"/>
-                </a:solidFill>
-                <a:latin typeface="Georgia"/>
-              </a:rPr>
-              <a:t>The pull request was a request to integrate</a:t>
-            </a:r>
-          </a:p>
-        </p:txBody>
-      </p:sp>
-      <p:sp>
-        <p:nvSpPr>
-          <p:cNvPr id="5" name="Rectangle 4"/>
-          <p:cNvSpPr/>
-          <p:nvPr/>
-        </p:nvSpPr>
-        <p:spPr>
-          <a:xfrm>
-            <a:off x="548640" y="1115568"/>
-            <a:ext cx="1097280" cy="41148"/>
-          </a:xfrm>
-          <a:prstGeom prst="rect">
-            <a:avLst/>
-          </a:prstGeom>
-          <a:solidFill>
-            <a:srgbClr val="29D3E0"/>
-          </a:solidFill>
-          <a:ln>
-            <a:noFill/>
-          </a:ln>
-          <a:effectLst/>
-        </p:spPr>
-        <p:style>
-          <a:lnRef idx="1">
-            <a:schemeClr val="accent1"/>
-          </a:lnRef>
-          <a:fillRef idx="3">
-            <a:schemeClr val="accent1"/>
-          </a:fillRef>
-          <a:effectRef idx="2">
-            <a:schemeClr val="accent1"/>
-          </a:effectRef>
-          <a:fontRef idx="minor">
-            <a:schemeClr val="lt1"/>
-          </a:fontRef>
-        </p:style>
-        <p:txBody>
-          <a:bodyPr rtlCol="0" anchor="ctr"/>
-          <a:lstStyle/>
-          <a:p>
-            <a:pPr algn="ctr"/>
-          </a:p>
-        </p:txBody>
-      </p:sp>
-      <p:sp>
-        <p:nvSpPr>
-          <p:cNvPr id="6" name="TextBox 5"/>
-          <p:cNvSpPr txBox="1"/>
-          <p:nvPr/>
-        </p:nvSpPr>
-        <p:spPr>
-          <a:xfrm>
-            <a:off x="548640" y="6473952"/>
-            <a:ext cx="3657600" cy="228600"/>
-          </a:xfrm>
-          <a:prstGeom prst="rect">
-            <a:avLst/>
-          </a:prstGeom>
-          <a:noFill/>
-        </p:spPr>
-        <p:txBody>
-          <a:bodyPr wrap="square" lIns="0" rIns="0" tIns="0" bIns="0" anchor="t">
-            <a:spAutoFit/>
-          </a:bodyPr>
-          <a:lstStyle/>
-          <a:p>
-            <a:pPr algn="l">
-              <a:lnSpc>
-                <a:spcPct val="115000"/>
-              </a:lnSpc>
-              <a:spcAft>
-                <a:spcPts val="0"/>
-              </a:spcAft>
-            </a:pPr>
-            <a:r>
-              <a:rPr b="1" sz="950" i="0">
-                <a:solidFill>
-                  <a:srgbClr val="E6ECF7"/>
-                </a:solidFill>
-                <a:latin typeface="Arial"/>
-              </a:rPr>
-              <a:t>Build to Understand</a:t>
-            </a:r>
-          </a:p>
-        </p:txBody>
-      </p:sp>
-      <p:sp>
-        <p:nvSpPr>
-          <p:cNvPr id="7" name="TextBox 6"/>
-          <p:cNvSpPr txBox="1"/>
-          <p:nvPr/>
-        </p:nvSpPr>
-        <p:spPr>
-          <a:xfrm>
-            <a:off x="10728655" y="6473952"/>
-            <a:ext cx="914400" cy="228600"/>
-          </a:xfrm>
-          <a:prstGeom prst="rect">
-            <a:avLst/>
-          </a:prstGeom>
-          <a:noFill/>
-        </p:spPr>
-        <p:txBody>
-          <a:bodyPr wrap="square" lIns="0" rIns="0" tIns="0" bIns="0" anchor="t">
-            <a:spAutoFit/>
-          </a:bodyPr>
-          <a:lstStyle/>
-          <a:p>
-            <a:pPr algn="r">
-              <a:lnSpc>
-                <a:spcPct val="115000"/>
-              </a:lnSpc>
-              <a:spcAft>
-                <a:spcPts val="0"/>
-              </a:spcAft>
-            </a:pPr>
-            <a:r>
-              <a:rPr b="0" sz="950" i="0">
-                <a:solidFill>
-                  <a:srgbClr val="98A4BC"/>
-                </a:solidFill>
-                <a:latin typeface="Arial"/>
-              </a:rPr>
-              <a:t>3</a:t>
-            </a:r>
-          </a:p>
-        </p:txBody>
-      </p:sp>
-      <p:sp>
-        <p:nvSpPr>
-          <p:cNvPr id="8" name="Rectangle 7"/>
-          <p:cNvSpPr/>
-          <p:nvPr/>
-        </p:nvSpPr>
-        <p:spPr>
-          <a:xfrm>
-            <a:off x="548640" y="2286000"/>
-            <a:ext cx="11094415" cy="18288"/>
-          </a:xfrm>
-          <a:prstGeom prst="rect">
-            <a:avLst/>
-          </a:prstGeom>
-          <a:solidFill>
-            <a:srgbClr val="35415A"/>
-          </a:solidFill>
-          <a:ln>
-            <a:noFill/>
-          </a:ln>
-          <a:effectLst/>
-        </p:spPr>
-        <p:style>
-          <a:lnRef idx="1">
-            <a:schemeClr val="accent1"/>
-          </a:lnRef>
-          <a:fillRef idx="3">
-            <a:schemeClr val="accent1"/>
-          </a:fillRef>
-          <a:effectRef idx="2">
-            <a:schemeClr val="accent1"/>
-          </a:effectRef>
-          <a:fontRef idx="minor">
-            <a:schemeClr val="lt1"/>
-          </a:fontRef>
-        </p:style>
-        <p:txBody>
-          <a:bodyPr rtlCol="0" anchor="ctr"/>
-          <a:lstStyle/>
-          <a:p>
-            <a:pPr algn="ctr"/>
-          </a:p>
-        </p:txBody>
-      </p:sp>
-      <p:sp>
-        <p:nvSpPr>
-          <p:cNvPr id="9" name="Oval 8"/>
-          <p:cNvSpPr/>
-          <p:nvPr/>
-        </p:nvSpPr>
-        <p:spPr>
-          <a:xfrm>
-            <a:off x="548640" y="2212848"/>
-            <a:ext cx="164592" cy="164592"/>
-          </a:xfrm>
-          <a:prstGeom prst="ellipse">
-            <a:avLst/>
-          </a:prstGeom>
-          <a:solidFill>
-            <a:srgbClr val="29D3E0"/>
-          </a:solidFill>
-          <a:ln>
-            <a:noFill/>
-          </a:ln>
-          <a:effectLst/>
-        </p:spPr>
-        <p:style>
-          <a:lnRef idx="1">
-            <a:schemeClr val="accent1"/>
-          </a:lnRef>
-          <a:fillRef idx="3">
-            <a:schemeClr val="accent1"/>
-          </a:fillRef>
-          <a:effectRef idx="2">
-            <a:schemeClr val="accent1"/>
-          </a:effectRef>
-          <a:fontRef idx="minor">
-            <a:schemeClr val="lt1"/>
-          </a:fontRef>
-        </p:style>
-        <p:txBody>
-          <a:bodyPr rtlCol="0" anchor="ctr"/>
-          <a:lstStyle/>
-          <a:p>
-            <a:pPr algn="ctr"/>
-          </a:p>
-        </p:txBody>
-      </p:sp>
-      <p:sp>
-        <p:nvSpPr>
-          <p:cNvPr id="10" name="TextBox 9"/>
-          <p:cNvSpPr txBox="1"/>
-          <p:nvPr/>
-        </p:nvSpPr>
-        <p:spPr>
-          <a:xfrm>
-            <a:off x="804672" y="2176272"/>
-            <a:ext cx="2362123" cy="274320"/>
-          </a:xfrm>
-          <a:prstGeom prst="rect">
-            <a:avLst/>
-          </a:prstGeom>
-          <a:noFill/>
-        </p:spPr>
-        <p:txBody>
-          <a:bodyPr wrap="square" lIns="0" rIns="0" tIns="0" bIns="0" anchor="t">
-            <a:spAutoFit/>
-          </a:bodyPr>
-          <a:lstStyle/>
-          <a:p>
-            <a:pPr algn="l">
-              <a:lnSpc>
-                <a:spcPct val="115000"/>
-              </a:lnSpc>
-              <a:spcAft>
-                <a:spcPts val="0"/>
-              </a:spcAft>
-            </a:pPr>
-            <a:r>
-              <a:rPr b="1" sz="1560" i="0">
-                <a:solidFill>
-                  <a:srgbClr val="29D3E0"/>
-                </a:solidFill>
-                <a:latin typeface="Arial"/>
-              </a:rPr>
-              <a:t>2002</a:t>
-            </a:r>
-          </a:p>
-        </p:txBody>
-      </p:sp>
-      <p:sp>
-        <p:nvSpPr>
-          <p:cNvPr id="11" name="TextBox 10"/>
-          <p:cNvSpPr txBox="1"/>
-          <p:nvPr/>
-        </p:nvSpPr>
-        <p:spPr>
-          <a:xfrm>
-            <a:off x="548640" y="2560320"/>
-            <a:ext cx="2499283" cy="653796"/>
-          </a:xfrm>
-          <a:prstGeom prst="rect">
-            <a:avLst/>
-          </a:prstGeom>
-          <a:noFill/>
-        </p:spPr>
-        <p:txBody>
-          <a:bodyPr wrap="square" lIns="0" rIns="0" tIns="0" bIns="0" anchor="t">
-            <a:spAutoFit/>
-          </a:bodyPr>
-          <a:lstStyle/>
-          <a:p>
-            <a:pPr algn="l">
-              <a:lnSpc>
-                <a:spcPct val="120000"/>
-              </a:lnSpc>
-              <a:spcAft>
-                <a:spcPts val="0"/>
-              </a:spcAft>
-            </a:pPr>
-            <a:r>
-              <a:rPr b="0" sz="1430" i="0">
-                <a:solidFill>
-                  <a:srgbClr val="E6ECF7"/>
-                </a:solidFill>
-                <a:latin typeface="Arial"/>
-              </a:rPr>
-              <a:t>Kernel contributors publish a change and ask Linus to pull it</a:t>
-            </a:r>
-          </a:p>
-        </p:txBody>
-      </p:sp>
-      <p:sp>
-        <p:nvSpPr>
-          <p:cNvPr id="12" name="Oval 11"/>
-          <p:cNvSpPr/>
-          <p:nvPr/>
-        </p:nvSpPr>
-        <p:spPr>
-          <a:xfrm>
-            <a:off x="3367963" y="2212848"/>
-            <a:ext cx="164592" cy="164592"/>
-          </a:xfrm>
-          <a:prstGeom prst="ellipse">
-            <a:avLst/>
-          </a:prstGeom>
-          <a:solidFill>
-            <a:srgbClr val="E8A33D"/>
-          </a:solidFill>
-          <a:ln>
-            <a:noFill/>
-          </a:ln>
-          <a:effectLst/>
-        </p:spPr>
-        <p:style>
-          <a:lnRef idx="1">
-            <a:schemeClr val="accent1"/>
-          </a:lnRef>
-          <a:fillRef idx="3">
-            <a:schemeClr val="accent1"/>
-          </a:fillRef>
-          <a:effectRef idx="2">
-            <a:schemeClr val="accent1"/>
-          </a:effectRef>
-          <a:fontRef idx="minor">
-            <a:schemeClr val="lt1"/>
-          </a:fontRef>
-        </p:style>
-        <p:txBody>
-          <a:bodyPr rtlCol="0" anchor="ctr"/>
-          <a:lstStyle/>
-          <a:p>
-            <a:pPr algn="ctr"/>
-          </a:p>
-        </p:txBody>
-      </p:sp>
-      <p:sp>
-        <p:nvSpPr>
-          <p:cNvPr id="13" name="TextBox 12"/>
-          <p:cNvSpPr txBox="1"/>
-          <p:nvPr/>
-        </p:nvSpPr>
-        <p:spPr>
-          <a:xfrm>
-            <a:off x="3623995" y="2176272"/>
-            <a:ext cx="2362123" cy="274320"/>
-          </a:xfrm>
-          <a:prstGeom prst="rect">
-            <a:avLst/>
-          </a:prstGeom>
-          <a:noFill/>
-        </p:spPr>
-        <p:txBody>
-          <a:bodyPr wrap="square" lIns="0" rIns="0" tIns="0" bIns="0" anchor="t">
-            <a:spAutoFit/>
-          </a:bodyPr>
-          <a:lstStyle/>
-          <a:p>
-            <a:pPr algn="l">
-              <a:lnSpc>
-                <a:spcPct val="115000"/>
-              </a:lnSpc>
-              <a:spcAft>
-                <a:spcPts val="0"/>
-              </a:spcAft>
-            </a:pPr>
-            <a:r>
-              <a:rPr b="1" sz="1560" i="0">
-                <a:solidFill>
-                  <a:srgbClr val="E8A33D"/>
-                </a:solidFill>
-                <a:latin typeface="Arial"/>
-              </a:rPr>
-              <a:t>2008</a:t>
-            </a:r>
-          </a:p>
-        </p:txBody>
-      </p:sp>
-      <p:sp>
-        <p:nvSpPr>
-          <p:cNvPr id="14" name="TextBox 13"/>
-          <p:cNvSpPr txBox="1"/>
-          <p:nvPr/>
-        </p:nvSpPr>
-        <p:spPr>
-          <a:xfrm>
-            <a:off x="3367963" y="2560320"/>
-            <a:ext cx="2499283" cy="653796"/>
-          </a:xfrm>
-          <a:prstGeom prst="rect">
-            <a:avLst/>
-          </a:prstGeom>
-          <a:noFill/>
-        </p:spPr>
-        <p:txBody>
-          <a:bodyPr wrap="square" lIns="0" rIns="0" tIns="0" bIns="0" anchor="t">
-            <a:spAutoFit/>
-          </a:bodyPr>
-          <a:lstStyle/>
-          <a:p>
-            <a:pPr algn="l">
-              <a:lnSpc>
-                <a:spcPct val="120000"/>
-              </a:lnSpc>
-              <a:spcAft>
-                <a:spcPts val="0"/>
-              </a:spcAft>
-            </a:pPr>
-            <a:r>
-              <a:rPr b="0" sz="1430" i="0">
-                <a:solidFill>
-                  <a:srgbClr val="E6ECF7"/>
-                </a:solidFill>
-                <a:latin typeface="Arial"/>
-              </a:rPr>
-              <a:t>GitHub makes the pull request a feature</a:t>
-            </a:r>
-          </a:p>
-        </p:txBody>
-      </p:sp>
-      <p:sp>
-        <p:nvSpPr>
-          <p:cNvPr id="15" name="Oval 14"/>
-          <p:cNvSpPr/>
-          <p:nvPr/>
-        </p:nvSpPr>
-        <p:spPr>
-          <a:xfrm>
-            <a:off x="6187287" y="2212848"/>
-            <a:ext cx="164592" cy="164592"/>
-          </a:xfrm>
-          <a:prstGeom prst="ellipse">
-            <a:avLst/>
-          </a:prstGeom>
-          <a:solidFill>
-            <a:srgbClr val="29D3E0"/>
-          </a:solidFill>
-          <a:ln>
-            <a:noFill/>
-          </a:ln>
-          <a:effectLst/>
-        </p:spPr>
-        <p:style>
-          <a:lnRef idx="1">
-            <a:schemeClr val="accent1"/>
-          </a:lnRef>
-          <a:fillRef idx="3">
-            <a:schemeClr val="accent1"/>
-          </a:fillRef>
-          <a:effectRef idx="2">
-            <a:schemeClr val="accent1"/>
-          </a:effectRef>
-          <a:fontRef idx="minor">
-            <a:schemeClr val="lt1"/>
-          </a:fontRef>
-        </p:style>
-        <p:txBody>
-          <a:bodyPr rtlCol="0" anchor="ctr"/>
-          <a:lstStyle/>
-          <a:p>
-            <a:pPr algn="ctr"/>
-          </a:p>
-        </p:txBody>
-      </p:sp>
-      <p:sp>
-        <p:nvSpPr>
-          <p:cNvPr id="16" name="TextBox 15"/>
-          <p:cNvSpPr txBox="1"/>
-          <p:nvPr/>
-        </p:nvSpPr>
-        <p:spPr>
-          <a:xfrm>
-            <a:off x="6443319" y="2176272"/>
-            <a:ext cx="2362123" cy="274320"/>
-          </a:xfrm>
-          <a:prstGeom prst="rect">
-            <a:avLst/>
-          </a:prstGeom>
-          <a:noFill/>
-        </p:spPr>
-        <p:txBody>
-          <a:bodyPr wrap="square" lIns="0" rIns="0" tIns="0" bIns="0" anchor="t">
-            <a:spAutoFit/>
-          </a:bodyPr>
-          <a:lstStyle/>
-          <a:p>
-            <a:pPr algn="l">
-              <a:lnSpc>
-                <a:spcPct val="115000"/>
-              </a:lnSpc>
-              <a:spcAft>
-                <a:spcPts val="0"/>
-              </a:spcAft>
-            </a:pPr>
-            <a:r>
-              <a:rPr b="1" sz="1560" i="0">
-                <a:solidFill>
-                  <a:srgbClr val="29D3E0"/>
-                </a:solidFill>
-                <a:latin typeface="Arial"/>
-              </a:rPr>
-              <a:t>2010</a:t>
-            </a:r>
-          </a:p>
-        </p:txBody>
-      </p:sp>
-      <p:sp>
-        <p:nvSpPr>
-          <p:cNvPr id="17" name="TextBox 16"/>
-          <p:cNvSpPr txBox="1"/>
-          <p:nvPr/>
-        </p:nvSpPr>
-        <p:spPr>
-          <a:xfrm>
-            <a:off x="6187287" y="2560320"/>
-            <a:ext cx="2499283" cy="653796"/>
-          </a:xfrm>
-          <a:prstGeom prst="rect">
-            <a:avLst/>
-          </a:prstGeom>
-          <a:noFill/>
-        </p:spPr>
-        <p:txBody>
-          <a:bodyPr wrap="square" lIns="0" rIns="0" tIns="0" bIns="0" anchor="t">
-            <a:spAutoFit/>
-          </a:bodyPr>
-          <a:lstStyle/>
-          <a:p>
-            <a:pPr algn="l">
-              <a:lnSpc>
-                <a:spcPct val="120000"/>
-              </a:lnSpc>
-              <a:spcAft>
-                <a:spcPts val="0"/>
-              </a:spcAft>
-            </a:pPr>
-            <a:r>
-              <a:rPr b="0" sz="1430" i="0">
-                <a:solidFill>
-                  <a:srgbClr val="E6ECF7"/>
-                </a:solidFill>
-                <a:latin typeface="Arial"/>
-              </a:rPr>
-              <a:t>Pull requests between branches of one repository</a:t>
-            </a:r>
-          </a:p>
-        </p:txBody>
-      </p:sp>
-      <p:sp>
-        <p:nvSpPr>
-          <p:cNvPr id="18" name="Oval 17"/>
-          <p:cNvSpPr/>
-          <p:nvPr/>
-        </p:nvSpPr>
-        <p:spPr>
-          <a:xfrm>
-            <a:off x="9006611" y="2212848"/>
-            <a:ext cx="164592" cy="164592"/>
-          </a:xfrm>
-          <a:prstGeom prst="ellipse">
-            <a:avLst/>
-          </a:prstGeom>
-          <a:solidFill>
-            <a:srgbClr val="E8A33D"/>
-          </a:solidFill>
-          <a:ln>
-            <a:noFill/>
-          </a:ln>
-          <a:effectLst/>
-        </p:spPr>
-        <p:style>
-          <a:lnRef idx="1">
-            <a:schemeClr val="accent1"/>
-          </a:lnRef>
-          <a:fillRef idx="3">
-            <a:schemeClr val="accent1"/>
-          </a:fillRef>
-          <a:effectRef idx="2">
-            <a:schemeClr val="accent1"/>
-          </a:effectRef>
-          <a:fontRef idx="minor">
-            <a:schemeClr val="lt1"/>
-          </a:fontRef>
-        </p:style>
-        <p:txBody>
-          <a:bodyPr rtlCol="0" anchor="ctr"/>
-          <a:lstStyle/>
-          <a:p>
-            <a:pPr algn="ctr"/>
-          </a:p>
-        </p:txBody>
-      </p:sp>
-      <p:sp>
-        <p:nvSpPr>
-          <p:cNvPr id="19" name="TextBox 18"/>
-          <p:cNvSpPr txBox="1"/>
-          <p:nvPr/>
-        </p:nvSpPr>
-        <p:spPr>
-          <a:xfrm>
-            <a:off x="9262643" y="2176272"/>
-            <a:ext cx="2362123" cy="274320"/>
-          </a:xfrm>
-          <a:prstGeom prst="rect">
-            <a:avLst/>
-          </a:prstGeom>
-          <a:noFill/>
-        </p:spPr>
-        <p:txBody>
-          <a:bodyPr wrap="square" lIns="0" rIns="0" tIns="0" bIns="0" anchor="t">
-            <a:spAutoFit/>
-          </a:bodyPr>
-          <a:lstStyle/>
-          <a:p>
-            <a:pPr algn="l">
-              <a:lnSpc>
-                <a:spcPct val="115000"/>
-              </a:lnSpc>
-              <a:spcAft>
-                <a:spcPts val="0"/>
-              </a:spcAft>
-            </a:pPr>
-            <a:r>
-              <a:rPr b="1" sz="1560" i="0">
-                <a:solidFill>
-                  <a:srgbClr val="E8A33D"/>
-                </a:solidFill>
-                <a:latin typeface="Arial"/>
-              </a:rPr>
-              <a:t>2011–2017</a:t>
-            </a:r>
-          </a:p>
-        </p:txBody>
-      </p:sp>
-      <p:sp>
-        <p:nvSpPr>
-          <p:cNvPr id="20" name="TextBox 19"/>
-          <p:cNvSpPr txBox="1"/>
-          <p:nvPr/>
-        </p:nvSpPr>
-        <p:spPr>
-          <a:xfrm>
-            <a:off x="9006611" y="2560320"/>
-            <a:ext cx="2499283" cy="653796"/>
-          </a:xfrm>
-          <a:prstGeom prst="rect">
-            <a:avLst/>
-          </a:prstGeom>
-          <a:noFill/>
-        </p:spPr>
-        <p:txBody>
-          <a:bodyPr wrap="square" lIns="0" rIns="0" tIns="0" bIns="0" anchor="t">
-            <a:spAutoFit/>
-          </a:bodyPr>
-          <a:lstStyle/>
-          <a:p>
-            <a:pPr algn="l">
-              <a:lnSpc>
-                <a:spcPct val="120000"/>
-              </a:lnSpc>
-              <a:spcAft>
-                <a:spcPts val="0"/>
-              </a:spcAft>
-            </a:pPr>
-            <a:r>
-              <a:rPr b="0" sz="1430" i="0">
-                <a:solidFill>
-                  <a:srgbClr val="E6ECF7"/>
-                </a:solidFill>
-                <a:latin typeface="Arial"/>
-              </a:rPr>
-              <a:t>Merge button, protected branches, required reviews, code owners</a:t>
-            </a:r>
-          </a:p>
-        </p:txBody>
-      </p:sp>
-      <p:sp>
-        <p:nvSpPr>
-          <p:cNvPr id="21" name="Rectangle 20"/>
-          <p:cNvSpPr/>
-          <p:nvPr/>
-        </p:nvSpPr>
-        <p:spPr>
-          <a:xfrm>
-            <a:off x="548640" y="3899915"/>
-            <a:ext cx="54864" cy="746861"/>
-          </a:xfrm>
-          <a:prstGeom prst="rect">
-            <a:avLst/>
-          </a:prstGeom>
-          <a:solidFill>
-            <a:srgbClr val="29D3E0"/>
-          </a:solidFill>
-          <a:ln>
-            <a:noFill/>
-          </a:ln>
-          <a:effectLst/>
-        </p:spPr>
-        <p:style>
-          <a:lnRef idx="1">
-            <a:schemeClr val="accent1"/>
-          </a:lnRef>
-          <a:fillRef idx="3">
-            <a:schemeClr val="accent1"/>
-          </a:fillRef>
-          <a:effectRef idx="2">
-            <a:schemeClr val="accent1"/>
-          </a:effectRef>
-          <a:fontRef idx="minor">
-            <a:schemeClr val="lt1"/>
-          </a:fontRef>
-        </p:style>
-        <p:txBody>
-          <a:bodyPr rtlCol="0" anchor="ctr"/>
-          <a:lstStyle/>
-          <a:p>
-            <a:pPr algn="ctr"/>
-          </a:p>
-        </p:txBody>
-      </p:sp>
-      <p:sp>
-        <p:nvSpPr>
-          <p:cNvPr id="22" name="TextBox 21"/>
-          <p:cNvSpPr txBox="1"/>
-          <p:nvPr/>
-        </p:nvSpPr>
-        <p:spPr>
-          <a:xfrm>
-            <a:off x="822959" y="3991355"/>
-            <a:ext cx="10682935" cy="563981"/>
-          </a:xfrm>
-          <a:prstGeom prst="rect">
-            <a:avLst/>
-          </a:prstGeom>
-          <a:noFill/>
-        </p:spPr>
-        <p:txBody>
-          <a:bodyPr wrap="square" lIns="0" rIns="0" tIns="0" bIns="0" anchor="ctr">
-            <a:spAutoFit/>
-          </a:bodyPr>
-          <a:lstStyle/>
-          <a:p>
-            <a:pPr algn="l">
-              <a:lnSpc>
-                <a:spcPct val="115000"/>
-              </a:lnSpc>
-              <a:spcAft>
-                <a:spcPts val="0"/>
-              </a:spcAft>
-            </a:pPr>
-            <a:r>
-              <a:rPr b="1" sz="1820" i="0">
-                <a:solidFill>
-                  <a:srgbClr val="E6ECF7"/>
-                </a:solidFill>
-                <a:latin typeface="Arial"/>
-              </a:rPr>
-              <a:t>Writing a change and accepting it were separate acts from the start. That was how the work was divided, not a control. The approval rules came later, on top.</a:t>
-            </a:r>
-          </a:p>
-        </p:txBody>
-      </p:sp>
     </p:spTree>
   </p:cSld>
   <p:clrMapOvr>

--- a/presentations/what-is-the-second-pair-of-eyes-for.pptx
+++ b/presentations/what-is-the-second-pair-of-eyes-for.pptx
@@ -1584,7 +1584,7 @@
           <a:lstStyle/>
           <a:p>
             <a:r>
-              <a:t>This is chapter 03's dividing line applied to one repository. Everything mechanically verifiable runs before a person looks at the change. Formatting, linting, the test suite and a static analysis pass go in a workflow file under .github/workflows. Dependency scanning is a dependabot.yml. Secret scanning is a toggle in the repository settings. Google's reason is the one from chapter 03: static analysis exists so that human review can focus on what is not mechanically verifiable. The second step is the one people skip. A check that merely runs is advice. In branch protection or a ruleset, require those status checks by name, require a pull request before merging, and stop direct pushes to the default branch. Then dismiss stale approvals when new commits land. That last setting is the cheapest defence in this whole deck against the third failure, where the record says approved and nobody read the version that shipped.</a:t>
+              <a:t>This is chapter 03's dividing line applied to one repository. Everything mechanically verifiable runs before a person looks at the change. Formatting, linting, the test suite and a static analysis pass go in a workflow file under .github/workflows. Dependency scanning is a dependabot.yml. Secret scanning is a toggle in the repository settings. Google's reason is the one from chapter 03: static analysis exists so that human review can focus on what is not mechanically verifiable. The second step is the one people skip. A check that merely runs is advice. In branch protection or a ruleset, require those status checks by name, require a pull request before merging, and stop direct pushes to the default branch. Then dismiss stale approvals when new commits land. Dismissing stale approvals is the cheapest defence in this whole deck against the third failure, where the record says approved and nobody read the version that shipped.</a:t>
             </a:r>
           </a:p>
         </p:txBody>
@@ -17818,7 +17818,7 @@
                 </a:solidFill>
                 <a:latin typeface="Arial"/>
               </a:rPr>
-              <a:t>Run them</a:t>
+              <a:t>Run the checks</a:t>
             </a:r>
           </a:p>
         </p:txBody>
@@ -17994,7 +17994,7 @@
                 </a:solidFill>
                 <a:latin typeface="Arial"/>
               </a:rPr>
-              <a:t>Require them</a:t>
+              <a:t>Require the checks</a:t>
             </a:r>
           </a:p>
         </p:txBody>
@@ -18036,7 +18036,7 @@
                 </a:solidFill>
                 <a:latin typeface="Arial"/>
               </a:rPr>
-              <a:t>Require those checks by name. Require a pull request. Stop direct pushes to the default branch.</a:t>
+              <a:t>Require each check by name. Require a pull request. Stop direct pushes to the default branch.</a:t>
             </a:r>
           </a:p>
         </p:txBody>
@@ -18170,7 +18170,7 @@
                 </a:solidFill>
                 <a:latin typeface="Arial"/>
               </a:rPr>
-              <a:t>Keep them honest</a:t>
+              <a:t>Keep approvals current</a:t>
             </a:r>
           </a:p>
         </p:txBody>

--- a/presentations/what-is-the-second-pair-of-eyes-for.pptx
+++ b/presentations/what-is-the-second-pair-of-eyes-for.pptx
@@ -38,6 +38,7 @@
     <p:sldId id="286" r:id="rId38"/>
     <p:sldId id="287" r:id="rId39"/>
     <p:sldId id="288" r:id="rId40"/>
+    <p:sldId id="289" r:id="rId41"/>
   </p:sldIdLst>
   <p:sldSz cx="12191695" cy="6858000" type="screen4x3"/>
   <p:notesSz cx="6858000" cy="9144000"/>
@@ -1584,7 +1585,7 @@
           <a:lstStyle/>
           <a:p>
             <a:r>
-              <a:t>This is chapter 03's dividing line applied to one repository. Everything mechanically verifiable runs before a person looks at the change. Formatting, linting, the test suite and a static analysis pass go in a workflow file under .github/workflows. Dependency scanning is a dependabot.yml. Secret scanning is a toggle in the repository settings. Google's reason is the one from chapter 03: static analysis exists so that human review can focus on what is not mechanically verifiable. The second step is the one people skip. A check that merely runs is advice. In branch protection or a ruleset, require those status checks by name, require a pull request before merging, and stop direct pushes to the default branch. Then dismiss stale approvals when new commits land. Dismissing stale approvals is the cheapest defence in this whole deck against the third failure, where the record says approved and nobody read the version that shipped.</a:t>
+              <a:t>Chapter 04 said to tier repositories by what they touch, and never said who does the tiering. A developer with one repository in front of them has to settle it, because the answer decides how strict every step after this one should be: how many reviewers, whether a machine may approve, whether a security review is mandatory. A payment repository and an internal dashboard are not the same bet, even when a change to each looks equally small. Chapter 01 found the regulation asking for exactly this, a policy based on a risk assessment approach, and it never said the assessment had to be elaborate. One sentence in the README, dated, that a new joiner can find, is more than most repositories have today. The date matters because the answer expires: a repository that starts handling customer data has changed tier whether or not anybody wrote it down.</a:t>
             </a:r>
           </a:p>
         </p:txBody>
@@ -1654,7 +1655,7 @@
           <a:lstStyle/>
           <a:p>
             <a:r>
-              <a:t>Chapter 04 tiered whole repositories by what they touch. Inside one repository the same idea fits in a file. A CODEOWNERS file requires a named reviewer for the paths that move money or hold customer data, and leaves the rest on the lighter default. That is the risk-based approach the regulation asks for, written as a file rather than a policy nobody reads. It also answers something the approval rule leaves open: not just that someone approved, but that someone who knows this code did. The second decision comes from chapter 02. Whether Copilot's review counts toward this repository's required approvals is a per-repository choice, currently off by default. Write the answer down where the next person will find it, with the reason. Both repositories are allowed to answer differently. What neither should do is answer by accident, which is what happens when nobody decides.</a:t>
+              <a:t>This is chapter 03's dividing line applied to one repository. Everything mechanically verifiable runs before a person looks at the change. Formatting, linting, the test suite and a static analysis pass go in a workflow file under .github/workflows. Dependency scanning is a dependabot.yml. Secret scanning is a toggle in the repository settings. Google's reason is the one from chapter 03: static analysis exists so that human review can focus on what is not mechanically verifiable. The second step is the one people skip. A check that merely runs is advice. In branch protection or a ruleset, require those status checks by name, require a pull request before merging, and stop direct pushes to the default branch. Then dismiss stale approvals when new commits land. Dismissing stale approvals is the cheapest defence in this whole deck against the third failure, where the record says approved and nobody read the version that shipped.</a:t>
             </a:r>
           </a:p>
         </p:txBody>
@@ -1724,7 +1725,7 @@
           <a:lstStyle/>
           <a:p>
             <a:r>
-              <a:t>This is the author's half of four eyes, in the one place a repository can host it. A pull_request_template.md in the .github folder puts the same questions in front of every pull request. The wording matters more than the existence. Chapter 04 cited a 2026 study of 80.000 pull requests across 156 projects where description elements made largely negligible difference to review outcomes, with one exception: a description that explains the code and asks for a specific kind of feedback. So the template asks for both. A template that only asks for a summary is asking for the thing the study found does not matter. One honest limit: a template is a prompt, not a control. GitHub prefills it and nothing stops someone deleting it. Enforcing it takes a CI check, and an enforced field is exactly where N/A appears.</a:t>
+              <a:t>Step 1 settled what the whole repository touches. Both decisions here follow from that answer. A CODEOWNERS file requires a named reviewer for the paths that move money or hold customer data, and leaves the rest on the lighter default. That is the risk-based approach the regulation asks for, written as a file rather than a policy nobody reads. It also answers something the approval rule leaves open: not just that someone approved, but that someone who knows this code did. The second decision comes from chapter 02. Whether Copilot's review counts toward this repository's required approvals is a per-repository choice, currently off by default. Write the answer down where the next person will find it, with the reason. Both repositories are allowed to answer differently. What neither should do is answer by accident, which is what happens when nobody decides.</a:t>
             </a:r>
           </a:p>
         </p:txBody>
@@ -1794,7 +1795,7 @@
           <a:lstStyle/>
           <a:p>
             <a:r>
-              <a:t>The last row is the one nothing else covers. Everything above it decays quietly, and only a person re-reading approved changes notices. That is Adyen's fix from chapter 02, the one regulated payment company in this deck, whose reviewers said they had started to pattern-match after a dozen near-identical changes. At one-repository scale it is a recurring calendar entry rather than a tool: read a sample of merged pull requests and ask whether the approvals on them meant anything. On leverage and freedom: the workflow file and the template are copied to the next repository in minutes, so the second repository costs a fraction of the first. Each item is reverted by deleting a line, with no vendor to ask. What the list cannot do is the job chapter 01 found underneath all three: decide whether the change is wanted. Days 1 to 3 make that decision cheaper to reach, day 4 gives the decider something to read, and the last row checks that the decision is still being made. None of them makes it. And I owe this argument the check in the last line: I do not know how many of these settings are already on in our repositories.</a:t>
+              <a:t>This is the author's half of four eyes, in the one place a repository can host it. A pull_request_template.md in the .github folder puts the same questions in front of every pull request. The wording matters more than the existence. Chapter 04 cited a 2026 study of 80.000 pull requests across 156 projects where description elements made largely negligible difference to review outcomes, with one exception: a description that explains the code and asks for a specific kind of feedback. So the template asks for both. A template that only asks for a summary is asking for the thing the study found does not matter. One honest limit: a template is a prompt, not a control. GitHub prefills it and nothing stops someone deleting it. Enforcing it takes a CI check, and an enforced field is exactly where N/A appears.</a:t>
             </a:r>
           </a:p>
         </p:txBody>
@@ -1864,7 +1865,7 @@
           <a:lstStyle/>
           <a:p>
             <a:r>
-              <a:t>Two slides. The first is the answer to the title question. The second is where I hand it back to you.</a:t>
+              <a:t>The last row is the one nothing else covers. Everything above it decays quietly, and only a person re-reading approved changes notices. That is Adyen's fix from chapter 02, the one regulated payment company in this deck, whose reviewers said they had started to pattern-match after a dozen near-identical changes. At one-repository scale it is a recurring calendar entry rather than a tool: read a sample of merged pull requests and ask whether the approvals on them meant anything. On leverage and freedom: the workflow file and the template are copied to the next repository in minutes, so the second repository costs a fraction of the first. Each item is reverted by deleting a line, with no vendor to ask. What the list cannot do is the job chapter 01 found underneath all three: decide whether the change is wanted. Days 1 to 3 make that decision cheaper to reach, day 4 gives the decider something to read, and the last row checks that the decision is still being made. None of them makes it. And I owe this argument the check in the last line: I do not know how many of these settings are already on in our repositories.</a:t>
             </a:r>
           </a:p>
         </p:txBody>
@@ -1934,7 +1935,7 @@
           <a:lstStyle/>
           <a:p>
             <a:r>
-              <a:t>The queue gets shorter by turning on what is already there, centralizing everything mechanical, giving that machinery its own log of approved, rejected and why, the way secret scanning already logs it, and tiering by what the repository touches with a logged break-glass rather than an org-wide switch nobody downstream can turn off. Quality goes up with real evidence in exactly one place: a different model family reviews the change. It might go up in two more, the author's half of four eyes and Adyen's periodic look at already-approved changes to catch the gate going stale, but both are design problems here, not results. Restricting how much AI our engineers may use is set aside, not rejected: Godot, Rust and curl defend against low-trust external contributors, which is a different problem from employed engineers using a tool they were given. The approval itself stays with a human who is independent of whoever implemented the change, including when the change was written by an AI. Two honest notes. The rules are silent on AI approval, not against it, so this is the cautious reading of that silence and not the only one allowed. And whether same-team approval is independent enough is a question this deck raised on slide 7 and never answered.</a:t>
+              <a:t>Two slides. The first is the answer to the title question. The second is where I hand it back to you.</a:t>
             </a:r>
           </a:p>
         </p:txBody>
@@ -2004,7 +2005,7 @@
           <a:lstStyle/>
           <a:p>
             <a:r>
-              <a:t>Four things I do not know. Whether the approver must sit outside the team that shipped the change, which slides 6 and 7 raised and everything since has assumed away. Whether a classifier that auto-approves low-risk changes counts as an independent function under DORA, which depends on who owns it and whether its decision lands where an auditor can read it, and which nobody has written down. Which branch protections and scanners are on across our repositories today, which is a day of work I have not done and the cheapest item on my list rests on it. And whether the author's check survives contact with a real team, or becomes the ritual. What would help me most is a review decision you have already made and had to undo: a rule people bypassed, a gate you loosened, a reviewer you switched off, and what it cost. What would change my mind is a regulated company that let a machine approve changes and had an auditor accept the record, or evidence that a managed reviewer improved the gate itself rather than the coverage.</a:t>
+              <a:t>The queue gets shorter by turning on what is already there, centralizing everything mechanical, giving that machinery its own log of approved, rejected and why, the way secret scanning already logs it, and tiering by what the repository touches with a logged break-glass rather than an org-wide switch nobody downstream can turn off. Quality goes up with real evidence in exactly one place: a different model family reviews the change. It might go up in two more, the author's half of four eyes and Adyen's periodic look at already-approved changes to catch the gate going stale, but both are design problems here, not results. Restricting how much AI our engineers may use is set aside, not rejected: Godot, Rust and curl defend against low-trust external contributors, which is a different problem from employed engineers using a tool they were given. The approval itself stays with a human who is independent of whoever implemented the change, including when the change was written by an AI. Two honest notes. The rules are silent on AI approval, not against it, so this is the cautious reading of that silence and not the only one allowed. And whether same-team approval is independent enough is a question this deck raised on slide 7 and never answered.</a:t>
             </a:r>
           </a:p>
         </p:txBody>
@@ -2075,6 +2076,76 @@
           <a:p>
             <a:r>
               <a:t>In 2002, Jeff Garzik wrote a short guide for developers who wanted their changes in the Linux kernel: publish the change in a repository Linus Torvalds can pull from, write a summary, list the files you changed. The rules existed to save Linus work. The contributor could not write to the maintainer's repository, so writing and accepting were two acts by two people from the beginning. GitHub made the pull request a feature in 2008. In 2010 it allowed pull requests between branches of the same repository, which changed the reason for opening one: inside a company everyone can already merge, so a team opens a pull request so that someone looks first. Required approvals and code owners arrived between 2011 and 2017. The pull request worked as a request to integrate for years without any of them.</a:t>
+            </a:r>
+          </a:p>
+        </p:txBody>
+      </p:sp>
+      <p:sp>
+        <p:nvSpPr>
+          <p:cNvPr id="4" name="Slide Number Placeholder 3"/>
+          <p:cNvSpPr>
+            <a:spLocks noGrp="1"/>
+          </p:cNvSpPr>
+          <p:nvPr>
+            <p:ph type="sldNum" idx="5" sz="quarter"/>
+          </p:nvPr>
+        </p:nvSpPr>
+        <p:spPr/>
+      </p:sp>
+    </p:spTree>
+  </p:cSld>
+  <p:clrMapOvr>
+    <a:masterClrMapping/>
+  </p:clrMapOvr>
+</p:notes>
+</file>
+
+<file path=ppt/notesSlides/notesSlide30.xml><?xml version="1.0" encoding="utf-8"?>
+<p:notes xmlns:a="http://schemas.openxmlformats.org/drawingml/2006/main" xmlns:p="http://schemas.openxmlformats.org/presentationml/2006/main" xmlns:r="http://schemas.openxmlformats.org/officeDocument/2006/relationships">
+  <p:cSld>
+    <p:spTree>
+      <p:nvGrpSpPr>
+        <p:cNvPr id="1" name=""/>
+        <p:cNvGrpSpPr/>
+        <p:nvPr/>
+      </p:nvGrpSpPr>
+      <p:grpSpPr>
+        <a:xfrm>
+          <a:off x="0" y="0"/>
+          <a:ext cx="0" cy="0"/>
+          <a:chOff x="0" y="0"/>
+          <a:chExt cx="0" cy="0"/>
+        </a:xfrm>
+      </p:grpSpPr>
+      <p:sp>
+        <p:nvSpPr>
+          <p:cNvPr id="2" name="Slide Image Placeholder 1"/>
+          <p:cNvSpPr>
+            <a:spLocks noGrp="1"/>
+          </p:cNvSpPr>
+          <p:nvPr>
+            <p:ph type="sldImg" idx="2"/>
+          </p:nvPr>
+        </p:nvSpPr>
+        <p:spPr/>
+      </p:sp>
+      <p:sp>
+        <p:nvSpPr>
+          <p:cNvPr id="3" name="Notes Placeholder 2"/>
+          <p:cNvSpPr>
+            <a:spLocks noGrp="1"/>
+          </p:cNvSpPr>
+          <p:nvPr>
+            <p:ph type="body" idx="3" sz="quarter"/>
+          </p:nvPr>
+        </p:nvSpPr>
+        <p:spPr/>
+        <p:txBody>
+          <a:bodyPr/>
+          <a:lstStyle/>
+          <a:p>
+            <a:r>
+              <a:t>Four things I do not know. Whether the approver must sit outside the team that shipped the change, which slides 6 and 7 raised and everything since has assumed away. Whether a classifier that auto-approves low-risk changes counts as an independent function under DORA, which depends on who owns it and whether its decision lands where an auditor can read it, and which nobody has written down. Which branch protections and scanners are on across our repositories today, which is a day of work I have not done and the cheapest item on my list rests on it. And whether the author's check survives contact with a real team, or becomes the ritual. What would help me most is a review decision you have already made and had to undo: a rule people bypassed, a gate you loosened, a reviewer you switched off, and what it cost. What would change my mind is a regulated company that let a machine approve changes and had an auditor accept the record, or evidence that a managed reviewer improved the gate itself rather than the coverage.</a:t>
             </a:r>
           </a:p>
         </p:txBody>
@@ -17062,7 +17133,7 @@
                 </a:solidFill>
                 <a:latin typeface="Arial"/>
               </a:rPr>
-              <a:t>Make the mechanical checks unskippable</a:t>
+              <a:t>First, decide what this repository touches</a:t>
             </a:r>
           </a:p>
         </p:txBody>
@@ -17148,7 +17219,7 @@
                 </a:solidFill>
                 <a:latin typeface="Arial"/>
               </a:rPr>
-              <a:t>Two decisions the repository owner makes</a:t>
+              <a:t>Make the mechanical checks unskippable</a:t>
             </a:r>
           </a:p>
         </p:txBody>
@@ -17234,7 +17305,7 @@
                 </a:solidFill>
                 <a:latin typeface="Arial"/>
               </a:rPr>
-              <a:t>Ask the author for what no check can see</a:t>
+              <a:t>Two decisions that follow from the tier</a:t>
             </a:r>
           </a:p>
         </p:txBody>
@@ -17320,23 +17391,23 @@
                 </a:solidFill>
                 <a:latin typeface="Arial"/>
               </a:rPr>
-              <a:t>The first week</a:t>
-            </a:r>
-          </a:p>
-        </p:txBody>
-      </p:sp>
-      <p:sp>
-        <p:nvSpPr>
-          <p:cNvPr id="17" name="Oval 16"/>
+              <a:t>Ask the author for what no check can see</a:t>
+            </a:r>
+          </a:p>
+        </p:txBody>
+      </p:sp>
+      <p:sp>
+        <p:nvSpPr>
+          <p:cNvPr id="17" name="Rectangle 16"/>
           <p:cNvSpPr/>
           <p:nvPr/>
         </p:nvSpPr>
         <p:spPr>
           <a:xfrm>
-            <a:off x="10332720" y="5394960"/>
-            <a:ext cx="457200" cy="457200"/>
-          </a:xfrm>
-          <a:prstGeom prst="ellipse">
+            <a:off x="2697480" y="5181091"/>
+            <a:ext cx="146304" cy="18288"/>
+          </a:xfrm>
+          <a:prstGeom prst="rect">
             <a:avLst/>
           </a:prstGeom>
           <a:solidFill>
@@ -17371,7 +17442,93 @@
       </p:sp>
       <p:sp>
         <p:nvSpPr>
-          <p:cNvPr id="18" name="Rounded Rectangle 17"/>
+          <p:cNvPr id="18" name="TextBox 17"/>
+          <p:cNvSpPr txBox="1"/>
+          <p:nvPr/>
+        </p:nvSpPr>
+        <p:spPr>
+          <a:xfrm>
+            <a:off x="2971800" y="5117083"/>
+            <a:ext cx="8671255" cy="219456"/>
+          </a:xfrm>
+          <a:prstGeom prst="rect">
+            <a:avLst/>
+          </a:prstGeom>
+          <a:noFill/>
+        </p:spPr>
+        <p:txBody>
+          <a:bodyPr wrap="square" lIns="0" rIns="0" tIns="0" bIns="0" anchor="t">
+            <a:spAutoFit/>
+          </a:bodyPr>
+          <a:lstStyle/>
+          <a:p>
+            <a:pPr algn="l">
+              <a:lnSpc>
+                <a:spcPct val="115000"/>
+              </a:lnSpc>
+              <a:spcAft>
+                <a:spcPts val="0"/>
+              </a:spcAft>
+            </a:pPr>
+            <a:r>
+              <a:rPr b="0" sz="1200" i="0">
+                <a:solidFill>
+                  <a:srgbClr val="98A4BC"/>
+                </a:solidFill>
+                <a:latin typeface="Arial"/>
+              </a:rPr>
+              <a:t>The first week</a:t>
+            </a:r>
+          </a:p>
+        </p:txBody>
+      </p:sp>
+      <p:sp>
+        <p:nvSpPr>
+          <p:cNvPr id="19" name="Oval 18"/>
+          <p:cNvSpPr/>
+          <p:nvPr/>
+        </p:nvSpPr>
+        <p:spPr>
+          <a:xfrm>
+            <a:off x="10332720" y="5394960"/>
+            <a:ext cx="457200" cy="457200"/>
+          </a:xfrm>
+          <a:prstGeom prst="ellipse">
+            <a:avLst/>
+          </a:prstGeom>
+          <a:solidFill>
+            <a:srgbClr val="29D3E0"/>
+          </a:solidFill>
+          <a:ln>
+            <a:noFill/>
+          </a:ln>
+          <a:effectLst/>
+        </p:spPr>
+        <p:style>
+          <a:lnRef idx="1">
+            <a:schemeClr val="accent1"/>
+          </a:lnRef>
+          <a:fillRef idx="3">
+            <a:schemeClr val="accent1"/>
+          </a:fillRef>
+          <a:effectRef idx="2">
+            <a:schemeClr val="accent1"/>
+          </a:effectRef>
+          <a:fontRef idx="minor">
+            <a:schemeClr val="lt1"/>
+          </a:fontRef>
+        </p:style>
+        <p:txBody>
+          <a:bodyPr rtlCol="0" anchor="ctr"/>
+          <a:lstStyle/>
+          <a:p>
+            <a:pPr algn="ctr"/>
+          </a:p>
+        </p:txBody>
+      </p:sp>
+      <p:sp>
+        <p:nvSpPr>
+          <p:cNvPr id="20" name="Rounded Rectangle 19"/>
           <p:cNvSpPr/>
           <p:nvPr/>
         </p:nvSpPr>
@@ -17556,7 +17713,7 @@
                 </a:solidFill>
                 <a:latin typeface="Georgia"/>
               </a:rPr>
-              <a:t>Make the mechanical checks unskippable</a:t>
+              <a:t>First, decide what this repository touches</a:t>
             </a:r>
           </a:p>
         </p:txBody>
@@ -17691,106 +17848,14 @@
       </p:sp>
       <p:sp>
         <p:nvSpPr>
-          <p:cNvPr id="8" name="Rounded Rectangle 7"/>
-          <p:cNvSpPr/>
-          <p:nvPr/>
-        </p:nvSpPr>
-        <p:spPr>
-          <a:xfrm>
-            <a:off x="548640" y="2103120"/>
-            <a:ext cx="3576218" cy="1708467"/>
-          </a:xfrm>
-          <a:prstGeom prst="roundRect">
-            <a:avLst>
-              <a:gd name="adj" fmla="val 4000"/>
-            </a:avLst>
-          </a:prstGeom>
-          <a:solidFill>
-            <a:srgbClr val="151D2E"/>
-          </a:solidFill>
-          <a:ln w="9525">
-            <a:solidFill>
-              <a:srgbClr val="35415A"/>
-            </a:solidFill>
-          </a:ln>
-          <a:effectLst/>
-        </p:spPr>
-        <p:style>
-          <a:lnRef idx="1">
-            <a:schemeClr val="accent1"/>
-          </a:lnRef>
-          <a:fillRef idx="3">
-            <a:schemeClr val="accent1"/>
-          </a:fillRef>
-          <a:effectRef idx="2">
-            <a:schemeClr val="accent1"/>
-          </a:effectRef>
-          <a:fontRef idx="minor">
-            <a:schemeClr val="lt1"/>
-          </a:fontRef>
-        </p:style>
-        <p:txBody>
-          <a:bodyPr rtlCol="0" anchor="ctr"/>
-          <a:lstStyle/>
-          <a:p>
-            <a:pPr algn="ctr"/>
-          </a:p>
-        </p:txBody>
-      </p:sp>
-      <p:sp>
-        <p:nvSpPr>
-          <p:cNvPr id="9" name="Rectangle 8"/>
-          <p:cNvSpPr/>
-          <p:nvPr/>
-        </p:nvSpPr>
-        <p:spPr>
-          <a:xfrm>
-            <a:off x="548640" y="2212848"/>
-            <a:ext cx="45720" cy="1489011"/>
-          </a:xfrm>
-          <a:prstGeom prst="rect">
-            <a:avLst/>
-          </a:prstGeom>
-          <a:solidFill>
-            <a:srgbClr val="29D3E0"/>
-          </a:solidFill>
-          <a:ln>
-            <a:noFill/>
-          </a:ln>
-          <a:effectLst/>
-        </p:spPr>
-        <p:style>
-          <a:lnRef idx="1">
-            <a:schemeClr val="accent1"/>
-          </a:lnRef>
-          <a:fillRef idx="3">
-            <a:schemeClr val="accent1"/>
-          </a:fillRef>
-          <a:effectRef idx="2">
-            <a:schemeClr val="accent1"/>
-          </a:effectRef>
-          <a:fontRef idx="minor">
-            <a:schemeClr val="lt1"/>
-          </a:fontRef>
-        </p:style>
-        <p:txBody>
-          <a:bodyPr rtlCol="0" anchor="ctr"/>
-          <a:lstStyle/>
-          <a:p>
-            <a:pPr algn="ctr"/>
-          </a:p>
-        </p:txBody>
-      </p:sp>
-      <p:sp>
-        <p:nvSpPr>
-          <p:cNvPr id="10" name="TextBox 9"/>
+          <p:cNvPr id="8" name="TextBox 7"/>
           <p:cNvSpPr txBox="1"/>
           <p:nvPr/>
         </p:nvSpPr>
         <p:spPr>
           <a:xfrm>
-            <a:off x="749808" y="2231136"/>
-            <a:ext cx="3210458" cy="288353"/>
+            <a:off x="548640" y="1780194"/>
+            <a:ext cx="11094415" cy="523697"/>
           </a:xfrm>
           <a:prstGeom prst="rect">
             <a:avLst/>
@@ -17812,27 +17877,27 @@
               </a:spcAft>
             </a:pPr>
             <a:r>
-              <a:rPr b="1" sz="1625" i="0">
+              <a:rPr b="0" sz="1690" i="0">
                 <a:solidFill>
                   <a:srgbClr val="E6ECF7"/>
                 </a:solidFill>
                 <a:latin typeface="Arial"/>
               </a:rPr>
-              <a:t>Run the checks</a:t>
-            </a:r>
-          </a:p>
-        </p:txBody>
-      </p:sp>
-      <p:sp>
-        <p:nvSpPr>
-          <p:cNvPr id="11" name="TextBox 10"/>
+              <a:t>Chapter 04 tiered repositories and never said who does the tiering. This repository has to answer for itself, because the answer sets how strict everything after it should be.</a:t>
+            </a:r>
+          </a:p>
+        </p:txBody>
+      </p:sp>
+      <p:sp>
+        <p:nvSpPr>
+          <p:cNvPr id="9" name="TextBox 8"/>
           <p:cNvSpPr txBox="1"/>
           <p:nvPr/>
         </p:nvSpPr>
         <p:spPr>
           <a:xfrm>
-            <a:off x="749808" y="2592641"/>
-            <a:ext cx="3210458" cy="1036065"/>
+            <a:off x="548640" y="2825100"/>
+            <a:ext cx="11094415" cy="1389856"/>
           </a:xfrm>
           <a:prstGeom prst="rect">
             <a:avLst/>
@@ -17840,54 +17905,143 @@
           <a:noFill/>
         </p:spPr>
         <p:txBody>
-          <a:bodyPr wrap="square" lIns="0" rIns="0" tIns="0" bIns="0" anchor="t">
+          <a:bodyPr wrap="square" lIns="0" rIns="0" tIns="0" bIns="0">
             <a:spAutoFit/>
           </a:bodyPr>
           <a:lstStyle/>
           <a:p>
-            <a:pPr algn="l">
+            <a:pPr>
               <a:lnSpc>
-                <a:spcPct val="125000"/>
+                <a:spcPct val="115000"/>
               </a:lnSpc>
               <a:spcAft>
-                <a:spcPts val="0"/>
+                <a:spcPts val="400"/>
               </a:spcAft>
             </a:pPr>
             <a:r>
-              <a:rPr b="0" sz="1430" i="0">
+              <a:rPr sz="1625" b="1">
+                <a:solidFill>
+                  <a:srgbClr val="E8A33D"/>
+                </a:solidFill>
+                <a:latin typeface="Arial"/>
+              </a:rPr>
+              <a:t>—  </a:t>
+            </a:r>
+            <a:r>
+              <a:rPr b="0" sz="1625" i="0">
                 <a:solidFill>
                   <a:srgbClr val="E6ECF7"/>
                 </a:solidFill>
                 <a:latin typeface="Arial"/>
               </a:rPr>
-              <a:t>Format, lint, test and static analysis in a workflow file. Dependency and secret scanning switched on.</a:t>
-            </a:r>
-          </a:p>
-        </p:txBody>
-      </p:sp>
-      <p:sp>
-        <p:nvSpPr>
-          <p:cNvPr id="12" name="Rounded Rectangle 11"/>
+              <a:t>Does it move money, hold customer data, or neither?</a:t>
+            </a:r>
+          </a:p>
+          <a:p>
+            <a:pPr>
+              <a:lnSpc>
+                <a:spcPct val="115000"/>
+              </a:lnSpc>
+              <a:spcAft>
+                <a:spcPts val="400"/>
+              </a:spcAft>
+            </a:pPr>
+            <a:r>
+              <a:rPr sz="1625" b="1">
+                <a:solidFill>
+                  <a:srgbClr val="E8A33D"/>
+                </a:solidFill>
+                <a:latin typeface="Arial"/>
+              </a:rPr>
+              <a:t>—  </a:t>
+            </a:r>
+            <a:r>
+              <a:rPr b="0" sz="1625" i="0">
+                <a:solidFill>
+                  <a:srgbClr val="E6ECF7"/>
+                </a:solidFill>
+                <a:latin typeface="Arial"/>
+              </a:rPr>
+              <a:t>Write the answer in the README, with the date</a:t>
+            </a:r>
+          </a:p>
+          <a:p>
+            <a:pPr>
+              <a:lnSpc>
+                <a:spcPct val="115000"/>
+              </a:lnSpc>
+              <a:spcAft>
+                <a:spcPts val="400"/>
+              </a:spcAft>
+            </a:pPr>
+            <a:r>
+              <a:rPr sz="1625" b="1">
+                <a:solidFill>
+                  <a:srgbClr val="E8A33D"/>
+                </a:solidFill>
+                <a:latin typeface="Arial"/>
+              </a:rPr>
+              <a:t>—  </a:t>
+            </a:r>
+            <a:r>
+              <a:rPr b="0" sz="1625" i="0">
+                <a:solidFill>
+                  <a:srgbClr val="E6ECF7"/>
+                </a:solidFill>
+                <a:latin typeface="Arial"/>
+              </a:rPr>
+              <a:t>Say what follows: how many reviewers, whether a machine may approve, whether a security review is mandatory</a:t>
+            </a:r>
+          </a:p>
+          <a:p>
+            <a:pPr>
+              <a:lnSpc>
+                <a:spcPct val="115000"/>
+              </a:lnSpc>
+              <a:spcAft>
+                <a:spcPts val="400"/>
+              </a:spcAft>
+            </a:pPr>
+            <a:r>
+              <a:rPr sz="1625" b="1">
+                <a:solidFill>
+                  <a:srgbClr val="E8A33D"/>
+                </a:solidFill>
+                <a:latin typeface="Arial"/>
+              </a:rPr>
+              <a:t>—  </a:t>
+            </a:r>
+            <a:r>
+              <a:rPr b="0" sz="1625" i="0">
+                <a:solidFill>
+                  <a:srgbClr val="E6ECF7"/>
+                </a:solidFill>
+                <a:latin typeface="Arial"/>
+              </a:rPr>
+              <a:t>Revisit it when the repository starts touching something new</a:t>
+            </a:r>
+          </a:p>
+        </p:txBody>
+      </p:sp>
+      <p:sp>
+        <p:nvSpPr>
+          <p:cNvPr id="10" name="Rectangle 9"/>
           <p:cNvSpPr/>
           <p:nvPr/>
         </p:nvSpPr>
         <p:spPr>
           <a:xfrm>
-            <a:off x="4307738" y="2103120"/>
-            <a:ext cx="3576218" cy="1708467"/>
-          </a:xfrm>
-          <a:prstGeom prst="roundRect">
-            <a:avLst>
-              <a:gd name="adj" fmla="val 4000"/>
-            </a:avLst>
+            <a:off x="548640" y="4699588"/>
+            <a:ext cx="54864" cy="746861"/>
+          </a:xfrm>
+          <a:prstGeom prst="rect">
+            <a:avLst/>
           </a:prstGeom>
           <a:solidFill>
-            <a:srgbClr val="151D2E"/>
+            <a:srgbClr val="29D3E0"/>
           </a:solidFill>
-          <a:ln w="9525">
-            <a:solidFill>
-              <a:srgbClr val="35415A"/>
-            </a:solidFill>
+          <a:ln>
+            <a:noFill/>
           </a:ln>
           <a:effectLst/>
         </p:spPr>
@@ -17915,58 +18069,14 @@
       </p:sp>
       <p:sp>
         <p:nvSpPr>
-          <p:cNvPr id="13" name="Rectangle 12"/>
-          <p:cNvSpPr/>
-          <p:nvPr/>
-        </p:nvSpPr>
-        <p:spPr>
-          <a:xfrm>
-            <a:off x="4307738" y="2212848"/>
-            <a:ext cx="45720" cy="1489011"/>
-          </a:xfrm>
-          <a:prstGeom prst="rect">
-            <a:avLst/>
-          </a:prstGeom>
-          <a:solidFill>
-            <a:srgbClr val="E8A33D"/>
-          </a:solidFill>
-          <a:ln>
-            <a:noFill/>
-          </a:ln>
-          <a:effectLst/>
-        </p:spPr>
-        <p:style>
-          <a:lnRef idx="1">
-            <a:schemeClr val="accent1"/>
-          </a:lnRef>
-          <a:fillRef idx="3">
-            <a:schemeClr val="accent1"/>
-          </a:fillRef>
-          <a:effectRef idx="2">
-            <a:schemeClr val="accent1"/>
-          </a:effectRef>
-          <a:fontRef idx="minor">
-            <a:schemeClr val="lt1"/>
-          </a:fontRef>
-        </p:style>
-        <p:txBody>
-          <a:bodyPr rtlCol="0" anchor="ctr"/>
-          <a:lstStyle/>
-          <a:p>
-            <a:pPr algn="ctr"/>
-          </a:p>
-        </p:txBody>
-      </p:sp>
-      <p:sp>
-        <p:nvSpPr>
-          <p:cNvPr id="14" name="TextBox 13"/>
+          <p:cNvPr id="11" name="TextBox 10"/>
           <p:cNvSpPr txBox="1"/>
           <p:nvPr/>
         </p:nvSpPr>
         <p:spPr>
           <a:xfrm>
-            <a:off x="4508906" y="2231136"/>
-            <a:ext cx="3210458" cy="288353"/>
+            <a:off x="822959" y="4791028"/>
+            <a:ext cx="10682935" cy="563981"/>
           </a:xfrm>
           <a:prstGeom prst="rect">
             <a:avLst/>
@@ -17974,7 +18084,7 @@
           <a:noFill/>
         </p:spPr>
         <p:txBody>
-          <a:bodyPr wrap="square" lIns="0" rIns="0" tIns="0" bIns="0" anchor="t">
+          <a:bodyPr wrap="square" lIns="0" rIns="0" tIns="0" bIns="0" anchor="ctr">
             <a:spAutoFit/>
           </a:bodyPr>
           <a:lstStyle/>
@@ -17988,317 +18098,13 @@
               </a:spcAft>
             </a:pPr>
             <a:r>
-              <a:rPr b="1" sz="1625" i="0">
+              <a:rPr b="1" sz="1820" i="0">
                 <a:solidFill>
                   <a:srgbClr val="E6ECF7"/>
                 </a:solidFill>
                 <a:latin typeface="Arial"/>
               </a:rPr>
-              <a:t>Require the checks</a:t>
-            </a:r>
-          </a:p>
-        </p:txBody>
-      </p:sp>
-      <p:sp>
-        <p:nvSpPr>
-          <p:cNvPr id="15" name="TextBox 14"/>
-          <p:cNvSpPr txBox="1"/>
-          <p:nvPr/>
-        </p:nvSpPr>
-        <p:spPr>
-          <a:xfrm>
-            <a:off x="4508906" y="2592641"/>
-            <a:ext cx="3210458" cy="1036065"/>
-          </a:xfrm>
-          <a:prstGeom prst="rect">
-            <a:avLst/>
-          </a:prstGeom>
-          <a:noFill/>
-        </p:spPr>
-        <p:txBody>
-          <a:bodyPr wrap="square" lIns="0" rIns="0" tIns="0" bIns="0" anchor="t">
-            <a:spAutoFit/>
-          </a:bodyPr>
-          <a:lstStyle/>
-          <a:p>
-            <a:pPr algn="l">
-              <a:lnSpc>
-                <a:spcPct val="125000"/>
-              </a:lnSpc>
-              <a:spcAft>
-                <a:spcPts val="0"/>
-              </a:spcAft>
-            </a:pPr>
-            <a:r>
-              <a:rPr b="0" sz="1430" i="0">
-                <a:solidFill>
-                  <a:srgbClr val="E6ECF7"/>
-                </a:solidFill>
-                <a:latin typeface="Arial"/>
-              </a:rPr>
-              <a:t>Require each check by name. Require a pull request. Stop direct pushes to the default branch.</a:t>
-            </a:r>
-          </a:p>
-        </p:txBody>
-      </p:sp>
-      <p:sp>
-        <p:nvSpPr>
-          <p:cNvPr id="16" name="Rounded Rectangle 15"/>
-          <p:cNvSpPr/>
-          <p:nvPr/>
-        </p:nvSpPr>
-        <p:spPr>
-          <a:xfrm>
-            <a:off x="8066836" y="2103120"/>
-            <a:ext cx="3576218" cy="1708467"/>
-          </a:xfrm>
-          <a:prstGeom prst="roundRect">
-            <a:avLst>
-              <a:gd name="adj" fmla="val 4000"/>
-            </a:avLst>
-          </a:prstGeom>
-          <a:solidFill>
-            <a:srgbClr val="151D2E"/>
-          </a:solidFill>
-          <a:ln w="9525">
-            <a:solidFill>
-              <a:srgbClr val="35415A"/>
-            </a:solidFill>
-          </a:ln>
-          <a:effectLst/>
-        </p:spPr>
-        <p:style>
-          <a:lnRef idx="1">
-            <a:schemeClr val="accent1"/>
-          </a:lnRef>
-          <a:fillRef idx="3">
-            <a:schemeClr val="accent1"/>
-          </a:fillRef>
-          <a:effectRef idx="2">
-            <a:schemeClr val="accent1"/>
-          </a:effectRef>
-          <a:fontRef idx="minor">
-            <a:schemeClr val="lt1"/>
-          </a:fontRef>
-        </p:style>
-        <p:txBody>
-          <a:bodyPr rtlCol="0" anchor="ctr"/>
-          <a:lstStyle/>
-          <a:p>
-            <a:pPr algn="ctr"/>
-          </a:p>
-        </p:txBody>
-      </p:sp>
-      <p:sp>
-        <p:nvSpPr>
-          <p:cNvPr id="17" name="Rectangle 16"/>
-          <p:cNvSpPr/>
-          <p:nvPr/>
-        </p:nvSpPr>
-        <p:spPr>
-          <a:xfrm>
-            <a:off x="8066836" y="2212848"/>
-            <a:ext cx="45720" cy="1489011"/>
-          </a:xfrm>
-          <a:prstGeom prst="rect">
-            <a:avLst/>
-          </a:prstGeom>
-          <a:solidFill>
-            <a:srgbClr val="29D3E0"/>
-          </a:solidFill>
-          <a:ln>
-            <a:noFill/>
-          </a:ln>
-          <a:effectLst/>
-        </p:spPr>
-        <p:style>
-          <a:lnRef idx="1">
-            <a:schemeClr val="accent1"/>
-          </a:lnRef>
-          <a:fillRef idx="3">
-            <a:schemeClr val="accent1"/>
-          </a:fillRef>
-          <a:effectRef idx="2">
-            <a:schemeClr val="accent1"/>
-          </a:effectRef>
-          <a:fontRef idx="minor">
-            <a:schemeClr val="lt1"/>
-          </a:fontRef>
-        </p:style>
-        <p:txBody>
-          <a:bodyPr rtlCol="0" anchor="ctr"/>
-          <a:lstStyle/>
-          <a:p>
-            <a:pPr algn="ctr"/>
-          </a:p>
-        </p:txBody>
-      </p:sp>
-      <p:sp>
-        <p:nvSpPr>
-          <p:cNvPr id="18" name="TextBox 17"/>
-          <p:cNvSpPr txBox="1"/>
-          <p:nvPr/>
-        </p:nvSpPr>
-        <p:spPr>
-          <a:xfrm>
-            <a:off x="8268004" y="2231136"/>
-            <a:ext cx="3210458" cy="288353"/>
-          </a:xfrm>
-          <a:prstGeom prst="rect">
-            <a:avLst/>
-          </a:prstGeom>
-          <a:noFill/>
-        </p:spPr>
-        <p:txBody>
-          <a:bodyPr wrap="square" lIns="0" rIns="0" tIns="0" bIns="0" anchor="t">
-            <a:spAutoFit/>
-          </a:bodyPr>
-          <a:lstStyle/>
-          <a:p>
-            <a:pPr algn="l">
-              <a:lnSpc>
-                <a:spcPct val="115000"/>
-              </a:lnSpc>
-              <a:spcAft>
-                <a:spcPts val="0"/>
-              </a:spcAft>
-            </a:pPr>
-            <a:r>
-              <a:rPr b="1" sz="1625" i="0">
-                <a:solidFill>
-                  <a:srgbClr val="E6ECF7"/>
-                </a:solidFill>
-                <a:latin typeface="Arial"/>
-              </a:rPr>
-              <a:t>Keep approvals current</a:t>
-            </a:r>
-          </a:p>
-        </p:txBody>
-      </p:sp>
-      <p:sp>
-        <p:nvSpPr>
-          <p:cNvPr id="19" name="TextBox 18"/>
-          <p:cNvSpPr txBox="1"/>
-          <p:nvPr/>
-        </p:nvSpPr>
-        <p:spPr>
-          <a:xfrm>
-            <a:off x="8268004" y="2592641"/>
-            <a:ext cx="3210458" cy="1036065"/>
-          </a:xfrm>
-          <a:prstGeom prst="rect">
-            <a:avLst/>
-          </a:prstGeom>
-          <a:noFill/>
-        </p:spPr>
-        <p:txBody>
-          <a:bodyPr wrap="square" lIns="0" rIns="0" tIns="0" bIns="0" anchor="t">
-            <a:spAutoFit/>
-          </a:bodyPr>
-          <a:lstStyle/>
-          <a:p>
-            <a:pPr algn="l">
-              <a:lnSpc>
-                <a:spcPct val="125000"/>
-              </a:lnSpc>
-              <a:spcAft>
-                <a:spcPts val="0"/>
-              </a:spcAft>
-            </a:pPr>
-            <a:r>
-              <a:rPr b="0" sz="1430" i="0">
-                <a:solidFill>
-                  <a:srgbClr val="E6ECF7"/>
-                </a:solidFill>
-                <a:latin typeface="Arial"/>
-              </a:rPr>
-              <a:t>Dismiss stale approvals when new commits land, so the approval refers to the code that actually merges.</a:t>
-            </a:r>
-          </a:p>
-        </p:txBody>
-      </p:sp>
-      <p:sp>
-        <p:nvSpPr>
-          <p:cNvPr id="20" name="Rectangle 19"/>
-          <p:cNvSpPr/>
-          <p:nvPr/>
-        </p:nvSpPr>
-        <p:spPr>
-          <a:xfrm>
-            <a:off x="548640" y="4296219"/>
-            <a:ext cx="54864" cy="464870"/>
-          </a:xfrm>
-          <a:prstGeom prst="rect">
-            <a:avLst/>
-          </a:prstGeom>
-          <a:solidFill>
-            <a:srgbClr val="29D3E0"/>
-          </a:solidFill>
-          <a:ln>
-            <a:noFill/>
-          </a:ln>
-          <a:effectLst/>
-        </p:spPr>
-        <p:style>
-          <a:lnRef idx="1">
-            <a:schemeClr val="accent1"/>
-          </a:lnRef>
-          <a:fillRef idx="3">
-            <a:schemeClr val="accent1"/>
-          </a:fillRef>
-          <a:effectRef idx="2">
-            <a:schemeClr val="accent1"/>
-          </a:effectRef>
-          <a:fontRef idx="minor">
-            <a:schemeClr val="lt1"/>
-          </a:fontRef>
-        </p:style>
-        <p:txBody>
-          <a:bodyPr rtlCol="0" anchor="ctr"/>
-          <a:lstStyle/>
-          <a:p>
-            <a:pPr algn="ctr"/>
-          </a:p>
-        </p:txBody>
-      </p:sp>
-      <p:sp>
-        <p:nvSpPr>
-          <p:cNvPr id="21" name="TextBox 20"/>
-          <p:cNvSpPr txBox="1"/>
-          <p:nvPr/>
-        </p:nvSpPr>
-        <p:spPr>
-          <a:xfrm>
-            <a:off x="822959" y="4387659"/>
-            <a:ext cx="10682935" cy="281990"/>
-          </a:xfrm>
-          <a:prstGeom prst="rect">
-            <a:avLst/>
-          </a:prstGeom>
-          <a:noFill/>
-        </p:spPr>
-        <p:txBody>
-          <a:bodyPr wrap="square" lIns="0" rIns="0" tIns="0" bIns="0" anchor="ctr">
-            <a:spAutoFit/>
-          </a:bodyPr>
-          <a:lstStyle/>
-          <a:p>
-            <a:pPr algn="l">
-              <a:lnSpc>
-                <a:spcPct val="115000"/>
-              </a:lnSpc>
-              <a:spcAft>
-                <a:spcPts val="0"/>
-              </a:spcAft>
-            </a:pPr>
-            <a:r>
-              <a:rPr b="1" sz="1820" i="0">
-                <a:solidFill>
-                  <a:srgbClr val="E6ECF7"/>
-                </a:solidFill>
-                <a:latin typeface="Arial"/>
-              </a:rPr>
-              <a:t>A check that runs is a suggestion. A check that blocks a merge is a control.</a:t>
+              <a:t>One sentence in the README that a new joiner can find is more than most repositories have today.</a:t>
             </a:r>
           </a:p>
         </p:txBody>
@@ -18444,7 +18250,7 @@
                 </a:solidFill>
                 <a:latin typeface="Georgia"/>
               </a:rPr>
-              <a:t>Two decisions the repository owner makes</a:t>
+              <a:t>Make the mechanical checks unskippable</a:t>
             </a:r>
           </a:p>
         </p:txBody>
@@ -18585,8 +18391,8 @@
         </p:nvSpPr>
         <p:spPr>
           <a:xfrm>
-            <a:off x="548640" y="2097963"/>
-            <a:ext cx="5455767" cy="1481455"/>
+            <a:off x="548640" y="2103120"/>
+            <a:ext cx="3576218" cy="1708467"/>
           </a:xfrm>
           <a:prstGeom prst="roundRect">
             <a:avLst>
@@ -18633,8 +18439,8 @@
         </p:nvSpPr>
         <p:spPr>
           <a:xfrm>
-            <a:off x="548640" y="2207691"/>
-            <a:ext cx="45720" cy="1261999"/>
+            <a:off x="548640" y="2212848"/>
+            <a:ext cx="45720" cy="1489011"/>
           </a:xfrm>
           <a:prstGeom prst="rect">
             <a:avLst/>
@@ -18677,8 +18483,8 @@
         </p:nvSpPr>
         <p:spPr>
           <a:xfrm>
-            <a:off x="749808" y="2225979"/>
-            <a:ext cx="5090007" cy="288353"/>
+            <a:off x="749808" y="2231136"/>
+            <a:ext cx="3210458" cy="288353"/>
           </a:xfrm>
           <a:prstGeom prst="rect">
             <a:avLst/>
@@ -18706,7 +18512,7 @@
                 </a:solidFill>
                 <a:latin typeface="Arial"/>
               </a:rPr>
-              <a:t>Who reviews the paths that carry risk</a:t>
+              <a:t>Run the checks</a:t>
             </a:r>
           </a:p>
         </p:txBody>
@@ -18719,8 +18525,8 @@
         </p:nvSpPr>
         <p:spPr>
           <a:xfrm>
-            <a:off x="749808" y="2587485"/>
-            <a:ext cx="5090007" cy="809053"/>
+            <a:off x="749808" y="2592641"/>
+            <a:ext cx="3210458" cy="1036065"/>
           </a:xfrm>
           <a:prstGeom prst="rect">
             <a:avLst/>
@@ -18748,7 +18554,7 @@
                 </a:solidFill>
                 <a:latin typeface="Arial"/>
               </a:rPr>
-              <a:t>A CODEOWNERS file requires a named reviewer for the code that moves money or touches customer data. The rest of the repository stays on the lighter default.</a:t>
+              <a:t>Format, lint, test and static analysis in a workflow file. Dependency and secret scanning switched on.</a:t>
             </a:r>
           </a:p>
         </p:txBody>
@@ -18761,8 +18567,8 @@
         </p:nvSpPr>
         <p:spPr>
           <a:xfrm>
-            <a:off x="6187287" y="2097963"/>
-            <a:ext cx="5455767" cy="1481455"/>
+            <a:off x="4307738" y="2103120"/>
+            <a:ext cx="3576218" cy="1708467"/>
           </a:xfrm>
           <a:prstGeom prst="roundRect">
             <a:avLst>
@@ -18809,8 +18615,8 @@
         </p:nvSpPr>
         <p:spPr>
           <a:xfrm>
-            <a:off x="6187287" y="2207691"/>
-            <a:ext cx="45720" cy="1261999"/>
+            <a:off x="4307738" y="2212848"/>
+            <a:ext cx="45720" cy="1489011"/>
           </a:xfrm>
           <a:prstGeom prst="rect">
             <a:avLst/>
@@ -18853,8 +18659,8 @@
         </p:nvSpPr>
         <p:spPr>
           <a:xfrm>
-            <a:off x="6388455" y="2225979"/>
-            <a:ext cx="5090007" cy="288353"/>
+            <a:off x="4508906" y="2231136"/>
+            <a:ext cx="3210458" cy="288353"/>
           </a:xfrm>
           <a:prstGeom prst="rect">
             <a:avLst/>
@@ -18882,7 +18688,7 @@
                 </a:solidFill>
                 <a:latin typeface="Arial"/>
               </a:rPr>
-              <a:t>Whether a machine may approve here</a:t>
+              <a:t>Require the checks</a:t>
             </a:r>
           </a:p>
         </p:txBody>
@@ -18895,8 +18701,8 @@
         </p:nvSpPr>
         <p:spPr>
           <a:xfrm>
-            <a:off x="6388455" y="2587485"/>
-            <a:ext cx="5090007" cy="809053"/>
+            <a:off x="4508906" y="2592641"/>
+            <a:ext cx="3210458" cy="1036065"/>
           </a:xfrm>
           <a:prstGeom prst="rect">
             <a:avLst/>
@@ -18924,21 +18730,69 @@
                 </a:solidFill>
                 <a:latin typeface="Arial"/>
               </a:rPr>
-              <a:t>Off by default today. A payment repository and an internal dashboard may answer differently. Neither should answer by accident.</a:t>
-            </a:r>
-          </a:p>
-        </p:txBody>
-      </p:sp>
-      <p:sp>
-        <p:nvSpPr>
-          <p:cNvPr id="16" name="Rectangle 15"/>
+              <a:t>Require each check by name. Require a pull request. Stop direct pushes to the default branch.</a:t>
+            </a:r>
+          </a:p>
+        </p:txBody>
+      </p:sp>
+      <p:sp>
+        <p:nvSpPr>
+          <p:cNvPr id="16" name="Rounded Rectangle 15"/>
           <p:cNvSpPr/>
           <p:nvPr/>
         </p:nvSpPr>
         <p:spPr>
           <a:xfrm>
-            <a:off x="548640" y="4064050"/>
-            <a:ext cx="54864" cy="746861"/>
+            <a:off x="8066836" y="2103120"/>
+            <a:ext cx="3576218" cy="1708467"/>
+          </a:xfrm>
+          <a:prstGeom prst="roundRect">
+            <a:avLst>
+              <a:gd name="adj" fmla="val 4000"/>
+            </a:avLst>
+          </a:prstGeom>
+          <a:solidFill>
+            <a:srgbClr val="151D2E"/>
+          </a:solidFill>
+          <a:ln w="9525">
+            <a:solidFill>
+              <a:srgbClr val="35415A"/>
+            </a:solidFill>
+          </a:ln>
+          <a:effectLst/>
+        </p:spPr>
+        <p:style>
+          <a:lnRef idx="1">
+            <a:schemeClr val="accent1"/>
+          </a:lnRef>
+          <a:fillRef idx="3">
+            <a:schemeClr val="accent1"/>
+          </a:fillRef>
+          <a:effectRef idx="2">
+            <a:schemeClr val="accent1"/>
+          </a:effectRef>
+          <a:fontRef idx="minor">
+            <a:schemeClr val="lt1"/>
+          </a:fontRef>
+        </p:style>
+        <p:txBody>
+          <a:bodyPr rtlCol="0" anchor="ctr"/>
+          <a:lstStyle/>
+          <a:p>
+            <a:pPr algn="ctr"/>
+          </a:p>
+        </p:txBody>
+      </p:sp>
+      <p:sp>
+        <p:nvSpPr>
+          <p:cNvPr id="17" name="Rectangle 16"/>
+          <p:cNvSpPr/>
+          <p:nvPr/>
+        </p:nvSpPr>
+        <p:spPr>
+          <a:xfrm>
+            <a:off x="8066836" y="2212848"/>
+            <a:ext cx="45720" cy="1489011"/>
           </a:xfrm>
           <a:prstGeom prst="rect">
             <a:avLst/>
@@ -18975,14 +18829,14 @@
       </p:sp>
       <p:sp>
         <p:nvSpPr>
-          <p:cNvPr id="17" name="TextBox 16"/>
+          <p:cNvPr id="18" name="TextBox 17"/>
           <p:cNvSpPr txBox="1"/>
           <p:nvPr/>
         </p:nvSpPr>
         <p:spPr>
           <a:xfrm>
-            <a:off x="822959" y="4155490"/>
-            <a:ext cx="10682935" cy="563981"/>
+            <a:off x="8268004" y="2231136"/>
+            <a:ext cx="3210458" cy="288353"/>
           </a:xfrm>
           <a:prstGeom prst="rect">
             <a:avLst/>
@@ -18990,7 +18844,7 @@
           <a:noFill/>
         </p:spPr>
         <p:txBody>
-          <a:bodyPr wrap="square" lIns="0" rIns="0" tIns="0" bIns="0" anchor="ctr">
+          <a:bodyPr wrap="square" lIns="0" rIns="0" tIns="0" bIns="0" anchor="t">
             <a:spAutoFit/>
           </a:bodyPr>
           <a:lstStyle/>
@@ -19004,13 +18858,141 @@
               </a:spcAft>
             </a:pPr>
             <a:r>
+              <a:rPr b="1" sz="1625" i="0">
+                <a:solidFill>
+                  <a:srgbClr val="E6ECF7"/>
+                </a:solidFill>
+                <a:latin typeface="Arial"/>
+              </a:rPr>
+              <a:t>Keep approvals current</a:t>
+            </a:r>
+          </a:p>
+        </p:txBody>
+      </p:sp>
+      <p:sp>
+        <p:nvSpPr>
+          <p:cNvPr id="19" name="TextBox 18"/>
+          <p:cNvSpPr txBox="1"/>
+          <p:nvPr/>
+        </p:nvSpPr>
+        <p:spPr>
+          <a:xfrm>
+            <a:off x="8268004" y="2592641"/>
+            <a:ext cx="3210458" cy="1036065"/>
+          </a:xfrm>
+          <a:prstGeom prst="rect">
+            <a:avLst/>
+          </a:prstGeom>
+          <a:noFill/>
+        </p:spPr>
+        <p:txBody>
+          <a:bodyPr wrap="square" lIns="0" rIns="0" tIns="0" bIns="0" anchor="t">
+            <a:spAutoFit/>
+          </a:bodyPr>
+          <a:lstStyle/>
+          <a:p>
+            <a:pPr algn="l">
+              <a:lnSpc>
+                <a:spcPct val="125000"/>
+              </a:lnSpc>
+              <a:spcAft>
+                <a:spcPts val="0"/>
+              </a:spcAft>
+            </a:pPr>
+            <a:r>
+              <a:rPr b="0" sz="1430" i="0">
+                <a:solidFill>
+                  <a:srgbClr val="E6ECF7"/>
+                </a:solidFill>
+                <a:latin typeface="Arial"/>
+              </a:rPr>
+              <a:t>Dismiss stale approvals when new commits land, so the approval refers to the code that actually merges.</a:t>
+            </a:r>
+          </a:p>
+        </p:txBody>
+      </p:sp>
+      <p:sp>
+        <p:nvSpPr>
+          <p:cNvPr id="20" name="Rectangle 19"/>
+          <p:cNvSpPr/>
+          <p:nvPr/>
+        </p:nvSpPr>
+        <p:spPr>
+          <a:xfrm>
+            <a:off x="548640" y="4296219"/>
+            <a:ext cx="54864" cy="464870"/>
+          </a:xfrm>
+          <a:prstGeom prst="rect">
+            <a:avLst/>
+          </a:prstGeom>
+          <a:solidFill>
+            <a:srgbClr val="29D3E0"/>
+          </a:solidFill>
+          <a:ln>
+            <a:noFill/>
+          </a:ln>
+          <a:effectLst/>
+        </p:spPr>
+        <p:style>
+          <a:lnRef idx="1">
+            <a:schemeClr val="accent1"/>
+          </a:lnRef>
+          <a:fillRef idx="3">
+            <a:schemeClr val="accent1"/>
+          </a:fillRef>
+          <a:effectRef idx="2">
+            <a:schemeClr val="accent1"/>
+          </a:effectRef>
+          <a:fontRef idx="minor">
+            <a:schemeClr val="lt1"/>
+          </a:fontRef>
+        </p:style>
+        <p:txBody>
+          <a:bodyPr rtlCol="0" anchor="ctr"/>
+          <a:lstStyle/>
+          <a:p>
+            <a:pPr algn="ctr"/>
+          </a:p>
+        </p:txBody>
+      </p:sp>
+      <p:sp>
+        <p:nvSpPr>
+          <p:cNvPr id="21" name="TextBox 20"/>
+          <p:cNvSpPr txBox="1"/>
+          <p:nvPr/>
+        </p:nvSpPr>
+        <p:spPr>
+          <a:xfrm>
+            <a:off x="822959" y="4387659"/>
+            <a:ext cx="10682935" cy="281990"/>
+          </a:xfrm>
+          <a:prstGeom prst="rect">
+            <a:avLst/>
+          </a:prstGeom>
+          <a:noFill/>
+        </p:spPr>
+        <p:txBody>
+          <a:bodyPr wrap="square" lIns="0" rIns="0" tIns="0" bIns="0" anchor="ctr">
+            <a:spAutoFit/>
+          </a:bodyPr>
+          <a:lstStyle/>
+          <a:p>
+            <a:pPr algn="l">
+              <a:lnSpc>
+                <a:spcPct val="115000"/>
+              </a:lnSpc>
+              <a:spcAft>
+                <a:spcPts val="0"/>
+              </a:spcAft>
+            </a:pPr>
+            <a:r>
               <a:rPr b="1" sz="1820" i="0">
                 <a:solidFill>
                   <a:srgbClr val="E6ECF7"/>
                 </a:solidFill>
                 <a:latin typeface="Arial"/>
               </a:rPr>
-              <a:t>Write the second answer down, with the reason. A setting with no owner is a decision nobody made.</a:t>
+              <a:t>A check that runs is a suggestion. A check that blocks a merge is a control.</a:t>
             </a:r>
           </a:p>
         </p:txBody>
@@ -19156,7 +19138,7 @@
                 </a:solidFill>
                 <a:latin typeface="Georgia"/>
               </a:rPr>
-              <a:t>Ask the author for what no check can see</a:t>
+              <a:t>Two decisions that follow from the tier</a:t>
             </a:r>
           </a:p>
         </p:txBody>
@@ -19291,14 +19273,106 @@
       </p:sp>
       <p:sp>
         <p:nvSpPr>
-          <p:cNvPr id="8" name="TextBox 7"/>
+          <p:cNvPr id="8" name="Rounded Rectangle 7"/>
+          <p:cNvSpPr/>
+          <p:nvPr/>
+        </p:nvSpPr>
+        <p:spPr>
+          <a:xfrm>
+            <a:off x="548640" y="2097963"/>
+            <a:ext cx="5455767" cy="1481455"/>
+          </a:xfrm>
+          <a:prstGeom prst="roundRect">
+            <a:avLst>
+              <a:gd name="adj" fmla="val 4000"/>
+            </a:avLst>
+          </a:prstGeom>
+          <a:solidFill>
+            <a:srgbClr val="151D2E"/>
+          </a:solidFill>
+          <a:ln w="9525">
+            <a:solidFill>
+              <a:srgbClr val="35415A"/>
+            </a:solidFill>
+          </a:ln>
+          <a:effectLst/>
+        </p:spPr>
+        <p:style>
+          <a:lnRef idx="1">
+            <a:schemeClr val="accent1"/>
+          </a:lnRef>
+          <a:fillRef idx="3">
+            <a:schemeClr val="accent1"/>
+          </a:fillRef>
+          <a:effectRef idx="2">
+            <a:schemeClr val="accent1"/>
+          </a:effectRef>
+          <a:fontRef idx="minor">
+            <a:schemeClr val="lt1"/>
+          </a:fontRef>
+        </p:style>
+        <p:txBody>
+          <a:bodyPr rtlCol="0" anchor="ctr"/>
+          <a:lstStyle/>
+          <a:p>
+            <a:pPr algn="ctr"/>
+          </a:p>
+        </p:txBody>
+      </p:sp>
+      <p:sp>
+        <p:nvSpPr>
+          <p:cNvPr id="9" name="Rectangle 8"/>
+          <p:cNvSpPr/>
+          <p:nvPr/>
+        </p:nvSpPr>
+        <p:spPr>
+          <a:xfrm>
+            <a:off x="548640" y="2207691"/>
+            <a:ext cx="45720" cy="1261999"/>
+          </a:xfrm>
+          <a:prstGeom prst="rect">
+            <a:avLst/>
+          </a:prstGeom>
+          <a:solidFill>
+            <a:srgbClr val="29D3E0"/>
+          </a:solidFill>
+          <a:ln>
+            <a:noFill/>
+          </a:ln>
+          <a:effectLst/>
+        </p:spPr>
+        <p:style>
+          <a:lnRef idx="1">
+            <a:schemeClr val="accent1"/>
+          </a:lnRef>
+          <a:fillRef idx="3">
+            <a:schemeClr val="accent1"/>
+          </a:fillRef>
+          <a:effectRef idx="2">
+            <a:schemeClr val="accent1"/>
+          </a:effectRef>
+          <a:fontRef idx="minor">
+            <a:schemeClr val="lt1"/>
+          </a:fontRef>
+        </p:style>
+        <p:txBody>
+          <a:bodyPr rtlCol="0" anchor="ctr"/>
+          <a:lstStyle/>
+          <a:p>
+            <a:pPr algn="ctr"/>
+          </a:p>
+        </p:txBody>
+      </p:sp>
+      <p:sp>
+        <p:nvSpPr>
+          <p:cNvPr id="10" name="TextBox 9"/>
           <p:cNvSpPr txBox="1"/>
           <p:nvPr/>
         </p:nvSpPr>
         <p:spPr>
           <a:xfrm>
-            <a:off x="548640" y="1946588"/>
-            <a:ext cx="11094415" cy="261848"/>
+            <a:off x="749808" y="2225979"/>
+            <a:ext cx="5090007" cy="288353"/>
           </a:xfrm>
           <a:prstGeom prst="rect">
             <a:avLst/>
@@ -19320,27 +19394,27 @@
               </a:spcAft>
             </a:pPr>
             <a:r>
-              <a:rPr b="0" sz="1690" i="0">
+              <a:rPr b="1" sz="1625" i="0">
                 <a:solidFill>
                   <a:srgbClr val="E6ECF7"/>
                 </a:solidFill>
                 <a:latin typeface="Arial"/>
               </a:rPr>
-              <a:t>One pull request template. The same questions in front of every change.</a:t>
-            </a:r>
-          </a:p>
-        </p:txBody>
-      </p:sp>
-      <p:sp>
-        <p:nvSpPr>
-          <p:cNvPr id="9" name="TextBox 8"/>
+              <a:t>Who reviews the paths that carry risk</a:t>
+            </a:r>
+          </a:p>
+        </p:txBody>
+      </p:sp>
+      <p:sp>
+        <p:nvSpPr>
+          <p:cNvPr id="11" name="TextBox 10"/>
           <p:cNvSpPr txBox="1"/>
           <p:nvPr/>
         </p:nvSpPr>
         <p:spPr>
           <a:xfrm>
-            <a:off x="548640" y="2729644"/>
-            <a:ext cx="11094415" cy="1152524"/>
+            <a:off x="749808" y="2587485"/>
+            <a:ext cx="5090007" cy="809053"/>
           </a:xfrm>
           <a:prstGeom prst="rect">
             <a:avLst/>
@@ -19348,140 +19422,95 @@
           <a:noFill/>
         </p:spPr>
         <p:txBody>
-          <a:bodyPr wrap="square" lIns="0" rIns="0" tIns="0" bIns="0">
+          <a:bodyPr wrap="square" lIns="0" rIns="0" tIns="0" bIns="0" anchor="t">
             <a:spAutoFit/>
           </a:bodyPr>
           <a:lstStyle/>
           <a:p>
-            <a:pPr>
+            <a:pPr algn="l">
               <a:lnSpc>
-                <a:spcPct val="115000"/>
+                <a:spcPct val="125000"/>
               </a:lnSpc>
               <a:spcAft>
-                <a:spcPts val="400"/>
+                <a:spcPts val="0"/>
               </a:spcAft>
             </a:pPr>
             <a:r>
-              <a:rPr sz="1625" b="1">
-                <a:solidFill>
-                  <a:srgbClr val="E8A33D"/>
+              <a:rPr b="0" sz="1430" i="0">
+                <a:solidFill>
+                  <a:srgbClr val="E6ECF7"/>
                 </a:solidFill>
                 <a:latin typeface="Arial"/>
               </a:rPr>
-              <a:t>—  </a:t>
-            </a:r>
-            <a:r>
-              <a:rPr b="0" sz="1625" i="0">
-                <a:solidFill>
-                  <a:srgbClr val="E6ECF7"/>
-                </a:solidFill>
-                <a:latin typeface="Arial"/>
-              </a:rPr>
-              <a:t>What changed, and why it belongs here</a:t>
-            </a:r>
-          </a:p>
-          <a:p>
-            <a:pPr>
-              <a:lnSpc>
-                <a:spcPct val="115000"/>
-              </a:lnSpc>
-              <a:spcAft>
-                <a:spcPts val="400"/>
-              </a:spcAft>
-            </a:pPr>
-            <a:r>
-              <a:rPr sz="1625" b="1">
-                <a:solidFill>
-                  <a:srgbClr val="E8A33D"/>
-                </a:solidFill>
-                <a:latin typeface="Arial"/>
-              </a:rPr>
-              <a:t>—  </a:t>
-            </a:r>
-            <a:r>
-              <a:rPr b="0" sz="1625" i="0">
-                <a:solidFill>
-                  <a:srgbClr val="E6ECF7"/>
-                </a:solidFill>
-                <a:latin typeface="Arial"/>
-              </a:rPr>
-              <a:t>What you want looked at, specifically</a:t>
-            </a:r>
-          </a:p>
-          <a:p>
-            <a:pPr>
-              <a:lnSpc>
-                <a:spcPct val="115000"/>
-              </a:lnSpc>
-              <a:spcAft>
-                <a:spcPts val="400"/>
-              </a:spcAft>
-            </a:pPr>
-            <a:r>
-              <a:rPr sz="1625" b="1">
-                <a:solidFill>
-                  <a:srgbClr val="E8A33D"/>
-                </a:solidFill>
-                <a:latin typeface="Arial"/>
-              </a:rPr>
-              <a:t>—  </a:t>
-            </a:r>
-            <a:r>
-              <a:rPr b="0" sz="1625" i="0">
-                <a:solidFill>
-                  <a:srgbClr val="E6ECF7"/>
-                </a:solidFill>
-                <a:latin typeface="Arial"/>
-              </a:rPr>
-              <a:t>How to undo it</a:t>
-            </a:r>
-          </a:p>
-          <a:p>
-            <a:pPr>
-              <a:lnSpc>
-                <a:spcPct val="115000"/>
-              </a:lnSpc>
-              <a:spcAft>
-                <a:spcPts val="400"/>
-              </a:spcAft>
-            </a:pPr>
-            <a:r>
-              <a:rPr sz="1625" b="1">
-                <a:solidFill>
-                  <a:srgbClr val="E8A33D"/>
-                </a:solidFill>
-                <a:latin typeface="Arial"/>
-              </a:rPr>
-              <a:t>—  </a:t>
-            </a:r>
-            <a:r>
-              <a:rPr b="0" sz="1625" i="0">
-                <a:solidFill>
-                  <a:srgbClr val="E6ECF7"/>
-                </a:solidFill>
-                <a:latin typeface="Arial"/>
-              </a:rPr>
-              <a:t>Which parts an agent wrote</a:t>
-            </a:r>
-          </a:p>
-        </p:txBody>
-      </p:sp>
-      <p:sp>
-        <p:nvSpPr>
-          <p:cNvPr id="10" name="Rectangle 9"/>
+              <a:t>A CODEOWNERS file requires a named reviewer for the code that moves money or touches customer data. The rest of the repository stays on the lighter default.</a:t>
+            </a:r>
+          </a:p>
+        </p:txBody>
+      </p:sp>
+      <p:sp>
+        <p:nvSpPr>
+          <p:cNvPr id="12" name="Rounded Rectangle 11"/>
           <p:cNvSpPr/>
           <p:nvPr/>
         </p:nvSpPr>
         <p:spPr>
           <a:xfrm>
-            <a:off x="548640" y="4366801"/>
-            <a:ext cx="54864" cy="746861"/>
-          </a:xfrm>
-          <a:prstGeom prst="rect">
-            <a:avLst/>
+            <a:off x="6187287" y="2097963"/>
+            <a:ext cx="5455767" cy="1481455"/>
+          </a:xfrm>
+          <a:prstGeom prst="roundRect">
+            <a:avLst>
+              <a:gd name="adj" fmla="val 4000"/>
+            </a:avLst>
           </a:prstGeom>
           <a:solidFill>
-            <a:srgbClr val="29D3E0"/>
+            <a:srgbClr val="151D2E"/>
+          </a:solidFill>
+          <a:ln w="9525">
+            <a:solidFill>
+              <a:srgbClr val="35415A"/>
+            </a:solidFill>
+          </a:ln>
+          <a:effectLst/>
+        </p:spPr>
+        <p:style>
+          <a:lnRef idx="1">
+            <a:schemeClr val="accent1"/>
+          </a:lnRef>
+          <a:fillRef idx="3">
+            <a:schemeClr val="accent1"/>
+          </a:fillRef>
+          <a:effectRef idx="2">
+            <a:schemeClr val="accent1"/>
+          </a:effectRef>
+          <a:fontRef idx="minor">
+            <a:schemeClr val="lt1"/>
+          </a:fontRef>
+        </p:style>
+        <p:txBody>
+          <a:bodyPr rtlCol="0" anchor="ctr"/>
+          <a:lstStyle/>
+          <a:p>
+            <a:pPr algn="ctr"/>
+          </a:p>
+        </p:txBody>
+      </p:sp>
+      <p:sp>
+        <p:nvSpPr>
+          <p:cNvPr id="13" name="Rectangle 12"/>
+          <p:cNvSpPr/>
+          <p:nvPr/>
+        </p:nvSpPr>
+        <p:spPr>
+          <a:xfrm>
+            <a:off x="6187287" y="2207691"/>
+            <a:ext cx="45720" cy="1261999"/>
+          </a:xfrm>
+          <a:prstGeom prst="rect">
+            <a:avLst/>
+          </a:prstGeom>
+          <a:solidFill>
+            <a:srgbClr val="E8A33D"/>
           </a:solidFill>
           <a:ln>
             <a:noFill/>
@@ -19512,14 +19541,14 @@
       </p:sp>
       <p:sp>
         <p:nvSpPr>
-          <p:cNvPr id="11" name="TextBox 10"/>
+          <p:cNvPr id="14" name="TextBox 13"/>
           <p:cNvSpPr txBox="1"/>
           <p:nvPr/>
         </p:nvSpPr>
         <p:spPr>
           <a:xfrm>
-            <a:off x="822959" y="4458241"/>
-            <a:ext cx="10682935" cy="563981"/>
+            <a:off x="6388455" y="2225979"/>
+            <a:ext cx="5090007" cy="288353"/>
           </a:xfrm>
           <a:prstGeom prst="rect">
             <a:avLst/>
@@ -19527,7 +19556,7 @@
           <a:noFill/>
         </p:spPr>
         <p:txBody>
-          <a:bodyPr wrap="square" lIns="0" rIns="0" tIns="0" bIns="0" anchor="ctr">
+          <a:bodyPr wrap="square" lIns="0" rIns="0" tIns="0" bIns="0" anchor="t">
             <a:spAutoFit/>
           </a:bodyPr>
           <a:lstStyle/>
@@ -19541,13 +19570,141 @@
               </a:spcAft>
             </a:pPr>
             <a:r>
+              <a:rPr b="1" sz="1625" i="0">
+                <a:solidFill>
+                  <a:srgbClr val="E6ECF7"/>
+                </a:solidFill>
+                <a:latin typeface="Arial"/>
+              </a:rPr>
+              <a:t>Whether a machine may approve here</a:t>
+            </a:r>
+          </a:p>
+        </p:txBody>
+      </p:sp>
+      <p:sp>
+        <p:nvSpPr>
+          <p:cNvPr id="15" name="TextBox 14"/>
+          <p:cNvSpPr txBox="1"/>
+          <p:nvPr/>
+        </p:nvSpPr>
+        <p:spPr>
+          <a:xfrm>
+            <a:off x="6388455" y="2587485"/>
+            <a:ext cx="5090007" cy="809053"/>
+          </a:xfrm>
+          <a:prstGeom prst="rect">
+            <a:avLst/>
+          </a:prstGeom>
+          <a:noFill/>
+        </p:spPr>
+        <p:txBody>
+          <a:bodyPr wrap="square" lIns="0" rIns="0" tIns="0" bIns="0" anchor="t">
+            <a:spAutoFit/>
+          </a:bodyPr>
+          <a:lstStyle/>
+          <a:p>
+            <a:pPr algn="l">
+              <a:lnSpc>
+                <a:spcPct val="125000"/>
+              </a:lnSpc>
+              <a:spcAft>
+                <a:spcPts val="0"/>
+              </a:spcAft>
+            </a:pPr>
+            <a:r>
+              <a:rPr b="0" sz="1430" i="0">
+                <a:solidFill>
+                  <a:srgbClr val="E6ECF7"/>
+                </a:solidFill>
+                <a:latin typeface="Arial"/>
+              </a:rPr>
+              <a:t>Off by default today. A payment repository and an internal dashboard may answer differently. Neither should answer by accident.</a:t>
+            </a:r>
+          </a:p>
+        </p:txBody>
+      </p:sp>
+      <p:sp>
+        <p:nvSpPr>
+          <p:cNvPr id="16" name="Rectangle 15"/>
+          <p:cNvSpPr/>
+          <p:nvPr/>
+        </p:nvSpPr>
+        <p:spPr>
+          <a:xfrm>
+            <a:off x="548640" y="4064050"/>
+            <a:ext cx="54864" cy="746861"/>
+          </a:xfrm>
+          <a:prstGeom prst="rect">
+            <a:avLst/>
+          </a:prstGeom>
+          <a:solidFill>
+            <a:srgbClr val="29D3E0"/>
+          </a:solidFill>
+          <a:ln>
+            <a:noFill/>
+          </a:ln>
+          <a:effectLst/>
+        </p:spPr>
+        <p:style>
+          <a:lnRef idx="1">
+            <a:schemeClr val="accent1"/>
+          </a:lnRef>
+          <a:fillRef idx="3">
+            <a:schemeClr val="accent1"/>
+          </a:fillRef>
+          <a:effectRef idx="2">
+            <a:schemeClr val="accent1"/>
+          </a:effectRef>
+          <a:fontRef idx="minor">
+            <a:schemeClr val="lt1"/>
+          </a:fontRef>
+        </p:style>
+        <p:txBody>
+          <a:bodyPr rtlCol="0" anchor="ctr"/>
+          <a:lstStyle/>
+          <a:p>
+            <a:pPr algn="ctr"/>
+          </a:p>
+        </p:txBody>
+      </p:sp>
+      <p:sp>
+        <p:nvSpPr>
+          <p:cNvPr id="17" name="TextBox 16"/>
+          <p:cNvSpPr txBox="1"/>
+          <p:nvPr/>
+        </p:nvSpPr>
+        <p:spPr>
+          <a:xfrm>
+            <a:off x="822959" y="4155490"/>
+            <a:ext cx="10682935" cy="563981"/>
+          </a:xfrm>
+          <a:prstGeom prst="rect">
+            <a:avLst/>
+          </a:prstGeom>
+          <a:noFill/>
+        </p:spPr>
+        <p:txBody>
+          <a:bodyPr wrap="square" lIns="0" rIns="0" tIns="0" bIns="0" anchor="ctr">
+            <a:spAutoFit/>
+          </a:bodyPr>
+          <a:lstStyle/>
+          <a:p>
+            <a:pPr algn="l">
+              <a:lnSpc>
+                <a:spcPct val="115000"/>
+              </a:lnSpc>
+              <a:spcAft>
+                <a:spcPts val="0"/>
+              </a:spcAft>
+            </a:pPr>
+            <a:r>
               <a:rPr b="1" sz="1820" i="0">
                 <a:solidFill>
                   <a:srgbClr val="E6ECF7"/>
                 </a:solidFill>
                 <a:latin typeface="Arial"/>
               </a:rPr>
-              <a:t>Across 80.000 pull requests, descriptions rarely changed the review. The exception was one that explains the code and asks for a specific kind of feedback. So ask for both.</a:t>
+              <a:t>Write the second answer down, with the reason. A setting with no owner is a decision nobody made.</a:t>
             </a:r>
           </a:p>
         </p:txBody>
@@ -19693,7 +19850,7 @@
                 </a:solidFill>
                 <a:latin typeface="Georgia"/>
               </a:rPr>
-              <a:t>The first week</a:t>
+              <a:t>Ask the author for what no check can see</a:t>
             </a:r>
           </a:p>
         </p:txBody>
@@ -19826,6 +19983,543 @@
           </a:p>
         </p:txBody>
       </p:sp>
+      <p:sp>
+        <p:nvSpPr>
+          <p:cNvPr id="8" name="TextBox 7"/>
+          <p:cNvSpPr txBox="1"/>
+          <p:nvPr/>
+        </p:nvSpPr>
+        <p:spPr>
+          <a:xfrm>
+            <a:off x="548640" y="1946588"/>
+            <a:ext cx="11094415" cy="261848"/>
+          </a:xfrm>
+          <a:prstGeom prst="rect">
+            <a:avLst/>
+          </a:prstGeom>
+          <a:noFill/>
+        </p:spPr>
+        <p:txBody>
+          <a:bodyPr wrap="square" lIns="0" rIns="0" tIns="0" bIns="0" anchor="t">
+            <a:spAutoFit/>
+          </a:bodyPr>
+          <a:lstStyle/>
+          <a:p>
+            <a:pPr algn="l">
+              <a:lnSpc>
+                <a:spcPct val="115000"/>
+              </a:lnSpc>
+              <a:spcAft>
+                <a:spcPts val="0"/>
+              </a:spcAft>
+            </a:pPr>
+            <a:r>
+              <a:rPr b="0" sz="1690" i="0">
+                <a:solidFill>
+                  <a:srgbClr val="E6ECF7"/>
+                </a:solidFill>
+                <a:latin typeface="Arial"/>
+              </a:rPr>
+              <a:t>One pull request template. The same questions in front of every change.</a:t>
+            </a:r>
+          </a:p>
+        </p:txBody>
+      </p:sp>
+      <p:sp>
+        <p:nvSpPr>
+          <p:cNvPr id="9" name="TextBox 8"/>
+          <p:cNvSpPr txBox="1"/>
+          <p:nvPr/>
+        </p:nvSpPr>
+        <p:spPr>
+          <a:xfrm>
+            <a:off x="548640" y="2729644"/>
+            <a:ext cx="11094415" cy="1152524"/>
+          </a:xfrm>
+          <a:prstGeom prst="rect">
+            <a:avLst/>
+          </a:prstGeom>
+          <a:noFill/>
+        </p:spPr>
+        <p:txBody>
+          <a:bodyPr wrap="square" lIns="0" rIns="0" tIns="0" bIns="0">
+            <a:spAutoFit/>
+          </a:bodyPr>
+          <a:lstStyle/>
+          <a:p>
+            <a:pPr>
+              <a:lnSpc>
+                <a:spcPct val="115000"/>
+              </a:lnSpc>
+              <a:spcAft>
+                <a:spcPts val="400"/>
+              </a:spcAft>
+            </a:pPr>
+            <a:r>
+              <a:rPr sz="1625" b="1">
+                <a:solidFill>
+                  <a:srgbClr val="E8A33D"/>
+                </a:solidFill>
+                <a:latin typeface="Arial"/>
+              </a:rPr>
+              <a:t>—  </a:t>
+            </a:r>
+            <a:r>
+              <a:rPr b="0" sz="1625" i="0">
+                <a:solidFill>
+                  <a:srgbClr val="E6ECF7"/>
+                </a:solidFill>
+                <a:latin typeface="Arial"/>
+              </a:rPr>
+              <a:t>What changed, and why it belongs here</a:t>
+            </a:r>
+          </a:p>
+          <a:p>
+            <a:pPr>
+              <a:lnSpc>
+                <a:spcPct val="115000"/>
+              </a:lnSpc>
+              <a:spcAft>
+                <a:spcPts val="400"/>
+              </a:spcAft>
+            </a:pPr>
+            <a:r>
+              <a:rPr sz="1625" b="1">
+                <a:solidFill>
+                  <a:srgbClr val="E8A33D"/>
+                </a:solidFill>
+                <a:latin typeface="Arial"/>
+              </a:rPr>
+              <a:t>—  </a:t>
+            </a:r>
+            <a:r>
+              <a:rPr b="0" sz="1625" i="0">
+                <a:solidFill>
+                  <a:srgbClr val="E6ECF7"/>
+                </a:solidFill>
+                <a:latin typeface="Arial"/>
+              </a:rPr>
+              <a:t>What you want looked at, specifically</a:t>
+            </a:r>
+          </a:p>
+          <a:p>
+            <a:pPr>
+              <a:lnSpc>
+                <a:spcPct val="115000"/>
+              </a:lnSpc>
+              <a:spcAft>
+                <a:spcPts val="400"/>
+              </a:spcAft>
+            </a:pPr>
+            <a:r>
+              <a:rPr sz="1625" b="1">
+                <a:solidFill>
+                  <a:srgbClr val="E8A33D"/>
+                </a:solidFill>
+                <a:latin typeface="Arial"/>
+              </a:rPr>
+              <a:t>—  </a:t>
+            </a:r>
+            <a:r>
+              <a:rPr b="0" sz="1625" i="0">
+                <a:solidFill>
+                  <a:srgbClr val="E6ECF7"/>
+                </a:solidFill>
+                <a:latin typeface="Arial"/>
+              </a:rPr>
+              <a:t>How to undo it</a:t>
+            </a:r>
+          </a:p>
+          <a:p>
+            <a:pPr>
+              <a:lnSpc>
+                <a:spcPct val="115000"/>
+              </a:lnSpc>
+              <a:spcAft>
+                <a:spcPts val="400"/>
+              </a:spcAft>
+            </a:pPr>
+            <a:r>
+              <a:rPr sz="1625" b="1">
+                <a:solidFill>
+                  <a:srgbClr val="E8A33D"/>
+                </a:solidFill>
+                <a:latin typeface="Arial"/>
+              </a:rPr>
+              <a:t>—  </a:t>
+            </a:r>
+            <a:r>
+              <a:rPr b="0" sz="1625" i="0">
+                <a:solidFill>
+                  <a:srgbClr val="E6ECF7"/>
+                </a:solidFill>
+                <a:latin typeface="Arial"/>
+              </a:rPr>
+              <a:t>Which parts an agent wrote</a:t>
+            </a:r>
+          </a:p>
+        </p:txBody>
+      </p:sp>
+      <p:sp>
+        <p:nvSpPr>
+          <p:cNvPr id="10" name="Rectangle 9"/>
+          <p:cNvSpPr/>
+          <p:nvPr/>
+        </p:nvSpPr>
+        <p:spPr>
+          <a:xfrm>
+            <a:off x="548640" y="4366801"/>
+            <a:ext cx="54864" cy="746861"/>
+          </a:xfrm>
+          <a:prstGeom prst="rect">
+            <a:avLst/>
+          </a:prstGeom>
+          <a:solidFill>
+            <a:srgbClr val="29D3E0"/>
+          </a:solidFill>
+          <a:ln>
+            <a:noFill/>
+          </a:ln>
+          <a:effectLst/>
+        </p:spPr>
+        <p:style>
+          <a:lnRef idx="1">
+            <a:schemeClr val="accent1"/>
+          </a:lnRef>
+          <a:fillRef idx="3">
+            <a:schemeClr val="accent1"/>
+          </a:fillRef>
+          <a:effectRef idx="2">
+            <a:schemeClr val="accent1"/>
+          </a:effectRef>
+          <a:fontRef idx="minor">
+            <a:schemeClr val="lt1"/>
+          </a:fontRef>
+        </p:style>
+        <p:txBody>
+          <a:bodyPr rtlCol="0" anchor="ctr"/>
+          <a:lstStyle/>
+          <a:p>
+            <a:pPr algn="ctr"/>
+          </a:p>
+        </p:txBody>
+      </p:sp>
+      <p:sp>
+        <p:nvSpPr>
+          <p:cNvPr id="11" name="TextBox 10"/>
+          <p:cNvSpPr txBox="1"/>
+          <p:nvPr/>
+        </p:nvSpPr>
+        <p:spPr>
+          <a:xfrm>
+            <a:off x="822959" y="4458241"/>
+            <a:ext cx="10682935" cy="563981"/>
+          </a:xfrm>
+          <a:prstGeom prst="rect">
+            <a:avLst/>
+          </a:prstGeom>
+          <a:noFill/>
+        </p:spPr>
+        <p:txBody>
+          <a:bodyPr wrap="square" lIns="0" rIns="0" tIns="0" bIns="0" anchor="ctr">
+            <a:spAutoFit/>
+          </a:bodyPr>
+          <a:lstStyle/>
+          <a:p>
+            <a:pPr algn="l">
+              <a:lnSpc>
+                <a:spcPct val="115000"/>
+              </a:lnSpc>
+              <a:spcAft>
+                <a:spcPts val="0"/>
+              </a:spcAft>
+            </a:pPr>
+            <a:r>
+              <a:rPr b="1" sz="1820" i="0">
+                <a:solidFill>
+                  <a:srgbClr val="E6ECF7"/>
+                </a:solidFill>
+                <a:latin typeface="Arial"/>
+              </a:rPr>
+              <a:t>Across 80.000 pull requests, descriptions rarely changed the review. The exception was one that explains the code and asks for a specific kind of feedback. So ask for both.</a:t>
+            </a:r>
+          </a:p>
+        </p:txBody>
+      </p:sp>
+    </p:spTree>
+  </p:cSld>
+  <p:clrMapOvr>
+    <a:masterClrMapping/>
+  </p:clrMapOvr>
+</p:sld>
+</file>
+
+<file path=ppt/slides/slide27.xml><?xml version="1.0" encoding="utf-8"?>
+<p:sld xmlns:a="http://schemas.openxmlformats.org/drawingml/2006/main" xmlns:p="http://schemas.openxmlformats.org/presentationml/2006/main" xmlns:r="http://schemas.openxmlformats.org/officeDocument/2006/relationships">
+  <p:cSld>
+    <p:spTree>
+      <p:nvGrpSpPr>
+        <p:cNvPr id="1" name=""/>
+        <p:cNvGrpSpPr/>
+        <p:nvPr/>
+      </p:nvGrpSpPr>
+      <p:grpSpPr/>
+      <p:sp>
+        <p:nvSpPr>
+          <p:cNvPr id="2" name="Rectangle 1"/>
+          <p:cNvSpPr/>
+          <p:nvPr/>
+        </p:nvSpPr>
+        <p:spPr>
+          <a:xfrm>
+            <a:off x="0" y="0"/>
+            <a:ext cx="12191695" cy="6858000"/>
+          </a:xfrm>
+          <a:prstGeom prst="rect">
+            <a:avLst/>
+          </a:prstGeom>
+          <a:solidFill>
+            <a:srgbClr val="0E1420"/>
+          </a:solidFill>
+          <a:ln>
+            <a:noFill/>
+          </a:ln>
+          <a:effectLst/>
+        </p:spPr>
+        <p:style>
+          <a:lnRef idx="1">
+            <a:schemeClr val="accent1"/>
+          </a:lnRef>
+          <a:fillRef idx="3">
+            <a:schemeClr val="accent1"/>
+          </a:fillRef>
+          <a:effectRef idx="2">
+            <a:schemeClr val="accent1"/>
+          </a:effectRef>
+          <a:fontRef idx="minor">
+            <a:schemeClr val="lt1"/>
+          </a:fontRef>
+        </p:style>
+        <p:txBody>
+          <a:bodyPr rtlCol="0" anchor="ctr"/>
+          <a:lstStyle/>
+          <a:p>
+            <a:pPr algn="ctr"/>
+          </a:p>
+        </p:txBody>
+      </p:sp>
+      <p:sp>
+        <p:nvSpPr>
+          <p:cNvPr id="3" name="TextBox 2"/>
+          <p:cNvSpPr txBox="1"/>
+          <p:nvPr/>
+        </p:nvSpPr>
+        <p:spPr>
+          <a:xfrm>
+            <a:off x="548640" y="292608"/>
+            <a:ext cx="11094415" cy="228600"/>
+          </a:xfrm>
+          <a:prstGeom prst="rect">
+            <a:avLst/>
+          </a:prstGeom>
+          <a:noFill/>
+        </p:spPr>
+        <p:txBody>
+          <a:bodyPr wrap="square" lIns="0" rIns="0" tIns="0" bIns="0" anchor="t">
+            <a:spAutoFit/>
+          </a:bodyPr>
+          <a:lstStyle/>
+          <a:p>
+            <a:pPr algn="l">
+              <a:lnSpc>
+                <a:spcPct val="115000"/>
+              </a:lnSpc>
+              <a:spcAft>
+                <a:spcPts val="0"/>
+              </a:spcAft>
+            </a:pPr>
+            <a:r>
+              <a:rPr b="1" sz="950" i="0">
+                <a:solidFill>
+                  <a:srgbClr val="E8A33D"/>
+                </a:solidFill>
+                <a:latin typeface="Arial"/>
+              </a:rPr>
+              <a:t>SLIDE 27 · 05 · IN ONE REPOSITORY</a:t>
+            </a:r>
+          </a:p>
+        </p:txBody>
+      </p:sp>
+      <p:sp>
+        <p:nvSpPr>
+          <p:cNvPr id="4" name="TextBox 3"/>
+          <p:cNvSpPr txBox="1"/>
+          <p:nvPr/>
+        </p:nvSpPr>
+        <p:spPr>
+          <a:xfrm>
+            <a:off x="548640" y="530352"/>
+            <a:ext cx="11094415" cy="548640"/>
+          </a:xfrm>
+          <a:prstGeom prst="rect">
+            <a:avLst/>
+          </a:prstGeom>
+          <a:noFill/>
+        </p:spPr>
+        <p:txBody>
+          <a:bodyPr wrap="square" lIns="0" rIns="0" tIns="0" bIns="0" anchor="t">
+            <a:spAutoFit/>
+          </a:bodyPr>
+          <a:lstStyle/>
+          <a:p>
+            <a:pPr algn="l">
+              <a:lnSpc>
+                <a:spcPct val="115000"/>
+              </a:lnSpc>
+              <a:spcAft>
+                <a:spcPts val="0"/>
+              </a:spcAft>
+            </a:pPr>
+            <a:r>
+              <a:rPr b="1" sz="2800" i="0">
+                <a:solidFill>
+                  <a:srgbClr val="E6ECF7"/>
+                </a:solidFill>
+                <a:latin typeface="Georgia"/>
+              </a:rPr>
+              <a:t>The first week</a:t>
+            </a:r>
+          </a:p>
+        </p:txBody>
+      </p:sp>
+      <p:sp>
+        <p:nvSpPr>
+          <p:cNvPr id="5" name="Rectangle 4"/>
+          <p:cNvSpPr/>
+          <p:nvPr/>
+        </p:nvSpPr>
+        <p:spPr>
+          <a:xfrm>
+            <a:off x="548640" y="1115568"/>
+            <a:ext cx="1097280" cy="41148"/>
+          </a:xfrm>
+          <a:prstGeom prst="rect">
+            <a:avLst/>
+          </a:prstGeom>
+          <a:solidFill>
+            <a:srgbClr val="29D3E0"/>
+          </a:solidFill>
+          <a:ln>
+            <a:noFill/>
+          </a:ln>
+          <a:effectLst/>
+        </p:spPr>
+        <p:style>
+          <a:lnRef idx="1">
+            <a:schemeClr val="accent1"/>
+          </a:lnRef>
+          <a:fillRef idx="3">
+            <a:schemeClr val="accent1"/>
+          </a:fillRef>
+          <a:effectRef idx="2">
+            <a:schemeClr val="accent1"/>
+          </a:effectRef>
+          <a:fontRef idx="minor">
+            <a:schemeClr val="lt1"/>
+          </a:fontRef>
+        </p:style>
+        <p:txBody>
+          <a:bodyPr rtlCol="0" anchor="ctr"/>
+          <a:lstStyle/>
+          <a:p>
+            <a:pPr algn="ctr"/>
+          </a:p>
+        </p:txBody>
+      </p:sp>
+      <p:sp>
+        <p:nvSpPr>
+          <p:cNvPr id="6" name="TextBox 5"/>
+          <p:cNvSpPr txBox="1"/>
+          <p:nvPr/>
+        </p:nvSpPr>
+        <p:spPr>
+          <a:xfrm>
+            <a:off x="548640" y="6473952"/>
+            <a:ext cx="3657600" cy="228600"/>
+          </a:xfrm>
+          <a:prstGeom prst="rect">
+            <a:avLst/>
+          </a:prstGeom>
+          <a:noFill/>
+        </p:spPr>
+        <p:txBody>
+          <a:bodyPr wrap="square" lIns="0" rIns="0" tIns="0" bIns="0" anchor="t">
+            <a:spAutoFit/>
+          </a:bodyPr>
+          <a:lstStyle/>
+          <a:p>
+            <a:pPr algn="l">
+              <a:lnSpc>
+                <a:spcPct val="115000"/>
+              </a:lnSpc>
+              <a:spcAft>
+                <a:spcPts val="0"/>
+              </a:spcAft>
+            </a:pPr>
+            <a:r>
+              <a:rPr b="1" sz="950" i="0">
+                <a:solidFill>
+                  <a:srgbClr val="E6ECF7"/>
+                </a:solidFill>
+                <a:latin typeface="Arial"/>
+              </a:rPr>
+              <a:t>Build to Understand</a:t>
+            </a:r>
+          </a:p>
+        </p:txBody>
+      </p:sp>
+      <p:sp>
+        <p:nvSpPr>
+          <p:cNvPr id="7" name="TextBox 6"/>
+          <p:cNvSpPr txBox="1"/>
+          <p:nvPr/>
+        </p:nvSpPr>
+        <p:spPr>
+          <a:xfrm>
+            <a:off x="10728655" y="6473952"/>
+            <a:ext cx="914400" cy="228600"/>
+          </a:xfrm>
+          <a:prstGeom prst="rect">
+            <a:avLst/>
+          </a:prstGeom>
+          <a:noFill/>
+        </p:spPr>
+        <p:txBody>
+          <a:bodyPr wrap="square" lIns="0" rIns="0" tIns="0" bIns="0" anchor="t">
+            <a:spAutoFit/>
+          </a:bodyPr>
+          <a:lstStyle/>
+          <a:p>
+            <a:pPr algn="r">
+              <a:lnSpc>
+                <a:spcPct val="115000"/>
+              </a:lnSpc>
+              <a:spcAft>
+                <a:spcPts val="0"/>
+              </a:spcAft>
+            </a:pPr>
+            <a:r>
+              <a:rPr b="0" sz="950" i="0">
+                <a:solidFill>
+                  <a:srgbClr val="98A4BC"/>
+                </a:solidFill>
+                <a:latin typeface="Arial"/>
+              </a:rPr>
+              <a:t>27</a:t>
+            </a:r>
+          </a:p>
+        </p:txBody>
+      </p:sp>
       <p:graphicFrame>
         <p:nvGraphicFramePr>
           <p:cNvPr id="8" name="Table 7"/>
@@ -19836,7 +20530,7 @@
         </p:nvGraphicFramePr>
         <p:xfrm>
           <a:off x="548640" y="1371600"/>
-          <a:ext cx="11094413" cy="3952494"/>
+          <a:ext cx="11094414" cy="4248300"/>
         </p:xfrm>
         <a:graphic>
           <a:graphicData uri="http://schemas.openxmlformats.org/drawingml/2006/table">
@@ -19845,9 +20539,9 @@
                 <a:tableStyleId>{5C22544A-7EE6-4342-B048-85BDC9FD1C3A}</a:tableStyleId>
               </a:tblPr>
               <a:tblGrid>
-                <a:gridCol w="1892070"/>
-                <a:gridCol w="5504205"/>
-                <a:gridCol w="3698138"/>
+                <a:gridCol w="1877516"/>
+                <a:gridCol w="5547207"/>
+                <a:gridCol w="3669691"/>
               </a:tblGrid>
               <a:tr h="347472">
                 <a:tc>
@@ -19861,7 +20555,7 @@
                         </a:lnSpc>
                       </a:pPr>
                       <a:r>
-                        <a:rPr b="1" sz="1365" i="0">
+                        <a:rPr b="1" sz="1323" i="0">
                           <a:solidFill>
                             <a:srgbClr val="E6ECF7"/>
                           </a:solidFill>
@@ -19888,7 +20582,7 @@
                         </a:lnSpc>
                       </a:pPr>
                       <a:r>
-                        <a:rPr b="1" sz="1365" i="0">
+                        <a:rPr b="1" sz="1323" i="0">
                           <a:solidFill>
                             <a:srgbClr val="E6ECF7"/>
                           </a:solidFill>
@@ -19915,7 +20609,7 @@
                         </a:lnSpc>
                       </a:pPr>
                       <a:r>
-                        <a:rPr b="1" sz="1365" i="0">
+                        <a:rPr b="1" sz="1323" i="0">
                           <a:solidFill>
                             <a:srgbClr val="E6ECF7"/>
                           </a:solidFill>
@@ -19932,7 +20626,7 @@
                   </a:tcPr>
                 </a:tc>
               </a:tr>
-              <a:tr h="372618">
+              <a:tr h="567842">
                 <a:tc>
                   <a:txBody>
                     <a:bodyPr wrap="square"/>
@@ -19944,7 +20638,7 @@
                         </a:lnSpc>
                       </a:pPr>
                       <a:r>
-                        <a:rPr b="1" sz="1365" i="0">
+                        <a:rPr b="1" sz="1323" i="0">
                           <a:solidFill>
                             <a:srgbClr val="E6ECF7"/>
                           </a:solidFill>
@@ -19971,13 +20665,13 @@
                         </a:lnSpc>
                       </a:pPr>
                       <a:r>
-                        <a:rPr b="0" sz="1365" i="0">
+                        <a:rPr b="0" sz="1323" i="0">
                           <a:solidFill>
                             <a:srgbClr val="E6ECF7"/>
                           </a:solidFill>
                           <a:latin typeface="Arial"/>
                         </a:rPr>
-                        <a:t>Format, lint, test, static analysis on every change</a:t>
+                        <a:t>Write down what this repository touches, and what follows from it</a:t>
                       </a:r>
                     </a:p>
                   </a:txBody>
@@ -19998,13 +20692,13 @@
                         </a:lnSpc>
                       </a:pPr>
                       <a:r>
-                        <a:rPr b="0" sz="1365" i="0">
+                        <a:rPr b="0" sz="1323" i="0">
                           <a:solidFill>
                             <a:srgbClr val="E6ECF7"/>
                           </a:solidFill>
                           <a:latin typeface="Arial"/>
                         </a:rPr>
-                        <a:t>.github/workflows/</a:t>
+                        <a:t>README</a:t>
                       </a:r>
                     </a:p>
                   </a:txBody>
@@ -20015,7 +20709,7 @@
                   </a:tcPr>
                 </a:tc>
               </a:tr>
-              <a:tr h="580644">
+              <a:tr h="366217">
                 <a:tc>
                   <a:txBody>
                     <a:bodyPr wrap="square"/>
@@ -20027,7 +20721,7 @@
                         </a:lnSpc>
                       </a:pPr>
                       <a:r>
-                        <a:rPr b="1" sz="1365" i="0">
+                        <a:rPr b="1" sz="1323" i="0">
                           <a:solidFill>
                             <a:srgbClr val="E6ECF7"/>
                           </a:solidFill>
@@ -20054,13 +20748,13 @@
                         </a:lnSpc>
                       </a:pPr>
                       <a:r>
-                        <a:rPr b="0" sz="1365" i="0">
+                        <a:rPr b="0" sz="1323" i="0">
                           <a:solidFill>
                             <a:srgbClr val="E6ECF7"/>
                           </a:solidFill>
                           <a:latin typeface="Arial"/>
                         </a:rPr>
-                        <a:t>Dependency and secret scanning</a:t>
+                        <a:t>Format, lint, test, static analysis on every change</a:t>
                       </a:r>
                     </a:p>
                   </a:txBody>
@@ -20081,7 +20775,90 @@
                         </a:lnSpc>
                       </a:pPr>
                       <a:r>
-                        <a:rPr b="0" sz="1365" i="0">
+                        <a:rPr b="0" sz="1323" i="0">
+                          <a:solidFill>
+                            <a:srgbClr val="E6ECF7"/>
+                          </a:solidFill>
+                          <a:latin typeface="Arial"/>
+                        </a:rPr>
+                        <a:t>.github/workflows/</a:t>
+                      </a:r>
+                    </a:p>
+                  </a:txBody>
+                  <a:tcPr marL="73152" marR="73152" marT="45720" marB="45720" anchor="t">
+                    <a:solidFill>
+                      <a:srgbClr val="121A2A"/>
+                    </a:solidFill>
+                  </a:tcPr>
+                </a:tc>
+              </a:tr>
+              <a:tr h="567842">
+                <a:tc>
+                  <a:txBody>
+                    <a:bodyPr wrap="square"/>
+                    <a:lstStyle/>
+                    <a:p>
+                      <a:pPr>
+                        <a:lnSpc>
+                          <a:spcPct val="110000"/>
+                        </a:lnSpc>
+                      </a:pPr>
+                      <a:r>
+                        <a:rPr b="1" sz="1323" i="0">
+                          <a:solidFill>
+                            <a:srgbClr val="E6ECF7"/>
+                          </a:solidFill>
+                          <a:latin typeface="Arial"/>
+                        </a:rPr>
+                        <a:t>Day 1</a:t>
+                      </a:r>
+                    </a:p>
+                  </a:txBody>
+                  <a:tcPr marL="73152" marR="73152" marT="45720" marB="45720" anchor="t">
+                    <a:solidFill>
+                      <a:srgbClr val="151D2E"/>
+                    </a:solidFill>
+                  </a:tcPr>
+                </a:tc>
+                <a:tc>
+                  <a:txBody>
+                    <a:bodyPr wrap="square"/>
+                    <a:lstStyle/>
+                    <a:p>
+                      <a:pPr>
+                        <a:lnSpc>
+                          <a:spcPct val="110000"/>
+                        </a:lnSpc>
+                      </a:pPr>
+                      <a:r>
+                        <a:rPr b="0" sz="1323" i="0">
+                          <a:solidFill>
+                            <a:srgbClr val="E6ECF7"/>
+                          </a:solidFill>
+                          <a:latin typeface="Arial"/>
+                        </a:rPr>
+                        <a:t>Dependency and secret scanning</a:t>
+                      </a:r>
+                    </a:p>
+                  </a:txBody>
+                  <a:tcPr marL="73152" marR="73152" marT="45720" marB="45720" anchor="t">
+                    <a:solidFill>
+                      <a:srgbClr val="151D2E"/>
+                    </a:solidFill>
+                  </a:tcPr>
+                </a:tc>
+                <a:tc>
+                  <a:txBody>
+                    <a:bodyPr wrap="square"/>
+                    <a:lstStyle/>
+                    <a:p>
+                      <a:pPr>
+                        <a:lnSpc>
+                          <a:spcPct val="110000"/>
+                        </a:lnSpc>
+                      </a:pPr>
+                      <a:r>
+                        <a:rPr b="0" sz="1323" i="0">
                           <a:solidFill>
                             <a:srgbClr val="E6ECF7"/>
                           </a:solidFill>
@@ -20093,12 +20870,12 @@
                   </a:txBody>
                   <a:tcPr marL="73152" marR="73152" marT="45720" marB="45720" anchor="t">
                     <a:solidFill>
-                      <a:srgbClr val="121A2A"/>
+                      <a:srgbClr val="151D2E"/>
                     </a:solidFill>
                   </a:tcPr>
                 </a:tc>
               </a:tr>
-              <a:tr h="580644">
+              <a:tr h="567842">
                 <a:tc>
                   <a:txBody>
                     <a:bodyPr wrap="square"/>
@@ -20110,7 +20887,90 @@
                         </a:lnSpc>
                       </a:pPr>
                       <a:r>
-                        <a:rPr b="1" sz="1365" i="0">
+                        <a:rPr b="1" sz="1323" i="0">
+                          <a:solidFill>
+                            <a:srgbClr val="E6ECF7"/>
+                          </a:solidFill>
+                          <a:latin typeface="Arial"/>
+                        </a:rPr>
+                        <a:t>Day 2</a:t>
+                      </a:r>
+                    </a:p>
+                  </a:txBody>
+                  <a:tcPr marL="73152" marR="73152" marT="45720" marB="45720" anchor="t">
+                    <a:solidFill>
+                      <a:srgbClr val="121A2A"/>
+                    </a:solidFill>
+                  </a:tcPr>
+                </a:tc>
+                <a:tc>
+                  <a:txBody>
+                    <a:bodyPr wrap="square"/>
+                    <a:lstStyle/>
+                    <a:p>
+                      <a:pPr>
+                        <a:lnSpc>
+                          <a:spcPct val="110000"/>
+                        </a:lnSpc>
+                      </a:pPr>
+                      <a:r>
+                        <a:rPr b="0" sz="1323" i="0">
+                          <a:solidFill>
+                            <a:srgbClr val="E6ECF7"/>
+                          </a:solidFill>
+                          <a:latin typeface="Arial"/>
+                        </a:rPr>
+                        <a:t>Require those checks, require a pull request, stop direct pushes</a:t>
+                      </a:r>
+                    </a:p>
+                  </a:txBody>
+                  <a:tcPr marL="73152" marR="73152" marT="45720" marB="45720" anchor="t">
+                    <a:solidFill>
+                      <a:srgbClr val="121A2A"/>
+                    </a:solidFill>
+                  </a:tcPr>
+                </a:tc>
+                <a:tc>
+                  <a:txBody>
+                    <a:bodyPr wrap="square"/>
+                    <a:lstStyle/>
+                    <a:p>
+                      <a:pPr>
+                        <a:lnSpc>
+                          <a:spcPct val="110000"/>
+                        </a:lnSpc>
+                      </a:pPr>
+                      <a:r>
+                        <a:rPr b="0" sz="1323" i="0">
+                          <a:solidFill>
+                            <a:srgbClr val="E6ECF7"/>
+                          </a:solidFill>
+                          <a:latin typeface="Arial"/>
+                        </a:rPr>
+                        <a:t>Branch protection, or a ruleset</a:t>
+                      </a:r>
+                    </a:p>
+                  </a:txBody>
+                  <a:tcPr marL="73152" marR="73152" marT="45720" marB="45720" anchor="t">
+                    <a:solidFill>
+                      <a:srgbClr val="121A2A"/>
+                    </a:solidFill>
+                  </a:tcPr>
+                </a:tc>
+              </a:tr>
+              <a:tr h="366217">
+                <a:tc>
+                  <a:txBody>
+                    <a:bodyPr wrap="square"/>
+                    <a:lstStyle/>
+                    <a:p>
+                      <a:pPr>
+                        <a:lnSpc>
+                          <a:spcPct val="110000"/>
+                        </a:lnSpc>
+                      </a:pPr>
+                      <a:r>
+                        <a:rPr b="1" sz="1323" i="0">
                           <a:solidFill>
                             <a:srgbClr val="E6ECF7"/>
                           </a:solidFill>
@@ -20137,13 +20997,13 @@
                         </a:lnSpc>
                       </a:pPr>
                       <a:r>
-                        <a:rPr b="0" sz="1365" i="0">
+                        <a:rPr b="0" sz="1323" i="0">
                           <a:solidFill>
                             <a:srgbClr val="E6ECF7"/>
                           </a:solidFill>
                           <a:latin typeface="Arial"/>
                         </a:rPr>
-                        <a:t>Require those checks, require a pull request, stop direct pushes</a:t>
+                        <a:t>Dismiss stale approvals when new commits land</a:t>
                       </a:r>
                     </a:p>
                   </a:txBody>
@@ -20164,13 +21024,13 @@
                         </a:lnSpc>
                       </a:pPr>
                       <a:r>
-                        <a:rPr b="0" sz="1365" i="0">
+                        <a:rPr b="0" sz="1323" i="0">
                           <a:solidFill>
                             <a:srgbClr val="E6ECF7"/>
                           </a:solidFill>
                           <a:latin typeface="Arial"/>
                         </a:rPr>
-                        <a:t>Branch protection, or a ruleset</a:t>
+                        <a:t>The same place</a:t>
                       </a:r>
                     </a:p>
                   </a:txBody>
@@ -20181,7 +21041,7 @@
                   </a:tcPr>
                 </a:tc>
               </a:tr>
-              <a:tr h="372618">
+              <a:tr h="366217">
                 <a:tc>
                   <a:txBody>
                     <a:bodyPr wrap="square"/>
@@ -20193,13 +21053,13 @@
                         </a:lnSpc>
                       </a:pPr>
                       <a:r>
-                        <a:rPr b="1" sz="1365" i="0">
+                        <a:rPr b="1" sz="1323" i="0">
                           <a:solidFill>
                             <a:srgbClr val="E6ECF7"/>
                           </a:solidFill>
                           <a:latin typeface="Arial"/>
                         </a:rPr>
-                        <a:t>Day 2</a:t>
+                        <a:t>Day 3</a:t>
                       </a:r>
                     </a:p>
                   </a:txBody>
@@ -20220,13 +21080,13 @@
                         </a:lnSpc>
                       </a:pPr>
                       <a:r>
-                        <a:rPr b="0" sz="1365" i="0">
+                        <a:rPr b="0" sz="1323" i="0">
                           <a:solidFill>
                             <a:srgbClr val="E6ECF7"/>
                           </a:solidFill>
                           <a:latin typeface="Arial"/>
                         </a:rPr>
-                        <a:t>Dismiss stale approvals when new commits land</a:t>
+                        <a:t>A named reviewer for the paths that carry risk</a:t>
                       </a:r>
                     </a:p>
                   </a:txBody>
@@ -20247,13 +21107,13 @@
                         </a:lnSpc>
                       </a:pPr>
                       <a:r>
-                        <a:rPr b="0" sz="1365" i="0">
+                        <a:rPr b="0" sz="1323" i="0">
                           <a:solidFill>
                             <a:srgbClr val="E6ECF7"/>
                           </a:solidFill>
                           <a:latin typeface="Arial"/>
                         </a:rPr>
-                        <a:t>The same place</a:t>
+                        <a:t>.github/CODEOWNERS</a:t>
                       </a:r>
                     </a:p>
                   </a:txBody>
@@ -20264,7 +21124,7 @@
                   </a:tcPr>
                 </a:tc>
               </a:tr>
-              <a:tr h="372618">
+              <a:tr h="366217">
                 <a:tc>
                   <a:txBody>
                     <a:bodyPr wrap="square"/>
@@ -20276,7 +21136,7 @@
                         </a:lnSpc>
                       </a:pPr>
                       <a:r>
-                        <a:rPr b="1" sz="1365" i="0">
+                        <a:rPr b="1" sz="1323" i="0">
                           <a:solidFill>
                             <a:srgbClr val="E6ECF7"/>
                           </a:solidFill>
@@ -20303,13 +21163,13 @@
                         </a:lnSpc>
                       </a:pPr>
                       <a:r>
-                        <a:rPr b="0" sz="1365" i="0">
+                        <a:rPr b="0" sz="1323" i="0">
                           <a:solidFill>
                             <a:srgbClr val="E6ECF7"/>
                           </a:solidFill>
                           <a:latin typeface="Arial"/>
                         </a:rPr>
-                        <a:t>A named reviewer for the paths that carry risk</a:t>
+                        <a:t>Whether a machine may approve here, and why</a:t>
                       </a:r>
                     </a:p>
                   </a:txBody>
@@ -20330,13 +21190,13 @@
                         </a:lnSpc>
                       </a:pPr>
                       <a:r>
-                        <a:rPr b="0" sz="1365" i="0">
+                        <a:rPr b="0" sz="1323" i="0">
                           <a:solidFill>
                             <a:srgbClr val="E6ECF7"/>
                           </a:solidFill>
                           <a:latin typeface="Arial"/>
                         </a:rPr>
-                        <a:t>.github/CODEOWNERS</a:t>
+                        <a:t>Written down where the next person looks</a:t>
                       </a:r>
                     </a:p>
                   </a:txBody>
@@ -20347,7 +21207,7 @@
                   </a:tcPr>
                 </a:tc>
               </a:tr>
-              <a:tr h="580644">
+              <a:tr h="366217">
                 <a:tc>
                   <a:txBody>
                     <a:bodyPr wrap="square"/>
@@ -20359,13 +21219,13 @@
                         </a:lnSpc>
                       </a:pPr>
                       <a:r>
-                        <a:rPr b="1" sz="1365" i="0">
+                        <a:rPr b="1" sz="1323" i="0">
                           <a:solidFill>
                             <a:srgbClr val="E6ECF7"/>
                           </a:solidFill>
                           <a:latin typeface="Arial"/>
                         </a:rPr>
-                        <a:t>Day 3</a:t>
+                        <a:t>Day 4</a:t>
                       </a:r>
                     </a:p>
                   </a:txBody>
@@ -20386,13 +21246,13 @@
                         </a:lnSpc>
                       </a:pPr>
                       <a:r>
-                        <a:rPr b="0" sz="1365" i="0">
+                        <a:rPr b="0" sz="1323" i="0">
                           <a:solidFill>
                             <a:srgbClr val="E6ECF7"/>
                           </a:solidFill>
                           <a:latin typeface="Arial"/>
                         </a:rPr>
-                        <a:t>Whether a machine may approve here, and why</a:t>
+                        <a:t>The template that explains and asks</a:t>
                       </a:r>
                     </a:p>
                   </a:txBody>
@@ -20413,13 +21273,13 @@
                         </a:lnSpc>
                       </a:pPr>
                       <a:r>
-                        <a:rPr b="0" sz="1365" i="0">
+                        <a:rPr b="0" sz="1323" i="0">
                           <a:solidFill>
                             <a:srgbClr val="E6ECF7"/>
                           </a:solidFill>
                           <a:latin typeface="Arial"/>
                         </a:rPr>
-                        <a:t>Written down where the next person looks</a:t>
+                        <a:t>.github/pull_request_template.md</a:t>
                       </a:r>
                     </a:p>
                   </a:txBody>
@@ -20430,7 +21290,7 @@
                   </a:tcPr>
                 </a:tc>
               </a:tr>
-              <a:tr h="372618">
+              <a:tr h="366217">
                 <a:tc>
                   <a:txBody>
                     <a:bodyPr wrap="square"/>
@@ -20442,13 +21302,13 @@
                         </a:lnSpc>
                       </a:pPr>
                       <a:r>
-                        <a:rPr b="1" sz="1365" i="0">
+                        <a:rPr b="1" sz="1323" i="0">
                           <a:solidFill>
                             <a:srgbClr val="E6ECF7"/>
                           </a:solidFill>
                           <a:latin typeface="Arial"/>
                         </a:rPr>
-                        <a:t>Day 4</a:t>
+                        <a:t>Ongoing</a:t>
                       </a:r>
                     </a:p>
                   </a:txBody>
@@ -20469,13 +21329,13 @@
                         </a:lnSpc>
                       </a:pPr>
                       <a:r>
-                        <a:rPr b="0" sz="1365" i="0">
+                        <a:rPr b="0" sz="1323" i="0">
                           <a:solidFill>
                             <a:srgbClr val="E6ECF7"/>
                           </a:solidFill>
                           <a:latin typeface="Arial"/>
                         </a:rPr>
-                        <a:t>The template that explains and asks</a:t>
+                        <a:t>Read a sample of already-approved changes</a:t>
                       </a:r>
                     </a:p>
                   </a:txBody>
@@ -20496,90 +21356,7 @@
                         </a:lnSpc>
                       </a:pPr>
                       <a:r>
-                        <a:rPr b="0" sz="1365" i="0">
-                          <a:solidFill>
-                            <a:srgbClr val="E6ECF7"/>
-                          </a:solidFill>
-                          <a:latin typeface="Arial"/>
-                        </a:rPr>
-                        <a:t>.github/pull_request_template.md</a:t>
-                      </a:r>
-                    </a:p>
-                  </a:txBody>
-                  <a:tcPr marL="73152" marR="73152" marT="45720" marB="45720" anchor="t">
-                    <a:solidFill>
-                      <a:srgbClr val="151D2E"/>
-                    </a:solidFill>
-                  </a:tcPr>
-                </a:tc>
-              </a:tr>
-              <a:tr h="372618">
-                <a:tc>
-                  <a:txBody>
-                    <a:bodyPr wrap="square"/>
-                    <a:lstStyle/>
-                    <a:p>
-                      <a:pPr>
-                        <a:lnSpc>
-                          <a:spcPct val="110000"/>
-                        </a:lnSpc>
-                      </a:pPr>
-                      <a:r>
-                        <a:rPr b="1" sz="1365" i="0">
-                          <a:solidFill>
-                            <a:srgbClr val="E6ECF7"/>
-                          </a:solidFill>
-                          <a:latin typeface="Arial"/>
-                        </a:rPr>
-                        <a:t>Ongoing</a:t>
-                      </a:r>
-                    </a:p>
-                  </a:txBody>
-                  <a:tcPr marL="73152" marR="73152" marT="45720" marB="45720" anchor="t">
-                    <a:solidFill>
-                      <a:srgbClr val="121A2A"/>
-                    </a:solidFill>
-                  </a:tcPr>
-                </a:tc>
-                <a:tc>
-                  <a:txBody>
-                    <a:bodyPr wrap="square"/>
-                    <a:lstStyle/>
-                    <a:p>
-                      <a:pPr>
-                        <a:lnSpc>
-                          <a:spcPct val="110000"/>
-                        </a:lnSpc>
-                      </a:pPr>
-                      <a:r>
-                        <a:rPr b="0" sz="1365" i="0">
-                          <a:solidFill>
-                            <a:srgbClr val="E6ECF7"/>
-                          </a:solidFill>
-                          <a:latin typeface="Arial"/>
-                        </a:rPr>
-                        <a:t>Read a sample of already-approved changes</a:t>
-                      </a:r>
-                    </a:p>
-                  </a:txBody>
-                  <a:tcPr marL="73152" marR="73152" marT="45720" marB="45720" anchor="t">
-                    <a:solidFill>
-                      <a:srgbClr val="121A2A"/>
-                    </a:solidFill>
-                  </a:tcPr>
-                </a:tc>
-                <a:tc>
-                  <a:txBody>
-                    <a:bodyPr wrap="square"/>
-                    <a:lstStyle/>
-                    <a:p>
-                      <a:pPr>
-                        <a:lnSpc>
-                          <a:spcPct val="110000"/>
-                        </a:lnSpc>
-                      </a:pPr>
-                      <a:r>
-                        <a:rPr b="0" sz="1365" i="0">
+                        <a:rPr b="0" sz="1323" i="0">
                           <a:solidFill>
                             <a:srgbClr val="E6ECF7"/>
                           </a:solidFill>
@@ -20591,7 +21368,7 @@
                   </a:txBody>
                   <a:tcPr marL="73152" marR="73152" marT="45720" marB="45720" anchor="t">
                     <a:solidFill>
-                      <a:srgbClr val="121A2A"/>
+                      <a:srgbClr val="151D2E"/>
                     </a:solidFill>
                   </a:tcPr>
                 </a:tc>
@@ -20608,8 +21385,8 @@
         </p:nvSpPr>
         <p:spPr>
           <a:xfrm>
-            <a:off x="548640" y="5721654"/>
-            <a:ext cx="11094415" cy="523697"/>
+            <a:off x="548640" y="5737768"/>
+            <a:ext cx="11094415" cy="507583"/>
           </a:xfrm>
           <a:prstGeom prst="rect">
             <a:avLst/>
@@ -20631,7 +21408,7 @@
               </a:spcAft>
             </a:pPr>
             <a:r>
-              <a:rPr b="0" sz="1690" i="0">
+              <a:rPr b="0" sz="1638" i="0">
                 <a:solidFill>
                   <a:srgbClr val="E6ECF7"/>
                 </a:solidFill>
@@ -20640,7 +21417,7 @@
               <a:t>Every line is a file or a setting, copied to the next repository in minutes and reverted by deleting a line. </a:t>
             </a:r>
             <a:r>
-              <a:rPr b="1" sz="1690" i="0">
+              <a:rPr b="1" sz="1638" i="0">
                 <a:solidFill>
                   <a:srgbClr val="E6ECF7"/>
                 </a:solidFill>
@@ -20648,412 +21425,6 @@
               </a:rPr>
               <a:t>I have not checked which of these are already on in ours.</a:t>
             </a:r>
-          </a:p>
-        </p:txBody>
-      </p:sp>
-    </p:spTree>
-  </p:cSld>
-  <p:clrMapOvr>
-    <a:masterClrMapping/>
-  </p:clrMapOvr>
-</p:sld>
-</file>
-
-<file path=ppt/slides/slide27.xml><?xml version="1.0" encoding="utf-8"?>
-<p:sld xmlns:a="http://schemas.openxmlformats.org/drawingml/2006/main" xmlns:p="http://schemas.openxmlformats.org/presentationml/2006/main" xmlns:r="http://schemas.openxmlformats.org/officeDocument/2006/relationships">
-  <p:cSld>
-    <p:spTree>
-      <p:nvGrpSpPr>
-        <p:cNvPr id="1" name=""/>
-        <p:cNvGrpSpPr/>
-        <p:nvPr/>
-      </p:nvGrpSpPr>
-      <p:grpSpPr/>
-      <p:sp>
-        <p:nvSpPr>
-          <p:cNvPr id="2" name="Rectangle 1"/>
-          <p:cNvSpPr/>
-          <p:nvPr/>
-        </p:nvSpPr>
-        <p:spPr>
-          <a:xfrm>
-            <a:off x="0" y="0"/>
-            <a:ext cx="12191695" cy="6858000"/>
-          </a:xfrm>
-          <a:prstGeom prst="rect">
-            <a:avLst/>
-          </a:prstGeom>
-          <a:solidFill>
-            <a:srgbClr val="070B14"/>
-          </a:solidFill>
-          <a:ln>
-            <a:noFill/>
-          </a:ln>
-          <a:effectLst/>
-        </p:spPr>
-        <p:style>
-          <a:lnRef idx="1">
-            <a:schemeClr val="accent1"/>
-          </a:lnRef>
-          <a:fillRef idx="3">
-            <a:schemeClr val="accent1"/>
-          </a:fillRef>
-          <a:effectRef idx="2">
-            <a:schemeClr val="accent1"/>
-          </a:effectRef>
-          <a:fontRef idx="minor">
-            <a:schemeClr val="lt1"/>
-          </a:fontRef>
-        </p:style>
-        <p:txBody>
-          <a:bodyPr rtlCol="0" anchor="ctr"/>
-          <a:lstStyle/>
-          <a:p>
-            <a:pPr algn="ctr"/>
-          </a:p>
-        </p:txBody>
-      </p:sp>
-      <p:sp>
-        <p:nvSpPr>
-          <p:cNvPr id="3" name="TextBox 2"/>
-          <p:cNvSpPr txBox="1"/>
-          <p:nvPr/>
-        </p:nvSpPr>
-        <p:spPr>
-          <a:xfrm>
-            <a:off x="548640" y="6473952"/>
-            <a:ext cx="3657600" cy="228600"/>
-          </a:xfrm>
-          <a:prstGeom prst="rect">
-            <a:avLst/>
-          </a:prstGeom>
-          <a:noFill/>
-        </p:spPr>
-        <p:txBody>
-          <a:bodyPr wrap="square" lIns="0" rIns="0" tIns="0" bIns="0" anchor="t">
-            <a:spAutoFit/>
-          </a:bodyPr>
-          <a:lstStyle/>
-          <a:p>
-            <a:pPr algn="l">
-              <a:lnSpc>
-                <a:spcPct val="115000"/>
-              </a:lnSpc>
-              <a:spcAft>
-                <a:spcPts val="0"/>
-              </a:spcAft>
-            </a:pPr>
-            <a:r>
-              <a:rPr b="1" sz="950" i="0">
-                <a:solidFill>
-                  <a:srgbClr val="E6ECF7"/>
-                </a:solidFill>
-                <a:latin typeface="Arial"/>
-              </a:rPr>
-              <a:t>Build to Understand</a:t>
-            </a:r>
-          </a:p>
-        </p:txBody>
-      </p:sp>
-      <p:sp>
-        <p:nvSpPr>
-          <p:cNvPr id="4" name="TextBox 3"/>
-          <p:cNvSpPr txBox="1"/>
-          <p:nvPr/>
-        </p:nvSpPr>
-        <p:spPr>
-          <a:xfrm>
-            <a:off x="10728655" y="6473952"/>
-            <a:ext cx="914400" cy="228600"/>
-          </a:xfrm>
-          <a:prstGeom prst="rect">
-            <a:avLst/>
-          </a:prstGeom>
-          <a:noFill/>
-        </p:spPr>
-        <p:txBody>
-          <a:bodyPr wrap="square" lIns="0" rIns="0" tIns="0" bIns="0" anchor="t">
-            <a:spAutoFit/>
-          </a:bodyPr>
-          <a:lstStyle/>
-          <a:p>
-            <a:pPr algn="r">
-              <a:lnSpc>
-                <a:spcPct val="115000"/>
-              </a:lnSpc>
-              <a:spcAft>
-                <a:spcPts val="0"/>
-              </a:spcAft>
-            </a:pPr>
-            <a:r>
-              <a:rPr b="0" sz="950" i="0">
-                <a:solidFill>
-                  <a:srgbClr val="98A4BC"/>
-                </a:solidFill>
-                <a:latin typeface="Arial"/>
-              </a:rPr>
-              <a:t>27</a:t>
-            </a:r>
-          </a:p>
-        </p:txBody>
-      </p:sp>
-      <p:sp>
-        <p:nvSpPr>
-          <p:cNvPr id="5" name="TextBox 4"/>
-          <p:cNvSpPr txBox="1"/>
-          <p:nvPr/>
-        </p:nvSpPr>
-        <p:spPr>
-          <a:xfrm>
-            <a:off x="548640" y="292608"/>
-            <a:ext cx="11094415" cy="274320"/>
-          </a:xfrm>
-          <a:prstGeom prst="rect">
-            <a:avLst/>
-          </a:prstGeom>
-          <a:noFill/>
-        </p:spPr>
-        <p:txBody>
-          <a:bodyPr wrap="square" lIns="0" rIns="0" tIns="0" bIns="0" anchor="t">
-            <a:spAutoFit/>
-          </a:bodyPr>
-          <a:lstStyle/>
-          <a:p>
-            <a:pPr algn="l">
-              <a:lnSpc>
-                <a:spcPct val="115000"/>
-              </a:lnSpc>
-              <a:spcAft>
-                <a:spcPts val="0"/>
-              </a:spcAft>
-            </a:pPr>
-            <a:r>
-              <a:rPr b="1" sz="1100" i="0">
-                <a:solidFill>
-                  <a:srgbClr val="E6ECF7"/>
-                </a:solidFill>
-                <a:latin typeface="Arial"/>
-              </a:rPr>
-              <a:t>Build to Understand</a:t>
-            </a:r>
-          </a:p>
-        </p:txBody>
-      </p:sp>
-      <p:sp>
-        <p:nvSpPr>
-          <p:cNvPr id="6" name="Rectangle 5"/>
-          <p:cNvSpPr/>
-          <p:nvPr/>
-        </p:nvSpPr>
-        <p:spPr>
-          <a:xfrm>
-            <a:off x="548640" y="2555240"/>
-            <a:ext cx="822960" cy="54864"/>
-          </a:xfrm>
-          <a:prstGeom prst="rect">
-            <a:avLst/>
-          </a:prstGeom>
-          <a:solidFill>
-            <a:srgbClr val="29D3E0"/>
-          </a:solidFill>
-          <a:ln>
-            <a:noFill/>
-          </a:ln>
-          <a:effectLst/>
-        </p:spPr>
-        <p:style>
-          <a:lnRef idx="1">
-            <a:schemeClr val="accent1"/>
-          </a:lnRef>
-          <a:fillRef idx="3">
-            <a:schemeClr val="accent1"/>
-          </a:fillRef>
-          <a:effectRef idx="2">
-            <a:schemeClr val="accent1"/>
-          </a:effectRef>
-          <a:fontRef idx="minor">
-            <a:schemeClr val="lt1"/>
-          </a:fontRef>
-        </p:style>
-        <p:txBody>
-          <a:bodyPr rtlCol="0" anchor="ctr"/>
-          <a:lstStyle/>
-          <a:p>
-            <a:pPr algn="ctr"/>
-          </a:p>
-        </p:txBody>
-      </p:sp>
-      <p:sp>
-        <p:nvSpPr>
-          <p:cNvPr id="7" name="TextBox 6"/>
-          <p:cNvSpPr txBox="1"/>
-          <p:nvPr/>
-        </p:nvSpPr>
-        <p:spPr>
-          <a:xfrm>
-            <a:off x="1783080" y="1874519"/>
-            <a:ext cx="9859975" cy="991615"/>
-          </a:xfrm>
-          <a:prstGeom prst="rect">
-            <a:avLst/>
-          </a:prstGeom>
-          <a:noFill/>
-        </p:spPr>
-        <p:txBody>
-          <a:bodyPr wrap="square" lIns="0" rIns="0" tIns="0" bIns="0" anchor="b">
-            <a:spAutoFit/>
-          </a:bodyPr>
-          <a:lstStyle/>
-          <a:p>
-            <a:pPr algn="l">
-              <a:lnSpc>
-                <a:spcPct val="122000"/>
-              </a:lnSpc>
-              <a:spcAft>
-                <a:spcPts val="0"/>
-              </a:spcAft>
-            </a:pPr>
-            <a:r>
-              <a:rPr b="1" sz="3200" i="0">
-                <a:solidFill>
-                  <a:srgbClr val="E6ECF7"/>
-                </a:solidFill>
-                <a:latin typeface="Georgia"/>
-              </a:rPr>
-              <a:t>Conclusion</a:t>
-            </a:r>
-          </a:p>
-        </p:txBody>
-      </p:sp>
-      <p:sp>
-        <p:nvSpPr>
-          <p:cNvPr id="8" name="TextBox 7"/>
-          <p:cNvSpPr txBox="1"/>
-          <p:nvPr/>
-        </p:nvSpPr>
-        <p:spPr>
-          <a:xfrm>
-            <a:off x="1783080" y="3140455"/>
-            <a:ext cx="9859975" cy="247649"/>
-          </a:xfrm>
-          <a:prstGeom prst="rect">
-            <a:avLst/>
-          </a:prstGeom>
-          <a:noFill/>
-        </p:spPr>
-        <p:txBody>
-          <a:bodyPr wrap="square" lIns="0" rIns="0" tIns="0" bIns="0" anchor="t">
-            <a:spAutoFit/>
-          </a:bodyPr>
-          <a:lstStyle/>
-          <a:p>
-            <a:pPr algn="l">
-              <a:lnSpc>
-                <a:spcPct val="130000"/>
-              </a:lnSpc>
-              <a:spcAft>
-                <a:spcPts val="0"/>
-              </a:spcAft>
-            </a:pPr>
-            <a:r>
-              <a:rPr b="0" sz="1500" i="0">
-                <a:solidFill>
-                  <a:srgbClr val="E6ECF7"/>
-                </a:solidFill>
-                <a:latin typeface="Arial"/>
-              </a:rPr>
-              <a:t>What moves, what doesn't, and what I still don't know.</a:t>
-            </a:r>
-          </a:p>
-        </p:txBody>
-      </p:sp>
-      <p:sp>
-        <p:nvSpPr>
-          <p:cNvPr id="9" name="Oval 8"/>
-          <p:cNvSpPr/>
-          <p:nvPr/>
-        </p:nvSpPr>
-        <p:spPr>
-          <a:xfrm>
-            <a:off x="10332720" y="5394960"/>
-            <a:ext cx="457200" cy="457200"/>
-          </a:xfrm>
-          <a:prstGeom prst="ellipse">
-            <a:avLst/>
-          </a:prstGeom>
-          <a:solidFill>
-            <a:srgbClr val="29D3E0"/>
-          </a:solidFill>
-          <a:ln>
-            <a:noFill/>
-          </a:ln>
-          <a:effectLst/>
-        </p:spPr>
-        <p:style>
-          <a:lnRef idx="1">
-            <a:schemeClr val="accent1"/>
-          </a:lnRef>
-          <a:fillRef idx="3">
-            <a:schemeClr val="accent1"/>
-          </a:fillRef>
-          <a:effectRef idx="2">
-            <a:schemeClr val="accent1"/>
-          </a:effectRef>
-          <a:fontRef idx="minor">
-            <a:schemeClr val="lt1"/>
-          </a:fontRef>
-        </p:style>
-        <p:txBody>
-          <a:bodyPr rtlCol="0" anchor="ctr"/>
-          <a:lstStyle/>
-          <a:p>
-            <a:pPr algn="ctr"/>
-          </a:p>
-        </p:txBody>
-      </p:sp>
-      <p:sp>
-        <p:nvSpPr>
-          <p:cNvPr id="10" name="Rounded Rectangle 9"/>
-          <p:cNvSpPr/>
-          <p:nvPr/>
-        </p:nvSpPr>
-        <p:spPr>
-          <a:xfrm>
-            <a:off x="10927080" y="5532120"/>
-            <a:ext cx="310896" cy="310896"/>
-          </a:xfrm>
-          <a:prstGeom prst="roundRect">
-            <a:avLst>
-              <a:gd name="adj" fmla="val 4000"/>
-            </a:avLst>
-          </a:prstGeom>
-          <a:noFill/>
-          <a:ln w="19050">
-            <a:solidFill>
-              <a:srgbClr val="E8A33D"/>
-            </a:solidFill>
-          </a:ln>
-          <a:effectLst/>
-        </p:spPr>
-        <p:style>
-          <a:lnRef idx="1">
-            <a:schemeClr val="accent1"/>
-          </a:lnRef>
-          <a:fillRef idx="3">
-            <a:schemeClr val="accent1"/>
-          </a:fillRef>
-          <a:effectRef idx="2">
-            <a:schemeClr val="accent1"/>
-          </a:effectRef>
-          <a:fontRef idx="minor">
-            <a:schemeClr val="lt1"/>
-          </a:fontRef>
-        </p:style>
-        <p:txBody>
-          <a:bodyPr rtlCol="0" anchor="ctr"/>
-          <a:lstStyle/>
-          <a:p>
-            <a:pPr algn="ctr"/>
           </a:p>
         </p:txBody>
       </p:sp>
@@ -21090,7 +21461,7 @@
             <a:avLst/>
           </a:prstGeom>
           <a:solidFill>
-            <a:srgbClr val="0E1420"/>
+            <a:srgbClr val="070B14"/>
           </a:solidFill>
           <a:ln>
             <a:noFill/>
@@ -21127,8 +21498,8 @@
         </p:nvSpPr>
         <p:spPr>
           <a:xfrm>
-            <a:off x="548640" y="292608"/>
-            <a:ext cx="11094415" cy="228600"/>
+            <a:off x="548640" y="6473952"/>
+            <a:ext cx="3657600" cy="228600"/>
           </a:xfrm>
           <a:prstGeom prst="rect">
             <a:avLst/>
@@ -21152,11 +21523,11 @@
             <a:r>
               <a:rPr b="1" sz="950" i="0">
                 <a:solidFill>
-                  <a:srgbClr val="29D3E0"/>
+                  <a:srgbClr val="E6ECF7"/>
                 </a:solidFill>
                 <a:latin typeface="Arial"/>
               </a:rPr>
-              <a:t>SLIDE 28 · CONCLUSION</a:t>
+              <a:t>Build to Understand</a:t>
             </a:r>
           </a:p>
         </p:txBody>
@@ -21169,8 +21540,50 @@
         </p:nvSpPr>
         <p:spPr>
           <a:xfrm>
-            <a:off x="548640" y="530352"/>
-            <a:ext cx="11094415" cy="548640"/>
+            <a:off x="10728655" y="6473952"/>
+            <a:ext cx="914400" cy="228600"/>
+          </a:xfrm>
+          <a:prstGeom prst="rect">
+            <a:avLst/>
+          </a:prstGeom>
+          <a:noFill/>
+        </p:spPr>
+        <p:txBody>
+          <a:bodyPr wrap="square" lIns="0" rIns="0" tIns="0" bIns="0" anchor="t">
+            <a:spAutoFit/>
+          </a:bodyPr>
+          <a:lstStyle/>
+          <a:p>
+            <a:pPr algn="r">
+              <a:lnSpc>
+                <a:spcPct val="115000"/>
+              </a:lnSpc>
+              <a:spcAft>
+                <a:spcPts val="0"/>
+              </a:spcAft>
+            </a:pPr>
+            <a:r>
+              <a:rPr b="0" sz="950" i="0">
+                <a:solidFill>
+                  <a:srgbClr val="98A4BC"/>
+                </a:solidFill>
+                <a:latin typeface="Arial"/>
+              </a:rPr>
+              <a:t>28</a:t>
+            </a:r>
+          </a:p>
+        </p:txBody>
+      </p:sp>
+      <p:sp>
+        <p:nvSpPr>
+          <p:cNvPr id="5" name="TextBox 4"/>
+          <p:cNvSpPr txBox="1"/>
+          <p:nvPr/>
+        </p:nvSpPr>
+        <p:spPr>
+          <a:xfrm>
+            <a:off x="548640" y="292608"/>
+            <a:ext cx="11094415" cy="274320"/>
           </a:xfrm>
           <a:prstGeom prst="rect">
             <a:avLst/>
@@ -21192,27 +21605,27 @@
               </a:spcAft>
             </a:pPr>
             <a:r>
-              <a:rPr b="1" sz="2800" i="0">
+              <a:rPr b="1" sz="1100" i="0">
                 <a:solidFill>
                   <a:srgbClr val="E6ECF7"/>
                 </a:solidFill>
-                <a:latin typeface="Georgia"/>
-              </a:rPr>
-              <a:t>What moves, and what doesn't</a:t>
-            </a:r>
-          </a:p>
-        </p:txBody>
-      </p:sp>
-      <p:sp>
-        <p:nvSpPr>
-          <p:cNvPr id="5" name="Rectangle 4"/>
+                <a:latin typeface="Arial"/>
+              </a:rPr>
+              <a:t>Build to Understand</a:t>
+            </a:r>
+          </a:p>
+        </p:txBody>
+      </p:sp>
+      <p:sp>
+        <p:nvSpPr>
+          <p:cNvPr id="6" name="Rectangle 5"/>
           <p:cNvSpPr/>
           <p:nvPr/>
         </p:nvSpPr>
         <p:spPr>
           <a:xfrm>
-            <a:off x="548640" y="1115568"/>
-            <a:ext cx="1097280" cy="41148"/>
+            <a:off x="548640" y="2555240"/>
+            <a:ext cx="822960" cy="54864"/>
           </a:xfrm>
           <a:prstGeom prst="rect">
             <a:avLst/>
@@ -21249,14 +21662,14 @@
       </p:sp>
       <p:sp>
         <p:nvSpPr>
-          <p:cNvPr id="6" name="TextBox 5"/>
+          <p:cNvPr id="7" name="TextBox 6"/>
           <p:cNvSpPr txBox="1"/>
           <p:nvPr/>
         </p:nvSpPr>
         <p:spPr>
           <a:xfrm>
-            <a:off x="548640" y="6473952"/>
-            <a:ext cx="3657600" cy="228600"/>
+            <a:off x="1783080" y="1874519"/>
+            <a:ext cx="9859975" cy="991615"/>
           </a:xfrm>
           <a:prstGeom prst="rect">
             <a:avLst/>
@@ -21264,41 +21677,41 @@
           <a:noFill/>
         </p:spPr>
         <p:txBody>
-          <a:bodyPr wrap="square" lIns="0" rIns="0" tIns="0" bIns="0" anchor="t">
+          <a:bodyPr wrap="square" lIns="0" rIns="0" tIns="0" bIns="0" anchor="b">
             <a:spAutoFit/>
           </a:bodyPr>
           <a:lstStyle/>
           <a:p>
             <a:pPr algn="l">
               <a:lnSpc>
-                <a:spcPct val="115000"/>
+                <a:spcPct val="122000"/>
               </a:lnSpc>
               <a:spcAft>
                 <a:spcPts val="0"/>
               </a:spcAft>
             </a:pPr>
             <a:r>
-              <a:rPr b="1" sz="950" i="0">
+              <a:rPr b="1" sz="3200" i="0">
                 <a:solidFill>
                   <a:srgbClr val="E6ECF7"/>
                 </a:solidFill>
-                <a:latin typeface="Arial"/>
-              </a:rPr>
-              <a:t>Build to Understand</a:t>
-            </a:r>
-          </a:p>
-        </p:txBody>
-      </p:sp>
-      <p:sp>
-        <p:nvSpPr>
-          <p:cNvPr id="7" name="TextBox 6"/>
+                <a:latin typeface="Georgia"/>
+              </a:rPr>
+              <a:t>Conclusion</a:t>
+            </a:r>
+          </a:p>
+        </p:txBody>
+      </p:sp>
+      <p:sp>
+        <p:nvSpPr>
+          <p:cNvPr id="8" name="TextBox 7"/>
           <p:cNvSpPr txBox="1"/>
           <p:nvPr/>
         </p:nvSpPr>
         <p:spPr>
           <a:xfrm>
-            <a:off x="10728655" y="6473952"/>
-            <a:ext cx="914400" cy="228600"/>
+            <a:off x="1783080" y="3140455"/>
+            <a:ext cx="9859975" cy="247649"/>
           </a:xfrm>
           <a:prstGeom prst="rect">
             <a:avLst/>
@@ -21311,86 +21724,38 @@
           </a:bodyPr>
           <a:lstStyle/>
           <a:p>
-            <a:pPr algn="r">
+            <a:pPr algn="l">
               <a:lnSpc>
-                <a:spcPct val="115000"/>
+                <a:spcPct val="130000"/>
               </a:lnSpc>
               <a:spcAft>
                 <a:spcPts val="0"/>
               </a:spcAft>
             </a:pPr>
             <a:r>
-              <a:rPr b="0" sz="950" i="0">
-                <a:solidFill>
-                  <a:srgbClr val="98A4BC"/>
+              <a:rPr b="0" sz="1500" i="0">
+                <a:solidFill>
+                  <a:srgbClr val="E6ECF7"/>
                 </a:solidFill>
                 <a:latin typeface="Arial"/>
               </a:rPr>
-              <a:t>28</a:t>
-            </a:r>
-          </a:p>
-        </p:txBody>
-      </p:sp>
-      <p:sp>
-        <p:nvSpPr>
-          <p:cNvPr id="8" name="Rounded Rectangle 7"/>
+              <a:t>What moves, what doesn't, and what I still don't know.</a:t>
+            </a:r>
+          </a:p>
+        </p:txBody>
+      </p:sp>
+      <p:sp>
+        <p:nvSpPr>
+          <p:cNvPr id="9" name="Oval 8"/>
           <p:cNvSpPr/>
           <p:nvPr/>
         </p:nvSpPr>
         <p:spPr>
           <a:xfrm>
-            <a:off x="548640" y="2014037"/>
-            <a:ext cx="3576218" cy="1733232"/>
-          </a:xfrm>
-          <a:prstGeom prst="roundRect">
-            <a:avLst>
-              <a:gd name="adj" fmla="val 4000"/>
-            </a:avLst>
-          </a:prstGeom>
-          <a:solidFill>
-            <a:srgbClr val="151D2E"/>
-          </a:solidFill>
-          <a:ln w="9525">
-            <a:solidFill>
-              <a:srgbClr val="35415A"/>
-            </a:solidFill>
-          </a:ln>
-          <a:effectLst/>
-        </p:spPr>
-        <p:style>
-          <a:lnRef idx="1">
-            <a:schemeClr val="accent1"/>
-          </a:lnRef>
-          <a:fillRef idx="3">
-            <a:schemeClr val="accent1"/>
-          </a:fillRef>
-          <a:effectRef idx="2">
-            <a:schemeClr val="accent1"/>
-          </a:effectRef>
-          <a:fontRef idx="minor">
-            <a:schemeClr val="lt1"/>
-          </a:fontRef>
-        </p:style>
-        <p:txBody>
-          <a:bodyPr rtlCol="0" anchor="ctr"/>
-          <a:lstStyle/>
-          <a:p>
-            <a:pPr algn="ctr"/>
-          </a:p>
-        </p:txBody>
-      </p:sp>
-      <p:sp>
-        <p:nvSpPr>
-          <p:cNvPr id="9" name="Rectangle 8"/>
-          <p:cNvSpPr/>
-          <p:nvPr/>
-        </p:nvSpPr>
-        <p:spPr>
-          <a:xfrm>
-            <a:off x="548640" y="2123765"/>
-            <a:ext cx="45720" cy="1513776"/>
-          </a:xfrm>
-          <a:prstGeom prst="rect">
+            <a:off x="10332720" y="5394960"/>
+            <a:ext cx="457200" cy="457200"/>
+          </a:xfrm>
+          <a:prstGeom prst="ellipse">
             <a:avLst/>
           </a:prstGeom>
           <a:solidFill>
@@ -21425,110 +21790,24 @@
       </p:sp>
       <p:sp>
         <p:nvSpPr>
-          <p:cNvPr id="10" name="TextBox 9"/>
-          <p:cNvSpPr txBox="1"/>
-          <p:nvPr/>
-        </p:nvSpPr>
-        <p:spPr>
-          <a:xfrm>
-            <a:off x="749808" y="2142053"/>
-            <a:ext cx="3210458" cy="540131"/>
-          </a:xfrm>
-          <a:prstGeom prst="rect">
-            <a:avLst/>
-          </a:prstGeom>
-          <a:noFill/>
-        </p:spPr>
-        <p:txBody>
-          <a:bodyPr wrap="square" lIns="0" rIns="0" tIns="0" bIns="0" anchor="t">
-            <a:spAutoFit/>
-          </a:bodyPr>
-          <a:lstStyle/>
-          <a:p>
-            <a:pPr algn="l">
-              <a:lnSpc>
-                <a:spcPct val="115000"/>
-              </a:lnSpc>
-              <a:spcAft>
-                <a:spcPts val="0"/>
-              </a:spcAft>
-            </a:pPr>
-            <a:r>
-              <a:rPr b="1" sz="1625" i="0">
-                <a:solidFill>
-                  <a:srgbClr val="E6ECF7"/>
-                </a:solidFill>
-                <a:latin typeface="Arial"/>
-              </a:rPr>
-              <a:t>Shorter queue</a:t>
-            </a:r>
-          </a:p>
-        </p:txBody>
-      </p:sp>
-      <p:sp>
-        <p:nvSpPr>
-          <p:cNvPr id="11" name="TextBox 10"/>
-          <p:cNvSpPr txBox="1"/>
-          <p:nvPr/>
-        </p:nvSpPr>
-        <p:spPr>
-          <a:xfrm>
-            <a:off x="749808" y="2755336"/>
-            <a:ext cx="3210458" cy="809053"/>
-          </a:xfrm>
-          <a:prstGeom prst="rect">
-            <a:avLst/>
-          </a:prstGeom>
-          <a:noFill/>
-        </p:spPr>
-        <p:txBody>
-          <a:bodyPr wrap="square" lIns="0" rIns="0" tIns="0" bIns="0" anchor="t">
-            <a:spAutoFit/>
-          </a:bodyPr>
-          <a:lstStyle/>
-          <a:p>
-            <a:pPr algn="l">
-              <a:lnSpc>
-                <a:spcPct val="125000"/>
-              </a:lnSpc>
-              <a:spcAft>
-                <a:spcPts val="0"/>
-              </a:spcAft>
-            </a:pPr>
-            <a:r>
-              <a:rPr b="0" sz="1430" i="0">
-                <a:solidFill>
-                  <a:srgbClr val="E6ECF7"/>
-                </a:solidFill>
-                <a:latin typeface="Arial"/>
-              </a:rPr>
-              <a:t>Turn on what is there. Centralize the mechanical. Log it. Tier by risk.</a:t>
-            </a:r>
-          </a:p>
-        </p:txBody>
-      </p:sp>
-      <p:sp>
-        <p:nvSpPr>
-          <p:cNvPr id="12" name="Rounded Rectangle 11"/>
+          <p:cNvPr id="10" name="Rounded Rectangle 9"/>
           <p:cNvSpPr/>
           <p:nvPr/>
         </p:nvSpPr>
         <p:spPr>
           <a:xfrm>
-            <a:off x="4307738" y="2014037"/>
-            <a:ext cx="3576218" cy="1733232"/>
+            <a:off x="10927080" y="5532120"/>
+            <a:ext cx="310896" cy="310896"/>
           </a:xfrm>
           <a:prstGeom prst="roundRect">
             <a:avLst>
               <a:gd name="adj" fmla="val 4000"/>
             </a:avLst>
           </a:prstGeom>
-          <a:solidFill>
-            <a:srgbClr val="151D2E"/>
-          </a:solidFill>
-          <a:ln w="9525">
+          <a:noFill/>
+          <a:ln w="19050">
             <a:solidFill>
-              <a:srgbClr val="35415A"/>
+              <a:srgbClr val="E8A33D"/>
             </a:solidFill>
           </a:ln>
           <a:effectLst/>
@@ -21552,396 +21831,6 @@
           <a:lstStyle/>
           <a:p>
             <a:pPr algn="ctr"/>
-          </a:p>
-        </p:txBody>
-      </p:sp>
-      <p:sp>
-        <p:nvSpPr>
-          <p:cNvPr id="13" name="Rectangle 12"/>
-          <p:cNvSpPr/>
-          <p:nvPr/>
-        </p:nvSpPr>
-        <p:spPr>
-          <a:xfrm>
-            <a:off x="4307738" y="2123765"/>
-            <a:ext cx="45720" cy="1513776"/>
-          </a:xfrm>
-          <a:prstGeom prst="rect">
-            <a:avLst/>
-          </a:prstGeom>
-          <a:solidFill>
-            <a:srgbClr val="E8A33D"/>
-          </a:solidFill>
-          <a:ln>
-            <a:noFill/>
-          </a:ln>
-          <a:effectLst/>
-        </p:spPr>
-        <p:style>
-          <a:lnRef idx="1">
-            <a:schemeClr val="accent1"/>
-          </a:lnRef>
-          <a:fillRef idx="3">
-            <a:schemeClr val="accent1"/>
-          </a:fillRef>
-          <a:effectRef idx="2">
-            <a:schemeClr val="accent1"/>
-          </a:effectRef>
-          <a:fontRef idx="minor">
-            <a:schemeClr val="lt1"/>
-          </a:fontRef>
-        </p:style>
-        <p:txBody>
-          <a:bodyPr rtlCol="0" anchor="ctr"/>
-          <a:lstStyle/>
-          <a:p>
-            <a:pPr algn="ctr"/>
-          </a:p>
-        </p:txBody>
-      </p:sp>
-      <p:sp>
-        <p:nvSpPr>
-          <p:cNvPr id="14" name="TextBox 13"/>
-          <p:cNvSpPr txBox="1"/>
-          <p:nvPr/>
-        </p:nvSpPr>
-        <p:spPr>
-          <a:xfrm>
-            <a:off x="4508906" y="2142053"/>
-            <a:ext cx="3210458" cy="540131"/>
-          </a:xfrm>
-          <a:prstGeom prst="rect">
-            <a:avLst/>
-          </a:prstGeom>
-          <a:noFill/>
-        </p:spPr>
-        <p:txBody>
-          <a:bodyPr wrap="square" lIns="0" rIns="0" tIns="0" bIns="0" anchor="t">
-            <a:spAutoFit/>
-          </a:bodyPr>
-          <a:lstStyle/>
-          <a:p>
-            <a:pPr algn="l">
-              <a:lnSpc>
-                <a:spcPct val="115000"/>
-              </a:lnSpc>
-              <a:spcAft>
-                <a:spcPts val="0"/>
-              </a:spcAft>
-            </a:pPr>
-            <a:r>
-              <a:rPr b="1" sz="1625" i="0">
-                <a:solidFill>
-                  <a:srgbClr val="E6ECF7"/>
-                </a:solidFill>
-                <a:latin typeface="Arial"/>
-              </a:rPr>
-              <a:t>Higher quality, with evidence</a:t>
-            </a:r>
-          </a:p>
-        </p:txBody>
-      </p:sp>
-      <p:sp>
-        <p:nvSpPr>
-          <p:cNvPr id="15" name="TextBox 14"/>
-          <p:cNvSpPr txBox="1"/>
-          <p:nvPr/>
-        </p:nvSpPr>
-        <p:spPr>
-          <a:xfrm>
-            <a:off x="4508906" y="2755336"/>
-            <a:ext cx="3210458" cy="809053"/>
-          </a:xfrm>
-          <a:prstGeom prst="rect">
-            <a:avLst/>
-          </a:prstGeom>
-          <a:noFill/>
-        </p:spPr>
-        <p:txBody>
-          <a:bodyPr wrap="square" lIns="0" rIns="0" tIns="0" bIns="0" anchor="t">
-            <a:spAutoFit/>
-          </a:bodyPr>
-          <a:lstStyle/>
-          <a:p>
-            <a:pPr algn="l">
-              <a:lnSpc>
-                <a:spcPct val="125000"/>
-              </a:lnSpc>
-              <a:spcAft>
-                <a:spcPts val="0"/>
-              </a:spcAft>
-            </a:pPr>
-            <a:r>
-              <a:rPr b="0" sz="1430" i="0">
-                <a:solidFill>
-                  <a:srgbClr val="E6ECF7"/>
-                </a:solidFill>
-                <a:latin typeface="Arial"/>
-              </a:rPr>
-              <a:t>A different model family reviews the change. Two more are design problems, not results.</a:t>
-            </a:r>
-          </a:p>
-        </p:txBody>
-      </p:sp>
-      <p:sp>
-        <p:nvSpPr>
-          <p:cNvPr id="16" name="Rounded Rectangle 15"/>
-          <p:cNvSpPr/>
-          <p:nvPr/>
-        </p:nvSpPr>
-        <p:spPr>
-          <a:xfrm>
-            <a:off x="8066836" y="2014037"/>
-            <a:ext cx="3576218" cy="1733232"/>
-          </a:xfrm>
-          <a:prstGeom prst="roundRect">
-            <a:avLst>
-              <a:gd name="adj" fmla="val 4000"/>
-            </a:avLst>
-          </a:prstGeom>
-          <a:solidFill>
-            <a:srgbClr val="151D2E"/>
-          </a:solidFill>
-          <a:ln w="9525">
-            <a:solidFill>
-              <a:srgbClr val="35415A"/>
-            </a:solidFill>
-          </a:ln>
-          <a:effectLst/>
-        </p:spPr>
-        <p:style>
-          <a:lnRef idx="1">
-            <a:schemeClr val="accent1"/>
-          </a:lnRef>
-          <a:fillRef idx="3">
-            <a:schemeClr val="accent1"/>
-          </a:fillRef>
-          <a:effectRef idx="2">
-            <a:schemeClr val="accent1"/>
-          </a:effectRef>
-          <a:fontRef idx="minor">
-            <a:schemeClr val="lt1"/>
-          </a:fontRef>
-        </p:style>
-        <p:txBody>
-          <a:bodyPr rtlCol="0" anchor="ctr"/>
-          <a:lstStyle/>
-          <a:p>
-            <a:pPr algn="ctr"/>
-          </a:p>
-        </p:txBody>
-      </p:sp>
-      <p:sp>
-        <p:nvSpPr>
-          <p:cNvPr id="17" name="Rectangle 16"/>
-          <p:cNvSpPr/>
-          <p:nvPr/>
-        </p:nvSpPr>
-        <p:spPr>
-          <a:xfrm>
-            <a:off x="8066836" y="2123765"/>
-            <a:ext cx="45720" cy="1513776"/>
-          </a:xfrm>
-          <a:prstGeom prst="rect">
-            <a:avLst/>
-          </a:prstGeom>
-          <a:solidFill>
-            <a:srgbClr val="29D3E0"/>
-          </a:solidFill>
-          <a:ln>
-            <a:noFill/>
-          </a:ln>
-          <a:effectLst/>
-        </p:spPr>
-        <p:style>
-          <a:lnRef idx="1">
-            <a:schemeClr val="accent1"/>
-          </a:lnRef>
-          <a:fillRef idx="3">
-            <a:schemeClr val="accent1"/>
-          </a:fillRef>
-          <a:effectRef idx="2">
-            <a:schemeClr val="accent1"/>
-          </a:effectRef>
-          <a:fontRef idx="minor">
-            <a:schemeClr val="lt1"/>
-          </a:fontRef>
-        </p:style>
-        <p:txBody>
-          <a:bodyPr rtlCol="0" anchor="ctr"/>
-          <a:lstStyle/>
-          <a:p>
-            <a:pPr algn="ctr"/>
-          </a:p>
-        </p:txBody>
-      </p:sp>
-      <p:sp>
-        <p:nvSpPr>
-          <p:cNvPr id="18" name="TextBox 17"/>
-          <p:cNvSpPr txBox="1"/>
-          <p:nvPr/>
-        </p:nvSpPr>
-        <p:spPr>
-          <a:xfrm>
-            <a:off x="8268004" y="2142053"/>
-            <a:ext cx="3210458" cy="540131"/>
-          </a:xfrm>
-          <a:prstGeom prst="rect">
-            <a:avLst/>
-          </a:prstGeom>
-          <a:noFill/>
-        </p:spPr>
-        <p:txBody>
-          <a:bodyPr wrap="square" lIns="0" rIns="0" tIns="0" bIns="0" anchor="t">
-            <a:spAutoFit/>
-          </a:bodyPr>
-          <a:lstStyle/>
-          <a:p>
-            <a:pPr algn="l">
-              <a:lnSpc>
-                <a:spcPct val="115000"/>
-              </a:lnSpc>
-              <a:spcAft>
-                <a:spcPts val="0"/>
-              </a:spcAft>
-            </a:pPr>
-            <a:r>
-              <a:rPr b="1" sz="1625" i="0">
-                <a:solidFill>
-                  <a:srgbClr val="E6ECF7"/>
-                </a:solidFill>
-                <a:latin typeface="Arial"/>
-              </a:rPr>
-              <a:t>Set aside</a:t>
-            </a:r>
-          </a:p>
-        </p:txBody>
-      </p:sp>
-      <p:sp>
-        <p:nvSpPr>
-          <p:cNvPr id="19" name="TextBox 18"/>
-          <p:cNvSpPr txBox="1"/>
-          <p:nvPr/>
-        </p:nvSpPr>
-        <p:spPr>
-          <a:xfrm>
-            <a:off x="8268004" y="2755336"/>
-            <a:ext cx="3210458" cy="809053"/>
-          </a:xfrm>
-          <a:prstGeom prst="rect">
-            <a:avLst/>
-          </a:prstGeom>
-          <a:noFill/>
-        </p:spPr>
-        <p:txBody>
-          <a:bodyPr wrap="square" lIns="0" rIns="0" tIns="0" bIns="0" anchor="t">
-            <a:spAutoFit/>
-          </a:bodyPr>
-          <a:lstStyle/>
-          <a:p>
-            <a:pPr algn="l">
-              <a:lnSpc>
-                <a:spcPct val="125000"/>
-              </a:lnSpc>
-              <a:spcAft>
-                <a:spcPts val="0"/>
-              </a:spcAft>
-            </a:pPr>
-            <a:r>
-              <a:rPr b="0" sz="1430" i="0">
-                <a:solidFill>
-                  <a:srgbClr val="E6ECF7"/>
-                </a:solidFill>
-                <a:latin typeface="Arial"/>
-              </a:rPr>
-              <a:t>Restricting AI use. Open source defends against strangers. We employ our authors.</a:t>
-            </a:r>
-          </a:p>
-        </p:txBody>
-      </p:sp>
-      <p:sp>
-        <p:nvSpPr>
-          <p:cNvPr id="20" name="Rectangle 19"/>
-          <p:cNvSpPr/>
-          <p:nvPr/>
-        </p:nvSpPr>
-        <p:spPr>
-          <a:xfrm>
-            <a:off x="548640" y="4231902"/>
-            <a:ext cx="54864" cy="746861"/>
-          </a:xfrm>
-          <a:prstGeom prst="rect">
-            <a:avLst/>
-          </a:prstGeom>
-          <a:solidFill>
-            <a:srgbClr val="29D3E0"/>
-          </a:solidFill>
-          <a:ln>
-            <a:noFill/>
-          </a:ln>
-          <a:effectLst/>
-        </p:spPr>
-        <p:style>
-          <a:lnRef idx="1">
-            <a:schemeClr val="accent1"/>
-          </a:lnRef>
-          <a:fillRef idx="3">
-            <a:schemeClr val="accent1"/>
-          </a:fillRef>
-          <a:effectRef idx="2">
-            <a:schemeClr val="accent1"/>
-          </a:effectRef>
-          <a:fontRef idx="minor">
-            <a:schemeClr val="lt1"/>
-          </a:fontRef>
-        </p:style>
-        <p:txBody>
-          <a:bodyPr rtlCol="0" anchor="ctr"/>
-          <a:lstStyle/>
-          <a:p>
-            <a:pPr algn="ctr"/>
-          </a:p>
-        </p:txBody>
-      </p:sp>
-      <p:sp>
-        <p:nvSpPr>
-          <p:cNvPr id="21" name="TextBox 20"/>
-          <p:cNvSpPr txBox="1"/>
-          <p:nvPr/>
-        </p:nvSpPr>
-        <p:spPr>
-          <a:xfrm>
-            <a:off x="822959" y="4323342"/>
-            <a:ext cx="10682935" cy="563981"/>
-          </a:xfrm>
-          <a:prstGeom prst="rect">
-            <a:avLst/>
-          </a:prstGeom>
-          <a:noFill/>
-        </p:spPr>
-        <p:txBody>
-          <a:bodyPr wrap="square" lIns="0" rIns="0" tIns="0" bIns="0" anchor="ctr">
-            <a:spAutoFit/>
-          </a:bodyPr>
-          <a:lstStyle/>
-          <a:p>
-            <a:pPr algn="l">
-              <a:lnSpc>
-                <a:spcPct val="115000"/>
-              </a:lnSpc>
-              <a:spcAft>
-                <a:spcPts val="0"/>
-              </a:spcAft>
-            </a:pPr>
-            <a:r>
-              <a:rPr b="1" sz="1820" i="0">
-                <a:solidFill>
-                  <a:srgbClr val="E6ECF7"/>
-                </a:solidFill>
-                <a:latin typeface="Arial"/>
-              </a:rPr>
-              <a:t>The approval stays with a human who is independent of whoever implemented the change. That is the one line that does not move.</a:t>
-            </a:r>
           </a:p>
         </p:txBody>
       </p:sp>
@@ -22044,7 +21933,7 @@
                 </a:solidFill>
                 <a:latin typeface="Arial"/>
               </a:rPr>
-              <a:t>SLIDE 29 · WHAT I DON'T KNOW YET</a:t>
+              <a:t>SLIDE 29 · CONCLUSION</a:t>
             </a:r>
           </a:p>
         </p:txBody>
@@ -22086,7 +21975,7 @@
                 </a:solidFill>
                 <a:latin typeface="Georgia"/>
               </a:rPr>
-              <a:t>What I don't know yet</a:t>
+              <a:t>What moves, and what doesn't</a:t>
             </a:r>
           </a:p>
         </p:txBody>
@@ -22227,8 +22116,8 @@
         </p:nvSpPr>
         <p:spPr>
           <a:xfrm>
-            <a:off x="548640" y="1811803"/>
-            <a:ext cx="2636443" cy="2212022"/>
+            <a:off x="548640" y="2014037"/>
+            <a:ext cx="3576218" cy="1733232"/>
           </a:xfrm>
           <a:prstGeom prst="roundRect">
             <a:avLst>
@@ -22275,8 +22164,8 @@
         </p:nvSpPr>
         <p:spPr>
           <a:xfrm>
-            <a:off x="548640" y="1921531"/>
-            <a:ext cx="45720" cy="1992566"/>
+            <a:off x="548640" y="2123765"/>
+            <a:ext cx="45720" cy="1513776"/>
           </a:xfrm>
           <a:prstGeom prst="rect">
             <a:avLst/>
@@ -22319,8 +22208,8 @@
         </p:nvSpPr>
         <p:spPr>
           <a:xfrm>
-            <a:off x="749808" y="1939819"/>
-            <a:ext cx="2270683" cy="791908"/>
+            <a:off x="749808" y="2142053"/>
+            <a:ext cx="3210458" cy="540131"/>
           </a:xfrm>
           <a:prstGeom prst="rect">
             <a:avLst/>
@@ -22348,7 +22237,7 @@
                 </a:solidFill>
                 <a:latin typeface="Arial"/>
               </a:rPr>
-              <a:t>Same team, or outside it?</a:t>
+              <a:t>Shorter queue</a:t>
             </a:r>
           </a:p>
         </p:txBody>
@@ -22361,8 +22250,8 @@
         </p:nvSpPr>
         <p:spPr>
           <a:xfrm>
-            <a:off x="749808" y="2804879"/>
-            <a:ext cx="2270683" cy="1036065"/>
+            <a:off x="749808" y="2755336"/>
+            <a:ext cx="3210458" cy="809053"/>
           </a:xfrm>
           <a:prstGeom prst="rect">
             <a:avLst/>
@@ -22390,7 +22279,7 @@
                 </a:solidFill>
                 <a:latin typeface="Arial"/>
               </a:rPr>
-              <a:t>Everything here assumes same-team approval is enough. The regulation does not say.</a:t>
+              <a:t>Turn on what is there. Centralize the mechanical. Log it. Tier by risk.</a:t>
             </a:r>
           </a:p>
         </p:txBody>
@@ -22403,8 +22292,8 @@
         </p:nvSpPr>
         <p:spPr>
           <a:xfrm>
-            <a:off x="3367963" y="1811803"/>
-            <a:ext cx="2636443" cy="2212022"/>
+            <a:off x="4307738" y="2014037"/>
+            <a:ext cx="3576218" cy="1733232"/>
           </a:xfrm>
           <a:prstGeom prst="roundRect">
             <a:avLst>
@@ -22451,8 +22340,8 @@
         </p:nvSpPr>
         <p:spPr>
           <a:xfrm>
-            <a:off x="3367963" y="1921531"/>
-            <a:ext cx="45720" cy="1992566"/>
+            <a:off x="4307738" y="2123765"/>
+            <a:ext cx="45720" cy="1513776"/>
           </a:xfrm>
           <a:prstGeom prst="rect">
             <a:avLst/>
@@ -22495,8 +22384,8 @@
         </p:nvSpPr>
         <p:spPr>
           <a:xfrm>
-            <a:off x="3569131" y="1939819"/>
-            <a:ext cx="2270683" cy="791908"/>
+            <a:off x="4508906" y="2142053"/>
+            <a:ext cx="3210458" cy="540131"/>
           </a:xfrm>
           <a:prstGeom prst="rect">
             <a:avLst/>
@@ -22524,7 +22413,7 @@
                 </a:solidFill>
                 <a:latin typeface="Arial"/>
               </a:rPr>
-              <a:t>Does a classifier count as a function?</a:t>
+              <a:t>Higher quality, with evidence</a:t>
             </a:r>
           </a:p>
         </p:txBody>
@@ -22537,8 +22426,8 @@
         </p:nvSpPr>
         <p:spPr>
           <a:xfrm>
-            <a:off x="3569131" y="2804879"/>
-            <a:ext cx="2270683" cy="1036065"/>
+            <a:off x="4508906" y="2755336"/>
+            <a:ext cx="3210458" cy="809053"/>
           </a:xfrm>
           <a:prstGeom prst="rect">
             <a:avLst/>
@@ -22566,7 +22455,7 @@
                 </a:solidFill>
                 <a:latin typeface="Arial"/>
               </a:rPr>
-              <a:t>Meta and Zalando auto-approve. Nobody has written down whether DORA allows it.</a:t>
+              <a:t>A different model family reviews the change. Two more are design problems, not results.</a:t>
             </a:r>
           </a:p>
         </p:txBody>
@@ -22579,8 +22468,8 @@
         </p:nvSpPr>
         <p:spPr>
           <a:xfrm>
-            <a:off x="6187287" y="1811803"/>
-            <a:ext cx="2636443" cy="2212022"/>
+            <a:off x="8066836" y="2014037"/>
+            <a:ext cx="3576218" cy="1733232"/>
           </a:xfrm>
           <a:prstGeom prst="roundRect">
             <a:avLst>
@@ -22627,8 +22516,8 @@
         </p:nvSpPr>
         <p:spPr>
           <a:xfrm>
-            <a:off x="6187287" y="1921531"/>
-            <a:ext cx="45720" cy="1992566"/>
+            <a:off x="8066836" y="2123765"/>
+            <a:ext cx="45720" cy="1513776"/>
           </a:xfrm>
           <a:prstGeom prst="rect">
             <a:avLst/>
@@ -22671,8 +22560,8 @@
         </p:nvSpPr>
         <p:spPr>
           <a:xfrm>
-            <a:off x="6388455" y="1939819"/>
-            <a:ext cx="2270683" cy="791908"/>
+            <a:off x="8268004" y="2142053"/>
+            <a:ext cx="3210458" cy="540131"/>
           </a:xfrm>
           <a:prstGeom prst="rect">
             <a:avLst/>
@@ -22700,7 +22589,7 @@
                 </a:solidFill>
                 <a:latin typeface="Arial"/>
               </a:rPr>
-              <a:t>What is switched on today?</a:t>
+              <a:t>Set aside</a:t>
             </a:r>
           </a:p>
         </p:txBody>
@@ -22713,8 +22602,8 @@
         </p:nvSpPr>
         <p:spPr>
           <a:xfrm>
-            <a:off x="6388455" y="2804879"/>
-            <a:ext cx="2270683" cy="1036065"/>
+            <a:off x="8268004" y="2755336"/>
+            <a:ext cx="3210458" cy="809053"/>
           </a:xfrm>
           <a:prstGeom prst="rect">
             <a:avLst/>
@@ -22742,34 +22631,30 @@
                 </a:solidFill>
                 <a:latin typeface="Arial"/>
               </a:rPr>
-              <a:t>A day of checking I have not done.</a:t>
-            </a:r>
-          </a:p>
-        </p:txBody>
-      </p:sp>
-      <p:sp>
-        <p:nvSpPr>
-          <p:cNvPr id="20" name="Rounded Rectangle 19"/>
+              <a:t>Restricting AI use. Open source defends against strangers. We employ our authors.</a:t>
+            </a:r>
+          </a:p>
+        </p:txBody>
+      </p:sp>
+      <p:sp>
+        <p:nvSpPr>
+          <p:cNvPr id="20" name="Rectangle 19"/>
           <p:cNvSpPr/>
           <p:nvPr/>
         </p:nvSpPr>
         <p:spPr>
           <a:xfrm>
-            <a:off x="9006611" y="1811803"/>
-            <a:ext cx="2636443" cy="2212022"/>
-          </a:xfrm>
-          <a:prstGeom prst="roundRect">
-            <a:avLst>
-              <a:gd name="adj" fmla="val 4000"/>
-            </a:avLst>
+            <a:off x="548640" y="4231902"/>
+            <a:ext cx="54864" cy="746861"/>
+          </a:xfrm>
+          <a:prstGeom prst="rect">
+            <a:avLst/>
           </a:prstGeom>
           <a:solidFill>
-            <a:srgbClr val="151D2E"/>
+            <a:srgbClr val="29D3E0"/>
           </a:solidFill>
-          <a:ln w="9525">
-            <a:solidFill>
-              <a:srgbClr val="35415A"/>
-            </a:solidFill>
+          <a:ln>
+            <a:noFill/>
           </a:ln>
           <a:effectLst/>
         </p:spPr>
@@ -22797,58 +22682,14 @@
       </p:sp>
       <p:sp>
         <p:nvSpPr>
-          <p:cNvPr id="21" name="Rectangle 20"/>
-          <p:cNvSpPr/>
-          <p:nvPr/>
-        </p:nvSpPr>
-        <p:spPr>
-          <a:xfrm>
-            <a:off x="9006611" y="1921531"/>
-            <a:ext cx="45720" cy="1992566"/>
-          </a:xfrm>
-          <a:prstGeom prst="rect">
-            <a:avLst/>
-          </a:prstGeom>
-          <a:solidFill>
-            <a:srgbClr val="E8A33D"/>
-          </a:solidFill>
-          <a:ln>
-            <a:noFill/>
-          </a:ln>
-          <a:effectLst/>
-        </p:spPr>
-        <p:style>
-          <a:lnRef idx="1">
-            <a:schemeClr val="accent1"/>
-          </a:lnRef>
-          <a:fillRef idx="3">
-            <a:schemeClr val="accent1"/>
-          </a:fillRef>
-          <a:effectRef idx="2">
-            <a:schemeClr val="accent1"/>
-          </a:effectRef>
-          <a:fontRef idx="minor">
-            <a:schemeClr val="lt1"/>
-          </a:fontRef>
-        </p:style>
-        <p:txBody>
-          <a:bodyPr rtlCol="0" anchor="ctr"/>
-          <a:lstStyle/>
-          <a:p>
-            <a:pPr algn="ctr"/>
-          </a:p>
-        </p:txBody>
-      </p:sp>
-      <p:sp>
-        <p:nvSpPr>
-          <p:cNvPr id="22" name="TextBox 21"/>
+          <p:cNvPr id="21" name="TextBox 20"/>
           <p:cNvSpPr txBox="1"/>
           <p:nvPr/>
         </p:nvSpPr>
         <p:spPr>
           <a:xfrm>
-            <a:off x="9207779" y="1939819"/>
-            <a:ext cx="2270683" cy="791908"/>
+            <a:off x="822959" y="4323342"/>
+            <a:ext cx="10682935" cy="563981"/>
           </a:xfrm>
           <a:prstGeom prst="rect">
             <a:avLst/>
@@ -22856,7 +22697,7 @@
           <a:noFill/>
         </p:spPr>
         <p:txBody>
-          <a:bodyPr wrap="square" lIns="0" rIns="0" tIns="0" bIns="0" anchor="t">
+          <a:bodyPr wrap="square" lIns="0" rIns="0" tIns="0" bIns="0" anchor="ctr">
             <a:spAutoFit/>
           </a:bodyPr>
           <a:lstStyle/>
@@ -22870,403 +22711,13 @@
               </a:spcAft>
             </a:pPr>
             <a:r>
-              <a:rPr b="1" sz="1625" i="0">
+              <a:rPr b="1" sz="1820" i="0">
                 <a:solidFill>
                   <a:srgbClr val="E6ECF7"/>
                 </a:solidFill>
                 <a:latin typeface="Arial"/>
               </a:rPr>
-              <a:t>Does the author's check survive a team?</a:t>
-            </a:r>
-          </a:p>
-        </p:txBody>
-      </p:sp>
-      <p:sp>
-        <p:nvSpPr>
-          <p:cNvPr id="23" name="TextBox 22"/>
-          <p:cNvSpPr txBox="1"/>
-          <p:nvPr/>
-        </p:nvSpPr>
-        <p:spPr>
-          <a:xfrm>
-            <a:off x="9207779" y="2804879"/>
-            <a:ext cx="2270683" cy="1036065"/>
-          </a:xfrm>
-          <a:prstGeom prst="rect">
-            <a:avLst/>
-          </a:prstGeom>
-          <a:noFill/>
-        </p:spPr>
-        <p:txBody>
-          <a:bodyPr wrap="square" lIns="0" rIns="0" tIns="0" bIns="0" anchor="t">
-            <a:spAutoFit/>
-          </a:bodyPr>
-          <a:lstStyle/>
-          <a:p>
-            <a:pPr algn="l">
-              <a:lnSpc>
-                <a:spcPct val="125000"/>
-              </a:lnSpc>
-              <a:spcAft>
-                <a:spcPts val="0"/>
-              </a:spcAft>
-            </a:pPr>
-            <a:r>
-              <a:rPr b="0" sz="1430" i="0">
-                <a:solidFill>
-                  <a:srgbClr val="E6ECF7"/>
-                </a:solidFill>
-                <a:latin typeface="Arial"/>
-              </a:rPr>
-              <a:t>Nobody has used it.</a:t>
-            </a:r>
-          </a:p>
-        </p:txBody>
-      </p:sp>
-      <p:sp>
-        <p:nvSpPr>
-          <p:cNvPr id="24" name="Rectangle 23"/>
-          <p:cNvSpPr/>
-          <p:nvPr/>
-        </p:nvSpPr>
-        <p:spPr>
-          <a:xfrm>
-            <a:off x="548640" y="4508457"/>
-            <a:ext cx="5455767" cy="911352"/>
-          </a:xfrm>
-          <a:prstGeom prst="rect">
-            <a:avLst/>
-          </a:prstGeom>
-          <a:solidFill>
-            <a:srgbClr val="151D2E"/>
-          </a:solidFill>
-          <a:ln w="9525">
-            <a:solidFill>
-              <a:srgbClr val="35415A"/>
-            </a:solidFill>
-          </a:ln>
-          <a:effectLst/>
-        </p:spPr>
-        <p:style>
-          <a:lnRef idx="1">
-            <a:schemeClr val="accent1"/>
-          </a:lnRef>
-          <a:fillRef idx="3">
-            <a:schemeClr val="accent1"/>
-          </a:fillRef>
-          <a:effectRef idx="2">
-            <a:schemeClr val="accent1"/>
-          </a:effectRef>
-          <a:fontRef idx="minor">
-            <a:schemeClr val="lt1"/>
-          </a:fontRef>
-        </p:style>
-        <p:txBody>
-          <a:bodyPr rtlCol="0" anchor="ctr"/>
-          <a:lstStyle/>
-          <a:p>
-            <a:pPr algn="ctr"/>
-          </a:p>
-        </p:txBody>
-      </p:sp>
-      <p:sp>
-        <p:nvSpPr>
-          <p:cNvPr id="25" name="Rectangle 24"/>
-          <p:cNvSpPr/>
-          <p:nvPr/>
-        </p:nvSpPr>
-        <p:spPr>
-          <a:xfrm>
-            <a:off x="548640" y="4508457"/>
-            <a:ext cx="45720" cy="911352"/>
-          </a:xfrm>
-          <a:prstGeom prst="rect">
-            <a:avLst/>
-          </a:prstGeom>
-          <a:solidFill>
-            <a:srgbClr val="E8A33D"/>
-          </a:solidFill>
-          <a:ln>
-            <a:noFill/>
-          </a:ln>
-          <a:effectLst/>
-        </p:spPr>
-        <p:style>
-          <a:lnRef idx="1">
-            <a:schemeClr val="accent1"/>
-          </a:lnRef>
-          <a:fillRef idx="3">
-            <a:schemeClr val="accent1"/>
-          </a:fillRef>
-          <a:effectRef idx="2">
-            <a:schemeClr val="accent1"/>
-          </a:effectRef>
-          <a:fontRef idx="minor">
-            <a:schemeClr val="lt1"/>
-          </a:fontRef>
-        </p:style>
-        <p:txBody>
-          <a:bodyPr rtlCol="0" anchor="ctr"/>
-          <a:lstStyle/>
-          <a:p>
-            <a:pPr algn="ctr"/>
-          </a:p>
-        </p:txBody>
-      </p:sp>
-      <p:sp>
-        <p:nvSpPr>
-          <p:cNvPr id="26" name="TextBox 25"/>
-          <p:cNvSpPr txBox="1"/>
-          <p:nvPr/>
-        </p:nvSpPr>
-        <p:spPr>
-          <a:xfrm>
-            <a:off x="749808" y="4618185"/>
-            <a:ext cx="5090007" cy="228600"/>
-          </a:xfrm>
-          <a:prstGeom prst="rect">
-            <a:avLst/>
-          </a:prstGeom>
-          <a:noFill/>
-        </p:spPr>
-        <p:txBody>
-          <a:bodyPr wrap="square" lIns="0" rIns="0" tIns="0" bIns="0" anchor="t">
-            <a:spAutoFit/>
-          </a:bodyPr>
-          <a:lstStyle/>
-          <a:p>
-            <a:pPr algn="l">
-              <a:lnSpc>
-                <a:spcPct val="115000"/>
-              </a:lnSpc>
-              <a:spcAft>
-                <a:spcPts val="0"/>
-              </a:spcAft>
-            </a:pPr>
-            <a:r>
-              <a:rPr b="1" sz="1495" i="0">
-                <a:solidFill>
-                  <a:srgbClr val="E6ECF7"/>
-                </a:solidFill>
-                <a:latin typeface="Arial"/>
-              </a:rPr>
-              <a:t>What would help me most</a:t>
-            </a:r>
-          </a:p>
-        </p:txBody>
-      </p:sp>
-      <p:sp>
-        <p:nvSpPr>
-          <p:cNvPr id="27" name="TextBox 26"/>
-          <p:cNvSpPr txBox="1"/>
-          <p:nvPr/>
-        </p:nvSpPr>
-        <p:spPr>
-          <a:xfrm>
-            <a:off x="749808" y="4855929"/>
-            <a:ext cx="5090007" cy="435864"/>
-          </a:xfrm>
-          <a:prstGeom prst="rect">
-            <a:avLst/>
-          </a:prstGeom>
-          <a:noFill/>
-        </p:spPr>
-        <p:txBody>
-          <a:bodyPr wrap="square" lIns="0" rIns="0" tIns="0" bIns="0" anchor="t">
-            <a:spAutoFit/>
-          </a:bodyPr>
-          <a:lstStyle/>
-          <a:p>
-            <a:pPr algn="l">
-              <a:lnSpc>
-                <a:spcPct val="120000"/>
-              </a:lnSpc>
-              <a:spcAft>
-                <a:spcPts val="0"/>
-              </a:spcAft>
-            </a:pPr>
-            <a:r>
-              <a:rPr b="0" sz="1430" i="0">
-                <a:solidFill>
-                  <a:srgbClr val="E6ECF7"/>
-                </a:solidFill>
-                <a:latin typeface="Arial"/>
-              </a:rPr>
-              <a:t>A review decision you made and had to undo. What did it cost?</a:t>
-            </a:r>
-          </a:p>
-        </p:txBody>
-      </p:sp>
-      <p:sp>
-        <p:nvSpPr>
-          <p:cNvPr id="28" name="Rectangle 27"/>
-          <p:cNvSpPr/>
-          <p:nvPr/>
-        </p:nvSpPr>
-        <p:spPr>
-          <a:xfrm>
-            <a:off x="6187287" y="4508457"/>
-            <a:ext cx="5455767" cy="911352"/>
-          </a:xfrm>
-          <a:prstGeom prst="rect">
-            <a:avLst/>
-          </a:prstGeom>
-          <a:solidFill>
-            <a:srgbClr val="151D2E"/>
-          </a:solidFill>
-          <a:ln w="9525">
-            <a:solidFill>
-              <a:srgbClr val="35415A"/>
-            </a:solidFill>
-          </a:ln>
-          <a:effectLst/>
-        </p:spPr>
-        <p:style>
-          <a:lnRef idx="1">
-            <a:schemeClr val="accent1"/>
-          </a:lnRef>
-          <a:fillRef idx="3">
-            <a:schemeClr val="accent1"/>
-          </a:fillRef>
-          <a:effectRef idx="2">
-            <a:schemeClr val="accent1"/>
-          </a:effectRef>
-          <a:fontRef idx="minor">
-            <a:schemeClr val="lt1"/>
-          </a:fontRef>
-        </p:style>
-        <p:txBody>
-          <a:bodyPr rtlCol="0" anchor="ctr"/>
-          <a:lstStyle/>
-          <a:p>
-            <a:pPr algn="ctr"/>
-          </a:p>
-        </p:txBody>
-      </p:sp>
-      <p:sp>
-        <p:nvSpPr>
-          <p:cNvPr id="29" name="Rectangle 28"/>
-          <p:cNvSpPr/>
-          <p:nvPr/>
-        </p:nvSpPr>
-        <p:spPr>
-          <a:xfrm>
-            <a:off x="6187287" y="4508457"/>
-            <a:ext cx="45720" cy="911352"/>
-          </a:xfrm>
-          <a:prstGeom prst="rect">
-            <a:avLst/>
-          </a:prstGeom>
-          <a:solidFill>
-            <a:srgbClr val="29D3E0"/>
-          </a:solidFill>
-          <a:ln>
-            <a:noFill/>
-          </a:ln>
-          <a:effectLst/>
-        </p:spPr>
-        <p:style>
-          <a:lnRef idx="1">
-            <a:schemeClr val="accent1"/>
-          </a:lnRef>
-          <a:fillRef idx="3">
-            <a:schemeClr val="accent1"/>
-          </a:fillRef>
-          <a:effectRef idx="2">
-            <a:schemeClr val="accent1"/>
-          </a:effectRef>
-          <a:fontRef idx="minor">
-            <a:schemeClr val="lt1"/>
-          </a:fontRef>
-        </p:style>
-        <p:txBody>
-          <a:bodyPr rtlCol="0" anchor="ctr"/>
-          <a:lstStyle/>
-          <a:p>
-            <a:pPr algn="ctr"/>
-          </a:p>
-        </p:txBody>
-      </p:sp>
-      <p:sp>
-        <p:nvSpPr>
-          <p:cNvPr id="30" name="TextBox 29"/>
-          <p:cNvSpPr txBox="1"/>
-          <p:nvPr/>
-        </p:nvSpPr>
-        <p:spPr>
-          <a:xfrm>
-            <a:off x="6388455" y="4618185"/>
-            <a:ext cx="5090007" cy="228600"/>
-          </a:xfrm>
-          <a:prstGeom prst="rect">
-            <a:avLst/>
-          </a:prstGeom>
-          <a:noFill/>
-        </p:spPr>
-        <p:txBody>
-          <a:bodyPr wrap="square" lIns="0" rIns="0" tIns="0" bIns="0" anchor="t">
-            <a:spAutoFit/>
-          </a:bodyPr>
-          <a:lstStyle/>
-          <a:p>
-            <a:pPr algn="l">
-              <a:lnSpc>
-                <a:spcPct val="115000"/>
-              </a:lnSpc>
-              <a:spcAft>
-                <a:spcPts val="0"/>
-              </a:spcAft>
-            </a:pPr>
-            <a:r>
-              <a:rPr b="1" sz="1495" i="0">
-                <a:solidFill>
-                  <a:srgbClr val="E6ECF7"/>
-                </a:solidFill>
-                <a:latin typeface="Arial"/>
-              </a:rPr>
-              <a:t>What would change my mind</a:t>
-            </a:r>
-          </a:p>
-        </p:txBody>
-      </p:sp>
-      <p:sp>
-        <p:nvSpPr>
-          <p:cNvPr id="31" name="TextBox 30"/>
-          <p:cNvSpPr txBox="1"/>
-          <p:nvPr/>
-        </p:nvSpPr>
-        <p:spPr>
-          <a:xfrm>
-            <a:off x="6388455" y="4855929"/>
-            <a:ext cx="5090007" cy="435864"/>
-          </a:xfrm>
-          <a:prstGeom prst="rect">
-            <a:avLst/>
-          </a:prstGeom>
-          <a:noFill/>
-        </p:spPr>
-        <p:txBody>
-          <a:bodyPr wrap="square" lIns="0" rIns="0" tIns="0" bIns="0" anchor="t">
-            <a:spAutoFit/>
-          </a:bodyPr>
-          <a:lstStyle/>
-          <a:p>
-            <a:pPr algn="l">
-              <a:lnSpc>
-                <a:spcPct val="120000"/>
-              </a:lnSpc>
-              <a:spcAft>
-                <a:spcPts val="0"/>
-              </a:spcAft>
-            </a:pPr>
-            <a:r>
-              <a:rPr b="0" sz="1430" i="0">
-                <a:solidFill>
-                  <a:srgbClr val="E6ECF7"/>
-                </a:solidFill>
-                <a:latin typeface="Arial"/>
-              </a:rPr>
-              <a:t>A regulated company whose auditor accepted a machine's approval.</a:t>
+              <a:t>The approval stays with a human who is independent of whoever implemented the change. That is the one line that does not move.</a:t>
             </a:r>
           </a:p>
         </p:txBody>
@@ -24286,7 +23737,7 @@
                 </a:solidFill>
                 <a:latin typeface="Arial"/>
               </a:rPr>
-              <a:t>SLIDE 30 · APPENDIX A1</a:t>
+              <a:t>SLIDE 30 · WHAT I DON'T KNOW YET</a:t>
             </a:r>
           </a:p>
         </p:txBody>
@@ -24328,7 +23779,7 @@
                 </a:solidFill>
                 <a:latin typeface="Georgia"/>
               </a:rPr>
-              <a:t>A1 — Who did what about the queue</a:t>
+              <a:t>What I don't know yet</a:t>
             </a:r>
           </a:p>
         </p:txBody>
@@ -24457,6 +23908,1332 @@
                 <a:latin typeface="Arial"/>
               </a:rPr>
               <a:t>30</a:t>
+            </a:r>
+          </a:p>
+        </p:txBody>
+      </p:sp>
+      <p:sp>
+        <p:nvSpPr>
+          <p:cNvPr id="8" name="Rounded Rectangle 7"/>
+          <p:cNvSpPr/>
+          <p:nvPr/>
+        </p:nvSpPr>
+        <p:spPr>
+          <a:xfrm>
+            <a:off x="548640" y="1811803"/>
+            <a:ext cx="2636443" cy="2212022"/>
+          </a:xfrm>
+          <a:prstGeom prst="roundRect">
+            <a:avLst>
+              <a:gd name="adj" fmla="val 4000"/>
+            </a:avLst>
+          </a:prstGeom>
+          <a:solidFill>
+            <a:srgbClr val="151D2E"/>
+          </a:solidFill>
+          <a:ln w="9525">
+            <a:solidFill>
+              <a:srgbClr val="35415A"/>
+            </a:solidFill>
+          </a:ln>
+          <a:effectLst/>
+        </p:spPr>
+        <p:style>
+          <a:lnRef idx="1">
+            <a:schemeClr val="accent1"/>
+          </a:lnRef>
+          <a:fillRef idx="3">
+            <a:schemeClr val="accent1"/>
+          </a:fillRef>
+          <a:effectRef idx="2">
+            <a:schemeClr val="accent1"/>
+          </a:effectRef>
+          <a:fontRef idx="minor">
+            <a:schemeClr val="lt1"/>
+          </a:fontRef>
+        </p:style>
+        <p:txBody>
+          <a:bodyPr rtlCol="0" anchor="ctr"/>
+          <a:lstStyle/>
+          <a:p>
+            <a:pPr algn="ctr"/>
+          </a:p>
+        </p:txBody>
+      </p:sp>
+      <p:sp>
+        <p:nvSpPr>
+          <p:cNvPr id="9" name="Rectangle 8"/>
+          <p:cNvSpPr/>
+          <p:nvPr/>
+        </p:nvSpPr>
+        <p:spPr>
+          <a:xfrm>
+            <a:off x="548640" y="1921531"/>
+            <a:ext cx="45720" cy="1992566"/>
+          </a:xfrm>
+          <a:prstGeom prst="rect">
+            <a:avLst/>
+          </a:prstGeom>
+          <a:solidFill>
+            <a:srgbClr val="29D3E0"/>
+          </a:solidFill>
+          <a:ln>
+            <a:noFill/>
+          </a:ln>
+          <a:effectLst/>
+        </p:spPr>
+        <p:style>
+          <a:lnRef idx="1">
+            <a:schemeClr val="accent1"/>
+          </a:lnRef>
+          <a:fillRef idx="3">
+            <a:schemeClr val="accent1"/>
+          </a:fillRef>
+          <a:effectRef idx="2">
+            <a:schemeClr val="accent1"/>
+          </a:effectRef>
+          <a:fontRef idx="minor">
+            <a:schemeClr val="lt1"/>
+          </a:fontRef>
+        </p:style>
+        <p:txBody>
+          <a:bodyPr rtlCol="0" anchor="ctr"/>
+          <a:lstStyle/>
+          <a:p>
+            <a:pPr algn="ctr"/>
+          </a:p>
+        </p:txBody>
+      </p:sp>
+      <p:sp>
+        <p:nvSpPr>
+          <p:cNvPr id="10" name="TextBox 9"/>
+          <p:cNvSpPr txBox="1"/>
+          <p:nvPr/>
+        </p:nvSpPr>
+        <p:spPr>
+          <a:xfrm>
+            <a:off x="749808" y="1939819"/>
+            <a:ext cx="2270683" cy="791908"/>
+          </a:xfrm>
+          <a:prstGeom prst="rect">
+            <a:avLst/>
+          </a:prstGeom>
+          <a:noFill/>
+        </p:spPr>
+        <p:txBody>
+          <a:bodyPr wrap="square" lIns="0" rIns="0" tIns="0" bIns="0" anchor="t">
+            <a:spAutoFit/>
+          </a:bodyPr>
+          <a:lstStyle/>
+          <a:p>
+            <a:pPr algn="l">
+              <a:lnSpc>
+                <a:spcPct val="115000"/>
+              </a:lnSpc>
+              <a:spcAft>
+                <a:spcPts val="0"/>
+              </a:spcAft>
+            </a:pPr>
+            <a:r>
+              <a:rPr b="1" sz="1625" i="0">
+                <a:solidFill>
+                  <a:srgbClr val="E6ECF7"/>
+                </a:solidFill>
+                <a:latin typeface="Arial"/>
+              </a:rPr>
+              <a:t>Same team, or outside it?</a:t>
+            </a:r>
+          </a:p>
+        </p:txBody>
+      </p:sp>
+      <p:sp>
+        <p:nvSpPr>
+          <p:cNvPr id="11" name="TextBox 10"/>
+          <p:cNvSpPr txBox="1"/>
+          <p:nvPr/>
+        </p:nvSpPr>
+        <p:spPr>
+          <a:xfrm>
+            <a:off x="749808" y="2804879"/>
+            <a:ext cx="2270683" cy="1036065"/>
+          </a:xfrm>
+          <a:prstGeom prst="rect">
+            <a:avLst/>
+          </a:prstGeom>
+          <a:noFill/>
+        </p:spPr>
+        <p:txBody>
+          <a:bodyPr wrap="square" lIns="0" rIns="0" tIns="0" bIns="0" anchor="t">
+            <a:spAutoFit/>
+          </a:bodyPr>
+          <a:lstStyle/>
+          <a:p>
+            <a:pPr algn="l">
+              <a:lnSpc>
+                <a:spcPct val="125000"/>
+              </a:lnSpc>
+              <a:spcAft>
+                <a:spcPts val="0"/>
+              </a:spcAft>
+            </a:pPr>
+            <a:r>
+              <a:rPr b="0" sz="1430" i="0">
+                <a:solidFill>
+                  <a:srgbClr val="E6ECF7"/>
+                </a:solidFill>
+                <a:latin typeface="Arial"/>
+              </a:rPr>
+              <a:t>Everything here assumes same-team approval is enough. The regulation does not say.</a:t>
+            </a:r>
+          </a:p>
+        </p:txBody>
+      </p:sp>
+      <p:sp>
+        <p:nvSpPr>
+          <p:cNvPr id="12" name="Rounded Rectangle 11"/>
+          <p:cNvSpPr/>
+          <p:nvPr/>
+        </p:nvSpPr>
+        <p:spPr>
+          <a:xfrm>
+            <a:off x="3367963" y="1811803"/>
+            <a:ext cx="2636443" cy="2212022"/>
+          </a:xfrm>
+          <a:prstGeom prst="roundRect">
+            <a:avLst>
+              <a:gd name="adj" fmla="val 4000"/>
+            </a:avLst>
+          </a:prstGeom>
+          <a:solidFill>
+            <a:srgbClr val="151D2E"/>
+          </a:solidFill>
+          <a:ln w="9525">
+            <a:solidFill>
+              <a:srgbClr val="35415A"/>
+            </a:solidFill>
+          </a:ln>
+          <a:effectLst/>
+        </p:spPr>
+        <p:style>
+          <a:lnRef idx="1">
+            <a:schemeClr val="accent1"/>
+          </a:lnRef>
+          <a:fillRef idx="3">
+            <a:schemeClr val="accent1"/>
+          </a:fillRef>
+          <a:effectRef idx="2">
+            <a:schemeClr val="accent1"/>
+          </a:effectRef>
+          <a:fontRef idx="minor">
+            <a:schemeClr val="lt1"/>
+          </a:fontRef>
+        </p:style>
+        <p:txBody>
+          <a:bodyPr rtlCol="0" anchor="ctr"/>
+          <a:lstStyle/>
+          <a:p>
+            <a:pPr algn="ctr"/>
+          </a:p>
+        </p:txBody>
+      </p:sp>
+      <p:sp>
+        <p:nvSpPr>
+          <p:cNvPr id="13" name="Rectangle 12"/>
+          <p:cNvSpPr/>
+          <p:nvPr/>
+        </p:nvSpPr>
+        <p:spPr>
+          <a:xfrm>
+            <a:off x="3367963" y="1921531"/>
+            <a:ext cx="45720" cy="1992566"/>
+          </a:xfrm>
+          <a:prstGeom prst="rect">
+            <a:avLst/>
+          </a:prstGeom>
+          <a:solidFill>
+            <a:srgbClr val="E8A33D"/>
+          </a:solidFill>
+          <a:ln>
+            <a:noFill/>
+          </a:ln>
+          <a:effectLst/>
+        </p:spPr>
+        <p:style>
+          <a:lnRef idx="1">
+            <a:schemeClr val="accent1"/>
+          </a:lnRef>
+          <a:fillRef idx="3">
+            <a:schemeClr val="accent1"/>
+          </a:fillRef>
+          <a:effectRef idx="2">
+            <a:schemeClr val="accent1"/>
+          </a:effectRef>
+          <a:fontRef idx="minor">
+            <a:schemeClr val="lt1"/>
+          </a:fontRef>
+        </p:style>
+        <p:txBody>
+          <a:bodyPr rtlCol="0" anchor="ctr"/>
+          <a:lstStyle/>
+          <a:p>
+            <a:pPr algn="ctr"/>
+          </a:p>
+        </p:txBody>
+      </p:sp>
+      <p:sp>
+        <p:nvSpPr>
+          <p:cNvPr id="14" name="TextBox 13"/>
+          <p:cNvSpPr txBox="1"/>
+          <p:nvPr/>
+        </p:nvSpPr>
+        <p:spPr>
+          <a:xfrm>
+            <a:off x="3569131" y="1939819"/>
+            <a:ext cx="2270683" cy="791908"/>
+          </a:xfrm>
+          <a:prstGeom prst="rect">
+            <a:avLst/>
+          </a:prstGeom>
+          <a:noFill/>
+        </p:spPr>
+        <p:txBody>
+          <a:bodyPr wrap="square" lIns="0" rIns="0" tIns="0" bIns="0" anchor="t">
+            <a:spAutoFit/>
+          </a:bodyPr>
+          <a:lstStyle/>
+          <a:p>
+            <a:pPr algn="l">
+              <a:lnSpc>
+                <a:spcPct val="115000"/>
+              </a:lnSpc>
+              <a:spcAft>
+                <a:spcPts val="0"/>
+              </a:spcAft>
+            </a:pPr>
+            <a:r>
+              <a:rPr b="1" sz="1625" i="0">
+                <a:solidFill>
+                  <a:srgbClr val="E6ECF7"/>
+                </a:solidFill>
+                <a:latin typeface="Arial"/>
+              </a:rPr>
+              <a:t>Does a classifier count as a function?</a:t>
+            </a:r>
+          </a:p>
+        </p:txBody>
+      </p:sp>
+      <p:sp>
+        <p:nvSpPr>
+          <p:cNvPr id="15" name="TextBox 14"/>
+          <p:cNvSpPr txBox="1"/>
+          <p:nvPr/>
+        </p:nvSpPr>
+        <p:spPr>
+          <a:xfrm>
+            <a:off x="3569131" y="2804879"/>
+            <a:ext cx="2270683" cy="1036065"/>
+          </a:xfrm>
+          <a:prstGeom prst="rect">
+            <a:avLst/>
+          </a:prstGeom>
+          <a:noFill/>
+        </p:spPr>
+        <p:txBody>
+          <a:bodyPr wrap="square" lIns="0" rIns="0" tIns="0" bIns="0" anchor="t">
+            <a:spAutoFit/>
+          </a:bodyPr>
+          <a:lstStyle/>
+          <a:p>
+            <a:pPr algn="l">
+              <a:lnSpc>
+                <a:spcPct val="125000"/>
+              </a:lnSpc>
+              <a:spcAft>
+                <a:spcPts val="0"/>
+              </a:spcAft>
+            </a:pPr>
+            <a:r>
+              <a:rPr b="0" sz="1430" i="0">
+                <a:solidFill>
+                  <a:srgbClr val="E6ECF7"/>
+                </a:solidFill>
+                <a:latin typeface="Arial"/>
+              </a:rPr>
+              <a:t>Meta and Zalando auto-approve. Nobody has written down whether DORA allows it.</a:t>
+            </a:r>
+          </a:p>
+        </p:txBody>
+      </p:sp>
+      <p:sp>
+        <p:nvSpPr>
+          <p:cNvPr id="16" name="Rounded Rectangle 15"/>
+          <p:cNvSpPr/>
+          <p:nvPr/>
+        </p:nvSpPr>
+        <p:spPr>
+          <a:xfrm>
+            <a:off x="6187287" y="1811803"/>
+            <a:ext cx="2636443" cy="2212022"/>
+          </a:xfrm>
+          <a:prstGeom prst="roundRect">
+            <a:avLst>
+              <a:gd name="adj" fmla="val 4000"/>
+            </a:avLst>
+          </a:prstGeom>
+          <a:solidFill>
+            <a:srgbClr val="151D2E"/>
+          </a:solidFill>
+          <a:ln w="9525">
+            <a:solidFill>
+              <a:srgbClr val="35415A"/>
+            </a:solidFill>
+          </a:ln>
+          <a:effectLst/>
+        </p:spPr>
+        <p:style>
+          <a:lnRef idx="1">
+            <a:schemeClr val="accent1"/>
+          </a:lnRef>
+          <a:fillRef idx="3">
+            <a:schemeClr val="accent1"/>
+          </a:fillRef>
+          <a:effectRef idx="2">
+            <a:schemeClr val="accent1"/>
+          </a:effectRef>
+          <a:fontRef idx="minor">
+            <a:schemeClr val="lt1"/>
+          </a:fontRef>
+        </p:style>
+        <p:txBody>
+          <a:bodyPr rtlCol="0" anchor="ctr"/>
+          <a:lstStyle/>
+          <a:p>
+            <a:pPr algn="ctr"/>
+          </a:p>
+        </p:txBody>
+      </p:sp>
+      <p:sp>
+        <p:nvSpPr>
+          <p:cNvPr id="17" name="Rectangle 16"/>
+          <p:cNvSpPr/>
+          <p:nvPr/>
+        </p:nvSpPr>
+        <p:spPr>
+          <a:xfrm>
+            <a:off x="6187287" y="1921531"/>
+            <a:ext cx="45720" cy="1992566"/>
+          </a:xfrm>
+          <a:prstGeom prst="rect">
+            <a:avLst/>
+          </a:prstGeom>
+          <a:solidFill>
+            <a:srgbClr val="29D3E0"/>
+          </a:solidFill>
+          <a:ln>
+            <a:noFill/>
+          </a:ln>
+          <a:effectLst/>
+        </p:spPr>
+        <p:style>
+          <a:lnRef idx="1">
+            <a:schemeClr val="accent1"/>
+          </a:lnRef>
+          <a:fillRef idx="3">
+            <a:schemeClr val="accent1"/>
+          </a:fillRef>
+          <a:effectRef idx="2">
+            <a:schemeClr val="accent1"/>
+          </a:effectRef>
+          <a:fontRef idx="minor">
+            <a:schemeClr val="lt1"/>
+          </a:fontRef>
+        </p:style>
+        <p:txBody>
+          <a:bodyPr rtlCol="0" anchor="ctr"/>
+          <a:lstStyle/>
+          <a:p>
+            <a:pPr algn="ctr"/>
+          </a:p>
+        </p:txBody>
+      </p:sp>
+      <p:sp>
+        <p:nvSpPr>
+          <p:cNvPr id="18" name="TextBox 17"/>
+          <p:cNvSpPr txBox="1"/>
+          <p:nvPr/>
+        </p:nvSpPr>
+        <p:spPr>
+          <a:xfrm>
+            <a:off x="6388455" y="1939819"/>
+            <a:ext cx="2270683" cy="791908"/>
+          </a:xfrm>
+          <a:prstGeom prst="rect">
+            <a:avLst/>
+          </a:prstGeom>
+          <a:noFill/>
+        </p:spPr>
+        <p:txBody>
+          <a:bodyPr wrap="square" lIns="0" rIns="0" tIns="0" bIns="0" anchor="t">
+            <a:spAutoFit/>
+          </a:bodyPr>
+          <a:lstStyle/>
+          <a:p>
+            <a:pPr algn="l">
+              <a:lnSpc>
+                <a:spcPct val="115000"/>
+              </a:lnSpc>
+              <a:spcAft>
+                <a:spcPts val="0"/>
+              </a:spcAft>
+            </a:pPr>
+            <a:r>
+              <a:rPr b="1" sz="1625" i="0">
+                <a:solidFill>
+                  <a:srgbClr val="E6ECF7"/>
+                </a:solidFill>
+                <a:latin typeface="Arial"/>
+              </a:rPr>
+              <a:t>What is switched on today?</a:t>
+            </a:r>
+          </a:p>
+        </p:txBody>
+      </p:sp>
+      <p:sp>
+        <p:nvSpPr>
+          <p:cNvPr id="19" name="TextBox 18"/>
+          <p:cNvSpPr txBox="1"/>
+          <p:nvPr/>
+        </p:nvSpPr>
+        <p:spPr>
+          <a:xfrm>
+            <a:off x="6388455" y="2804879"/>
+            <a:ext cx="2270683" cy="1036065"/>
+          </a:xfrm>
+          <a:prstGeom prst="rect">
+            <a:avLst/>
+          </a:prstGeom>
+          <a:noFill/>
+        </p:spPr>
+        <p:txBody>
+          <a:bodyPr wrap="square" lIns="0" rIns="0" tIns="0" bIns="0" anchor="t">
+            <a:spAutoFit/>
+          </a:bodyPr>
+          <a:lstStyle/>
+          <a:p>
+            <a:pPr algn="l">
+              <a:lnSpc>
+                <a:spcPct val="125000"/>
+              </a:lnSpc>
+              <a:spcAft>
+                <a:spcPts val="0"/>
+              </a:spcAft>
+            </a:pPr>
+            <a:r>
+              <a:rPr b="0" sz="1430" i="0">
+                <a:solidFill>
+                  <a:srgbClr val="E6ECF7"/>
+                </a:solidFill>
+                <a:latin typeface="Arial"/>
+              </a:rPr>
+              <a:t>A day of checking I have not done.</a:t>
+            </a:r>
+          </a:p>
+        </p:txBody>
+      </p:sp>
+      <p:sp>
+        <p:nvSpPr>
+          <p:cNvPr id="20" name="Rounded Rectangle 19"/>
+          <p:cNvSpPr/>
+          <p:nvPr/>
+        </p:nvSpPr>
+        <p:spPr>
+          <a:xfrm>
+            <a:off x="9006611" y="1811803"/>
+            <a:ext cx="2636443" cy="2212022"/>
+          </a:xfrm>
+          <a:prstGeom prst="roundRect">
+            <a:avLst>
+              <a:gd name="adj" fmla="val 4000"/>
+            </a:avLst>
+          </a:prstGeom>
+          <a:solidFill>
+            <a:srgbClr val="151D2E"/>
+          </a:solidFill>
+          <a:ln w="9525">
+            <a:solidFill>
+              <a:srgbClr val="35415A"/>
+            </a:solidFill>
+          </a:ln>
+          <a:effectLst/>
+        </p:spPr>
+        <p:style>
+          <a:lnRef idx="1">
+            <a:schemeClr val="accent1"/>
+          </a:lnRef>
+          <a:fillRef idx="3">
+            <a:schemeClr val="accent1"/>
+          </a:fillRef>
+          <a:effectRef idx="2">
+            <a:schemeClr val="accent1"/>
+          </a:effectRef>
+          <a:fontRef idx="minor">
+            <a:schemeClr val="lt1"/>
+          </a:fontRef>
+        </p:style>
+        <p:txBody>
+          <a:bodyPr rtlCol="0" anchor="ctr"/>
+          <a:lstStyle/>
+          <a:p>
+            <a:pPr algn="ctr"/>
+          </a:p>
+        </p:txBody>
+      </p:sp>
+      <p:sp>
+        <p:nvSpPr>
+          <p:cNvPr id="21" name="Rectangle 20"/>
+          <p:cNvSpPr/>
+          <p:nvPr/>
+        </p:nvSpPr>
+        <p:spPr>
+          <a:xfrm>
+            <a:off x="9006611" y="1921531"/>
+            <a:ext cx="45720" cy="1992566"/>
+          </a:xfrm>
+          <a:prstGeom prst="rect">
+            <a:avLst/>
+          </a:prstGeom>
+          <a:solidFill>
+            <a:srgbClr val="E8A33D"/>
+          </a:solidFill>
+          <a:ln>
+            <a:noFill/>
+          </a:ln>
+          <a:effectLst/>
+        </p:spPr>
+        <p:style>
+          <a:lnRef idx="1">
+            <a:schemeClr val="accent1"/>
+          </a:lnRef>
+          <a:fillRef idx="3">
+            <a:schemeClr val="accent1"/>
+          </a:fillRef>
+          <a:effectRef idx="2">
+            <a:schemeClr val="accent1"/>
+          </a:effectRef>
+          <a:fontRef idx="minor">
+            <a:schemeClr val="lt1"/>
+          </a:fontRef>
+        </p:style>
+        <p:txBody>
+          <a:bodyPr rtlCol="0" anchor="ctr"/>
+          <a:lstStyle/>
+          <a:p>
+            <a:pPr algn="ctr"/>
+          </a:p>
+        </p:txBody>
+      </p:sp>
+      <p:sp>
+        <p:nvSpPr>
+          <p:cNvPr id="22" name="TextBox 21"/>
+          <p:cNvSpPr txBox="1"/>
+          <p:nvPr/>
+        </p:nvSpPr>
+        <p:spPr>
+          <a:xfrm>
+            <a:off x="9207779" y="1939819"/>
+            <a:ext cx="2270683" cy="791908"/>
+          </a:xfrm>
+          <a:prstGeom prst="rect">
+            <a:avLst/>
+          </a:prstGeom>
+          <a:noFill/>
+        </p:spPr>
+        <p:txBody>
+          <a:bodyPr wrap="square" lIns="0" rIns="0" tIns="0" bIns="0" anchor="t">
+            <a:spAutoFit/>
+          </a:bodyPr>
+          <a:lstStyle/>
+          <a:p>
+            <a:pPr algn="l">
+              <a:lnSpc>
+                <a:spcPct val="115000"/>
+              </a:lnSpc>
+              <a:spcAft>
+                <a:spcPts val="0"/>
+              </a:spcAft>
+            </a:pPr>
+            <a:r>
+              <a:rPr b="1" sz="1625" i="0">
+                <a:solidFill>
+                  <a:srgbClr val="E6ECF7"/>
+                </a:solidFill>
+                <a:latin typeface="Arial"/>
+              </a:rPr>
+              <a:t>Does the author's check survive a team?</a:t>
+            </a:r>
+          </a:p>
+        </p:txBody>
+      </p:sp>
+      <p:sp>
+        <p:nvSpPr>
+          <p:cNvPr id="23" name="TextBox 22"/>
+          <p:cNvSpPr txBox="1"/>
+          <p:nvPr/>
+        </p:nvSpPr>
+        <p:spPr>
+          <a:xfrm>
+            <a:off x="9207779" y="2804879"/>
+            <a:ext cx="2270683" cy="1036065"/>
+          </a:xfrm>
+          <a:prstGeom prst="rect">
+            <a:avLst/>
+          </a:prstGeom>
+          <a:noFill/>
+        </p:spPr>
+        <p:txBody>
+          <a:bodyPr wrap="square" lIns="0" rIns="0" tIns="0" bIns="0" anchor="t">
+            <a:spAutoFit/>
+          </a:bodyPr>
+          <a:lstStyle/>
+          <a:p>
+            <a:pPr algn="l">
+              <a:lnSpc>
+                <a:spcPct val="125000"/>
+              </a:lnSpc>
+              <a:spcAft>
+                <a:spcPts val="0"/>
+              </a:spcAft>
+            </a:pPr>
+            <a:r>
+              <a:rPr b="0" sz="1430" i="0">
+                <a:solidFill>
+                  <a:srgbClr val="E6ECF7"/>
+                </a:solidFill>
+                <a:latin typeface="Arial"/>
+              </a:rPr>
+              <a:t>Nobody has used it.</a:t>
+            </a:r>
+          </a:p>
+        </p:txBody>
+      </p:sp>
+      <p:sp>
+        <p:nvSpPr>
+          <p:cNvPr id="24" name="Rectangle 23"/>
+          <p:cNvSpPr/>
+          <p:nvPr/>
+        </p:nvSpPr>
+        <p:spPr>
+          <a:xfrm>
+            <a:off x="548640" y="4508457"/>
+            <a:ext cx="5455767" cy="911352"/>
+          </a:xfrm>
+          <a:prstGeom prst="rect">
+            <a:avLst/>
+          </a:prstGeom>
+          <a:solidFill>
+            <a:srgbClr val="151D2E"/>
+          </a:solidFill>
+          <a:ln w="9525">
+            <a:solidFill>
+              <a:srgbClr val="35415A"/>
+            </a:solidFill>
+          </a:ln>
+          <a:effectLst/>
+        </p:spPr>
+        <p:style>
+          <a:lnRef idx="1">
+            <a:schemeClr val="accent1"/>
+          </a:lnRef>
+          <a:fillRef idx="3">
+            <a:schemeClr val="accent1"/>
+          </a:fillRef>
+          <a:effectRef idx="2">
+            <a:schemeClr val="accent1"/>
+          </a:effectRef>
+          <a:fontRef idx="minor">
+            <a:schemeClr val="lt1"/>
+          </a:fontRef>
+        </p:style>
+        <p:txBody>
+          <a:bodyPr rtlCol="0" anchor="ctr"/>
+          <a:lstStyle/>
+          <a:p>
+            <a:pPr algn="ctr"/>
+          </a:p>
+        </p:txBody>
+      </p:sp>
+      <p:sp>
+        <p:nvSpPr>
+          <p:cNvPr id="25" name="Rectangle 24"/>
+          <p:cNvSpPr/>
+          <p:nvPr/>
+        </p:nvSpPr>
+        <p:spPr>
+          <a:xfrm>
+            <a:off x="548640" y="4508457"/>
+            <a:ext cx="45720" cy="911352"/>
+          </a:xfrm>
+          <a:prstGeom prst="rect">
+            <a:avLst/>
+          </a:prstGeom>
+          <a:solidFill>
+            <a:srgbClr val="E8A33D"/>
+          </a:solidFill>
+          <a:ln>
+            <a:noFill/>
+          </a:ln>
+          <a:effectLst/>
+        </p:spPr>
+        <p:style>
+          <a:lnRef idx="1">
+            <a:schemeClr val="accent1"/>
+          </a:lnRef>
+          <a:fillRef idx="3">
+            <a:schemeClr val="accent1"/>
+          </a:fillRef>
+          <a:effectRef idx="2">
+            <a:schemeClr val="accent1"/>
+          </a:effectRef>
+          <a:fontRef idx="minor">
+            <a:schemeClr val="lt1"/>
+          </a:fontRef>
+        </p:style>
+        <p:txBody>
+          <a:bodyPr rtlCol="0" anchor="ctr"/>
+          <a:lstStyle/>
+          <a:p>
+            <a:pPr algn="ctr"/>
+          </a:p>
+        </p:txBody>
+      </p:sp>
+      <p:sp>
+        <p:nvSpPr>
+          <p:cNvPr id="26" name="TextBox 25"/>
+          <p:cNvSpPr txBox="1"/>
+          <p:nvPr/>
+        </p:nvSpPr>
+        <p:spPr>
+          <a:xfrm>
+            <a:off x="749808" y="4618185"/>
+            <a:ext cx="5090007" cy="228600"/>
+          </a:xfrm>
+          <a:prstGeom prst="rect">
+            <a:avLst/>
+          </a:prstGeom>
+          <a:noFill/>
+        </p:spPr>
+        <p:txBody>
+          <a:bodyPr wrap="square" lIns="0" rIns="0" tIns="0" bIns="0" anchor="t">
+            <a:spAutoFit/>
+          </a:bodyPr>
+          <a:lstStyle/>
+          <a:p>
+            <a:pPr algn="l">
+              <a:lnSpc>
+                <a:spcPct val="115000"/>
+              </a:lnSpc>
+              <a:spcAft>
+                <a:spcPts val="0"/>
+              </a:spcAft>
+            </a:pPr>
+            <a:r>
+              <a:rPr b="1" sz="1495" i="0">
+                <a:solidFill>
+                  <a:srgbClr val="E6ECF7"/>
+                </a:solidFill>
+                <a:latin typeface="Arial"/>
+              </a:rPr>
+              <a:t>What would help me most</a:t>
+            </a:r>
+          </a:p>
+        </p:txBody>
+      </p:sp>
+      <p:sp>
+        <p:nvSpPr>
+          <p:cNvPr id="27" name="TextBox 26"/>
+          <p:cNvSpPr txBox="1"/>
+          <p:nvPr/>
+        </p:nvSpPr>
+        <p:spPr>
+          <a:xfrm>
+            <a:off x="749808" y="4855929"/>
+            <a:ext cx="5090007" cy="435864"/>
+          </a:xfrm>
+          <a:prstGeom prst="rect">
+            <a:avLst/>
+          </a:prstGeom>
+          <a:noFill/>
+        </p:spPr>
+        <p:txBody>
+          <a:bodyPr wrap="square" lIns="0" rIns="0" tIns="0" bIns="0" anchor="t">
+            <a:spAutoFit/>
+          </a:bodyPr>
+          <a:lstStyle/>
+          <a:p>
+            <a:pPr algn="l">
+              <a:lnSpc>
+                <a:spcPct val="120000"/>
+              </a:lnSpc>
+              <a:spcAft>
+                <a:spcPts val="0"/>
+              </a:spcAft>
+            </a:pPr>
+            <a:r>
+              <a:rPr b="0" sz="1430" i="0">
+                <a:solidFill>
+                  <a:srgbClr val="E6ECF7"/>
+                </a:solidFill>
+                <a:latin typeface="Arial"/>
+              </a:rPr>
+              <a:t>A review decision you made and had to undo. What did it cost?</a:t>
+            </a:r>
+          </a:p>
+        </p:txBody>
+      </p:sp>
+      <p:sp>
+        <p:nvSpPr>
+          <p:cNvPr id="28" name="Rectangle 27"/>
+          <p:cNvSpPr/>
+          <p:nvPr/>
+        </p:nvSpPr>
+        <p:spPr>
+          <a:xfrm>
+            <a:off x="6187287" y="4508457"/>
+            <a:ext cx="5455767" cy="911352"/>
+          </a:xfrm>
+          <a:prstGeom prst="rect">
+            <a:avLst/>
+          </a:prstGeom>
+          <a:solidFill>
+            <a:srgbClr val="151D2E"/>
+          </a:solidFill>
+          <a:ln w="9525">
+            <a:solidFill>
+              <a:srgbClr val="35415A"/>
+            </a:solidFill>
+          </a:ln>
+          <a:effectLst/>
+        </p:spPr>
+        <p:style>
+          <a:lnRef idx="1">
+            <a:schemeClr val="accent1"/>
+          </a:lnRef>
+          <a:fillRef idx="3">
+            <a:schemeClr val="accent1"/>
+          </a:fillRef>
+          <a:effectRef idx="2">
+            <a:schemeClr val="accent1"/>
+          </a:effectRef>
+          <a:fontRef idx="minor">
+            <a:schemeClr val="lt1"/>
+          </a:fontRef>
+        </p:style>
+        <p:txBody>
+          <a:bodyPr rtlCol="0" anchor="ctr"/>
+          <a:lstStyle/>
+          <a:p>
+            <a:pPr algn="ctr"/>
+          </a:p>
+        </p:txBody>
+      </p:sp>
+      <p:sp>
+        <p:nvSpPr>
+          <p:cNvPr id="29" name="Rectangle 28"/>
+          <p:cNvSpPr/>
+          <p:nvPr/>
+        </p:nvSpPr>
+        <p:spPr>
+          <a:xfrm>
+            <a:off x="6187287" y="4508457"/>
+            <a:ext cx="45720" cy="911352"/>
+          </a:xfrm>
+          <a:prstGeom prst="rect">
+            <a:avLst/>
+          </a:prstGeom>
+          <a:solidFill>
+            <a:srgbClr val="29D3E0"/>
+          </a:solidFill>
+          <a:ln>
+            <a:noFill/>
+          </a:ln>
+          <a:effectLst/>
+        </p:spPr>
+        <p:style>
+          <a:lnRef idx="1">
+            <a:schemeClr val="accent1"/>
+          </a:lnRef>
+          <a:fillRef idx="3">
+            <a:schemeClr val="accent1"/>
+          </a:fillRef>
+          <a:effectRef idx="2">
+            <a:schemeClr val="accent1"/>
+          </a:effectRef>
+          <a:fontRef idx="minor">
+            <a:schemeClr val="lt1"/>
+          </a:fontRef>
+        </p:style>
+        <p:txBody>
+          <a:bodyPr rtlCol="0" anchor="ctr"/>
+          <a:lstStyle/>
+          <a:p>
+            <a:pPr algn="ctr"/>
+          </a:p>
+        </p:txBody>
+      </p:sp>
+      <p:sp>
+        <p:nvSpPr>
+          <p:cNvPr id="30" name="TextBox 29"/>
+          <p:cNvSpPr txBox="1"/>
+          <p:nvPr/>
+        </p:nvSpPr>
+        <p:spPr>
+          <a:xfrm>
+            <a:off x="6388455" y="4618185"/>
+            <a:ext cx="5090007" cy="228600"/>
+          </a:xfrm>
+          <a:prstGeom prst="rect">
+            <a:avLst/>
+          </a:prstGeom>
+          <a:noFill/>
+        </p:spPr>
+        <p:txBody>
+          <a:bodyPr wrap="square" lIns="0" rIns="0" tIns="0" bIns="0" anchor="t">
+            <a:spAutoFit/>
+          </a:bodyPr>
+          <a:lstStyle/>
+          <a:p>
+            <a:pPr algn="l">
+              <a:lnSpc>
+                <a:spcPct val="115000"/>
+              </a:lnSpc>
+              <a:spcAft>
+                <a:spcPts val="0"/>
+              </a:spcAft>
+            </a:pPr>
+            <a:r>
+              <a:rPr b="1" sz="1495" i="0">
+                <a:solidFill>
+                  <a:srgbClr val="E6ECF7"/>
+                </a:solidFill>
+                <a:latin typeface="Arial"/>
+              </a:rPr>
+              <a:t>What would change my mind</a:t>
+            </a:r>
+          </a:p>
+        </p:txBody>
+      </p:sp>
+      <p:sp>
+        <p:nvSpPr>
+          <p:cNvPr id="31" name="TextBox 30"/>
+          <p:cNvSpPr txBox="1"/>
+          <p:nvPr/>
+        </p:nvSpPr>
+        <p:spPr>
+          <a:xfrm>
+            <a:off x="6388455" y="4855929"/>
+            <a:ext cx="5090007" cy="435864"/>
+          </a:xfrm>
+          <a:prstGeom prst="rect">
+            <a:avLst/>
+          </a:prstGeom>
+          <a:noFill/>
+        </p:spPr>
+        <p:txBody>
+          <a:bodyPr wrap="square" lIns="0" rIns="0" tIns="0" bIns="0" anchor="t">
+            <a:spAutoFit/>
+          </a:bodyPr>
+          <a:lstStyle/>
+          <a:p>
+            <a:pPr algn="l">
+              <a:lnSpc>
+                <a:spcPct val="120000"/>
+              </a:lnSpc>
+              <a:spcAft>
+                <a:spcPts val="0"/>
+              </a:spcAft>
+            </a:pPr>
+            <a:r>
+              <a:rPr b="0" sz="1430" i="0">
+                <a:solidFill>
+                  <a:srgbClr val="E6ECF7"/>
+                </a:solidFill>
+                <a:latin typeface="Arial"/>
+              </a:rPr>
+              <a:t>A regulated company whose auditor accepted a machine's approval.</a:t>
+            </a:r>
+          </a:p>
+        </p:txBody>
+      </p:sp>
+    </p:spTree>
+  </p:cSld>
+  <p:clrMapOvr>
+    <a:masterClrMapping/>
+  </p:clrMapOvr>
+</p:sld>
+</file>
+
+<file path=ppt/slides/slide31.xml><?xml version="1.0" encoding="utf-8"?>
+<p:sld xmlns:a="http://schemas.openxmlformats.org/drawingml/2006/main" xmlns:p="http://schemas.openxmlformats.org/presentationml/2006/main" xmlns:r="http://schemas.openxmlformats.org/officeDocument/2006/relationships">
+  <p:cSld>
+    <p:spTree>
+      <p:nvGrpSpPr>
+        <p:cNvPr id="1" name=""/>
+        <p:cNvGrpSpPr/>
+        <p:nvPr/>
+      </p:nvGrpSpPr>
+      <p:grpSpPr/>
+      <p:sp>
+        <p:nvSpPr>
+          <p:cNvPr id="2" name="Rectangle 1"/>
+          <p:cNvSpPr/>
+          <p:nvPr/>
+        </p:nvSpPr>
+        <p:spPr>
+          <a:xfrm>
+            <a:off x="0" y="0"/>
+            <a:ext cx="12191695" cy="6858000"/>
+          </a:xfrm>
+          <a:prstGeom prst="rect">
+            <a:avLst/>
+          </a:prstGeom>
+          <a:solidFill>
+            <a:srgbClr val="0E1420"/>
+          </a:solidFill>
+          <a:ln>
+            <a:noFill/>
+          </a:ln>
+          <a:effectLst/>
+        </p:spPr>
+        <p:style>
+          <a:lnRef idx="1">
+            <a:schemeClr val="accent1"/>
+          </a:lnRef>
+          <a:fillRef idx="3">
+            <a:schemeClr val="accent1"/>
+          </a:fillRef>
+          <a:effectRef idx="2">
+            <a:schemeClr val="accent1"/>
+          </a:effectRef>
+          <a:fontRef idx="minor">
+            <a:schemeClr val="lt1"/>
+          </a:fontRef>
+        </p:style>
+        <p:txBody>
+          <a:bodyPr rtlCol="0" anchor="ctr"/>
+          <a:lstStyle/>
+          <a:p>
+            <a:pPr algn="ctr"/>
+          </a:p>
+        </p:txBody>
+      </p:sp>
+      <p:sp>
+        <p:nvSpPr>
+          <p:cNvPr id="3" name="TextBox 2"/>
+          <p:cNvSpPr txBox="1"/>
+          <p:nvPr/>
+        </p:nvSpPr>
+        <p:spPr>
+          <a:xfrm>
+            <a:off x="548640" y="292608"/>
+            <a:ext cx="11094415" cy="228600"/>
+          </a:xfrm>
+          <a:prstGeom prst="rect">
+            <a:avLst/>
+          </a:prstGeom>
+          <a:noFill/>
+        </p:spPr>
+        <p:txBody>
+          <a:bodyPr wrap="square" lIns="0" rIns="0" tIns="0" bIns="0" anchor="t">
+            <a:spAutoFit/>
+          </a:bodyPr>
+          <a:lstStyle/>
+          <a:p>
+            <a:pPr algn="l">
+              <a:lnSpc>
+                <a:spcPct val="115000"/>
+              </a:lnSpc>
+              <a:spcAft>
+                <a:spcPts val="0"/>
+              </a:spcAft>
+            </a:pPr>
+            <a:r>
+              <a:rPr b="1" sz="950" i="0">
+                <a:solidFill>
+                  <a:srgbClr val="E8A33D"/>
+                </a:solidFill>
+                <a:latin typeface="Arial"/>
+              </a:rPr>
+              <a:t>SLIDE 31 · APPENDIX A1</a:t>
+            </a:r>
+          </a:p>
+        </p:txBody>
+      </p:sp>
+      <p:sp>
+        <p:nvSpPr>
+          <p:cNvPr id="4" name="TextBox 3"/>
+          <p:cNvSpPr txBox="1"/>
+          <p:nvPr/>
+        </p:nvSpPr>
+        <p:spPr>
+          <a:xfrm>
+            <a:off x="548640" y="530352"/>
+            <a:ext cx="11094415" cy="548640"/>
+          </a:xfrm>
+          <a:prstGeom prst="rect">
+            <a:avLst/>
+          </a:prstGeom>
+          <a:noFill/>
+        </p:spPr>
+        <p:txBody>
+          <a:bodyPr wrap="square" lIns="0" rIns="0" tIns="0" bIns="0" anchor="t">
+            <a:spAutoFit/>
+          </a:bodyPr>
+          <a:lstStyle/>
+          <a:p>
+            <a:pPr algn="l">
+              <a:lnSpc>
+                <a:spcPct val="115000"/>
+              </a:lnSpc>
+              <a:spcAft>
+                <a:spcPts val="0"/>
+              </a:spcAft>
+            </a:pPr>
+            <a:r>
+              <a:rPr b="1" sz="2800" i="0">
+                <a:solidFill>
+                  <a:srgbClr val="E6ECF7"/>
+                </a:solidFill>
+                <a:latin typeface="Georgia"/>
+              </a:rPr>
+              <a:t>A1 — Who did what about the queue</a:t>
+            </a:r>
+          </a:p>
+        </p:txBody>
+      </p:sp>
+      <p:sp>
+        <p:nvSpPr>
+          <p:cNvPr id="5" name="Rectangle 4"/>
+          <p:cNvSpPr/>
+          <p:nvPr/>
+        </p:nvSpPr>
+        <p:spPr>
+          <a:xfrm>
+            <a:off x="548640" y="1115568"/>
+            <a:ext cx="1097280" cy="41148"/>
+          </a:xfrm>
+          <a:prstGeom prst="rect">
+            <a:avLst/>
+          </a:prstGeom>
+          <a:solidFill>
+            <a:srgbClr val="29D3E0"/>
+          </a:solidFill>
+          <a:ln>
+            <a:noFill/>
+          </a:ln>
+          <a:effectLst/>
+        </p:spPr>
+        <p:style>
+          <a:lnRef idx="1">
+            <a:schemeClr val="accent1"/>
+          </a:lnRef>
+          <a:fillRef idx="3">
+            <a:schemeClr val="accent1"/>
+          </a:fillRef>
+          <a:effectRef idx="2">
+            <a:schemeClr val="accent1"/>
+          </a:effectRef>
+          <a:fontRef idx="minor">
+            <a:schemeClr val="lt1"/>
+          </a:fontRef>
+        </p:style>
+        <p:txBody>
+          <a:bodyPr rtlCol="0" anchor="ctr"/>
+          <a:lstStyle/>
+          <a:p>
+            <a:pPr algn="ctr"/>
+          </a:p>
+        </p:txBody>
+      </p:sp>
+      <p:sp>
+        <p:nvSpPr>
+          <p:cNvPr id="6" name="TextBox 5"/>
+          <p:cNvSpPr txBox="1"/>
+          <p:nvPr/>
+        </p:nvSpPr>
+        <p:spPr>
+          <a:xfrm>
+            <a:off x="548640" y="6473952"/>
+            <a:ext cx="3657600" cy="228600"/>
+          </a:xfrm>
+          <a:prstGeom prst="rect">
+            <a:avLst/>
+          </a:prstGeom>
+          <a:noFill/>
+        </p:spPr>
+        <p:txBody>
+          <a:bodyPr wrap="square" lIns="0" rIns="0" tIns="0" bIns="0" anchor="t">
+            <a:spAutoFit/>
+          </a:bodyPr>
+          <a:lstStyle/>
+          <a:p>
+            <a:pPr algn="l">
+              <a:lnSpc>
+                <a:spcPct val="115000"/>
+              </a:lnSpc>
+              <a:spcAft>
+                <a:spcPts val="0"/>
+              </a:spcAft>
+            </a:pPr>
+            <a:r>
+              <a:rPr b="1" sz="950" i="0">
+                <a:solidFill>
+                  <a:srgbClr val="E6ECF7"/>
+                </a:solidFill>
+                <a:latin typeface="Arial"/>
+              </a:rPr>
+              <a:t>Build to Understand</a:t>
+            </a:r>
+          </a:p>
+        </p:txBody>
+      </p:sp>
+      <p:sp>
+        <p:nvSpPr>
+          <p:cNvPr id="7" name="TextBox 6"/>
+          <p:cNvSpPr txBox="1"/>
+          <p:nvPr/>
+        </p:nvSpPr>
+        <p:spPr>
+          <a:xfrm>
+            <a:off x="10728655" y="6473952"/>
+            <a:ext cx="914400" cy="228600"/>
+          </a:xfrm>
+          <a:prstGeom prst="rect">
+            <a:avLst/>
+          </a:prstGeom>
+          <a:noFill/>
+        </p:spPr>
+        <p:txBody>
+          <a:bodyPr wrap="square" lIns="0" rIns="0" tIns="0" bIns="0" anchor="t">
+            <a:spAutoFit/>
+          </a:bodyPr>
+          <a:lstStyle/>
+          <a:p>
+            <a:pPr algn="r">
+              <a:lnSpc>
+                <a:spcPct val="115000"/>
+              </a:lnSpc>
+              <a:spcAft>
+                <a:spcPts val="0"/>
+              </a:spcAft>
+            </a:pPr>
+            <a:r>
+              <a:rPr b="0" sz="950" i="0">
+                <a:solidFill>
+                  <a:srgbClr val="98A4BC"/>
+                </a:solidFill>
+                <a:latin typeface="Arial"/>
+              </a:rPr>
+              <a:t>31</a:t>
             </a:r>
           </a:p>
         </p:txBody>
@@ -25859,572 +26636,6 @@
 </p:sld>
 </file>
 
-<file path=ppt/slides/slide31.xml><?xml version="1.0" encoding="utf-8"?>
-<p:sld xmlns:a="http://schemas.openxmlformats.org/drawingml/2006/main" xmlns:p="http://schemas.openxmlformats.org/presentationml/2006/main" xmlns:r="http://schemas.openxmlformats.org/officeDocument/2006/relationships">
-  <p:cSld>
-    <p:spTree>
-      <p:nvGrpSpPr>
-        <p:cNvPr id="1" name=""/>
-        <p:cNvGrpSpPr/>
-        <p:nvPr/>
-      </p:nvGrpSpPr>
-      <p:grpSpPr/>
-      <p:sp>
-        <p:nvSpPr>
-          <p:cNvPr id="2" name="Rectangle 1"/>
-          <p:cNvSpPr/>
-          <p:nvPr/>
-        </p:nvSpPr>
-        <p:spPr>
-          <a:xfrm>
-            <a:off x="0" y="0"/>
-            <a:ext cx="12191695" cy="6858000"/>
-          </a:xfrm>
-          <a:prstGeom prst="rect">
-            <a:avLst/>
-          </a:prstGeom>
-          <a:solidFill>
-            <a:srgbClr val="0E1420"/>
-          </a:solidFill>
-          <a:ln>
-            <a:noFill/>
-          </a:ln>
-          <a:effectLst/>
-        </p:spPr>
-        <p:style>
-          <a:lnRef idx="1">
-            <a:schemeClr val="accent1"/>
-          </a:lnRef>
-          <a:fillRef idx="3">
-            <a:schemeClr val="accent1"/>
-          </a:fillRef>
-          <a:effectRef idx="2">
-            <a:schemeClr val="accent1"/>
-          </a:effectRef>
-          <a:fontRef idx="minor">
-            <a:schemeClr val="lt1"/>
-          </a:fontRef>
-        </p:style>
-        <p:txBody>
-          <a:bodyPr rtlCol="0" anchor="ctr"/>
-          <a:lstStyle/>
-          <a:p>
-            <a:pPr algn="ctr"/>
-          </a:p>
-        </p:txBody>
-      </p:sp>
-      <p:sp>
-        <p:nvSpPr>
-          <p:cNvPr id="3" name="TextBox 2"/>
-          <p:cNvSpPr txBox="1"/>
-          <p:nvPr/>
-        </p:nvSpPr>
-        <p:spPr>
-          <a:xfrm>
-            <a:off x="548640" y="292608"/>
-            <a:ext cx="11094415" cy="228600"/>
-          </a:xfrm>
-          <a:prstGeom prst="rect">
-            <a:avLst/>
-          </a:prstGeom>
-          <a:noFill/>
-        </p:spPr>
-        <p:txBody>
-          <a:bodyPr wrap="square" lIns="0" rIns="0" tIns="0" bIns="0" anchor="t">
-            <a:spAutoFit/>
-          </a:bodyPr>
-          <a:lstStyle/>
-          <a:p>
-            <a:pPr algn="l">
-              <a:lnSpc>
-                <a:spcPct val="115000"/>
-              </a:lnSpc>
-              <a:spcAft>
-                <a:spcPts val="0"/>
-              </a:spcAft>
-            </a:pPr>
-            <a:r>
-              <a:rPr b="1" sz="950" i="0">
-                <a:solidFill>
-                  <a:srgbClr val="E8A33D"/>
-                </a:solidFill>
-                <a:latin typeface="Arial"/>
-              </a:rPr>
-              <a:t>SLIDE 31 · APPENDIX A2</a:t>
-            </a:r>
-          </a:p>
-        </p:txBody>
-      </p:sp>
-      <p:sp>
-        <p:nvSpPr>
-          <p:cNvPr id="4" name="TextBox 3"/>
-          <p:cNvSpPr txBox="1"/>
-          <p:nvPr/>
-        </p:nvSpPr>
-        <p:spPr>
-          <a:xfrm>
-            <a:off x="548640" y="530352"/>
-            <a:ext cx="11094415" cy="548640"/>
-          </a:xfrm>
-          <a:prstGeom prst="rect">
-            <a:avLst/>
-          </a:prstGeom>
-          <a:noFill/>
-        </p:spPr>
-        <p:txBody>
-          <a:bodyPr wrap="square" lIns="0" rIns="0" tIns="0" bIns="0" anchor="t">
-            <a:spAutoFit/>
-          </a:bodyPr>
-          <a:lstStyle/>
-          <a:p>
-            <a:pPr algn="l">
-              <a:lnSpc>
-                <a:spcPct val="115000"/>
-              </a:lnSpc>
-              <a:spcAft>
-                <a:spcPts val="0"/>
-              </a:spcAft>
-            </a:pPr>
-            <a:r>
-              <a:rPr b="1" sz="2800" i="0">
-                <a:solidFill>
-                  <a:srgbClr val="E6ECF7"/>
-                </a:solidFill>
-                <a:latin typeface="Georgia"/>
-              </a:rPr>
-              <a:t>A2 — The regulatory detail</a:t>
-            </a:r>
-          </a:p>
-        </p:txBody>
-      </p:sp>
-      <p:sp>
-        <p:nvSpPr>
-          <p:cNvPr id="5" name="Rectangle 4"/>
-          <p:cNvSpPr/>
-          <p:nvPr/>
-        </p:nvSpPr>
-        <p:spPr>
-          <a:xfrm>
-            <a:off x="548640" y="1115568"/>
-            <a:ext cx="1097280" cy="41148"/>
-          </a:xfrm>
-          <a:prstGeom prst="rect">
-            <a:avLst/>
-          </a:prstGeom>
-          <a:solidFill>
-            <a:srgbClr val="29D3E0"/>
-          </a:solidFill>
-          <a:ln>
-            <a:noFill/>
-          </a:ln>
-          <a:effectLst/>
-        </p:spPr>
-        <p:style>
-          <a:lnRef idx="1">
-            <a:schemeClr val="accent1"/>
-          </a:lnRef>
-          <a:fillRef idx="3">
-            <a:schemeClr val="accent1"/>
-          </a:fillRef>
-          <a:effectRef idx="2">
-            <a:schemeClr val="accent1"/>
-          </a:effectRef>
-          <a:fontRef idx="minor">
-            <a:schemeClr val="lt1"/>
-          </a:fontRef>
-        </p:style>
-        <p:txBody>
-          <a:bodyPr rtlCol="0" anchor="ctr"/>
-          <a:lstStyle/>
-          <a:p>
-            <a:pPr algn="ctr"/>
-          </a:p>
-        </p:txBody>
-      </p:sp>
-      <p:sp>
-        <p:nvSpPr>
-          <p:cNvPr id="6" name="TextBox 5"/>
-          <p:cNvSpPr txBox="1"/>
-          <p:nvPr/>
-        </p:nvSpPr>
-        <p:spPr>
-          <a:xfrm>
-            <a:off x="548640" y="6473952"/>
-            <a:ext cx="3657600" cy="228600"/>
-          </a:xfrm>
-          <a:prstGeom prst="rect">
-            <a:avLst/>
-          </a:prstGeom>
-          <a:noFill/>
-        </p:spPr>
-        <p:txBody>
-          <a:bodyPr wrap="square" lIns="0" rIns="0" tIns="0" bIns="0" anchor="t">
-            <a:spAutoFit/>
-          </a:bodyPr>
-          <a:lstStyle/>
-          <a:p>
-            <a:pPr algn="l">
-              <a:lnSpc>
-                <a:spcPct val="115000"/>
-              </a:lnSpc>
-              <a:spcAft>
-                <a:spcPts val="0"/>
-              </a:spcAft>
-            </a:pPr>
-            <a:r>
-              <a:rPr b="1" sz="950" i="0">
-                <a:solidFill>
-                  <a:srgbClr val="E6ECF7"/>
-                </a:solidFill>
-                <a:latin typeface="Arial"/>
-              </a:rPr>
-              <a:t>Build to Understand</a:t>
-            </a:r>
-          </a:p>
-        </p:txBody>
-      </p:sp>
-      <p:sp>
-        <p:nvSpPr>
-          <p:cNvPr id="7" name="TextBox 6"/>
-          <p:cNvSpPr txBox="1"/>
-          <p:nvPr/>
-        </p:nvSpPr>
-        <p:spPr>
-          <a:xfrm>
-            <a:off x="10728655" y="6473952"/>
-            <a:ext cx="914400" cy="228600"/>
-          </a:xfrm>
-          <a:prstGeom prst="rect">
-            <a:avLst/>
-          </a:prstGeom>
-          <a:noFill/>
-        </p:spPr>
-        <p:txBody>
-          <a:bodyPr wrap="square" lIns="0" rIns="0" tIns="0" bIns="0" anchor="t">
-            <a:spAutoFit/>
-          </a:bodyPr>
-          <a:lstStyle/>
-          <a:p>
-            <a:pPr algn="r">
-              <a:lnSpc>
-                <a:spcPct val="115000"/>
-              </a:lnSpc>
-              <a:spcAft>
-                <a:spcPts val="0"/>
-              </a:spcAft>
-            </a:pPr>
-            <a:r>
-              <a:rPr b="0" sz="950" i="0">
-                <a:solidFill>
-                  <a:srgbClr val="98A4BC"/>
-                </a:solidFill>
-                <a:latin typeface="Arial"/>
-              </a:rPr>
-              <a:t>31</a:t>
-            </a:r>
-          </a:p>
-        </p:txBody>
-      </p:sp>
-      <p:sp>
-        <p:nvSpPr>
-          <p:cNvPr id="8" name="TextBox 7"/>
-          <p:cNvSpPr txBox="1"/>
-          <p:nvPr/>
-        </p:nvSpPr>
-        <p:spPr>
-          <a:xfrm>
-            <a:off x="548640" y="1371600"/>
-            <a:ext cx="11094415" cy="162687"/>
-          </a:xfrm>
-          <a:prstGeom prst="rect">
-            <a:avLst/>
-          </a:prstGeom>
-          <a:noFill/>
-        </p:spPr>
-        <p:txBody>
-          <a:bodyPr wrap="square" lIns="0" rIns="0" tIns="0" bIns="0" anchor="t">
-            <a:spAutoFit/>
-          </a:bodyPr>
-          <a:lstStyle/>
-          <a:p>
-            <a:pPr algn="l">
-              <a:lnSpc>
-                <a:spcPct val="115000"/>
-              </a:lnSpc>
-              <a:spcAft>
-                <a:spcPts val="0"/>
-              </a:spcAft>
-            </a:pPr>
-            <a:r>
-              <a:rPr b="0" sz="1050" i="1">
-                <a:solidFill>
-                  <a:srgbClr val="98A4BC"/>
-                </a:solidFill>
-                <a:latin typeface="Arial"/>
-              </a:rPr>
-              <a:t>Use when someone wants the rule read out rather than summarised.</a:t>
-            </a:r>
-          </a:p>
-        </p:txBody>
-      </p:sp>
-      <p:sp>
-        <p:nvSpPr>
-          <p:cNvPr id="9" name="TextBox 8"/>
-          <p:cNvSpPr txBox="1"/>
-          <p:nvPr/>
-        </p:nvSpPr>
-        <p:spPr>
-          <a:xfrm>
-            <a:off x="548640" y="2037207"/>
-            <a:ext cx="11094415" cy="2627312"/>
-          </a:xfrm>
-          <a:prstGeom prst="rect">
-            <a:avLst/>
-          </a:prstGeom>
-          <a:noFill/>
-        </p:spPr>
-        <p:txBody>
-          <a:bodyPr wrap="square" lIns="0" rIns="0" tIns="0" bIns="0">
-            <a:spAutoFit/>
-          </a:bodyPr>
-          <a:lstStyle/>
-          <a:p>
-            <a:pPr>
-              <a:lnSpc>
-                <a:spcPct val="115000"/>
-              </a:lnSpc>
-              <a:spcAft>
-                <a:spcPts val="400"/>
-              </a:spcAft>
-            </a:pPr>
-            <a:r>
-              <a:rPr sz="1250" b="1">
-                <a:solidFill>
-                  <a:srgbClr val="E8A33D"/>
-                </a:solidFill>
-                <a:latin typeface="Arial"/>
-              </a:rPr>
-              <a:t>—  </a:t>
-            </a:r>
-            <a:r>
-              <a:rPr b="1" sz="1250" i="0">
-                <a:solidFill>
-                  <a:srgbClr val="E6ECF7"/>
-                </a:solidFill>
-                <a:latin typeface="Arial"/>
-              </a:rPr>
-              <a:t>Two persons direct the business.</a:t>
-            </a:r>
-            <a:r>
-              <a:rPr b="0" sz="1250" i="0">
-                <a:solidFill>
-                  <a:srgbClr val="E6ECF7"/>
-                </a:solidFill>
-                <a:latin typeface="Arial"/>
-              </a:rPr>
-              <a:t> European banking law (CRD art. 13) grants a licence only where "at least two persons effectively direct the business". That is the origin of Vier-Augen-Prinzip and the English phrase four eyes. They approve no individual change.</a:t>
-            </a:r>
-          </a:p>
-          <a:p>
-            <a:pPr>
-              <a:lnSpc>
-                <a:spcPct val="115000"/>
-              </a:lnSpc>
-              <a:spcAft>
-                <a:spcPts val="400"/>
-              </a:spcAft>
-            </a:pPr>
-            <a:r>
-              <a:rPr sz="1250" b="1">
-                <a:solidFill>
-                  <a:srgbClr val="E8A33D"/>
-                </a:solidFill>
-                <a:latin typeface="Arial"/>
-              </a:rPr>
-              <a:t>—  </a:t>
-            </a:r>
-            <a:r>
-              <a:rPr b="1" sz="1250" i="0">
-                <a:solidFill>
-                  <a:srgbClr val="E6ECF7"/>
-                </a:solidFill>
-                <a:latin typeface="Arial"/>
-              </a:rPr>
-              <a:t>Dual control on a sensitive action.</a:t>
-            </a:r>
-            <a:r>
-              <a:rPr b="0" sz="1250" i="0">
-                <a:solidFill>
-                  <a:srgbClr val="E6ECF7"/>
-                </a:solidFill>
-                <a:latin typeface="Arial"/>
-              </a:rPr>
-              <a:t> Basel defines it as two or more separate "entities (usually persons)" acting in concert. The Norwegian supervisor fined a savings bank in 2023 partly because no four-eyes check existed when an employee manually lowered a customer's money-laundering risk level.</a:t>
-            </a:r>
-          </a:p>
-          <a:p>
-            <a:pPr>
-              <a:lnSpc>
-                <a:spcPct val="115000"/>
-              </a:lnSpc>
-              <a:spcAft>
-                <a:spcPts val="400"/>
-              </a:spcAft>
-            </a:pPr>
-            <a:r>
-              <a:rPr sz="1250" b="1">
-                <a:solidFill>
-                  <a:srgbClr val="E8A33D"/>
-                </a:solidFill>
-                <a:latin typeface="Arial"/>
-              </a:rPr>
-              <a:t>—  </a:t>
-            </a:r>
-            <a:r>
-              <a:rPr b="1" sz="1250" i="0">
-                <a:solidFill>
-                  <a:srgbClr val="E6ECF7"/>
-                </a:solidFill>
-                <a:latin typeface="Arial"/>
-              </a:rPr>
-              <a:t>Change management before July 2025.</a:t>
-            </a:r>
-            <a:r>
-              <a:rPr b="0" sz="1250" i="0">
-                <a:solidFill>
-                  <a:srgbClr val="E6ECF7"/>
-                </a:solidFill>
-                <a:latin typeface="Arial"/>
-              </a:rPr>
-              <a:t> IKT-forskriften § 9 required procedures for handling changes, and that they be followed. It never asked for an approver.</a:t>
-            </a:r>
-          </a:p>
-          <a:p>
-            <a:pPr>
-              <a:lnSpc>
-                <a:spcPct val="115000"/>
-              </a:lnSpc>
-              <a:spcAft>
-                <a:spcPts val="400"/>
-              </a:spcAft>
-            </a:pPr>
-            <a:r>
-              <a:rPr sz="1250" b="1">
-                <a:solidFill>
-                  <a:srgbClr val="E8A33D"/>
-                </a:solidFill>
-                <a:latin typeface="Arial"/>
-              </a:rPr>
-              <a:t>—  </a:t>
-            </a:r>
-            <a:r>
-              <a:rPr b="1" sz="1250" i="0">
-                <a:solidFill>
-                  <a:srgbClr val="E6ECF7"/>
-                </a:solidFill>
-                <a:latin typeface="Arial"/>
-              </a:rPr>
-              <a:t>Change management since July 2025.</a:t>
-            </a:r>
-            <a:r>
-              <a:rPr b="0" sz="1250" i="0">
-                <a:solidFill>
-                  <a:srgbClr val="E6ECF7"/>
-                </a:solidFill>
-                <a:latin typeface="Arial"/>
-              </a:rPr>
-              <a:t> DORA (EU 2022/2554) art. 9(4)(e), with RTS 2024/1774 art. 17(1)(b): "the independence of the functions that approve changes and the functions responsible for requesting and implementing those changes". Every change recorded, tested, assessed, approved, implemented and verified. Policy "based on a risk assessment approach". Source code reviews defined as static and dynamic testing.</a:t>
-            </a:r>
-          </a:p>
-          <a:p>
-            <a:pPr>
-              <a:lnSpc>
-                <a:spcPct val="115000"/>
-              </a:lnSpc>
-              <a:spcAft>
-                <a:spcPts val="400"/>
-              </a:spcAft>
-            </a:pPr>
-            <a:r>
-              <a:rPr sz="1250" b="1">
-                <a:solidFill>
-                  <a:srgbClr val="E8A33D"/>
-                </a:solidFill>
-                <a:latin typeface="Arial"/>
-              </a:rPr>
-              <a:t>—  </a:t>
-            </a:r>
-            <a:r>
-              <a:rPr b="1" sz="1250" i="0">
-                <a:solidFill>
-                  <a:srgbClr val="E6ECF7"/>
-                </a:solidFill>
-                <a:latin typeface="Arial"/>
-              </a:rPr>
-              <a:t>Not defined:</a:t>
-            </a:r>
-            <a:r>
-              <a:rPr b="0" sz="1250" i="0">
-                <a:solidFill>
-                  <a:srgbClr val="E6ECF7"/>
-                </a:solidFill>
-                <a:latin typeface="Arial"/>
-              </a:rPr>
-              <a:t> function, independence. Elsewhere in the rulebook a function is a part of the organisation. Whether the approver must sit outside the implementing team is not stated.</a:t>
-            </a:r>
-          </a:p>
-        </p:txBody>
-      </p:sp>
-      <p:sp>
-        <p:nvSpPr>
-          <p:cNvPr id="10" name="TextBox 9"/>
-          <p:cNvSpPr txBox="1"/>
-          <p:nvPr/>
-        </p:nvSpPr>
-        <p:spPr>
-          <a:xfrm>
-            <a:off x="548640" y="5149151"/>
-            <a:ext cx="11094415" cy="325374"/>
-          </a:xfrm>
-          <a:prstGeom prst="rect">
-            <a:avLst/>
-          </a:prstGeom>
-          <a:noFill/>
-        </p:spPr>
-        <p:txBody>
-          <a:bodyPr wrap="square" lIns="0" rIns="0" tIns="0" bIns="0" anchor="t">
-            <a:spAutoFit/>
-          </a:bodyPr>
-          <a:lstStyle/>
-          <a:p>
-            <a:pPr algn="l">
-              <a:lnSpc>
-                <a:spcPct val="115000"/>
-              </a:lnSpc>
-              <a:spcAft>
-                <a:spcPts val="0"/>
-              </a:spcAft>
-            </a:pPr>
-            <a:r>
-              <a:rPr b="0" sz="1050" i="1">
-                <a:solidFill>
-                  <a:srgbClr val="98A4BC"/>
-                </a:solidFill>
-                <a:latin typeface="Arial"/>
-              </a:rPr>
-              <a:t>The art. 17 wording relies on two secondary reproductions that agree. Verify against EUR-Lex before anything is quoted externally. Two things in this deck are called DORA: the EU act here, and Google's DevOps Research and Assessment on slides 17 and 18.</a:t>
-            </a:r>
-          </a:p>
-        </p:txBody>
-      </p:sp>
-    </p:spTree>
-  </p:cSld>
-  <p:clrMapOvr>
-    <a:masterClrMapping/>
-  </p:clrMapOvr>
-</p:sld>
-</file>
-
 <file path=ppt/slides/slide32.xml><?xml version="1.0" encoding="utf-8"?>
 <p:sld xmlns:a="http://schemas.openxmlformats.org/drawingml/2006/main" xmlns:p="http://schemas.openxmlformats.org/presentationml/2006/main" xmlns:r="http://schemas.openxmlformats.org/officeDocument/2006/relationships">
   <p:cSld>
@@ -26516,7 +26727,7 @@
                 </a:solidFill>
                 <a:latin typeface="Arial"/>
               </a:rPr>
-              <a:t>SLIDE 32 · APPENDIX A3</a:t>
+              <a:t>SLIDE 32 · APPENDIX A2</a:t>
             </a:r>
           </a:p>
         </p:txBody>
@@ -26558,7 +26769,7 @@
                 </a:solidFill>
                 <a:latin typeface="Georgia"/>
               </a:rPr>
-              <a:t>A3 — How far to trust each number</a:t>
+              <a:t>A2 — The regulatory detail</a:t>
             </a:r>
           </a:p>
         </p:txBody>
@@ -26687,6 +26898,572 @@
                 <a:latin typeface="Arial"/>
               </a:rPr>
               <a:t>32</a:t>
+            </a:r>
+          </a:p>
+        </p:txBody>
+      </p:sp>
+      <p:sp>
+        <p:nvSpPr>
+          <p:cNvPr id="8" name="TextBox 7"/>
+          <p:cNvSpPr txBox="1"/>
+          <p:nvPr/>
+        </p:nvSpPr>
+        <p:spPr>
+          <a:xfrm>
+            <a:off x="548640" y="1371600"/>
+            <a:ext cx="11094415" cy="162687"/>
+          </a:xfrm>
+          <a:prstGeom prst="rect">
+            <a:avLst/>
+          </a:prstGeom>
+          <a:noFill/>
+        </p:spPr>
+        <p:txBody>
+          <a:bodyPr wrap="square" lIns="0" rIns="0" tIns="0" bIns="0" anchor="t">
+            <a:spAutoFit/>
+          </a:bodyPr>
+          <a:lstStyle/>
+          <a:p>
+            <a:pPr algn="l">
+              <a:lnSpc>
+                <a:spcPct val="115000"/>
+              </a:lnSpc>
+              <a:spcAft>
+                <a:spcPts val="0"/>
+              </a:spcAft>
+            </a:pPr>
+            <a:r>
+              <a:rPr b="0" sz="1050" i="1">
+                <a:solidFill>
+                  <a:srgbClr val="98A4BC"/>
+                </a:solidFill>
+                <a:latin typeface="Arial"/>
+              </a:rPr>
+              <a:t>Use when someone wants the rule read out rather than summarised.</a:t>
+            </a:r>
+          </a:p>
+        </p:txBody>
+      </p:sp>
+      <p:sp>
+        <p:nvSpPr>
+          <p:cNvPr id="9" name="TextBox 8"/>
+          <p:cNvSpPr txBox="1"/>
+          <p:nvPr/>
+        </p:nvSpPr>
+        <p:spPr>
+          <a:xfrm>
+            <a:off x="548640" y="2037207"/>
+            <a:ext cx="11094415" cy="2627312"/>
+          </a:xfrm>
+          <a:prstGeom prst="rect">
+            <a:avLst/>
+          </a:prstGeom>
+          <a:noFill/>
+        </p:spPr>
+        <p:txBody>
+          <a:bodyPr wrap="square" lIns="0" rIns="0" tIns="0" bIns="0">
+            <a:spAutoFit/>
+          </a:bodyPr>
+          <a:lstStyle/>
+          <a:p>
+            <a:pPr>
+              <a:lnSpc>
+                <a:spcPct val="115000"/>
+              </a:lnSpc>
+              <a:spcAft>
+                <a:spcPts val="400"/>
+              </a:spcAft>
+            </a:pPr>
+            <a:r>
+              <a:rPr sz="1250" b="1">
+                <a:solidFill>
+                  <a:srgbClr val="E8A33D"/>
+                </a:solidFill>
+                <a:latin typeface="Arial"/>
+              </a:rPr>
+              <a:t>—  </a:t>
+            </a:r>
+            <a:r>
+              <a:rPr b="1" sz="1250" i="0">
+                <a:solidFill>
+                  <a:srgbClr val="E6ECF7"/>
+                </a:solidFill>
+                <a:latin typeface="Arial"/>
+              </a:rPr>
+              <a:t>Two persons direct the business.</a:t>
+            </a:r>
+            <a:r>
+              <a:rPr b="0" sz="1250" i="0">
+                <a:solidFill>
+                  <a:srgbClr val="E6ECF7"/>
+                </a:solidFill>
+                <a:latin typeface="Arial"/>
+              </a:rPr>
+              <a:t> European banking law (CRD art. 13) grants a licence only where "at least two persons effectively direct the business". That is the origin of Vier-Augen-Prinzip and the English phrase four eyes. They approve no individual change.</a:t>
+            </a:r>
+          </a:p>
+          <a:p>
+            <a:pPr>
+              <a:lnSpc>
+                <a:spcPct val="115000"/>
+              </a:lnSpc>
+              <a:spcAft>
+                <a:spcPts val="400"/>
+              </a:spcAft>
+            </a:pPr>
+            <a:r>
+              <a:rPr sz="1250" b="1">
+                <a:solidFill>
+                  <a:srgbClr val="E8A33D"/>
+                </a:solidFill>
+                <a:latin typeface="Arial"/>
+              </a:rPr>
+              <a:t>—  </a:t>
+            </a:r>
+            <a:r>
+              <a:rPr b="1" sz="1250" i="0">
+                <a:solidFill>
+                  <a:srgbClr val="E6ECF7"/>
+                </a:solidFill>
+                <a:latin typeface="Arial"/>
+              </a:rPr>
+              <a:t>Dual control on a sensitive action.</a:t>
+            </a:r>
+            <a:r>
+              <a:rPr b="0" sz="1250" i="0">
+                <a:solidFill>
+                  <a:srgbClr val="E6ECF7"/>
+                </a:solidFill>
+                <a:latin typeface="Arial"/>
+              </a:rPr>
+              <a:t> Basel defines it as two or more separate "entities (usually persons)" acting in concert. The Norwegian supervisor fined a savings bank in 2023 partly because no four-eyes check existed when an employee manually lowered a customer's money-laundering risk level.</a:t>
+            </a:r>
+          </a:p>
+          <a:p>
+            <a:pPr>
+              <a:lnSpc>
+                <a:spcPct val="115000"/>
+              </a:lnSpc>
+              <a:spcAft>
+                <a:spcPts val="400"/>
+              </a:spcAft>
+            </a:pPr>
+            <a:r>
+              <a:rPr sz="1250" b="1">
+                <a:solidFill>
+                  <a:srgbClr val="E8A33D"/>
+                </a:solidFill>
+                <a:latin typeface="Arial"/>
+              </a:rPr>
+              <a:t>—  </a:t>
+            </a:r>
+            <a:r>
+              <a:rPr b="1" sz="1250" i="0">
+                <a:solidFill>
+                  <a:srgbClr val="E6ECF7"/>
+                </a:solidFill>
+                <a:latin typeface="Arial"/>
+              </a:rPr>
+              <a:t>Change management before July 2025.</a:t>
+            </a:r>
+            <a:r>
+              <a:rPr b="0" sz="1250" i="0">
+                <a:solidFill>
+                  <a:srgbClr val="E6ECF7"/>
+                </a:solidFill>
+                <a:latin typeface="Arial"/>
+              </a:rPr>
+              <a:t> IKT-forskriften § 9 required procedures for handling changes, and that they be followed. It never asked for an approver.</a:t>
+            </a:r>
+          </a:p>
+          <a:p>
+            <a:pPr>
+              <a:lnSpc>
+                <a:spcPct val="115000"/>
+              </a:lnSpc>
+              <a:spcAft>
+                <a:spcPts val="400"/>
+              </a:spcAft>
+            </a:pPr>
+            <a:r>
+              <a:rPr sz="1250" b="1">
+                <a:solidFill>
+                  <a:srgbClr val="E8A33D"/>
+                </a:solidFill>
+                <a:latin typeface="Arial"/>
+              </a:rPr>
+              <a:t>—  </a:t>
+            </a:r>
+            <a:r>
+              <a:rPr b="1" sz="1250" i="0">
+                <a:solidFill>
+                  <a:srgbClr val="E6ECF7"/>
+                </a:solidFill>
+                <a:latin typeface="Arial"/>
+              </a:rPr>
+              <a:t>Change management since July 2025.</a:t>
+            </a:r>
+            <a:r>
+              <a:rPr b="0" sz="1250" i="0">
+                <a:solidFill>
+                  <a:srgbClr val="E6ECF7"/>
+                </a:solidFill>
+                <a:latin typeface="Arial"/>
+              </a:rPr>
+              <a:t> DORA (EU 2022/2554) art. 9(4)(e), with RTS 2024/1774 art. 17(1)(b): "the independence of the functions that approve changes and the functions responsible for requesting and implementing those changes". Every change recorded, tested, assessed, approved, implemented and verified. Policy "based on a risk assessment approach". Source code reviews defined as static and dynamic testing.</a:t>
+            </a:r>
+          </a:p>
+          <a:p>
+            <a:pPr>
+              <a:lnSpc>
+                <a:spcPct val="115000"/>
+              </a:lnSpc>
+              <a:spcAft>
+                <a:spcPts val="400"/>
+              </a:spcAft>
+            </a:pPr>
+            <a:r>
+              <a:rPr sz="1250" b="1">
+                <a:solidFill>
+                  <a:srgbClr val="E8A33D"/>
+                </a:solidFill>
+                <a:latin typeface="Arial"/>
+              </a:rPr>
+              <a:t>—  </a:t>
+            </a:r>
+            <a:r>
+              <a:rPr b="1" sz="1250" i="0">
+                <a:solidFill>
+                  <a:srgbClr val="E6ECF7"/>
+                </a:solidFill>
+                <a:latin typeface="Arial"/>
+              </a:rPr>
+              <a:t>Not defined:</a:t>
+            </a:r>
+            <a:r>
+              <a:rPr b="0" sz="1250" i="0">
+                <a:solidFill>
+                  <a:srgbClr val="E6ECF7"/>
+                </a:solidFill>
+                <a:latin typeface="Arial"/>
+              </a:rPr>
+              <a:t> function, independence. Elsewhere in the rulebook a function is a part of the organisation. Whether the approver must sit outside the implementing team is not stated.</a:t>
+            </a:r>
+          </a:p>
+        </p:txBody>
+      </p:sp>
+      <p:sp>
+        <p:nvSpPr>
+          <p:cNvPr id="10" name="TextBox 9"/>
+          <p:cNvSpPr txBox="1"/>
+          <p:nvPr/>
+        </p:nvSpPr>
+        <p:spPr>
+          <a:xfrm>
+            <a:off x="548640" y="5149151"/>
+            <a:ext cx="11094415" cy="325374"/>
+          </a:xfrm>
+          <a:prstGeom prst="rect">
+            <a:avLst/>
+          </a:prstGeom>
+          <a:noFill/>
+        </p:spPr>
+        <p:txBody>
+          <a:bodyPr wrap="square" lIns="0" rIns="0" tIns="0" bIns="0" anchor="t">
+            <a:spAutoFit/>
+          </a:bodyPr>
+          <a:lstStyle/>
+          <a:p>
+            <a:pPr algn="l">
+              <a:lnSpc>
+                <a:spcPct val="115000"/>
+              </a:lnSpc>
+              <a:spcAft>
+                <a:spcPts val="0"/>
+              </a:spcAft>
+            </a:pPr>
+            <a:r>
+              <a:rPr b="0" sz="1050" i="1">
+                <a:solidFill>
+                  <a:srgbClr val="98A4BC"/>
+                </a:solidFill>
+                <a:latin typeface="Arial"/>
+              </a:rPr>
+              <a:t>The art. 17 wording relies on two secondary reproductions that agree. Verify against EUR-Lex before anything is quoted externally. Two things in this deck are called DORA: the EU act here, and Google's DevOps Research and Assessment on slides 17 and 18.</a:t>
+            </a:r>
+          </a:p>
+        </p:txBody>
+      </p:sp>
+    </p:spTree>
+  </p:cSld>
+  <p:clrMapOvr>
+    <a:masterClrMapping/>
+  </p:clrMapOvr>
+</p:sld>
+</file>
+
+<file path=ppt/slides/slide33.xml><?xml version="1.0" encoding="utf-8"?>
+<p:sld xmlns:a="http://schemas.openxmlformats.org/drawingml/2006/main" xmlns:p="http://schemas.openxmlformats.org/presentationml/2006/main" xmlns:r="http://schemas.openxmlformats.org/officeDocument/2006/relationships">
+  <p:cSld>
+    <p:spTree>
+      <p:nvGrpSpPr>
+        <p:cNvPr id="1" name=""/>
+        <p:cNvGrpSpPr/>
+        <p:nvPr/>
+      </p:nvGrpSpPr>
+      <p:grpSpPr/>
+      <p:sp>
+        <p:nvSpPr>
+          <p:cNvPr id="2" name="Rectangle 1"/>
+          <p:cNvSpPr/>
+          <p:nvPr/>
+        </p:nvSpPr>
+        <p:spPr>
+          <a:xfrm>
+            <a:off x="0" y="0"/>
+            <a:ext cx="12191695" cy="6858000"/>
+          </a:xfrm>
+          <a:prstGeom prst="rect">
+            <a:avLst/>
+          </a:prstGeom>
+          <a:solidFill>
+            <a:srgbClr val="0E1420"/>
+          </a:solidFill>
+          <a:ln>
+            <a:noFill/>
+          </a:ln>
+          <a:effectLst/>
+        </p:spPr>
+        <p:style>
+          <a:lnRef idx="1">
+            <a:schemeClr val="accent1"/>
+          </a:lnRef>
+          <a:fillRef idx="3">
+            <a:schemeClr val="accent1"/>
+          </a:fillRef>
+          <a:effectRef idx="2">
+            <a:schemeClr val="accent1"/>
+          </a:effectRef>
+          <a:fontRef idx="minor">
+            <a:schemeClr val="lt1"/>
+          </a:fontRef>
+        </p:style>
+        <p:txBody>
+          <a:bodyPr rtlCol="0" anchor="ctr"/>
+          <a:lstStyle/>
+          <a:p>
+            <a:pPr algn="ctr"/>
+          </a:p>
+        </p:txBody>
+      </p:sp>
+      <p:sp>
+        <p:nvSpPr>
+          <p:cNvPr id="3" name="TextBox 2"/>
+          <p:cNvSpPr txBox="1"/>
+          <p:nvPr/>
+        </p:nvSpPr>
+        <p:spPr>
+          <a:xfrm>
+            <a:off x="548640" y="292608"/>
+            <a:ext cx="11094415" cy="228600"/>
+          </a:xfrm>
+          <a:prstGeom prst="rect">
+            <a:avLst/>
+          </a:prstGeom>
+          <a:noFill/>
+        </p:spPr>
+        <p:txBody>
+          <a:bodyPr wrap="square" lIns="0" rIns="0" tIns="0" bIns="0" anchor="t">
+            <a:spAutoFit/>
+          </a:bodyPr>
+          <a:lstStyle/>
+          <a:p>
+            <a:pPr algn="l">
+              <a:lnSpc>
+                <a:spcPct val="115000"/>
+              </a:lnSpc>
+              <a:spcAft>
+                <a:spcPts val="0"/>
+              </a:spcAft>
+            </a:pPr>
+            <a:r>
+              <a:rPr b="1" sz="950" i="0">
+                <a:solidFill>
+                  <a:srgbClr val="E8A33D"/>
+                </a:solidFill>
+                <a:latin typeface="Arial"/>
+              </a:rPr>
+              <a:t>SLIDE 33 · APPENDIX A3</a:t>
+            </a:r>
+          </a:p>
+        </p:txBody>
+      </p:sp>
+      <p:sp>
+        <p:nvSpPr>
+          <p:cNvPr id="4" name="TextBox 3"/>
+          <p:cNvSpPr txBox="1"/>
+          <p:nvPr/>
+        </p:nvSpPr>
+        <p:spPr>
+          <a:xfrm>
+            <a:off x="548640" y="530352"/>
+            <a:ext cx="11094415" cy="548640"/>
+          </a:xfrm>
+          <a:prstGeom prst="rect">
+            <a:avLst/>
+          </a:prstGeom>
+          <a:noFill/>
+        </p:spPr>
+        <p:txBody>
+          <a:bodyPr wrap="square" lIns="0" rIns="0" tIns="0" bIns="0" anchor="t">
+            <a:spAutoFit/>
+          </a:bodyPr>
+          <a:lstStyle/>
+          <a:p>
+            <a:pPr algn="l">
+              <a:lnSpc>
+                <a:spcPct val="115000"/>
+              </a:lnSpc>
+              <a:spcAft>
+                <a:spcPts val="0"/>
+              </a:spcAft>
+            </a:pPr>
+            <a:r>
+              <a:rPr b="1" sz="2800" i="0">
+                <a:solidFill>
+                  <a:srgbClr val="E6ECF7"/>
+                </a:solidFill>
+                <a:latin typeface="Georgia"/>
+              </a:rPr>
+              <a:t>A3 — How far to trust each number</a:t>
+            </a:r>
+          </a:p>
+        </p:txBody>
+      </p:sp>
+      <p:sp>
+        <p:nvSpPr>
+          <p:cNvPr id="5" name="Rectangle 4"/>
+          <p:cNvSpPr/>
+          <p:nvPr/>
+        </p:nvSpPr>
+        <p:spPr>
+          <a:xfrm>
+            <a:off x="548640" y="1115568"/>
+            <a:ext cx="1097280" cy="41148"/>
+          </a:xfrm>
+          <a:prstGeom prst="rect">
+            <a:avLst/>
+          </a:prstGeom>
+          <a:solidFill>
+            <a:srgbClr val="29D3E0"/>
+          </a:solidFill>
+          <a:ln>
+            <a:noFill/>
+          </a:ln>
+          <a:effectLst/>
+        </p:spPr>
+        <p:style>
+          <a:lnRef idx="1">
+            <a:schemeClr val="accent1"/>
+          </a:lnRef>
+          <a:fillRef idx="3">
+            <a:schemeClr val="accent1"/>
+          </a:fillRef>
+          <a:effectRef idx="2">
+            <a:schemeClr val="accent1"/>
+          </a:effectRef>
+          <a:fontRef idx="minor">
+            <a:schemeClr val="lt1"/>
+          </a:fontRef>
+        </p:style>
+        <p:txBody>
+          <a:bodyPr rtlCol="0" anchor="ctr"/>
+          <a:lstStyle/>
+          <a:p>
+            <a:pPr algn="ctr"/>
+          </a:p>
+        </p:txBody>
+      </p:sp>
+      <p:sp>
+        <p:nvSpPr>
+          <p:cNvPr id="6" name="TextBox 5"/>
+          <p:cNvSpPr txBox="1"/>
+          <p:nvPr/>
+        </p:nvSpPr>
+        <p:spPr>
+          <a:xfrm>
+            <a:off x="548640" y="6473952"/>
+            <a:ext cx="3657600" cy="228600"/>
+          </a:xfrm>
+          <a:prstGeom prst="rect">
+            <a:avLst/>
+          </a:prstGeom>
+          <a:noFill/>
+        </p:spPr>
+        <p:txBody>
+          <a:bodyPr wrap="square" lIns="0" rIns="0" tIns="0" bIns="0" anchor="t">
+            <a:spAutoFit/>
+          </a:bodyPr>
+          <a:lstStyle/>
+          <a:p>
+            <a:pPr algn="l">
+              <a:lnSpc>
+                <a:spcPct val="115000"/>
+              </a:lnSpc>
+              <a:spcAft>
+                <a:spcPts val="0"/>
+              </a:spcAft>
+            </a:pPr>
+            <a:r>
+              <a:rPr b="1" sz="950" i="0">
+                <a:solidFill>
+                  <a:srgbClr val="E6ECF7"/>
+                </a:solidFill>
+                <a:latin typeface="Arial"/>
+              </a:rPr>
+              <a:t>Build to Understand</a:t>
+            </a:r>
+          </a:p>
+        </p:txBody>
+      </p:sp>
+      <p:sp>
+        <p:nvSpPr>
+          <p:cNvPr id="7" name="TextBox 6"/>
+          <p:cNvSpPr txBox="1"/>
+          <p:nvPr/>
+        </p:nvSpPr>
+        <p:spPr>
+          <a:xfrm>
+            <a:off x="10728655" y="6473952"/>
+            <a:ext cx="914400" cy="228600"/>
+          </a:xfrm>
+          <a:prstGeom prst="rect">
+            <a:avLst/>
+          </a:prstGeom>
+          <a:noFill/>
+        </p:spPr>
+        <p:txBody>
+          <a:bodyPr wrap="square" lIns="0" rIns="0" tIns="0" bIns="0" anchor="t">
+            <a:spAutoFit/>
+          </a:bodyPr>
+          <a:lstStyle/>
+          <a:p>
+            <a:pPr algn="r">
+              <a:lnSpc>
+                <a:spcPct val="115000"/>
+              </a:lnSpc>
+              <a:spcAft>
+                <a:spcPts val="0"/>
+              </a:spcAft>
+            </a:pPr>
+            <a:r>
+              <a:rPr b="0" sz="950" i="0">
+                <a:solidFill>
+                  <a:srgbClr val="98A4BC"/>
+                </a:solidFill>
+                <a:latin typeface="Arial"/>
+              </a:rPr>
+              <a:t>33</a:t>
             </a:r>
           </a:p>
         </p:txBody>
@@ -27847,7 +28624,7 @@
 </p:sld>
 </file>
 
-<file path=ppt/slides/slide33.xml><?xml version="1.0" encoding="utf-8"?>
+<file path=ppt/slides/slide34.xml><?xml version="1.0" encoding="utf-8"?>
 <p:sld xmlns:a="http://schemas.openxmlformats.org/drawingml/2006/main" xmlns:p="http://schemas.openxmlformats.org/presentationml/2006/main" xmlns:r="http://schemas.openxmlformats.org/officeDocument/2006/relationships">
   <p:cSld>
     <p:spTree>
@@ -27934,11 +28711,11 @@
             <a:r>
               <a:rPr b="1" sz="950" i="0">
                 <a:solidFill>
-                  <a:srgbClr val="E8A33D"/>
+                  <a:srgbClr val="29D3E0"/>
                 </a:solidFill>
                 <a:latin typeface="Arial"/>
               </a:rPr>
-              <a:t>SLIDE 33 · APPENDIX A4</a:t>
+              <a:t>SLIDE 34 · APPENDIX A4</a:t>
             </a:r>
           </a:p>
         </p:txBody>
@@ -28108,7 +28885,7 @@
                 </a:solidFill>
                 <a:latin typeface="Arial"/>
               </a:rPr>
-              <a:t>33</a:t>
+              <a:t>34</a:t>
             </a:r>
           </a:p>
         </p:txBody>

--- a/presentations/what-is-the-second-pair-of-eyes-for.pptx
+++ b/presentations/what-is-the-second-pair-of-eyes-for.pptx
@@ -1725,7 +1725,7 @@
           <a:lstStyle/>
           <a:p>
             <a:r>
-              <a:t>Step 1 settled what the whole repository touches. Both decisions here follow from that answer. A CODEOWNERS file requires a named reviewer for the paths that move money or hold customer data, and leaves the rest on the lighter default. That is the risk-based approach the regulation asks for, written as a file rather than a policy nobody reads. It also answers something the approval rule leaves open: not just that someone approved, but that someone who knows this code did. The second decision comes from chapter 02. Whether Copilot's review counts toward this repository's required approvals is a per-repository choice, currently off by default. Write the answer down where the next person will find it, with the reason. Both repositories are allowed to answer differently. What neither should do is answer by accident, which is what happens when nobody decides.</a:t>
+              <a:t>Step 1 settled what the whole repository touches. Both decisions here follow from that answer. A CODEOWNERS file requires a named reviewer for the paths that move money or hold customer data, and leaves the rest on the lighter default. That is the risk-based approach the regulation asks for, written as a file rather than a policy nobody reads. It also answers something the approval rule leaves open: not just that someone approved, but that someone who knows this code did. The second decision comes from chapter 02. Whether Copilot's review counts toward this repository's required approvals is a per-repository choice, currently off by default. Write the answer into the README under the same Review rules heading step 1 started, with the reason. The setting has nowhere to hold a reason, and chapter 02 found GitHub's organisation audit log records no event at all when a machine approves, so the README is the only place the decision survives. Both repositories are allowed to answer differently. What neither should do is answer by accident, which is what happens when nobody decides.</a:t>
             </a:r>
           </a:p>
         </p:txBody>
@@ -17962,7 +17962,7 @@
                 </a:solidFill>
                 <a:latin typeface="Arial"/>
               </a:rPr>
-              <a:t>Write the answer in the README, with the date</a:t>
+              <a:t>Write the answer in the README, under a short "Review rules" heading</a:t>
             </a:r>
           </a:p>
           <a:p>
@@ -19704,7 +19704,7 @@
                 </a:solidFill>
                 <a:latin typeface="Arial"/>
               </a:rPr>
-              <a:t>Write the second answer down, with the reason. A setting with no owner is a decision nobody made.</a:t>
+              <a:t>Write it in the README next to the tier, with the reason. The setting has nowhere to hold one, and nothing logs a machine approval.</a:t>
             </a:r>
           </a:p>
         </p:txBody>
@@ -20698,7 +20698,7 @@
                           </a:solidFill>
                           <a:latin typeface="Arial"/>
                         </a:rPr>
-                        <a:t>README</a:t>
+                        <a:t>README, under "Review rules"</a:t>
                       </a:r>
                     </a:p>
                   </a:txBody>
@@ -21196,7 +21196,7 @@
                           </a:solidFill>
                           <a:latin typeface="Arial"/>
                         </a:rPr>
-                        <a:t>Written down where the next person looks</a:t>
+                        <a:t>README, under "Review rules"</a:t>
                       </a:r>
                     </a:p>
                   </a:txBody>

--- a/presentations/what-is-the-second-pair-of-eyes-for.pptx
+++ b/presentations/what-is-the-second-pair-of-eyes-for.pptx
@@ -1865,7 +1865,7 @@
           <a:lstStyle/>
           <a:p>
             <a:r>
-              <a:t>The last row is the one nothing else covers. Everything above it decays quietly, and only a person re-reading approved changes notices. That is Adyen's fix from chapter 02, the one regulated payment company in this deck, whose reviewers said they had started to pattern-match after a dozen near-identical changes. At one-repository scale it is a recurring calendar entry rather than a tool: read a sample of merged pull requests and ask whether the approvals on them meant anything. On leverage and freedom: the workflow file and the template are copied to the next repository in minutes, so the second repository costs a fraction of the first. Each item is reverted by deleting a line, with no vendor to ask. What the list cannot do is the job chapter 01 found underneath all three: decide whether the change is wanted. Days 1 to 3 make that decision cheaper to reach, day 4 gives the decider something to read, and the last row checks that the decision is still being made. None of them makes it. And I owe this argument the check in the last line: I do not know how many of these settings are already on in our repositories.</a:t>
+              <a:t>The last row is the one nothing else covers. Every row above it can be in place and still stop working: the checks stay green, the approvals keep arriving, the template keeps getting filled in, and none of that requires anyone to have read the change. What to look for in those ten pull requests: approvals that arrived a minute after opening on changes too long to read in a minute, template sections filled with N/A or the branch name, one person approving everything, code owners approving paths they never otherwise touch. That is Adyen's fix from chapter 02, the one regulated payment company in this deck, whose reviewers said they had started to pattern-match after a dozen near-identical changes. At one-repository scale it is a recurring calendar entry rather than a tool: read a sample of merged pull requests and ask whether the approvals on them meant anything. On leverage and freedom: the workflow file and the template are copied to the next repository in minutes, so the second repository costs a fraction of the first. Each item is reverted by deleting a line, with no vendor to ask. What the list cannot do is the job chapter 01 found underneath all three: decide whether the change is wanted. Days 1 to 3 make that decision cheaper to reach, day 4 gives the decider something to read, and the last row checks that the decision is still being made. None of them makes it. And I owe this argument the check in the last line: I do not know how many of these settings are already on in our repositories.</a:t>
             </a:r>
           </a:p>
         </p:txBody>
@@ -20530,7 +20530,7 @@
         </p:nvGraphicFramePr>
         <p:xfrm>
           <a:off x="548640" y="1371600"/>
-          <a:ext cx="11094414" cy="4248300"/>
+          <a:ext cx="11094414" cy="3941064"/>
         </p:xfrm>
         <a:graphic>
           <a:graphicData uri="http://schemas.openxmlformats.org/drawingml/2006/table">
@@ -20555,7 +20555,7 @@
                         </a:lnSpc>
                       </a:pPr>
                       <a:r>
-                        <a:rPr b="1" sz="1323" i="0">
+                        <a:rPr b="1" sz="1260" i="0">
                           <a:solidFill>
                             <a:srgbClr val="E6ECF7"/>
                           </a:solidFill>
@@ -20582,7 +20582,7 @@
                         </a:lnSpc>
                       </a:pPr>
                       <a:r>
-                        <a:rPr b="1" sz="1323" i="0">
+                        <a:rPr b="1" sz="1260" i="0">
                           <a:solidFill>
                             <a:srgbClr val="E6ECF7"/>
                           </a:solidFill>
@@ -20609,7 +20609,7 @@
                         </a:lnSpc>
                       </a:pPr>
                       <a:r>
-                        <a:rPr b="1" sz="1323" i="0">
+                        <a:rPr b="1" sz="1260" i="0">
                           <a:solidFill>
                             <a:srgbClr val="E6ECF7"/>
                           </a:solidFill>
@@ -20626,7 +20626,7 @@
                   </a:tcPr>
                 </a:tc>
               </a:tr>
-              <a:tr h="567842">
+              <a:tr h="548640">
                 <a:tc>
                   <a:txBody>
                     <a:bodyPr wrap="square"/>
@@ -20638,7 +20638,7 @@
                         </a:lnSpc>
                       </a:pPr>
                       <a:r>
-                        <a:rPr b="1" sz="1323" i="0">
+                        <a:rPr b="1" sz="1260" i="0">
                           <a:solidFill>
                             <a:srgbClr val="E6ECF7"/>
                           </a:solidFill>
@@ -20665,7 +20665,7 @@
                         </a:lnSpc>
                       </a:pPr>
                       <a:r>
-                        <a:rPr b="0" sz="1323" i="0">
+                        <a:rPr b="0" sz="1260" i="0">
                           <a:solidFill>
                             <a:srgbClr val="E6ECF7"/>
                           </a:solidFill>
@@ -20692,7 +20692,7 @@
                         </a:lnSpc>
                       </a:pPr>
                       <a:r>
-                        <a:rPr b="0" sz="1323" i="0">
+                        <a:rPr b="0" sz="1260" i="0">
                           <a:solidFill>
                             <a:srgbClr val="E6ECF7"/>
                           </a:solidFill>
@@ -20709,7 +20709,7 @@
                   </a:tcPr>
                 </a:tc>
               </a:tr>
-              <a:tr h="366217">
+              <a:tr h="356616">
                 <a:tc>
                   <a:txBody>
                     <a:bodyPr wrap="square"/>
@@ -20721,7 +20721,7 @@
                         </a:lnSpc>
                       </a:pPr>
                       <a:r>
-                        <a:rPr b="1" sz="1323" i="0">
+                        <a:rPr b="1" sz="1260" i="0">
                           <a:solidFill>
                             <a:srgbClr val="E6ECF7"/>
                           </a:solidFill>
@@ -20748,7 +20748,7 @@
                         </a:lnSpc>
                       </a:pPr>
                       <a:r>
-                        <a:rPr b="0" sz="1323" i="0">
+                        <a:rPr b="0" sz="1260" i="0">
                           <a:solidFill>
                             <a:srgbClr val="E6ECF7"/>
                           </a:solidFill>
@@ -20775,7 +20775,7 @@
                         </a:lnSpc>
                       </a:pPr>
                       <a:r>
-                        <a:rPr b="0" sz="1323" i="0">
+                        <a:rPr b="0" sz="1260" i="0">
                           <a:solidFill>
                             <a:srgbClr val="E6ECF7"/>
                           </a:solidFill>
@@ -20792,7 +20792,7 @@
                   </a:tcPr>
                 </a:tc>
               </a:tr>
-              <a:tr h="567842">
+              <a:tr h="548640">
                 <a:tc>
                   <a:txBody>
                     <a:bodyPr wrap="square"/>
@@ -20804,7 +20804,7 @@
                         </a:lnSpc>
                       </a:pPr>
                       <a:r>
-                        <a:rPr b="1" sz="1323" i="0">
+                        <a:rPr b="1" sz="1260" i="0">
                           <a:solidFill>
                             <a:srgbClr val="E6ECF7"/>
                           </a:solidFill>
@@ -20831,7 +20831,7 @@
                         </a:lnSpc>
                       </a:pPr>
                       <a:r>
-                        <a:rPr b="0" sz="1323" i="0">
+                        <a:rPr b="0" sz="1260" i="0">
                           <a:solidFill>
                             <a:srgbClr val="E6ECF7"/>
                           </a:solidFill>
@@ -20858,7 +20858,7 @@
                         </a:lnSpc>
                       </a:pPr>
                       <a:r>
-                        <a:rPr b="0" sz="1323" i="0">
+                        <a:rPr b="0" sz="1260" i="0">
                           <a:solidFill>
                             <a:srgbClr val="E6ECF7"/>
                           </a:solidFill>
@@ -20875,7 +20875,7 @@
                   </a:tcPr>
                 </a:tc>
               </a:tr>
-              <a:tr h="567842">
+              <a:tr h="356616">
                 <a:tc>
                   <a:txBody>
                     <a:bodyPr wrap="square"/>
@@ -20887,7 +20887,7 @@
                         </a:lnSpc>
                       </a:pPr>
                       <a:r>
-                        <a:rPr b="1" sz="1323" i="0">
+                        <a:rPr b="1" sz="1260" i="0">
                           <a:solidFill>
                             <a:srgbClr val="E6ECF7"/>
                           </a:solidFill>
@@ -20914,7 +20914,7 @@
                         </a:lnSpc>
                       </a:pPr>
                       <a:r>
-                        <a:rPr b="0" sz="1323" i="0">
+                        <a:rPr b="0" sz="1260" i="0">
                           <a:solidFill>
                             <a:srgbClr val="E6ECF7"/>
                           </a:solidFill>
@@ -20941,7 +20941,7 @@
                         </a:lnSpc>
                       </a:pPr>
                       <a:r>
-                        <a:rPr b="0" sz="1323" i="0">
+                        <a:rPr b="0" sz="1260" i="0">
                           <a:solidFill>
                             <a:srgbClr val="E6ECF7"/>
                           </a:solidFill>
@@ -20958,7 +20958,7 @@
                   </a:tcPr>
                 </a:tc>
               </a:tr>
-              <a:tr h="366217">
+              <a:tr h="356616">
                 <a:tc>
                   <a:txBody>
                     <a:bodyPr wrap="square"/>
@@ -20970,7 +20970,7 @@
                         </a:lnSpc>
                       </a:pPr>
                       <a:r>
-                        <a:rPr b="1" sz="1323" i="0">
+                        <a:rPr b="1" sz="1260" i="0">
                           <a:solidFill>
                             <a:srgbClr val="E6ECF7"/>
                           </a:solidFill>
@@ -20997,7 +20997,7 @@
                         </a:lnSpc>
                       </a:pPr>
                       <a:r>
-                        <a:rPr b="0" sz="1323" i="0">
+                        <a:rPr b="0" sz="1260" i="0">
                           <a:solidFill>
                             <a:srgbClr val="E6ECF7"/>
                           </a:solidFill>
@@ -21024,7 +21024,7 @@
                         </a:lnSpc>
                       </a:pPr>
                       <a:r>
-                        <a:rPr b="0" sz="1323" i="0">
+                        <a:rPr b="0" sz="1260" i="0">
                           <a:solidFill>
                             <a:srgbClr val="E6ECF7"/>
                           </a:solidFill>
@@ -21041,7 +21041,7 @@
                   </a:tcPr>
                 </a:tc>
               </a:tr>
-              <a:tr h="366217">
+              <a:tr h="356616">
                 <a:tc>
                   <a:txBody>
                     <a:bodyPr wrap="square"/>
@@ -21053,7 +21053,7 @@
                         </a:lnSpc>
                       </a:pPr>
                       <a:r>
-                        <a:rPr b="1" sz="1323" i="0">
+                        <a:rPr b="1" sz="1260" i="0">
                           <a:solidFill>
                             <a:srgbClr val="E6ECF7"/>
                           </a:solidFill>
@@ -21080,7 +21080,7 @@
                         </a:lnSpc>
                       </a:pPr>
                       <a:r>
-                        <a:rPr b="0" sz="1323" i="0">
+                        <a:rPr b="0" sz="1260" i="0">
                           <a:solidFill>
                             <a:srgbClr val="E6ECF7"/>
                           </a:solidFill>
@@ -21107,7 +21107,7 @@
                         </a:lnSpc>
                       </a:pPr>
                       <a:r>
-                        <a:rPr b="0" sz="1323" i="0">
+                        <a:rPr b="0" sz="1260" i="0">
                           <a:solidFill>
                             <a:srgbClr val="E6ECF7"/>
                           </a:solidFill>
@@ -21124,7 +21124,7 @@
                   </a:tcPr>
                 </a:tc>
               </a:tr>
-              <a:tr h="366217">
+              <a:tr h="356616">
                 <a:tc>
                   <a:txBody>
                     <a:bodyPr wrap="square"/>
@@ -21136,7 +21136,7 @@
                         </a:lnSpc>
                       </a:pPr>
                       <a:r>
-                        <a:rPr b="1" sz="1323" i="0">
+                        <a:rPr b="1" sz="1260" i="0">
                           <a:solidFill>
                             <a:srgbClr val="E6ECF7"/>
                           </a:solidFill>
@@ -21163,7 +21163,7 @@
                         </a:lnSpc>
                       </a:pPr>
                       <a:r>
-                        <a:rPr b="0" sz="1323" i="0">
+                        <a:rPr b="0" sz="1260" i="0">
                           <a:solidFill>
                             <a:srgbClr val="E6ECF7"/>
                           </a:solidFill>
@@ -21190,7 +21190,7 @@
                         </a:lnSpc>
                       </a:pPr>
                       <a:r>
-                        <a:rPr b="0" sz="1323" i="0">
+                        <a:rPr b="0" sz="1260" i="0">
                           <a:solidFill>
                             <a:srgbClr val="E6ECF7"/>
                           </a:solidFill>
@@ -21207,7 +21207,7 @@
                   </a:tcPr>
                 </a:tc>
               </a:tr>
-              <a:tr h="366217">
+              <a:tr h="356616">
                 <a:tc>
                   <a:txBody>
                     <a:bodyPr wrap="square"/>
@@ -21219,7 +21219,7 @@
                         </a:lnSpc>
                       </a:pPr>
                       <a:r>
-                        <a:rPr b="1" sz="1323" i="0">
+                        <a:rPr b="1" sz="1260" i="0">
                           <a:solidFill>
                             <a:srgbClr val="E6ECF7"/>
                           </a:solidFill>
@@ -21246,7 +21246,7 @@
                         </a:lnSpc>
                       </a:pPr>
                       <a:r>
-                        <a:rPr b="0" sz="1323" i="0">
+                        <a:rPr b="0" sz="1260" i="0">
                           <a:solidFill>
                             <a:srgbClr val="E6ECF7"/>
                           </a:solidFill>
@@ -21273,7 +21273,7 @@
                         </a:lnSpc>
                       </a:pPr>
                       <a:r>
-                        <a:rPr b="0" sz="1323" i="0">
+                        <a:rPr b="0" sz="1260" i="0">
                           <a:solidFill>
                             <a:srgbClr val="E6ECF7"/>
                           </a:solidFill>
@@ -21290,7 +21290,7 @@
                   </a:tcPr>
                 </a:tc>
               </a:tr>
-              <a:tr h="366217">
+              <a:tr h="356616">
                 <a:tc>
                   <a:txBody>
                     <a:bodyPr wrap="square"/>
@@ -21302,13 +21302,13 @@
                         </a:lnSpc>
                       </a:pPr>
                       <a:r>
-                        <a:rPr b="1" sz="1323" i="0">
+                        <a:rPr b="1" sz="1260" i="0">
                           <a:solidFill>
                             <a:srgbClr val="E6ECF7"/>
                           </a:solidFill>
                           <a:latin typeface="Arial"/>
                         </a:rPr>
-                        <a:t>Ongoing</a:t>
+                        <a:t>Monthly</a:t>
                       </a:r>
                     </a:p>
                   </a:txBody>
@@ -21329,13 +21329,13 @@
                         </a:lnSpc>
                       </a:pPr>
                       <a:r>
-                        <a:rPr b="0" sz="1323" i="0">
+                        <a:rPr b="0" sz="1260" i="0">
                           <a:solidFill>
                             <a:srgbClr val="E6ECF7"/>
                           </a:solidFill>
                           <a:latin typeface="Arial"/>
                         </a:rPr>
-                        <a:t>Read a sample of already-approved changes</a:t>
+                        <a:t>Read ten merged pull requests and ask what you are seeing</a:t>
                       </a:r>
                     </a:p>
                   </a:txBody>
@@ -21356,7 +21356,7 @@
                         </a:lnSpc>
                       </a:pPr>
                       <a:r>
-                        <a:rPr b="0" sz="1323" i="0">
+                        <a:rPr b="0" sz="1260" i="0">
                           <a:solidFill>
                             <a:srgbClr val="E6ECF7"/>
                           </a:solidFill>
@@ -21385,8 +21385,8 @@
         </p:nvSpPr>
         <p:spPr>
           <a:xfrm>
-            <a:off x="548640" y="5737768"/>
-            <a:ext cx="11094415" cy="507583"/>
+            <a:off x="548640" y="5520232"/>
+            <a:ext cx="11094415" cy="725119"/>
           </a:xfrm>
           <a:prstGeom prst="rect">
             <a:avLst/>
@@ -21408,16 +21408,16 @@
               </a:spcAft>
             </a:pPr>
             <a:r>
-              <a:rPr b="0" sz="1638" i="0">
+              <a:rPr b="0" sz="1560" i="0">
                 <a:solidFill>
                   <a:srgbClr val="E6ECF7"/>
                 </a:solidFill>
                 <a:latin typeface="Arial"/>
               </a:rPr>
-              <a:t>Every line is a file or a setting, copied to the next repository in minutes and reverted by deleting a line. </a:t>
-            </a:r>
-            <a:r>
-              <a:rPr b="1" sz="1638" i="0">
+              <a:t>Every line but the last is a file or a setting, copied to the next repository in minutes and reverted by deleting a line. The last one is half an hour a month. </a:t>
+            </a:r>
+            <a:r>
+              <a:rPr b="1" sz="1560" i="0">
                 <a:solidFill>
                   <a:srgbClr val="E6ECF7"/>
                 </a:solidFill>

--- a/presentations/what-is-the-second-pair-of-eyes-for.pptx
+++ b/presentations/what-is-the-second-pair-of-eyes-for.pptx
@@ -17005,7 +17005,7 @@
                 </a:solidFill>
                 <a:latin typeface="Georgia"/>
               </a:rPr>
-              <a:t>What would I do in one repository?</a:t>
+              <a:t>What would I do in a repository?</a:t>
             </a:r>
           </a:p>
         </p:txBody>
@@ -17477,7 +17477,7 @@
                 </a:solidFill>
                 <a:latin typeface="Arial"/>
               </a:rPr>
-              <a:t>The first week</a:t>
+              <a:t>Where each step lives</a:t>
             </a:r>
           </a:p>
         </p:txBody>
@@ -17671,7 +17671,7 @@
                 </a:solidFill>
                 <a:latin typeface="Arial"/>
               </a:rPr>
-              <a:t>SLIDE 23 · 05 · IN ONE REPOSITORY</a:t>
+              <a:t>SLIDE 23 · 05 · IN A REPOSITORY</a:t>
             </a:r>
           </a:p>
         </p:txBody>
@@ -18208,7 +18208,7 @@
                 </a:solidFill>
                 <a:latin typeface="Arial"/>
               </a:rPr>
-              <a:t>SLIDE 24 · 05 · IN ONE REPOSITORY</a:t>
+              <a:t>SLIDE 24 · 05 · IN A REPOSITORY</a:t>
             </a:r>
           </a:p>
         </p:txBody>
@@ -19096,7 +19096,7 @@
                 </a:solidFill>
                 <a:latin typeface="Arial"/>
               </a:rPr>
-              <a:t>SLIDE 25 · 05 · IN ONE REPOSITORY</a:t>
+              <a:t>SLIDE 25 · 05 · IN A REPOSITORY</a:t>
             </a:r>
           </a:p>
         </p:txBody>
@@ -19808,7 +19808,7 @@
                 </a:solidFill>
                 <a:latin typeface="Arial"/>
               </a:rPr>
-              <a:t>SLIDE 26 · 05 · IN ONE REPOSITORY</a:t>
+              <a:t>SLIDE 26 · 05 · IN A REPOSITORY</a:t>
             </a:r>
           </a:p>
         </p:txBody>
@@ -20345,7 +20345,7 @@
                 </a:solidFill>
                 <a:latin typeface="Arial"/>
               </a:rPr>
-              <a:t>SLIDE 27 · 05 · IN ONE REPOSITORY</a:t>
+              <a:t>SLIDE 27 · 05 · IN A REPOSITORY</a:t>
             </a:r>
           </a:p>
         </p:txBody>
@@ -20387,7 +20387,7 @@
                 </a:solidFill>
                 <a:latin typeface="Georgia"/>
               </a:rPr>
-              <a:t>The first week</a:t>
+              <a:t>Where each step lives</a:t>
             </a:r>
           </a:p>
         </p:txBody>
@@ -20529,8 +20529,8 @@
           <p:nvPr/>
         </p:nvGraphicFramePr>
         <p:xfrm>
-          <a:off x="548640" y="1371600"/>
-          <a:ext cx="11094414" cy="3941064"/>
+          <a:off x="548640" y="1436649"/>
+          <a:ext cx="11094413" cy="3371850"/>
         </p:xfrm>
         <a:graphic>
           <a:graphicData uri="http://schemas.openxmlformats.org/drawingml/2006/table">
@@ -20539,9 +20539,9 @@
                 <a:tableStyleId>{5C22544A-7EE6-4342-B048-85BDC9FD1C3A}</a:tableStyleId>
               </a:tblPr>
               <a:tblGrid>
-                <a:gridCol w="1877516"/>
-                <a:gridCol w="5547207"/>
-                <a:gridCol w="3669691"/>
+                <a:gridCol w="1497405"/>
+                <a:gridCol w="6057686"/>
+                <a:gridCol w="3539322"/>
               </a:tblGrid>
               <a:tr h="347472">
                 <a:tc>
@@ -20555,13 +20555,13 @@
                         </a:lnSpc>
                       </a:pPr>
                       <a:r>
-                        <a:rPr b="1" sz="1260" i="0">
+                        <a:rPr b="1" sz="1365" i="0">
                           <a:solidFill>
                             <a:srgbClr val="E6ECF7"/>
                           </a:solidFill>
                           <a:latin typeface="Arial"/>
                         </a:rPr>
-                        <a:t>When</a:t>
+                        <a:t>Step</a:t>
                       </a:r>
                     </a:p>
                   </a:txBody>
@@ -20582,7 +20582,7 @@
                         </a:lnSpc>
                       </a:pPr>
                       <a:r>
-                        <a:rPr b="1" sz="1260" i="0">
+                        <a:rPr b="1" sz="1365" i="0">
                           <a:solidFill>
                             <a:srgbClr val="E6ECF7"/>
                           </a:solidFill>
@@ -20609,7 +20609,7 @@
                         </a:lnSpc>
                       </a:pPr>
                       <a:r>
-                        <a:rPr b="1" sz="1260" i="0">
+                        <a:rPr b="1" sz="1365" i="0">
                           <a:solidFill>
                             <a:srgbClr val="E6ECF7"/>
                           </a:solidFill>
@@ -20626,7 +20626,7 @@
                   </a:tcPr>
                 </a:tc>
               </a:tr>
-              <a:tr h="548640">
+              <a:tr h="372618">
                 <a:tc>
                   <a:txBody>
                     <a:bodyPr wrap="square"/>
@@ -20638,13 +20638,13 @@
                         </a:lnSpc>
                       </a:pPr>
                       <a:r>
-                        <a:rPr b="1" sz="1260" i="0">
+                        <a:rPr b="1" sz="1365" i="0">
                           <a:solidFill>
                             <a:srgbClr val="E6ECF7"/>
                           </a:solidFill>
                           <a:latin typeface="Arial"/>
                         </a:rPr>
-                        <a:t>Day 1</a:t>
+                        <a:t>01</a:t>
                       </a:r>
                     </a:p>
                   </a:txBody>
@@ -20665,7 +20665,7 @@
                         </a:lnSpc>
                       </a:pPr>
                       <a:r>
-                        <a:rPr b="0" sz="1260" i="0">
+                        <a:rPr b="0" sz="1365" i="0">
                           <a:solidFill>
                             <a:srgbClr val="E6ECF7"/>
                           </a:solidFill>
@@ -20692,7 +20692,7 @@
                         </a:lnSpc>
                       </a:pPr>
                       <a:r>
-                        <a:rPr b="0" sz="1260" i="0">
+                        <a:rPr b="0" sz="1365" i="0">
                           <a:solidFill>
                             <a:srgbClr val="E6ECF7"/>
                           </a:solidFill>
@@ -20709,7 +20709,7 @@
                   </a:tcPr>
                 </a:tc>
               </a:tr>
-              <a:tr h="356616">
+              <a:tr h="580644">
                 <a:tc>
                   <a:txBody>
                     <a:bodyPr wrap="square"/>
@@ -20721,13 +20721,13 @@
                         </a:lnSpc>
                       </a:pPr>
                       <a:r>
-                        <a:rPr b="1" sz="1260" i="0">
+                        <a:rPr b="1" sz="1365" i="0">
                           <a:solidFill>
                             <a:srgbClr val="E6ECF7"/>
                           </a:solidFill>
                           <a:latin typeface="Arial"/>
                         </a:rPr>
-                        <a:t>Day 1</a:t>
+                        <a:t>02</a:t>
                       </a:r>
                     </a:p>
                   </a:txBody>
@@ -20748,13 +20748,13 @@
                         </a:lnSpc>
                       </a:pPr>
                       <a:r>
-                        <a:rPr b="0" sz="1260" i="0">
+                        <a:rPr b="0" sz="1365" i="0">
                           <a:solidFill>
                             <a:srgbClr val="E6ECF7"/>
                           </a:solidFill>
                           <a:latin typeface="Arial"/>
                         </a:rPr>
-                        <a:t>Format, lint, test, static analysis on every change</a:t>
+                        <a:t>Format, lint, test, static analysis, dependency and secret scanning</a:t>
                       </a:r>
                     </a:p>
                   </a:txBody>
@@ -20775,13 +20775,13 @@
                         </a:lnSpc>
                       </a:pPr>
                       <a:r>
-                        <a:rPr b="0" sz="1260" i="0">
+                        <a:rPr b="0" sz="1365" i="0">
                           <a:solidFill>
                             <a:srgbClr val="E6ECF7"/>
                           </a:solidFill>
                           <a:latin typeface="Arial"/>
                         </a:rPr>
-                        <a:t>.github/workflows/</a:t>
+                        <a:t>.github/workflows/, .github/dependabot.yml, settings</a:t>
                       </a:r>
                     </a:p>
                   </a:txBody>
@@ -20792,7 +20792,7 @@
                   </a:tcPr>
                 </a:tc>
               </a:tr>
-              <a:tr h="548640">
+              <a:tr h="580644">
                 <a:tc>
                   <a:txBody>
                     <a:bodyPr wrap="square"/>
@@ -20804,13 +20804,13 @@
                         </a:lnSpc>
                       </a:pPr>
                       <a:r>
-                        <a:rPr b="1" sz="1260" i="0">
+                        <a:rPr b="1" sz="1365" i="0">
                           <a:solidFill>
                             <a:srgbClr val="E6ECF7"/>
                           </a:solidFill>
                           <a:latin typeface="Arial"/>
                         </a:rPr>
-                        <a:t>Day 1</a:t>
+                        <a:t>03</a:t>
                       </a:r>
                     </a:p>
                   </a:txBody>
@@ -20831,13 +20831,13 @@
                         </a:lnSpc>
                       </a:pPr>
                       <a:r>
-                        <a:rPr b="0" sz="1260" i="0">
+                        <a:rPr b="0" sz="1365" i="0">
                           <a:solidFill>
                             <a:srgbClr val="E6ECF7"/>
                           </a:solidFill>
                           <a:latin typeface="Arial"/>
                         </a:rPr>
-                        <a:t>Dependency and secret scanning</a:t>
+                        <a:t>Require those checks, require a pull request, stop direct pushes, dismiss stale approvals</a:t>
                       </a:r>
                     </a:p>
                   </a:txBody>
@@ -20858,13 +20858,13 @@
                         </a:lnSpc>
                       </a:pPr>
                       <a:r>
-                        <a:rPr b="0" sz="1260" i="0">
+                        <a:rPr b="0" sz="1365" i="0">
                           <a:solidFill>
                             <a:srgbClr val="E6ECF7"/>
                           </a:solidFill>
                           <a:latin typeface="Arial"/>
                         </a:rPr>
-                        <a:t>.github/dependabot.yml, repository settings</a:t>
+                        <a:t>Branch protection, or a ruleset</a:t>
                       </a:r>
                     </a:p>
                   </a:txBody>
@@ -20875,7 +20875,7 @@
                   </a:tcPr>
                 </a:tc>
               </a:tr>
-              <a:tr h="356616">
+              <a:tr h="372618">
                 <a:tc>
                   <a:txBody>
                     <a:bodyPr wrap="square"/>
@@ -20887,13 +20887,13 @@
                         </a:lnSpc>
                       </a:pPr>
                       <a:r>
-                        <a:rPr b="1" sz="1260" i="0">
+                        <a:rPr b="1" sz="1365" i="0">
                           <a:solidFill>
                             <a:srgbClr val="E6ECF7"/>
                           </a:solidFill>
                           <a:latin typeface="Arial"/>
                         </a:rPr>
-                        <a:t>Day 2</a:t>
+                        <a:t>04</a:t>
                       </a:r>
                     </a:p>
                   </a:txBody>
@@ -20914,173 +20914,7 @@
                         </a:lnSpc>
                       </a:pPr>
                       <a:r>
-                        <a:rPr b="0" sz="1260" i="0">
-                          <a:solidFill>
-                            <a:srgbClr val="E6ECF7"/>
-                          </a:solidFill>
-                          <a:latin typeface="Arial"/>
-                        </a:rPr>
-                        <a:t>Require those checks, require a pull request, stop direct pushes</a:t>
-                      </a:r>
-                    </a:p>
-                  </a:txBody>
-                  <a:tcPr marL="73152" marR="73152" marT="45720" marB="45720" anchor="t">
-                    <a:solidFill>
-                      <a:srgbClr val="121A2A"/>
-                    </a:solidFill>
-                  </a:tcPr>
-                </a:tc>
-                <a:tc>
-                  <a:txBody>
-                    <a:bodyPr wrap="square"/>
-                    <a:lstStyle/>
-                    <a:p>
-                      <a:pPr>
-                        <a:lnSpc>
-                          <a:spcPct val="110000"/>
-                        </a:lnSpc>
-                      </a:pPr>
-                      <a:r>
-                        <a:rPr b="0" sz="1260" i="0">
-                          <a:solidFill>
-                            <a:srgbClr val="E6ECF7"/>
-                          </a:solidFill>
-                          <a:latin typeface="Arial"/>
-                        </a:rPr>
-                        <a:t>Branch protection, or a ruleset</a:t>
-                      </a:r>
-                    </a:p>
-                  </a:txBody>
-                  <a:tcPr marL="73152" marR="73152" marT="45720" marB="45720" anchor="t">
-                    <a:solidFill>
-                      <a:srgbClr val="121A2A"/>
-                    </a:solidFill>
-                  </a:tcPr>
-                </a:tc>
-              </a:tr>
-              <a:tr h="356616">
-                <a:tc>
-                  <a:txBody>
-                    <a:bodyPr wrap="square"/>
-                    <a:lstStyle/>
-                    <a:p>
-                      <a:pPr>
-                        <a:lnSpc>
-                          <a:spcPct val="110000"/>
-                        </a:lnSpc>
-                      </a:pPr>
-                      <a:r>
-                        <a:rPr b="1" sz="1260" i="0">
-                          <a:solidFill>
-                            <a:srgbClr val="E6ECF7"/>
-                          </a:solidFill>
-                          <a:latin typeface="Arial"/>
-                        </a:rPr>
-                        <a:t>Day 2</a:t>
-                      </a:r>
-                    </a:p>
-                  </a:txBody>
-                  <a:tcPr marL="73152" marR="73152" marT="45720" marB="45720" anchor="t">
-                    <a:solidFill>
-                      <a:srgbClr val="151D2E"/>
-                    </a:solidFill>
-                  </a:tcPr>
-                </a:tc>
-                <a:tc>
-                  <a:txBody>
-                    <a:bodyPr wrap="square"/>
-                    <a:lstStyle/>
-                    <a:p>
-                      <a:pPr>
-                        <a:lnSpc>
-                          <a:spcPct val="110000"/>
-                        </a:lnSpc>
-                      </a:pPr>
-                      <a:r>
-                        <a:rPr b="0" sz="1260" i="0">
-                          <a:solidFill>
-                            <a:srgbClr val="E6ECF7"/>
-                          </a:solidFill>
-                          <a:latin typeface="Arial"/>
-                        </a:rPr>
-                        <a:t>Dismiss stale approvals when new commits land</a:t>
-                      </a:r>
-                    </a:p>
-                  </a:txBody>
-                  <a:tcPr marL="73152" marR="73152" marT="45720" marB="45720" anchor="t">
-                    <a:solidFill>
-                      <a:srgbClr val="151D2E"/>
-                    </a:solidFill>
-                  </a:tcPr>
-                </a:tc>
-                <a:tc>
-                  <a:txBody>
-                    <a:bodyPr wrap="square"/>
-                    <a:lstStyle/>
-                    <a:p>
-                      <a:pPr>
-                        <a:lnSpc>
-                          <a:spcPct val="110000"/>
-                        </a:lnSpc>
-                      </a:pPr>
-                      <a:r>
-                        <a:rPr b="0" sz="1260" i="0">
-                          <a:solidFill>
-                            <a:srgbClr val="E6ECF7"/>
-                          </a:solidFill>
-                          <a:latin typeface="Arial"/>
-                        </a:rPr>
-                        <a:t>The same place</a:t>
-                      </a:r>
-                    </a:p>
-                  </a:txBody>
-                  <a:tcPr marL="73152" marR="73152" marT="45720" marB="45720" anchor="t">
-                    <a:solidFill>
-                      <a:srgbClr val="151D2E"/>
-                    </a:solidFill>
-                  </a:tcPr>
-                </a:tc>
-              </a:tr>
-              <a:tr h="356616">
-                <a:tc>
-                  <a:txBody>
-                    <a:bodyPr wrap="square"/>
-                    <a:lstStyle/>
-                    <a:p>
-                      <a:pPr>
-                        <a:lnSpc>
-                          <a:spcPct val="110000"/>
-                        </a:lnSpc>
-                      </a:pPr>
-                      <a:r>
-                        <a:rPr b="1" sz="1260" i="0">
-                          <a:solidFill>
-                            <a:srgbClr val="E6ECF7"/>
-                          </a:solidFill>
-                          <a:latin typeface="Arial"/>
-                        </a:rPr>
-                        <a:t>Day 3</a:t>
-                      </a:r>
-                    </a:p>
-                  </a:txBody>
-                  <a:tcPr marL="73152" marR="73152" marT="45720" marB="45720" anchor="t">
-                    <a:solidFill>
-                      <a:srgbClr val="121A2A"/>
-                    </a:solidFill>
-                  </a:tcPr>
-                </a:tc>
-                <a:tc>
-                  <a:txBody>
-                    <a:bodyPr wrap="square"/>
-                    <a:lstStyle/>
-                    <a:p>
-                      <a:pPr>
-                        <a:lnSpc>
-                          <a:spcPct val="110000"/>
-                        </a:lnSpc>
-                      </a:pPr>
-                      <a:r>
-                        <a:rPr b="0" sz="1260" i="0">
+                        <a:rPr b="0" sz="1365" i="0">
                           <a:solidFill>
                             <a:srgbClr val="E6ECF7"/>
                           </a:solidFill>
@@ -21107,7 +20941,7 @@
                         </a:lnSpc>
                       </a:pPr>
                       <a:r>
-                        <a:rPr b="0" sz="1260" i="0">
+                        <a:rPr b="0" sz="1365" i="0">
                           <a:solidFill>
                             <a:srgbClr val="E6ECF7"/>
                           </a:solidFill>
@@ -21124,7 +20958,7 @@
                   </a:tcPr>
                 </a:tc>
               </a:tr>
-              <a:tr h="356616">
+              <a:tr h="372618">
                 <a:tc>
                   <a:txBody>
                     <a:bodyPr wrap="square"/>
@@ -21136,13 +20970,13 @@
                         </a:lnSpc>
                       </a:pPr>
                       <a:r>
-                        <a:rPr b="1" sz="1260" i="0">
+                        <a:rPr b="1" sz="1365" i="0">
                           <a:solidFill>
                             <a:srgbClr val="E6ECF7"/>
                           </a:solidFill>
                           <a:latin typeface="Arial"/>
                         </a:rPr>
-                        <a:t>Day 3</a:t>
+                        <a:t>05</a:t>
                       </a:r>
                     </a:p>
                   </a:txBody>
@@ -21163,7 +20997,7 @@
                         </a:lnSpc>
                       </a:pPr>
                       <a:r>
-                        <a:rPr b="0" sz="1260" i="0">
+                        <a:rPr b="0" sz="1365" i="0">
                           <a:solidFill>
                             <a:srgbClr val="E6ECF7"/>
                           </a:solidFill>
@@ -21190,7 +21024,7 @@
                         </a:lnSpc>
                       </a:pPr>
                       <a:r>
-                        <a:rPr b="0" sz="1260" i="0">
+                        <a:rPr b="0" sz="1365" i="0">
                           <a:solidFill>
                             <a:srgbClr val="E6ECF7"/>
                           </a:solidFill>
@@ -21207,7 +21041,7 @@
                   </a:tcPr>
                 </a:tc>
               </a:tr>
-              <a:tr h="356616">
+              <a:tr h="372618">
                 <a:tc>
                   <a:txBody>
                     <a:bodyPr wrap="square"/>
@@ -21219,13 +21053,13 @@
                         </a:lnSpc>
                       </a:pPr>
                       <a:r>
-                        <a:rPr b="1" sz="1260" i="0">
+                        <a:rPr b="1" sz="1365" i="0">
                           <a:solidFill>
                             <a:srgbClr val="E6ECF7"/>
                           </a:solidFill>
                           <a:latin typeface="Arial"/>
                         </a:rPr>
-                        <a:t>Day 4</a:t>
+                        <a:t>06</a:t>
                       </a:r>
                     </a:p>
                   </a:txBody>
@@ -21246,7 +21080,7 @@
                         </a:lnSpc>
                       </a:pPr>
                       <a:r>
-                        <a:rPr b="0" sz="1260" i="0">
+                        <a:rPr b="0" sz="1365" i="0">
                           <a:solidFill>
                             <a:srgbClr val="E6ECF7"/>
                           </a:solidFill>
@@ -21273,7 +21107,7 @@
                         </a:lnSpc>
                       </a:pPr>
                       <a:r>
-                        <a:rPr b="0" sz="1260" i="0">
+                        <a:rPr b="0" sz="1365" i="0">
                           <a:solidFill>
                             <a:srgbClr val="E6ECF7"/>
                           </a:solidFill>
@@ -21290,7 +21124,7 @@
                   </a:tcPr>
                 </a:tc>
               </a:tr>
-              <a:tr h="356616">
+              <a:tr h="372618">
                 <a:tc>
                   <a:txBody>
                     <a:bodyPr wrap="square"/>
@@ -21302,13 +21136,13 @@
                         </a:lnSpc>
                       </a:pPr>
                       <a:r>
-                        <a:rPr b="1" sz="1260" i="0">
+                        <a:rPr b="1" sz="1365" i="0">
                           <a:solidFill>
                             <a:srgbClr val="E6ECF7"/>
                           </a:solidFill>
                           <a:latin typeface="Arial"/>
                         </a:rPr>
-                        <a:t>Monthly</a:t>
+                        <a:t>07</a:t>
                       </a:r>
                     </a:p>
                   </a:txBody>
@@ -21329,7 +21163,7 @@
                         </a:lnSpc>
                       </a:pPr>
                       <a:r>
-                        <a:rPr b="0" sz="1260" i="0">
+                        <a:rPr b="0" sz="1365" i="0">
                           <a:solidFill>
                             <a:srgbClr val="E6ECF7"/>
                           </a:solidFill>
@@ -21356,7 +21190,7 @@
                         </a:lnSpc>
                       </a:pPr>
                       <a:r>
-                        <a:rPr b="0" sz="1260" i="0">
+                        <a:rPr b="0" sz="1365" i="0">
                           <a:solidFill>
                             <a:srgbClr val="E6ECF7"/>
                           </a:solidFill>
@@ -21385,8 +21219,8 @@
         </p:nvSpPr>
         <p:spPr>
           <a:xfrm>
-            <a:off x="548640" y="5520232"/>
-            <a:ext cx="11094415" cy="725119"/>
+            <a:off x="548640" y="5329707"/>
+            <a:ext cx="11094415" cy="785545"/>
           </a:xfrm>
           <a:prstGeom prst="rect">
             <a:avLst/>
@@ -21408,16 +21242,16 @@
               </a:spcAft>
             </a:pPr>
             <a:r>
-              <a:rPr b="0" sz="1560" i="0">
+              <a:rPr b="0" sz="1690" i="0">
                 <a:solidFill>
                   <a:srgbClr val="E6ECF7"/>
                 </a:solidFill>
                 <a:latin typeface="Arial"/>
               </a:rPr>
-              <a:t>Every line but the last is a file or a setting, copied to the next repository in minutes and reverted by deleting a line. The last one is half an hour a month. </a:t>
-            </a:r>
-            <a:r>
-              <a:rPr b="1" sz="1560" i="0">
+              <a:t>Every step but the last is a file or a setting, copied to the next repository in minutes and reverted by deleting a line. The last one is half an hour a month. </a:t>
+            </a:r>
+            <a:r>
+              <a:rPr b="1" sz="1690" i="0">
                 <a:solidFill>
                   <a:srgbClr val="E6ECF7"/>
                 </a:solidFill>

--- a/presentations/what-is-the-second-pair-of-eyes-for.pptx
+++ b/presentations/what-is-the-second-pair-of-eyes-for.pptx
@@ -39,6 +39,7 @@
     <p:sldId id="287" r:id="rId39"/>
     <p:sldId id="288" r:id="rId40"/>
     <p:sldId id="289" r:id="rId41"/>
+    <p:sldId id="290" r:id="rId42"/>
   </p:sldIdLst>
   <p:sldSz cx="12191695" cy="6858000" type="screen4x3"/>
   <p:notesSz cx="6858000" cy="9144000"/>
@@ -1795,7 +1796,7 @@
           <a:lstStyle/>
           <a:p>
             <a:r>
-              <a:t>This is the author's half of four eyes, in the one place a repository can host it. A pull_request_template.md in the .github folder puts the same questions in front of every pull request. The wording matters more than the existence. Chapter 04 cited a 2026 study of 80.000 pull requests across 156 projects where description elements made largely negligible difference to review outcomes, with one exception: a description that explains the code and asks for a specific kind of feedback. So the template asks for both. A template that only asks for a summary is asking for the thing the study found does not matter. One honest limit: a template is a prompt, not a control. GitHub prefills it and nothing stops someone deleting it. Enforcing it takes a CI check, and an enforced field is exactly where N/A appears.</a:t>
+              <a:t>Steps 3 and 4 quietly assume the reviewer can read what they are given. This is the step that makes that true. Kemerer and Paulk measured in 2009 what happens to a reviewer who speeds up: up to 200 lines an hour they found most of the defects, faster than that about half. One in four AI-written pull requests now runs past 400 lines, which is two hours of one person's attention for a single change. Adyen, the one regulated payment company in this deck with a published account, keeps its automated changes under five files on average. Make the CI check a warning everywhere and a failure on the repositories the tier marked as carrying risk. Two honest limits: a size threshold is not a quality bar, and no number makes a change worth reading. And the draft-until-green rule is mine rather than a finding.</a:t>
             </a:r>
           </a:p>
         </p:txBody>
@@ -1865,7 +1866,7 @@
           <a:lstStyle/>
           <a:p>
             <a:r>
-              <a:t>The last row is the one nothing else covers. Every row above it can be in place and still stop working: the checks stay green, the approvals keep arriving, the template keeps getting filled in, and none of that requires anyone to have read the change. What to look for in those ten pull requests: approvals that arrived a minute after opening on changes too long to read in a minute, template sections filled with N/A or the branch name, one person approving everything, code owners approving paths they never otherwise touch. That is Adyen's fix from chapter 02, the one regulated payment company in this deck, whose reviewers said they had started to pattern-match after a dozen near-identical changes. At one-repository scale it is a recurring calendar entry rather than a tool: read a sample of merged pull requests and ask whether the approvals on them meant anything. On leverage and freedom: the workflow file and the template are copied to the next repository in minutes, so the second repository costs a fraction of the first. Each item is reverted by deleting a line, with no vendor to ask. What the list cannot do is the job chapter 01 found underneath all three: decide whether the change is wanted. Days 1 to 3 make that decision cheaper to reach, day 4 gives the decider something to read, and the last row checks that the decision is still being made. None of them makes it. And I owe this argument the check in the last line: I do not know how many of these settings are already on in our repositories.</a:t>
+              <a:t>This is the author's half of four eyes, in the one place a repository can host it. A pull_request_template.md in the .github folder puts the same questions in front of every pull request. The wording matters more than the existence. Chapter 04 cited a 2026 study of 80.000 pull requests across 156 projects where description elements made largely negligible difference to review outcomes, with one exception: a description that explains the code and asks for a specific kind of feedback. So the template asks for both. A template that only asks for a summary is asking for the thing the study found does not matter. One honest limit: a template is a prompt, not a control. GitHub prefills it and nothing stops someone deleting it. Enforcing it takes a CI check, and an enforced field is exactly where N/A appears.</a:t>
             </a:r>
           </a:p>
         </p:txBody>
@@ -1935,7 +1936,7 @@
           <a:lstStyle/>
           <a:p>
             <a:r>
-              <a:t>Two slides. The first is the answer to the title question. The second is where I hand it back to you.</a:t>
+              <a:t>The last row is the one nothing else covers. Every row above it can be in place and still stop working: the checks stay green, the approvals keep arriving, the template keeps getting filled in, and none of that requires anyone to have read the change. What to look for in those ten pull requests: approvals that arrived a minute after opening on changes too long to read in a minute, template sections filled with N/A or the branch name, one person approving everything, code owners approving paths they never otherwise touch. That is Adyen's fix from chapter 02, the one regulated payment company in this deck, whose reviewers said they had started to pattern-match after a dozen near-identical changes. At one-repository scale it is a recurring calendar entry rather than a tool: read a sample of merged pull requests and ask whether the approvals on them meant anything. On leverage and freedom: the workflow file and the template are copied to the next repository in minutes, so the second repository costs a fraction of the first. Each item is reverted by deleting a line, with no vendor to ask. What the list cannot do is the job chapter 01 found underneath all three: decide whether the change is wanted. Days 1 to 3 make that decision cheaper to reach, day 4 gives the decider something to read, and the last row checks that the decision is still being made. None of them makes it. And I owe this argument the check in the last line: I do not know how many of these settings are already on in our repositories.</a:t>
             </a:r>
           </a:p>
         </p:txBody>
@@ -2005,7 +2006,7 @@
           <a:lstStyle/>
           <a:p>
             <a:r>
-              <a:t>The queue gets shorter by turning on what is already there, centralizing everything mechanical, giving that machinery its own log of approved, rejected and why, the way secret scanning already logs it, and tiering by what the repository touches with a logged break-glass rather than an org-wide switch nobody downstream can turn off. Quality goes up with real evidence in exactly one place: a different model family reviews the change. It might go up in two more, the author's half of four eyes and Adyen's periodic look at already-approved changes to catch the gate going stale, but both are design problems here, not results. Restricting how much AI our engineers may use is set aside, not rejected: Godot, Rust and curl defend against low-trust external contributors, which is a different problem from employed engineers using a tool they were given. The approval itself stays with a human who is independent of whoever implemented the change, including when the change was written by an AI. Two honest notes. The rules are silent on AI approval, not against it, so this is the cautious reading of that silence and not the only one allowed. And whether same-team approval is independent enough is a question this deck raised on slide 7 and never answered.</a:t>
+              <a:t>Two slides. The first is the answer to the title question. The second is where I hand it back to you.</a:t>
             </a:r>
           </a:p>
         </p:txBody>
@@ -2101,6 +2102,76 @@
 </file>
 
 <file path=ppt/notesSlides/notesSlide30.xml><?xml version="1.0" encoding="utf-8"?>
+<p:notes xmlns:a="http://schemas.openxmlformats.org/drawingml/2006/main" xmlns:p="http://schemas.openxmlformats.org/presentationml/2006/main" xmlns:r="http://schemas.openxmlformats.org/officeDocument/2006/relationships">
+  <p:cSld>
+    <p:spTree>
+      <p:nvGrpSpPr>
+        <p:cNvPr id="1" name=""/>
+        <p:cNvGrpSpPr/>
+        <p:nvPr/>
+      </p:nvGrpSpPr>
+      <p:grpSpPr>
+        <a:xfrm>
+          <a:off x="0" y="0"/>
+          <a:ext cx="0" cy="0"/>
+          <a:chOff x="0" y="0"/>
+          <a:chExt cx="0" cy="0"/>
+        </a:xfrm>
+      </p:grpSpPr>
+      <p:sp>
+        <p:nvSpPr>
+          <p:cNvPr id="2" name="Slide Image Placeholder 1"/>
+          <p:cNvSpPr>
+            <a:spLocks noGrp="1"/>
+          </p:cNvSpPr>
+          <p:nvPr>
+            <p:ph type="sldImg" idx="2"/>
+          </p:nvPr>
+        </p:nvSpPr>
+        <p:spPr/>
+      </p:sp>
+      <p:sp>
+        <p:nvSpPr>
+          <p:cNvPr id="3" name="Notes Placeholder 2"/>
+          <p:cNvSpPr>
+            <a:spLocks noGrp="1"/>
+          </p:cNvSpPr>
+          <p:nvPr>
+            <p:ph type="body" idx="3" sz="quarter"/>
+          </p:nvPr>
+        </p:nvSpPr>
+        <p:spPr/>
+        <p:txBody>
+          <a:bodyPr/>
+          <a:lstStyle/>
+          <a:p>
+            <a:r>
+              <a:t>The queue gets shorter by turning on what is already there, centralizing everything mechanical, giving that machinery its own log of approved, rejected and why, the way secret scanning already logs it, and tiering by what the repository touches with a logged break-glass rather than an org-wide switch nobody downstream can turn off. Quality goes up with real evidence in exactly one place: a different model family reviews the change. It might go up in two more, the author's half of four eyes and Adyen's periodic look at already-approved changes to catch the gate going stale, but both are design problems here, not results. Restricting how much AI our engineers may use is set aside, not rejected: Godot, Rust and curl defend against low-trust external contributors, which is a different problem from employed engineers using a tool they were given. The approval itself stays with a human who is independent of whoever implemented the change, including when the change was written by an AI. Two honest notes. The rules are silent on AI approval, not against it, so this is the cautious reading of that silence and not the only one allowed. And whether same-team approval is independent enough is a question this deck raised on slide 7 and never answered.</a:t>
+            </a:r>
+          </a:p>
+        </p:txBody>
+      </p:sp>
+      <p:sp>
+        <p:nvSpPr>
+          <p:cNvPr id="4" name="Slide Number Placeholder 3"/>
+          <p:cNvSpPr>
+            <a:spLocks noGrp="1"/>
+          </p:cNvSpPr>
+          <p:nvPr>
+            <p:ph type="sldNum" idx="5" sz="quarter"/>
+          </p:nvPr>
+        </p:nvSpPr>
+        <p:spPr/>
+      </p:sp>
+    </p:spTree>
+  </p:cSld>
+  <p:clrMapOvr>
+    <a:masterClrMapping/>
+  </p:clrMapOvr>
+</p:notes>
+</file>
+
+<file path=ppt/notesSlides/notesSlide31.xml><?xml version="1.0" encoding="utf-8"?>
 <p:notes xmlns:a="http://schemas.openxmlformats.org/drawingml/2006/main" xmlns:p="http://schemas.openxmlformats.org/presentationml/2006/main" xmlns:r="http://schemas.openxmlformats.org/officeDocument/2006/relationships">
   <p:cSld>
     <p:spTree>
@@ -17391,7 +17462,7 @@
                 </a:solidFill>
                 <a:latin typeface="Arial"/>
               </a:rPr>
-              <a:t>Ask the author for what no check can see</a:t>
+              <a:t>Keep the change small enough to be read</a:t>
             </a:r>
           </a:p>
         </p:txBody>
@@ -17477,6 +17548,92 @@
                 </a:solidFill>
                 <a:latin typeface="Arial"/>
               </a:rPr>
+              <a:t>Ask the author for what no check can see</a:t>
+            </a:r>
+          </a:p>
+        </p:txBody>
+      </p:sp>
+      <p:sp>
+        <p:nvSpPr>
+          <p:cNvPr id="19" name="Rectangle 18"/>
+          <p:cNvSpPr/>
+          <p:nvPr/>
+        </p:nvSpPr>
+        <p:spPr>
+          <a:xfrm>
+            <a:off x="2697480" y="5455411"/>
+            <a:ext cx="146304" cy="18288"/>
+          </a:xfrm>
+          <a:prstGeom prst="rect">
+            <a:avLst/>
+          </a:prstGeom>
+          <a:solidFill>
+            <a:srgbClr val="E8A33D"/>
+          </a:solidFill>
+          <a:ln>
+            <a:noFill/>
+          </a:ln>
+          <a:effectLst/>
+        </p:spPr>
+        <p:style>
+          <a:lnRef idx="1">
+            <a:schemeClr val="accent1"/>
+          </a:lnRef>
+          <a:fillRef idx="3">
+            <a:schemeClr val="accent1"/>
+          </a:fillRef>
+          <a:effectRef idx="2">
+            <a:schemeClr val="accent1"/>
+          </a:effectRef>
+          <a:fontRef idx="minor">
+            <a:schemeClr val="lt1"/>
+          </a:fontRef>
+        </p:style>
+        <p:txBody>
+          <a:bodyPr rtlCol="0" anchor="ctr"/>
+          <a:lstStyle/>
+          <a:p>
+            <a:pPr algn="ctr"/>
+          </a:p>
+        </p:txBody>
+      </p:sp>
+      <p:sp>
+        <p:nvSpPr>
+          <p:cNvPr id="20" name="TextBox 19"/>
+          <p:cNvSpPr txBox="1"/>
+          <p:nvPr/>
+        </p:nvSpPr>
+        <p:spPr>
+          <a:xfrm>
+            <a:off x="2971800" y="5391403"/>
+            <a:ext cx="8671255" cy="219456"/>
+          </a:xfrm>
+          <a:prstGeom prst="rect">
+            <a:avLst/>
+          </a:prstGeom>
+          <a:noFill/>
+        </p:spPr>
+        <p:txBody>
+          <a:bodyPr wrap="square" lIns="0" rIns="0" tIns="0" bIns="0" anchor="t">
+            <a:spAutoFit/>
+          </a:bodyPr>
+          <a:lstStyle/>
+          <a:p>
+            <a:pPr algn="l">
+              <a:lnSpc>
+                <a:spcPct val="115000"/>
+              </a:lnSpc>
+              <a:spcAft>
+                <a:spcPts val="0"/>
+              </a:spcAft>
+            </a:pPr>
+            <a:r>
+              <a:rPr b="0" sz="1200" i="0">
+                <a:solidFill>
+                  <a:srgbClr val="98A4BC"/>
+                </a:solidFill>
+                <a:latin typeface="Arial"/>
+              </a:rPr>
               <a:t>Where each step lives</a:t>
             </a:r>
           </a:p>
@@ -17484,7 +17641,7 @@
       </p:sp>
       <p:sp>
         <p:nvSpPr>
-          <p:cNvPr id="19" name="Oval 18"/>
+          <p:cNvPr id="21" name="Oval 20"/>
           <p:cNvSpPr/>
           <p:nvPr/>
         </p:nvSpPr>
@@ -17528,7 +17685,7 @@
       </p:sp>
       <p:sp>
         <p:nvSpPr>
-          <p:cNvPr id="20" name="Rounded Rectangle 19"/>
+          <p:cNvPr id="22" name="Rounded Rectangle 21"/>
           <p:cNvSpPr/>
           <p:nvPr/>
         </p:nvSpPr>
@@ -19850,7 +20007,7 @@
                 </a:solidFill>
                 <a:latin typeface="Georgia"/>
               </a:rPr>
-              <a:t>Ask the author for what no check can see</a:t>
+              <a:t>Keep the change small enough to be read</a:t>
             </a:r>
           </a:p>
         </p:txBody>
@@ -19991,8 +20148,8 @@
         </p:nvSpPr>
         <p:spPr>
           <a:xfrm>
-            <a:off x="548640" y="1946588"/>
-            <a:ext cx="11094415" cy="261848"/>
+            <a:off x="548640" y="1716430"/>
+            <a:ext cx="11094415" cy="523697"/>
           </a:xfrm>
           <a:prstGeom prst="rect">
             <a:avLst/>
@@ -20020,21 +20177,69 @@
                 </a:solidFill>
                 <a:latin typeface="Arial"/>
               </a:rPr>
-              <a:t>One pull request template. The same questions in front of every change.</a:t>
-            </a:r>
-          </a:p>
-        </p:txBody>
-      </p:sp>
-      <p:sp>
-        <p:nvSpPr>
-          <p:cNvPr id="9" name="TextBox 8"/>
+              <a:t>The reviewer named a moment ago has to be able to do the job. A change nobody can read in one sitting gets approved anyway.</a:t>
+            </a:r>
+          </a:p>
+        </p:txBody>
+      </p:sp>
+      <p:sp>
+        <p:nvSpPr>
+          <p:cNvPr id="9" name="Rounded Rectangle 8"/>
+          <p:cNvSpPr/>
+          <p:nvPr/>
+        </p:nvSpPr>
+        <p:spPr>
+          <a:xfrm>
+            <a:off x="548640" y="2761335"/>
+            <a:ext cx="3576218" cy="1581150"/>
+          </a:xfrm>
+          <a:prstGeom prst="roundRect">
+            <a:avLst>
+              <a:gd name="adj" fmla="val 4000"/>
+            </a:avLst>
+          </a:prstGeom>
+          <a:solidFill>
+            <a:srgbClr val="151D2E"/>
+          </a:solidFill>
+          <a:ln w="9525">
+            <a:solidFill>
+              <a:srgbClr val="35415A"/>
+            </a:solidFill>
+          </a:ln>
+          <a:effectLst/>
+        </p:spPr>
+        <p:style>
+          <a:lnRef idx="1">
+            <a:schemeClr val="accent1"/>
+          </a:lnRef>
+          <a:fillRef idx="3">
+            <a:schemeClr val="accent1"/>
+          </a:fillRef>
+          <a:effectRef idx="2">
+            <a:schemeClr val="accent1"/>
+          </a:effectRef>
+          <a:fontRef idx="minor">
+            <a:schemeClr val="lt1"/>
+          </a:fontRef>
+        </p:style>
+        <p:txBody>
+          <a:bodyPr rtlCol="0" anchor="ctr"/>
+          <a:lstStyle/>
+          <a:p>
+            <a:pPr algn="ctr"/>
+          </a:p>
+        </p:txBody>
+      </p:sp>
+      <p:sp>
+        <p:nvSpPr>
+          <p:cNvPr id="10" name="TextBox 9"/>
           <p:cNvSpPr txBox="1"/>
           <p:nvPr/>
         </p:nvSpPr>
         <p:spPr>
           <a:xfrm>
-            <a:off x="548640" y="2729644"/>
-            <a:ext cx="11094415" cy="1152524"/>
+            <a:off x="731520" y="2889351"/>
+            <a:ext cx="3210458" cy="554736"/>
           </a:xfrm>
           <a:prstGeom prst="rect">
             <a:avLst/>
@@ -20042,133 +20247,346 @@
           <a:noFill/>
         </p:spPr>
         <p:txBody>
-          <a:bodyPr wrap="square" lIns="0" rIns="0" tIns="0" bIns="0">
+          <a:bodyPr wrap="square" lIns="0" rIns="0" tIns="0" bIns="0" anchor="t">
             <a:spAutoFit/>
           </a:bodyPr>
           <a:lstStyle/>
           <a:p>
-            <a:pPr>
-              <a:lnSpc>
-                <a:spcPct val="115000"/>
-              </a:lnSpc>
-              <a:spcAft>
-                <a:spcPts val="400"/>
-              </a:spcAft>
-            </a:pPr>
-            <a:r>
-              <a:rPr sz="1625" b="1">
+            <a:pPr algn="l">
+              <a:lnSpc>
+                <a:spcPct val="110000"/>
+              </a:lnSpc>
+              <a:spcAft>
+                <a:spcPts val="0"/>
+              </a:spcAft>
+            </a:pPr>
+            <a:r>
+              <a:rPr b="1" sz="3120" i="0">
+                <a:solidFill>
+                  <a:srgbClr val="29D3E0"/>
+                </a:solidFill>
+                <a:latin typeface="Arial"/>
+              </a:rPr>
+              <a:t>200 lines / h</a:t>
+            </a:r>
+          </a:p>
+        </p:txBody>
+      </p:sp>
+      <p:sp>
+        <p:nvSpPr>
+          <p:cNvPr id="11" name="TextBox 10"/>
+          <p:cNvSpPr txBox="1"/>
+          <p:nvPr/>
+        </p:nvSpPr>
+        <p:spPr>
+          <a:xfrm>
+            <a:off x="731520" y="3517239"/>
+            <a:ext cx="3210458" cy="624078"/>
+          </a:xfrm>
+          <a:prstGeom prst="rect">
+            <a:avLst/>
+          </a:prstGeom>
+          <a:noFill/>
+        </p:spPr>
+        <p:txBody>
+          <a:bodyPr wrap="square" lIns="0" rIns="0" tIns="0" bIns="0" anchor="t">
+            <a:spAutoFit/>
+          </a:bodyPr>
+          <a:lstStyle/>
+          <a:p>
+            <a:pPr algn="l">
+              <a:lnSpc>
+                <a:spcPct val="120000"/>
+              </a:lnSpc>
+              <a:spcAft>
+                <a:spcPts val="0"/>
+              </a:spcAft>
+            </a:pPr>
+            <a:r>
+              <a:rPr b="0" sz="1365" i="0">
+                <a:solidFill>
+                  <a:srgbClr val="98A4BC"/>
+                </a:solidFill>
+                <a:latin typeface="Arial"/>
+              </a:rPr>
+              <a:t>beyond this, reviewers found about half the defects</a:t>
+            </a:r>
+          </a:p>
+        </p:txBody>
+      </p:sp>
+      <p:sp>
+        <p:nvSpPr>
+          <p:cNvPr id="12" name="Rounded Rectangle 11"/>
+          <p:cNvSpPr/>
+          <p:nvPr/>
+        </p:nvSpPr>
+        <p:spPr>
+          <a:xfrm>
+            <a:off x="4307738" y="2761335"/>
+            <a:ext cx="3576218" cy="1581150"/>
+          </a:xfrm>
+          <a:prstGeom prst="roundRect">
+            <a:avLst>
+              <a:gd name="adj" fmla="val 4000"/>
+            </a:avLst>
+          </a:prstGeom>
+          <a:solidFill>
+            <a:srgbClr val="151D2E"/>
+          </a:solidFill>
+          <a:ln w="9525">
+            <a:solidFill>
+              <a:srgbClr val="35415A"/>
+            </a:solidFill>
+          </a:ln>
+          <a:effectLst/>
+        </p:spPr>
+        <p:style>
+          <a:lnRef idx="1">
+            <a:schemeClr val="accent1"/>
+          </a:lnRef>
+          <a:fillRef idx="3">
+            <a:schemeClr val="accent1"/>
+          </a:fillRef>
+          <a:effectRef idx="2">
+            <a:schemeClr val="accent1"/>
+          </a:effectRef>
+          <a:fontRef idx="minor">
+            <a:schemeClr val="lt1"/>
+          </a:fontRef>
+        </p:style>
+        <p:txBody>
+          <a:bodyPr rtlCol="0" anchor="ctr"/>
+          <a:lstStyle/>
+          <a:p>
+            <a:pPr algn="ctr"/>
+          </a:p>
+        </p:txBody>
+      </p:sp>
+      <p:sp>
+        <p:nvSpPr>
+          <p:cNvPr id="13" name="TextBox 12"/>
+          <p:cNvSpPr txBox="1"/>
+          <p:nvPr/>
+        </p:nvSpPr>
+        <p:spPr>
+          <a:xfrm>
+            <a:off x="4490618" y="2889351"/>
+            <a:ext cx="3210458" cy="554736"/>
+          </a:xfrm>
+          <a:prstGeom prst="rect">
+            <a:avLst/>
+          </a:prstGeom>
+          <a:noFill/>
+        </p:spPr>
+        <p:txBody>
+          <a:bodyPr wrap="square" lIns="0" rIns="0" tIns="0" bIns="0" anchor="t">
+            <a:spAutoFit/>
+          </a:bodyPr>
+          <a:lstStyle/>
+          <a:p>
+            <a:pPr algn="l">
+              <a:lnSpc>
+                <a:spcPct val="110000"/>
+              </a:lnSpc>
+              <a:spcAft>
+                <a:spcPts val="0"/>
+              </a:spcAft>
+            </a:pPr>
+            <a:r>
+              <a:rPr b="1" sz="3120" i="0">
                 <a:solidFill>
                   <a:srgbClr val="E8A33D"/>
                 </a:solidFill>
                 <a:latin typeface="Arial"/>
               </a:rPr>
-              <a:t>—  </a:t>
-            </a:r>
-            <a:r>
-              <a:rPr b="0" sz="1625" i="0">
-                <a:solidFill>
-                  <a:srgbClr val="E6ECF7"/>
+              <a:t>1 in 4</a:t>
+            </a:r>
+          </a:p>
+        </p:txBody>
+      </p:sp>
+      <p:sp>
+        <p:nvSpPr>
+          <p:cNvPr id="14" name="TextBox 13"/>
+          <p:cNvSpPr txBox="1"/>
+          <p:nvPr/>
+        </p:nvSpPr>
+        <p:spPr>
+          <a:xfrm>
+            <a:off x="4490618" y="3517239"/>
+            <a:ext cx="3210458" cy="624078"/>
+          </a:xfrm>
+          <a:prstGeom prst="rect">
+            <a:avLst/>
+          </a:prstGeom>
+          <a:noFill/>
+        </p:spPr>
+        <p:txBody>
+          <a:bodyPr wrap="square" lIns="0" rIns="0" tIns="0" bIns="0" anchor="t">
+            <a:spAutoFit/>
+          </a:bodyPr>
+          <a:lstStyle/>
+          <a:p>
+            <a:pPr algn="l">
+              <a:lnSpc>
+                <a:spcPct val="120000"/>
+              </a:lnSpc>
+              <a:spcAft>
+                <a:spcPts val="0"/>
+              </a:spcAft>
+            </a:pPr>
+            <a:r>
+              <a:rPr b="0" sz="1365" i="0">
+                <a:solidFill>
+                  <a:srgbClr val="98A4BC"/>
                 </a:solidFill>
                 <a:latin typeface="Arial"/>
               </a:rPr>
-              <a:t>What changed, and why it belongs here</a:t>
-            </a:r>
-          </a:p>
-          <a:p>
-            <a:pPr>
-              <a:lnSpc>
-                <a:spcPct val="115000"/>
-              </a:lnSpc>
-              <a:spcAft>
-                <a:spcPts val="400"/>
-              </a:spcAft>
-            </a:pPr>
-            <a:r>
-              <a:rPr sz="1625" b="1">
-                <a:solidFill>
-                  <a:srgbClr val="E8A33D"/>
+              <a:t>AI-written pull requests runs past 400 lines</a:t>
+            </a:r>
+          </a:p>
+        </p:txBody>
+      </p:sp>
+      <p:sp>
+        <p:nvSpPr>
+          <p:cNvPr id="15" name="Rounded Rectangle 14"/>
+          <p:cNvSpPr/>
+          <p:nvPr/>
+        </p:nvSpPr>
+        <p:spPr>
+          <a:xfrm>
+            <a:off x="8066836" y="2761335"/>
+            <a:ext cx="3576218" cy="1581150"/>
+          </a:xfrm>
+          <a:prstGeom prst="roundRect">
+            <a:avLst>
+              <a:gd name="adj" fmla="val 4000"/>
+            </a:avLst>
+          </a:prstGeom>
+          <a:solidFill>
+            <a:srgbClr val="151D2E"/>
+          </a:solidFill>
+          <a:ln w="9525">
+            <a:solidFill>
+              <a:srgbClr val="35415A"/>
+            </a:solidFill>
+          </a:ln>
+          <a:effectLst/>
+        </p:spPr>
+        <p:style>
+          <a:lnRef idx="1">
+            <a:schemeClr val="accent1"/>
+          </a:lnRef>
+          <a:fillRef idx="3">
+            <a:schemeClr val="accent1"/>
+          </a:fillRef>
+          <a:effectRef idx="2">
+            <a:schemeClr val="accent1"/>
+          </a:effectRef>
+          <a:fontRef idx="minor">
+            <a:schemeClr val="lt1"/>
+          </a:fontRef>
+        </p:style>
+        <p:txBody>
+          <a:bodyPr rtlCol="0" anchor="ctr"/>
+          <a:lstStyle/>
+          <a:p>
+            <a:pPr algn="ctr"/>
+          </a:p>
+        </p:txBody>
+      </p:sp>
+      <p:sp>
+        <p:nvSpPr>
+          <p:cNvPr id="16" name="TextBox 15"/>
+          <p:cNvSpPr txBox="1"/>
+          <p:nvPr/>
+        </p:nvSpPr>
+        <p:spPr>
+          <a:xfrm>
+            <a:off x="8249716" y="2889351"/>
+            <a:ext cx="3210458" cy="554736"/>
+          </a:xfrm>
+          <a:prstGeom prst="rect">
+            <a:avLst/>
+          </a:prstGeom>
+          <a:noFill/>
+        </p:spPr>
+        <p:txBody>
+          <a:bodyPr wrap="square" lIns="0" rIns="0" tIns="0" bIns="0" anchor="t">
+            <a:spAutoFit/>
+          </a:bodyPr>
+          <a:lstStyle/>
+          <a:p>
+            <a:pPr algn="l">
+              <a:lnSpc>
+                <a:spcPct val="110000"/>
+              </a:lnSpc>
+              <a:spcAft>
+                <a:spcPts val="0"/>
+              </a:spcAft>
+            </a:pPr>
+            <a:r>
+              <a:rPr b="1" sz="3120" i="0">
+                <a:solidFill>
+                  <a:srgbClr val="29D3E0"/>
                 </a:solidFill>
                 <a:latin typeface="Arial"/>
               </a:rPr>
-              <a:t>—  </a:t>
-            </a:r>
-            <a:r>
-              <a:rPr b="0" sz="1625" i="0">
-                <a:solidFill>
-                  <a:srgbClr val="E6ECF7"/>
+              <a:t>&lt; 5 files</a:t>
+            </a:r>
+          </a:p>
+        </p:txBody>
+      </p:sp>
+      <p:sp>
+        <p:nvSpPr>
+          <p:cNvPr id="17" name="TextBox 16"/>
+          <p:cNvSpPr txBox="1"/>
+          <p:nvPr/>
+        </p:nvSpPr>
+        <p:spPr>
+          <a:xfrm>
+            <a:off x="8249716" y="3517239"/>
+            <a:ext cx="3210458" cy="624078"/>
+          </a:xfrm>
+          <a:prstGeom prst="rect">
+            <a:avLst/>
+          </a:prstGeom>
+          <a:noFill/>
+        </p:spPr>
+        <p:txBody>
+          <a:bodyPr wrap="square" lIns="0" rIns="0" tIns="0" bIns="0" anchor="t">
+            <a:spAutoFit/>
+          </a:bodyPr>
+          <a:lstStyle/>
+          <a:p>
+            <a:pPr algn="l">
+              <a:lnSpc>
+                <a:spcPct val="120000"/>
+              </a:lnSpc>
+              <a:spcAft>
+                <a:spcPts val="0"/>
+              </a:spcAft>
+            </a:pPr>
+            <a:r>
+              <a:rPr b="0" sz="1365" i="0">
+                <a:solidFill>
+                  <a:srgbClr val="98A4BC"/>
                 </a:solidFill>
                 <a:latin typeface="Arial"/>
               </a:rPr>
-              <a:t>What you want looked at, specifically</a:t>
-            </a:r>
-          </a:p>
-          <a:p>
-            <a:pPr>
-              <a:lnSpc>
-                <a:spcPct val="115000"/>
-              </a:lnSpc>
-              <a:spcAft>
-                <a:spcPts val="400"/>
-              </a:spcAft>
-            </a:pPr>
-            <a:r>
-              <a:rPr sz="1625" b="1">
-                <a:solidFill>
-                  <a:srgbClr val="E8A33D"/>
-                </a:solidFill>
-                <a:latin typeface="Arial"/>
-              </a:rPr>
-              <a:t>—  </a:t>
-            </a:r>
-            <a:r>
-              <a:rPr b="0" sz="1625" i="0">
-                <a:solidFill>
-                  <a:srgbClr val="E6ECF7"/>
-                </a:solidFill>
-                <a:latin typeface="Arial"/>
-              </a:rPr>
-              <a:t>How to undo it</a:t>
-            </a:r>
-          </a:p>
-          <a:p>
-            <a:pPr>
-              <a:lnSpc>
-                <a:spcPct val="115000"/>
-              </a:lnSpc>
-              <a:spcAft>
-                <a:spcPts val="400"/>
-              </a:spcAft>
-            </a:pPr>
-            <a:r>
-              <a:rPr sz="1625" b="1">
-                <a:solidFill>
-                  <a:srgbClr val="E8A33D"/>
-                </a:solidFill>
-                <a:latin typeface="Arial"/>
-              </a:rPr>
-              <a:t>—  </a:t>
-            </a:r>
-            <a:r>
-              <a:rPr b="0" sz="1625" i="0">
-                <a:solidFill>
-                  <a:srgbClr val="E6ECF7"/>
-                </a:solidFill>
-                <a:latin typeface="Arial"/>
-              </a:rPr>
-              <a:t>Which parts an agent wrote</a:t>
-            </a:r>
-          </a:p>
-        </p:txBody>
-      </p:sp>
-      <p:sp>
-        <p:nvSpPr>
-          <p:cNvPr id="10" name="Rectangle 9"/>
+              <a:t>Adyen's automated changes, which is what makes them "fast to review, easy to approve"</a:t>
+            </a:r>
+          </a:p>
+        </p:txBody>
+      </p:sp>
+      <p:sp>
+        <p:nvSpPr>
+          <p:cNvPr id="18" name="Rectangle 17"/>
           <p:cNvSpPr/>
           <p:nvPr/>
         </p:nvSpPr>
         <p:spPr>
           <a:xfrm>
-            <a:off x="548640" y="4366801"/>
+            <a:off x="548640" y="4827117"/>
             <a:ext cx="54864" cy="746861"/>
           </a:xfrm>
           <a:prstGeom prst="rect">
@@ -20206,13 +20624,13 @@
       </p:sp>
       <p:sp>
         <p:nvSpPr>
-          <p:cNvPr id="11" name="TextBox 10"/>
+          <p:cNvPr id="19" name="TextBox 18"/>
           <p:cNvSpPr txBox="1"/>
           <p:nvPr/>
         </p:nvSpPr>
         <p:spPr>
           <a:xfrm>
-            <a:off x="822959" y="4458241"/>
+            <a:off x="822959" y="4918557"/>
             <a:ext cx="10682935" cy="563981"/>
           </a:xfrm>
           <a:prstGeom prst="rect">
@@ -20241,7 +20659,7 @@
                 </a:solidFill>
                 <a:latin typeface="Arial"/>
               </a:rPr>
-              <a:t>Across 80.000 pull requests, descriptions rarely changed the review. The exception was one that explains the code and asks for a specific kind of feedback. So ask for both.</a:t>
+              <a:t>Agree a size the repository does not go past without saying why, check it in CI, and keep the pull request in draft until the checks are green.</a:t>
             </a:r>
           </a:p>
         </p:txBody>
@@ -20387,7 +20805,7 @@
                 </a:solidFill>
                 <a:latin typeface="Georgia"/>
               </a:rPr>
-              <a:t>Where each step lives</a:t>
+              <a:t>Ask the author for what no check can see</a:t>
             </a:r>
           </a:p>
         </p:txBody>
@@ -20520,6 +20938,543 @@
           </a:p>
         </p:txBody>
       </p:sp>
+      <p:sp>
+        <p:nvSpPr>
+          <p:cNvPr id="8" name="TextBox 7"/>
+          <p:cNvSpPr txBox="1"/>
+          <p:nvPr/>
+        </p:nvSpPr>
+        <p:spPr>
+          <a:xfrm>
+            <a:off x="548640" y="1946588"/>
+            <a:ext cx="11094415" cy="261848"/>
+          </a:xfrm>
+          <a:prstGeom prst="rect">
+            <a:avLst/>
+          </a:prstGeom>
+          <a:noFill/>
+        </p:spPr>
+        <p:txBody>
+          <a:bodyPr wrap="square" lIns="0" rIns="0" tIns="0" bIns="0" anchor="t">
+            <a:spAutoFit/>
+          </a:bodyPr>
+          <a:lstStyle/>
+          <a:p>
+            <a:pPr algn="l">
+              <a:lnSpc>
+                <a:spcPct val="115000"/>
+              </a:lnSpc>
+              <a:spcAft>
+                <a:spcPts val="0"/>
+              </a:spcAft>
+            </a:pPr>
+            <a:r>
+              <a:rPr b="0" sz="1690" i="0">
+                <a:solidFill>
+                  <a:srgbClr val="E6ECF7"/>
+                </a:solidFill>
+                <a:latin typeface="Arial"/>
+              </a:rPr>
+              <a:t>One pull request template. The same questions in front of every change.</a:t>
+            </a:r>
+          </a:p>
+        </p:txBody>
+      </p:sp>
+      <p:sp>
+        <p:nvSpPr>
+          <p:cNvPr id="9" name="TextBox 8"/>
+          <p:cNvSpPr txBox="1"/>
+          <p:nvPr/>
+        </p:nvSpPr>
+        <p:spPr>
+          <a:xfrm>
+            <a:off x="548640" y="2729644"/>
+            <a:ext cx="11094415" cy="1152524"/>
+          </a:xfrm>
+          <a:prstGeom prst="rect">
+            <a:avLst/>
+          </a:prstGeom>
+          <a:noFill/>
+        </p:spPr>
+        <p:txBody>
+          <a:bodyPr wrap="square" lIns="0" rIns="0" tIns="0" bIns="0">
+            <a:spAutoFit/>
+          </a:bodyPr>
+          <a:lstStyle/>
+          <a:p>
+            <a:pPr>
+              <a:lnSpc>
+                <a:spcPct val="115000"/>
+              </a:lnSpc>
+              <a:spcAft>
+                <a:spcPts val="400"/>
+              </a:spcAft>
+            </a:pPr>
+            <a:r>
+              <a:rPr sz="1625" b="1">
+                <a:solidFill>
+                  <a:srgbClr val="E8A33D"/>
+                </a:solidFill>
+                <a:latin typeface="Arial"/>
+              </a:rPr>
+              <a:t>—  </a:t>
+            </a:r>
+            <a:r>
+              <a:rPr b="0" sz="1625" i="0">
+                <a:solidFill>
+                  <a:srgbClr val="E6ECF7"/>
+                </a:solidFill>
+                <a:latin typeface="Arial"/>
+              </a:rPr>
+              <a:t>What changed, and why it belongs here</a:t>
+            </a:r>
+          </a:p>
+          <a:p>
+            <a:pPr>
+              <a:lnSpc>
+                <a:spcPct val="115000"/>
+              </a:lnSpc>
+              <a:spcAft>
+                <a:spcPts val="400"/>
+              </a:spcAft>
+            </a:pPr>
+            <a:r>
+              <a:rPr sz="1625" b="1">
+                <a:solidFill>
+                  <a:srgbClr val="E8A33D"/>
+                </a:solidFill>
+                <a:latin typeface="Arial"/>
+              </a:rPr>
+              <a:t>—  </a:t>
+            </a:r>
+            <a:r>
+              <a:rPr b="0" sz="1625" i="0">
+                <a:solidFill>
+                  <a:srgbClr val="E6ECF7"/>
+                </a:solidFill>
+                <a:latin typeface="Arial"/>
+              </a:rPr>
+              <a:t>What you want looked at, specifically</a:t>
+            </a:r>
+          </a:p>
+          <a:p>
+            <a:pPr>
+              <a:lnSpc>
+                <a:spcPct val="115000"/>
+              </a:lnSpc>
+              <a:spcAft>
+                <a:spcPts val="400"/>
+              </a:spcAft>
+            </a:pPr>
+            <a:r>
+              <a:rPr sz="1625" b="1">
+                <a:solidFill>
+                  <a:srgbClr val="E8A33D"/>
+                </a:solidFill>
+                <a:latin typeface="Arial"/>
+              </a:rPr>
+              <a:t>—  </a:t>
+            </a:r>
+            <a:r>
+              <a:rPr b="0" sz="1625" i="0">
+                <a:solidFill>
+                  <a:srgbClr val="E6ECF7"/>
+                </a:solidFill>
+                <a:latin typeface="Arial"/>
+              </a:rPr>
+              <a:t>How to undo it</a:t>
+            </a:r>
+          </a:p>
+          <a:p>
+            <a:pPr>
+              <a:lnSpc>
+                <a:spcPct val="115000"/>
+              </a:lnSpc>
+              <a:spcAft>
+                <a:spcPts val="400"/>
+              </a:spcAft>
+            </a:pPr>
+            <a:r>
+              <a:rPr sz="1625" b="1">
+                <a:solidFill>
+                  <a:srgbClr val="E8A33D"/>
+                </a:solidFill>
+                <a:latin typeface="Arial"/>
+              </a:rPr>
+              <a:t>—  </a:t>
+            </a:r>
+            <a:r>
+              <a:rPr b="0" sz="1625" i="0">
+                <a:solidFill>
+                  <a:srgbClr val="E6ECF7"/>
+                </a:solidFill>
+                <a:latin typeface="Arial"/>
+              </a:rPr>
+              <a:t>Which parts an agent wrote</a:t>
+            </a:r>
+          </a:p>
+        </p:txBody>
+      </p:sp>
+      <p:sp>
+        <p:nvSpPr>
+          <p:cNvPr id="10" name="Rectangle 9"/>
+          <p:cNvSpPr/>
+          <p:nvPr/>
+        </p:nvSpPr>
+        <p:spPr>
+          <a:xfrm>
+            <a:off x="548640" y="4366801"/>
+            <a:ext cx="54864" cy="746861"/>
+          </a:xfrm>
+          <a:prstGeom prst="rect">
+            <a:avLst/>
+          </a:prstGeom>
+          <a:solidFill>
+            <a:srgbClr val="29D3E0"/>
+          </a:solidFill>
+          <a:ln>
+            <a:noFill/>
+          </a:ln>
+          <a:effectLst/>
+        </p:spPr>
+        <p:style>
+          <a:lnRef idx="1">
+            <a:schemeClr val="accent1"/>
+          </a:lnRef>
+          <a:fillRef idx="3">
+            <a:schemeClr val="accent1"/>
+          </a:fillRef>
+          <a:effectRef idx="2">
+            <a:schemeClr val="accent1"/>
+          </a:effectRef>
+          <a:fontRef idx="minor">
+            <a:schemeClr val="lt1"/>
+          </a:fontRef>
+        </p:style>
+        <p:txBody>
+          <a:bodyPr rtlCol="0" anchor="ctr"/>
+          <a:lstStyle/>
+          <a:p>
+            <a:pPr algn="ctr"/>
+          </a:p>
+        </p:txBody>
+      </p:sp>
+      <p:sp>
+        <p:nvSpPr>
+          <p:cNvPr id="11" name="TextBox 10"/>
+          <p:cNvSpPr txBox="1"/>
+          <p:nvPr/>
+        </p:nvSpPr>
+        <p:spPr>
+          <a:xfrm>
+            <a:off x="822959" y="4458241"/>
+            <a:ext cx="10682935" cy="563981"/>
+          </a:xfrm>
+          <a:prstGeom prst="rect">
+            <a:avLst/>
+          </a:prstGeom>
+          <a:noFill/>
+        </p:spPr>
+        <p:txBody>
+          <a:bodyPr wrap="square" lIns="0" rIns="0" tIns="0" bIns="0" anchor="ctr">
+            <a:spAutoFit/>
+          </a:bodyPr>
+          <a:lstStyle/>
+          <a:p>
+            <a:pPr algn="l">
+              <a:lnSpc>
+                <a:spcPct val="115000"/>
+              </a:lnSpc>
+              <a:spcAft>
+                <a:spcPts val="0"/>
+              </a:spcAft>
+            </a:pPr>
+            <a:r>
+              <a:rPr b="1" sz="1820" i="0">
+                <a:solidFill>
+                  <a:srgbClr val="E6ECF7"/>
+                </a:solidFill>
+                <a:latin typeface="Arial"/>
+              </a:rPr>
+              <a:t>Across 80.000 pull requests, descriptions rarely changed the review. The exception was one that explains the code and asks for a specific kind of feedback. So ask for both.</a:t>
+            </a:r>
+          </a:p>
+        </p:txBody>
+      </p:sp>
+    </p:spTree>
+  </p:cSld>
+  <p:clrMapOvr>
+    <a:masterClrMapping/>
+  </p:clrMapOvr>
+</p:sld>
+</file>
+
+<file path=ppt/slides/slide28.xml><?xml version="1.0" encoding="utf-8"?>
+<p:sld xmlns:a="http://schemas.openxmlformats.org/drawingml/2006/main" xmlns:p="http://schemas.openxmlformats.org/presentationml/2006/main" xmlns:r="http://schemas.openxmlformats.org/officeDocument/2006/relationships">
+  <p:cSld>
+    <p:spTree>
+      <p:nvGrpSpPr>
+        <p:cNvPr id="1" name=""/>
+        <p:cNvGrpSpPr/>
+        <p:nvPr/>
+      </p:nvGrpSpPr>
+      <p:grpSpPr/>
+      <p:sp>
+        <p:nvSpPr>
+          <p:cNvPr id="2" name="Rectangle 1"/>
+          <p:cNvSpPr/>
+          <p:nvPr/>
+        </p:nvSpPr>
+        <p:spPr>
+          <a:xfrm>
+            <a:off x="0" y="0"/>
+            <a:ext cx="12191695" cy="6858000"/>
+          </a:xfrm>
+          <a:prstGeom prst="rect">
+            <a:avLst/>
+          </a:prstGeom>
+          <a:solidFill>
+            <a:srgbClr val="0E1420"/>
+          </a:solidFill>
+          <a:ln>
+            <a:noFill/>
+          </a:ln>
+          <a:effectLst/>
+        </p:spPr>
+        <p:style>
+          <a:lnRef idx="1">
+            <a:schemeClr val="accent1"/>
+          </a:lnRef>
+          <a:fillRef idx="3">
+            <a:schemeClr val="accent1"/>
+          </a:fillRef>
+          <a:effectRef idx="2">
+            <a:schemeClr val="accent1"/>
+          </a:effectRef>
+          <a:fontRef idx="minor">
+            <a:schemeClr val="lt1"/>
+          </a:fontRef>
+        </p:style>
+        <p:txBody>
+          <a:bodyPr rtlCol="0" anchor="ctr"/>
+          <a:lstStyle/>
+          <a:p>
+            <a:pPr algn="ctr"/>
+          </a:p>
+        </p:txBody>
+      </p:sp>
+      <p:sp>
+        <p:nvSpPr>
+          <p:cNvPr id="3" name="TextBox 2"/>
+          <p:cNvSpPr txBox="1"/>
+          <p:nvPr/>
+        </p:nvSpPr>
+        <p:spPr>
+          <a:xfrm>
+            <a:off x="548640" y="292608"/>
+            <a:ext cx="11094415" cy="228600"/>
+          </a:xfrm>
+          <a:prstGeom prst="rect">
+            <a:avLst/>
+          </a:prstGeom>
+          <a:noFill/>
+        </p:spPr>
+        <p:txBody>
+          <a:bodyPr wrap="square" lIns="0" rIns="0" tIns="0" bIns="0" anchor="t">
+            <a:spAutoFit/>
+          </a:bodyPr>
+          <a:lstStyle/>
+          <a:p>
+            <a:pPr algn="l">
+              <a:lnSpc>
+                <a:spcPct val="115000"/>
+              </a:lnSpc>
+              <a:spcAft>
+                <a:spcPts val="0"/>
+              </a:spcAft>
+            </a:pPr>
+            <a:r>
+              <a:rPr b="1" sz="950" i="0">
+                <a:solidFill>
+                  <a:srgbClr val="29D3E0"/>
+                </a:solidFill>
+                <a:latin typeface="Arial"/>
+              </a:rPr>
+              <a:t>SLIDE 28 · 05 · IN A REPOSITORY</a:t>
+            </a:r>
+          </a:p>
+        </p:txBody>
+      </p:sp>
+      <p:sp>
+        <p:nvSpPr>
+          <p:cNvPr id="4" name="TextBox 3"/>
+          <p:cNvSpPr txBox="1"/>
+          <p:nvPr/>
+        </p:nvSpPr>
+        <p:spPr>
+          <a:xfrm>
+            <a:off x="548640" y="530352"/>
+            <a:ext cx="11094415" cy="548640"/>
+          </a:xfrm>
+          <a:prstGeom prst="rect">
+            <a:avLst/>
+          </a:prstGeom>
+          <a:noFill/>
+        </p:spPr>
+        <p:txBody>
+          <a:bodyPr wrap="square" lIns="0" rIns="0" tIns="0" bIns="0" anchor="t">
+            <a:spAutoFit/>
+          </a:bodyPr>
+          <a:lstStyle/>
+          <a:p>
+            <a:pPr algn="l">
+              <a:lnSpc>
+                <a:spcPct val="115000"/>
+              </a:lnSpc>
+              <a:spcAft>
+                <a:spcPts val="0"/>
+              </a:spcAft>
+            </a:pPr>
+            <a:r>
+              <a:rPr b="1" sz="2800" i="0">
+                <a:solidFill>
+                  <a:srgbClr val="E6ECF7"/>
+                </a:solidFill>
+                <a:latin typeface="Georgia"/>
+              </a:rPr>
+              <a:t>Where each step lives</a:t>
+            </a:r>
+          </a:p>
+        </p:txBody>
+      </p:sp>
+      <p:sp>
+        <p:nvSpPr>
+          <p:cNvPr id="5" name="Rectangle 4"/>
+          <p:cNvSpPr/>
+          <p:nvPr/>
+        </p:nvSpPr>
+        <p:spPr>
+          <a:xfrm>
+            <a:off x="548640" y="1115568"/>
+            <a:ext cx="1097280" cy="41148"/>
+          </a:xfrm>
+          <a:prstGeom prst="rect">
+            <a:avLst/>
+          </a:prstGeom>
+          <a:solidFill>
+            <a:srgbClr val="29D3E0"/>
+          </a:solidFill>
+          <a:ln>
+            <a:noFill/>
+          </a:ln>
+          <a:effectLst/>
+        </p:spPr>
+        <p:style>
+          <a:lnRef idx="1">
+            <a:schemeClr val="accent1"/>
+          </a:lnRef>
+          <a:fillRef idx="3">
+            <a:schemeClr val="accent1"/>
+          </a:fillRef>
+          <a:effectRef idx="2">
+            <a:schemeClr val="accent1"/>
+          </a:effectRef>
+          <a:fontRef idx="minor">
+            <a:schemeClr val="lt1"/>
+          </a:fontRef>
+        </p:style>
+        <p:txBody>
+          <a:bodyPr rtlCol="0" anchor="ctr"/>
+          <a:lstStyle/>
+          <a:p>
+            <a:pPr algn="ctr"/>
+          </a:p>
+        </p:txBody>
+      </p:sp>
+      <p:sp>
+        <p:nvSpPr>
+          <p:cNvPr id="6" name="TextBox 5"/>
+          <p:cNvSpPr txBox="1"/>
+          <p:nvPr/>
+        </p:nvSpPr>
+        <p:spPr>
+          <a:xfrm>
+            <a:off x="548640" y="6473952"/>
+            <a:ext cx="3657600" cy="228600"/>
+          </a:xfrm>
+          <a:prstGeom prst="rect">
+            <a:avLst/>
+          </a:prstGeom>
+          <a:noFill/>
+        </p:spPr>
+        <p:txBody>
+          <a:bodyPr wrap="square" lIns="0" rIns="0" tIns="0" bIns="0" anchor="t">
+            <a:spAutoFit/>
+          </a:bodyPr>
+          <a:lstStyle/>
+          <a:p>
+            <a:pPr algn="l">
+              <a:lnSpc>
+                <a:spcPct val="115000"/>
+              </a:lnSpc>
+              <a:spcAft>
+                <a:spcPts val="0"/>
+              </a:spcAft>
+            </a:pPr>
+            <a:r>
+              <a:rPr b="1" sz="950" i="0">
+                <a:solidFill>
+                  <a:srgbClr val="E6ECF7"/>
+                </a:solidFill>
+                <a:latin typeface="Arial"/>
+              </a:rPr>
+              <a:t>Build to Understand</a:t>
+            </a:r>
+          </a:p>
+        </p:txBody>
+      </p:sp>
+      <p:sp>
+        <p:nvSpPr>
+          <p:cNvPr id="7" name="TextBox 6"/>
+          <p:cNvSpPr txBox="1"/>
+          <p:nvPr/>
+        </p:nvSpPr>
+        <p:spPr>
+          <a:xfrm>
+            <a:off x="10728655" y="6473952"/>
+            <a:ext cx="914400" cy="228600"/>
+          </a:xfrm>
+          <a:prstGeom prst="rect">
+            <a:avLst/>
+          </a:prstGeom>
+          <a:noFill/>
+        </p:spPr>
+        <p:txBody>
+          <a:bodyPr wrap="square" lIns="0" rIns="0" tIns="0" bIns="0" anchor="t">
+            <a:spAutoFit/>
+          </a:bodyPr>
+          <a:lstStyle/>
+          <a:p>
+            <a:pPr algn="r">
+              <a:lnSpc>
+                <a:spcPct val="115000"/>
+              </a:lnSpc>
+              <a:spcAft>
+                <a:spcPts val="0"/>
+              </a:spcAft>
+            </a:pPr>
+            <a:r>
+              <a:rPr b="0" sz="950" i="0">
+                <a:solidFill>
+                  <a:srgbClr val="98A4BC"/>
+                </a:solidFill>
+                <a:latin typeface="Arial"/>
+              </a:rPr>
+              <a:t>28</a:t>
+            </a:r>
+          </a:p>
+        </p:txBody>
+      </p:sp>
       <p:graphicFrame>
         <p:nvGraphicFramePr>
           <p:cNvPr id="8" name="Table 7"/>
@@ -20529,8 +21484,8 @@
           <p:nvPr/>
         </p:nvGraphicFramePr>
         <p:xfrm>
-          <a:off x="548640" y="1436649"/>
-          <a:ext cx="11094413" cy="3371850"/>
+          <a:off x="548640" y="1371600"/>
+          <a:ext cx="11094413" cy="3744468"/>
         </p:xfrm>
         <a:graphic>
           <a:graphicData uri="http://schemas.openxmlformats.org/drawingml/2006/table">
@@ -21086,7 +22041,7 @@
                           </a:solidFill>
                           <a:latin typeface="Arial"/>
                         </a:rPr>
-                        <a:t>The template that explains and asks</a:t>
+                        <a:t>A size the repository does not go past without saying why</a:t>
                       </a:r>
                     </a:p>
                   </a:txBody>
@@ -21113,7 +22068,7 @@
                           </a:solidFill>
                           <a:latin typeface="Arial"/>
                         </a:rPr>
-                        <a:t>.github/pull_request_template.md</a:t>
+                        <a:t>A CI check, plus draft until green</a:t>
                       </a:r>
                     </a:p>
                   </a:txBody>
@@ -21169,7 +22124,7 @@
                           </a:solidFill>
                           <a:latin typeface="Arial"/>
                         </a:rPr>
-                        <a:t>Read ten merged pull requests and ask what you are seeing</a:t>
+                        <a:t>The template that explains and asks</a:t>
                       </a:r>
                     </a:p>
                   </a:txBody>
@@ -21196,7 +22151,7 @@
                           </a:solidFill>
                           <a:latin typeface="Arial"/>
                         </a:rPr>
-                        <a:t>A calendar entry, not a tool</a:t>
+                        <a:t>.github/pull_request_template.md</a:t>
                       </a:r>
                     </a:p>
                   </a:txBody>
@@ -21207,6 +22162,89 @@
                   </a:tcPr>
                 </a:tc>
               </a:tr>
+              <a:tr h="372618">
+                <a:tc>
+                  <a:txBody>
+                    <a:bodyPr wrap="square"/>
+                    <a:lstStyle/>
+                    <a:p>
+                      <a:pPr>
+                        <a:lnSpc>
+                          <a:spcPct val="110000"/>
+                        </a:lnSpc>
+                      </a:pPr>
+                      <a:r>
+                        <a:rPr b="1" sz="1365" i="0">
+                          <a:solidFill>
+                            <a:srgbClr val="E6ECF7"/>
+                          </a:solidFill>
+                          <a:latin typeface="Arial"/>
+                        </a:rPr>
+                        <a:t>08</a:t>
+                      </a:r>
+                    </a:p>
+                  </a:txBody>
+                  <a:tcPr marL="73152" marR="73152" marT="45720" marB="45720" anchor="t">
+                    <a:solidFill>
+                      <a:srgbClr val="121A2A"/>
+                    </a:solidFill>
+                  </a:tcPr>
+                </a:tc>
+                <a:tc>
+                  <a:txBody>
+                    <a:bodyPr wrap="square"/>
+                    <a:lstStyle/>
+                    <a:p>
+                      <a:pPr>
+                        <a:lnSpc>
+                          <a:spcPct val="110000"/>
+                        </a:lnSpc>
+                      </a:pPr>
+                      <a:r>
+                        <a:rPr b="0" sz="1365" i="0">
+                          <a:solidFill>
+                            <a:srgbClr val="E6ECF7"/>
+                          </a:solidFill>
+                          <a:latin typeface="Arial"/>
+                        </a:rPr>
+                        <a:t>Read ten merged pull requests and ask what you are seeing</a:t>
+                      </a:r>
+                    </a:p>
+                  </a:txBody>
+                  <a:tcPr marL="73152" marR="73152" marT="45720" marB="45720" anchor="t">
+                    <a:solidFill>
+                      <a:srgbClr val="121A2A"/>
+                    </a:solidFill>
+                  </a:tcPr>
+                </a:tc>
+                <a:tc>
+                  <a:txBody>
+                    <a:bodyPr wrap="square"/>
+                    <a:lstStyle/>
+                    <a:p>
+                      <a:pPr>
+                        <a:lnSpc>
+                          <a:spcPct val="110000"/>
+                        </a:lnSpc>
+                      </a:pPr>
+                      <a:r>
+                        <a:rPr b="0" sz="1365" i="0">
+                          <a:solidFill>
+                            <a:srgbClr val="E6ECF7"/>
+                          </a:solidFill>
+                          <a:latin typeface="Arial"/>
+                        </a:rPr>
+                        <a:t>A calendar entry, not a tool</a:t>
+                      </a:r>
+                    </a:p>
+                  </a:txBody>
+                  <a:tcPr marL="73152" marR="73152" marT="45720" marB="45720" anchor="t">
+                    <a:solidFill>
+                      <a:srgbClr val="121A2A"/>
+                    </a:solidFill>
+                  </a:tcPr>
+                </a:tc>
+              </a:tr>
             </a:tbl>
           </a:graphicData>
         </a:graphic>
@@ -21219,7 +22257,7 @@
         </p:nvSpPr>
         <p:spPr>
           <a:xfrm>
-            <a:off x="548640" y="5329707"/>
+            <a:off x="548640" y="5459806"/>
             <a:ext cx="11094415" cy="785545"/>
           </a:xfrm>
           <a:prstGeom prst="rect">
@@ -21259,412 +22297,6 @@
               </a:rPr>
               <a:t>I have not checked which of these are already on in ours.</a:t>
             </a:r>
-          </a:p>
-        </p:txBody>
-      </p:sp>
-    </p:spTree>
-  </p:cSld>
-  <p:clrMapOvr>
-    <a:masterClrMapping/>
-  </p:clrMapOvr>
-</p:sld>
-</file>
-
-<file path=ppt/slides/slide28.xml><?xml version="1.0" encoding="utf-8"?>
-<p:sld xmlns:a="http://schemas.openxmlformats.org/drawingml/2006/main" xmlns:p="http://schemas.openxmlformats.org/presentationml/2006/main" xmlns:r="http://schemas.openxmlformats.org/officeDocument/2006/relationships">
-  <p:cSld>
-    <p:spTree>
-      <p:nvGrpSpPr>
-        <p:cNvPr id="1" name=""/>
-        <p:cNvGrpSpPr/>
-        <p:nvPr/>
-      </p:nvGrpSpPr>
-      <p:grpSpPr/>
-      <p:sp>
-        <p:nvSpPr>
-          <p:cNvPr id="2" name="Rectangle 1"/>
-          <p:cNvSpPr/>
-          <p:nvPr/>
-        </p:nvSpPr>
-        <p:spPr>
-          <a:xfrm>
-            <a:off x="0" y="0"/>
-            <a:ext cx="12191695" cy="6858000"/>
-          </a:xfrm>
-          <a:prstGeom prst="rect">
-            <a:avLst/>
-          </a:prstGeom>
-          <a:solidFill>
-            <a:srgbClr val="070B14"/>
-          </a:solidFill>
-          <a:ln>
-            <a:noFill/>
-          </a:ln>
-          <a:effectLst/>
-        </p:spPr>
-        <p:style>
-          <a:lnRef idx="1">
-            <a:schemeClr val="accent1"/>
-          </a:lnRef>
-          <a:fillRef idx="3">
-            <a:schemeClr val="accent1"/>
-          </a:fillRef>
-          <a:effectRef idx="2">
-            <a:schemeClr val="accent1"/>
-          </a:effectRef>
-          <a:fontRef idx="minor">
-            <a:schemeClr val="lt1"/>
-          </a:fontRef>
-        </p:style>
-        <p:txBody>
-          <a:bodyPr rtlCol="0" anchor="ctr"/>
-          <a:lstStyle/>
-          <a:p>
-            <a:pPr algn="ctr"/>
-          </a:p>
-        </p:txBody>
-      </p:sp>
-      <p:sp>
-        <p:nvSpPr>
-          <p:cNvPr id="3" name="TextBox 2"/>
-          <p:cNvSpPr txBox="1"/>
-          <p:nvPr/>
-        </p:nvSpPr>
-        <p:spPr>
-          <a:xfrm>
-            <a:off x="548640" y="6473952"/>
-            <a:ext cx="3657600" cy="228600"/>
-          </a:xfrm>
-          <a:prstGeom prst="rect">
-            <a:avLst/>
-          </a:prstGeom>
-          <a:noFill/>
-        </p:spPr>
-        <p:txBody>
-          <a:bodyPr wrap="square" lIns="0" rIns="0" tIns="0" bIns="0" anchor="t">
-            <a:spAutoFit/>
-          </a:bodyPr>
-          <a:lstStyle/>
-          <a:p>
-            <a:pPr algn="l">
-              <a:lnSpc>
-                <a:spcPct val="115000"/>
-              </a:lnSpc>
-              <a:spcAft>
-                <a:spcPts val="0"/>
-              </a:spcAft>
-            </a:pPr>
-            <a:r>
-              <a:rPr b="1" sz="950" i="0">
-                <a:solidFill>
-                  <a:srgbClr val="E6ECF7"/>
-                </a:solidFill>
-                <a:latin typeface="Arial"/>
-              </a:rPr>
-              <a:t>Build to Understand</a:t>
-            </a:r>
-          </a:p>
-        </p:txBody>
-      </p:sp>
-      <p:sp>
-        <p:nvSpPr>
-          <p:cNvPr id="4" name="TextBox 3"/>
-          <p:cNvSpPr txBox="1"/>
-          <p:nvPr/>
-        </p:nvSpPr>
-        <p:spPr>
-          <a:xfrm>
-            <a:off x="10728655" y="6473952"/>
-            <a:ext cx="914400" cy="228600"/>
-          </a:xfrm>
-          <a:prstGeom prst="rect">
-            <a:avLst/>
-          </a:prstGeom>
-          <a:noFill/>
-        </p:spPr>
-        <p:txBody>
-          <a:bodyPr wrap="square" lIns="0" rIns="0" tIns="0" bIns="0" anchor="t">
-            <a:spAutoFit/>
-          </a:bodyPr>
-          <a:lstStyle/>
-          <a:p>
-            <a:pPr algn="r">
-              <a:lnSpc>
-                <a:spcPct val="115000"/>
-              </a:lnSpc>
-              <a:spcAft>
-                <a:spcPts val="0"/>
-              </a:spcAft>
-            </a:pPr>
-            <a:r>
-              <a:rPr b="0" sz="950" i="0">
-                <a:solidFill>
-                  <a:srgbClr val="98A4BC"/>
-                </a:solidFill>
-                <a:latin typeface="Arial"/>
-              </a:rPr>
-              <a:t>28</a:t>
-            </a:r>
-          </a:p>
-        </p:txBody>
-      </p:sp>
-      <p:sp>
-        <p:nvSpPr>
-          <p:cNvPr id="5" name="TextBox 4"/>
-          <p:cNvSpPr txBox="1"/>
-          <p:nvPr/>
-        </p:nvSpPr>
-        <p:spPr>
-          <a:xfrm>
-            <a:off x="548640" y="292608"/>
-            <a:ext cx="11094415" cy="274320"/>
-          </a:xfrm>
-          <a:prstGeom prst="rect">
-            <a:avLst/>
-          </a:prstGeom>
-          <a:noFill/>
-        </p:spPr>
-        <p:txBody>
-          <a:bodyPr wrap="square" lIns="0" rIns="0" tIns="0" bIns="0" anchor="t">
-            <a:spAutoFit/>
-          </a:bodyPr>
-          <a:lstStyle/>
-          <a:p>
-            <a:pPr algn="l">
-              <a:lnSpc>
-                <a:spcPct val="115000"/>
-              </a:lnSpc>
-              <a:spcAft>
-                <a:spcPts val="0"/>
-              </a:spcAft>
-            </a:pPr>
-            <a:r>
-              <a:rPr b="1" sz="1100" i="0">
-                <a:solidFill>
-                  <a:srgbClr val="E6ECF7"/>
-                </a:solidFill>
-                <a:latin typeface="Arial"/>
-              </a:rPr>
-              <a:t>Build to Understand</a:t>
-            </a:r>
-          </a:p>
-        </p:txBody>
-      </p:sp>
-      <p:sp>
-        <p:nvSpPr>
-          <p:cNvPr id="6" name="Rectangle 5"/>
-          <p:cNvSpPr/>
-          <p:nvPr/>
-        </p:nvSpPr>
-        <p:spPr>
-          <a:xfrm>
-            <a:off x="548640" y="2555240"/>
-            <a:ext cx="822960" cy="54864"/>
-          </a:xfrm>
-          <a:prstGeom prst="rect">
-            <a:avLst/>
-          </a:prstGeom>
-          <a:solidFill>
-            <a:srgbClr val="29D3E0"/>
-          </a:solidFill>
-          <a:ln>
-            <a:noFill/>
-          </a:ln>
-          <a:effectLst/>
-        </p:spPr>
-        <p:style>
-          <a:lnRef idx="1">
-            <a:schemeClr val="accent1"/>
-          </a:lnRef>
-          <a:fillRef idx="3">
-            <a:schemeClr val="accent1"/>
-          </a:fillRef>
-          <a:effectRef idx="2">
-            <a:schemeClr val="accent1"/>
-          </a:effectRef>
-          <a:fontRef idx="minor">
-            <a:schemeClr val="lt1"/>
-          </a:fontRef>
-        </p:style>
-        <p:txBody>
-          <a:bodyPr rtlCol="0" anchor="ctr"/>
-          <a:lstStyle/>
-          <a:p>
-            <a:pPr algn="ctr"/>
-          </a:p>
-        </p:txBody>
-      </p:sp>
-      <p:sp>
-        <p:nvSpPr>
-          <p:cNvPr id="7" name="TextBox 6"/>
-          <p:cNvSpPr txBox="1"/>
-          <p:nvPr/>
-        </p:nvSpPr>
-        <p:spPr>
-          <a:xfrm>
-            <a:off x="1783080" y="1874519"/>
-            <a:ext cx="9859975" cy="991615"/>
-          </a:xfrm>
-          <a:prstGeom prst="rect">
-            <a:avLst/>
-          </a:prstGeom>
-          <a:noFill/>
-        </p:spPr>
-        <p:txBody>
-          <a:bodyPr wrap="square" lIns="0" rIns="0" tIns="0" bIns="0" anchor="b">
-            <a:spAutoFit/>
-          </a:bodyPr>
-          <a:lstStyle/>
-          <a:p>
-            <a:pPr algn="l">
-              <a:lnSpc>
-                <a:spcPct val="122000"/>
-              </a:lnSpc>
-              <a:spcAft>
-                <a:spcPts val="0"/>
-              </a:spcAft>
-            </a:pPr>
-            <a:r>
-              <a:rPr b="1" sz="3200" i="0">
-                <a:solidFill>
-                  <a:srgbClr val="E6ECF7"/>
-                </a:solidFill>
-                <a:latin typeface="Georgia"/>
-              </a:rPr>
-              <a:t>Conclusion</a:t>
-            </a:r>
-          </a:p>
-        </p:txBody>
-      </p:sp>
-      <p:sp>
-        <p:nvSpPr>
-          <p:cNvPr id="8" name="TextBox 7"/>
-          <p:cNvSpPr txBox="1"/>
-          <p:nvPr/>
-        </p:nvSpPr>
-        <p:spPr>
-          <a:xfrm>
-            <a:off x="1783080" y="3140455"/>
-            <a:ext cx="9859975" cy="247649"/>
-          </a:xfrm>
-          <a:prstGeom prst="rect">
-            <a:avLst/>
-          </a:prstGeom>
-          <a:noFill/>
-        </p:spPr>
-        <p:txBody>
-          <a:bodyPr wrap="square" lIns="0" rIns="0" tIns="0" bIns="0" anchor="t">
-            <a:spAutoFit/>
-          </a:bodyPr>
-          <a:lstStyle/>
-          <a:p>
-            <a:pPr algn="l">
-              <a:lnSpc>
-                <a:spcPct val="130000"/>
-              </a:lnSpc>
-              <a:spcAft>
-                <a:spcPts val="0"/>
-              </a:spcAft>
-            </a:pPr>
-            <a:r>
-              <a:rPr b="0" sz="1500" i="0">
-                <a:solidFill>
-                  <a:srgbClr val="E6ECF7"/>
-                </a:solidFill>
-                <a:latin typeface="Arial"/>
-              </a:rPr>
-              <a:t>What moves, what doesn't, and what I still don't know.</a:t>
-            </a:r>
-          </a:p>
-        </p:txBody>
-      </p:sp>
-      <p:sp>
-        <p:nvSpPr>
-          <p:cNvPr id="9" name="Oval 8"/>
-          <p:cNvSpPr/>
-          <p:nvPr/>
-        </p:nvSpPr>
-        <p:spPr>
-          <a:xfrm>
-            <a:off x="10332720" y="5394960"/>
-            <a:ext cx="457200" cy="457200"/>
-          </a:xfrm>
-          <a:prstGeom prst="ellipse">
-            <a:avLst/>
-          </a:prstGeom>
-          <a:solidFill>
-            <a:srgbClr val="29D3E0"/>
-          </a:solidFill>
-          <a:ln>
-            <a:noFill/>
-          </a:ln>
-          <a:effectLst/>
-        </p:spPr>
-        <p:style>
-          <a:lnRef idx="1">
-            <a:schemeClr val="accent1"/>
-          </a:lnRef>
-          <a:fillRef idx="3">
-            <a:schemeClr val="accent1"/>
-          </a:fillRef>
-          <a:effectRef idx="2">
-            <a:schemeClr val="accent1"/>
-          </a:effectRef>
-          <a:fontRef idx="minor">
-            <a:schemeClr val="lt1"/>
-          </a:fontRef>
-        </p:style>
-        <p:txBody>
-          <a:bodyPr rtlCol="0" anchor="ctr"/>
-          <a:lstStyle/>
-          <a:p>
-            <a:pPr algn="ctr"/>
-          </a:p>
-        </p:txBody>
-      </p:sp>
-      <p:sp>
-        <p:nvSpPr>
-          <p:cNvPr id="10" name="Rounded Rectangle 9"/>
-          <p:cNvSpPr/>
-          <p:nvPr/>
-        </p:nvSpPr>
-        <p:spPr>
-          <a:xfrm>
-            <a:off x="10927080" y="5532120"/>
-            <a:ext cx="310896" cy="310896"/>
-          </a:xfrm>
-          <a:prstGeom prst="roundRect">
-            <a:avLst>
-              <a:gd name="adj" fmla="val 4000"/>
-            </a:avLst>
-          </a:prstGeom>
-          <a:noFill/>
-          <a:ln w="19050">
-            <a:solidFill>
-              <a:srgbClr val="E8A33D"/>
-            </a:solidFill>
-          </a:ln>
-          <a:effectLst/>
-        </p:spPr>
-        <p:style>
-          <a:lnRef idx="1">
-            <a:schemeClr val="accent1"/>
-          </a:lnRef>
-          <a:fillRef idx="3">
-            <a:schemeClr val="accent1"/>
-          </a:fillRef>
-          <a:effectRef idx="2">
-            <a:schemeClr val="accent1"/>
-          </a:effectRef>
-          <a:fontRef idx="minor">
-            <a:schemeClr val="lt1"/>
-          </a:fontRef>
-        </p:style>
-        <p:txBody>
-          <a:bodyPr rtlCol="0" anchor="ctr"/>
-          <a:lstStyle/>
-          <a:p>
-            <a:pPr algn="ctr"/>
           </a:p>
         </p:txBody>
       </p:sp>
@@ -21701,7 +22333,7 @@
             <a:avLst/>
           </a:prstGeom>
           <a:solidFill>
-            <a:srgbClr val="0E1420"/>
+            <a:srgbClr val="070B14"/>
           </a:solidFill>
           <a:ln>
             <a:noFill/>
@@ -21738,8 +22370,8 @@
         </p:nvSpPr>
         <p:spPr>
           <a:xfrm>
-            <a:off x="548640" y="292608"/>
-            <a:ext cx="11094415" cy="228600"/>
+            <a:off x="548640" y="6473952"/>
+            <a:ext cx="3657600" cy="228600"/>
           </a:xfrm>
           <a:prstGeom prst="rect">
             <a:avLst/>
@@ -21763,11 +22395,11 @@
             <a:r>
               <a:rPr b="1" sz="950" i="0">
                 <a:solidFill>
-                  <a:srgbClr val="E8A33D"/>
+                  <a:srgbClr val="E6ECF7"/>
                 </a:solidFill>
                 <a:latin typeface="Arial"/>
               </a:rPr>
-              <a:t>SLIDE 29 · CONCLUSION</a:t>
+              <a:t>Build to Understand</a:t>
             </a:r>
           </a:p>
         </p:txBody>
@@ -21780,8 +22412,8 @@
         </p:nvSpPr>
         <p:spPr>
           <a:xfrm>
-            <a:off x="548640" y="530352"/>
-            <a:ext cx="11094415" cy="548640"/>
+            <a:off x="10728655" y="6473952"/>
+            <a:ext cx="914400" cy="228600"/>
           </a:xfrm>
           <a:prstGeom prst="rect">
             <a:avLst/>
@@ -21794,6 +22426,48 @@
           </a:bodyPr>
           <a:lstStyle/>
           <a:p>
+            <a:pPr algn="r">
+              <a:lnSpc>
+                <a:spcPct val="115000"/>
+              </a:lnSpc>
+              <a:spcAft>
+                <a:spcPts val="0"/>
+              </a:spcAft>
+            </a:pPr>
+            <a:r>
+              <a:rPr b="0" sz="950" i="0">
+                <a:solidFill>
+                  <a:srgbClr val="98A4BC"/>
+                </a:solidFill>
+                <a:latin typeface="Arial"/>
+              </a:rPr>
+              <a:t>29</a:t>
+            </a:r>
+          </a:p>
+        </p:txBody>
+      </p:sp>
+      <p:sp>
+        <p:nvSpPr>
+          <p:cNvPr id="5" name="TextBox 4"/>
+          <p:cNvSpPr txBox="1"/>
+          <p:nvPr/>
+        </p:nvSpPr>
+        <p:spPr>
+          <a:xfrm>
+            <a:off x="548640" y="292608"/>
+            <a:ext cx="11094415" cy="274320"/>
+          </a:xfrm>
+          <a:prstGeom prst="rect">
+            <a:avLst/>
+          </a:prstGeom>
+          <a:noFill/>
+        </p:spPr>
+        <p:txBody>
+          <a:bodyPr wrap="square" lIns="0" rIns="0" tIns="0" bIns="0" anchor="t">
+            <a:spAutoFit/>
+          </a:bodyPr>
+          <a:lstStyle/>
+          <a:p>
             <a:pPr algn="l">
               <a:lnSpc>
                 <a:spcPct val="115000"/>
@@ -21803,27 +22477,27 @@
               </a:spcAft>
             </a:pPr>
             <a:r>
-              <a:rPr b="1" sz="2800" i="0">
+              <a:rPr b="1" sz="1100" i="0">
                 <a:solidFill>
                   <a:srgbClr val="E6ECF7"/>
                 </a:solidFill>
-                <a:latin typeface="Georgia"/>
-              </a:rPr>
-              <a:t>What moves, and what doesn't</a:t>
-            </a:r>
-          </a:p>
-        </p:txBody>
-      </p:sp>
-      <p:sp>
-        <p:nvSpPr>
-          <p:cNvPr id="5" name="Rectangle 4"/>
+                <a:latin typeface="Arial"/>
+              </a:rPr>
+              <a:t>Build to Understand</a:t>
+            </a:r>
+          </a:p>
+        </p:txBody>
+      </p:sp>
+      <p:sp>
+        <p:nvSpPr>
+          <p:cNvPr id="6" name="Rectangle 5"/>
           <p:cNvSpPr/>
           <p:nvPr/>
         </p:nvSpPr>
         <p:spPr>
           <a:xfrm>
-            <a:off x="548640" y="1115568"/>
-            <a:ext cx="1097280" cy="41148"/>
+            <a:off x="548640" y="2555240"/>
+            <a:ext cx="822960" cy="54864"/>
           </a:xfrm>
           <a:prstGeom prst="rect">
             <a:avLst/>
@@ -21860,14 +22534,56 @@
       </p:sp>
       <p:sp>
         <p:nvSpPr>
-          <p:cNvPr id="6" name="TextBox 5"/>
+          <p:cNvPr id="7" name="TextBox 6"/>
           <p:cNvSpPr txBox="1"/>
           <p:nvPr/>
         </p:nvSpPr>
         <p:spPr>
           <a:xfrm>
-            <a:off x="548640" y="6473952"/>
-            <a:ext cx="3657600" cy="228600"/>
+            <a:off x="1783080" y="1874519"/>
+            <a:ext cx="9859975" cy="991615"/>
+          </a:xfrm>
+          <a:prstGeom prst="rect">
+            <a:avLst/>
+          </a:prstGeom>
+          <a:noFill/>
+        </p:spPr>
+        <p:txBody>
+          <a:bodyPr wrap="square" lIns="0" rIns="0" tIns="0" bIns="0" anchor="b">
+            <a:spAutoFit/>
+          </a:bodyPr>
+          <a:lstStyle/>
+          <a:p>
+            <a:pPr algn="l">
+              <a:lnSpc>
+                <a:spcPct val="122000"/>
+              </a:lnSpc>
+              <a:spcAft>
+                <a:spcPts val="0"/>
+              </a:spcAft>
+            </a:pPr>
+            <a:r>
+              <a:rPr b="1" sz="3200" i="0">
+                <a:solidFill>
+                  <a:srgbClr val="E6ECF7"/>
+                </a:solidFill>
+                <a:latin typeface="Georgia"/>
+              </a:rPr>
+              <a:t>Conclusion</a:t>
+            </a:r>
+          </a:p>
+        </p:txBody>
+      </p:sp>
+      <p:sp>
+        <p:nvSpPr>
+          <p:cNvPr id="8" name="TextBox 7"/>
+          <p:cNvSpPr txBox="1"/>
+          <p:nvPr/>
+        </p:nvSpPr>
+        <p:spPr>
+          <a:xfrm>
+            <a:off x="1783080" y="3140455"/>
+            <a:ext cx="9859975" cy="247649"/>
           </a:xfrm>
           <a:prstGeom prst="rect">
             <a:avLst/>
@@ -21882,126 +22598,36 @@
           <a:p>
             <a:pPr algn="l">
               <a:lnSpc>
-                <a:spcPct val="115000"/>
+                <a:spcPct val="130000"/>
               </a:lnSpc>
               <a:spcAft>
                 <a:spcPts val="0"/>
               </a:spcAft>
             </a:pPr>
             <a:r>
-              <a:rPr b="1" sz="950" i="0">
+              <a:rPr b="0" sz="1500" i="0">
                 <a:solidFill>
                   <a:srgbClr val="E6ECF7"/>
                 </a:solidFill>
                 <a:latin typeface="Arial"/>
               </a:rPr>
-              <a:t>Build to Understand</a:t>
-            </a:r>
-          </a:p>
-        </p:txBody>
-      </p:sp>
-      <p:sp>
-        <p:nvSpPr>
-          <p:cNvPr id="7" name="TextBox 6"/>
-          <p:cNvSpPr txBox="1"/>
-          <p:nvPr/>
-        </p:nvSpPr>
-        <p:spPr>
-          <a:xfrm>
-            <a:off x="10728655" y="6473952"/>
-            <a:ext cx="914400" cy="228600"/>
-          </a:xfrm>
-          <a:prstGeom prst="rect">
-            <a:avLst/>
-          </a:prstGeom>
-          <a:noFill/>
-        </p:spPr>
-        <p:txBody>
-          <a:bodyPr wrap="square" lIns="0" rIns="0" tIns="0" bIns="0" anchor="t">
-            <a:spAutoFit/>
-          </a:bodyPr>
-          <a:lstStyle/>
-          <a:p>
-            <a:pPr algn="r">
-              <a:lnSpc>
-                <a:spcPct val="115000"/>
-              </a:lnSpc>
-              <a:spcAft>
-                <a:spcPts val="0"/>
-              </a:spcAft>
-            </a:pPr>
-            <a:r>
-              <a:rPr b="0" sz="950" i="0">
-                <a:solidFill>
-                  <a:srgbClr val="98A4BC"/>
-                </a:solidFill>
-                <a:latin typeface="Arial"/>
-              </a:rPr>
-              <a:t>29</a:t>
-            </a:r>
-          </a:p>
-        </p:txBody>
-      </p:sp>
-      <p:sp>
-        <p:nvSpPr>
-          <p:cNvPr id="8" name="Rounded Rectangle 7"/>
+              <a:t>What moves, what doesn't, and what I still don't know.</a:t>
+            </a:r>
+          </a:p>
+        </p:txBody>
+      </p:sp>
+      <p:sp>
+        <p:nvSpPr>
+          <p:cNvPr id="9" name="Oval 8"/>
           <p:cNvSpPr/>
           <p:nvPr/>
         </p:nvSpPr>
         <p:spPr>
           <a:xfrm>
-            <a:off x="548640" y="2014037"/>
-            <a:ext cx="3576218" cy="1733232"/>
-          </a:xfrm>
-          <a:prstGeom prst="roundRect">
-            <a:avLst>
-              <a:gd name="adj" fmla="val 4000"/>
-            </a:avLst>
-          </a:prstGeom>
-          <a:solidFill>
-            <a:srgbClr val="151D2E"/>
-          </a:solidFill>
-          <a:ln w="9525">
-            <a:solidFill>
-              <a:srgbClr val="35415A"/>
-            </a:solidFill>
-          </a:ln>
-          <a:effectLst/>
-        </p:spPr>
-        <p:style>
-          <a:lnRef idx="1">
-            <a:schemeClr val="accent1"/>
-          </a:lnRef>
-          <a:fillRef idx="3">
-            <a:schemeClr val="accent1"/>
-          </a:fillRef>
-          <a:effectRef idx="2">
-            <a:schemeClr val="accent1"/>
-          </a:effectRef>
-          <a:fontRef idx="minor">
-            <a:schemeClr val="lt1"/>
-          </a:fontRef>
-        </p:style>
-        <p:txBody>
-          <a:bodyPr rtlCol="0" anchor="ctr"/>
-          <a:lstStyle/>
-          <a:p>
-            <a:pPr algn="ctr"/>
-          </a:p>
-        </p:txBody>
-      </p:sp>
-      <p:sp>
-        <p:nvSpPr>
-          <p:cNvPr id="9" name="Rectangle 8"/>
-          <p:cNvSpPr/>
-          <p:nvPr/>
-        </p:nvSpPr>
-        <p:spPr>
-          <a:xfrm>
-            <a:off x="548640" y="2123765"/>
-            <a:ext cx="45720" cy="1513776"/>
-          </a:xfrm>
-          <a:prstGeom prst="rect">
+            <a:off x="10332720" y="5394960"/>
+            <a:ext cx="457200" cy="457200"/>
+          </a:xfrm>
+          <a:prstGeom prst="ellipse">
             <a:avLst/>
           </a:prstGeom>
           <a:solidFill>
@@ -22036,110 +22662,24 @@
       </p:sp>
       <p:sp>
         <p:nvSpPr>
-          <p:cNvPr id="10" name="TextBox 9"/>
-          <p:cNvSpPr txBox="1"/>
-          <p:nvPr/>
-        </p:nvSpPr>
-        <p:spPr>
-          <a:xfrm>
-            <a:off x="749808" y="2142053"/>
-            <a:ext cx="3210458" cy="540131"/>
-          </a:xfrm>
-          <a:prstGeom prst="rect">
-            <a:avLst/>
-          </a:prstGeom>
-          <a:noFill/>
-        </p:spPr>
-        <p:txBody>
-          <a:bodyPr wrap="square" lIns="0" rIns="0" tIns="0" bIns="0" anchor="t">
-            <a:spAutoFit/>
-          </a:bodyPr>
-          <a:lstStyle/>
-          <a:p>
-            <a:pPr algn="l">
-              <a:lnSpc>
-                <a:spcPct val="115000"/>
-              </a:lnSpc>
-              <a:spcAft>
-                <a:spcPts val="0"/>
-              </a:spcAft>
-            </a:pPr>
-            <a:r>
-              <a:rPr b="1" sz="1625" i="0">
-                <a:solidFill>
-                  <a:srgbClr val="E6ECF7"/>
-                </a:solidFill>
-                <a:latin typeface="Arial"/>
-              </a:rPr>
-              <a:t>Shorter queue</a:t>
-            </a:r>
-          </a:p>
-        </p:txBody>
-      </p:sp>
-      <p:sp>
-        <p:nvSpPr>
-          <p:cNvPr id="11" name="TextBox 10"/>
-          <p:cNvSpPr txBox="1"/>
-          <p:nvPr/>
-        </p:nvSpPr>
-        <p:spPr>
-          <a:xfrm>
-            <a:off x="749808" y="2755336"/>
-            <a:ext cx="3210458" cy="809053"/>
-          </a:xfrm>
-          <a:prstGeom prst="rect">
-            <a:avLst/>
-          </a:prstGeom>
-          <a:noFill/>
-        </p:spPr>
-        <p:txBody>
-          <a:bodyPr wrap="square" lIns="0" rIns="0" tIns="0" bIns="0" anchor="t">
-            <a:spAutoFit/>
-          </a:bodyPr>
-          <a:lstStyle/>
-          <a:p>
-            <a:pPr algn="l">
-              <a:lnSpc>
-                <a:spcPct val="125000"/>
-              </a:lnSpc>
-              <a:spcAft>
-                <a:spcPts val="0"/>
-              </a:spcAft>
-            </a:pPr>
-            <a:r>
-              <a:rPr b="0" sz="1430" i="0">
-                <a:solidFill>
-                  <a:srgbClr val="E6ECF7"/>
-                </a:solidFill>
-                <a:latin typeface="Arial"/>
-              </a:rPr>
-              <a:t>Turn on what is there. Centralize the mechanical. Log it. Tier by risk.</a:t>
-            </a:r>
-          </a:p>
-        </p:txBody>
-      </p:sp>
-      <p:sp>
-        <p:nvSpPr>
-          <p:cNvPr id="12" name="Rounded Rectangle 11"/>
+          <p:cNvPr id="10" name="Rounded Rectangle 9"/>
           <p:cNvSpPr/>
           <p:nvPr/>
         </p:nvSpPr>
         <p:spPr>
           <a:xfrm>
-            <a:off x="4307738" y="2014037"/>
-            <a:ext cx="3576218" cy="1733232"/>
+            <a:off x="10927080" y="5532120"/>
+            <a:ext cx="310896" cy="310896"/>
           </a:xfrm>
           <a:prstGeom prst="roundRect">
             <a:avLst>
               <a:gd name="adj" fmla="val 4000"/>
             </a:avLst>
           </a:prstGeom>
-          <a:solidFill>
-            <a:srgbClr val="151D2E"/>
-          </a:solidFill>
-          <a:ln w="9525">
+          <a:noFill/>
+          <a:ln w="19050">
             <a:solidFill>
-              <a:srgbClr val="35415A"/>
+              <a:srgbClr val="E8A33D"/>
             </a:solidFill>
           </a:ln>
           <a:effectLst/>
@@ -22163,396 +22703,6 @@
           <a:lstStyle/>
           <a:p>
             <a:pPr algn="ctr"/>
-          </a:p>
-        </p:txBody>
-      </p:sp>
-      <p:sp>
-        <p:nvSpPr>
-          <p:cNvPr id="13" name="Rectangle 12"/>
-          <p:cNvSpPr/>
-          <p:nvPr/>
-        </p:nvSpPr>
-        <p:spPr>
-          <a:xfrm>
-            <a:off x="4307738" y="2123765"/>
-            <a:ext cx="45720" cy="1513776"/>
-          </a:xfrm>
-          <a:prstGeom prst="rect">
-            <a:avLst/>
-          </a:prstGeom>
-          <a:solidFill>
-            <a:srgbClr val="E8A33D"/>
-          </a:solidFill>
-          <a:ln>
-            <a:noFill/>
-          </a:ln>
-          <a:effectLst/>
-        </p:spPr>
-        <p:style>
-          <a:lnRef idx="1">
-            <a:schemeClr val="accent1"/>
-          </a:lnRef>
-          <a:fillRef idx="3">
-            <a:schemeClr val="accent1"/>
-          </a:fillRef>
-          <a:effectRef idx="2">
-            <a:schemeClr val="accent1"/>
-          </a:effectRef>
-          <a:fontRef idx="minor">
-            <a:schemeClr val="lt1"/>
-          </a:fontRef>
-        </p:style>
-        <p:txBody>
-          <a:bodyPr rtlCol="0" anchor="ctr"/>
-          <a:lstStyle/>
-          <a:p>
-            <a:pPr algn="ctr"/>
-          </a:p>
-        </p:txBody>
-      </p:sp>
-      <p:sp>
-        <p:nvSpPr>
-          <p:cNvPr id="14" name="TextBox 13"/>
-          <p:cNvSpPr txBox="1"/>
-          <p:nvPr/>
-        </p:nvSpPr>
-        <p:spPr>
-          <a:xfrm>
-            <a:off x="4508906" y="2142053"/>
-            <a:ext cx="3210458" cy="540131"/>
-          </a:xfrm>
-          <a:prstGeom prst="rect">
-            <a:avLst/>
-          </a:prstGeom>
-          <a:noFill/>
-        </p:spPr>
-        <p:txBody>
-          <a:bodyPr wrap="square" lIns="0" rIns="0" tIns="0" bIns="0" anchor="t">
-            <a:spAutoFit/>
-          </a:bodyPr>
-          <a:lstStyle/>
-          <a:p>
-            <a:pPr algn="l">
-              <a:lnSpc>
-                <a:spcPct val="115000"/>
-              </a:lnSpc>
-              <a:spcAft>
-                <a:spcPts val="0"/>
-              </a:spcAft>
-            </a:pPr>
-            <a:r>
-              <a:rPr b="1" sz="1625" i="0">
-                <a:solidFill>
-                  <a:srgbClr val="E6ECF7"/>
-                </a:solidFill>
-                <a:latin typeface="Arial"/>
-              </a:rPr>
-              <a:t>Higher quality, with evidence</a:t>
-            </a:r>
-          </a:p>
-        </p:txBody>
-      </p:sp>
-      <p:sp>
-        <p:nvSpPr>
-          <p:cNvPr id="15" name="TextBox 14"/>
-          <p:cNvSpPr txBox="1"/>
-          <p:nvPr/>
-        </p:nvSpPr>
-        <p:spPr>
-          <a:xfrm>
-            <a:off x="4508906" y="2755336"/>
-            <a:ext cx="3210458" cy="809053"/>
-          </a:xfrm>
-          <a:prstGeom prst="rect">
-            <a:avLst/>
-          </a:prstGeom>
-          <a:noFill/>
-        </p:spPr>
-        <p:txBody>
-          <a:bodyPr wrap="square" lIns="0" rIns="0" tIns="0" bIns="0" anchor="t">
-            <a:spAutoFit/>
-          </a:bodyPr>
-          <a:lstStyle/>
-          <a:p>
-            <a:pPr algn="l">
-              <a:lnSpc>
-                <a:spcPct val="125000"/>
-              </a:lnSpc>
-              <a:spcAft>
-                <a:spcPts val="0"/>
-              </a:spcAft>
-            </a:pPr>
-            <a:r>
-              <a:rPr b="0" sz="1430" i="0">
-                <a:solidFill>
-                  <a:srgbClr val="E6ECF7"/>
-                </a:solidFill>
-                <a:latin typeface="Arial"/>
-              </a:rPr>
-              <a:t>A different model family reviews the change. Two more are design problems, not results.</a:t>
-            </a:r>
-          </a:p>
-        </p:txBody>
-      </p:sp>
-      <p:sp>
-        <p:nvSpPr>
-          <p:cNvPr id="16" name="Rounded Rectangle 15"/>
-          <p:cNvSpPr/>
-          <p:nvPr/>
-        </p:nvSpPr>
-        <p:spPr>
-          <a:xfrm>
-            <a:off x="8066836" y="2014037"/>
-            <a:ext cx="3576218" cy="1733232"/>
-          </a:xfrm>
-          <a:prstGeom prst="roundRect">
-            <a:avLst>
-              <a:gd name="adj" fmla="val 4000"/>
-            </a:avLst>
-          </a:prstGeom>
-          <a:solidFill>
-            <a:srgbClr val="151D2E"/>
-          </a:solidFill>
-          <a:ln w="9525">
-            <a:solidFill>
-              <a:srgbClr val="35415A"/>
-            </a:solidFill>
-          </a:ln>
-          <a:effectLst/>
-        </p:spPr>
-        <p:style>
-          <a:lnRef idx="1">
-            <a:schemeClr val="accent1"/>
-          </a:lnRef>
-          <a:fillRef idx="3">
-            <a:schemeClr val="accent1"/>
-          </a:fillRef>
-          <a:effectRef idx="2">
-            <a:schemeClr val="accent1"/>
-          </a:effectRef>
-          <a:fontRef idx="minor">
-            <a:schemeClr val="lt1"/>
-          </a:fontRef>
-        </p:style>
-        <p:txBody>
-          <a:bodyPr rtlCol="0" anchor="ctr"/>
-          <a:lstStyle/>
-          <a:p>
-            <a:pPr algn="ctr"/>
-          </a:p>
-        </p:txBody>
-      </p:sp>
-      <p:sp>
-        <p:nvSpPr>
-          <p:cNvPr id="17" name="Rectangle 16"/>
-          <p:cNvSpPr/>
-          <p:nvPr/>
-        </p:nvSpPr>
-        <p:spPr>
-          <a:xfrm>
-            <a:off x="8066836" y="2123765"/>
-            <a:ext cx="45720" cy="1513776"/>
-          </a:xfrm>
-          <a:prstGeom prst="rect">
-            <a:avLst/>
-          </a:prstGeom>
-          <a:solidFill>
-            <a:srgbClr val="29D3E0"/>
-          </a:solidFill>
-          <a:ln>
-            <a:noFill/>
-          </a:ln>
-          <a:effectLst/>
-        </p:spPr>
-        <p:style>
-          <a:lnRef idx="1">
-            <a:schemeClr val="accent1"/>
-          </a:lnRef>
-          <a:fillRef idx="3">
-            <a:schemeClr val="accent1"/>
-          </a:fillRef>
-          <a:effectRef idx="2">
-            <a:schemeClr val="accent1"/>
-          </a:effectRef>
-          <a:fontRef idx="minor">
-            <a:schemeClr val="lt1"/>
-          </a:fontRef>
-        </p:style>
-        <p:txBody>
-          <a:bodyPr rtlCol="0" anchor="ctr"/>
-          <a:lstStyle/>
-          <a:p>
-            <a:pPr algn="ctr"/>
-          </a:p>
-        </p:txBody>
-      </p:sp>
-      <p:sp>
-        <p:nvSpPr>
-          <p:cNvPr id="18" name="TextBox 17"/>
-          <p:cNvSpPr txBox="1"/>
-          <p:nvPr/>
-        </p:nvSpPr>
-        <p:spPr>
-          <a:xfrm>
-            <a:off x="8268004" y="2142053"/>
-            <a:ext cx="3210458" cy="540131"/>
-          </a:xfrm>
-          <a:prstGeom prst="rect">
-            <a:avLst/>
-          </a:prstGeom>
-          <a:noFill/>
-        </p:spPr>
-        <p:txBody>
-          <a:bodyPr wrap="square" lIns="0" rIns="0" tIns="0" bIns="0" anchor="t">
-            <a:spAutoFit/>
-          </a:bodyPr>
-          <a:lstStyle/>
-          <a:p>
-            <a:pPr algn="l">
-              <a:lnSpc>
-                <a:spcPct val="115000"/>
-              </a:lnSpc>
-              <a:spcAft>
-                <a:spcPts val="0"/>
-              </a:spcAft>
-            </a:pPr>
-            <a:r>
-              <a:rPr b="1" sz="1625" i="0">
-                <a:solidFill>
-                  <a:srgbClr val="E6ECF7"/>
-                </a:solidFill>
-                <a:latin typeface="Arial"/>
-              </a:rPr>
-              <a:t>Set aside</a:t>
-            </a:r>
-          </a:p>
-        </p:txBody>
-      </p:sp>
-      <p:sp>
-        <p:nvSpPr>
-          <p:cNvPr id="19" name="TextBox 18"/>
-          <p:cNvSpPr txBox="1"/>
-          <p:nvPr/>
-        </p:nvSpPr>
-        <p:spPr>
-          <a:xfrm>
-            <a:off x="8268004" y="2755336"/>
-            <a:ext cx="3210458" cy="809053"/>
-          </a:xfrm>
-          <a:prstGeom prst="rect">
-            <a:avLst/>
-          </a:prstGeom>
-          <a:noFill/>
-        </p:spPr>
-        <p:txBody>
-          <a:bodyPr wrap="square" lIns="0" rIns="0" tIns="0" bIns="0" anchor="t">
-            <a:spAutoFit/>
-          </a:bodyPr>
-          <a:lstStyle/>
-          <a:p>
-            <a:pPr algn="l">
-              <a:lnSpc>
-                <a:spcPct val="125000"/>
-              </a:lnSpc>
-              <a:spcAft>
-                <a:spcPts val="0"/>
-              </a:spcAft>
-            </a:pPr>
-            <a:r>
-              <a:rPr b="0" sz="1430" i="0">
-                <a:solidFill>
-                  <a:srgbClr val="E6ECF7"/>
-                </a:solidFill>
-                <a:latin typeface="Arial"/>
-              </a:rPr>
-              <a:t>Restricting AI use. Open source defends against strangers. We employ our authors.</a:t>
-            </a:r>
-          </a:p>
-        </p:txBody>
-      </p:sp>
-      <p:sp>
-        <p:nvSpPr>
-          <p:cNvPr id="20" name="Rectangle 19"/>
-          <p:cNvSpPr/>
-          <p:nvPr/>
-        </p:nvSpPr>
-        <p:spPr>
-          <a:xfrm>
-            <a:off x="548640" y="4231902"/>
-            <a:ext cx="54864" cy="746861"/>
-          </a:xfrm>
-          <a:prstGeom prst="rect">
-            <a:avLst/>
-          </a:prstGeom>
-          <a:solidFill>
-            <a:srgbClr val="29D3E0"/>
-          </a:solidFill>
-          <a:ln>
-            <a:noFill/>
-          </a:ln>
-          <a:effectLst/>
-        </p:spPr>
-        <p:style>
-          <a:lnRef idx="1">
-            <a:schemeClr val="accent1"/>
-          </a:lnRef>
-          <a:fillRef idx="3">
-            <a:schemeClr val="accent1"/>
-          </a:fillRef>
-          <a:effectRef idx="2">
-            <a:schemeClr val="accent1"/>
-          </a:effectRef>
-          <a:fontRef idx="minor">
-            <a:schemeClr val="lt1"/>
-          </a:fontRef>
-        </p:style>
-        <p:txBody>
-          <a:bodyPr rtlCol="0" anchor="ctr"/>
-          <a:lstStyle/>
-          <a:p>
-            <a:pPr algn="ctr"/>
-          </a:p>
-        </p:txBody>
-      </p:sp>
-      <p:sp>
-        <p:nvSpPr>
-          <p:cNvPr id="21" name="TextBox 20"/>
-          <p:cNvSpPr txBox="1"/>
-          <p:nvPr/>
-        </p:nvSpPr>
-        <p:spPr>
-          <a:xfrm>
-            <a:off x="822959" y="4323342"/>
-            <a:ext cx="10682935" cy="563981"/>
-          </a:xfrm>
-          <a:prstGeom prst="rect">
-            <a:avLst/>
-          </a:prstGeom>
-          <a:noFill/>
-        </p:spPr>
-        <p:txBody>
-          <a:bodyPr wrap="square" lIns="0" rIns="0" tIns="0" bIns="0" anchor="ctr">
-            <a:spAutoFit/>
-          </a:bodyPr>
-          <a:lstStyle/>
-          <a:p>
-            <a:pPr algn="l">
-              <a:lnSpc>
-                <a:spcPct val="115000"/>
-              </a:lnSpc>
-              <a:spcAft>
-                <a:spcPts val="0"/>
-              </a:spcAft>
-            </a:pPr>
-            <a:r>
-              <a:rPr b="1" sz="1820" i="0">
-                <a:solidFill>
-                  <a:srgbClr val="E6ECF7"/>
-                </a:solidFill>
-                <a:latin typeface="Arial"/>
-              </a:rPr>
-              <a:t>The approval stays with a human who is independent of whoever implemented the change. That is the one line that does not move.</a:t>
-            </a:r>
           </a:p>
         </p:txBody>
       </p:sp>
@@ -23571,7 +23721,7 @@
                 </a:solidFill>
                 <a:latin typeface="Arial"/>
               </a:rPr>
-              <a:t>SLIDE 30 · WHAT I DON'T KNOW YET</a:t>
+              <a:t>SLIDE 30 · CONCLUSION</a:t>
             </a:r>
           </a:p>
         </p:txBody>
@@ -23613,7 +23763,7 @@
                 </a:solidFill>
                 <a:latin typeface="Georgia"/>
               </a:rPr>
-              <a:t>What I don't know yet</a:t>
+              <a:t>What moves, and what doesn't</a:t>
             </a:r>
           </a:p>
         </p:txBody>
@@ -23754,8 +23904,8 @@
         </p:nvSpPr>
         <p:spPr>
           <a:xfrm>
-            <a:off x="548640" y="1811803"/>
-            <a:ext cx="2636443" cy="2212022"/>
+            <a:off x="548640" y="2014037"/>
+            <a:ext cx="3576218" cy="1733232"/>
           </a:xfrm>
           <a:prstGeom prst="roundRect">
             <a:avLst>
@@ -23802,8 +23952,8 @@
         </p:nvSpPr>
         <p:spPr>
           <a:xfrm>
-            <a:off x="548640" y="1921531"/>
-            <a:ext cx="45720" cy="1992566"/>
+            <a:off x="548640" y="2123765"/>
+            <a:ext cx="45720" cy="1513776"/>
           </a:xfrm>
           <a:prstGeom prst="rect">
             <a:avLst/>
@@ -23846,8 +23996,8 @@
         </p:nvSpPr>
         <p:spPr>
           <a:xfrm>
-            <a:off x="749808" y="1939819"/>
-            <a:ext cx="2270683" cy="791908"/>
+            <a:off x="749808" y="2142053"/>
+            <a:ext cx="3210458" cy="540131"/>
           </a:xfrm>
           <a:prstGeom prst="rect">
             <a:avLst/>
@@ -23875,7 +24025,7 @@
                 </a:solidFill>
                 <a:latin typeface="Arial"/>
               </a:rPr>
-              <a:t>Same team, or outside it?</a:t>
+              <a:t>Shorter queue</a:t>
             </a:r>
           </a:p>
         </p:txBody>
@@ -23888,8 +24038,8 @@
         </p:nvSpPr>
         <p:spPr>
           <a:xfrm>
-            <a:off x="749808" y="2804879"/>
-            <a:ext cx="2270683" cy="1036065"/>
+            <a:off x="749808" y="2755336"/>
+            <a:ext cx="3210458" cy="809053"/>
           </a:xfrm>
           <a:prstGeom prst="rect">
             <a:avLst/>
@@ -23917,7 +24067,7 @@
                 </a:solidFill>
                 <a:latin typeface="Arial"/>
               </a:rPr>
-              <a:t>Everything here assumes same-team approval is enough. The regulation does not say.</a:t>
+              <a:t>Turn on what is there. Centralize the mechanical. Log it. Tier by risk.</a:t>
             </a:r>
           </a:p>
         </p:txBody>
@@ -23930,8 +24080,8 @@
         </p:nvSpPr>
         <p:spPr>
           <a:xfrm>
-            <a:off x="3367963" y="1811803"/>
-            <a:ext cx="2636443" cy="2212022"/>
+            <a:off x="4307738" y="2014037"/>
+            <a:ext cx="3576218" cy="1733232"/>
           </a:xfrm>
           <a:prstGeom prst="roundRect">
             <a:avLst>
@@ -23978,8 +24128,8 @@
         </p:nvSpPr>
         <p:spPr>
           <a:xfrm>
-            <a:off x="3367963" y="1921531"/>
-            <a:ext cx="45720" cy="1992566"/>
+            <a:off x="4307738" y="2123765"/>
+            <a:ext cx="45720" cy="1513776"/>
           </a:xfrm>
           <a:prstGeom prst="rect">
             <a:avLst/>
@@ -24022,8 +24172,8 @@
         </p:nvSpPr>
         <p:spPr>
           <a:xfrm>
-            <a:off x="3569131" y="1939819"/>
-            <a:ext cx="2270683" cy="791908"/>
+            <a:off x="4508906" y="2142053"/>
+            <a:ext cx="3210458" cy="540131"/>
           </a:xfrm>
           <a:prstGeom prst="rect">
             <a:avLst/>
@@ -24051,7 +24201,7 @@
                 </a:solidFill>
                 <a:latin typeface="Arial"/>
               </a:rPr>
-              <a:t>Does a classifier count as a function?</a:t>
+              <a:t>Higher quality, with evidence</a:t>
             </a:r>
           </a:p>
         </p:txBody>
@@ -24064,8 +24214,8 @@
         </p:nvSpPr>
         <p:spPr>
           <a:xfrm>
-            <a:off x="3569131" y="2804879"/>
-            <a:ext cx="2270683" cy="1036065"/>
+            <a:off x="4508906" y="2755336"/>
+            <a:ext cx="3210458" cy="809053"/>
           </a:xfrm>
           <a:prstGeom prst="rect">
             <a:avLst/>
@@ -24093,7 +24243,7 @@
                 </a:solidFill>
                 <a:latin typeface="Arial"/>
               </a:rPr>
-              <a:t>Meta and Zalando auto-approve. Nobody has written down whether DORA allows it.</a:t>
+              <a:t>A different model family reviews the change. Two more are design problems, not results.</a:t>
             </a:r>
           </a:p>
         </p:txBody>
@@ -24106,8 +24256,8 @@
         </p:nvSpPr>
         <p:spPr>
           <a:xfrm>
-            <a:off x="6187287" y="1811803"/>
-            <a:ext cx="2636443" cy="2212022"/>
+            <a:off x="8066836" y="2014037"/>
+            <a:ext cx="3576218" cy="1733232"/>
           </a:xfrm>
           <a:prstGeom prst="roundRect">
             <a:avLst>
@@ -24154,8 +24304,8 @@
         </p:nvSpPr>
         <p:spPr>
           <a:xfrm>
-            <a:off x="6187287" y="1921531"/>
-            <a:ext cx="45720" cy="1992566"/>
+            <a:off x="8066836" y="2123765"/>
+            <a:ext cx="45720" cy="1513776"/>
           </a:xfrm>
           <a:prstGeom prst="rect">
             <a:avLst/>
@@ -24198,8 +24348,8 @@
         </p:nvSpPr>
         <p:spPr>
           <a:xfrm>
-            <a:off x="6388455" y="1939819"/>
-            <a:ext cx="2270683" cy="791908"/>
+            <a:off x="8268004" y="2142053"/>
+            <a:ext cx="3210458" cy="540131"/>
           </a:xfrm>
           <a:prstGeom prst="rect">
             <a:avLst/>
@@ -24227,7 +24377,7 @@
                 </a:solidFill>
                 <a:latin typeface="Arial"/>
               </a:rPr>
-              <a:t>What is switched on today?</a:t>
+              <a:t>Set aside</a:t>
             </a:r>
           </a:p>
         </p:txBody>
@@ -24240,8 +24390,8 @@
         </p:nvSpPr>
         <p:spPr>
           <a:xfrm>
-            <a:off x="6388455" y="2804879"/>
-            <a:ext cx="2270683" cy="1036065"/>
+            <a:off x="8268004" y="2755336"/>
+            <a:ext cx="3210458" cy="809053"/>
           </a:xfrm>
           <a:prstGeom prst="rect">
             <a:avLst/>
@@ -24269,417 +24419,21 @@
                 </a:solidFill>
                 <a:latin typeface="Arial"/>
               </a:rPr>
-              <a:t>A day of checking I have not done.</a:t>
-            </a:r>
-          </a:p>
-        </p:txBody>
-      </p:sp>
-      <p:sp>
-        <p:nvSpPr>
-          <p:cNvPr id="20" name="Rounded Rectangle 19"/>
+              <a:t>Restricting AI use. Open source defends against strangers. We employ our authors.</a:t>
+            </a:r>
+          </a:p>
+        </p:txBody>
+      </p:sp>
+      <p:sp>
+        <p:nvSpPr>
+          <p:cNvPr id="20" name="Rectangle 19"/>
           <p:cNvSpPr/>
           <p:nvPr/>
         </p:nvSpPr>
         <p:spPr>
           <a:xfrm>
-            <a:off x="9006611" y="1811803"/>
-            <a:ext cx="2636443" cy="2212022"/>
-          </a:xfrm>
-          <a:prstGeom prst="roundRect">
-            <a:avLst>
-              <a:gd name="adj" fmla="val 4000"/>
-            </a:avLst>
-          </a:prstGeom>
-          <a:solidFill>
-            <a:srgbClr val="151D2E"/>
-          </a:solidFill>
-          <a:ln w="9525">
-            <a:solidFill>
-              <a:srgbClr val="35415A"/>
-            </a:solidFill>
-          </a:ln>
-          <a:effectLst/>
-        </p:spPr>
-        <p:style>
-          <a:lnRef idx="1">
-            <a:schemeClr val="accent1"/>
-          </a:lnRef>
-          <a:fillRef idx="3">
-            <a:schemeClr val="accent1"/>
-          </a:fillRef>
-          <a:effectRef idx="2">
-            <a:schemeClr val="accent1"/>
-          </a:effectRef>
-          <a:fontRef idx="minor">
-            <a:schemeClr val="lt1"/>
-          </a:fontRef>
-        </p:style>
-        <p:txBody>
-          <a:bodyPr rtlCol="0" anchor="ctr"/>
-          <a:lstStyle/>
-          <a:p>
-            <a:pPr algn="ctr"/>
-          </a:p>
-        </p:txBody>
-      </p:sp>
-      <p:sp>
-        <p:nvSpPr>
-          <p:cNvPr id="21" name="Rectangle 20"/>
-          <p:cNvSpPr/>
-          <p:nvPr/>
-        </p:nvSpPr>
-        <p:spPr>
-          <a:xfrm>
-            <a:off x="9006611" y="1921531"/>
-            <a:ext cx="45720" cy="1992566"/>
-          </a:xfrm>
-          <a:prstGeom prst="rect">
-            <a:avLst/>
-          </a:prstGeom>
-          <a:solidFill>
-            <a:srgbClr val="E8A33D"/>
-          </a:solidFill>
-          <a:ln>
-            <a:noFill/>
-          </a:ln>
-          <a:effectLst/>
-        </p:spPr>
-        <p:style>
-          <a:lnRef idx="1">
-            <a:schemeClr val="accent1"/>
-          </a:lnRef>
-          <a:fillRef idx="3">
-            <a:schemeClr val="accent1"/>
-          </a:fillRef>
-          <a:effectRef idx="2">
-            <a:schemeClr val="accent1"/>
-          </a:effectRef>
-          <a:fontRef idx="minor">
-            <a:schemeClr val="lt1"/>
-          </a:fontRef>
-        </p:style>
-        <p:txBody>
-          <a:bodyPr rtlCol="0" anchor="ctr"/>
-          <a:lstStyle/>
-          <a:p>
-            <a:pPr algn="ctr"/>
-          </a:p>
-        </p:txBody>
-      </p:sp>
-      <p:sp>
-        <p:nvSpPr>
-          <p:cNvPr id="22" name="TextBox 21"/>
-          <p:cNvSpPr txBox="1"/>
-          <p:nvPr/>
-        </p:nvSpPr>
-        <p:spPr>
-          <a:xfrm>
-            <a:off x="9207779" y="1939819"/>
-            <a:ext cx="2270683" cy="791908"/>
-          </a:xfrm>
-          <a:prstGeom prst="rect">
-            <a:avLst/>
-          </a:prstGeom>
-          <a:noFill/>
-        </p:spPr>
-        <p:txBody>
-          <a:bodyPr wrap="square" lIns="0" rIns="0" tIns="0" bIns="0" anchor="t">
-            <a:spAutoFit/>
-          </a:bodyPr>
-          <a:lstStyle/>
-          <a:p>
-            <a:pPr algn="l">
-              <a:lnSpc>
-                <a:spcPct val="115000"/>
-              </a:lnSpc>
-              <a:spcAft>
-                <a:spcPts val="0"/>
-              </a:spcAft>
-            </a:pPr>
-            <a:r>
-              <a:rPr b="1" sz="1625" i="0">
-                <a:solidFill>
-                  <a:srgbClr val="E6ECF7"/>
-                </a:solidFill>
-                <a:latin typeface="Arial"/>
-              </a:rPr>
-              <a:t>Does the author's check survive a team?</a:t>
-            </a:r>
-          </a:p>
-        </p:txBody>
-      </p:sp>
-      <p:sp>
-        <p:nvSpPr>
-          <p:cNvPr id="23" name="TextBox 22"/>
-          <p:cNvSpPr txBox="1"/>
-          <p:nvPr/>
-        </p:nvSpPr>
-        <p:spPr>
-          <a:xfrm>
-            <a:off x="9207779" y="2804879"/>
-            <a:ext cx="2270683" cy="1036065"/>
-          </a:xfrm>
-          <a:prstGeom prst="rect">
-            <a:avLst/>
-          </a:prstGeom>
-          <a:noFill/>
-        </p:spPr>
-        <p:txBody>
-          <a:bodyPr wrap="square" lIns="0" rIns="0" tIns="0" bIns="0" anchor="t">
-            <a:spAutoFit/>
-          </a:bodyPr>
-          <a:lstStyle/>
-          <a:p>
-            <a:pPr algn="l">
-              <a:lnSpc>
-                <a:spcPct val="125000"/>
-              </a:lnSpc>
-              <a:spcAft>
-                <a:spcPts val="0"/>
-              </a:spcAft>
-            </a:pPr>
-            <a:r>
-              <a:rPr b="0" sz="1430" i="0">
-                <a:solidFill>
-                  <a:srgbClr val="E6ECF7"/>
-                </a:solidFill>
-                <a:latin typeface="Arial"/>
-              </a:rPr>
-              <a:t>Nobody has used it.</a:t>
-            </a:r>
-          </a:p>
-        </p:txBody>
-      </p:sp>
-      <p:sp>
-        <p:nvSpPr>
-          <p:cNvPr id="24" name="Rectangle 23"/>
-          <p:cNvSpPr/>
-          <p:nvPr/>
-        </p:nvSpPr>
-        <p:spPr>
-          <a:xfrm>
-            <a:off x="548640" y="4508457"/>
-            <a:ext cx="5455767" cy="911352"/>
-          </a:xfrm>
-          <a:prstGeom prst="rect">
-            <a:avLst/>
-          </a:prstGeom>
-          <a:solidFill>
-            <a:srgbClr val="151D2E"/>
-          </a:solidFill>
-          <a:ln w="9525">
-            <a:solidFill>
-              <a:srgbClr val="35415A"/>
-            </a:solidFill>
-          </a:ln>
-          <a:effectLst/>
-        </p:spPr>
-        <p:style>
-          <a:lnRef idx="1">
-            <a:schemeClr val="accent1"/>
-          </a:lnRef>
-          <a:fillRef idx="3">
-            <a:schemeClr val="accent1"/>
-          </a:fillRef>
-          <a:effectRef idx="2">
-            <a:schemeClr val="accent1"/>
-          </a:effectRef>
-          <a:fontRef idx="minor">
-            <a:schemeClr val="lt1"/>
-          </a:fontRef>
-        </p:style>
-        <p:txBody>
-          <a:bodyPr rtlCol="0" anchor="ctr"/>
-          <a:lstStyle/>
-          <a:p>
-            <a:pPr algn="ctr"/>
-          </a:p>
-        </p:txBody>
-      </p:sp>
-      <p:sp>
-        <p:nvSpPr>
-          <p:cNvPr id="25" name="Rectangle 24"/>
-          <p:cNvSpPr/>
-          <p:nvPr/>
-        </p:nvSpPr>
-        <p:spPr>
-          <a:xfrm>
-            <a:off x="548640" y="4508457"/>
-            <a:ext cx="45720" cy="911352"/>
-          </a:xfrm>
-          <a:prstGeom prst="rect">
-            <a:avLst/>
-          </a:prstGeom>
-          <a:solidFill>
-            <a:srgbClr val="E8A33D"/>
-          </a:solidFill>
-          <a:ln>
-            <a:noFill/>
-          </a:ln>
-          <a:effectLst/>
-        </p:spPr>
-        <p:style>
-          <a:lnRef idx="1">
-            <a:schemeClr val="accent1"/>
-          </a:lnRef>
-          <a:fillRef idx="3">
-            <a:schemeClr val="accent1"/>
-          </a:fillRef>
-          <a:effectRef idx="2">
-            <a:schemeClr val="accent1"/>
-          </a:effectRef>
-          <a:fontRef idx="minor">
-            <a:schemeClr val="lt1"/>
-          </a:fontRef>
-        </p:style>
-        <p:txBody>
-          <a:bodyPr rtlCol="0" anchor="ctr"/>
-          <a:lstStyle/>
-          <a:p>
-            <a:pPr algn="ctr"/>
-          </a:p>
-        </p:txBody>
-      </p:sp>
-      <p:sp>
-        <p:nvSpPr>
-          <p:cNvPr id="26" name="TextBox 25"/>
-          <p:cNvSpPr txBox="1"/>
-          <p:nvPr/>
-        </p:nvSpPr>
-        <p:spPr>
-          <a:xfrm>
-            <a:off x="749808" y="4618185"/>
-            <a:ext cx="5090007" cy="228600"/>
-          </a:xfrm>
-          <a:prstGeom prst="rect">
-            <a:avLst/>
-          </a:prstGeom>
-          <a:noFill/>
-        </p:spPr>
-        <p:txBody>
-          <a:bodyPr wrap="square" lIns="0" rIns="0" tIns="0" bIns="0" anchor="t">
-            <a:spAutoFit/>
-          </a:bodyPr>
-          <a:lstStyle/>
-          <a:p>
-            <a:pPr algn="l">
-              <a:lnSpc>
-                <a:spcPct val="115000"/>
-              </a:lnSpc>
-              <a:spcAft>
-                <a:spcPts val="0"/>
-              </a:spcAft>
-            </a:pPr>
-            <a:r>
-              <a:rPr b="1" sz="1495" i="0">
-                <a:solidFill>
-                  <a:srgbClr val="E6ECF7"/>
-                </a:solidFill>
-                <a:latin typeface="Arial"/>
-              </a:rPr>
-              <a:t>What would help me most</a:t>
-            </a:r>
-          </a:p>
-        </p:txBody>
-      </p:sp>
-      <p:sp>
-        <p:nvSpPr>
-          <p:cNvPr id="27" name="TextBox 26"/>
-          <p:cNvSpPr txBox="1"/>
-          <p:nvPr/>
-        </p:nvSpPr>
-        <p:spPr>
-          <a:xfrm>
-            <a:off x="749808" y="4855929"/>
-            <a:ext cx="5090007" cy="435864"/>
-          </a:xfrm>
-          <a:prstGeom prst="rect">
-            <a:avLst/>
-          </a:prstGeom>
-          <a:noFill/>
-        </p:spPr>
-        <p:txBody>
-          <a:bodyPr wrap="square" lIns="0" rIns="0" tIns="0" bIns="0" anchor="t">
-            <a:spAutoFit/>
-          </a:bodyPr>
-          <a:lstStyle/>
-          <a:p>
-            <a:pPr algn="l">
-              <a:lnSpc>
-                <a:spcPct val="120000"/>
-              </a:lnSpc>
-              <a:spcAft>
-                <a:spcPts val="0"/>
-              </a:spcAft>
-            </a:pPr>
-            <a:r>
-              <a:rPr b="0" sz="1430" i="0">
-                <a:solidFill>
-                  <a:srgbClr val="E6ECF7"/>
-                </a:solidFill>
-                <a:latin typeface="Arial"/>
-              </a:rPr>
-              <a:t>A review decision you made and had to undo. What did it cost?</a:t>
-            </a:r>
-          </a:p>
-        </p:txBody>
-      </p:sp>
-      <p:sp>
-        <p:nvSpPr>
-          <p:cNvPr id="28" name="Rectangle 27"/>
-          <p:cNvSpPr/>
-          <p:nvPr/>
-        </p:nvSpPr>
-        <p:spPr>
-          <a:xfrm>
-            <a:off x="6187287" y="4508457"/>
-            <a:ext cx="5455767" cy="911352"/>
-          </a:xfrm>
-          <a:prstGeom prst="rect">
-            <a:avLst/>
-          </a:prstGeom>
-          <a:solidFill>
-            <a:srgbClr val="151D2E"/>
-          </a:solidFill>
-          <a:ln w="9525">
-            <a:solidFill>
-              <a:srgbClr val="35415A"/>
-            </a:solidFill>
-          </a:ln>
-          <a:effectLst/>
-        </p:spPr>
-        <p:style>
-          <a:lnRef idx="1">
-            <a:schemeClr val="accent1"/>
-          </a:lnRef>
-          <a:fillRef idx="3">
-            <a:schemeClr val="accent1"/>
-          </a:fillRef>
-          <a:effectRef idx="2">
-            <a:schemeClr val="accent1"/>
-          </a:effectRef>
-          <a:fontRef idx="minor">
-            <a:schemeClr val="lt1"/>
-          </a:fontRef>
-        </p:style>
-        <p:txBody>
-          <a:bodyPr rtlCol="0" anchor="ctr"/>
-          <a:lstStyle/>
-          <a:p>
-            <a:pPr algn="ctr"/>
-          </a:p>
-        </p:txBody>
-      </p:sp>
-      <p:sp>
-        <p:nvSpPr>
-          <p:cNvPr id="29" name="Rectangle 28"/>
-          <p:cNvSpPr/>
-          <p:nvPr/>
-        </p:nvSpPr>
-        <p:spPr>
-          <a:xfrm>
-            <a:off x="6187287" y="4508457"/>
-            <a:ext cx="45720" cy="911352"/>
+            <a:off x="548640" y="4231902"/>
+            <a:ext cx="54864" cy="746861"/>
           </a:xfrm>
           <a:prstGeom prst="rect">
             <a:avLst/>
@@ -24716,14 +24470,14 @@
       </p:sp>
       <p:sp>
         <p:nvSpPr>
-          <p:cNvPr id="30" name="TextBox 29"/>
+          <p:cNvPr id="21" name="TextBox 20"/>
           <p:cNvSpPr txBox="1"/>
           <p:nvPr/>
         </p:nvSpPr>
         <p:spPr>
           <a:xfrm>
-            <a:off x="6388455" y="4618185"/>
-            <a:ext cx="5090007" cy="228600"/>
+            <a:off x="822959" y="4323342"/>
+            <a:ext cx="10682935" cy="563981"/>
           </a:xfrm>
           <a:prstGeom prst="rect">
             <a:avLst/>
@@ -24731,7 +24485,7 @@
           <a:noFill/>
         </p:spPr>
         <p:txBody>
-          <a:bodyPr wrap="square" lIns="0" rIns="0" tIns="0" bIns="0" anchor="t">
+          <a:bodyPr wrap="square" lIns="0" rIns="0" tIns="0" bIns="0" anchor="ctr">
             <a:spAutoFit/>
           </a:bodyPr>
           <a:lstStyle/>
@@ -24745,55 +24499,13 @@
               </a:spcAft>
             </a:pPr>
             <a:r>
-              <a:rPr b="1" sz="1495" i="0">
+              <a:rPr b="1" sz="1820" i="0">
                 <a:solidFill>
                   <a:srgbClr val="E6ECF7"/>
                 </a:solidFill>
                 <a:latin typeface="Arial"/>
               </a:rPr>
-              <a:t>What would change my mind</a:t>
-            </a:r>
-          </a:p>
-        </p:txBody>
-      </p:sp>
-      <p:sp>
-        <p:nvSpPr>
-          <p:cNvPr id="31" name="TextBox 30"/>
-          <p:cNvSpPr txBox="1"/>
-          <p:nvPr/>
-        </p:nvSpPr>
-        <p:spPr>
-          <a:xfrm>
-            <a:off x="6388455" y="4855929"/>
-            <a:ext cx="5090007" cy="435864"/>
-          </a:xfrm>
-          <a:prstGeom prst="rect">
-            <a:avLst/>
-          </a:prstGeom>
-          <a:noFill/>
-        </p:spPr>
-        <p:txBody>
-          <a:bodyPr wrap="square" lIns="0" rIns="0" tIns="0" bIns="0" anchor="t">
-            <a:spAutoFit/>
-          </a:bodyPr>
-          <a:lstStyle/>
-          <a:p>
-            <a:pPr algn="l">
-              <a:lnSpc>
-                <a:spcPct val="120000"/>
-              </a:lnSpc>
-              <a:spcAft>
-                <a:spcPts val="0"/>
-              </a:spcAft>
-            </a:pPr>
-            <a:r>
-              <a:rPr b="0" sz="1430" i="0">
-                <a:solidFill>
-                  <a:srgbClr val="E6ECF7"/>
-                </a:solidFill>
-                <a:latin typeface="Arial"/>
-              </a:rPr>
-              <a:t>A regulated company whose auditor accepted a machine's approval.</a:t>
+              <a:t>The approval stays with a human who is independent of whoever implemented the change. That is the one line that does not move.</a:t>
             </a:r>
           </a:p>
         </p:txBody>
@@ -24897,7 +24609,7 @@
                 </a:solidFill>
                 <a:latin typeface="Arial"/>
               </a:rPr>
-              <a:t>SLIDE 31 · APPENDIX A1</a:t>
+              <a:t>SLIDE 31 · WHAT I DON'T KNOW YET</a:t>
             </a:r>
           </a:p>
         </p:txBody>
@@ -24939,7 +24651,7 @@
                 </a:solidFill>
                 <a:latin typeface="Georgia"/>
               </a:rPr>
-              <a:t>A1 — Who did what about the queue</a:t>
+              <a:t>What I don't know yet</a:t>
             </a:r>
           </a:p>
         </p:txBody>
@@ -25068,6 +24780,1332 @@
                 <a:latin typeface="Arial"/>
               </a:rPr>
               <a:t>31</a:t>
+            </a:r>
+          </a:p>
+        </p:txBody>
+      </p:sp>
+      <p:sp>
+        <p:nvSpPr>
+          <p:cNvPr id="8" name="Rounded Rectangle 7"/>
+          <p:cNvSpPr/>
+          <p:nvPr/>
+        </p:nvSpPr>
+        <p:spPr>
+          <a:xfrm>
+            <a:off x="548640" y="1811803"/>
+            <a:ext cx="2636443" cy="2212022"/>
+          </a:xfrm>
+          <a:prstGeom prst="roundRect">
+            <a:avLst>
+              <a:gd name="adj" fmla="val 4000"/>
+            </a:avLst>
+          </a:prstGeom>
+          <a:solidFill>
+            <a:srgbClr val="151D2E"/>
+          </a:solidFill>
+          <a:ln w="9525">
+            <a:solidFill>
+              <a:srgbClr val="35415A"/>
+            </a:solidFill>
+          </a:ln>
+          <a:effectLst/>
+        </p:spPr>
+        <p:style>
+          <a:lnRef idx="1">
+            <a:schemeClr val="accent1"/>
+          </a:lnRef>
+          <a:fillRef idx="3">
+            <a:schemeClr val="accent1"/>
+          </a:fillRef>
+          <a:effectRef idx="2">
+            <a:schemeClr val="accent1"/>
+          </a:effectRef>
+          <a:fontRef idx="minor">
+            <a:schemeClr val="lt1"/>
+          </a:fontRef>
+        </p:style>
+        <p:txBody>
+          <a:bodyPr rtlCol="0" anchor="ctr"/>
+          <a:lstStyle/>
+          <a:p>
+            <a:pPr algn="ctr"/>
+          </a:p>
+        </p:txBody>
+      </p:sp>
+      <p:sp>
+        <p:nvSpPr>
+          <p:cNvPr id="9" name="Rectangle 8"/>
+          <p:cNvSpPr/>
+          <p:nvPr/>
+        </p:nvSpPr>
+        <p:spPr>
+          <a:xfrm>
+            <a:off x="548640" y="1921531"/>
+            <a:ext cx="45720" cy="1992566"/>
+          </a:xfrm>
+          <a:prstGeom prst="rect">
+            <a:avLst/>
+          </a:prstGeom>
+          <a:solidFill>
+            <a:srgbClr val="29D3E0"/>
+          </a:solidFill>
+          <a:ln>
+            <a:noFill/>
+          </a:ln>
+          <a:effectLst/>
+        </p:spPr>
+        <p:style>
+          <a:lnRef idx="1">
+            <a:schemeClr val="accent1"/>
+          </a:lnRef>
+          <a:fillRef idx="3">
+            <a:schemeClr val="accent1"/>
+          </a:fillRef>
+          <a:effectRef idx="2">
+            <a:schemeClr val="accent1"/>
+          </a:effectRef>
+          <a:fontRef idx="minor">
+            <a:schemeClr val="lt1"/>
+          </a:fontRef>
+        </p:style>
+        <p:txBody>
+          <a:bodyPr rtlCol="0" anchor="ctr"/>
+          <a:lstStyle/>
+          <a:p>
+            <a:pPr algn="ctr"/>
+          </a:p>
+        </p:txBody>
+      </p:sp>
+      <p:sp>
+        <p:nvSpPr>
+          <p:cNvPr id="10" name="TextBox 9"/>
+          <p:cNvSpPr txBox="1"/>
+          <p:nvPr/>
+        </p:nvSpPr>
+        <p:spPr>
+          <a:xfrm>
+            <a:off x="749808" y="1939819"/>
+            <a:ext cx="2270683" cy="791908"/>
+          </a:xfrm>
+          <a:prstGeom prst="rect">
+            <a:avLst/>
+          </a:prstGeom>
+          <a:noFill/>
+        </p:spPr>
+        <p:txBody>
+          <a:bodyPr wrap="square" lIns="0" rIns="0" tIns="0" bIns="0" anchor="t">
+            <a:spAutoFit/>
+          </a:bodyPr>
+          <a:lstStyle/>
+          <a:p>
+            <a:pPr algn="l">
+              <a:lnSpc>
+                <a:spcPct val="115000"/>
+              </a:lnSpc>
+              <a:spcAft>
+                <a:spcPts val="0"/>
+              </a:spcAft>
+            </a:pPr>
+            <a:r>
+              <a:rPr b="1" sz="1625" i="0">
+                <a:solidFill>
+                  <a:srgbClr val="E6ECF7"/>
+                </a:solidFill>
+                <a:latin typeface="Arial"/>
+              </a:rPr>
+              <a:t>Same team, or outside it?</a:t>
+            </a:r>
+          </a:p>
+        </p:txBody>
+      </p:sp>
+      <p:sp>
+        <p:nvSpPr>
+          <p:cNvPr id="11" name="TextBox 10"/>
+          <p:cNvSpPr txBox="1"/>
+          <p:nvPr/>
+        </p:nvSpPr>
+        <p:spPr>
+          <a:xfrm>
+            <a:off x="749808" y="2804879"/>
+            <a:ext cx="2270683" cy="1036065"/>
+          </a:xfrm>
+          <a:prstGeom prst="rect">
+            <a:avLst/>
+          </a:prstGeom>
+          <a:noFill/>
+        </p:spPr>
+        <p:txBody>
+          <a:bodyPr wrap="square" lIns="0" rIns="0" tIns="0" bIns="0" anchor="t">
+            <a:spAutoFit/>
+          </a:bodyPr>
+          <a:lstStyle/>
+          <a:p>
+            <a:pPr algn="l">
+              <a:lnSpc>
+                <a:spcPct val="125000"/>
+              </a:lnSpc>
+              <a:spcAft>
+                <a:spcPts val="0"/>
+              </a:spcAft>
+            </a:pPr>
+            <a:r>
+              <a:rPr b="0" sz="1430" i="0">
+                <a:solidFill>
+                  <a:srgbClr val="E6ECF7"/>
+                </a:solidFill>
+                <a:latin typeface="Arial"/>
+              </a:rPr>
+              <a:t>Everything here assumes same-team approval is enough. The regulation does not say.</a:t>
+            </a:r>
+          </a:p>
+        </p:txBody>
+      </p:sp>
+      <p:sp>
+        <p:nvSpPr>
+          <p:cNvPr id="12" name="Rounded Rectangle 11"/>
+          <p:cNvSpPr/>
+          <p:nvPr/>
+        </p:nvSpPr>
+        <p:spPr>
+          <a:xfrm>
+            <a:off x="3367963" y="1811803"/>
+            <a:ext cx="2636443" cy="2212022"/>
+          </a:xfrm>
+          <a:prstGeom prst="roundRect">
+            <a:avLst>
+              <a:gd name="adj" fmla="val 4000"/>
+            </a:avLst>
+          </a:prstGeom>
+          <a:solidFill>
+            <a:srgbClr val="151D2E"/>
+          </a:solidFill>
+          <a:ln w="9525">
+            <a:solidFill>
+              <a:srgbClr val="35415A"/>
+            </a:solidFill>
+          </a:ln>
+          <a:effectLst/>
+        </p:spPr>
+        <p:style>
+          <a:lnRef idx="1">
+            <a:schemeClr val="accent1"/>
+          </a:lnRef>
+          <a:fillRef idx="3">
+            <a:schemeClr val="accent1"/>
+          </a:fillRef>
+          <a:effectRef idx="2">
+            <a:schemeClr val="accent1"/>
+          </a:effectRef>
+          <a:fontRef idx="minor">
+            <a:schemeClr val="lt1"/>
+          </a:fontRef>
+        </p:style>
+        <p:txBody>
+          <a:bodyPr rtlCol="0" anchor="ctr"/>
+          <a:lstStyle/>
+          <a:p>
+            <a:pPr algn="ctr"/>
+          </a:p>
+        </p:txBody>
+      </p:sp>
+      <p:sp>
+        <p:nvSpPr>
+          <p:cNvPr id="13" name="Rectangle 12"/>
+          <p:cNvSpPr/>
+          <p:nvPr/>
+        </p:nvSpPr>
+        <p:spPr>
+          <a:xfrm>
+            <a:off x="3367963" y="1921531"/>
+            <a:ext cx="45720" cy="1992566"/>
+          </a:xfrm>
+          <a:prstGeom prst="rect">
+            <a:avLst/>
+          </a:prstGeom>
+          <a:solidFill>
+            <a:srgbClr val="E8A33D"/>
+          </a:solidFill>
+          <a:ln>
+            <a:noFill/>
+          </a:ln>
+          <a:effectLst/>
+        </p:spPr>
+        <p:style>
+          <a:lnRef idx="1">
+            <a:schemeClr val="accent1"/>
+          </a:lnRef>
+          <a:fillRef idx="3">
+            <a:schemeClr val="accent1"/>
+          </a:fillRef>
+          <a:effectRef idx="2">
+            <a:schemeClr val="accent1"/>
+          </a:effectRef>
+          <a:fontRef idx="minor">
+            <a:schemeClr val="lt1"/>
+          </a:fontRef>
+        </p:style>
+        <p:txBody>
+          <a:bodyPr rtlCol="0" anchor="ctr"/>
+          <a:lstStyle/>
+          <a:p>
+            <a:pPr algn="ctr"/>
+          </a:p>
+        </p:txBody>
+      </p:sp>
+      <p:sp>
+        <p:nvSpPr>
+          <p:cNvPr id="14" name="TextBox 13"/>
+          <p:cNvSpPr txBox="1"/>
+          <p:nvPr/>
+        </p:nvSpPr>
+        <p:spPr>
+          <a:xfrm>
+            <a:off x="3569131" y="1939819"/>
+            <a:ext cx="2270683" cy="791908"/>
+          </a:xfrm>
+          <a:prstGeom prst="rect">
+            <a:avLst/>
+          </a:prstGeom>
+          <a:noFill/>
+        </p:spPr>
+        <p:txBody>
+          <a:bodyPr wrap="square" lIns="0" rIns="0" tIns="0" bIns="0" anchor="t">
+            <a:spAutoFit/>
+          </a:bodyPr>
+          <a:lstStyle/>
+          <a:p>
+            <a:pPr algn="l">
+              <a:lnSpc>
+                <a:spcPct val="115000"/>
+              </a:lnSpc>
+              <a:spcAft>
+                <a:spcPts val="0"/>
+              </a:spcAft>
+            </a:pPr>
+            <a:r>
+              <a:rPr b="1" sz="1625" i="0">
+                <a:solidFill>
+                  <a:srgbClr val="E6ECF7"/>
+                </a:solidFill>
+                <a:latin typeface="Arial"/>
+              </a:rPr>
+              <a:t>Does a classifier count as a function?</a:t>
+            </a:r>
+          </a:p>
+        </p:txBody>
+      </p:sp>
+      <p:sp>
+        <p:nvSpPr>
+          <p:cNvPr id="15" name="TextBox 14"/>
+          <p:cNvSpPr txBox="1"/>
+          <p:nvPr/>
+        </p:nvSpPr>
+        <p:spPr>
+          <a:xfrm>
+            <a:off x="3569131" y="2804879"/>
+            <a:ext cx="2270683" cy="1036065"/>
+          </a:xfrm>
+          <a:prstGeom prst="rect">
+            <a:avLst/>
+          </a:prstGeom>
+          <a:noFill/>
+        </p:spPr>
+        <p:txBody>
+          <a:bodyPr wrap="square" lIns="0" rIns="0" tIns="0" bIns="0" anchor="t">
+            <a:spAutoFit/>
+          </a:bodyPr>
+          <a:lstStyle/>
+          <a:p>
+            <a:pPr algn="l">
+              <a:lnSpc>
+                <a:spcPct val="125000"/>
+              </a:lnSpc>
+              <a:spcAft>
+                <a:spcPts val="0"/>
+              </a:spcAft>
+            </a:pPr>
+            <a:r>
+              <a:rPr b="0" sz="1430" i="0">
+                <a:solidFill>
+                  <a:srgbClr val="E6ECF7"/>
+                </a:solidFill>
+                <a:latin typeface="Arial"/>
+              </a:rPr>
+              <a:t>Meta and Zalando auto-approve. Nobody has written down whether DORA allows it.</a:t>
+            </a:r>
+          </a:p>
+        </p:txBody>
+      </p:sp>
+      <p:sp>
+        <p:nvSpPr>
+          <p:cNvPr id="16" name="Rounded Rectangle 15"/>
+          <p:cNvSpPr/>
+          <p:nvPr/>
+        </p:nvSpPr>
+        <p:spPr>
+          <a:xfrm>
+            <a:off x="6187287" y="1811803"/>
+            <a:ext cx="2636443" cy="2212022"/>
+          </a:xfrm>
+          <a:prstGeom prst="roundRect">
+            <a:avLst>
+              <a:gd name="adj" fmla="val 4000"/>
+            </a:avLst>
+          </a:prstGeom>
+          <a:solidFill>
+            <a:srgbClr val="151D2E"/>
+          </a:solidFill>
+          <a:ln w="9525">
+            <a:solidFill>
+              <a:srgbClr val="35415A"/>
+            </a:solidFill>
+          </a:ln>
+          <a:effectLst/>
+        </p:spPr>
+        <p:style>
+          <a:lnRef idx="1">
+            <a:schemeClr val="accent1"/>
+          </a:lnRef>
+          <a:fillRef idx="3">
+            <a:schemeClr val="accent1"/>
+          </a:fillRef>
+          <a:effectRef idx="2">
+            <a:schemeClr val="accent1"/>
+          </a:effectRef>
+          <a:fontRef idx="minor">
+            <a:schemeClr val="lt1"/>
+          </a:fontRef>
+        </p:style>
+        <p:txBody>
+          <a:bodyPr rtlCol="0" anchor="ctr"/>
+          <a:lstStyle/>
+          <a:p>
+            <a:pPr algn="ctr"/>
+          </a:p>
+        </p:txBody>
+      </p:sp>
+      <p:sp>
+        <p:nvSpPr>
+          <p:cNvPr id="17" name="Rectangle 16"/>
+          <p:cNvSpPr/>
+          <p:nvPr/>
+        </p:nvSpPr>
+        <p:spPr>
+          <a:xfrm>
+            <a:off x="6187287" y="1921531"/>
+            <a:ext cx="45720" cy="1992566"/>
+          </a:xfrm>
+          <a:prstGeom prst="rect">
+            <a:avLst/>
+          </a:prstGeom>
+          <a:solidFill>
+            <a:srgbClr val="29D3E0"/>
+          </a:solidFill>
+          <a:ln>
+            <a:noFill/>
+          </a:ln>
+          <a:effectLst/>
+        </p:spPr>
+        <p:style>
+          <a:lnRef idx="1">
+            <a:schemeClr val="accent1"/>
+          </a:lnRef>
+          <a:fillRef idx="3">
+            <a:schemeClr val="accent1"/>
+          </a:fillRef>
+          <a:effectRef idx="2">
+            <a:schemeClr val="accent1"/>
+          </a:effectRef>
+          <a:fontRef idx="minor">
+            <a:schemeClr val="lt1"/>
+          </a:fontRef>
+        </p:style>
+        <p:txBody>
+          <a:bodyPr rtlCol="0" anchor="ctr"/>
+          <a:lstStyle/>
+          <a:p>
+            <a:pPr algn="ctr"/>
+          </a:p>
+        </p:txBody>
+      </p:sp>
+      <p:sp>
+        <p:nvSpPr>
+          <p:cNvPr id="18" name="TextBox 17"/>
+          <p:cNvSpPr txBox="1"/>
+          <p:nvPr/>
+        </p:nvSpPr>
+        <p:spPr>
+          <a:xfrm>
+            <a:off x="6388455" y="1939819"/>
+            <a:ext cx="2270683" cy="791908"/>
+          </a:xfrm>
+          <a:prstGeom prst="rect">
+            <a:avLst/>
+          </a:prstGeom>
+          <a:noFill/>
+        </p:spPr>
+        <p:txBody>
+          <a:bodyPr wrap="square" lIns="0" rIns="0" tIns="0" bIns="0" anchor="t">
+            <a:spAutoFit/>
+          </a:bodyPr>
+          <a:lstStyle/>
+          <a:p>
+            <a:pPr algn="l">
+              <a:lnSpc>
+                <a:spcPct val="115000"/>
+              </a:lnSpc>
+              <a:spcAft>
+                <a:spcPts val="0"/>
+              </a:spcAft>
+            </a:pPr>
+            <a:r>
+              <a:rPr b="1" sz="1625" i="0">
+                <a:solidFill>
+                  <a:srgbClr val="E6ECF7"/>
+                </a:solidFill>
+                <a:latin typeface="Arial"/>
+              </a:rPr>
+              <a:t>What is switched on today?</a:t>
+            </a:r>
+          </a:p>
+        </p:txBody>
+      </p:sp>
+      <p:sp>
+        <p:nvSpPr>
+          <p:cNvPr id="19" name="TextBox 18"/>
+          <p:cNvSpPr txBox="1"/>
+          <p:nvPr/>
+        </p:nvSpPr>
+        <p:spPr>
+          <a:xfrm>
+            <a:off x="6388455" y="2804879"/>
+            <a:ext cx="2270683" cy="1036065"/>
+          </a:xfrm>
+          <a:prstGeom prst="rect">
+            <a:avLst/>
+          </a:prstGeom>
+          <a:noFill/>
+        </p:spPr>
+        <p:txBody>
+          <a:bodyPr wrap="square" lIns="0" rIns="0" tIns="0" bIns="0" anchor="t">
+            <a:spAutoFit/>
+          </a:bodyPr>
+          <a:lstStyle/>
+          <a:p>
+            <a:pPr algn="l">
+              <a:lnSpc>
+                <a:spcPct val="125000"/>
+              </a:lnSpc>
+              <a:spcAft>
+                <a:spcPts val="0"/>
+              </a:spcAft>
+            </a:pPr>
+            <a:r>
+              <a:rPr b="0" sz="1430" i="0">
+                <a:solidFill>
+                  <a:srgbClr val="E6ECF7"/>
+                </a:solidFill>
+                <a:latin typeface="Arial"/>
+              </a:rPr>
+              <a:t>A day of checking I have not done.</a:t>
+            </a:r>
+          </a:p>
+        </p:txBody>
+      </p:sp>
+      <p:sp>
+        <p:nvSpPr>
+          <p:cNvPr id="20" name="Rounded Rectangle 19"/>
+          <p:cNvSpPr/>
+          <p:nvPr/>
+        </p:nvSpPr>
+        <p:spPr>
+          <a:xfrm>
+            <a:off x="9006611" y="1811803"/>
+            <a:ext cx="2636443" cy="2212022"/>
+          </a:xfrm>
+          <a:prstGeom prst="roundRect">
+            <a:avLst>
+              <a:gd name="adj" fmla="val 4000"/>
+            </a:avLst>
+          </a:prstGeom>
+          <a:solidFill>
+            <a:srgbClr val="151D2E"/>
+          </a:solidFill>
+          <a:ln w="9525">
+            <a:solidFill>
+              <a:srgbClr val="35415A"/>
+            </a:solidFill>
+          </a:ln>
+          <a:effectLst/>
+        </p:spPr>
+        <p:style>
+          <a:lnRef idx="1">
+            <a:schemeClr val="accent1"/>
+          </a:lnRef>
+          <a:fillRef idx="3">
+            <a:schemeClr val="accent1"/>
+          </a:fillRef>
+          <a:effectRef idx="2">
+            <a:schemeClr val="accent1"/>
+          </a:effectRef>
+          <a:fontRef idx="minor">
+            <a:schemeClr val="lt1"/>
+          </a:fontRef>
+        </p:style>
+        <p:txBody>
+          <a:bodyPr rtlCol="0" anchor="ctr"/>
+          <a:lstStyle/>
+          <a:p>
+            <a:pPr algn="ctr"/>
+          </a:p>
+        </p:txBody>
+      </p:sp>
+      <p:sp>
+        <p:nvSpPr>
+          <p:cNvPr id="21" name="Rectangle 20"/>
+          <p:cNvSpPr/>
+          <p:nvPr/>
+        </p:nvSpPr>
+        <p:spPr>
+          <a:xfrm>
+            <a:off x="9006611" y="1921531"/>
+            <a:ext cx="45720" cy="1992566"/>
+          </a:xfrm>
+          <a:prstGeom prst="rect">
+            <a:avLst/>
+          </a:prstGeom>
+          <a:solidFill>
+            <a:srgbClr val="E8A33D"/>
+          </a:solidFill>
+          <a:ln>
+            <a:noFill/>
+          </a:ln>
+          <a:effectLst/>
+        </p:spPr>
+        <p:style>
+          <a:lnRef idx="1">
+            <a:schemeClr val="accent1"/>
+          </a:lnRef>
+          <a:fillRef idx="3">
+            <a:schemeClr val="accent1"/>
+          </a:fillRef>
+          <a:effectRef idx="2">
+            <a:schemeClr val="accent1"/>
+          </a:effectRef>
+          <a:fontRef idx="minor">
+            <a:schemeClr val="lt1"/>
+          </a:fontRef>
+        </p:style>
+        <p:txBody>
+          <a:bodyPr rtlCol="0" anchor="ctr"/>
+          <a:lstStyle/>
+          <a:p>
+            <a:pPr algn="ctr"/>
+          </a:p>
+        </p:txBody>
+      </p:sp>
+      <p:sp>
+        <p:nvSpPr>
+          <p:cNvPr id="22" name="TextBox 21"/>
+          <p:cNvSpPr txBox="1"/>
+          <p:nvPr/>
+        </p:nvSpPr>
+        <p:spPr>
+          <a:xfrm>
+            <a:off x="9207779" y="1939819"/>
+            <a:ext cx="2270683" cy="791908"/>
+          </a:xfrm>
+          <a:prstGeom prst="rect">
+            <a:avLst/>
+          </a:prstGeom>
+          <a:noFill/>
+        </p:spPr>
+        <p:txBody>
+          <a:bodyPr wrap="square" lIns="0" rIns="0" tIns="0" bIns="0" anchor="t">
+            <a:spAutoFit/>
+          </a:bodyPr>
+          <a:lstStyle/>
+          <a:p>
+            <a:pPr algn="l">
+              <a:lnSpc>
+                <a:spcPct val="115000"/>
+              </a:lnSpc>
+              <a:spcAft>
+                <a:spcPts val="0"/>
+              </a:spcAft>
+            </a:pPr>
+            <a:r>
+              <a:rPr b="1" sz="1625" i="0">
+                <a:solidFill>
+                  <a:srgbClr val="E6ECF7"/>
+                </a:solidFill>
+                <a:latin typeface="Arial"/>
+              </a:rPr>
+              <a:t>Does the author's check survive a team?</a:t>
+            </a:r>
+          </a:p>
+        </p:txBody>
+      </p:sp>
+      <p:sp>
+        <p:nvSpPr>
+          <p:cNvPr id="23" name="TextBox 22"/>
+          <p:cNvSpPr txBox="1"/>
+          <p:nvPr/>
+        </p:nvSpPr>
+        <p:spPr>
+          <a:xfrm>
+            <a:off x="9207779" y="2804879"/>
+            <a:ext cx="2270683" cy="1036065"/>
+          </a:xfrm>
+          <a:prstGeom prst="rect">
+            <a:avLst/>
+          </a:prstGeom>
+          <a:noFill/>
+        </p:spPr>
+        <p:txBody>
+          <a:bodyPr wrap="square" lIns="0" rIns="0" tIns="0" bIns="0" anchor="t">
+            <a:spAutoFit/>
+          </a:bodyPr>
+          <a:lstStyle/>
+          <a:p>
+            <a:pPr algn="l">
+              <a:lnSpc>
+                <a:spcPct val="125000"/>
+              </a:lnSpc>
+              <a:spcAft>
+                <a:spcPts val="0"/>
+              </a:spcAft>
+            </a:pPr>
+            <a:r>
+              <a:rPr b="0" sz="1430" i="0">
+                <a:solidFill>
+                  <a:srgbClr val="E6ECF7"/>
+                </a:solidFill>
+                <a:latin typeface="Arial"/>
+              </a:rPr>
+              <a:t>Nobody has used it.</a:t>
+            </a:r>
+          </a:p>
+        </p:txBody>
+      </p:sp>
+      <p:sp>
+        <p:nvSpPr>
+          <p:cNvPr id="24" name="Rectangle 23"/>
+          <p:cNvSpPr/>
+          <p:nvPr/>
+        </p:nvSpPr>
+        <p:spPr>
+          <a:xfrm>
+            <a:off x="548640" y="4508457"/>
+            <a:ext cx="5455767" cy="911352"/>
+          </a:xfrm>
+          <a:prstGeom prst="rect">
+            <a:avLst/>
+          </a:prstGeom>
+          <a:solidFill>
+            <a:srgbClr val="151D2E"/>
+          </a:solidFill>
+          <a:ln w="9525">
+            <a:solidFill>
+              <a:srgbClr val="35415A"/>
+            </a:solidFill>
+          </a:ln>
+          <a:effectLst/>
+        </p:spPr>
+        <p:style>
+          <a:lnRef idx="1">
+            <a:schemeClr val="accent1"/>
+          </a:lnRef>
+          <a:fillRef idx="3">
+            <a:schemeClr val="accent1"/>
+          </a:fillRef>
+          <a:effectRef idx="2">
+            <a:schemeClr val="accent1"/>
+          </a:effectRef>
+          <a:fontRef idx="minor">
+            <a:schemeClr val="lt1"/>
+          </a:fontRef>
+        </p:style>
+        <p:txBody>
+          <a:bodyPr rtlCol="0" anchor="ctr"/>
+          <a:lstStyle/>
+          <a:p>
+            <a:pPr algn="ctr"/>
+          </a:p>
+        </p:txBody>
+      </p:sp>
+      <p:sp>
+        <p:nvSpPr>
+          <p:cNvPr id="25" name="Rectangle 24"/>
+          <p:cNvSpPr/>
+          <p:nvPr/>
+        </p:nvSpPr>
+        <p:spPr>
+          <a:xfrm>
+            <a:off x="548640" y="4508457"/>
+            <a:ext cx="45720" cy="911352"/>
+          </a:xfrm>
+          <a:prstGeom prst="rect">
+            <a:avLst/>
+          </a:prstGeom>
+          <a:solidFill>
+            <a:srgbClr val="E8A33D"/>
+          </a:solidFill>
+          <a:ln>
+            <a:noFill/>
+          </a:ln>
+          <a:effectLst/>
+        </p:spPr>
+        <p:style>
+          <a:lnRef idx="1">
+            <a:schemeClr val="accent1"/>
+          </a:lnRef>
+          <a:fillRef idx="3">
+            <a:schemeClr val="accent1"/>
+          </a:fillRef>
+          <a:effectRef idx="2">
+            <a:schemeClr val="accent1"/>
+          </a:effectRef>
+          <a:fontRef idx="minor">
+            <a:schemeClr val="lt1"/>
+          </a:fontRef>
+        </p:style>
+        <p:txBody>
+          <a:bodyPr rtlCol="0" anchor="ctr"/>
+          <a:lstStyle/>
+          <a:p>
+            <a:pPr algn="ctr"/>
+          </a:p>
+        </p:txBody>
+      </p:sp>
+      <p:sp>
+        <p:nvSpPr>
+          <p:cNvPr id="26" name="TextBox 25"/>
+          <p:cNvSpPr txBox="1"/>
+          <p:nvPr/>
+        </p:nvSpPr>
+        <p:spPr>
+          <a:xfrm>
+            <a:off x="749808" y="4618185"/>
+            <a:ext cx="5090007" cy="228600"/>
+          </a:xfrm>
+          <a:prstGeom prst="rect">
+            <a:avLst/>
+          </a:prstGeom>
+          <a:noFill/>
+        </p:spPr>
+        <p:txBody>
+          <a:bodyPr wrap="square" lIns="0" rIns="0" tIns="0" bIns="0" anchor="t">
+            <a:spAutoFit/>
+          </a:bodyPr>
+          <a:lstStyle/>
+          <a:p>
+            <a:pPr algn="l">
+              <a:lnSpc>
+                <a:spcPct val="115000"/>
+              </a:lnSpc>
+              <a:spcAft>
+                <a:spcPts val="0"/>
+              </a:spcAft>
+            </a:pPr>
+            <a:r>
+              <a:rPr b="1" sz="1495" i="0">
+                <a:solidFill>
+                  <a:srgbClr val="E6ECF7"/>
+                </a:solidFill>
+                <a:latin typeface="Arial"/>
+              </a:rPr>
+              <a:t>What would help me most</a:t>
+            </a:r>
+          </a:p>
+        </p:txBody>
+      </p:sp>
+      <p:sp>
+        <p:nvSpPr>
+          <p:cNvPr id="27" name="TextBox 26"/>
+          <p:cNvSpPr txBox="1"/>
+          <p:nvPr/>
+        </p:nvSpPr>
+        <p:spPr>
+          <a:xfrm>
+            <a:off x="749808" y="4855929"/>
+            <a:ext cx="5090007" cy="435864"/>
+          </a:xfrm>
+          <a:prstGeom prst="rect">
+            <a:avLst/>
+          </a:prstGeom>
+          <a:noFill/>
+        </p:spPr>
+        <p:txBody>
+          <a:bodyPr wrap="square" lIns="0" rIns="0" tIns="0" bIns="0" anchor="t">
+            <a:spAutoFit/>
+          </a:bodyPr>
+          <a:lstStyle/>
+          <a:p>
+            <a:pPr algn="l">
+              <a:lnSpc>
+                <a:spcPct val="120000"/>
+              </a:lnSpc>
+              <a:spcAft>
+                <a:spcPts val="0"/>
+              </a:spcAft>
+            </a:pPr>
+            <a:r>
+              <a:rPr b="0" sz="1430" i="0">
+                <a:solidFill>
+                  <a:srgbClr val="E6ECF7"/>
+                </a:solidFill>
+                <a:latin typeface="Arial"/>
+              </a:rPr>
+              <a:t>A review decision you made and had to undo. What did it cost?</a:t>
+            </a:r>
+          </a:p>
+        </p:txBody>
+      </p:sp>
+      <p:sp>
+        <p:nvSpPr>
+          <p:cNvPr id="28" name="Rectangle 27"/>
+          <p:cNvSpPr/>
+          <p:nvPr/>
+        </p:nvSpPr>
+        <p:spPr>
+          <a:xfrm>
+            <a:off x="6187287" y="4508457"/>
+            <a:ext cx="5455767" cy="911352"/>
+          </a:xfrm>
+          <a:prstGeom prst="rect">
+            <a:avLst/>
+          </a:prstGeom>
+          <a:solidFill>
+            <a:srgbClr val="151D2E"/>
+          </a:solidFill>
+          <a:ln w="9525">
+            <a:solidFill>
+              <a:srgbClr val="35415A"/>
+            </a:solidFill>
+          </a:ln>
+          <a:effectLst/>
+        </p:spPr>
+        <p:style>
+          <a:lnRef idx="1">
+            <a:schemeClr val="accent1"/>
+          </a:lnRef>
+          <a:fillRef idx="3">
+            <a:schemeClr val="accent1"/>
+          </a:fillRef>
+          <a:effectRef idx="2">
+            <a:schemeClr val="accent1"/>
+          </a:effectRef>
+          <a:fontRef idx="minor">
+            <a:schemeClr val="lt1"/>
+          </a:fontRef>
+        </p:style>
+        <p:txBody>
+          <a:bodyPr rtlCol="0" anchor="ctr"/>
+          <a:lstStyle/>
+          <a:p>
+            <a:pPr algn="ctr"/>
+          </a:p>
+        </p:txBody>
+      </p:sp>
+      <p:sp>
+        <p:nvSpPr>
+          <p:cNvPr id="29" name="Rectangle 28"/>
+          <p:cNvSpPr/>
+          <p:nvPr/>
+        </p:nvSpPr>
+        <p:spPr>
+          <a:xfrm>
+            <a:off x="6187287" y="4508457"/>
+            <a:ext cx="45720" cy="911352"/>
+          </a:xfrm>
+          <a:prstGeom prst="rect">
+            <a:avLst/>
+          </a:prstGeom>
+          <a:solidFill>
+            <a:srgbClr val="29D3E0"/>
+          </a:solidFill>
+          <a:ln>
+            <a:noFill/>
+          </a:ln>
+          <a:effectLst/>
+        </p:spPr>
+        <p:style>
+          <a:lnRef idx="1">
+            <a:schemeClr val="accent1"/>
+          </a:lnRef>
+          <a:fillRef idx="3">
+            <a:schemeClr val="accent1"/>
+          </a:fillRef>
+          <a:effectRef idx="2">
+            <a:schemeClr val="accent1"/>
+          </a:effectRef>
+          <a:fontRef idx="minor">
+            <a:schemeClr val="lt1"/>
+          </a:fontRef>
+        </p:style>
+        <p:txBody>
+          <a:bodyPr rtlCol="0" anchor="ctr"/>
+          <a:lstStyle/>
+          <a:p>
+            <a:pPr algn="ctr"/>
+          </a:p>
+        </p:txBody>
+      </p:sp>
+      <p:sp>
+        <p:nvSpPr>
+          <p:cNvPr id="30" name="TextBox 29"/>
+          <p:cNvSpPr txBox="1"/>
+          <p:nvPr/>
+        </p:nvSpPr>
+        <p:spPr>
+          <a:xfrm>
+            <a:off x="6388455" y="4618185"/>
+            <a:ext cx="5090007" cy="228600"/>
+          </a:xfrm>
+          <a:prstGeom prst="rect">
+            <a:avLst/>
+          </a:prstGeom>
+          <a:noFill/>
+        </p:spPr>
+        <p:txBody>
+          <a:bodyPr wrap="square" lIns="0" rIns="0" tIns="0" bIns="0" anchor="t">
+            <a:spAutoFit/>
+          </a:bodyPr>
+          <a:lstStyle/>
+          <a:p>
+            <a:pPr algn="l">
+              <a:lnSpc>
+                <a:spcPct val="115000"/>
+              </a:lnSpc>
+              <a:spcAft>
+                <a:spcPts val="0"/>
+              </a:spcAft>
+            </a:pPr>
+            <a:r>
+              <a:rPr b="1" sz="1495" i="0">
+                <a:solidFill>
+                  <a:srgbClr val="E6ECF7"/>
+                </a:solidFill>
+                <a:latin typeface="Arial"/>
+              </a:rPr>
+              <a:t>What would change my mind</a:t>
+            </a:r>
+          </a:p>
+        </p:txBody>
+      </p:sp>
+      <p:sp>
+        <p:nvSpPr>
+          <p:cNvPr id="31" name="TextBox 30"/>
+          <p:cNvSpPr txBox="1"/>
+          <p:nvPr/>
+        </p:nvSpPr>
+        <p:spPr>
+          <a:xfrm>
+            <a:off x="6388455" y="4855929"/>
+            <a:ext cx="5090007" cy="435864"/>
+          </a:xfrm>
+          <a:prstGeom prst="rect">
+            <a:avLst/>
+          </a:prstGeom>
+          <a:noFill/>
+        </p:spPr>
+        <p:txBody>
+          <a:bodyPr wrap="square" lIns="0" rIns="0" tIns="0" bIns="0" anchor="t">
+            <a:spAutoFit/>
+          </a:bodyPr>
+          <a:lstStyle/>
+          <a:p>
+            <a:pPr algn="l">
+              <a:lnSpc>
+                <a:spcPct val="120000"/>
+              </a:lnSpc>
+              <a:spcAft>
+                <a:spcPts val="0"/>
+              </a:spcAft>
+            </a:pPr>
+            <a:r>
+              <a:rPr b="0" sz="1430" i="0">
+                <a:solidFill>
+                  <a:srgbClr val="E6ECF7"/>
+                </a:solidFill>
+                <a:latin typeface="Arial"/>
+              </a:rPr>
+              <a:t>A regulated company whose auditor accepted a machine's approval.</a:t>
+            </a:r>
+          </a:p>
+        </p:txBody>
+      </p:sp>
+    </p:spTree>
+  </p:cSld>
+  <p:clrMapOvr>
+    <a:masterClrMapping/>
+  </p:clrMapOvr>
+</p:sld>
+</file>
+
+<file path=ppt/slides/slide32.xml><?xml version="1.0" encoding="utf-8"?>
+<p:sld xmlns:a="http://schemas.openxmlformats.org/drawingml/2006/main" xmlns:p="http://schemas.openxmlformats.org/presentationml/2006/main" xmlns:r="http://schemas.openxmlformats.org/officeDocument/2006/relationships">
+  <p:cSld>
+    <p:spTree>
+      <p:nvGrpSpPr>
+        <p:cNvPr id="1" name=""/>
+        <p:cNvGrpSpPr/>
+        <p:nvPr/>
+      </p:nvGrpSpPr>
+      <p:grpSpPr/>
+      <p:sp>
+        <p:nvSpPr>
+          <p:cNvPr id="2" name="Rectangle 1"/>
+          <p:cNvSpPr/>
+          <p:nvPr/>
+        </p:nvSpPr>
+        <p:spPr>
+          <a:xfrm>
+            <a:off x="0" y="0"/>
+            <a:ext cx="12191695" cy="6858000"/>
+          </a:xfrm>
+          <a:prstGeom prst="rect">
+            <a:avLst/>
+          </a:prstGeom>
+          <a:solidFill>
+            <a:srgbClr val="0E1420"/>
+          </a:solidFill>
+          <a:ln>
+            <a:noFill/>
+          </a:ln>
+          <a:effectLst/>
+        </p:spPr>
+        <p:style>
+          <a:lnRef idx="1">
+            <a:schemeClr val="accent1"/>
+          </a:lnRef>
+          <a:fillRef idx="3">
+            <a:schemeClr val="accent1"/>
+          </a:fillRef>
+          <a:effectRef idx="2">
+            <a:schemeClr val="accent1"/>
+          </a:effectRef>
+          <a:fontRef idx="minor">
+            <a:schemeClr val="lt1"/>
+          </a:fontRef>
+        </p:style>
+        <p:txBody>
+          <a:bodyPr rtlCol="0" anchor="ctr"/>
+          <a:lstStyle/>
+          <a:p>
+            <a:pPr algn="ctr"/>
+          </a:p>
+        </p:txBody>
+      </p:sp>
+      <p:sp>
+        <p:nvSpPr>
+          <p:cNvPr id="3" name="TextBox 2"/>
+          <p:cNvSpPr txBox="1"/>
+          <p:nvPr/>
+        </p:nvSpPr>
+        <p:spPr>
+          <a:xfrm>
+            <a:off x="548640" y="292608"/>
+            <a:ext cx="11094415" cy="228600"/>
+          </a:xfrm>
+          <a:prstGeom prst="rect">
+            <a:avLst/>
+          </a:prstGeom>
+          <a:noFill/>
+        </p:spPr>
+        <p:txBody>
+          <a:bodyPr wrap="square" lIns="0" rIns="0" tIns="0" bIns="0" anchor="t">
+            <a:spAutoFit/>
+          </a:bodyPr>
+          <a:lstStyle/>
+          <a:p>
+            <a:pPr algn="l">
+              <a:lnSpc>
+                <a:spcPct val="115000"/>
+              </a:lnSpc>
+              <a:spcAft>
+                <a:spcPts val="0"/>
+              </a:spcAft>
+            </a:pPr>
+            <a:r>
+              <a:rPr b="1" sz="950" i="0">
+                <a:solidFill>
+                  <a:srgbClr val="29D3E0"/>
+                </a:solidFill>
+                <a:latin typeface="Arial"/>
+              </a:rPr>
+              <a:t>SLIDE 32 · APPENDIX A1</a:t>
+            </a:r>
+          </a:p>
+        </p:txBody>
+      </p:sp>
+      <p:sp>
+        <p:nvSpPr>
+          <p:cNvPr id="4" name="TextBox 3"/>
+          <p:cNvSpPr txBox="1"/>
+          <p:nvPr/>
+        </p:nvSpPr>
+        <p:spPr>
+          <a:xfrm>
+            <a:off x="548640" y="530352"/>
+            <a:ext cx="11094415" cy="548640"/>
+          </a:xfrm>
+          <a:prstGeom prst="rect">
+            <a:avLst/>
+          </a:prstGeom>
+          <a:noFill/>
+        </p:spPr>
+        <p:txBody>
+          <a:bodyPr wrap="square" lIns="0" rIns="0" tIns="0" bIns="0" anchor="t">
+            <a:spAutoFit/>
+          </a:bodyPr>
+          <a:lstStyle/>
+          <a:p>
+            <a:pPr algn="l">
+              <a:lnSpc>
+                <a:spcPct val="115000"/>
+              </a:lnSpc>
+              <a:spcAft>
+                <a:spcPts val="0"/>
+              </a:spcAft>
+            </a:pPr>
+            <a:r>
+              <a:rPr b="1" sz="2800" i="0">
+                <a:solidFill>
+                  <a:srgbClr val="E6ECF7"/>
+                </a:solidFill>
+                <a:latin typeface="Georgia"/>
+              </a:rPr>
+              <a:t>A1 — Who did what about the queue</a:t>
+            </a:r>
+          </a:p>
+        </p:txBody>
+      </p:sp>
+      <p:sp>
+        <p:nvSpPr>
+          <p:cNvPr id="5" name="Rectangle 4"/>
+          <p:cNvSpPr/>
+          <p:nvPr/>
+        </p:nvSpPr>
+        <p:spPr>
+          <a:xfrm>
+            <a:off x="548640" y="1115568"/>
+            <a:ext cx="1097280" cy="41148"/>
+          </a:xfrm>
+          <a:prstGeom prst="rect">
+            <a:avLst/>
+          </a:prstGeom>
+          <a:solidFill>
+            <a:srgbClr val="29D3E0"/>
+          </a:solidFill>
+          <a:ln>
+            <a:noFill/>
+          </a:ln>
+          <a:effectLst/>
+        </p:spPr>
+        <p:style>
+          <a:lnRef idx="1">
+            <a:schemeClr val="accent1"/>
+          </a:lnRef>
+          <a:fillRef idx="3">
+            <a:schemeClr val="accent1"/>
+          </a:fillRef>
+          <a:effectRef idx="2">
+            <a:schemeClr val="accent1"/>
+          </a:effectRef>
+          <a:fontRef idx="minor">
+            <a:schemeClr val="lt1"/>
+          </a:fontRef>
+        </p:style>
+        <p:txBody>
+          <a:bodyPr rtlCol="0" anchor="ctr"/>
+          <a:lstStyle/>
+          <a:p>
+            <a:pPr algn="ctr"/>
+          </a:p>
+        </p:txBody>
+      </p:sp>
+      <p:sp>
+        <p:nvSpPr>
+          <p:cNvPr id="6" name="TextBox 5"/>
+          <p:cNvSpPr txBox="1"/>
+          <p:nvPr/>
+        </p:nvSpPr>
+        <p:spPr>
+          <a:xfrm>
+            <a:off x="548640" y="6473952"/>
+            <a:ext cx="3657600" cy="228600"/>
+          </a:xfrm>
+          <a:prstGeom prst="rect">
+            <a:avLst/>
+          </a:prstGeom>
+          <a:noFill/>
+        </p:spPr>
+        <p:txBody>
+          <a:bodyPr wrap="square" lIns="0" rIns="0" tIns="0" bIns="0" anchor="t">
+            <a:spAutoFit/>
+          </a:bodyPr>
+          <a:lstStyle/>
+          <a:p>
+            <a:pPr algn="l">
+              <a:lnSpc>
+                <a:spcPct val="115000"/>
+              </a:lnSpc>
+              <a:spcAft>
+                <a:spcPts val="0"/>
+              </a:spcAft>
+            </a:pPr>
+            <a:r>
+              <a:rPr b="1" sz="950" i="0">
+                <a:solidFill>
+                  <a:srgbClr val="E6ECF7"/>
+                </a:solidFill>
+                <a:latin typeface="Arial"/>
+              </a:rPr>
+              <a:t>Build to Understand</a:t>
+            </a:r>
+          </a:p>
+        </p:txBody>
+      </p:sp>
+      <p:sp>
+        <p:nvSpPr>
+          <p:cNvPr id="7" name="TextBox 6"/>
+          <p:cNvSpPr txBox="1"/>
+          <p:nvPr/>
+        </p:nvSpPr>
+        <p:spPr>
+          <a:xfrm>
+            <a:off x="10728655" y="6473952"/>
+            <a:ext cx="914400" cy="228600"/>
+          </a:xfrm>
+          <a:prstGeom prst="rect">
+            <a:avLst/>
+          </a:prstGeom>
+          <a:noFill/>
+        </p:spPr>
+        <p:txBody>
+          <a:bodyPr wrap="square" lIns="0" rIns="0" tIns="0" bIns="0" anchor="t">
+            <a:spAutoFit/>
+          </a:bodyPr>
+          <a:lstStyle/>
+          <a:p>
+            <a:pPr algn="r">
+              <a:lnSpc>
+                <a:spcPct val="115000"/>
+              </a:lnSpc>
+              <a:spcAft>
+                <a:spcPts val="0"/>
+              </a:spcAft>
+            </a:pPr>
+            <a:r>
+              <a:rPr b="0" sz="950" i="0">
+                <a:solidFill>
+                  <a:srgbClr val="98A4BC"/>
+                </a:solidFill>
+                <a:latin typeface="Arial"/>
+              </a:rPr>
+              <a:t>32</a:t>
             </a:r>
           </a:p>
         </p:txBody>
@@ -26470,572 +27508,6 @@
 </p:sld>
 </file>
 
-<file path=ppt/slides/slide32.xml><?xml version="1.0" encoding="utf-8"?>
-<p:sld xmlns:a="http://schemas.openxmlformats.org/drawingml/2006/main" xmlns:p="http://schemas.openxmlformats.org/presentationml/2006/main" xmlns:r="http://schemas.openxmlformats.org/officeDocument/2006/relationships">
-  <p:cSld>
-    <p:spTree>
-      <p:nvGrpSpPr>
-        <p:cNvPr id="1" name=""/>
-        <p:cNvGrpSpPr/>
-        <p:nvPr/>
-      </p:nvGrpSpPr>
-      <p:grpSpPr/>
-      <p:sp>
-        <p:nvSpPr>
-          <p:cNvPr id="2" name="Rectangle 1"/>
-          <p:cNvSpPr/>
-          <p:nvPr/>
-        </p:nvSpPr>
-        <p:spPr>
-          <a:xfrm>
-            <a:off x="0" y="0"/>
-            <a:ext cx="12191695" cy="6858000"/>
-          </a:xfrm>
-          <a:prstGeom prst="rect">
-            <a:avLst/>
-          </a:prstGeom>
-          <a:solidFill>
-            <a:srgbClr val="0E1420"/>
-          </a:solidFill>
-          <a:ln>
-            <a:noFill/>
-          </a:ln>
-          <a:effectLst/>
-        </p:spPr>
-        <p:style>
-          <a:lnRef idx="1">
-            <a:schemeClr val="accent1"/>
-          </a:lnRef>
-          <a:fillRef idx="3">
-            <a:schemeClr val="accent1"/>
-          </a:fillRef>
-          <a:effectRef idx="2">
-            <a:schemeClr val="accent1"/>
-          </a:effectRef>
-          <a:fontRef idx="minor">
-            <a:schemeClr val="lt1"/>
-          </a:fontRef>
-        </p:style>
-        <p:txBody>
-          <a:bodyPr rtlCol="0" anchor="ctr"/>
-          <a:lstStyle/>
-          <a:p>
-            <a:pPr algn="ctr"/>
-          </a:p>
-        </p:txBody>
-      </p:sp>
-      <p:sp>
-        <p:nvSpPr>
-          <p:cNvPr id="3" name="TextBox 2"/>
-          <p:cNvSpPr txBox="1"/>
-          <p:nvPr/>
-        </p:nvSpPr>
-        <p:spPr>
-          <a:xfrm>
-            <a:off x="548640" y="292608"/>
-            <a:ext cx="11094415" cy="228600"/>
-          </a:xfrm>
-          <a:prstGeom prst="rect">
-            <a:avLst/>
-          </a:prstGeom>
-          <a:noFill/>
-        </p:spPr>
-        <p:txBody>
-          <a:bodyPr wrap="square" lIns="0" rIns="0" tIns="0" bIns="0" anchor="t">
-            <a:spAutoFit/>
-          </a:bodyPr>
-          <a:lstStyle/>
-          <a:p>
-            <a:pPr algn="l">
-              <a:lnSpc>
-                <a:spcPct val="115000"/>
-              </a:lnSpc>
-              <a:spcAft>
-                <a:spcPts val="0"/>
-              </a:spcAft>
-            </a:pPr>
-            <a:r>
-              <a:rPr b="1" sz="950" i="0">
-                <a:solidFill>
-                  <a:srgbClr val="29D3E0"/>
-                </a:solidFill>
-                <a:latin typeface="Arial"/>
-              </a:rPr>
-              <a:t>SLIDE 32 · APPENDIX A2</a:t>
-            </a:r>
-          </a:p>
-        </p:txBody>
-      </p:sp>
-      <p:sp>
-        <p:nvSpPr>
-          <p:cNvPr id="4" name="TextBox 3"/>
-          <p:cNvSpPr txBox="1"/>
-          <p:nvPr/>
-        </p:nvSpPr>
-        <p:spPr>
-          <a:xfrm>
-            <a:off x="548640" y="530352"/>
-            <a:ext cx="11094415" cy="548640"/>
-          </a:xfrm>
-          <a:prstGeom prst="rect">
-            <a:avLst/>
-          </a:prstGeom>
-          <a:noFill/>
-        </p:spPr>
-        <p:txBody>
-          <a:bodyPr wrap="square" lIns="0" rIns="0" tIns="0" bIns="0" anchor="t">
-            <a:spAutoFit/>
-          </a:bodyPr>
-          <a:lstStyle/>
-          <a:p>
-            <a:pPr algn="l">
-              <a:lnSpc>
-                <a:spcPct val="115000"/>
-              </a:lnSpc>
-              <a:spcAft>
-                <a:spcPts val="0"/>
-              </a:spcAft>
-            </a:pPr>
-            <a:r>
-              <a:rPr b="1" sz="2800" i="0">
-                <a:solidFill>
-                  <a:srgbClr val="E6ECF7"/>
-                </a:solidFill>
-                <a:latin typeface="Georgia"/>
-              </a:rPr>
-              <a:t>A2 — The regulatory detail</a:t>
-            </a:r>
-          </a:p>
-        </p:txBody>
-      </p:sp>
-      <p:sp>
-        <p:nvSpPr>
-          <p:cNvPr id="5" name="Rectangle 4"/>
-          <p:cNvSpPr/>
-          <p:nvPr/>
-        </p:nvSpPr>
-        <p:spPr>
-          <a:xfrm>
-            <a:off x="548640" y="1115568"/>
-            <a:ext cx="1097280" cy="41148"/>
-          </a:xfrm>
-          <a:prstGeom prst="rect">
-            <a:avLst/>
-          </a:prstGeom>
-          <a:solidFill>
-            <a:srgbClr val="29D3E0"/>
-          </a:solidFill>
-          <a:ln>
-            <a:noFill/>
-          </a:ln>
-          <a:effectLst/>
-        </p:spPr>
-        <p:style>
-          <a:lnRef idx="1">
-            <a:schemeClr val="accent1"/>
-          </a:lnRef>
-          <a:fillRef idx="3">
-            <a:schemeClr val="accent1"/>
-          </a:fillRef>
-          <a:effectRef idx="2">
-            <a:schemeClr val="accent1"/>
-          </a:effectRef>
-          <a:fontRef idx="minor">
-            <a:schemeClr val="lt1"/>
-          </a:fontRef>
-        </p:style>
-        <p:txBody>
-          <a:bodyPr rtlCol="0" anchor="ctr"/>
-          <a:lstStyle/>
-          <a:p>
-            <a:pPr algn="ctr"/>
-          </a:p>
-        </p:txBody>
-      </p:sp>
-      <p:sp>
-        <p:nvSpPr>
-          <p:cNvPr id="6" name="TextBox 5"/>
-          <p:cNvSpPr txBox="1"/>
-          <p:nvPr/>
-        </p:nvSpPr>
-        <p:spPr>
-          <a:xfrm>
-            <a:off x="548640" y="6473952"/>
-            <a:ext cx="3657600" cy="228600"/>
-          </a:xfrm>
-          <a:prstGeom prst="rect">
-            <a:avLst/>
-          </a:prstGeom>
-          <a:noFill/>
-        </p:spPr>
-        <p:txBody>
-          <a:bodyPr wrap="square" lIns="0" rIns="0" tIns="0" bIns="0" anchor="t">
-            <a:spAutoFit/>
-          </a:bodyPr>
-          <a:lstStyle/>
-          <a:p>
-            <a:pPr algn="l">
-              <a:lnSpc>
-                <a:spcPct val="115000"/>
-              </a:lnSpc>
-              <a:spcAft>
-                <a:spcPts val="0"/>
-              </a:spcAft>
-            </a:pPr>
-            <a:r>
-              <a:rPr b="1" sz="950" i="0">
-                <a:solidFill>
-                  <a:srgbClr val="E6ECF7"/>
-                </a:solidFill>
-                <a:latin typeface="Arial"/>
-              </a:rPr>
-              <a:t>Build to Understand</a:t>
-            </a:r>
-          </a:p>
-        </p:txBody>
-      </p:sp>
-      <p:sp>
-        <p:nvSpPr>
-          <p:cNvPr id="7" name="TextBox 6"/>
-          <p:cNvSpPr txBox="1"/>
-          <p:nvPr/>
-        </p:nvSpPr>
-        <p:spPr>
-          <a:xfrm>
-            <a:off x="10728655" y="6473952"/>
-            <a:ext cx="914400" cy="228600"/>
-          </a:xfrm>
-          <a:prstGeom prst="rect">
-            <a:avLst/>
-          </a:prstGeom>
-          <a:noFill/>
-        </p:spPr>
-        <p:txBody>
-          <a:bodyPr wrap="square" lIns="0" rIns="0" tIns="0" bIns="0" anchor="t">
-            <a:spAutoFit/>
-          </a:bodyPr>
-          <a:lstStyle/>
-          <a:p>
-            <a:pPr algn="r">
-              <a:lnSpc>
-                <a:spcPct val="115000"/>
-              </a:lnSpc>
-              <a:spcAft>
-                <a:spcPts val="0"/>
-              </a:spcAft>
-            </a:pPr>
-            <a:r>
-              <a:rPr b="0" sz="950" i="0">
-                <a:solidFill>
-                  <a:srgbClr val="98A4BC"/>
-                </a:solidFill>
-                <a:latin typeface="Arial"/>
-              </a:rPr>
-              <a:t>32</a:t>
-            </a:r>
-          </a:p>
-        </p:txBody>
-      </p:sp>
-      <p:sp>
-        <p:nvSpPr>
-          <p:cNvPr id="8" name="TextBox 7"/>
-          <p:cNvSpPr txBox="1"/>
-          <p:nvPr/>
-        </p:nvSpPr>
-        <p:spPr>
-          <a:xfrm>
-            <a:off x="548640" y="1371600"/>
-            <a:ext cx="11094415" cy="162687"/>
-          </a:xfrm>
-          <a:prstGeom prst="rect">
-            <a:avLst/>
-          </a:prstGeom>
-          <a:noFill/>
-        </p:spPr>
-        <p:txBody>
-          <a:bodyPr wrap="square" lIns="0" rIns="0" tIns="0" bIns="0" anchor="t">
-            <a:spAutoFit/>
-          </a:bodyPr>
-          <a:lstStyle/>
-          <a:p>
-            <a:pPr algn="l">
-              <a:lnSpc>
-                <a:spcPct val="115000"/>
-              </a:lnSpc>
-              <a:spcAft>
-                <a:spcPts val="0"/>
-              </a:spcAft>
-            </a:pPr>
-            <a:r>
-              <a:rPr b="0" sz="1050" i="1">
-                <a:solidFill>
-                  <a:srgbClr val="98A4BC"/>
-                </a:solidFill>
-                <a:latin typeface="Arial"/>
-              </a:rPr>
-              <a:t>Use when someone wants the rule read out rather than summarised.</a:t>
-            </a:r>
-          </a:p>
-        </p:txBody>
-      </p:sp>
-      <p:sp>
-        <p:nvSpPr>
-          <p:cNvPr id="9" name="TextBox 8"/>
-          <p:cNvSpPr txBox="1"/>
-          <p:nvPr/>
-        </p:nvSpPr>
-        <p:spPr>
-          <a:xfrm>
-            <a:off x="548640" y="2037207"/>
-            <a:ext cx="11094415" cy="2627312"/>
-          </a:xfrm>
-          <a:prstGeom prst="rect">
-            <a:avLst/>
-          </a:prstGeom>
-          <a:noFill/>
-        </p:spPr>
-        <p:txBody>
-          <a:bodyPr wrap="square" lIns="0" rIns="0" tIns="0" bIns="0">
-            <a:spAutoFit/>
-          </a:bodyPr>
-          <a:lstStyle/>
-          <a:p>
-            <a:pPr>
-              <a:lnSpc>
-                <a:spcPct val="115000"/>
-              </a:lnSpc>
-              <a:spcAft>
-                <a:spcPts val="400"/>
-              </a:spcAft>
-            </a:pPr>
-            <a:r>
-              <a:rPr sz="1250" b="1">
-                <a:solidFill>
-                  <a:srgbClr val="E8A33D"/>
-                </a:solidFill>
-                <a:latin typeface="Arial"/>
-              </a:rPr>
-              <a:t>—  </a:t>
-            </a:r>
-            <a:r>
-              <a:rPr b="1" sz="1250" i="0">
-                <a:solidFill>
-                  <a:srgbClr val="E6ECF7"/>
-                </a:solidFill>
-                <a:latin typeface="Arial"/>
-              </a:rPr>
-              <a:t>Two persons direct the business.</a:t>
-            </a:r>
-            <a:r>
-              <a:rPr b="0" sz="1250" i="0">
-                <a:solidFill>
-                  <a:srgbClr val="E6ECF7"/>
-                </a:solidFill>
-                <a:latin typeface="Arial"/>
-              </a:rPr>
-              <a:t> European banking law (CRD art. 13) grants a licence only where "at least two persons effectively direct the business". That is the origin of Vier-Augen-Prinzip and the English phrase four eyes. They approve no individual change.</a:t>
-            </a:r>
-          </a:p>
-          <a:p>
-            <a:pPr>
-              <a:lnSpc>
-                <a:spcPct val="115000"/>
-              </a:lnSpc>
-              <a:spcAft>
-                <a:spcPts val="400"/>
-              </a:spcAft>
-            </a:pPr>
-            <a:r>
-              <a:rPr sz="1250" b="1">
-                <a:solidFill>
-                  <a:srgbClr val="E8A33D"/>
-                </a:solidFill>
-                <a:latin typeface="Arial"/>
-              </a:rPr>
-              <a:t>—  </a:t>
-            </a:r>
-            <a:r>
-              <a:rPr b="1" sz="1250" i="0">
-                <a:solidFill>
-                  <a:srgbClr val="E6ECF7"/>
-                </a:solidFill>
-                <a:latin typeface="Arial"/>
-              </a:rPr>
-              <a:t>Dual control on a sensitive action.</a:t>
-            </a:r>
-            <a:r>
-              <a:rPr b="0" sz="1250" i="0">
-                <a:solidFill>
-                  <a:srgbClr val="E6ECF7"/>
-                </a:solidFill>
-                <a:latin typeface="Arial"/>
-              </a:rPr>
-              <a:t> Basel defines it as two or more separate "entities (usually persons)" acting in concert. The Norwegian supervisor fined a savings bank in 2023 partly because no four-eyes check existed when an employee manually lowered a customer's money-laundering risk level.</a:t>
-            </a:r>
-          </a:p>
-          <a:p>
-            <a:pPr>
-              <a:lnSpc>
-                <a:spcPct val="115000"/>
-              </a:lnSpc>
-              <a:spcAft>
-                <a:spcPts val="400"/>
-              </a:spcAft>
-            </a:pPr>
-            <a:r>
-              <a:rPr sz="1250" b="1">
-                <a:solidFill>
-                  <a:srgbClr val="E8A33D"/>
-                </a:solidFill>
-                <a:latin typeface="Arial"/>
-              </a:rPr>
-              <a:t>—  </a:t>
-            </a:r>
-            <a:r>
-              <a:rPr b="1" sz="1250" i="0">
-                <a:solidFill>
-                  <a:srgbClr val="E6ECF7"/>
-                </a:solidFill>
-                <a:latin typeface="Arial"/>
-              </a:rPr>
-              <a:t>Change management before July 2025.</a:t>
-            </a:r>
-            <a:r>
-              <a:rPr b="0" sz="1250" i="0">
-                <a:solidFill>
-                  <a:srgbClr val="E6ECF7"/>
-                </a:solidFill>
-                <a:latin typeface="Arial"/>
-              </a:rPr>
-              <a:t> IKT-forskriften § 9 required procedures for handling changes, and that they be followed. It never asked for an approver.</a:t>
-            </a:r>
-          </a:p>
-          <a:p>
-            <a:pPr>
-              <a:lnSpc>
-                <a:spcPct val="115000"/>
-              </a:lnSpc>
-              <a:spcAft>
-                <a:spcPts val="400"/>
-              </a:spcAft>
-            </a:pPr>
-            <a:r>
-              <a:rPr sz="1250" b="1">
-                <a:solidFill>
-                  <a:srgbClr val="E8A33D"/>
-                </a:solidFill>
-                <a:latin typeface="Arial"/>
-              </a:rPr>
-              <a:t>—  </a:t>
-            </a:r>
-            <a:r>
-              <a:rPr b="1" sz="1250" i="0">
-                <a:solidFill>
-                  <a:srgbClr val="E6ECF7"/>
-                </a:solidFill>
-                <a:latin typeface="Arial"/>
-              </a:rPr>
-              <a:t>Change management since July 2025.</a:t>
-            </a:r>
-            <a:r>
-              <a:rPr b="0" sz="1250" i="0">
-                <a:solidFill>
-                  <a:srgbClr val="E6ECF7"/>
-                </a:solidFill>
-                <a:latin typeface="Arial"/>
-              </a:rPr>
-              <a:t> DORA (EU 2022/2554) art. 9(4)(e), with RTS 2024/1774 art. 17(1)(b): "the independence of the functions that approve changes and the functions responsible for requesting and implementing those changes". Every change recorded, tested, assessed, approved, implemented and verified. Policy "based on a risk assessment approach". Source code reviews defined as static and dynamic testing.</a:t>
-            </a:r>
-          </a:p>
-          <a:p>
-            <a:pPr>
-              <a:lnSpc>
-                <a:spcPct val="115000"/>
-              </a:lnSpc>
-              <a:spcAft>
-                <a:spcPts val="400"/>
-              </a:spcAft>
-            </a:pPr>
-            <a:r>
-              <a:rPr sz="1250" b="1">
-                <a:solidFill>
-                  <a:srgbClr val="E8A33D"/>
-                </a:solidFill>
-                <a:latin typeface="Arial"/>
-              </a:rPr>
-              <a:t>—  </a:t>
-            </a:r>
-            <a:r>
-              <a:rPr b="1" sz="1250" i="0">
-                <a:solidFill>
-                  <a:srgbClr val="E6ECF7"/>
-                </a:solidFill>
-                <a:latin typeface="Arial"/>
-              </a:rPr>
-              <a:t>Not defined:</a:t>
-            </a:r>
-            <a:r>
-              <a:rPr b="0" sz="1250" i="0">
-                <a:solidFill>
-                  <a:srgbClr val="E6ECF7"/>
-                </a:solidFill>
-                <a:latin typeface="Arial"/>
-              </a:rPr>
-              <a:t> function, independence. Elsewhere in the rulebook a function is a part of the organisation. Whether the approver must sit outside the implementing team is not stated.</a:t>
-            </a:r>
-          </a:p>
-        </p:txBody>
-      </p:sp>
-      <p:sp>
-        <p:nvSpPr>
-          <p:cNvPr id="10" name="TextBox 9"/>
-          <p:cNvSpPr txBox="1"/>
-          <p:nvPr/>
-        </p:nvSpPr>
-        <p:spPr>
-          <a:xfrm>
-            <a:off x="548640" y="5149151"/>
-            <a:ext cx="11094415" cy="325374"/>
-          </a:xfrm>
-          <a:prstGeom prst="rect">
-            <a:avLst/>
-          </a:prstGeom>
-          <a:noFill/>
-        </p:spPr>
-        <p:txBody>
-          <a:bodyPr wrap="square" lIns="0" rIns="0" tIns="0" bIns="0" anchor="t">
-            <a:spAutoFit/>
-          </a:bodyPr>
-          <a:lstStyle/>
-          <a:p>
-            <a:pPr algn="l">
-              <a:lnSpc>
-                <a:spcPct val="115000"/>
-              </a:lnSpc>
-              <a:spcAft>
-                <a:spcPts val="0"/>
-              </a:spcAft>
-            </a:pPr>
-            <a:r>
-              <a:rPr b="0" sz="1050" i="1">
-                <a:solidFill>
-                  <a:srgbClr val="98A4BC"/>
-                </a:solidFill>
-                <a:latin typeface="Arial"/>
-              </a:rPr>
-              <a:t>The art. 17 wording relies on two secondary reproductions that agree. Verify against EUR-Lex before anything is quoted externally. Two things in this deck are called DORA: the EU act here, and Google's DevOps Research and Assessment on slides 17 and 18.</a:t>
-            </a:r>
-          </a:p>
-        </p:txBody>
-      </p:sp>
-    </p:spTree>
-  </p:cSld>
-  <p:clrMapOvr>
-    <a:masterClrMapping/>
-  </p:clrMapOvr>
-</p:sld>
-</file>
-
 <file path=ppt/slides/slide33.xml><?xml version="1.0" encoding="utf-8"?>
 <p:sld xmlns:a="http://schemas.openxmlformats.org/drawingml/2006/main" xmlns:p="http://schemas.openxmlformats.org/presentationml/2006/main" xmlns:r="http://schemas.openxmlformats.org/officeDocument/2006/relationships">
   <p:cSld>
@@ -27127,7 +27599,7 @@
                 </a:solidFill>
                 <a:latin typeface="Arial"/>
               </a:rPr>
-              <a:t>SLIDE 33 · APPENDIX A3</a:t>
+              <a:t>SLIDE 33 · APPENDIX A2</a:t>
             </a:r>
           </a:p>
         </p:txBody>
@@ -27169,7 +27641,7 @@
                 </a:solidFill>
                 <a:latin typeface="Georgia"/>
               </a:rPr>
-              <a:t>A3 — How far to trust each number</a:t>
+              <a:t>A2 — The regulatory detail</a:t>
             </a:r>
           </a:p>
         </p:txBody>
@@ -27298,6 +27770,572 @@
                 <a:latin typeface="Arial"/>
               </a:rPr>
               <a:t>33</a:t>
+            </a:r>
+          </a:p>
+        </p:txBody>
+      </p:sp>
+      <p:sp>
+        <p:nvSpPr>
+          <p:cNvPr id="8" name="TextBox 7"/>
+          <p:cNvSpPr txBox="1"/>
+          <p:nvPr/>
+        </p:nvSpPr>
+        <p:spPr>
+          <a:xfrm>
+            <a:off x="548640" y="1371600"/>
+            <a:ext cx="11094415" cy="162687"/>
+          </a:xfrm>
+          <a:prstGeom prst="rect">
+            <a:avLst/>
+          </a:prstGeom>
+          <a:noFill/>
+        </p:spPr>
+        <p:txBody>
+          <a:bodyPr wrap="square" lIns="0" rIns="0" tIns="0" bIns="0" anchor="t">
+            <a:spAutoFit/>
+          </a:bodyPr>
+          <a:lstStyle/>
+          <a:p>
+            <a:pPr algn="l">
+              <a:lnSpc>
+                <a:spcPct val="115000"/>
+              </a:lnSpc>
+              <a:spcAft>
+                <a:spcPts val="0"/>
+              </a:spcAft>
+            </a:pPr>
+            <a:r>
+              <a:rPr b="0" sz="1050" i="1">
+                <a:solidFill>
+                  <a:srgbClr val="98A4BC"/>
+                </a:solidFill>
+                <a:latin typeface="Arial"/>
+              </a:rPr>
+              <a:t>Use when someone wants the rule read out rather than summarised.</a:t>
+            </a:r>
+          </a:p>
+        </p:txBody>
+      </p:sp>
+      <p:sp>
+        <p:nvSpPr>
+          <p:cNvPr id="9" name="TextBox 8"/>
+          <p:cNvSpPr txBox="1"/>
+          <p:nvPr/>
+        </p:nvSpPr>
+        <p:spPr>
+          <a:xfrm>
+            <a:off x="548640" y="2037207"/>
+            <a:ext cx="11094415" cy="2627312"/>
+          </a:xfrm>
+          <a:prstGeom prst="rect">
+            <a:avLst/>
+          </a:prstGeom>
+          <a:noFill/>
+        </p:spPr>
+        <p:txBody>
+          <a:bodyPr wrap="square" lIns="0" rIns="0" tIns="0" bIns="0">
+            <a:spAutoFit/>
+          </a:bodyPr>
+          <a:lstStyle/>
+          <a:p>
+            <a:pPr>
+              <a:lnSpc>
+                <a:spcPct val="115000"/>
+              </a:lnSpc>
+              <a:spcAft>
+                <a:spcPts val="400"/>
+              </a:spcAft>
+            </a:pPr>
+            <a:r>
+              <a:rPr sz="1250" b="1">
+                <a:solidFill>
+                  <a:srgbClr val="E8A33D"/>
+                </a:solidFill>
+                <a:latin typeface="Arial"/>
+              </a:rPr>
+              <a:t>—  </a:t>
+            </a:r>
+            <a:r>
+              <a:rPr b="1" sz="1250" i="0">
+                <a:solidFill>
+                  <a:srgbClr val="E6ECF7"/>
+                </a:solidFill>
+                <a:latin typeface="Arial"/>
+              </a:rPr>
+              <a:t>Two persons direct the business.</a:t>
+            </a:r>
+            <a:r>
+              <a:rPr b="0" sz="1250" i="0">
+                <a:solidFill>
+                  <a:srgbClr val="E6ECF7"/>
+                </a:solidFill>
+                <a:latin typeface="Arial"/>
+              </a:rPr>
+              <a:t> European banking law (CRD art. 13) grants a licence only where "at least two persons effectively direct the business". That is the origin of Vier-Augen-Prinzip and the English phrase four eyes. They approve no individual change.</a:t>
+            </a:r>
+          </a:p>
+          <a:p>
+            <a:pPr>
+              <a:lnSpc>
+                <a:spcPct val="115000"/>
+              </a:lnSpc>
+              <a:spcAft>
+                <a:spcPts val="400"/>
+              </a:spcAft>
+            </a:pPr>
+            <a:r>
+              <a:rPr sz="1250" b="1">
+                <a:solidFill>
+                  <a:srgbClr val="E8A33D"/>
+                </a:solidFill>
+                <a:latin typeface="Arial"/>
+              </a:rPr>
+              <a:t>—  </a:t>
+            </a:r>
+            <a:r>
+              <a:rPr b="1" sz="1250" i="0">
+                <a:solidFill>
+                  <a:srgbClr val="E6ECF7"/>
+                </a:solidFill>
+                <a:latin typeface="Arial"/>
+              </a:rPr>
+              <a:t>Dual control on a sensitive action.</a:t>
+            </a:r>
+            <a:r>
+              <a:rPr b="0" sz="1250" i="0">
+                <a:solidFill>
+                  <a:srgbClr val="E6ECF7"/>
+                </a:solidFill>
+                <a:latin typeface="Arial"/>
+              </a:rPr>
+              <a:t> Basel defines it as two or more separate "entities (usually persons)" acting in concert. The Norwegian supervisor fined a savings bank in 2023 partly because no four-eyes check existed when an employee manually lowered a customer's money-laundering risk level.</a:t>
+            </a:r>
+          </a:p>
+          <a:p>
+            <a:pPr>
+              <a:lnSpc>
+                <a:spcPct val="115000"/>
+              </a:lnSpc>
+              <a:spcAft>
+                <a:spcPts val="400"/>
+              </a:spcAft>
+            </a:pPr>
+            <a:r>
+              <a:rPr sz="1250" b="1">
+                <a:solidFill>
+                  <a:srgbClr val="E8A33D"/>
+                </a:solidFill>
+                <a:latin typeface="Arial"/>
+              </a:rPr>
+              <a:t>—  </a:t>
+            </a:r>
+            <a:r>
+              <a:rPr b="1" sz="1250" i="0">
+                <a:solidFill>
+                  <a:srgbClr val="E6ECF7"/>
+                </a:solidFill>
+                <a:latin typeface="Arial"/>
+              </a:rPr>
+              <a:t>Change management before July 2025.</a:t>
+            </a:r>
+            <a:r>
+              <a:rPr b="0" sz="1250" i="0">
+                <a:solidFill>
+                  <a:srgbClr val="E6ECF7"/>
+                </a:solidFill>
+                <a:latin typeface="Arial"/>
+              </a:rPr>
+              <a:t> IKT-forskriften § 9 required procedures for handling changes, and that they be followed. It never asked for an approver.</a:t>
+            </a:r>
+          </a:p>
+          <a:p>
+            <a:pPr>
+              <a:lnSpc>
+                <a:spcPct val="115000"/>
+              </a:lnSpc>
+              <a:spcAft>
+                <a:spcPts val="400"/>
+              </a:spcAft>
+            </a:pPr>
+            <a:r>
+              <a:rPr sz="1250" b="1">
+                <a:solidFill>
+                  <a:srgbClr val="E8A33D"/>
+                </a:solidFill>
+                <a:latin typeface="Arial"/>
+              </a:rPr>
+              <a:t>—  </a:t>
+            </a:r>
+            <a:r>
+              <a:rPr b="1" sz="1250" i="0">
+                <a:solidFill>
+                  <a:srgbClr val="E6ECF7"/>
+                </a:solidFill>
+                <a:latin typeface="Arial"/>
+              </a:rPr>
+              <a:t>Change management since July 2025.</a:t>
+            </a:r>
+            <a:r>
+              <a:rPr b="0" sz="1250" i="0">
+                <a:solidFill>
+                  <a:srgbClr val="E6ECF7"/>
+                </a:solidFill>
+                <a:latin typeface="Arial"/>
+              </a:rPr>
+              <a:t> DORA (EU 2022/2554) art. 9(4)(e), with RTS 2024/1774 art. 17(1)(b): "the independence of the functions that approve changes and the functions responsible for requesting and implementing those changes". Every change recorded, tested, assessed, approved, implemented and verified. Policy "based on a risk assessment approach". Source code reviews defined as static and dynamic testing.</a:t>
+            </a:r>
+          </a:p>
+          <a:p>
+            <a:pPr>
+              <a:lnSpc>
+                <a:spcPct val="115000"/>
+              </a:lnSpc>
+              <a:spcAft>
+                <a:spcPts val="400"/>
+              </a:spcAft>
+            </a:pPr>
+            <a:r>
+              <a:rPr sz="1250" b="1">
+                <a:solidFill>
+                  <a:srgbClr val="E8A33D"/>
+                </a:solidFill>
+                <a:latin typeface="Arial"/>
+              </a:rPr>
+              <a:t>—  </a:t>
+            </a:r>
+            <a:r>
+              <a:rPr b="1" sz="1250" i="0">
+                <a:solidFill>
+                  <a:srgbClr val="E6ECF7"/>
+                </a:solidFill>
+                <a:latin typeface="Arial"/>
+              </a:rPr>
+              <a:t>Not defined:</a:t>
+            </a:r>
+            <a:r>
+              <a:rPr b="0" sz="1250" i="0">
+                <a:solidFill>
+                  <a:srgbClr val="E6ECF7"/>
+                </a:solidFill>
+                <a:latin typeface="Arial"/>
+              </a:rPr>
+              <a:t> function, independence. Elsewhere in the rulebook a function is a part of the organisation. Whether the approver must sit outside the implementing team is not stated.</a:t>
+            </a:r>
+          </a:p>
+        </p:txBody>
+      </p:sp>
+      <p:sp>
+        <p:nvSpPr>
+          <p:cNvPr id="10" name="TextBox 9"/>
+          <p:cNvSpPr txBox="1"/>
+          <p:nvPr/>
+        </p:nvSpPr>
+        <p:spPr>
+          <a:xfrm>
+            <a:off x="548640" y="5149151"/>
+            <a:ext cx="11094415" cy="325374"/>
+          </a:xfrm>
+          <a:prstGeom prst="rect">
+            <a:avLst/>
+          </a:prstGeom>
+          <a:noFill/>
+        </p:spPr>
+        <p:txBody>
+          <a:bodyPr wrap="square" lIns="0" rIns="0" tIns="0" bIns="0" anchor="t">
+            <a:spAutoFit/>
+          </a:bodyPr>
+          <a:lstStyle/>
+          <a:p>
+            <a:pPr algn="l">
+              <a:lnSpc>
+                <a:spcPct val="115000"/>
+              </a:lnSpc>
+              <a:spcAft>
+                <a:spcPts val="0"/>
+              </a:spcAft>
+            </a:pPr>
+            <a:r>
+              <a:rPr b="0" sz="1050" i="1">
+                <a:solidFill>
+                  <a:srgbClr val="98A4BC"/>
+                </a:solidFill>
+                <a:latin typeface="Arial"/>
+              </a:rPr>
+              <a:t>The art. 17 wording relies on two secondary reproductions that agree. Verify against EUR-Lex before anything is quoted externally. Two things in this deck are called DORA: the EU act here, and Google's DevOps Research and Assessment on slides 17 and 18.</a:t>
+            </a:r>
+          </a:p>
+        </p:txBody>
+      </p:sp>
+    </p:spTree>
+  </p:cSld>
+  <p:clrMapOvr>
+    <a:masterClrMapping/>
+  </p:clrMapOvr>
+</p:sld>
+</file>
+
+<file path=ppt/slides/slide34.xml><?xml version="1.0" encoding="utf-8"?>
+<p:sld xmlns:a="http://schemas.openxmlformats.org/drawingml/2006/main" xmlns:p="http://schemas.openxmlformats.org/presentationml/2006/main" xmlns:r="http://schemas.openxmlformats.org/officeDocument/2006/relationships">
+  <p:cSld>
+    <p:spTree>
+      <p:nvGrpSpPr>
+        <p:cNvPr id="1" name=""/>
+        <p:cNvGrpSpPr/>
+        <p:nvPr/>
+      </p:nvGrpSpPr>
+      <p:grpSpPr/>
+      <p:sp>
+        <p:nvSpPr>
+          <p:cNvPr id="2" name="Rectangle 1"/>
+          <p:cNvSpPr/>
+          <p:nvPr/>
+        </p:nvSpPr>
+        <p:spPr>
+          <a:xfrm>
+            <a:off x="0" y="0"/>
+            <a:ext cx="12191695" cy="6858000"/>
+          </a:xfrm>
+          <a:prstGeom prst="rect">
+            <a:avLst/>
+          </a:prstGeom>
+          <a:solidFill>
+            <a:srgbClr val="0E1420"/>
+          </a:solidFill>
+          <a:ln>
+            <a:noFill/>
+          </a:ln>
+          <a:effectLst/>
+        </p:spPr>
+        <p:style>
+          <a:lnRef idx="1">
+            <a:schemeClr val="accent1"/>
+          </a:lnRef>
+          <a:fillRef idx="3">
+            <a:schemeClr val="accent1"/>
+          </a:fillRef>
+          <a:effectRef idx="2">
+            <a:schemeClr val="accent1"/>
+          </a:effectRef>
+          <a:fontRef idx="minor">
+            <a:schemeClr val="lt1"/>
+          </a:fontRef>
+        </p:style>
+        <p:txBody>
+          <a:bodyPr rtlCol="0" anchor="ctr"/>
+          <a:lstStyle/>
+          <a:p>
+            <a:pPr algn="ctr"/>
+          </a:p>
+        </p:txBody>
+      </p:sp>
+      <p:sp>
+        <p:nvSpPr>
+          <p:cNvPr id="3" name="TextBox 2"/>
+          <p:cNvSpPr txBox="1"/>
+          <p:nvPr/>
+        </p:nvSpPr>
+        <p:spPr>
+          <a:xfrm>
+            <a:off x="548640" y="292608"/>
+            <a:ext cx="11094415" cy="228600"/>
+          </a:xfrm>
+          <a:prstGeom prst="rect">
+            <a:avLst/>
+          </a:prstGeom>
+          <a:noFill/>
+        </p:spPr>
+        <p:txBody>
+          <a:bodyPr wrap="square" lIns="0" rIns="0" tIns="0" bIns="0" anchor="t">
+            <a:spAutoFit/>
+          </a:bodyPr>
+          <a:lstStyle/>
+          <a:p>
+            <a:pPr algn="l">
+              <a:lnSpc>
+                <a:spcPct val="115000"/>
+              </a:lnSpc>
+              <a:spcAft>
+                <a:spcPts val="0"/>
+              </a:spcAft>
+            </a:pPr>
+            <a:r>
+              <a:rPr b="1" sz="950" i="0">
+                <a:solidFill>
+                  <a:srgbClr val="29D3E0"/>
+                </a:solidFill>
+                <a:latin typeface="Arial"/>
+              </a:rPr>
+              <a:t>SLIDE 34 · APPENDIX A3</a:t>
+            </a:r>
+          </a:p>
+        </p:txBody>
+      </p:sp>
+      <p:sp>
+        <p:nvSpPr>
+          <p:cNvPr id="4" name="TextBox 3"/>
+          <p:cNvSpPr txBox="1"/>
+          <p:nvPr/>
+        </p:nvSpPr>
+        <p:spPr>
+          <a:xfrm>
+            <a:off x="548640" y="530352"/>
+            <a:ext cx="11094415" cy="548640"/>
+          </a:xfrm>
+          <a:prstGeom prst="rect">
+            <a:avLst/>
+          </a:prstGeom>
+          <a:noFill/>
+        </p:spPr>
+        <p:txBody>
+          <a:bodyPr wrap="square" lIns="0" rIns="0" tIns="0" bIns="0" anchor="t">
+            <a:spAutoFit/>
+          </a:bodyPr>
+          <a:lstStyle/>
+          <a:p>
+            <a:pPr algn="l">
+              <a:lnSpc>
+                <a:spcPct val="115000"/>
+              </a:lnSpc>
+              <a:spcAft>
+                <a:spcPts val="0"/>
+              </a:spcAft>
+            </a:pPr>
+            <a:r>
+              <a:rPr b="1" sz="2800" i="0">
+                <a:solidFill>
+                  <a:srgbClr val="E6ECF7"/>
+                </a:solidFill>
+                <a:latin typeface="Georgia"/>
+              </a:rPr>
+              <a:t>A3 — How far to trust each number</a:t>
+            </a:r>
+          </a:p>
+        </p:txBody>
+      </p:sp>
+      <p:sp>
+        <p:nvSpPr>
+          <p:cNvPr id="5" name="Rectangle 4"/>
+          <p:cNvSpPr/>
+          <p:nvPr/>
+        </p:nvSpPr>
+        <p:spPr>
+          <a:xfrm>
+            <a:off x="548640" y="1115568"/>
+            <a:ext cx="1097280" cy="41148"/>
+          </a:xfrm>
+          <a:prstGeom prst="rect">
+            <a:avLst/>
+          </a:prstGeom>
+          <a:solidFill>
+            <a:srgbClr val="29D3E0"/>
+          </a:solidFill>
+          <a:ln>
+            <a:noFill/>
+          </a:ln>
+          <a:effectLst/>
+        </p:spPr>
+        <p:style>
+          <a:lnRef idx="1">
+            <a:schemeClr val="accent1"/>
+          </a:lnRef>
+          <a:fillRef idx="3">
+            <a:schemeClr val="accent1"/>
+          </a:fillRef>
+          <a:effectRef idx="2">
+            <a:schemeClr val="accent1"/>
+          </a:effectRef>
+          <a:fontRef idx="minor">
+            <a:schemeClr val="lt1"/>
+          </a:fontRef>
+        </p:style>
+        <p:txBody>
+          <a:bodyPr rtlCol="0" anchor="ctr"/>
+          <a:lstStyle/>
+          <a:p>
+            <a:pPr algn="ctr"/>
+          </a:p>
+        </p:txBody>
+      </p:sp>
+      <p:sp>
+        <p:nvSpPr>
+          <p:cNvPr id="6" name="TextBox 5"/>
+          <p:cNvSpPr txBox="1"/>
+          <p:nvPr/>
+        </p:nvSpPr>
+        <p:spPr>
+          <a:xfrm>
+            <a:off x="548640" y="6473952"/>
+            <a:ext cx="3657600" cy="228600"/>
+          </a:xfrm>
+          <a:prstGeom prst="rect">
+            <a:avLst/>
+          </a:prstGeom>
+          <a:noFill/>
+        </p:spPr>
+        <p:txBody>
+          <a:bodyPr wrap="square" lIns="0" rIns="0" tIns="0" bIns="0" anchor="t">
+            <a:spAutoFit/>
+          </a:bodyPr>
+          <a:lstStyle/>
+          <a:p>
+            <a:pPr algn="l">
+              <a:lnSpc>
+                <a:spcPct val="115000"/>
+              </a:lnSpc>
+              <a:spcAft>
+                <a:spcPts val="0"/>
+              </a:spcAft>
+            </a:pPr>
+            <a:r>
+              <a:rPr b="1" sz="950" i="0">
+                <a:solidFill>
+                  <a:srgbClr val="E6ECF7"/>
+                </a:solidFill>
+                <a:latin typeface="Arial"/>
+              </a:rPr>
+              <a:t>Build to Understand</a:t>
+            </a:r>
+          </a:p>
+        </p:txBody>
+      </p:sp>
+      <p:sp>
+        <p:nvSpPr>
+          <p:cNvPr id="7" name="TextBox 6"/>
+          <p:cNvSpPr txBox="1"/>
+          <p:nvPr/>
+        </p:nvSpPr>
+        <p:spPr>
+          <a:xfrm>
+            <a:off x="10728655" y="6473952"/>
+            <a:ext cx="914400" cy="228600"/>
+          </a:xfrm>
+          <a:prstGeom prst="rect">
+            <a:avLst/>
+          </a:prstGeom>
+          <a:noFill/>
+        </p:spPr>
+        <p:txBody>
+          <a:bodyPr wrap="square" lIns="0" rIns="0" tIns="0" bIns="0" anchor="t">
+            <a:spAutoFit/>
+          </a:bodyPr>
+          <a:lstStyle/>
+          <a:p>
+            <a:pPr algn="r">
+              <a:lnSpc>
+                <a:spcPct val="115000"/>
+              </a:lnSpc>
+              <a:spcAft>
+                <a:spcPts val="0"/>
+              </a:spcAft>
+            </a:pPr>
+            <a:r>
+              <a:rPr b="0" sz="950" i="0">
+                <a:solidFill>
+                  <a:srgbClr val="98A4BC"/>
+                </a:solidFill>
+                <a:latin typeface="Arial"/>
+              </a:rPr>
+              <a:t>34</a:t>
             </a:r>
           </a:p>
         </p:txBody>
@@ -28458,7 +29496,7 @@
 </p:sld>
 </file>
 
-<file path=ppt/slides/slide34.xml><?xml version="1.0" encoding="utf-8"?>
+<file path=ppt/slides/slide35.xml><?xml version="1.0" encoding="utf-8"?>
 <p:sld xmlns:a="http://schemas.openxmlformats.org/drawingml/2006/main" xmlns:p="http://schemas.openxmlformats.org/presentationml/2006/main" xmlns:r="http://schemas.openxmlformats.org/officeDocument/2006/relationships">
   <p:cSld>
     <p:spTree>
@@ -28545,11 +29583,11 @@
             <a:r>
               <a:rPr b="1" sz="950" i="0">
                 <a:solidFill>
-                  <a:srgbClr val="29D3E0"/>
+                  <a:srgbClr val="E8A33D"/>
                 </a:solidFill>
                 <a:latin typeface="Arial"/>
               </a:rPr>
-              <a:t>SLIDE 34 · APPENDIX A4</a:t>
+              <a:t>SLIDE 35 · APPENDIX A4</a:t>
             </a:r>
           </a:p>
         </p:txBody>
@@ -28719,7 +29757,7 @@
                 </a:solidFill>
                 <a:latin typeface="Arial"/>
               </a:rPr>
-              <a:t>34</a:t>
+              <a:t>35</a:t>
             </a:r>
           </a:p>
         </p:txBody>

--- a/presentations/what-is-the-second-pair-of-eyes-for.pptx
+++ b/presentations/what-is-the-second-pair-of-eyes-for.pptx
@@ -18011,8 +18011,8 @@
         </p:nvSpPr>
         <p:spPr>
           <a:xfrm>
-            <a:off x="548640" y="1780194"/>
-            <a:ext cx="11094415" cy="523697"/>
+            <a:off x="548640" y="1692912"/>
+            <a:ext cx="11094415" cy="785545"/>
           </a:xfrm>
           <a:prstGeom prst="rect">
             <a:avLst/>
@@ -18040,7 +18040,7 @@
                 </a:solidFill>
                 <a:latin typeface="Arial"/>
               </a:rPr>
-              <a:t>Chapter 04 tiered repositories and never said who does the tiering. This repository has to answer for itself, because the answer sets how strict everything after it should be.</a:t>
+              <a:t>Chapter 04 tiered repositories and never said who does the tiering. Every step after this one is stricter or lighter depending on the answer. Without one, this repository gets the same treatment as every other, whatever it holds.</a:t>
             </a:r>
           </a:p>
         </p:txBody>
@@ -18053,7 +18053,7 @@
         </p:nvSpPr>
         <p:spPr>
           <a:xfrm>
-            <a:off x="548640" y="2825100"/>
+            <a:off x="548640" y="2999665"/>
             <a:ext cx="11094415" cy="1389856"/>
           </a:xfrm>
           <a:prstGeom prst="rect">
@@ -18188,7 +18188,7 @@
         </p:nvSpPr>
         <p:spPr>
           <a:xfrm>
-            <a:off x="548640" y="4699588"/>
+            <a:off x="548640" y="4874154"/>
             <a:ext cx="54864" cy="746861"/>
           </a:xfrm>
           <a:prstGeom prst="rect">
@@ -18232,7 +18232,7 @@
         </p:nvSpPr>
         <p:spPr>
           <a:xfrm>
-            <a:off x="822959" y="4791028"/>
+            <a:off x="822959" y="4965594"/>
             <a:ext cx="10682935" cy="563981"/>
           </a:xfrm>
           <a:prstGeom prst="rect">
@@ -18261,7 +18261,7 @@
                 </a:solidFill>
                 <a:latin typeface="Arial"/>
               </a:rPr>
-              <a:t>One sentence in the README that a new joiner can find is more than most repositories have today.</a:t>
+              <a:t>It is also the risk assessment the rules ask for: a policy "based on a risk assessment approach", with nothing said about it having to be elaborate.</a:t>
             </a:r>
           </a:p>
         </p:txBody>
